--- a/docs/slides/ArcGIS-AI-Components-Walkthrough.pptx
+++ b/docs/slides/ArcGIS-AI-Components-Walkthrough.pptx
@@ -14,9 +14,10 @@
     <p:sldId id="262" r:id="rId8"/>
     <p:sldId id="263" r:id="rId9"/>
     <p:sldId id="264" r:id="rId10"/>
+    <p:sldId id="265" r:id="rId11"/>
   </p:sldIdLst>
   <p:notesMasterIdLst>
-    <p:notesMasterId r:id="rId11"/>
+    <p:notesMasterId r:id="rId12"/>
   </p:notesMasterIdLst>
   <p:sldSz cx="12191695" cy="6858000"/>
   <p:notesSz cx="6858000" cy="12191695"/>
@@ -534,6 +535,94 @@
             <a:fld id="{F7021451-1387-4CA6-816F-3879F97B5CBC}" type="slidenum">
               <a:rPr lang="en-US"/>
               <a:t>1</a:t>
+            </a:fld>
+            <a:endParaRPr lang="en-US"/>
+          </a:p>
+        </p:txBody>
+      </p:sp>
+    </p:spTree>
+    <p:extLst>
+      <p:ext uri="{BB962C8B-B14F-4D97-AF65-F5344CB8AC3E}">
+        <p14:creationId xmlns:p14="http://schemas.microsoft.com/office/powerpoint/2010/main" val="1024086991"/>
+      </p:ext>
+    </p:extLst>
+  </p:cSld>
+  <p:clrMapOvr>
+    <a:masterClrMapping/>
+  </p:clrMapOvr>
+</p:notes>
+</file>
+
+<file path=ppt/notesSlides/notesSlide10.xml><?xml version="1.0" encoding="utf-8"?>
+<p:notes xmlns:a="http://schemas.openxmlformats.org/drawingml/2006/main" xmlns:r="http://schemas.openxmlformats.org/officeDocument/2006/relationships" xmlns:p="http://schemas.openxmlformats.org/presentationml/2006/main">
+  <p:cSld>
+    <p:spTree>
+      <p:nvGrpSpPr>
+        <p:cNvPr id="1" name=""/>
+        <p:cNvGrpSpPr/>
+        <p:nvPr/>
+      </p:nvGrpSpPr>
+      <p:grpSpPr>
+        <a:xfrm>
+          <a:off x="0" y="0"/>
+          <a:ext cx="0" cy="0"/>
+          <a:chOff x="0" y="0"/>
+          <a:chExt cx="0" cy="0"/>
+        </a:xfrm>
+      </p:grpSpPr>
+      <p:sp>
+        <p:nvSpPr>
+          <p:cNvPr id="2" name="Slide Image Placeholder 1"/>
+          <p:cNvSpPr>
+            <a:spLocks noGrp="1" noRot="1" noChangeAspect="1"/>
+          </p:cNvSpPr>
+          <p:nvPr>
+            <p:ph type="sldImg"/>
+          </p:nvPr>
+        </p:nvSpPr>
+        <p:spPr/>
+      </p:sp>
+      <p:sp>
+        <p:nvSpPr>
+          <p:cNvPr id="3" name="Notes Placeholder 2"/>
+          <p:cNvSpPr>
+            <a:spLocks noGrp="1"/>
+          </p:cNvSpPr>
+          <p:nvPr>
+            <p:ph type="body" idx="1"/>
+          </p:nvPr>
+        </p:nvSpPr>
+        <p:spPr/>
+        <p:txBody>
+          <a:bodyPr/>
+          <a:lstStyle/>
+          <a:p>
+            <a:r>
+              <a:rPr lang="en-US" dirty="0"/>
+              <a:t/>
+            </a:r>
+            <a:endParaRPr lang="en-US" dirty="0"/>
+          </a:p>
+        </p:txBody>
+      </p:sp>
+      <p:sp>
+        <p:nvSpPr>
+          <p:cNvPr id="4" name="Slide Number Placeholder 3"/>
+          <p:cNvSpPr>
+            <a:spLocks noGrp="1"/>
+          </p:cNvSpPr>
+          <p:nvPr>
+            <p:ph type="sldNum" sz="quarter" idx="10"/>
+          </p:nvPr>
+        </p:nvSpPr>
+        <p:spPr/>
+        <p:txBody>
+          <a:bodyPr/>
+          <a:lstStyle/>
+          <a:p>
+            <a:fld id="{F7021451-1387-4CA6-816F-3879F97B5CBC}" type="slidenum">
+              <a:rPr lang="en-US"/>
+              <a:t>10</a:t>
             </a:fld>
             <a:endParaRPr lang="en-US"/>
           </a:p>
@@ -1857,6 +1946,729 @@
 </p:sld>
 </file>
 
+<file path=ppt/slides/slide10.xml><?xml version="1.0" encoding="utf-8"?>
+<p:sld xmlns:a="http://schemas.openxmlformats.org/drawingml/2006/main" xmlns:r="http://schemas.openxmlformats.org/officeDocument/2006/relationships" xmlns:p="http://schemas.openxmlformats.org/presentationml/2006/main">
+  <p:cSld name="Slide 10">
+    <p:bg>
+      <p:bgPr>
+        <a:solidFill>
+          <a:srgbClr val="0B2545"/>
+        </a:solidFill>
+      </p:bgPr>
+    </p:bg>
+    <p:spTree>
+      <p:nvGrpSpPr>
+        <p:cNvPr id="1" name=""/>
+        <p:cNvGrpSpPr/>
+        <p:nvPr/>
+      </p:nvGrpSpPr>
+      <p:grpSpPr>
+        <a:xfrm>
+          <a:off x="0" y="0"/>
+          <a:ext cx="0" cy="0"/>
+          <a:chOff x="0" y="0"/>
+          <a:chExt cx="0" cy="0"/>
+        </a:xfrm>
+      </p:grpSpPr>
+      <p:sp>
+        <p:nvSpPr>
+          <p:cNvPr id="2" name="Shape 0"/>
+          <p:cNvSpPr/>
+          <p:nvPr/>
+        </p:nvSpPr>
+        <p:spPr>
+          <a:xfrm>
+            <a:off x="-1463040" y="4023360"/>
+            <a:ext cx="4754880" cy="4754880"/>
+          </a:xfrm>
+          <a:prstGeom prst="ellipse">
+            <a:avLst/>
+          </a:prstGeom>
+          <a:solidFill>
+            <a:srgbClr val="13315C"/>
+          </a:solidFill>
+          <a:ln/>
+        </p:spPr>
+      </p:sp>
+      <p:sp>
+        <p:nvSpPr>
+          <p:cNvPr id="3" name="Shape 1"/>
+          <p:cNvSpPr/>
+          <p:nvPr/>
+        </p:nvSpPr>
+        <p:spPr>
+          <a:xfrm>
+            <a:off x="777240" y="685800"/>
+            <a:ext cx="914400" cy="914400"/>
+          </a:xfrm>
+          <a:prstGeom prst="ellipse">
+            <a:avLst/>
+          </a:prstGeom>
+          <a:solidFill>
+            <a:srgbClr val="E8A33D"/>
+          </a:solidFill>
+          <a:ln/>
+        </p:spPr>
+      </p:sp>
+      <p:pic>
+        <p:nvPicPr>
+          <p:cNvPr id="4" name="Image 0" descr="preencoded.png">    </p:cNvPr>
+          <p:cNvPicPr>
+            <a:picLocks noChangeAspect="1"/>
+          </p:cNvPicPr>
+          <p:nvPr/>
+        </p:nvPicPr>
+        <p:blipFill>
+          <a:blip r:embed="rId1"/>
+          <a:stretch>
+            <a:fillRect/>
+          </a:stretch>
+        </p:blipFill>
+        <p:spPr>
+          <a:xfrm>
+            <a:off x="1014984" y="923544"/>
+            <a:ext cx="438912" cy="438912"/>
+          </a:xfrm>
+          <a:prstGeom prst="rect">
+            <a:avLst/>
+          </a:prstGeom>
+        </p:spPr>
+      </p:pic>
+      <p:sp>
+        <p:nvSpPr>
+          <p:cNvPr id="5" name="Text 2"/>
+          <p:cNvSpPr/>
+          <p:nvPr/>
+        </p:nvSpPr>
+        <p:spPr>
+          <a:xfrm>
+            <a:off x="1874520" y="777240"/>
+            <a:ext cx="9601200" cy="731520"/>
+          </a:xfrm>
+          <a:prstGeom prst="rect">
+            <a:avLst/>
+          </a:prstGeom>
+          <a:noFill/>
+          <a:ln/>
+        </p:spPr>
+        <p:txBody>
+          <a:bodyPr wrap="square" lIns="0" tIns="0" rIns="0" bIns="0" rtlCol="0" anchor="ctr"/>
+          <a:lstStyle/>
+          <a:p>
+            <a:pPr indent="0" marL="0">
+              <a:buNone/>
+            </a:pPr>
+            <a:r>
+              <a:rPr lang="en-US" sz="2800" b="1" dirty="0">
+                <a:solidFill>
+                  <a:srgbClr val="FFFFFF"/>
+                </a:solidFill>
+                <a:latin typeface="Bookman Old Style" pitchFamily="34" charset="0"/>
+                <a:ea typeface="Bookman Old Style" pitchFamily="34" charset="-122"/>
+                <a:cs typeface="Bookman Old Style" pitchFamily="34" charset="-120"/>
+              </a:rPr>
+              <a:t>Guidelines to expedite the next build</a:t>
+            </a:r>
+            <a:endParaRPr lang="en-US" sz="2800" dirty="0"/>
+          </a:p>
+        </p:txBody>
+      </p:sp>
+      <p:pic>
+        <p:nvPicPr>
+          <p:cNvPr id="6" name="Image 1" descr="preencoded.png">    </p:cNvPr>
+          <p:cNvPicPr>
+            <a:picLocks noChangeAspect="1"/>
+          </p:cNvPicPr>
+          <p:nvPr/>
+        </p:nvPicPr>
+        <p:blipFill>
+          <a:blip r:embed="rId2"/>
+          <a:stretch>
+            <a:fillRect/>
+          </a:stretch>
+        </p:blipFill>
+        <p:spPr>
+          <a:xfrm>
+            <a:off x="868680" y="2002536"/>
+            <a:ext cx="310896" cy="310896"/>
+          </a:xfrm>
+          <a:prstGeom prst="rect">
+            <a:avLst/>
+          </a:prstGeom>
+        </p:spPr>
+      </p:pic>
+      <p:sp>
+        <p:nvSpPr>
+          <p:cNvPr id="7" name="Text 3"/>
+          <p:cNvSpPr/>
+          <p:nvPr/>
+        </p:nvSpPr>
+        <p:spPr>
+          <a:xfrm>
+            <a:off x="1371600" y="1965960"/>
+            <a:ext cx="10058400" cy="502920"/>
+          </a:xfrm>
+          <a:prstGeom prst="rect">
+            <a:avLst/>
+          </a:prstGeom>
+          <a:noFill/>
+          <a:ln/>
+        </p:spPr>
+        <p:txBody>
+          <a:bodyPr wrap="square" lIns="0" tIns="0" rIns="0" bIns="0" rtlCol="0" anchor="ctr"/>
+          <a:lstStyle/>
+          <a:p>
+            <a:pPr indent="0" marL="0">
+              <a:lnSpc>
+                <a:spcPts val="1800"/>
+              </a:lnSpc>
+              <a:buNone/>
+            </a:pPr>
+            <a:r>
+              <a:rPr lang="en-US" sz="1500" b="1" dirty="0">
+                <a:solidFill>
+                  <a:srgbClr val="FFFFFF"/>
+                </a:solidFill>
+                <a:latin typeface="Calibri" pitchFamily="34" charset="0"/>
+                <a:ea typeface="Calibri" pitchFamily="34" charset="-122"/>
+                <a:cs typeface="Calibri" pitchFamily="34" charset="-120"/>
+              </a:rPr>
+              <a:t>Start the upstream prep first.  </a:t>
+            </a:r>
+            <a:pPr indent="0" marL="0">
+              <a:lnSpc>
+                <a:spcPts val="1800"/>
+              </a:lnSpc>
+              <a:buNone/>
+            </a:pPr>
+            <a:r>
+              <a:rPr lang="en-US" sz="1500" dirty="0">
+                <a:solidFill>
+                  <a:srgbClr val="C9D6E5"/>
+                </a:solidFill>
+                <a:latin typeface="Calibri" pitchFamily="34" charset="0"/>
+                <a:ea typeface="Calibri" pitchFamily="34" charset="-122"/>
+                <a:cs typeface="Calibri" pitchFamily="34" charset="-120"/>
+              </a:rPr>
+              <a:t>Embeddings + OAuth are the long pole — they gate all app code.</a:t>
+            </a:r>
+            <a:endParaRPr lang="en-US" sz="1500" dirty="0"/>
+          </a:p>
+        </p:txBody>
+      </p:sp>
+      <p:pic>
+        <p:nvPicPr>
+          <p:cNvPr id="8" name="Image 2" descr="preencoded.png">    </p:cNvPr>
+          <p:cNvPicPr>
+            <a:picLocks noChangeAspect="1"/>
+          </p:cNvPicPr>
+          <p:nvPr/>
+        </p:nvPicPr>
+        <p:blipFill>
+          <a:blip r:embed="rId3"/>
+          <a:stretch>
+            <a:fillRect/>
+          </a:stretch>
+        </p:blipFill>
+        <p:spPr>
+          <a:xfrm>
+            <a:off x="868680" y="2660904"/>
+            <a:ext cx="310896" cy="310896"/>
+          </a:xfrm>
+          <a:prstGeom prst="rect">
+            <a:avLst/>
+          </a:prstGeom>
+        </p:spPr>
+      </p:pic>
+      <p:sp>
+        <p:nvSpPr>
+          <p:cNvPr id="9" name="Text 4"/>
+          <p:cNvSpPr/>
+          <p:nvPr/>
+        </p:nvSpPr>
+        <p:spPr>
+          <a:xfrm>
+            <a:off x="1371600" y="2624328"/>
+            <a:ext cx="10058400" cy="502920"/>
+          </a:xfrm>
+          <a:prstGeom prst="rect">
+            <a:avLst/>
+          </a:prstGeom>
+          <a:noFill/>
+          <a:ln/>
+        </p:spPr>
+        <p:txBody>
+          <a:bodyPr wrap="square" lIns="0" tIns="0" rIns="0" bIns="0" rtlCol="0" anchor="ctr"/>
+          <a:lstStyle/>
+          <a:p>
+            <a:pPr indent="0" marL="0">
+              <a:lnSpc>
+                <a:spcPts val="1800"/>
+              </a:lnSpc>
+              <a:buNone/>
+            </a:pPr>
+            <a:r>
+              <a:rPr lang="en-US" sz="1500" b="1" dirty="0">
+                <a:solidFill>
+                  <a:srgbClr val="FFFFFF"/>
+                </a:solidFill>
+                <a:latin typeface="Calibri" pitchFamily="34" charset="0"/>
+                <a:ea typeface="Calibri" pitchFamily="34" charset="-122"/>
+                <a:cs typeface="Calibri" pitchFamily="34" charset="-120"/>
+              </a:rPr>
+              <a:t>Verify against docs, not filenames.  </a:t>
+            </a:r>
+            <a:pPr indent="0" marL="0">
+              <a:lnSpc>
+                <a:spcPts val="1800"/>
+              </a:lnSpc>
+              <a:buNone/>
+            </a:pPr>
+            <a:r>
+              <a:rPr lang="en-US" sz="1500" dirty="0">
+                <a:solidFill>
+                  <a:srgbClr val="C9D6E5"/>
+                </a:solidFill>
+                <a:latin typeface="Calibri" pitchFamily="34" charset="0"/>
+                <a:ea typeface="Calibri" pitchFamily="34" charset="-122"/>
+                <a:cs typeface="Calibri" pitchFamily="34" charset="-120"/>
+              </a:rPr>
+              <a:t>Confirm every element/version/API against developers.arcgis.com.</a:t>
+            </a:r>
+            <a:endParaRPr lang="en-US" sz="1500" dirty="0"/>
+          </a:p>
+        </p:txBody>
+      </p:sp>
+      <p:pic>
+        <p:nvPicPr>
+          <p:cNvPr id="10" name="Image 3" descr="preencoded.png">    </p:cNvPr>
+          <p:cNvPicPr>
+            <a:picLocks noChangeAspect="1"/>
+          </p:cNvPicPr>
+          <p:nvPr/>
+        </p:nvPicPr>
+        <p:blipFill>
+          <a:blip r:embed="rId4"/>
+          <a:stretch>
+            <a:fillRect/>
+          </a:stretch>
+        </p:blipFill>
+        <p:spPr>
+          <a:xfrm>
+            <a:off x="868680" y="3319272"/>
+            <a:ext cx="310896" cy="310896"/>
+          </a:xfrm>
+          <a:prstGeom prst="rect">
+            <a:avLst/>
+          </a:prstGeom>
+        </p:spPr>
+      </p:pic>
+      <p:sp>
+        <p:nvSpPr>
+          <p:cNvPr id="11" name="Text 5"/>
+          <p:cNvSpPr/>
+          <p:nvPr/>
+        </p:nvSpPr>
+        <p:spPr>
+          <a:xfrm>
+            <a:off x="1371600" y="3282696"/>
+            <a:ext cx="10058400" cy="502920"/>
+          </a:xfrm>
+          <a:prstGeom prst="rect">
+            <a:avLst/>
+          </a:prstGeom>
+          <a:noFill/>
+          <a:ln/>
+        </p:spPr>
+        <p:txBody>
+          <a:bodyPr wrap="square" lIns="0" tIns="0" rIns="0" bIns="0" rtlCol="0" anchor="ctr"/>
+          <a:lstStyle/>
+          <a:p>
+            <a:pPr indent="0" marL="0">
+              <a:lnSpc>
+                <a:spcPts val="1800"/>
+              </a:lnSpc>
+              <a:buNone/>
+            </a:pPr>
+            <a:r>
+              <a:rPr lang="en-US" sz="1500" b="1" dirty="0">
+                <a:solidFill>
+                  <a:srgbClr val="FFFFFF"/>
+                </a:solidFill>
+                <a:latin typeface="Calibri" pitchFamily="34" charset="0"/>
+                <a:ea typeface="Calibri" pitchFamily="34" charset="-122"/>
+                <a:cs typeface="Calibri" pitchFamily="34" charset="-120"/>
+              </a:rPr>
+              <a:t>Prefer narrow-schema reference layers.  </a:t>
+            </a:r>
+            <a:pPr indent="0" marL="0">
+              <a:lnSpc>
+                <a:spcPts val="1800"/>
+              </a:lnSpc>
+              <a:buNone/>
+            </a:pPr>
+            <a:r>
+              <a:rPr lang="en-US" sz="1500" dirty="0">
+                <a:solidFill>
+                  <a:srgbClr val="C9D6E5"/>
+                </a:solidFill>
+                <a:latin typeface="Calibri" pitchFamily="34" charset="0"/>
+                <a:ea typeface="Calibri" pitchFamily="34" charset="-122"/>
+                <a:cs typeface="Calibri" pitchFamily="34" charset="-120"/>
+              </a:rPr>
+              <a:t>Wide composite-index layers 504 the embedding pipeline.</a:t>
+            </a:r>
+            <a:endParaRPr lang="en-US" sz="1500" dirty="0"/>
+          </a:p>
+        </p:txBody>
+      </p:sp>
+      <p:pic>
+        <p:nvPicPr>
+          <p:cNvPr id="12" name="Image 4" descr="preencoded.png">    </p:cNvPr>
+          <p:cNvPicPr>
+            <a:picLocks noChangeAspect="1"/>
+          </p:cNvPicPr>
+          <p:nvPr/>
+        </p:nvPicPr>
+        <p:blipFill>
+          <a:blip r:embed="rId5"/>
+          <a:stretch>
+            <a:fillRect/>
+          </a:stretch>
+        </p:blipFill>
+        <p:spPr>
+          <a:xfrm>
+            <a:off x="868680" y="3977640"/>
+            <a:ext cx="310896" cy="310896"/>
+          </a:xfrm>
+          <a:prstGeom prst="rect">
+            <a:avLst/>
+          </a:prstGeom>
+        </p:spPr>
+      </p:pic>
+      <p:sp>
+        <p:nvSpPr>
+          <p:cNvPr id="13" name="Text 6"/>
+          <p:cNvSpPr/>
+          <p:nvPr/>
+        </p:nvSpPr>
+        <p:spPr>
+          <a:xfrm>
+            <a:off x="1371600" y="3941064"/>
+            <a:ext cx="10058400" cy="502920"/>
+          </a:xfrm>
+          <a:prstGeom prst="rect">
+            <a:avLst/>
+          </a:prstGeom>
+          <a:noFill/>
+          <a:ln/>
+        </p:spPr>
+        <p:txBody>
+          <a:bodyPr wrap="square" lIns="0" tIns="0" rIns="0" bIns="0" rtlCol="0" anchor="ctr"/>
+          <a:lstStyle/>
+          <a:p>
+            <a:pPr indent="0" marL="0">
+              <a:lnSpc>
+                <a:spcPts val="1800"/>
+              </a:lnSpc>
+              <a:buNone/>
+            </a:pPr>
+            <a:r>
+              <a:rPr lang="en-US" sz="1500" b="1" dirty="0">
+                <a:solidFill>
+                  <a:srgbClr val="FFFFFF"/>
+                </a:solidFill>
+                <a:latin typeface="Calibri" pitchFamily="34" charset="0"/>
+                <a:ea typeface="Calibri" pitchFamily="34" charset="-122"/>
+                <a:cs typeface="Calibri" pitchFamily="34" charset="-120"/>
+              </a:rPr>
+              <a:t>Write pointed, data-querying prompts.  </a:t>
+            </a:r>
+            <a:pPr indent="0" marL="0">
+              <a:lnSpc>
+                <a:spcPts val="1800"/>
+              </a:lnSpc>
+              <a:buNone/>
+            </a:pPr>
+            <a:r>
+              <a:rPr lang="en-US" sz="1500" dirty="0">
+                <a:solidFill>
+                  <a:srgbClr val="C9D6E5"/>
+                </a:solidFill>
+                <a:latin typeface="Calibri" pitchFamily="34" charset="0"/>
+                <a:ea typeface="Calibri" pitchFamily="34" charset="-122"/>
+                <a:cs typeface="Calibri" pitchFamily="34" charset="-120"/>
+              </a:rPr>
+              <a:t>Never demo schema introspection; force results that reconcile.</a:t>
+            </a:r>
+            <a:endParaRPr lang="en-US" sz="1500" dirty="0"/>
+          </a:p>
+        </p:txBody>
+      </p:sp>
+      <p:pic>
+        <p:nvPicPr>
+          <p:cNvPr id="14" name="Image 5" descr="preencoded.png">    </p:cNvPr>
+          <p:cNvPicPr>
+            <a:picLocks noChangeAspect="1"/>
+          </p:cNvPicPr>
+          <p:nvPr/>
+        </p:nvPicPr>
+        <p:blipFill>
+          <a:blip r:embed="rId6"/>
+          <a:stretch>
+            <a:fillRect/>
+          </a:stretch>
+        </p:blipFill>
+        <p:spPr>
+          <a:xfrm>
+            <a:off x="868680" y="4636008"/>
+            <a:ext cx="310896" cy="310896"/>
+          </a:xfrm>
+          <a:prstGeom prst="rect">
+            <a:avLst/>
+          </a:prstGeom>
+        </p:spPr>
+      </p:pic>
+      <p:sp>
+        <p:nvSpPr>
+          <p:cNvPr id="15" name="Text 7"/>
+          <p:cNvSpPr/>
+          <p:nvPr/>
+        </p:nvSpPr>
+        <p:spPr>
+          <a:xfrm>
+            <a:off x="1371600" y="4599432"/>
+            <a:ext cx="10058400" cy="502920"/>
+          </a:xfrm>
+          <a:prstGeom prst="rect">
+            <a:avLst/>
+          </a:prstGeom>
+          <a:noFill/>
+          <a:ln/>
+        </p:spPr>
+        <p:txBody>
+          <a:bodyPr wrap="square" lIns="0" tIns="0" rIns="0" bIns="0" rtlCol="0" anchor="ctr"/>
+          <a:lstStyle/>
+          <a:p>
+            <a:pPr indent="0" marL="0">
+              <a:lnSpc>
+                <a:spcPts val="1800"/>
+              </a:lnSpc>
+              <a:buNone/>
+            </a:pPr>
+            <a:r>
+              <a:rPr lang="en-US" sz="1500" b="1" dirty="0">
+                <a:solidFill>
+                  <a:srgbClr val="FFFFFF"/>
+                </a:solidFill>
+                <a:latin typeface="Calibri" pitchFamily="34" charset="0"/>
+                <a:ea typeface="Calibri" pitchFamily="34" charset="-122"/>
+                <a:cs typeface="Calibri" pitchFamily="34" charset="-120"/>
+              </a:rPr>
+              <a:t>Treat reasoning gaps as Phase 2.  </a:t>
+            </a:r>
+            <a:pPr indent="0" marL="0">
+              <a:lnSpc>
+                <a:spcPts val="1800"/>
+              </a:lnSpc>
+              <a:buNone/>
+            </a:pPr>
+            <a:r>
+              <a:rPr lang="en-US" sz="1500" dirty="0">
+                <a:solidFill>
+                  <a:srgbClr val="C9D6E5"/>
+                </a:solidFill>
+                <a:latin typeface="Calibri" pitchFamily="34" charset="0"/>
+                <a:ea typeface="Calibri" pitchFamily="34" charset="-122"/>
+                <a:cs typeface="Calibri" pitchFamily="34" charset="-120"/>
+              </a:rPr>
+              <a:t>Comparison &amp; query-direction are agent-shaped, not layer-shaped.</a:t>
+            </a:r>
+            <a:endParaRPr lang="en-US" sz="1500" dirty="0"/>
+          </a:p>
+        </p:txBody>
+      </p:sp>
+      <p:sp>
+        <p:nvSpPr>
+          <p:cNvPr id="16" name="Shape 8"/>
+          <p:cNvSpPr/>
+          <p:nvPr/>
+        </p:nvSpPr>
+        <p:spPr>
+          <a:xfrm>
+            <a:off x="822960" y="5440680"/>
+            <a:ext cx="10515600" cy="914400"/>
+          </a:xfrm>
+          <a:prstGeom prst="roundRect">
+            <a:avLst>
+              <a:gd name="adj" fmla="val 8000"/>
+            </a:avLst>
+          </a:prstGeom>
+          <a:solidFill>
+            <a:srgbClr val="13315C"/>
+          </a:solidFill>
+          <a:ln/>
+        </p:spPr>
+      </p:sp>
+      <p:sp>
+        <p:nvSpPr>
+          <p:cNvPr id="17" name="Text 9"/>
+          <p:cNvSpPr/>
+          <p:nvPr/>
+        </p:nvSpPr>
+        <p:spPr>
+          <a:xfrm>
+            <a:off x="1097280" y="5669280"/>
+            <a:ext cx="10058400" cy="457200"/>
+          </a:xfrm>
+          <a:prstGeom prst="rect">
+            <a:avLst/>
+          </a:prstGeom>
+          <a:noFill/>
+          <a:ln/>
+        </p:spPr>
+        <p:txBody>
+          <a:bodyPr wrap="square" lIns="0" tIns="0" rIns="0" bIns="0" rtlCol="0" anchor="ctr"/>
+          <a:lstStyle/>
+          <a:p>
+            <a:pPr indent="0" marL="0">
+              <a:buNone/>
+            </a:pPr>
+            <a:r>
+              <a:rPr lang="en-US" sz="1350" b="1" dirty="0">
+                <a:solidFill>
+                  <a:srgbClr val="E8A33D"/>
+                </a:solidFill>
+                <a:latin typeface="Calibri" pitchFamily="34" charset="0"/>
+                <a:ea typeface="Calibri" pitchFamily="34" charset="-122"/>
+                <a:cs typeface="Calibri" pitchFamily="34" charset="-120"/>
+              </a:rPr>
+              <a:t>Read next:  </a:t>
+            </a:r>
+            <a:pPr indent="0" marL="0">
+              <a:buNone/>
+            </a:pPr>
+            <a:r>
+              <a:rPr lang="en-US" sz="1350" b="1" dirty="0">
+                <a:solidFill>
+                  <a:srgbClr val="FFFFFF"/>
+                </a:solidFill>
+                <a:latin typeface="Calibri" pitchFamily="34" charset="0"/>
+                <a:ea typeface="Calibri" pitchFamily="34" charset="-122"/>
+                <a:cs typeface="Calibri" pitchFamily="34" charset="-120"/>
+              </a:rPr>
+              <a:t>WALKTHROUGH.md</a:t>
+            </a:r>
+            <a:pPr indent="0" marL="0">
+              <a:buNone/>
+            </a:pPr>
+            <a:r>
+              <a:rPr lang="en-US" sz="1350" dirty="0">
+                <a:solidFill>
+                  <a:srgbClr val="C9D6E5"/>
+                </a:solidFill>
+                <a:latin typeface="Calibri" pitchFamily="34" charset="0"/>
+                <a:ea typeface="Calibri" pitchFamily="34" charset="-122"/>
+                <a:cs typeface="Calibri" pitchFamily="34" charset="-120"/>
+              </a:rPr>
+              <a:t> (build)  ·  </a:t>
+            </a:r>
+            <a:pPr indent="0" marL="0">
+              <a:buNone/>
+            </a:pPr>
+            <a:r>
+              <a:rPr lang="en-US" sz="1350" b="1" dirty="0">
+                <a:solidFill>
+                  <a:srgbClr val="FFFFFF"/>
+                </a:solidFill>
+                <a:latin typeface="Calibri" pitchFamily="34" charset="0"/>
+                <a:ea typeface="Calibri" pitchFamily="34" charset="-122"/>
+                <a:cs typeface="Calibri" pitchFamily="34" charset="-120"/>
+              </a:rPr>
+              <a:t>LESSONS-LEARNED.md</a:t>
+            </a:r>
+            <a:pPr indent="0" marL="0">
+              <a:buNone/>
+            </a:pPr>
+            <a:r>
+              <a:rPr lang="en-US" sz="1350" dirty="0">
+                <a:solidFill>
+                  <a:srgbClr val="C9D6E5"/>
+                </a:solidFill>
+                <a:latin typeface="Calibri" pitchFamily="34" charset="0"/>
+                <a:ea typeface="Calibri" pitchFamily="34" charset="-122"/>
+                <a:cs typeface="Calibri" pitchFamily="34" charset="-120"/>
+              </a:rPr>
+              <a:t> (why)  ·  </a:t>
+            </a:r>
+            <a:pPr indent="0" marL="0">
+              <a:buNone/>
+            </a:pPr>
+            <a:r>
+              <a:rPr lang="en-US" sz="1350" b="1" dirty="0">
+                <a:solidFill>
+                  <a:srgbClr val="FFFFFF"/>
+                </a:solidFill>
+                <a:latin typeface="Calibri" pitchFamily="34" charset="0"/>
+                <a:ea typeface="Calibri" pitchFamily="34" charset="-122"/>
+                <a:cs typeface="Calibri" pitchFamily="34" charset="-120"/>
+              </a:rPr>
+              <a:t>DEMO.md</a:t>
+            </a:r>
+            <a:pPr indent="0" marL="0">
+              <a:buNone/>
+            </a:pPr>
+            <a:r>
+              <a:rPr lang="en-US" sz="1350" dirty="0">
+                <a:solidFill>
+                  <a:srgbClr val="C9D6E5"/>
+                </a:solidFill>
+                <a:latin typeface="Calibri" pitchFamily="34" charset="0"/>
+                <a:ea typeface="Calibri" pitchFamily="34" charset="-122"/>
+                <a:cs typeface="Calibri" pitchFamily="34" charset="-120"/>
+              </a:rPr>
+              <a:t> (present)  ·  </a:t>
+            </a:r>
+            <a:pPr indent="0" marL="0">
+              <a:buNone/>
+            </a:pPr>
+            <a:r>
+              <a:rPr lang="en-US" sz="1350" b="1" dirty="0">
+                <a:solidFill>
+                  <a:srgbClr val="FFFFFF"/>
+                </a:solidFill>
+                <a:latin typeface="Calibri" pitchFamily="34" charset="0"/>
+                <a:ea typeface="Calibri" pitchFamily="34" charset="-122"/>
+                <a:cs typeface="Calibri" pitchFamily="34" charset="-120"/>
+              </a:rPr>
+              <a:t>CLAUDE.md</a:t>
+            </a:r>
+            <a:pPr indent="0" marL="0">
+              <a:buNone/>
+            </a:pPr>
+            <a:r>
+              <a:rPr lang="en-US" sz="1350" dirty="0">
+                <a:solidFill>
+                  <a:srgbClr val="C9D6E5"/>
+                </a:solidFill>
+                <a:latin typeface="Calibri" pitchFamily="34" charset="0"/>
+                <a:ea typeface="Calibri" pitchFamily="34" charset="-122"/>
+                <a:cs typeface="Calibri" pitchFamily="34" charset="-120"/>
+              </a:rPr>
+              <a:t> (full context)</a:t>
+            </a:r>
+            <a:endParaRPr lang="en-US" sz="1350" dirty="0"/>
+          </a:p>
+        </p:txBody>
+      </p:sp>
+    </p:spTree>
+  </p:cSld>
+  <p:clrMapOvr>
+    <a:masterClrMapping/>
+  </p:clrMapOvr>
+</p:sld>
+</file>
+
 <file path=ppt/slides/slide2.xml><?xml version="1.0" encoding="utf-8"?>
 <p:sld xmlns:a="http://schemas.openxmlformats.org/drawingml/2006/main" xmlns:r="http://schemas.openxmlformats.org/officeDocument/2006/relationships" xmlns:p="http://schemas.openxmlformats.org/presentationml/2006/main">
   <p:cSld name="Slide 2">
@@ -2857,7 +3669,7 @@
                 <a:ea typeface="Bookman Old Style" pitchFamily="34" charset="-122"/>
                 <a:cs typeface="Bookman Old Style" pitchFamily="34" charset="-120"/>
               </a:rPr>
-              <a:t>The stack — and why each piece</a:t>
+              <a:t>The GIS side comes first</a:t>
             </a:r>
             <a:endParaRPr lang="en-US" sz="3000" dirty="0"/>
           </a:p>
@@ -2865,36 +3677,82 @@
       </p:sp>
       <p:sp>
         <p:nvSpPr>
-          <p:cNvPr id="3" name="Shape 1"/>
-          <p:cNvSpPr/>
-          <p:nvPr/>
-        </p:nvSpPr>
-        <p:spPr>
-          <a:xfrm>
-            <a:off x="502920" y="1371600"/>
-            <a:ext cx="11201400" cy="786384"/>
+          <p:cNvPr id="3" name="Text 1"/>
+          <p:cNvSpPr/>
+          <p:nvPr/>
+        </p:nvSpPr>
+        <p:spPr>
+          <a:xfrm>
+            <a:off x="502920" y="1078992"/>
+            <a:ext cx="10972800" cy="548640"/>
+          </a:xfrm>
+          <a:prstGeom prst="rect">
+            <a:avLst/>
+          </a:prstGeom>
+          <a:noFill/>
+          <a:ln/>
+        </p:spPr>
+        <p:txBody>
+          <a:bodyPr wrap="square" lIns="0" tIns="0" rIns="0" bIns="0" rtlCol="0" anchor="ctr"/>
+          <a:lstStyle/>
+          <a:p>
+            <a:pPr indent="0" marL="0">
+              <a:buNone/>
+            </a:pPr>
+            <a:r>
+              <a:rPr lang="en-US" sz="1400" dirty="0">
+                <a:solidFill>
+                  <a:srgbClr val="5B6B7F"/>
+                </a:solidFill>
+                <a:latin typeface="Calibri" pitchFamily="34" charset="0"/>
+                <a:ea typeface="Calibri" pitchFamily="34" charset="-122"/>
+                <a:cs typeface="Calibri" pitchFamily="34" charset="-120"/>
+              </a:rPr>
+              <a:t>Answer quality comes from ArcGIS Online configuration, not app code. Do both — in order — before you touch the app.</a:t>
+            </a:r>
+            <a:endParaRPr lang="en-US" sz="1400" dirty="0"/>
+          </a:p>
+        </p:txBody>
+      </p:sp>
+      <p:sp>
+        <p:nvSpPr>
+          <p:cNvPr id="4" name="Shape 2"/>
+          <p:cNvSpPr/>
+          <p:nvPr/>
+        </p:nvSpPr>
+        <p:spPr>
+          <a:xfrm>
+            <a:off x="502920" y="1783080"/>
+            <a:ext cx="5486400" cy="3200400"/>
           </a:xfrm>
           <a:prstGeom prst="roundRect">
             <a:avLst>
-              <a:gd name="adj" fmla="val 9302"/>
+              <a:gd name="adj" fmla="val 2857"/>
             </a:avLst>
           </a:prstGeom>
           <a:solidFill>
             <a:srgbClr val="F4F7FA"/>
           </a:solidFill>
           <a:ln/>
-        </p:spPr>
-      </p:sp>
-      <p:sp>
-        <p:nvSpPr>
-          <p:cNvPr id="4" name="Shape 2"/>
-          <p:cNvSpPr/>
-          <p:nvPr/>
-        </p:nvSpPr>
-        <p:spPr>
-          <a:xfrm>
-            <a:off x="713232" y="1463040"/>
-            <a:ext cx="603504" cy="603504"/>
+          <a:effectLst>
+            <a:outerShdw sx="100000" sy="100000" kx="0" ky="0" algn="bl" rotWithShape="0" blurRad="88900" dist="38100" dir="5400000">
+              <a:srgbClr val="000000">
+                <a:alpha val="12000"/>
+              </a:srgbClr>
+            </a:outerShdw>
+          </a:effectLst>
+        </p:spPr>
+      </p:sp>
+      <p:sp>
+        <p:nvSpPr>
+          <p:cNvPr id="5" name="Shape 3"/>
+          <p:cNvSpPr/>
+          <p:nvPr/>
+        </p:nvSpPr>
+        <p:spPr>
+          <a:xfrm>
+            <a:off x="868680" y="2103120"/>
+            <a:ext cx="868680" cy="868680"/>
           </a:xfrm>
           <a:prstGeom prst="ellipse">
             <a:avLst/>
@@ -2907,7 +3765,7 @@
       </p:sp>
       <p:pic>
         <p:nvPicPr>
-          <p:cNvPr id="5" name="Image 0" descr="preencoded.png">    </p:cNvPr>
+          <p:cNvPr id="6" name="Image 0" descr="preencoded.png">    </p:cNvPr>
           <p:cNvPicPr>
             <a:picLocks noChangeAspect="1"/>
           </p:cNvPicPr>
@@ -2921,8 +3779,8 @@
         </p:blipFill>
         <p:spPr>
           <a:xfrm>
-            <a:off x="870143" y="1619951"/>
-            <a:ext cx="289682" cy="289682"/>
+            <a:off x="1094537" y="2328977"/>
+            <a:ext cx="416966" cy="416966"/>
           </a:xfrm>
           <a:prstGeom prst="rect">
             <a:avLst/>
@@ -2931,14 +3789,14 @@
       </p:pic>
       <p:sp>
         <p:nvSpPr>
-          <p:cNvPr id="6" name="Text 3"/>
-          <p:cNvSpPr/>
-          <p:nvPr/>
-        </p:nvSpPr>
-        <p:spPr>
-          <a:xfrm>
-            <a:off x="1508760" y="1444752"/>
-            <a:ext cx="4023360" cy="640080"/>
+          <p:cNvPr id="7" name="Text 4"/>
+          <p:cNvSpPr/>
+          <p:nvPr/>
+        </p:nvSpPr>
+        <p:spPr>
+          <a:xfrm>
+            <a:off x="1874520" y="2194560"/>
+            <a:ext cx="3931920" cy="685800"/>
           </a:xfrm>
           <a:prstGeom prst="rect">
             <a:avLst/>
@@ -2954,7 +3812,7 @@
               <a:buNone/>
             </a:pPr>
             <a:r>
-              <a:rPr lang="en-US" sz="1500" b="1" dirty="0">
+              <a:rPr lang="en-US" sz="1600" b="1" dirty="0">
                 <a:solidFill>
                   <a:srgbClr val="0B2545"/>
                 </a:solidFill>
@@ -2962,86 +3820,150 @@
                 <a:ea typeface="Calibri" pitchFamily="34" charset="-122"/>
                 <a:cs typeface="Calibri" pitchFamily="34" charset="-120"/>
               </a:rPr>
-              <a:t>Vite + React + TypeScript</a:t>
-            </a:r>
-            <a:endParaRPr lang="en-US" sz="1500" dirty="0"/>
-          </a:p>
-        </p:txBody>
-      </p:sp>
-      <p:sp>
-        <p:nvSpPr>
-          <p:cNvPr id="7" name="Text 4"/>
-          <p:cNvSpPr/>
-          <p:nvPr/>
-        </p:nvSpPr>
-        <p:spPr>
-          <a:xfrm>
-            <a:off x="5669280" y="1426464"/>
-            <a:ext cx="5897880" cy="676656"/>
-          </a:xfrm>
-          <a:prstGeom prst="rect">
-            <a:avLst/>
-          </a:prstGeom>
-          <a:noFill/>
-          <a:ln/>
-        </p:spPr>
-        <p:txBody>
-          <a:bodyPr wrap="square" lIns="0" tIns="0" rIns="0" bIns="0" rtlCol="0" anchor="ctr"/>
-          <a:lstStyle/>
-          <a:p>
-            <a:pPr indent="0" marL="0">
+              <a:t>Step A — Populate metadata</a:t>
+            </a:r>
+            <a:endParaRPr lang="en-US" sz="1600" dirty="0"/>
+          </a:p>
+        </p:txBody>
+      </p:sp>
+      <p:sp>
+        <p:nvSpPr>
+          <p:cNvPr id="8" name="Text 5"/>
+          <p:cNvSpPr/>
+          <p:nvPr/>
+        </p:nvSpPr>
+        <p:spPr>
+          <a:xfrm>
+            <a:off x="868680" y="3108960"/>
+            <a:ext cx="4800600" cy="1828800"/>
+          </a:xfrm>
+          <a:prstGeom prst="rect">
+            <a:avLst/>
+          </a:prstGeom>
+          <a:noFill/>
+          <a:ln/>
+        </p:spPr>
+        <p:txBody>
+          <a:bodyPr wrap="square" lIns="0" tIns="0" rIns="0" bIns="0" rtlCol="0" anchor="ctr"/>
+          <a:lstStyle/>
+          <a:p>
+            <a:pPr marL="342900" indent="-342900">
               <a:lnSpc>
-                <a:spcPts val="1500"/>
+                <a:spcPts val="1800"/>
               </a:lnSpc>
-              <a:buNone/>
-            </a:pPr>
-            <a:r>
-              <a:rPr lang="en-US" sz="1250" dirty="0">
-                <a:solidFill>
-                  <a:srgbClr val="5B6B7F"/>
-                </a:solidFill>
-                <a:latin typeface="Calibri" pitchFamily="34" charset="0"/>
-                <a:ea typeface="Calibri" pitchFamily="34" charset="-122"/>
-                <a:cs typeface="Calibri" pitchFamily="34" charset="-120"/>
-              </a:rPr>
-              <a:t>Custom agents can't run from CDN — bundler required from day one, even for Phase 1.</a:t>
-            </a:r>
-            <a:endParaRPr lang="en-US" sz="1250" dirty="0"/>
-          </a:p>
-        </p:txBody>
-      </p:sp>
-      <p:sp>
-        <p:nvSpPr>
-          <p:cNvPr id="8" name="Shape 5"/>
-          <p:cNvSpPr/>
-          <p:nvPr/>
-        </p:nvSpPr>
-        <p:spPr>
-          <a:xfrm>
-            <a:off x="502920" y="2304288"/>
-            <a:ext cx="11201400" cy="786384"/>
+              <a:spcAft>
+                <a:spcPts val="900"/>
+              </a:spcAft>
+              <a:buSzPct val="100000"/>
+              <a:buChar char="•"/>
+            </a:pPr>
+            <a:r>
+              <a:rPr lang="en-US" sz="1300" dirty="0">
+                <a:solidFill>
+                  <a:srgbClr val="1E293B"/>
+                </a:solidFill>
+                <a:latin typeface="Calibri" pitchFamily="34" charset="0"/>
+                <a:ea typeface="Calibri" pitchFamily="34" charset="-122"/>
+                <a:cs typeface="Calibri" pitchFamily="34" charset="-120"/>
+              </a:rPr>
+              <a:t>Layer: a meaningful name + a description of its purpose</a:t>
+            </a:r>
+            <a:endParaRPr lang="en-US" sz="1300" dirty="0"/>
+          </a:p>
+          <a:p>
+            <a:pPr marL="342900" indent="-342900">
+              <a:lnSpc>
+                <a:spcPts val="1800"/>
+              </a:lnSpc>
+              <a:spcAft>
+                <a:spcPts val="900"/>
+              </a:spcAft>
+              <a:buSzPct val="100000"/>
+              <a:buChar char="•"/>
+            </a:pPr>
+            <a:r>
+              <a:rPr lang="en-US" sz="1300" dirty="0">
+                <a:solidFill>
+                  <a:srgbClr val="1E293B"/>
+                </a:solidFill>
+                <a:latin typeface="Calibri" pitchFamily="34" charset="0"/>
+                <a:ea typeface="Calibri" pitchFamily="34" charset="-122"/>
+                <a:cs typeface="Calibri" pitchFamily="34" charset="-120"/>
+              </a:rPr>
+              <a:t>Fields: descriptive aliases AND descriptions (the layer item's Data → Fields)</a:t>
+            </a:r>
+            <a:endParaRPr lang="en-US" sz="1300" dirty="0"/>
+          </a:p>
+          <a:p>
+            <a:pPr marL="342900" indent="-342900">
+              <a:lnSpc>
+                <a:spcPts val="1800"/>
+              </a:lnSpc>
+              <a:spcAft>
+                <a:spcPts val="900"/>
+              </a:spcAft>
+              <a:buSzPct val="100000"/>
+              <a:buChar char="•"/>
+            </a:pPr>
+            <a:r>
+              <a:rPr lang="en-US" sz="1300" dirty="0">
+                <a:solidFill>
+                  <a:srgbClr val="1E293B"/>
+                </a:solidFill>
+                <a:latin typeface="Calibri" pitchFamily="34" charset="0"/>
+                <a:ea typeface="Calibri" pitchFamily="34" charset="-122"/>
+                <a:cs typeface="Calibri" pitchFamily="34" charset="-120"/>
+              </a:rPr>
+              <a:t>Agents reason over this — cryptic field names lead to wrong answers</a:t>
+            </a:r>
+            <a:endParaRPr lang="en-US" sz="1300" dirty="0"/>
+          </a:p>
+        </p:txBody>
+      </p:sp>
+      <p:sp>
+        <p:nvSpPr>
+          <p:cNvPr id="9" name="Shape 6"/>
+          <p:cNvSpPr/>
+          <p:nvPr/>
+        </p:nvSpPr>
+        <p:spPr>
+          <a:xfrm>
+            <a:off x="6217920" y="1783080"/>
+            <a:ext cx="5486400" cy="3200400"/>
           </a:xfrm>
           <a:prstGeom prst="roundRect">
             <a:avLst>
-              <a:gd name="adj" fmla="val 9302"/>
+              <a:gd name="adj" fmla="val 2857"/>
             </a:avLst>
           </a:prstGeom>
           <a:solidFill>
             <a:srgbClr val="F4F7FA"/>
           </a:solidFill>
-          <a:ln/>
-        </p:spPr>
-      </p:sp>
-      <p:sp>
-        <p:nvSpPr>
-          <p:cNvPr id="9" name="Shape 6"/>
-          <p:cNvSpPr/>
-          <p:nvPr/>
-        </p:nvSpPr>
-        <p:spPr>
-          <a:xfrm>
-            <a:off x="713232" y="2395728"/>
-            <a:ext cx="603504" cy="603504"/>
+          <a:ln w="12700">
+            <a:solidFill>
+              <a:srgbClr val="1C7293"/>
+            </a:solidFill>
+            <a:prstDash val="solid"/>
+          </a:ln>
+          <a:effectLst>
+            <a:outerShdw sx="100000" sy="100000" kx="0" ky="0" algn="bl" rotWithShape="0" blurRad="88900" dist="38100" dir="5400000">
+              <a:srgbClr val="000000">
+                <a:alpha val="12000"/>
+              </a:srgbClr>
+            </a:outerShdw>
+          </a:effectLst>
+        </p:spPr>
+      </p:sp>
+      <p:sp>
+        <p:nvSpPr>
+          <p:cNvPr id="10" name="Shape 7"/>
+          <p:cNvSpPr/>
+          <p:nvPr/>
+        </p:nvSpPr>
+        <p:spPr>
+          <a:xfrm>
+            <a:off x="6583680" y="2103120"/>
+            <a:ext cx="868680" cy="868680"/>
           </a:xfrm>
           <a:prstGeom prst="ellipse">
             <a:avLst/>
@@ -3054,7 +3976,7 @@
       </p:sp>
       <p:pic>
         <p:nvPicPr>
-          <p:cNvPr id="10" name="Image 1" descr="preencoded.png">    </p:cNvPr>
+          <p:cNvPr id="11" name="Image 1" descr="preencoded.png">    </p:cNvPr>
           <p:cNvPicPr>
             <a:picLocks noChangeAspect="1"/>
           </p:cNvPicPr>
@@ -3068,8 +3990,8 @@
         </p:blipFill>
         <p:spPr>
           <a:xfrm>
-            <a:off x="870143" y="2552639"/>
-            <a:ext cx="289682" cy="289682"/>
+            <a:off x="6809537" y="2328977"/>
+            <a:ext cx="416966" cy="416966"/>
           </a:xfrm>
           <a:prstGeom prst="rect">
             <a:avLst/>
@@ -3078,14 +4000,14 @@
       </p:pic>
       <p:sp>
         <p:nvSpPr>
-          <p:cNvPr id="11" name="Text 7"/>
-          <p:cNvSpPr/>
-          <p:nvPr/>
-        </p:nvSpPr>
-        <p:spPr>
-          <a:xfrm>
-            <a:off x="1508760" y="2377440"/>
-            <a:ext cx="4023360" cy="640080"/>
+          <p:cNvPr id="12" name="Text 8"/>
+          <p:cNvSpPr/>
+          <p:nvPr/>
+        </p:nvSpPr>
+        <p:spPr>
+          <a:xfrm>
+            <a:off x="7589520" y="2194560"/>
+            <a:ext cx="3931920" cy="685800"/>
           </a:xfrm>
           <a:prstGeom prst="rect">
             <a:avLst/>
@@ -3101,7 +4023,7 @@
               <a:buNone/>
             </a:pPr>
             <a:r>
-              <a:rPr lang="en-US" sz="1500" b="1" dirty="0">
+              <a:rPr lang="en-US" sz="1600" b="1" dirty="0">
                 <a:solidFill>
                   <a:srgbClr val="0B2545"/>
                 </a:solidFill>
@@ -3109,89 +4031,121 @@
                 <a:ea typeface="Calibri" pitchFamily="34" charset="-122"/>
                 <a:cs typeface="Calibri" pitchFamily="34" charset="-120"/>
               </a:rPr>
-              <a:t>@arcgis/ai-components</a:t>
-            </a:r>
-            <a:endParaRPr lang="en-US" sz="1500" dirty="0"/>
-          </a:p>
-        </p:txBody>
-      </p:sp>
-      <p:sp>
-        <p:nvSpPr>
-          <p:cNvPr id="12" name="Text 8"/>
-          <p:cNvSpPr/>
-          <p:nvPr/>
-        </p:nvSpPr>
-        <p:spPr>
-          <a:xfrm>
-            <a:off x="5669280" y="2359152"/>
-            <a:ext cx="5897880" cy="676656"/>
-          </a:xfrm>
-          <a:prstGeom prst="rect">
-            <a:avLst/>
-          </a:prstGeom>
-          <a:noFill/>
-          <a:ln/>
-        </p:spPr>
-        <p:txBody>
-          <a:bodyPr wrap="square" lIns="0" tIns="0" rIns="0" bIns="0" rtlCol="0" anchor="ctr"/>
-          <a:lstStyle/>
-          <a:p>
-            <a:pPr indent="0" marL="0">
+              <a:t>Step B — Generate embeddings</a:t>
+            </a:r>
+            <a:endParaRPr lang="en-US" sz="1600" dirty="0"/>
+          </a:p>
+        </p:txBody>
+      </p:sp>
+      <p:sp>
+        <p:nvSpPr>
+          <p:cNvPr id="13" name="Text 9"/>
+          <p:cNvSpPr/>
+          <p:nvPr/>
+        </p:nvSpPr>
+        <p:spPr>
+          <a:xfrm>
+            <a:off x="6583680" y="3108960"/>
+            <a:ext cx="4800600" cy="1828800"/>
+          </a:xfrm>
+          <a:prstGeom prst="rect">
+            <a:avLst/>
+          </a:prstGeom>
+          <a:noFill/>
+          <a:ln/>
+        </p:spPr>
+        <p:txBody>
+          <a:bodyPr wrap="square" lIns="0" tIns="0" rIns="0" bIns="0" rtlCol="0" anchor="ctr"/>
+          <a:lstStyle/>
+          <a:p>
+            <a:pPr marL="342900" indent="-342900">
               <a:lnSpc>
-                <a:spcPts val="1500"/>
+                <a:spcPts val="1800"/>
               </a:lnSpc>
-              <a:buNone/>
-            </a:pPr>
-            <a:r>
-              <a:rPr lang="en-US" sz="1250" dirty="0">
-                <a:solidFill>
-                  <a:srgbClr val="5B6B7F"/>
-                </a:solidFill>
-                <a:latin typeface="Calibri" pitchFamily="34" charset="0"/>
-                <a:ea typeface="Calibri" pitchFamily="34" charset="-122"/>
-                <a:cs typeface="Calibri" pitchFamily="34" charset="-120"/>
-              </a:rPr>
-              <a:t>Ships &lt;arcgis-assistant&gt; + the OOB agents. Web components only — there is NO React-wrapper package.</a:t>
-            </a:r>
-            <a:endParaRPr lang="en-US" sz="1250" dirty="0"/>
-          </a:p>
-        </p:txBody>
-      </p:sp>
-      <p:sp>
-        <p:nvSpPr>
-          <p:cNvPr id="13" name="Shape 9"/>
-          <p:cNvSpPr/>
-          <p:nvPr/>
-        </p:nvSpPr>
-        <p:spPr>
-          <a:xfrm>
-            <a:off x="502920" y="3236976"/>
-            <a:ext cx="11201400" cy="786384"/>
+              <a:spcAft>
+                <a:spcPts val="900"/>
+              </a:spcAft>
+              <a:buSzPct val="100000"/>
+              <a:buChar char="•"/>
+            </a:pPr>
+            <a:r>
+              <a:rPr lang="en-US" sz="1300" dirty="0">
+                <a:solidFill>
+                  <a:srgbClr val="1E293B"/>
+                </a:solidFill>
+                <a:latin typeface="Calibri" pitchFamily="34" charset="0"/>
+                <a:ea typeface="Calibri" pitchFamily="34" charset="-122"/>
+                <a:cs typeface="Calibri" pitchFamily="34" charset="-120"/>
+              </a:rPr>
+              <a:t>Web map item → Settings → Manage AI vector embeddings → Generate</a:t>
+            </a:r>
+            <a:endParaRPr lang="en-US" sz="1300" dirty="0"/>
+          </a:p>
+          <a:p>
+            <a:pPr marL="342900" indent="-342900">
+              <a:lnSpc>
+                <a:spcPts val="1800"/>
+              </a:lnSpc>
+              <a:spcAft>
+                <a:spcPts val="900"/>
+              </a:spcAft>
+              <a:buSzPct val="100000"/>
+              <a:buChar char="•"/>
+            </a:pPr>
+            <a:r>
+              <a:rPr lang="en-US" sz="1300" dirty="0">
+                <a:solidFill>
+                  <a:srgbClr val="1E293B"/>
+                </a:solidFill>
+                <a:latin typeface="Calibri" pitchFamily="34" charset="0"/>
+                <a:ea typeface="Calibri" pitchFamily="34" charset="-122"/>
+                <a:cs typeface="Calibri" pitchFamily="34" charset="-120"/>
+              </a:rPr>
+              <a:t>Builds a semantic index of layer titles + field metadata</a:t>
+            </a:r>
+            <a:endParaRPr lang="en-US" sz="1300" dirty="0"/>
+          </a:p>
+          <a:p>
+            <a:pPr marL="342900" indent="-342900">
+              <a:lnSpc>
+                <a:spcPts val="1800"/>
+              </a:lnSpc>
+              <a:spcAft>
+                <a:spcPts val="900"/>
+              </a:spcAft>
+              <a:buSzPct val="100000"/>
+              <a:buChar char="•"/>
+            </a:pPr>
+            <a:r>
+              <a:rPr lang="en-US" sz="1300" dirty="0">
+                <a:solidFill>
+                  <a:srgbClr val="1E293B"/>
+                </a:solidFill>
+                <a:latin typeface="Calibri" pitchFamily="34" charset="0"/>
+                <a:ea typeface="Calibri" pitchFamily="34" charset="-122"/>
+                <a:cs typeface="Calibri" pitchFamily="34" charset="-120"/>
+              </a:rPr>
+              <a:t>Run it AFTER Step A; re-generate after any metadata/schema change</a:t>
+            </a:r>
+            <a:endParaRPr lang="en-US" sz="1300" dirty="0"/>
+          </a:p>
+        </p:txBody>
+      </p:sp>
+      <p:sp>
+        <p:nvSpPr>
+          <p:cNvPr id="14" name="Shape 10"/>
+          <p:cNvSpPr/>
+          <p:nvPr/>
+        </p:nvSpPr>
+        <p:spPr>
+          <a:xfrm>
+            <a:off x="502920" y="5212080"/>
+            <a:ext cx="11201400" cy="914400"/>
           </a:xfrm>
           <a:prstGeom prst="roundRect">
             <a:avLst>
-              <a:gd name="adj" fmla="val 9302"/>
+              <a:gd name="adj" fmla="val 8000"/>
             </a:avLst>
-          </a:prstGeom>
-          <a:solidFill>
-            <a:srgbClr val="F4F7FA"/>
-          </a:solidFill>
-          <a:ln/>
-        </p:spPr>
-      </p:sp>
-      <p:sp>
-        <p:nvSpPr>
-          <p:cNvPr id="14" name="Shape 10"/>
-          <p:cNvSpPr/>
-          <p:nvPr/>
-        </p:nvSpPr>
-        <p:spPr>
-          <a:xfrm>
-            <a:off x="713232" y="3328416"/>
-            <a:ext cx="603504" cy="603504"/>
-          </a:xfrm>
-          <a:prstGeom prst="ellipse">
-            <a:avLst/>
           </a:prstGeom>
           <a:solidFill>
             <a:srgbClr val="0B2545"/>
@@ -3199,79 +4153,16 @@
           <a:ln/>
         </p:spPr>
       </p:sp>
-      <p:pic>
-        <p:nvPicPr>
-          <p:cNvPr id="15" name="Image 2" descr="preencoded.png">    </p:cNvPr>
-          <p:cNvPicPr>
-            <a:picLocks noChangeAspect="1"/>
-          </p:cNvPicPr>
-          <p:nvPr/>
-        </p:nvPicPr>
-        <p:blipFill>
-          <a:blip r:embed="rId3"/>
-          <a:stretch>
-            <a:fillRect/>
-          </a:stretch>
-        </p:blipFill>
-        <p:spPr>
-          <a:xfrm>
-            <a:off x="870143" y="3485327"/>
-            <a:ext cx="289682" cy="289682"/>
-          </a:xfrm>
-          <a:prstGeom prst="rect">
-            <a:avLst/>
-          </a:prstGeom>
-        </p:spPr>
-      </p:pic>
-      <p:sp>
-        <p:nvSpPr>
-          <p:cNvPr id="16" name="Text 11"/>
-          <p:cNvSpPr/>
-          <p:nvPr/>
-        </p:nvSpPr>
-        <p:spPr>
-          <a:xfrm>
-            <a:off x="1508760" y="3310128"/>
-            <a:ext cx="4023360" cy="640080"/>
-          </a:xfrm>
-          <a:prstGeom prst="rect">
-            <a:avLst/>
-          </a:prstGeom>
-          <a:noFill/>
-          <a:ln/>
-        </p:spPr>
-        <p:txBody>
-          <a:bodyPr wrap="square" lIns="0" tIns="0" rIns="0" bIns="0" rtlCol="0" anchor="ctr"/>
-          <a:lstStyle/>
-          <a:p>
-            <a:pPr indent="0" marL="0">
-              <a:buNone/>
-            </a:pPr>
-            <a:r>
-              <a:rPr lang="en-US" sz="1500" b="1" dirty="0">
-                <a:solidFill>
-                  <a:srgbClr val="0B2545"/>
-                </a:solidFill>
-                <a:latin typeface="Calibri" pitchFamily="34" charset="0"/>
-                <a:ea typeface="Calibri" pitchFamily="34" charset="-122"/>
-                <a:cs typeface="Calibri" pitchFamily="34" charset="-120"/>
-              </a:rPr>
-              <a:t>@arcgis/map-components-react</a:t>
-            </a:r>
-            <a:endParaRPr lang="en-US" sz="1500" dirty="0"/>
-          </a:p>
-        </p:txBody>
-      </p:sp>
-      <p:sp>
-        <p:nvSpPr>
-          <p:cNvPr id="17" name="Text 12"/>
-          <p:cNvSpPr/>
-          <p:nvPr/>
-        </p:nvSpPr>
-        <p:spPr>
-          <a:xfrm>
-            <a:off x="5669280" y="3291840"/>
-            <a:ext cx="5897880" cy="676656"/>
+      <p:sp>
+        <p:nvSpPr>
+          <p:cNvPr id="15" name="Text 11"/>
+          <p:cNvSpPr/>
+          <p:nvPr/>
+        </p:nvSpPr>
+        <p:spPr>
+          <a:xfrm>
+            <a:off x="868680" y="5212080"/>
+            <a:ext cx="10515600" cy="914400"/>
           </a:xfrm>
           <a:prstGeom prst="rect">
             <a:avLst/>
@@ -3285,322 +4176,45 @@
           <a:p>
             <a:pPr indent="0" marL="0">
               <a:lnSpc>
-                <a:spcPts val="1500"/>
+                <a:spcPts val="1800"/>
               </a:lnSpc>
               <a:buNone/>
             </a:pPr>
             <a:r>
-              <a:rPr lang="en-US" sz="1250" dirty="0">
-                <a:solidFill>
-                  <a:srgbClr val="5B6B7F"/>
-                </a:solidFill>
-                <a:latin typeface="Calibri" pitchFamily="34" charset="0"/>
-                <a:ea typeface="Calibri" pitchFamily="34" charset="-122"/>
-                <a:cs typeface="Calibri" pitchFamily="34" charset="-120"/>
-              </a:rPr>
-              <a:t>The map (&lt;ArcgisMap&gt;) does have a React wrapper. All @arcgis/* pinned at 5.0.x.</a:t>
-            </a:r>
-            <a:endParaRPr lang="en-US" sz="1250" dirty="0"/>
-          </a:p>
-        </p:txBody>
-      </p:sp>
-      <p:sp>
-        <p:nvSpPr>
-          <p:cNvPr id="18" name="Shape 13"/>
-          <p:cNvSpPr/>
-          <p:nvPr/>
-        </p:nvSpPr>
-        <p:spPr>
-          <a:xfrm>
-            <a:off x="502920" y="4169664"/>
-            <a:ext cx="11201400" cy="786384"/>
-          </a:xfrm>
-          <a:prstGeom prst="roundRect">
-            <a:avLst>
-              <a:gd name="adj" fmla="val 9302"/>
-            </a:avLst>
-          </a:prstGeom>
-          <a:solidFill>
-            <a:srgbClr val="F4F7FA"/>
-          </a:solidFill>
-          <a:ln/>
-        </p:spPr>
-      </p:sp>
-      <p:sp>
-        <p:nvSpPr>
-          <p:cNvPr id="19" name="Shape 14"/>
-          <p:cNvSpPr/>
-          <p:nvPr/>
-        </p:nvSpPr>
-        <p:spPr>
-          <a:xfrm>
-            <a:off x="713232" y="4261104"/>
-            <a:ext cx="603504" cy="603504"/>
-          </a:xfrm>
-          <a:prstGeom prst="ellipse">
-            <a:avLst/>
-          </a:prstGeom>
-          <a:solidFill>
-            <a:srgbClr val="1C7293"/>
-          </a:solidFill>
-          <a:ln/>
-        </p:spPr>
-      </p:sp>
-      <p:pic>
-        <p:nvPicPr>
-          <p:cNvPr id="20" name="Image 3" descr="preencoded.png">    </p:cNvPr>
-          <p:cNvPicPr>
-            <a:picLocks noChangeAspect="1"/>
-          </p:cNvPicPr>
-          <p:nvPr/>
-        </p:nvPicPr>
-        <p:blipFill>
-          <a:blip r:embed="rId4"/>
-          <a:stretch>
-            <a:fillRect/>
-          </a:stretch>
-        </p:blipFill>
-        <p:spPr>
-          <a:xfrm>
-            <a:off x="870143" y="4418015"/>
-            <a:ext cx="289682" cy="289682"/>
-          </a:xfrm>
-          <a:prstGeom prst="rect">
-            <a:avLst/>
-          </a:prstGeom>
-        </p:spPr>
-      </p:pic>
-      <p:sp>
-        <p:nvSpPr>
-          <p:cNvPr id="21" name="Text 15"/>
-          <p:cNvSpPr/>
-          <p:nvPr/>
-        </p:nvSpPr>
-        <p:spPr>
-          <a:xfrm>
-            <a:off x="1508760" y="4242816"/>
-            <a:ext cx="4023360" cy="640080"/>
-          </a:xfrm>
-          <a:prstGeom prst="rect">
-            <a:avLst/>
-          </a:prstGeom>
-          <a:noFill/>
-          <a:ln/>
-        </p:spPr>
-        <p:txBody>
-          <a:bodyPr wrap="square" lIns="0" tIns="0" rIns="0" bIns="0" rtlCol="0" anchor="ctr"/>
-          <a:lstStyle/>
-          <a:p>
-            <a:pPr indent="0" marL="0">
-              <a:buNone/>
-            </a:pPr>
-            <a:r>
-              <a:rPr lang="en-US" sz="1500" b="1" dirty="0">
-                <a:solidFill>
-                  <a:srgbClr val="0B2545"/>
-                </a:solidFill>
-                <a:latin typeface="Calibri" pitchFamily="34" charset="0"/>
-                <a:ea typeface="Calibri" pitchFamily="34" charset="-122"/>
-                <a:cs typeface="Calibri" pitchFamily="34" charset="-120"/>
-              </a:rPr>
-              <a:t>OAuth 2.0 — user auth (PKCE)</a:t>
-            </a:r>
-            <a:endParaRPr lang="en-US" sz="1500" dirty="0"/>
-          </a:p>
-        </p:txBody>
-      </p:sp>
-      <p:sp>
-        <p:nvSpPr>
-          <p:cNvPr id="22" name="Text 16"/>
-          <p:cNvSpPr/>
-          <p:nvPr/>
-        </p:nvSpPr>
-        <p:spPr>
-          <a:xfrm>
-            <a:off x="5669280" y="4224528"/>
-            <a:ext cx="5897880" cy="676656"/>
-          </a:xfrm>
-          <a:prstGeom prst="rect">
-            <a:avLst/>
-          </a:prstGeom>
-          <a:noFill/>
-          <a:ln/>
-        </p:spPr>
-        <p:txBody>
-          <a:bodyPr wrap="square" lIns="0" tIns="0" rIns="0" bIns="0" rtlCol="0" anchor="ctr"/>
-          <a:lstStyle/>
-          <a:p>
+              <a:rPr lang="en-US" sz="1400" b="1" dirty="0">
+                <a:solidFill>
+                  <a:srgbClr val="E8A33D"/>
+                </a:solidFill>
+                <a:latin typeface="Calibri" pitchFamily="34" charset="0"/>
+                <a:ea typeface="Calibri" pitchFamily="34" charset="-122"/>
+                <a:cs typeface="Calibri" pitchFamily="34" charset="-120"/>
+              </a:rPr>
+              <a:t>Order matters: metadata first, then embed.  </a:t>
+            </a:r>
             <a:pPr indent="0" marL="0">
               <a:lnSpc>
-                <a:spcPts val="1500"/>
+                <a:spcPts val="1800"/>
               </a:lnSpc>
               <a:buNone/>
             </a:pPr>
             <a:r>
-              <a:rPr lang="en-US" sz="1250" dirty="0">
-                <a:solidFill>
-                  <a:srgbClr val="5B6B7F"/>
-                </a:solidFill>
-                <a:latin typeface="Calibri" pitchFamily="34" charset="0"/>
-                <a:ea typeface="Calibri" pitchFamily="34" charset="-122"/>
-                <a:cs typeface="Calibri" pitchFamily="34" charset="-120"/>
-              </a:rPr>
-              <a:t>AI calls are gated on the signed-in user's org. App auth has no user context and won't work.</a:t>
-            </a:r>
-            <a:endParaRPr lang="en-US" sz="1250" dirty="0"/>
-          </a:p>
-        </p:txBody>
-      </p:sp>
-      <p:sp>
-        <p:nvSpPr>
-          <p:cNvPr id="23" name="Shape 17"/>
-          <p:cNvSpPr/>
-          <p:nvPr/>
-        </p:nvSpPr>
-        <p:spPr>
-          <a:xfrm>
-            <a:off x="502920" y="5102352"/>
-            <a:ext cx="11201400" cy="786384"/>
-          </a:xfrm>
-          <a:prstGeom prst="roundRect">
-            <a:avLst>
-              <a:gd name="adj" fmla="val 9302"/>
-            </a:avLst>
-          </a:prstGeom>
-          <a:solidFill>
-            <a:srgbClr val="F4F7FA"/>
-          </a:solidFill>
-          <a:ln/>
-        </p:spPr>
-      </p:sp>
-      <p:sp>
-        <p:nvSpPr>
-          <p:cNvPr id="24" name="Shape 18"/>
-          <p:cNvSpPr/>
-          <p:nvPr/>
-        </p:nvSpPr>
-        <p:spPr>
-          <a:xfrm>
-            <a:off x="713232" y="5193792"/>
-            <a:ext cx="603504" cy="603504"/>
-          </a:xfrm>
-          <a:prstGeom prst="ellipse">
-            <a:avLst/>
-          </a:prstGeom>
-          <a:solidFill>
-            <a:srgbClr val="E8A33D"/>
-          </a:solidFill>
-          <a:ln/>
-        </p:spPr>
-      </p:sp>
-      <p:pic>
-        <p:nvPicPr>
-          <p:cNvPr id="25" name="Image 4" descr="preencoded.png">    </p:cNvPr>
-          <p:cNvPicPr>
-            <a:picLocks noChangeAspect="1"/>
-          </p:cNvPicPr>
-          <p:nvPr/>
-        </p:nvPicPr>
-        <p:blipFill>
-          <a:blip r:embed="rId5"/>
-          <a:stretch>
-            <a:fillRect/>
-          </a:stretch>
-        </p:blipFill>
-        <p:spPr>
-          <a:xfrm>
-            <a:off x="870143" y="5350703"/>
-            <a:ext cx="289682" cy="289682"/>
-          </a:xfrm>
-          <a:prstGeom prst="rect">
-            <a:avLst/>
-          </a:prstGeom>
-        </p:spPr>
-      </p:pic>
-      <p:sp>
-        <p:nvSpPr>
-          <p:cNvPr id="26" name="Text 19"/>
-          <p:cNvSpPr/>
-          <p:nvPr/>
-        </p:nvSpPr>
-        <p:spPr>
-          <a:xfrm>
-            <a:off x="1508760" y="5175504"/>
-            <a:ext cx="4023360" cy="640080"/>
-          </a:xfrm>
-          <a:prstGeom prst="rect">
-            <a:avLst/>
-          </a:prstGeom>
-          <a:noFill/>
-          <a:ln/>
-        </p:spPr>
-        <p:txBody>
-          <a:bodyPr wrap="square" lIns="0" tIns="0" rIns="0" bIns="0" rtlCol="0" anchor="ctr"/>
-          <a:lstStyle/>
-          <a:p>
-            <a:pPr indent="0" marL="0">
-              <a:buNone/>
-            </a:pPr>
-            <a:r>
-              <a:rPr lang="en-US" sz="1500" b="1" dirty="0">
-                <a:solidFill>
-                  <a:srgbClr val="0B2545"/>
-                </a:solidFill>
-                <a:latin typeface="Calibri" pitchFamily="34" charset="0"/>
-                <a:ea typeface="Calibri" pitchFamily="34" charset="-122"/>
-                <a:cs typeface="Calibri" pitchFamily="34" charset="-120"/>
-              </a:rPr>
-              <a:t>Web map + embeddings</a:t>
-            </a:r>
-            <a:endParaRPr lang="en-US" sz="1500" dirty="0"/>
-          </a:p>
-        </p:txBody>
-      </p:sp>
-      <p:sp>
-        <p:nvSpPr>
-          <p:cNvPr id="27" name="Text 20"/>
-          <p:cNvSpPr/>
-          <p:nvPr/>
-        </p:nvSpPr>
-        <p:spPr>
-          <a:xfrm>
-            <a:off x="5669280" y="5157216"/>
-            <a:ext cx="5897880" cy="676656"/>
-          </a:xfrm>
-          <a:prstGeom prst="rect">
-            <a:avLst/>
-          </a:prstGeom>
-          <a:noFill/>
-          <a:ln/>
-        </p:spPr>
-        <p:txBody>
-          <a:bodyPr wrap="square" lIns="0" tIns="0" rIns="0" bIns="0" rtlCol="0" anchor="ctr"/>
-          <a:lstStyle/>
-          <a:p>
-            <a:pPr indent="0" marL="0">
-              <a:lnSpc>
-                <a:spcPts val="1500"/>
-              </a:lnSpc>
-              <a:buNone/>
-            </a:pPr>
-            <a:r>
-              <a:rPr lang="en-US" sz="1250" dirty="0">
-                <a:solidFill>
-                  <a:srgbClr val="5B6B7F"/>
-                </a:solidFill>
-                <a:latin typeface="Calibri" pitchFamily="34" charset="0"/>
-                <a:ea typeface="Calibri" pitchFamily="34" charset="-122"/>
-                <a:cs typeface="Calibri" pitchFamily="34" charset="-120"/>
-              </a:rPr>
-              <a:t>The agent discovers layers through the web map's semantic index — generated upstream in AGO.</a:t>
-            </a:r>
-            <a:endParaRPr lang="en-US" sz="1250" dirty="0"/>
-          </a:p>
-        </p:txBody>
-      </p:sp>
-      <p:sp>
-        <p:nvSpPr>
-          <p:cNvPr id="28" name="Text 21"/>
+              <a:rPr lang="en-US" sz="1400" dirty="0">
+                <a:solidFill>
+                  <a:srgbClr val="C9D6E5"/>
+                </a:solidFill>
+                <a:latin typeface="Calibri" pitchFamily="34" charset="0"/>
+                <a:ea typeface="Calibri" pitchFamily="34" charset="-122"/>
+                <a:cs typeface="Calibri" pitchFamily="34" charset="-120"/>
+              </a:rPr>
+              <a:t>The app is the easy 20% — this GIS prep is the 80% that decides answer quality.</a:t>
+            </a:r>
+            <a:endParaRPr lang="en-US" sz="1400" dirty="0"/>
+          </a:p>
+        </p:txBody>
+      </p:sp>
+      <p:sp>
+        <p:nvSpPr>
+          <p:cNvPr id="16" name="Text 12"/>
           <p:cNvSpPr/>
           <p:nvPr/>
         </p:nvSpPr>
@@ -3639,7 +4253,7 @@
       </p:sp>
       <p:sp>
         <p:nvSpPr>
-          <p:cNvPr id="29" name="Text 22"/>
+          <p:cNvPr id="17" name="Text 13"/>
           <p:cNvSpPr/>
           <p:nvPr/>
         </p:nvSpPr>
@@ -3741,7 +4355,7 @@
                 <a:ea typeface="Bookman Old Style" pitchFamily="34" charset="-122"/>
                 <a:cs typeface="Bookman Old Style" pitchFamily="34" charset="-120"/>
               </a:rPr>
-              <a:t>Two phases — ship the wow first</a:t>
+              <a:t>The stack — and why each piece</a:t>
             </a:r>
             <a:endParaRPr lang="en-US" sz="3000" dirty="0"/>
           </a:p>
@@ -3756,24 +4370,17 @@
         <p:spPr>
           <a:xfrm>
             <a:off x="502920" y="1371600"/>
-            <a:ext cx="5486400" cy="4572000"/>
+            <a:ext cx="11201400" cy="786384"/>
           </a:xfrm>
           <a:prstGeom prst="roundRect">
             <a:avLst>
-              <a:gd name="adj" fmla="val 2000"/>
+              <a:gd name="adj" fmla="val 9302"/>
             </a:avLst>
           </a:prstGeom>
           <a:solidFill>
-            <a:srgbClr val="0B2545"/>
+            <a:srgbClr val="F4F7FA"/>
           </a:solidFill>
           <a:ln/>
-          <a:effectLst>
-            <a:outerShdw sx="100000" sy="100000" kx="0" ky="0" algn="bl" rotWithShape="0" blurRad="88900" dist="38100" dir="5400000">
-              <a:srgbClr val="000000">
-                <a:alpha val="12000"/>
-              </a:srgbClr>
-            </a:outerShdw>
-          </a:effectLst>
         </p:spPr>
       </p:sp>
       <p:sp>
@@ -3784,14 +4391,14 @@
         </p:nvSpPr>
         <p:spPr>
           <a:xfrm>
-            <a:off x="868680" y="1691640"/>
-            <a:ext cx="868680" cy="868680"/>
+            <a:off x="713232" y="1463040"/>
+            <a:ext cx="603504" cy="603504"/>
           </a:xfrm>
           <a:prstGeom prst="ellipse">
             <a:avLst/>
           </a:prstGeom>
           <a:solidFill>
-            <a:srgbClr val="E8A33D"/>
+            <a:srgbClr val="1C7293"/>
           </a:solidFill>
           <a:ln/>
         </p:spPr>
@@ -3812,8 +4419,8 @@
         </p:blipFill>
         <p:spPr>
           <a:xfrm>
-            <a:off x="1094537" y="1917497"/>
-            <a:ext cx="416966" cy="416966"/>
+            <a:off x="870143" y="1619951"/>
+            <a:ext cx="289682" cy="289682"/>
           </a:xfrm>
           <a:prstGeom prst="rect">
             <a:avLst/>
@@ -3828,8 +4435,8 @@
         </p:nvSpPr>
         <p:spPr>
           <a:xfrm>
-            <a:off x="1874520" y="1783080"/>
-            <a:ext cx="3931920" cy="685800"/>
+            <a:off x="1508760" y="1444752"/>
+            <a:ext cx="4023360" cy="640080"/>
           </a:xfrm>
           <a:prstGeom prst="rect">
             <a:avLst/>
@@ -3845,17 +4452,17 @@
               <a:buNone/>
             </a:pPr>
             <a:r>
-              <a:rPr lang="en-US" sz="1900" b="1" dirty="0">
-                <a:solidFill>
-                  <a:srgbClr val="FFFFFF"/>
-                </a:solidFill>
-                <a:latin typeface="Calibri" pitchFamily="34" charset="0"/>
-                <a:ea typeface="Calibri" pitchFamily="34" charset="-122"/>
-                <a:cs typeface="Calibri" pitchFamily="34" charset="-120"/>
-              </a:rPr>
-              <a:t>Phase 1 — OOB agents</a:t>
-            </a:r>
-            <a:endParaRPr lang="en-US" sz="1900" dirty="0"/>
+              <a:rPr lang="en-US" sz="1500" b="1" dirty="0">
+                <a:solidFill>
+                  <a:srgbClr val="0B2545"/>
+                </a:solidFill>
+                <a:latin typeface="Calibri" pitchFamily="34" charset="0"/>
+                <a:ea typeface="Calibri" pitchFamily="34" charset="-122"/>
+                <a:cs typeface="Calibri" pitchFamily="34" charset="-120"/>
+              </a:rPr>
+              <a:t>Vite + React + TypeScript</a:t>
+            </a:r>
+            <a:endParaRPr lang="en-US" sz="1500" dirty="0"/>
           </a:p>
         </p:txBody>
       </p:sp>
@@ -3867,8 +4474,8 @@
         </p:nvSpPr>
         <p:spPr>
           <a:xfrm>
-            <a:off x="868680" y="2743200"/>
-            <a:ext cx="4754880" cy="2926080"/>
+            <a:off x="5669280" y="1426464"/>
+            <a:ext cx="5897880" cy="676656"/>
           </a:xfrm>
           <a:prstGeom prst="rect">
             <a:avLst/>
@@ -3882,94 +4489,22 @@
           <a:p>
             <a:pPr indent="0" marL="0">
               <a:lnSpc>
-                <a:spcPts val="2400"/>
+                <a:spcPts val="1500"/>
               </a:lnSpc>
-              <a:spcAft>
-                <a:spcPts val="1000"/>
-              </a:spcAft>
-              <a:buNone/>
-            </a:pPr>
-            <a:r>
-              <a:rPr lang="en-US" sz="1400" b="1" dirty="0">
-                <a:solidFill>
-                  <a:srgbClr val="5DA9C4"/>
-                </a:solidFill>
-                <a:latin typeface="Calibri" pitchFamily="34" charset="0"/>
-                <a:ea typeface="Calibri" pitchFamily="34" charset="-122"/>
-                <a:cs typeface="Calibri" pitchFamily="34" charset="-120"/>
-              </a:rPr>
-              <a:t>Three public out-of-the-box agents:</a:t>
-            </a:r>
-            <a:endParaRPr lang="en-US" sz="1400" dirty="0"/>
-          </a:p>
-          <a:p>
-            <a:pPr indent="0" marL="0">
-              <a:lnSpc>
-                <a:spcPts val="2400"/>
-              </a:lnSpc>
-              <a:spcAft>
-                <a:spcPts val="1000"/>
-              </a:spcAft>
-              <a:buNone/>
-            </a:pPr>
-            <a:r>
-              <a:rPr lang="en-US" sz="1400" dirty="0">
-                <a:solidFill>
-                  <a:srgbClr val="FFFFFF"/>
-                </a:solidFill>
-                <a:latin typeface="Calibri" pitchFamily="34" charset="0"/>
-                <a:ea typeface="Calibri" pitchFamily="34" charset="-122"/>
-                <a:cs typeface="Calibri" pitchFamily="34" charset="-120"/>
-              </a:rPr>
-              <a:t>navigation · data-exploration · help</a:t>
-            </a:r>
-            <a:endParaRPr lang="en-US" sz="1400" dirty="0"/>
-          </a:p>
-          <a:p>
-            <a:pPr indent="0" marL="0">
-              <a:lnSpc>
-                <a:spcPts val="2400"/>
-              </a:lnSpc>
-              <a:spcAft>
-                <a:spcPts val="1000"/>
-              </a:spcAft>
-              <a:buNone/>
-            </a:pPr>
-            <a:r>
-              <a:rPr lang="en-US" sz="1400" dirty="0">
-                <a:solidFill>
-                  <a:srgbClr val="C9D6E5"/>
-                </a:solidFill>
-                <a:latin typeface="Calibri" pitchFamily="34" charset="0"/>
-                <a:ea typeface="Calibri" pitchFamily="34" charset="-122"/>
-                <a:cs typeface="Calibri" pitchFamily="34" charset="-120"/>
-              </a:rPr>
-              <a:t>Loads the web map, runs queries / stats / filters / spatial intersects.</a:t>
-            </a:r>
-            <a:endParaRPr lang="en-US" sz="1400" dirty="0"/>
-          </a:p>
-          <a:p>
-            <a:pPr indent="0" marL="0">
-              <a:lnSpc>
-                <a:spcPts val="2400"/>
-              </a:lnSpc>
-              <a:spcAft>
-                <a:spcPts val="1000"/>
-              </a:spcAft>
-              <a:buNone/>
-            </a:pPr>
-            <a:r>
-              <a:rPr lang="en-US" sz="1400" i="1" dirty="0">
-                <a:solidFill>
-                  <a:srgbClr val="FFFFFF"/>
-                </a:solidFill>
-                <a:latin typeface="Calibri" pitchFamily="34" charset="0"/>
-                <a:ea typeface="Calibri" pitchFamily="34" charset="-122"/>
-                <a:cs typeface="Calibri" pitchFamily="34" charset="-120"/>
-              </a:rPr>
-              <a:t>Most of the exec wow, none of the LangGraph.</a:t>
-            </a:r>
-            <a:endParaRPr lang="en-US" sz="1400" dirty="0"/>
+              <a:buNone/>
+            </a:pPr>
+            <a:r>
+              <a:rPr lang="en-US" sz="1250" dirty="0">
+                <a:solidFill>
+                  <a:srgbClr val="5B6B7F"/>
+                </a:solidFill>
+                <a:latin typeface="Calibri" pitchFamily="34" charset="0"/>
+                <a:ea typeface="Calibri" pitchFamily="34" charset="-122"/>
+                <a:cs typeface="Calibri" pitchFamily="34" charset="-120"/>
+              </a:rPr>
+              <a:t>Custom agents can't run from CDN — bundler required from day one, even for Phase 1.</a:t>
+            </a:r>
+            <a:endParaRPr lang="en-US" sz="1250" dirty="0"/>
           </a:p>
         </p:txBody>
       </p:sp>
@@ -3981,30 +4516,18 @@
         </p:nvSpPr>
         <p:spPr>
           <a:xfrm>
-            <a:off x="6217920" y="1371600"/>
-            <a:ext cx="5486400" cy="4572000"/>
+            <a:off x="502920" y="2304288"/>
+            <a:ext cx="11201400" cy="786384"/>
           </a:xfrm>
           <a:prstGeom prst="roundRect">
             <a:avLst>
-              <a:gd name="adj" fmla="val 2000"/>
+              <a:gd name="adj" fmla="val 9302"/>
             </a:avLst>
           </a:prstGeom>
           <a:solidFill>
             <a:srgbClr val="F4F7FA"/>
           </a:solidFill>
-          <a:ln w="12700">
-            <a:solidFill>
-              <a:srgbClr val="1C7293"/>
-            </a:solidFill>
-            <a:prstDash val="solid"/>
-          </a:ln>
-          <a:effectLst>
-            <a:outerShdw sx="100000" sy="100000" kx="0" ky="0" algn="bl" rotWithShape="0" blurRad="88900" dist="38100" dir="5400000">
-              <a:srgbClr val="000000">
-                <a:alpha val="12000"/>
-              </a:srgbClr>
-            </a:outerShdw>
-          </a:effectLst>
+          <a:ln/>
         </p:spPr>
       </p:sp>
       <p:sp>
@@ -4015,14 +4538,14 @@
         </p:nvSpPr>
         <p:spPr>
           <a:xfrm>
-            <a:off x="6583680" y="1691640"/>
-            <a:ext cx="868680" cy="868680"/>
+            <a:off x="713232" y="2395728"/>
+            <a:ext cx="603504" cy="603504"/>
           </a:xfrm>
           <a:prstGeom prst="ellipse">
             <a:avLst/>
           </a:prstGeom>
           <a:solidFill>
-            <a:srgbClr val="1C7293"/>
+            <a:srgbClr val="E8A33D"/>
           </a:solidFill>
           <a:ln/>
         </p:spPr>
@@ -4043,8 +4566,8 @@
         </p:blipFill>
         <p:spPr>
           <a:xfrm>
-            <a:off x="6809537" y="1917497"/>
-            <a:ext cx="416966" cy="416966"/>
+            <a:off x="870143" y="2552639"/>
+            <a:ext cx="289682" cy="289682"/>
           </a:xfrm>
           <a:prstGeom prst="rect">
             <a:avLst/>
@@ -4059,8 +4582,8 @@
         </p:nvSpPr>
         <p:spPr>
           <a:xfrm>
-            <a:off x="7589520" y="1783080"/>
-            <a:ext cx="3931920" cy="685800"/>
+            <a:off x="1508760" y="2377440"/>
+            <a:ext cx="4023360" cy="640080"/>
           </a:xfrm>
           <a:prstGeom prst="rect">
             <a:avLst/>
@@ -4076,7 +4599,7 @@
               <a:buNone/>
             </a:pPr>
             <a:r>
-              <a:rPr lang="en-US" sz="1900" b="1" dirty="0">
+              <a:rPr lang="en-US" sz="1500" b="1" dirty="0">
                 <a:solidFill>
                   <a:srgbClr val="0B2545"/>
                 </a:solidFill>
@@ -4084,9 +4607,9 @@
                 <a:ea typeface="Calibri" pitchFamily="34" charset="-122"/>
                 <a:cs typeface="Calibri" pitchFamily="34" charset="-120"/>
               </a:rPr>
-              <a:t>Phase 2 — custom agent</a:t>
-            </a:r>
-            <a:endParaRPr lang="en-US" sz="1900" dirty="0"/>
+              <a:t>@arcgis/ai-components</a:t>
+            </a:r>
+            <a:endParaRPr lang="en-US" sz="1500" dirty="0"/>
           </a:p>
         </p:txBody>
       </p:sp>
@@ -4098,8 +4621,8 @@
         </p:nvSpPr>
         <p:spPr>
           <a:xfrm>
-            <a:off x="6583680" y="2743200"/>
-            <a:ext cx="4754880" cy="2926080"/>
+            <a:off x="5669280" y="2359152"/>
+            <a:ext cx="5897880" cy="676656"/>
           </a:xfrm>
           <a:prstGeom prst="rect">
             <a:avLst/>
@@ -4113,62 +4636,306 @@
           <a:p>
             <a:pPr indent="0" marL="0">
               <a:lnSpc>
-                <a:spcPts val="2200"/>
+                <a:spcPts val="1500"/>
               </a:lnSpc>
-              <a:spcAft>
-                <a:spcPts val="800"/>
-              </a:spcAft>
-              <a:buNone/>
-            </a:pPr>
-            <a:r>
-              <a:rPr lang="en-US" sz="1400" b="1" dirty="0">
-                <a:solidFill>
-                  <a:srgbClr val="1C7293"/>
-                </a:solidFill>
-                <a:latin typeface="Calibri" pitchFamily="34" charset="0"/>
-                <a:ea typeface="Calibri" pitchFamily="34" charset="-122"/>
-                <a:cs typeface="Calibri" pitchFamily="34" charset="-120"/>
-              </a:rPr>
-              <a:t>LangGraph portfolio-reasoning agent</a:t>
-            </a:r>
-            <a:endParaRPr lang="en-US" sz="1400" dirty="0"/>
-          </a:p>
+              <a:buNone/>
+            </a:pPr>
+            <a:r>
+              <a:rPr lang="en-US" sz="1250" dirty="0">
+                <a:solidFill>
+                  <a:srgbClr val="5B6B7F"/>
+                </a:solidFill>
+                <a:latin typeface="Calibri" pitchFamily="34" charset="0"/>
+                <a:ea typeface="Calibri" pitchFamily="34" charset="-122"/>
+                <a:cs typeface="Calibri" pitchFamily="34" charset="-120"/>
+              </a:rPr>
+              <a:t>Ships &lt;arcgis-assistant&gt; + the OOB agents. Web components only — there is NO React-wrapper package.</a:t>
+            </a:r>
+            <a:endParaRPr lang="en-US" sz="1250" dirty="0"/>
+          </a:p>
+        </p:txBody>
+      </p:sp>
+      <p:sp>
+        <p:nvSpPr>
+          <p:cNvPr id="13" name="Shape 9"/>
+          <p:cNvSpPr/>
+          <p:nvPr/>
+        </p:nvSpPr>
+        <p:spPr>
+          <a:xfrm>
+            <a:off x="502920" y="3236976"/>
+            <a:ext cx="11201400" cy="786384"/>
+          </a:xfrm>
+          <a:prstGeom prst="roundRect">
+            <a:avLst>
+              <a:gd name="adj" fmla="val 9302"/>
+            </a:avLst>
+          </a:prstGeom>
+          <a:solidFill>
+            <a:srgbClr val="F4F7FA"/>
+          </a:solidFill>
+          <a:ln/>
+        </p:spPr>
+      </p:sp>
+      <p:sp>
+        <p:nvSpPr>
+          <p:cNvPr id="14" name="Shape 10"/>
+          <p:cNvSpPr/>
+          <p:nvPr/>
+        </p:nvSpPr>
+        <p:spPr>
+          <a:xfrm>
+            <a:off x="713232" y="3328416"/>
+            <a:ext cx="603504" cy="603504"/>
+          </a:xfrm>
+          <a:prstGeom prst="ellipse">
+            <a:avLst/>
+          </a:prstGeom>
+          <a:solidFill>
+            <a:srgbClr val="0B2545"/>
+          </a:solidFill>
+          <a:ln/>
+        </p:spPr>
+      </p:sp>
+      <p:pic>
+        <p:nvPicPr>
+          <p:cNvPr id="15" name="Image 2" descr="preencoded.png">    </p:cNvPr>
+          <p:cNvPicPr>
+            <a:picLocks noChangeAspect="1"/>
+          </p:cNvPicPr>
+          <p:nvPr/>
+        </p:nvPicPr>
+        <p:blipFill>
+          <a:blip r:embed="rId3"/>
+          <a:stretch>
+            <a:fillRect/>
+          </a:stretch>
+        </p:blipFill>
+        <p:spPr>
+          <a:xfrm>
+            <a:off x="870143" y="3485327"/>
+            <a:ext cx="289682" cy="289682"/>
+          </a:xfrm>
+          <a:prstGeom prst="rect">
+            <a:avLst/>
+          </a:prstGeom>
+        </p:spPr>
+      </p:pic>
+      <p:sp>
+        <p:nvSpPr>
+          <p:cNvPr id="16" name="Text 11"/>
+          <p:cNvSpPr/>
+          <p:nvPr/>
+        </p:nvSpPr>
+        <p:spPr>
+          <a:xfrm>
+            <a:off x="1508760" y="3310128"/>
+            <a:ext cx="4023360" cy="640080"/>
+          </a:xfrm>
+          <a:prstGeom prst="rect">
+            <a:avLst/>
+          </a:prstGeom>
+          <a:noFill/>
+          <a:ln/>
+        </p:spPr>
+        <p:txBody>
+          <a:bodyPr wrap="square" lIns="0" tIns="0" rIns="0" bIns="0" rtlCol="0" anchor="ctr"/>
+          <a:lstStyle/>
+          <a:p>
+            <a:pPr indent="0" marL="0">
+              <a:buNone/>
+            </a:pPr>
+            <a:r>
+              <a:rPr lang="en-US" sz="1500" b="1" dirty="0">
+                <a:solidFill>
+                  <a:srgbClr val="0B2545"/>
+                </a:solidFill>
+                <a:latin typeface="Calibri" pitchFamily="34" charset="0"/>
+                <a:ea typeface="Calibri" pitchFamily="34" charset="-122"/>
+                <a:cs typeface="Calibri" pitchFamily="34" charset="-120"/>
+              </a:rPr>
+              <a:t>@arcgis/map-components-react</a:t>
+            </a:r>
+            <a:endParaRPr lang="en-US" sz="1500" dirty="0"/>
+          </a:p>
+        </p:txBody>
+      </p:sp>
+      <p:sp>
+        <p:nvSpPr>
+          <p:cNvPr id="17" name="Text 12"/>
+          <p:cNvSpPr/>
+          <p:nvPr/>
+        </p:nvSpPr>
+        <p:spPr>
+          <a:xfrm>
+            <a:off x="5669280" y="3291840"/>
+            <a:ext cx="5897880" cy="676656"/>
+          </a:xfrm>
+          <a:prstGeom prst="rect">
+            <a:avLst/>
+          </a:prstGeom>
+          <a:noFill/>
+          <a:ln/>
+        </p:spPr>
+        <p:txBody>
+          <a:bodyPr wrap="square" lIns="0" tIns="0" rIns="0" bIns="0" rtlCol="0" anchor="ctr"/>
+          <a:lstStyle/>
           <a:p>
             <a:pPr indent="0" marL="0">
               <a:lnSpc>
-                <a:spcPts val="2200"/>
+                <a:spcPts val="1500"/>
               </a:lnSpc>
-              <a:spcAft>
-                <a:spcPts val="800"/>
-              </a:spcAft>
-              <a:buNone/>
-            </a:pPr>
-            <a:r>
-              <a:rPr lang="en-US" sz="1400" dirty="0">
-                <a:solidFill>
-                  <a:srgbClr val="1E293B"/>
-                </a:solidFill>
-                <a:latin typeface="Calibri" pitchFamily="34" charset="0"/>
-                <a:ea typeface="Calibri" pitchFamily="34" charset="-122"/>
-                <a:cs typeface="Calibri" pitchFamily="34" charset="-120"/>
-              </a:rPr>
-              <a:t>Closes the measured OOB gaps:</a:t>
-            </a:r>
-            <a:endParaRPr lang="en-US" sz="1400" dirty="0"/>
-          </a:p>
-          <a:p>
-            <a:pPr marL="342900" indent="-342900">
+              <a:buNone/>
+            </a:pPr>
+            <a:r>
+              <a:rPr lang="en-US" sz="1250" dirty="0">
+                <a:solidFill>
+                  <a:srgbClr val="5B6B7F"/>
+                </a:solidFill>
+                <a:latin typeface="Calibri" pitchFamily="34" charset="0"/>
+                <a:ea typeface="Calibri" pitchFamily="34" charset="-122"/>
+                <a:cs typeface="Calibri" pitchFamily="34" charset="-120"/>
+              </a:rPr>
+              <a:t>The map (&lt;ArcgisMap&gt;) does have a React wrapper. All @arcgis/* pinned at 5.0.x.</a:t>
+            </a:r>
+            <a:endParaRPr lang="en-US" sz="1250" dirty="0"/>
+          </a:p>
+        </p:txBody>
+      </p:sp>
+      <p:sp>
+        <p:nvSpPr>
+          <p:cNvPr id="18" name="Shape 13"/>
+          <p:cNvSpPr/>
+          <p:nvPr/>
+        </p:nvSpPr>
+        <p:spPr>
+          <a:xfrm>
+            <a:off x="502920" y="4169664"/>
+            <a:ext cx="11201400" cy="786384"/>
+          </a:xfrm>
+          <a:prstGeom prst="roundRect">
+            <a:avLst>
+              <a:gd name="adj" fmla="val 9302"/>
+            </a:avLst>
+          </a:prstGeom>
+          <a:solidFill>
+            <a:srgbClr val="F4F7FA"/>
+          </a:solidFill>
+          <a:ln/>
+        </p:spPr>
+      </p:sp>
+      <p:sp>
+        <p:nvSpPr>
+          <p:cNvPr id="19" name="Shape 14"/>
+          <p:cNvSpPr/>
+          <p:nvPr/>
+        </p:nvSpPr>
+        <p:spPr>
+          <a:xfrm>
+            <a:off x="713232" y="4261104"/>
+            <a:ext cx="603504" cy="603504"/>
+          </a:xfrm>
+          <a:prstGeom prst="ellipse">
+            <a:avLst/>
+          </a:prstGeom>
+          <a:solidFill>
+            <a:srgbClr val="1C7293"/>
+          </a:solidFill>
+          <a:ln/>
+        </p:spPr>
+      </p:sp>
+      <p:pic>
+        <p:nvPicPr>
+          <p:cNvPr id="20" name="Image 3" descr="preencoded.png">    </p:cNvPr>
+          <p:cNvPicPr>
+            <a:picLocks noChangeAspect="1"/>
+          </p:cNvPicPr>
+          <p:nvPr/>
+        </p:nvPicPr>
+        <p:blipFill>
+          <a:blip r:embed="rId4"/>
+          <a:stretch>
+            <a:fillRect/>
+          </a:stretch>
+        </p:blipFill>
+        <p:spPr>
+          <a:xfrm>
+            <a:off x="870143" y="4418015"/>
+            <a:ext cx="289682" cy="289682"/>
+          </a:xfrm>
+          <a:prstGeom prst="rect">
+            <a:avLst/>
+          </a:prstGeom>
+        </p:spPr>
+      </p:pic>
+      <p:sp>
+        <p:nvSpPr>
+          <p:cNvPr id="21" name="Text 15"/>
+          <p:cNvSpPr/>
+          <p:nvPr/>
+        </p:nvSpPr>
+        <p:spPr>
+          <a:xfrm>
+            <a:off x="1508760" y="4242816"/>
+            <a:ext cx="4023360" cy="640080"/>
+          </a:xfrm>
+          <a:prstGeom prst="rect">
+            <a:avLst/>
+          </a:prstGeom>
+          <a:noFill/>
+          <a:ln/>
+        </p:spPr>
+        <p:txBody>
+          <a:bodyPr wrap="square" lIns="0" tIns="0" rIns="0" bIns="0" rtlCol="0" anchor="ctr"/>
+          <a:lstStyle/>
+          <a:p>
+            <a:pPr indent="0" marL="0">
+              <a:buNone/>
+            </a:pPr>
+            <a:r>
+              <a:rPr lang="en-US" sz="1500" b="1" dirty="0">
+                <a:solidFill>
+                  <a:srgbClr val="0B2545"/>
+                </a:solidFill>
+                <a:latin typeface="Calibri" pitchFamily="34" charset="0"/>
+                <a:ea typeface="Calibri" pitchFamily="34" charset="-122"/>
+                <a:cs typeface="Calibri" pitchFamily="34" charset="-120"/>
+              </a:rPr>
+              <a:t>OAuth 2.0 — user auth (PKCE)</a:t>
+            </a:r>
+            <a:endParaRPr lang="en-US" sz="1500" dirty="0"/>
+          </a:p>
+        </p:txBody>
+      </p:sp>
+      <p:sp>
+        <p:nvSpPr>
+          <p:cNvPr id="22" name="Text 16"/>
+          <p:cNvSpPr/>
+          <p:nvPr/>
+        </p:nvSpPr>
+        <p:spPr>
+          <a:xfrm>
+            <a:off x="5669280" y="4224528"/>
+            <a:ext cx="5897880" cy="676656"/>
+          </a:xfrm>
+          <a:prstGeom prst="rect">
+            <a:avLst/>
+          </a:prstGeom>
+          <a:noFill/>
+          <a:ln/>
+        </p:spPr>
+        <p:txBody>
+          <a:bodyPr wrap="square" lIns="0" tIns="0" rIns="0" bIns="0" rtlCol="0" anchor="ctr"/>
+          <a:lstStyle/>
+          <a:p>
+            <a:pPr indent="0" marL="0">
               <a:lnSpc>
-                <a:spcPts val="2200"/>
+                <a:spcPts val="1500"/>
               </a:lnSpc>
-              <a:spcAft>
-                <a:spcPts val="800"/>
-              </a:spcAft>
-              <a:buSzPct val="100000"/>
-              <a:buChar char="•"/>
-            </a:pPr>
-            <a:r>
-              <a:rPr lang="en-US" sz="1400" dirty="0">
+              <a:buNone/>
+            </a:pPr>
+            <a:r>
+              <a:rPr lang="en-US" sz="1250" dirty="0">
                 <a:solidFill>
                   <a:srgbClr val="5B6B7F"/>
                 </a:solidFill>
@@ -4176,23 +4943,146 @@
                 <a:ea typeface="Calibri" pitchFamily="34" charset="-122"/>
                 <a:cs typeface="Calibri" pitchFamily="34" charset="-120"/>
               </a:rPr>
-              <a:t>cross-category comparison (GROUP BY)</a:t>
-            </a:r>
-            <a:endParaRPr lang="en-US" sz="1400" dirty="0"/>
-          </a:p>
-          <a:p>
-            <a:pPr marL="342900" indent="-342900">
+              <a:t>AI calls are gated on the signed-in user's org. App auth has no user context and won't work.</a:t>
+            </a:r>
+            <a:endParaRPr lang="en-US" sz="1250" dirty="0"/>
+          </a:p>
+        </p:txBody>
+      </p:sp>
+      <p:sp>
+        <p:nvSpPr>
+          <p:cNvPr id="23" name="Shape 17"/>
+          <p:cNvSpPr/>
+          <p:nvPr/>
+        </p:nvSpPr>
+        <p:spPr>
+          <a:xfrm>
+            <a:off x="502920" y="5102352"/>
+            <a:ext cx="11201400" cy="786384"/>
+          </a:xfrm>
+          <a:prstGeom prst="roundRect">
+            <a:avLst>
+              <a:gd name="adj" fmla="val 9302"/>
+            </a:avLst>
+          </a:prstGeom>
+          <a:solidFill>
+            <a:srgbClr val="F4F7FA"/>
+          </a:solidFill>
+          <a:ln/>
+        </p:spPr>
+      </p:sp>
+      <p:sp>
+        <p:nvSpPr>
+          <p:cNvPr id="24" name="Shape 18"/>
+          <p:cNvSpPr/>
+          <p:nvPr/>
+        </p:nvSpPr>
+        <p:spPr>
+          <a:xfrm>
+            <a:off x="713232" y="5193792"/>
+            <a:ext cx="603504" cy="603504"/>
+          </a:xfrm>
+          <a:prstGeom prst="ellipse">
+            <a:avLst/>
+          </a:prstGeom>
+          <a:solidFill>
+            <a:srgbClr val="E8A33D"/>
+          </a:solidFill>
+          <a:ln/>
+        </p:spPr>
+      </p:sp>
+      <p:pic>
+        <p:nvPicPr>
+          <p:cNvPr id="25" name="Image 4" descr="preencoded.png">    </p:cNvPr>
+          <p:cNvPicPr>
+            <a:picLocks noChangeAspect="1"/>
+          </p:cNvPicPr>
+          <p:nvPr/>
+        </p:nvPicPr>
+        <p:blipFill>
+          <a:blip r:embed="rId5"/>
+          <a:stretch>
+            <a:fillRect/>
+          </a:stretch>
+        </p:blipFill>
+        <p:spPr>
+          <a:xfrm>
+            <a:off x="870143" y="5350703"/>
+            <a:ext cx="289682" cy="289682"/>
+          </a:xfrm>
+          <a:prstGeom prst="rect">
+            <a:avLst/>
+          </a:prstGeom>
+        </p:spPr>
+      </p:pic>
+      <p:sp>
+        <p:nvSpPr>
+          <p:cNvPr id="26" name="Text 19"/>
+          <p:cNvSpPr/>
+          <p:nvPr/>
+        </p:nvSpPr>
+        <p:spPr>
+          <a:xfrm>
+            <a:off x="1508760" y="5175504"/>
+            <a:ext cx="4023360" cy="640080"/>
+          </a:xfrm>
+          <a:prstGeom prst="rect">
+            <a:avLst/>
+          </a:prstGeom>
+          <a:noFill/>
+          <a:ln/>
+        </p:spPr>
+        <p:txBody>
+          <a:bodyPr wrap="square" lIns="0" tIns="0" rIns="0" bIns="0" rtlCol="0" anchor="ctr"/>
+          <a:lstStyle/>
+          <a:p>
+            <a:pPr indent="0" marL="0">
+              <a:buNone/>
+            </a:pPr>
+            <a:r>
+              <a:rPr lang="en-US" sz="1500" b="1" dirty="0">
+                <a:solidFill>
+                  <a:srgbClr val="0B2545"/>
+                </a:solidFill>
+                <a:latin typeface="Calibri" pitchFamily="34" charset="0"/>
+                <a:ea typeface="Calibri" pitchFamily="34" charset="-122"/>
+                <a:cs typeface="Calibri" pitchFamily="34" charset="-120"/>
+              </a:rPr>
+              <a:t>Web map + embeddings</a:t>
+            </a:r>
+            <a:endParaRPr lang="en-US" sz="1500" dirty="0"/>
+          </a:p>
+        </p:txBody>
+      </p:sp>
+      <p:sp>
+        <p:nvSpPr>
+          <p:cNvPr id="27" name="Text 20"/>
+          <p:cNvSpPr/>
+          <p:nvPr/>
+        </p:nvSpPr>
+        <p:spPr>
+          <a:xfrm>
+            <a:off x="5669280" y="5157216"/>
+            <a:ext cx="5897880" cy="676656"/>
+          </a:xfrm>
+          <a:prstGeom prst="rect">
+            <a:avLst/>
+          </a:prstGeom>
+          <a:noFill/>
+          <a:ln/>
+        </p:spPr>
+        <p:txBody>
+          <a:bodyPr wrap="square" lIns="0" tIns="0" rIns="0" bIns="0" rtlCol="0" anchor="ctr"/>
+          <a:lstStyle/>
+          <a:p>
+            <a:pPr indent="0" marL="0">
               <a:lnSpc>
-                <a:spcPts val="2200"/>
+                <a:spcPts val="1500"/>
               </a:lnSpc>
-              <a:spcAft>
-                <a:spcPts val="800"/>
-              </a:spcAft>
-              <a:buSzPct val="100000"/>
-              <a:buChar char="•"/>
-            </a:pPr>
-            <a:r>
-              <a:rPr lang="en-US" sz="1400" dirty="0">
+              <a:buNone/>
+            </a:pPr>
+            <a:r>
+              <a:rPr lang="en-US" sz="1250" dirty="0">
                 <a:solidFill>
                   <a:srgbClr val="5B6B7F"/>
                 </a:solidFill>
@@ -4200,39 +5090,15 @@
                 <a:ea typeface="Calibri" pitchFamily="34" charset="-122"/>
                 <a:cs typeface="Calibri" pitchFamily="34" charset="-120"/>
               </a:rPr>
-              <a:t>correct-direction cross-layer queries</a:t>
-            </a:r>
-            <a:endParaRPr lang="en-US" sz="1400" dirty="0"/>
-          </a:p>
-          <a:p>
-            <a:pPr marL="342900" indent="-342900">
-              <a:lnSpc>
-                <a:spcPts val="2200"/>
-              </a:lnSpc>
-              <a:spcAft>
-                <a:spcPts val="800"/>
-              </a:spcAft>
-              <a:buSzPct val="100000"/>
-              <a:buChar char="•"/>
-            </a:pPr>
-            <a:r>
-              <a:rPr lang="en-US" sz="1400" dirty="0">
-                <a:solidFill>
-                  <a:srgbClr val="5B6B7F"/>
-                </a:solidFill>
-                <a:latin typeface="Calibri" pitchFamily="34" charset="0"/>
-                <a:ea typeface="Calibri" pitchFamily="34" charset="-122"/>
-                <a:cs typeface="Calibri" pitchFamily="34" charset="-120"/>
-              </a:rPr>
-              <a:t>ranking, what-if, exec summaries</a:t>
-            </a:r>
-            <a:endParaRPr lang="en-US" sz="1400" dirty="0"/>
-          </a:p>
-        </p:txBody>
-      </p:sp>
-      <p:sp>
-        <p:nvSpPr>
-          <p:cNvPr id="13" name="Text 9"/>
+              <a:t>The agent discovers layers through the web map's semantic index — generated upstream in AGO.</a:t>
+            </a:r>
+            <a:endParaRPr lang="en-US" sz="1250" dirty="0"/>
+          </a:p>
+        </p:txBody>
+      </p:sp>
+      <p:sp>
+        <p:nvSpPr>
+          <p:cNvPr id="28" name="Text 21"/>
           <p:cNvSpPr/>
           <p:nvPr/>
         </p:nvSpPr>
@@ -4271,7 +5137,7 @@
       </p:sp>
       <p:sp>
         <p:nvSpPr>
-          <p:cNvPr id="14" name="Text 10"/>
+          <p:cNvPr id="29" name="Text 22"/>
           <p:cNvSpPr/>
           <p:nvPr/>
         </p:nvSpPr>
@@ -4349,7 +5215,7 @@
         <p:spPr>
           <a:xfrm>
             <a:off x="502920" y="411480"/>
-            <a:ext cx="8229600" cy="640080"/>
+            <a:ext cx="10972800" cy="640080"/>
           </a:xfrm>
           <a:prstGeom prst="rect">
             <a:avLst/>
@@ -4373,7 +5239,7 @@
                 <a:ea typeface="Bookman Old Style" pitchFamily="34" charset="-122"/>
                 <a:cs typeface="Bookman Old Style" pitchFamily="34" charset="-120"/>
               </a:rPr>
-              <a:t>Build it in 10 steps</a:t>
+              <a:t>Two phases — ship the wow first</a:t>
             </a:r>
             <a:endParaRPr lang="en-US" sz="3000" dirty="0"/>
           </a:p>
@@ -4381,89 +5247,103 @@
       </p:sp>
       <p:sp>
         <p:nvSpPr>
-          <p:cNvPr id="3" name="Text 1"/>
-          <p:cNvSpPr/>
-          <p:nvPr/>
-        </p:nvSpPr>
-        <p:spPr>
-          <a:xfrm>
-            <a:off x="7772400" y="566928"/>
-            <a:ext cx="3931920" cy="365760"/>
-          </a:xfrm>
-          <a:prstGeom prst="rect">
-            <a:avLst/>
-          </a:prstGeom>
-          <a:noFill/>
-          <a:ln/>
-        </p:spPr>
-        <p:txBody>
-          <a:bodyPr wrap="square" lIns="0" tIns="0" rIns="0" bIns="0" rtlCol="0" anchor="ctr"/>
-          <a:lstStyle/>
-          <a:p>
-            <a:pPr algn="r" indent="0" marL="0">
-              <a:buNone/>
-            </a:pPr>
-            <a:r>
-              <a:rPr lang="en-US" sz="1200" i="1" dirty="0">
-                <a:solidFill>
-                  <a:srgbClr val="1C7293"/>
-                </a:solidFill>
-                <a:latin typeface="Calibri" pitchFamily="34" charset="0"/>
-                <a:ea typeface="Calibri" pitchFamily="34" charset="-122"/>
-                <a:cs typeface="Calibri" pitchFamily="34" charset="-120"/>
-              </a:rPr>
-              <a:t>Full detail in WALKTHROUGH.md</a:t>
-            </a:r>
-            <a:endParaRPr lang="en-US" sz="1200" dirty="0"/>
-          </a:p>
-        </p:txBody>
-      </p:sp>
-      <p:sp>
-        <p:nvSpPr>
-          <p:cNvPr id="4" name="Shape 2"/>
-          <p:cNvSpPr/>
-          <p:nvPr/>
-        </p:nvSpPr>
-        <p:spPr>
-          <a:xfrm>
-            <a:off x="502920" y="1362456"/>
-            <a:ext cx="566928" cy="566928"/>
-          </a:xfrm>
-          <a:prstGeom prst="ellipse">
-            <a:avLst/>
+          <p:cNvPr id="3" name="Shape 1"/>
+          <p:cNvSpPr/>
+          <p:nvPr/>
+        </p:nvSpPr>
+        <p:spPr>
+          <a:xfrm>
+            <a:off x="502920" y="1371600"/>
+            <a:ext cx="5486400" cy="4572000"/>
+          </a:xfrm>
+          <a:prstGeom prst="roundRect">
+            <a:avLst>
+              <a:gd name="adj" fmla="val 2000"/>
+            </a:avLst>
           </a:prstGeom>
           <a:solidFill>
             <a:srgbClr val="0B2545"/>
           </a:solidFill>
           <a:ln/>
-        </p:spPr>
-      </p:sp>
-      <p:sp>
-        <p:nvSpPr>
-          <p:cNvPr id="5" name="Text 3"/>
-          <p:cNvSpPr/>
-          <p:nvPr/>
-        </p:nvSpPr>
-        <p:spPr>
-          <a:xfrm>
-            <a:off x="502920" y="1362456"/>
-            <a:ext cx="566928" cy="566928"/>
-          </a:xfrm>
-          <a:prstGeom prst="rect">
-            <a:avLst/>
-          </a:prstGeom>
-          <a:noFill/>
-          <a:ln/>
-        </p:spPr>
-        <p:txBody>
-          <a:bodyPr wrap="square" lIns="0" tIns="0" rIns="0" bIns="0" rtlCol="0" anchor="ctr"/>
-          <a:lstStyle/>
-          <a:p>
-            <a:pPr algn="ctr" indent="0" marL="0">
-              <a:buNone/>
-            </a:pPr>
-            <a:r>
-              <a:rPr lang="en-US" sz="1800" b="1" dirty="0">
+          <a:effectLst>
+            <a:outerShdw sx="100000" sy="100000" kx="0" ky="0" algn="bl" rotWithShape="0" blurRad="88900" dist="38100" dir="5400000">
+              <a:srgbClr val="000000">
+                <a:alpha val="12000"/>
+              </a:srgbClr>
+            </a:outerShdw>
+          </a:effectLst>
+        </p:spPr>
+      </p:sp>
+      <p:sp>
+        <p:nvSpPr>
+          <p:cNvPr id="4" name="Shape 2"/>
+          <p:cNvSpPr/>
+          <p:nvPr/>
+        </p:nvSpPr>
+        <p:spPr>
+          <a:xfrm>
+            <a:off x="868680" y="1691640"/>
+            <a:ext cx="868680" cy="868680"/>
+          </a:xfrm>
+          <a:prstGeom prst="ellipse">
+            <a:avLst/>
+          </a:prstGeom>
+          <a:solidFill>
+            <a:srgbClr val="E8A33D"/>
+          </a:solidFill>
+          <a:ln/>
+        </p:spPr>
+      </p:sp>
+      <p:pic>
+        <p:nvPicPr>
+          <p:cNvPr id="5" name="Image 0" descr="preencoded.png">    </p:cNvPr>
+          <p:cNvPicPr>
+            <a:picLocks noChangeAspect="1"/>
+          </p:cNvPicPr>
+          <p:nvPr/>
+        </p:nvPicPr>
+        <p:blipFill>
+          <a:blip r:embed="rId1"/>
+          <a:stretch>
+            <a:fillRect/>
+          </a:stretch>
+        </p:blipFill>
+        <p:spPr>
+          <a:xfrm>
+            <a:off x="1094537" y="1917497"/>
+            <a:ext cx="416966" cy="416966"/>
+          </a:xfrm>
+          <a:prstGeom prst="rect">
+            <a:avLst/>
+          </a:prstGeom>
+        </p:spPr>
+      </p:pic>
+      <p:sp>
+        <p:nvSpPr>
+          <p:cNvPr id="6" name="Text 3"/>
+          <p:cNvSpPr/>
+          <p:nvPr/>
+        </p:nvSpPr>
+        <p:spPr>
+          <a:xfrm>
+            <a:off x="1874520" y="1783080"/>
+            <a:ext cx="3931920" cy="685800"/>
+          </a:xfrm>
+          <a:prstGeom prst="rect">
+            <a:avLst/>
+          </a:prstGeom>
+          <a:noFill/>
+          <a:ln/>
+        </p:spPr>
+        <p:txBody>
+          <a:bodyPr wrap="square" lIns="0" tIns="0" rIns="0" bIns="0" rtlCol="0" anchor="ctr"/>
+          <a:lstStyle/>
+          <a:p>
+            <a:pPr indent="0" marL="0">
+              <a:buNone/>
+            </a:pPr>
+            <a:r>
+              <a:rPr lang="en-US" sz="1900" b="1" dirty="0">
                 <a:solidFill>
                   <a:srgbClr val="FFFFFF"/>
                 </a:solidFill>
@@ -4471,22 +5351,22 @@
                 <a:ea typeface="Calibri" pitchFamily="34" charset="-122"/>
                 <a:cs typeface="Calibri" pitchFamily="34" charset="-120"/>
               </a:rPr>
-              <a:t>1</a:t>
-            </a:r>
-            <a:endParaRPr lang="en-US" sz="1800" dirty="0"/>
-          </a:p>
-        </p:txBody>
-      </p:sp>
-      <p:sp>
-        <p:nvSpPr>
-          <p:cNvPr id="6" name="Text 4"/>
-          <p:cNvSpPr/>
-          <p:nvPr/>
-        </p:nvSpPr>
-        <p:spPr>
-          <a:xfrm>
-            <a:off x="1216152" y="1325880"/>
-            <a:ext cx="4709160" cy="777240"/>
+              <a:t>Phase 1 — OOB agents</a:t>
+            </a:r>
+            <a:endParaRPr lang="en-US" sz="1900" dirty="0"/>
+          </a:p>
+        </p:txBody>
+      </p:sp>
+      <p:sp>
+        <p:nvSpPr>
+          <p:cNvPr id="7" name="Text 4"/>
+          <p:cNvSpPr/>
+          <p:nvPr/>
+        </p:nvSpPr>
+        <p:spPr>
+          <a:xfrm>
+            <a:off x="868680" y="2743200"/>
+            <a:ext cx="4754880" cy="2926080"/>
           </a:xfrm>
           <a:prstGeom prst="rect">
             <a:avLst/>
@@ -4500,35 +5380,141 @@
           <a:p>
             <a:pPr indent="0" marL="0">
               <a:lnSpc>
-                <a:spcPts val="1500"/>
+                <a:spcPts val="2400"/>
               </a:lnSpc>
-              <a:buNone/>
-            </a:pPr>
-            <a:r>
-              <a:rPr lang="en-US" sz="1250" dirty="0">
-                <a:solidFill>
-                  <a:srgbClr val="1E293B"/>
-                </a:solidFill>
-                <a:latin typeface="Calibri" pitchFamily="34" charset="0"/>
-                <a:ea typeface="Calibri" pitchFamily="34" charset="-122"/>
-                <a:cs typeface="Calibri" pitchFamily="34" charset="-120"/>
-              </a:rPr>
-              <a:t>Upstream prereqs first — web map, embeddings, OAuth, org settings</a:t>
-            </a:r>
-            <a:endParaRPr lang="en-US" sz="1250" dirty="0"/>
-          </a:p>
-        </p:txBody>
-      </p:sp>
-      <p:sp>
-        <p:nvSpPr>
-          <p:cNvPr id="7" name="Shape 5"/>
-          <p:cNvSpPr/>
-          <p:nvPr/>
-        </p:nvSpPr>
-        <p:spPr>
-          <a:xfrm>
-            <a:off x="502920" y="2276856"/>
-            <a:ext cx="566928" cy="566928"/>
+              <a:spcAft>
+                <a:spcPts val="1000"/>
+              </a:spcAft>
+              <a:buNone/>
+            </a:pPr>
+            <a:r>
+              <a:rPr lang="en-US" sz="1400" b="1" dirty="0">
+                <a:solidFill>
+                  <a:srgbClr val="5DA9C4"/>
+                </a:solidFill>
+                <a:latin typeface="Calibri" pitchFamily="34" charset="0"/>
+                <a:ea typeface="Calibri" pitchFamily="34" charset="-122"/>
+                <a:cs typeface="Calibri" pitchFamily="34" charset="-120"/>
+              </a:rPr>
+              <a:t>Three public out-of-the-box agents:</a:t>
+            </a:r>
+            <a:endParaRPr lang="en-US" sz="1400" dirty="0"/>
+          </a:p>
+          <a:p>
+            <a:pPr indent="0" marL="0">
+              <a:lnSpc>
+                <a:spcPts val="2400"/>
+              </a:lnSpc>
+              <a:spcAft>
+                <a:spcPts val="1000"/>
+              </a:spcAft>
+              <a:buNone/>
+            </a:pPr>
+            <a:r>
+              <a:rPr lang="en-US" sz="1400" dirty="0">
+                <a:solidFill>
+                  <a:srgbClr val="FFFFFF"/>
+                </a:solidFill>
+                <a:latin typeface="Calibri" pitchFamily="34" charset="0"/>
+                <a:ea typeface="Calibri" pitchFamily="34" charset="-122"/>
+                <a:cs typeface="Calibri" pitchFamily="34" charset="-120"/>
+              </a:rPr>
+              <a:t>navigation · data-exploration · help</a:t>
+            </a:r>
+            <a:endParaRPr lang="en-US" sz="1400" dirty="0"/>
+          </a:p>
+          <a:p>
+            <a:pPr indent="0" marL="0">
+              <a:lnSpc>
+                <a:spcPts val="2400"/>
+              </a:lnSpc>
+              <a:spcAft>
+                <a:spcPts val="1000"/>
+              </a:spcAft>
+              <a:buNone/>
+            </a:pPr>
+            <a:r>
+              <a:rPr lang="en-US" sz="1400" dirty="0">
+                <a:solidFill>
+                  <a:srgbClr val="C9D6E5"/>
+                </a:solidFill>
+                <a:latin typeface="Calibri" pitchFamily="34" charset="0"/>
+                <a:ea typeface="Calibri" pitchFamily="34" charset="-122"/>
+                <a:cs typeface="Calibri" pitchFamily="34" charset="-120"/>
+              </a:rPr>
+              <a:t>Loads the web map, runs queries / stats / filters / spatial intersects.</a:t>
+            </a:r>
+            <a:endParaRPr lang="en-US" sz="1400" dirty="0"/>
+          </a:p>
+          <a:p>
+            <a:pPr indent="0" marL="0">
+              <a:lnSpc>
+                <a:spcPts val="2400"/>
+              </a:lnSpc>
+              <a:spcAft>
+                <a:spcPts val="1000"/>
+              </a:spcAft>
+              <a:buNone/>
+            </a:pPr>
+            <a:r>
+              <a:rPr lang="en-US" sz="1400" i="1" dirty="0">
+                <a:solidFill>
+                  <a:srgbClr val="FFFFFF"/>
+                </a:solidFill>
+                <a:latin typeface="Calibri" pitchFamily="34" charset="0"/>
+                <a:ea typeface="Calibri" pitchFamily="34" charset="-122"/>
+                <a:cs typeface="Calibri" pitchFamily="34" charset="-120"/>
+              </a:rPr>
+              <a:t>Most of the exec wow, none of the LangGraph.</a:t>
+            </a:r>
+            <a:endParaRPr lang="en-US" sz="1400" dirty="0"/>
+          </a:p>
+        </p:txBody>
+      </p:sp>
+      <p:sp>
+        <p:nvSpPr>
+          <p:cNvPr id="8" name="Shape 5"/>
+          <p:cNvSpPr/>
+          <p:nvPr/>
+        </p:nvSpPr>
+        <p:spPr>
+          <a:xfrm>
+            <a:off x="6217920" y="1371600"/>
+            <a:ext cx="5486400" cy="4572000"/>
+          </a:xfrm>
+          <a:prstGeom prst="roundRect">
+            <a:avLst>
+              <a:gd name="adj" fmla="val 2000"/>
+            </a:avLst>
+          </a:prstGeom>
+          <a:solidFill>
+            <a:srgbClr val="F4F7FA"/>
+          </a:solidFill>
+          <a:ln w="12700">
+            <a:solidFill>
+              <a:srgbClr val="1C7293"/>
+            </a:solidFill>
+            <a:prstDash val="solid"/>
+          </a:ln>
+          <a:effectLst>
+            <a:outerShdw sx="100000" sy="100000" kx="0" ky="0" algn="bl" rotWithShape="0" blurRad="88900" dist="38100" dir="5400000">
+              <a:srgbClr val="000000">
+                <a:alpha val="12000"/>
+              </a:srgbClr>
+            </a:outerShdw>
+          </a:effectLst>
+        </p:spPr>
+      </p:sp>
+      <p:sp>
+        <p:nvSpPr>
+          <p:cNvPr id="9" name="Shape 6"/>
+          <p:cNvSpPr/>
+          <p:nvPr/>
+        </p:nvSpPr>
+        <p:spPr>
+          <a:xfrm>
+            <a:off x="6583680" y="1691640"/>
+            <a:ext cx="868680" cy="868680"/>
           </a:xfrm>
           <a:prstGeom prst="ellipse">
             <a:avLst/>
@@ -4539,55 +5525,79 @@
           <a:ln/>
         </p:spPr>
       </p:sp>
-      <p:sp>
-        <p:nvSpPr>
-          <p:cNvPr id="8" name="Text 6"/>
-          <p:cNvSpPr/>
-          <p:nvPr/>
-        </p:nvSpPr>
-        <p:spPr>
-          <a:xfrm>
-            <a:off x="502920" y="2276856"/>
-            <a:ext cx="566928" cy="566928"/>
-          </a:xfrm>
-          <a:prstGeom prst="rect">
-            <a:avLst/>
-          </a:prstGeom>
-          <a:noFill/>
-          <a:ln/>
-        </p:spPr>
-        <p:txBody>
-          <a:bodyPr wrap="square" lIns="0" tIns="0" rIns="0" bIns="0" rtlCol="0" anchor="ctr"/>
-          <a:lstStyle/>
-          <a:p>
-            <a:pPr algn="ctr" indent="0" marL="0">
-              <a:buNone/>
-            </a:pPr>
-            <a:r>
-              <a:rPr lang="en-US" sz="1800" b="1" dirty="0">
-                <a:solidFill>
-                  <a:srgbClr val="FFFFFF"/>
-                </a:solidFill>
-                <a:latin typeface="Calibri" pitchFamily="34" charset="0"/>
-                <a:ea typeface="Calibri" pitchFamily="34" charset="-122"/>
-                <a:cs typeface="Calibri" pitchFamily="34" charset="-120"/>
-              </a:rPr>
-              <a:t>2</a:t>
-            </a:r>
-            <a:endParaRPr lang="en-US" sz="1800" dirty="0"/>
-          </a:p>
-        </p:txBody>
-      </p:sp>
-      <p:sp>
-        <p:nvSpPr>
-          <p:cNvPr id="9" name="Text 7"/>
-          <p:cNvSpPr/>
-          <p:nvPr/>
-        </p:nvSpPr>
-        <p:spPr>
-          <a:xfrm>
-            <a:off x="1216152" y="2240280"/>
-            <a:ext cx="4709160" cy="777240"/>
+      <p:pic>
+        <p:nvPicPr>
+          <p:cNvPr id="10" name="Image 1" descr="preencoded.png">    </p:cNvPr>
+          <p:cNvPicPr>
+            <a:picLocks noChangeAspect="1"/>
+          </p:cNvPicPr>
+          <p:nvPr/>
+        </p:nvPicPr>
+        <p:blipFill>
+          <a:blip r:embed="rId2"/>
+          <a:stretch>
+            <a:fillRect/>
+          </a:stretch>
+        </p:blipFill>
+        <p:spPr>
+          <a:xfrm>
+            <a:off x="6809537" y="1917497"/>
+            <a:ext cx="416966" cy="416966"/>
+          </a:xfrm>
+          <a:prstGeom prst="rect">
+            <a:avLst/>
+          </a:prstGeom>
+        </p:spPr>
+      </p:pic>
+      <p:sp>
+        <p:nvSpPr>
+          <p:cNvPr id="11" name="Text 7"/>
+          <p:cNvSpPr/>
+          <p:nvPr/>
+        </p:nvSpPr>
+        <p:spPr>
+          <a:xfrm>
+            <a:off x="7589520" y="1783080"/>
+            <a:ext cx="3931920" cy="685800"/>
+          </a:xfrm>
+          <a:prstGeom prst="rect">
+            <a:avLst/>
+          </a:prstGeom>
+          <a:noFill/>
+          <a:ln/>
+        </p:spPr>
+        <p:txBody>
+          <a:bodyPr wrap="square" lIns="0" tIns="0" rIns="0" bIns="0" rtlCol="0" anchor="ctr"/>
+          <a:lstStyle/>
+          <a:p>
+            <a:pPr indent="0" marL="0">
+              <a:buNone/>
+            </a:pPr>
+            <a:r>
+              <a:rPr lang="en-US" sz="1900" b="1" dirty="0">
+                <a:solidFill>
+                  <a:srgbClr val="0B2545"/>
+                </a:solidFill>
+                <a:latin typeface="Calibri" pitchFamily="34" charset="0"/>
+                <a:ea typeface="Calibri" pitchFamily="34" charset="-122"/>
+                <a:cs typeface="Calibri" pitchFamily="34" charset="-120"/>
+              </a:rPr>
+              <a:t>Phase 2 — custom agent</a:t>
+            </a:r>
+            <a:endParaRPr lang="en-US" sz="1900" dirty="0"/>
+          </a:p>
+        </p:txBody>
+      </p:sp>
+      <p:sp>
+        <p:nvSpPr>
+          <p:cNvPr id="12" name="Text 8"/>
+          <p:cNvSpPr/>
+          <p:nvPr/>
+        </p:nvSpPr>
+        <p:spPr>
+          <a:xfrm>
+            <a:off x="6583680" y="2743200"/>
+            <a:ext cx="4754880" cy="2926080"/>
           </a:xfrm>
           <a:prstGeom prst="rect">
             <a:avLst/>
@@ -4601,113 +5611,38 @@
           <a:p>
             <a:pPr indent="0" marL="0">
               <a:lnSpc>
-                <a:spcPts val="1500"/>
+                <a:spcPts val="2200"/>
               </a:lnSpc>
-              <a:buNone/>
-            </a:pPr>
-            <a:r>
-              <a:rPr lang="en-US" sz="1250" dirty="0">
-                <a:solidFill>
-                  <a:srgbClr val="1E293B"/>
-                </a:solidFill>
-                <a:latin typeface="Calibri" pitchFamily="34" charset="0"/>
-                <a:ea typeface="Calibri" pitchFamily="34" charset="-122"/>
-                <a:cs typeface="Calibri" pitchFamily="34" charset="-120"/>
-              </a:rPr>
-              <a:t>Scaffold Vite + React + TS; scenarios/ folder from day one</a:t>
-            </a:r>
-            <a:endParaRPr lang="en-US" sz="1250" dirty="0"/>
-          </a:p>
-        </p:txBody>
-      </p:sp>
-      <p:sp>
-        <p:nvSpPr>
-          <p:cNvPr id="10" name="Shape 8"/>
-          <p:cNvSpPr/>
-          <p:nvPr/>
-        </p:nvSpPr>
-        <p:spPr>
-          <a:xfrm>
-            <a:off x="502920" y="3191256"/>
-            <a:ext cx="566928" cy="566928"/>
-          </a:xfrm>
-          <a:prstGeom prst="ellipse">
-            <a:avLst/>
-          </a:prstGeom>
-          <a:solidFill>
-            <a:srgbClr val="0B2545"/>
-          </a:solidFill>
-          <a:ln/>
-        </p:spPr>
-      </p:sp>
-      <p:sp>
-        <p:nvSpPr>
-          <p:cNvPr id="11" name="Text 9"/>
-          <p:cNvSpPr/>
-          <p:nvPr/>
-        </p:nvSpPr>
-        <p:spPr>
-          <a:xfrm>
-            <a:off x="502920" y="3191256"/>
-            <a:ext cx="566928" cy="566928"/>
-          </a:xfrm>
-          <a:prstGeom prst="rect">
-            <a:avLst/>
-          </a:prstGeom>
-          <a:noFill/>
-          <a:ln/>
-        </p:spPr>
-        <p:txBody>
-          <a:bodyPr wrap="square" lIns="0" tIns="0" rIns="0" bIns="0" rtlCol="0" anchor="ctr"/>
-          <a:lstStyle/>
-          <a:p>
-            <a:pPr algn="ctr" indent="0" marL="0">
-              <a:buNone/>
-            </a:pPr>
-            <a:r>
-              <a:rPr lang="en-US" sz="1800" b="1" dirty="0">
-                <a:solidFill>
-                  <a:srgbClr val="FFFFFF"/>
-                </a:solidFill>
-                <a:latin typeface="Calibri" pitchFamily="34" charset="0"/>
-                <a:ea typeface="Calibri" pitchFamily="34" charset="-122"/>
-                <a:cs typeface="Calibri" pitchFamily="34" charset="-120"/>
-              </a:rPr>
-              <a:t>3</a:t>
-            </a:r>
-            <a:endParaRPr lang="en-US" sz="1800" dirty="0"/>
-          </a:p>
-        </p:txBody>
-      </p:sp>
-      <p:sp>
-        <p:nvSpPr>
-          <p:cNvPr id="12" name="Text 10"/>
-          <p:cNvSpPr/>
-          <p:nvPr/>
-        </p:nvSpPr>
-        <p:spPr>
-          <a:xfrm>
-            <a:off x="1216152" y="3154680"/>
-            <a:ext cx="4709160" cy="777240"/>
-          </a:xfrm>
-          <a:prstGeom prst="rect">
-            <a:avLst/>
-          </a:prstGeom>
-          <a:noFill/>
-          <a:ln/>
-        </p:spPr>
-        <p:txBody>
-          <a:bodyPr wrap="square" lIns="0" tIns="0" rIns="0" bIns="0" rtlCol="0" anchor="ctr"/>
-          <a:lstStyle/>
+              <a:spcAft>
+                <a:spcPts val="800"/>
+              </a:spcAft>
+              <a:buNone/>
+            </a:pPr>
+            <a:r>
+              <a:rPr lang="en-US" sz="1400" b="1" dirty="0">
+                <a:solidFill>
+                  <a:srgbClr val="1C7293"/>
+                </a:solidFill>
+                <a:latin typeface="Calibri" pitchFamily="34" charset="0"/>
+                <a:ea typeface="Calibri" pitchFamily="34" charset="-122"/>
+                <a:cs typeface="Calibri" pitchFamily="34" charset="-120"/>
+              </a:rPr>
+              <a:t>LangGraph portfolio-reasoning agent</a:t>
+            </a:r>
+            <a:endParaRPr lang="en-US" sz="1400" dirty="0"/>
+          </a:p>
           <a:p>
             <a:pPr indent="0" marL="0">
               <a:lnSpc>
-                <a:spcPts val="1500"/>
+                <a:spcPts val="2200"/>
               </a:lnSpc>
-              <a:buNone/>
-            </a:pPr>
-            <a:r>
-              <a:rPr lang="en-US" sz="1250" dirty="0">
+              <a:spcAft>
+                <a:spcPts val="800"/>
+              </a:spcAft>
+              <a:buNone/>
+            </a:pPr>
+            <a:r>
+              <a:rPr lang="en-US" sz="1400" dirty="0">
                 <a:solidFill>
                   <a:srgbClr val="1E293B"/>
                 </a:solidFill>
@@ -4715,722 +5650,87 @@
                 <a:ea typeface="Calibri" pitchFamily="34" charset="-122"/>
                 <a:cs typeface="Calibri" pitchFamily="34" charset="-120"/>
               </a:rPr>
-              <a:t>Pin real versions — all @arcgis/* at 5.0.x; no ai-components-react</a:t>
-            </a:r>
-            <a:endParaRPr lang="en-US" sz="1250" dirty="0"/>
-          </a:p>
-        </p:txBody>
-      </p:sp>
-      <p:sp>
-        <p:nvSpPr>
-          <p:cNvPr id="13" name="Shape 11"/>
-          <p:cNvSpPr/>
-          <p:nvPr/>
-        </p:nvSpPr>
-        <p:spPr>
-          <a:xfrm>
-            <a:off x="502920" y="4105656"/>
-            <a:ext cx="566928" cy="566928"/>
-          </a:xfrm>
-          <a:prstGeom prst="ellipse">
-            <a:avLst/>
-          </a:prstGeom>
-          <a:solidFill>
-            <a:srgbClr val="1C7293"/>
-          </a:solidFill>
-          <a:ln/>
-        </p:spPr>
-      </p:sp>
-      <p:sp>
-        <p:nvSpPr>
-          <p:cNvPr id="14" name="Text 12"/>
-          <p:cNvSpPr/>
-          <p:nvPr/>
-        </p:nvSpPr>
-        <p:spPr>
-          <a:xfrm>
-            <a:off x="502920" y="4105656"/>
-            <a:ext cx="566928" cy="566928"/>
-          </a:xfrm>
-          <a:prstGeom prst="rect">
-            <a:avLst/>
-          </a:prstGeom>
-          <a:noFill/>
-          <a:ln/>
-        </p:spPr>
-        <p:txBody>
-          <a:bodyPr wrap="square" lIns="0" tIns="0" rIns="0" bIns="0" rtlCol="0" anchor="ctr"/>
-          <a:lstStyle/>
-          <a:p>
-            <a:pPr algn="ctr" indent="0" marL="0">
-              <a:buNone/>
-            </a:pPr>
-            <a:r>
-              <a:rPr lang="en-US" sz="1800" b="1" dirty="0">
-                <a:solidFill>
-                  <a:srgbClr val="FFFFFF"/>
-                </a:solidFill>
-                <a:latin typeface="Calibri" pitchFamily="34" charset="0"/>
-                <a:ea typeface="Calibri" pitchFamily="34" charset="-122"/>
-                <a:cs typeface="Calibri" pitchFamily="34" charset="-120"/>
-              </a:rPr>
-              <a:t>4</a:t>
-            </a:r>
-            <a:endParaRPr lang="en-US" sz="1800" dirty="0"/>
-          </a:p>
-        </p:txBody>
-      </p:sp>
-      <p:sp>
-        <p:nvSpPr>
-          <p:cNvPr id="15" name="Text 13"/>
-          <p:cNvSpPr/>
-          <p:nvPr/>
-        </p:nvSpPr>
-        <p:spPr>
-          <a:xfrm>
-            <a:off x="1216152" y="4069080"/>
-            <a:ext cx="4709160" cy="777240"/>
-          </a:xfrm>
-          <a:prstGeom prst="rect">
-            <a:avLst/>
-          </a:prstGeom>
-          <a:noFill/>
-          <a:ln/>
-        </p:spPr>
-        <p:txBody>
-          <a:bodyPr wrap="square" lIns="0" tIns="0" rIns="0" bIns="0" rtlCol="0" anchor="ctr"/>
-          <a:lstStyle/>
-          <a:p>
-            <a:pPr indent="0" marL="0">
+              <a:t>Closes the measured OOB gaps:</a:t>
+            </a:r>
+            <a:endParaRPr lang="en-US" sz="1400" dirty="0"/>
+          </a:p>
+          <a:p>
+            <a:pPr marL="342900" indent="-342900">
               <a:lnSpc>
-                <a:spcPts val="1500"/>
+                <a:spcPts val="2200"/>
               </a:lnSpc>
-              <a:buNone/>
-            </a:pPr>
-            <a:r>
-              <a:rPr lang="en-US" sz="1250" dirty="0">
-                <a:solidFill>
-                  <a:srgbClr val="1E293B"/>
-                </a:solidFill>
-                <a:latin typeface="Calibri" pitchFamily="34" charset="0"/>
-                <a:ea typeface="Calibri" pitchFamily="34" charset="-122"/>
-                <a:cs typeface="Calibri" pitchFamily="34" charset="-120"/>
-              </a:rPr>
-              <a:t>Register elements — defineCustomElements() from each /loader</a:t>
-            </a:r>
-            <a:endParaRPr lang="en-US" sz="1250" dirty="0"/>
-          </a:p>
-        </p:txBody>
-      </p:sp>
-      <p:sp>
-        <p:nvSpPr>
-          <p:cNvPr id="16" name="Shape 14"/>
-          <p:cNvSpPr/>
-          <p:nvPr/>
-        </p:nvSpPr>
-        <p:spPr>
-          <a:xfrm>
-            <a:off x="502920" y="5020056"/>
-            <a:ext cx="566928" cy="566928"/>
-          </a:xfrm>
-          <a:prstGeom prst="ellipse">
-            <a:avLst/>
-          </a:prstGeom>
-          <a:solidFill>
-            <a:srgbClr val="0B2545"/>
-          </a:solidFill>
-          <a:ln/>
-        </p:spPr>
-      </p:sp>
-      <p:sp>
-        <p:nvSpPr>
-          <p:cNvPr id="17" name="Text 15"/>
-          <p:cNvSpPr/>
-          <p:nvPr/>
-        </p:nvSpPr>
-        <p:spPr>
-          <a:xfrm>
-            <a:off x="502920" y="5020056"/>
-            <a:ext cx="566928" cy="566928"/>
-          </a:xfrm>
-          <a:prstGeom prst="rect">
-            <a:avLst/>
-          </a:prstGeom>
-          <a:noFill/>
-          <a:ln/>
-        </p:spPr>
-        <p:txBody>
-          <a:bodyPr wrap="square" lIns="0" tIns="0" rIns="0" bIns="0" rtlCol="0" anchor="ctr"/>
-          <a:lstStyle/>
-          <a:p>
-            <a:pPr algn="ctr" indent="0" marL="0">
-              <a:buNone/>
-            </a:pPr>
-            <a:r>
-              <a:rPr lang="en-US" sz="1800" b="1" dirty="0">
-                <a:solidFill>
-                  <a:srgbClr val="FFFFFF"/>
-                </a:solidFill>
-                <a:latin typeface="Calibri" pitchFamily="34" charset="0"/>
-                <a:ea typeface="Calibri" pitchFamily="34" charset="-122"/>
-                <a:cs typeface="Calibri" pitchFamily="34" charset="-120"/>
-              </a:rPr>
-              <a:t>5</a:t>
-            </a:r>
-            <a:endParaRPr lang="en-US" sz="1800" dirty="0"/>
-          </a:p>
-        </p:txBody>
-      </p:sp>
-      <p:sp>
-        <p:nvSpPr>
-          <p:cNvPr id="18" name="Text 16"/>
-          <p:cNvSpPr/>
-          <p:nvPr/>
-        </p:nvSpPr>
-        <p:spPr>
-          <a:xfrm>
-            <a:off x="1216152" y="4983480"/>
-            <a:ext cx="4709160" cy="777240"/>
-          </a:xfrm>
-          <a:prstGeom prst="rect">
-            <a:avLst/>
-          </a:prstGeom>
-          <a:noFill/>
-          <a:ln/>
-        </p:spPr>
-        <p:txBody>
-          <a:bodyPr wrap="square" lIns="0" tIns="0" rIns="0" bIns="0" rtlCol="0" anchor="ctr"/>
-          <a:lstStyle/>
-          <a:p>
-            <a:pPr indent="0" marL="0">
+              <a:spcAft>
+                <a:spcPts val="800"/>
+              </a:spcAft>
+              <a:buSzPct val="100000"/>
+              <a:buChar char="•"/>
+            </a:pPr>
+            <a:r>
+              <a:rPr lang="en-US" sz="1400" dirty="0">
+                <a:solidFill>
+                  <a:srgbClr val="5B6B7F"/>
+                </a:solidFill>
+                <a:latin typeface="Calibri" pitchFamily="34" charset="0"/>
+                <a:ea typeface="Calibri" pitchFamily="34" charset="-122"/>
+                <a:cs typeface="Calibri" pitchFamily="34" charset="-120"/>
+              </a:rPr>
+              <a:t>cross-category comparison (GROUP BY)</a:t>
+            </a:r>
+            <a:endParaRPr lang="en-US" sz="1400" dirty="0"/>
+          </a:p>
+          <a:p>
+            <a:pPr marL="342900" indent="-342900">
               <a:lnSpc>
-                <a:spcPts val="1500"/>
+                <a:spcPts val="2200"/>
               </a:lnSpc>
-              <a:buNone/>
-            </a:pPr>
-            <a:r>
-              <a:rPr lang="en-US" sz="1250" dirty="0">
-                <a:solidFill>
-                  <a:srgbClr val="1E293B"/>
-                </a:solidFill>
-                <a:latin typeface="Calibri" pitchFamily="34" charset="0"/>
-                <a:ea typeface="Calibri" pitchFamily="34" charset="-122"/>
-                <a:cs typeface="Calibri" pitchFamily="34" charset="-120"/>
-              </a:rPr>
-              <a:t>Declare AI web-component tags in vite-env.d.ts (no React wrappers)</a:t>
-            </a:r>
-            <a:endParaRPr lang="en-US" sz="1250" dirty="0"/>
-          </a:p>
-        </p:txBody>
-      </p:sp>
-      <p:sp>
-        <p:nvSpPr>
-          <p:cNvPr id="19" name="Shape 17"/>
-          <p:cNvSpPr/>
-          <p:nvPr/>
-        </p:nvSpPr>
-        <p:spPr>
-          <a:xfrm>
-            <a:off x="6309360" y="1362456"/>
-            <a:ext cx="566928" cy="566928"/>
-          </a:xfrm>
-          <a:prstGeom prst="ellipse">
-            <a:avLst/>
-          </a:prstGeom>
-          <a:solidFill>
-            <a:srgbClr val="1C7293"/>
-          </a:solidFill>
-          <a:ln/>
-        </p:spPr>
-      </p:sp>
-      <p:sp>
-        <p:nvSpPr>
-          <p:cNvPr id="20" name="Text 18"/>
-          <p:cNvSpPr/>
-          <p:nvPr/>
-        </p:nvSpPr>
-        <p:spPr>
-          <a:xfrm>
-            <a:off x="6309360" y="1362456"/>
-            <a:ext cx="566928" cy="566928"/>
-          </a:xfrm>
-          <a:prstGeom prst="rect">
-            <a:avLst/>
-          </a:prstGeom>
-          <a:noFill/>
-          <a:ln/>
-        </p:spPr>
-        <p:txBody>
-          <a:bodyPr wrap="square" lIns="0" tIns="0" rIns="0" bIns="0" rtlCol="0" anchor="ctr"/>
-          <a:lstStyle/>
-          <a:p>
-            <a:pPr algn="ctr" indent="0" marL="0">
-              <a:buNone/>
-            </a:pPr>
-            <a:r>
-              <a:rPr lang="en-US" sz="1800" b="1" dirty="0">
-                <a:solidFill>
-                  <a:srgbClr val="FFFFFF"/>
-                </a:solidFill>
-                <a:latin typeface="Calibri" pitchFamily="34" charset="0"/>
-                <a:ea typeface="Calibri" pitchFamily="34" charset="-122"/>
-                <a:cs typeface="Calibri" pitchFamily="34" charset="-120"/>
-              </a:rPr>
-              <a:t>6</a:t>
-            </a:r>
-            <a:endParaRPr lang="en-US" sz="1800" dirty="0"/>
-          </a:p>
-        </p:txBody>
-      </p:sp>
-      <p:sp>
-        <p:nvSpPr>
-          <p:cNvPr id="21" name="Text 19"/>
-          <p:cNvSpPr/>
-          <p:nvPr/>
-        </p:nvSpPr>
-        <p:spPr>
-          <a:xfrm>
-            <a:off x="7022592" y="1325880"/>
-            <a:ext cx="4709160" cy="777240"/>
-          </a:xfrm>
-          <a:prstGeom prst="rect">
-            <a:avLst/>
-          </a:prstGeom>
-          <a:noFill/>
-          <a:ln/>
-        </p:spPr>
-        <p:txBody>
-          <a:bodyPr wrap="square" lIns="0" tIns="0" rIns="0" bIns="0" rtlCol="0" anchor="ctr"/>
-          <a:lstStyle/>
-          <a:p>
-            <a:pPr indent="0" marL="0">
+              <a:spcAft>
+                <a:spcPts val="800"/>
+              </a:spcAft>
+              <a:buSzPct val="100000"/>
+              <a:buChar char="•"/>
+            </a:pPr>
+            <a:r>
+              <a:rPr lang="en-US" sz="1400" dirty="0">
+                <a:solidFill>
+                  <a:srgbClr val="5B6B7F"/>
+                </a:solidFill>
+                <a:latin typeface="Calibri" pitchFamily="34" charset="0"/>
+                <a:ea typeface="Calibri" pitchFamily="34" charset="-122"/>
+                <a:cs typeface="Calibri" pitchFamily="34" charset="-120"/>
+              </a:rPr>
+              <a:t>correct-direction cross-layer queries</a:t>
+            </a:r>
+            <a:endParaRPr lang="en-US" sz="1400" dirty="0"/>
+          </a:p>
+          <a:p>
+            <a:pPr marL="342900" indent="-342900">
               <a:lnSpc>
-                <a:spcPts val="1500"/>
+                <a:spcPts val="2200"/>
               </a:lnSpc>
-              <a:buNone/>
-            </a:pPr>
-            <a:r>
-              <a:rPr lang="en-US" sz="1250" dirty="0">
-                <a:solidFill>
-                  <a:srgbClr val="1E293B"/>
-                </a:solidFill>
-                <a:latin typeface="Calibri" pitchFamily="34" charset="0"/>
-                <a:ea typeface="Calibri" pitchFamily="34" charset="-122"/>
-                <a:cs typeface="Calibri" pitchFamily="34" charset="-120"/>
-              </a:rPr>
-              <a:t>Map + assistant layout; set referenceElement to the real &lt;arcgis-map&gt;</a:t>
-            </a:r>
-            <a:endParaRPr lang="en-US" sz="1250" dirty="0"/>
-          </a:p>
-        </p:txBody>
-      </p:sp>
-      <p:sp>
-        <p:nvSpPr>
-          <p:cNvPr id="22" name="Shape 20"/>
-          <p:cNvSpPr/>
-          <p:nvPr/>
-        </p:nvSpPr>
-        <p:spPr>
-          <a:xfrm>
-            <a:off x="6309360" y="2276856"/>
-            <a:ext cx="566928" cy="566928"/>
-          </a:xfrm>
-          <a:prstGeom prst="ellipse">
-            <a:avLst/>
-          </a:prstGeom>
-          <a:solidFill>
-            <a:srgbClr val="0B2545"/>
-          </a:solidFill>
-          <a:ln/>
-        </p:spPr>
-      </p:sp>
-      <p:sp>
-        <p:nvSpPr>
-          <p:cNvPr id="23" name="Text 21"/>
-          <p:cNvSpPr/>
-          <p:nvPr/>
-        </p:nvSpPr>
-        <p:spPr>
-          <a:xfrm>
-            <a:off x="6309360" y="2276856"/>
-            <a:ext cx="566928" cy="566928"/>
-          </a:xfrm>
-          <a:prstGeom prst="rect">
-            <a:avLst/>
-          </a:prstGeom>
-          <a:noFill/>
-          <a:ln/>
-        </p:spPr>
-        <p:txBody>
-          <a:bodyPr wrap="square" lIns="0" tIns="0" rIns="0" bIns="0" rtlCol="0" anchor="ctr"/>
-          <a:lstStyle/>
-          <a:p>
-            <a:pPr algn="ctr" indent="0" marL="0">
-              <a:buNone/>
-            </a:pPr>
-            <a:r>
-              <a:rPr lang="en-US" sz="1800" b="1" dirty="0">
-                <a:solidFill>
-                  <a:srgbClr val="FFFFFF"/>
-                </a:solidFill>
-                <a:latin typeface="Calibri" pitchFamily="34" charset="0"/>
-                <a:ea typeface="Calibri" pitchFamily="34" charset="-122"/>
-                <a:cs typeface="Calibri" pitchFamily="34" charset="-120"/>
-              </a:rPr>
-              <a:t>7</a:t>
-            </a:r>
-            <a:endParaRPr lang="en-US" sz="1800" dirty="0"/>
-          </a:p>
-        </p:txBody>
-      </p:sp>
-      <p:sp>
-        <p:nvSpPr>
-          <p:cNvPr id="24" name="Text 22"/>
-          <p:cNvSpPr/>
-          <p:nvPr/>
-        </p:nvSpPr>
-        <p:spPr>
-          <a:xfrm>
-            <a:off x="7022592" y="2240280"/>
-            <a:ext cx="4709160" cy="777240"/>
-          </a:xfrm>
-          <a:prstGeom prst="rect">
-            <a:avLst/>
-          </a:prstGeom>
-          <a:noFill/>
-          <a:ln/>
-        </p:spPr>
-        <p:txBody>
-          <a:bodyPr wrap="square" lIns="0" tIns="0" rIns="0" bIns="0" rtlCol="0" anchor="ctr"/>
-          <a:lstStyle/>
-          <a:p>
-            <a:pPr indent="0" marL="0">
-              <a:lnSpc>
-                <a:spcPts val="1500"/>
-              </a:lnSpc>
-              <a:buNone/>
-            </a:pPr>
-            <a:r>
-              <a:rPr lang="en-US" sz="1250" dirty="0">
-                <a:solidFill>
-                  <a:srgbClr val="1E293B"/>
-                </a:solidFill>
-                <a:latin typeface="Calibri" pitchFamily="34" charset="0"/>
-                <a:ea typeface="Calibri" pitchFamily="34" charset="-122"/>
-                <a:cs typeface="Calibri" pitchFamily="34" charset="-120"/>
-              </a:rPr>
-              <a:t>AuthGate (named-user OAuth) + ErrorBoundary</a:t>
-            </a:r>
-            <a:endParaRPr lang="en-US" sz="1250" dirty="0"/>
-          </a:p>
-        </p:txBody>
-      </p:sp>
-      <p:sp>
-        <p:nvSpPr>
-          <p:cNvPr id="25" name="Shape 23"/>
-          <p:cNvSpPr/>
-          <p:nvPr/>
-        </p:nvSpPr>
-        <p:spPr>
-          <a:xfrm>
-            <a:off x="6309360" y="3191256"/>
-            <a:ext cx="566928" cy="566928"/>
-          </a:xfrm>
-          <a:prstGeom prst="ellipse">
-            <a:avLst/>
-          </a:prstGeom>
-          <a:solidFill>
-            <a:srgbClr val="1C7293"/>
-          </a:solidFill>
-          <a:ln/>
-        </p:spPr>
-      </p:sp>
-      <p:sp>
-        <p:nvSpPr>
-          <p:cNvPr id="26" name="Text 24"/>
-          <p:cNvSpPr/>
-          <p:nvPr/>
-        </p:nvSpPr>
-        <p:spPr>
-          <a:xfrm>
-            <a:off x="6309360" y="3191256"/>
-            <a:ext cx="566928" cy="566928"/>
-          </a:xfrm>
-          <a:prstGeom prst="rect">
-            <a:avLst/>
-          </a:prstGeom>
-          <a:noFill/>
-          <a:ln/>
-        </p:spPr>
-        <p:txBody>
-          <a:bodyPr wrap="square" lIns="0" tIns="0" rIns="0" bIns="0" rtlCol="0" anchor="ctr"/>
-          <a:lstStyle/>
-          <a:p>
-            <a:pPr algn="ctr" indent="0" marL="0">
-              <a:buNone/>
-            </a:pPr>
-            <a:r>
-              <a:rPr lang="en-US" sz="1800" b="1" dirty="0">
-                <a:solidFill>
-                  <a:srgbClr val="FFFFFF"/>
-                </a:solidFill>
-                <a:latin typeface="Calibri" pitchFamily="34" charset="0"/>
-                <a:ea typeface="Calibri" pitchFamily="34" charset="-122"/>
-                <a:cs typeface="Calibri" pitchFamily="34" charset="-120"/>
-              </a:rPr>
-              <a:t>8</a:t>
-            </a:r>
-            <a:endParaRPr lang="en-US" sz="1800" dirty="0"/>
-          </a:p>
-        </p:txBody>
-      </p:sp>
-      <p:sp>
-        <p:nvSpPr>
-          <p:cNvPr id="27" name="Text 25"/>
-          <p:cNvSpPr/>
-          <p:nvPr/>
-        </p:nvSpPr>
-        <p:spPr>
-          <a:xfrm>
-            <a:off x="7022592" y="3154680"/>
-            <a:ext cx="4709160" cy="777240"/>
-          </a:xfrm>
-          <a:prstGeom prst="rect">
-            <a:avLst/>
-          </a:prstGeom>
-          <a:noFill/>
-          <a:ln/>
-        </p:spPr>
-        <p:txBody>
-          <a:bodyPr wrap="square" lIns="0" tIns="0" rIns="0" bIns="0" rtlCol="0" anchor="ctr"/>
-          <a:lstStyle/>
-          <a:p>
-            <a:pPr indent="0" marL="0">
-              <a:lnSpc>
-                <a:spcPts val="1500"/>
-              </a:lnSpc>
-              <a:buNone/>
-            </a:pPr>
-            <a:r>
-              <a:rPr lang="en-US" sz="1250" dirty="0">
-                <a:solidFill>
-                  <a:srgbClr val="1E293B"/>
-                </a:solidFill>
-                <a:latin typeface="Calibri" pitchFamily="34" charset="0"/>
-                <a:ea typeface="Calibri" pitchFamily="34" charset="-122"/>
-                <a:cs typeface="Calibri" pitchFamily="34" charset="-120"/>
-              </a:rPr>
-              <a:t>Scenario config + prompts; copy stays out of components</a:t>
-            </a:r>
-            <a:endParaRPr lang="en-US" sz="1250" dirty="0"/>
-          </a:p>
-        </p:txBody>
-      </p:sp>
-      <p:sp>
-        <p:nvSpPr>
-          <p:cNvPr id="28" name="Shape 26"/>
-          <p:cNvSpPr/>
-          <p:nvPr/>
-        </p:nvSpPr>
-        <p:spPr>
-          <a:xfrm>
-            <a:off x="6309360" y="4105656"/>
-            <a:ext cx="566928" cy="566928"/>
-          </a:xfrm>
-          <a:prstGeom prst="ellipse">
-            <a:avLst/>
-          </a:prstGeom>
-          <a:solidFill>
-            <a:srgbClr val="0B2545"/>
-          </a:solidFill>
-          <a:ln/>
-        </p:spPr>
-      </p:sp>
-      <p:sp>
-        <p:nvSpPr>
-          <p:cNvPr id="29" name="Text 27"/>
-          <p:cNvSpPr/>
-          <p:nvPr/>
-        </p:nvSpPr>
-        <p:spPr>
-          <a:xfrm>
-            <a:off x="6309360" y="4105656"/>
-            <a:ext cx="566928" cy="566928"/>
-          </a:xfrm>
-          <a:prstGeom prst="rect">
-            <a:avLst/>
-          </a:prstGeom>
-          <a:noFill/>
-          <a:ln/>
-        </p:spPr>
-        <p:txBody>
-          <a:bodyPr wrap="square" lIns="0" tIns="0" rIns="0" bIns="0" rtlCol="0" anchor="ctr"/>
-          <a:lstStyle/>
-          <a:p>
-            <a:pPr algn="ctr" indent="0" marL="0">
-              <a:buNone/>
-            </a:pPr>
-            <a:r>
-              <a:rPr lang="en-US" sz="1800" b="1" dirty="0">
-                <a:solidFill>
-                  <a:srgbClr val="FFFFFF"/>
-                </a:solidFill>
-                <a:latin typeface="Calibri" pitchFamily="34" charset="0"/>
-                <a:ea typeface="Calibri" pitchFamily="34" charset="-122"/>
-                <a:cs typeface="Calibri" pitchFamily="34" charset="-120"/>
-              </a:rPr>
-              <a:t>9</a:t>
-            </a:r>
-            <a:endParaRPr lang="en-US" sz="1800" dirty="0"/>
-          </a:p>
-        </p:txBody>
-      </p:sp>
-      <p:sp>
-        <p:nvSpPr>
-          <p:cNvPr id="30" name="Text 28"/>
-          <p:cNvSpPr/>
-          <p:nvPr/>
-        </p:nvSpPr>
-        <p:spPr>
-          <a:xfrm>
-            <a:off x="7022592" y="4069080"/>
-            <a:ext cx="4709160" cy="777240"/>
-          </a:xfrm>
-          <a:prstGeom prst="rect">
-            <a:avLst/>
-          </a:prstGeom>
-          <a:noFill/>
-          <a:ln/>
-        </p:spPr>
-        <p:txBody>
-          <a:bodyPr wrap="square" lIns="0" tIns="0" rIns="0" bIns="0" rtlCol="0" anchor="ctr"/>
-          <a:lstStyle/>
-          <a:p>
-            <a:pPr indent="0" marL="0">
-              <a:lnSpc>
-                <a:spcPts val="1500"/>
-              </a:lnSpc>
-              <a:buNone/>
-            </a:pPr>
-            <a:r>
-              <a:rPr lang="en-US" sz="1250" dirty="0">
-                <a:solidFill>
-                  <a:srgbClr val="1E293B"/>
-                </a:solidFill>
-                <a:latin typeface="Calibri" pitchFamily="34" charset="0"/>
-                <a:ea typeface="Calibri" pitchFamily="34" charset="-122"/>
-                <a:cs typeface="Calibri" pitchFamily="34" charset="-120"/>
-              </a:rPr>
-              <a:t>Env vars + npm run dev → localhost:5173</a:t>
-            </a:r>
-            <a:endParaRPr lang="en-US" sz="1250" dirty="0"/>
-          </a:p>
-        </p:txBody>
-      </p:sp>
-      <p:sp>
-        <p:nvSpPr>
-          <p:cNvPr id="31" name="Shape 29"/>
-          <p:cNvSpPr/>
-          <p:nvPr/>
-        </p:nvSpPr>
-        <p:spPr>
-          <a:xfrm>
-            <a:off x="6309360" y="5020056"/>
-            <a:ext cx="566928" cy="566928"/>
-          </a:xfrm>
-          <a:prstGeom prst="ellipse">
-            <a:avLst/>
-          </a:prstGeom>
-          <a:solidFill>
-            <a:srgbClr val="1C7293"/>
-          </a:solidFill>
-          <a:ln/>
-        </p:spPr>
-      </p:sp>
-      <p:sp>
-        <p:nvSpPr>
-          <p:cNvPr id="32" name="Text 30"/>
-          <p:cNvSpPr/>
-          <p:nvPr/>
-        </p:nvSpPr>
-        <p:spPr>
-          <a:xfrm>
-            <a:off x="6309360" y="5020056"/>
-            <a:ext cx="566928" cy="566928"/>
-          </a:xfrm>
-          <a:prstGeom prst="rect">
-            <a:avLst/>
-          </a:prstGeom>
-          <a:noFill/>
-          <a:ln/>
-        </p:spPr>
-        <p:txBody>
-          <a:bodyPr wrap="square" lIns="0" tIns="0" rIns="0" bIns="0" rtlCol="0" anchor="ctr"/>
-          <a:lstStyle/>
-          <a:p>
-            <a:pPr algn="ctr" indent="0" marL="0">
-              <a:buNone/>
-            </a:pPr>
-            <a:r>
-              <a:rPr lang="en-US" sz="1800" b="1" dirty="0">
-                <a:solidFill>
-                  <a:srgbClr val="FFFFFF"/>
-                </a:solidFill>
-                <a:latin typeface="Calibri" pitchFamily="34" charset="0"/>
-                <a:ea typeface="Calibri" pitchFamily="34" charset="-122"/>
-                <a:cs typeface="Calibri" pitchFamily="34" charset="-120"/>
-              </a:rPr>
-              <a:t>10</a:t>
-            </a:r>
-            <a:endParaRPr lang="en-US" sz="1800" dirty="0"/>
-          </a:p>
-        </p:txBody>
-      </p:sp>
-      <p:sp>
-        <p:nvSpPr>
-          <p:cNvPr id="33" name="Text 31"/>
-          <p:cNvSpPr/>
-          <p:nvPr/>
-        </p:nvSpPr>
-        <p:spPr>
-          <a:xfrm>
-            <a:off x="7022592" y="4983480"/>
-            <a:ext cx="4709160" cy="777240"/>
-          </a:xfrm>
-          <a:prstGeom prst="rect">
-            <a:avLst/>
-          </a:prstGeom>
-          <a:noFill/>
-          <a:ln/>
-        </p:spPr>
-        <p:txBody>
-          <a:bodyPr wrap="square" lIns="0" tIns="0" rIns="0" bIns="0" rtlCol="0" anchor="ctr"/>
-          <a:lstStyle/>
-          <a:p>
-            <a:pPr indent="0" marL="0">
-              <a:lnSpc>
-                <a:spcPts val="1500"/>
-              </a:lnSpc>
-              <a:buNone/>
-            </a:pPr>
-            <a:r>
-              <a:rPr lang="en-US" sz="1250" dirty="0">
-                <a:solidFill>
-                  <a:srgbClr val="1E293B"/>
-                </a:solidFill>
-                <a:latin typeface="Calibri" pitchFamily="34" charset="0"/>
-                <a:ea typeface="Calibri" pitchFamily="34" charset="-122"/>
-                <a:cs typeface="Calibri" pitchFamily="34" charset="-120"/>
-              </a:rPr>
-              <a:t>Verify: force decompositions that reconcile before you trust it</a:t>
-            </a:r>
-            <a:endParaRPr lang="en-US" sz="1250" dirty="0"/>
-          </a:p>
-        </p:txBody>
-      </p:sp>
-      <p:sp>
-        <p:nvSpPr>
-          <p:cNvPr id="34" name="Text 32"/>
+              <a:spcAft>
+                <a:spcPts val="800"/>
+              </a:spcAft>
+              <a:buSzPct val="100000"/>
+              <a:buChar char="•"/>
+            </a:pPr>
+            <a:r>
+              <a:rPr lang="en-US" sz="1400" dirty="0">
+                <a:solidFill>
+                  <a:srgbClr val="5B6B7F"/>
+                </a:solidFill>
+                <a:latin typeface="Calibri" pitchFamily="34" charset="0"/>
+                <a:ea typeface="Calibri" pitchFamily="34" charset="-122"/>
+                <a:cs typeface="Calibri" pitchFamily="34" charset="-120"/>
+              </a:rPr>
+              <a:t>ranking, what-if, exec summaries</a:t>
+            </a:r>
+            <a:endParaRPr lang="en-US" sz="1400" dirty="0"/>
+          </a:p>
+        </p:txBody>
+      </p:sp>
+      <p:sp>
+        <p:nvSpPr>
+          <p:cNvPr id="13" name="Text 9"/>
           <p:cNvSpPr/>
           <p:nvPr/>
         </p:nvSpPr>
@@ -5469,7 +5769,7 @@
       </p:sp>
       <p:sp>
         <p:nvSpPr>
-          <p:cNvPr id="35" name="Text 33"/>
+          <p:cNvPr id="14" name="Text 10"/>
           <p:cNvSpPr/>
           <p:nvPr/>
         </p:nvSpPr>
@@ -5547,7 +5847,7 @@
         <p:spPr>
           <a:xfrm>
             <a:off x="502920" y="411480"/>
-            <a:ext cx="10972800" cy="640080"/>
+            <a:ext cx="8229600" cy="640080"/>
           </a:xfrm>
           <a:prstGeom prst="rect">
             <a:avLst/>
@@ -5571,7 +5871,7 @@
                 <a:ea typeface="Bookman Old Style" pitchFamily="34" charset="-122"/>
                 <a:cs typeface="Bookman Old Style" pitchFamily="34" charset="-120"/>
               </a:rPr>
-              <a:t>Gotchas that cost us a day</a:t>
+              <a:t>Build it in 10 steps</a:t>
             </a:r>
             <a:endParaRPr lang="en-US" sz="3000" dirty="0"/>
           </a:p>
@@ -5579,87 +5879,112 @@
       </p:sp>
       <p:sp>
         <p:nvSpPr>
-          <p:cNvPr id="3" name="Shape 1"/>
-          <p:cNvSpPr/>
-          <p:nvPr/>
-        </p:nvSpPr>
-        <p:spPr>
-          <a:xfrm>
-            <a:off x="502920" y="1325880"/>
-            <a:ext cx="3657600" cy="2148840"/>
-          </a:xfrm>
-          <a:prstGeom prst="roundRect">
-            <a:avLst>
-              <a:gd name="adj" fmla="val 3404"/>
-            </a:avLst>
+          <p:cNvPr id="3" name="Text 1"/>
+          <p:cNvSpPr/>
+          <p:nvPr/>
+        </p:nvSpPr>
+        <p:spPr>
+          <a:xfrm>
+            <a:off x="7772400" y="566928"/>
+            <a:ext cx="3931920" cy="365760"/>
+          </a:xfrm>
+          <a:prstGeom prst="rect">
+            <a:avLst/>
+          </a:prstGeom>
+          <a:noFill/>
+          <a:ln/>
+        </p:spPr>
+        <p:txBody>
+          <a:bodyPr wrap="square" lIns="0" tIns="0" rIns="0" bIns="0" rtlCol="0" anchor="ctr"/>
+          <a:lstStyle/>
+          <a:p>
+            <a:pPr algn="r" indent="0" marL="0">
+              <a:buNone/>
+            </a:pPr>
+            <a:r>
+              <a:rPr lang="en-US" sz="1200" i="1" dirty="0">
+                <a:solidFill>
+                  <a:srgbClr val="1C7293"/>
+                </a:solidFill>
+                <a:latin typeface="Calibri" pitchFamily="34" charset="0"/>
+                <a:ea typeface="Calibri" pitchFamily="34" charset="-122"/>
+                <a:cs typeface="Calibri" pitchFamily="34" charset="-120"/>
+              </a:rPr>
+              <a:t>Full detail in WALKTHROUGH.md</a:t>
+            </a:r>
+            <a:endParaRPr lang="en-US" sz="1200" dirty="0"/>
+          </a:p>
+        </p:txBody>
+      </p:sp>
+      <p:sp>
+        <p:nvSpPr>
+          <p:cNvPr id="4" name="Shape 2"/>
+          <p:cNvSpPr/>
+          <p:nvPr/>
+        </p:nvSpPr>
+        <p:spPr>
+          <a:xfrm>
+            <a:off x="502920" y="1362456"/>
+            <a:ext cx="566928" cy="566928"/>
+          </a:xfrm>
+          <a:prstGeom prst="ellipse">
+            <a:avLst/>
           </a:prstGeom>
           <a:solidFill>
-            <a:srgbClr val="F4F7FA"/>
+            <a:srgbClr val="0B2545"/>
           </a:solidFill>
           <a:ln/>
-          <a:effectLst>
-            <a:outerShdw sx="100000" sy="100000" kx="0" ky="0" algn="bl" rotWithShape="0" blurRad="88900" dist="38100" dir="5400000">
-              <a:srgbClr val="000000">
-                <a:alpha val="12000"/>
-              </a:srgbClr>
-            </a:outerShdw>
-          </a:effectLst>
-        </p:spPr>
-      </p:sp>
-      <p:sp>
-        <p:nvSpPr>
-          <p:cNvPr id="4" name="Shape 2"/>
-          <p:cNvSpPr/>
-          <p:nvPr/>
-        </p:nvSpPr>
-        <p:spPr>
-          <a:xfrm>
-            <a:off x="758952" y="1581912"/>
-            <a:ext cx="713232" cy="713232"/>
-          </a:xfrm>
-          <a:prstGeom prst="ellipse">
-            <a:avLst/>
-          </a:prstGeom>
-          <a:solidFill>
-            <a:srgbClr val="E8A33D"/>
-          </a:solidFill>
-          <a:ln/>
-        </p:spPr>
-      </p:sp>
-      <p:pic>
-        <p:nvPicPr>
-          <p:cNvPr id="5" name="Image 0" descr="preencoded.png">    </p:cNvPr>
-          <p:cNvPicPr>
-            <a:picLocks noChangeAspect="1"/>
-          </p:cNvPicPr>
-          <p:nvPr/>
-        </p:nvPicPr>
-        <p:blipFill>
-          <a:blip r:embed="rId1"/>
-          <a:stretch>
-            <a:fillRect/>
-          </a:stretch>
-        </p:blipFill>
-        <p:spPr>
-          <a:xfrm>
-            <a:off x="944392" y="1767352"/>
-            <a:ext cx="342351" cy="342351"/>
-          </a:xfrm>
-          <a:prstGeom prst="rect">
-            <a:avLst/>
-          </a:prstGeom>
-        </p:spPr>
-      </p:pic>
-      <p:sp>
-        <p:nvSpPr>
-          <p:cNvPr id="6" name="Text 3"/>
-          <p:cNvSpPr/>
-          <p:nvPr/>
-        </p:nvSpPr>
-        <p:spPr>
-          <a:xfrm>
-            <a:off x="1600200" y="1600200"/>
-            <a:ext cx="2377440" cy="685800"/>
+        </p:spPr>
+      </p:sp>
+      <p:sp>
+        <p:nvSpPr>
+          <p:cNvPr id="5" name="Text 3"/>
+          <p:cNvSpPr/>
+          <p:nvPr/>
+        </p:nvSpPr>
+        <p:spPr>
+          <a:xfrm>
+            <a:off x="502920" y="1362456"/>
+            <a:ext cx="566928" cy="566928"/>
+          </a:xfrm>
+          <a:prstGeom prst="rect">
+            <a:avLst/>
+          </a:prstGeom>
+          <a:noFill/>
+          <a:ln/>
+        </p:spPr>
+        <p:txBody>
+          <a:bodyPr wrap="square" lIns="0" tIns="0" rIns="0" bIns="0" rtlCol="0" anchor="ctr"/>
+          <a:lstStyle/>
+          <a:p>
+            <a:pPr algn="ctr" indent="0" marL="0">
+              <a:buNone/>
+            </a:pPr>
+            <a:r>
+              <a:rPr lang="en-US" sz="1800" b="1" dirty="0">
+                <a:solidFill>
+                  <a:srgbClr val="FFFFFF"/>
+                </a:solidFill>
+                <a:latin typeface="Calibri" pitchFamily="34" charset="0"/>
+                <a:ea typeface="Calibri" pitchFamily="34" charset="-122"/>
+                <a:cs typeface="Calibri" pitchFamily="34" charset="-120"/>
+              </a:rPr>
+              <a:t>1</a:t>
+            </a:r>
+            <a:endParaRPr lang="en-US" sz="1800" dirty="0"/>
+          </a:p>
+        </p:txBody>
+      </p:sp>
+      <p:sp>
+        <p:nvSpPr>
+          <p:cNvPr id="6" name="Text 4"/>
+          <p:cNvSpPr/>
+          <p:nvPr/>
+        </p:nvSpPr>
+        <p:spPr>
+          <a:xfrm>
+            <a:off x="1216152" y="1325880"/>
+            <a:ext cx="4709160" cy="777240"/>
           </a:xfrm>
           <a:prstGeom prst="rect">
             <a:avLst/>
@@ -5673,35 +5998,94 @@
           <a:p>
             <a:pPr indent="0" marL="0">
               <a:lnSpc>
-                <a:spcPts val="1600"/>
+                <a:spcPts val="1500"/>
               </a:lnSpc>
               <a:buNone/>
             </a:pPr>
             <a:r>
-              <a:rPr lang="en-US" sz="1450" b="1" dirty="0">
-                <a:solidFill>
-                  <a:srgbClr val="0B2545"/>
-                </a:solidFill>
-                <a:latin typeface="Calibri" pitchFamily="34" charset="0"/>
-                <a:ea typeface="Calibri" pitchFamily="34" charset="-122"/>
-                <a:cs typeface="Calibri" pitchFamily="34" charset="-120"/>
-              </a:rPr>
-              <a:t>Elements don't auto-register</a:t>
-            </a:r>
-            <a:endParaRPr lang="en-US" sz="1450" dirty="0"/>
-          </a:p>
-        </p:txBody>
-      </p:sp>
-      <p:sp>
-        <p:nvSpPr>
-          <p:cNvPr id="7" name="Text 4"/>
-          <p:cNvSpPr/>
-          <p:nvPr/>
-        </p:nvSpPr>
-        <p:spPr>
-          <a:xfrm>
-            <a:off x="758952" y="2350008"/>
-            <a:ext cx="3145536" cy="1005840"/>
+              <a:rPr lang="en-US" sz="1250" dirty="0">
+                <a:solidFill>
+                  <a:srgbClr val="1E293B"/>
+                </a:solidFill>
+                <a:latin typeface="Calibri" pitchFamily="34" charset="0"/>
+                <a:ea typeface="Calibri" pitchFamily="34" charset="-122"/>
+                <a:cs typeface="Calibri" pitchFamily="34" charset="-120"/>
+              </a:rPr>
+              <a:t>Upstream prereqs first — web map, embeddings, OAuth, org settings</a:t>
+            </a:r>
+            <a:endParaRPr lang="en-US" sz="1250" dirty="0"/>
+          </a:p>
+        </p:txBody>
+      </p:sp>
+      <p:sp>
+        <p:nvSpPr>
+          <p:cNvPr id="7" name="Shape 5"/>
+          <p:cNvSpPr/>
+          <p:nvPr/>
+        </p:nvSpPr>
+        <p:spPr>
+          <a:xfrm>
+            <a:off x="502920" y="2276856"/>
+            <a:ext cx="566928" cy="566928"/>
+          </a:xfrm>
+          <a:prstGeom prst="ellipse">
+            <a:avLst/>
+          </a:prstGeom>
+          <a:solidFill>
+            <a:srgbClr val="1C7293"/>
+          </a:solidFill>
+          <a:ln/>
+        </p:spPr>
+      </p:sp>
+      <p:sp>
+        <p:nvSpPr>
+          <p:cNvPr id="8" name="Text 6"/>
+          <p:cNvSpPr/>
+          <p:nvPr/>
+        </p:nvSpPr>
+        <p:spPr>
+          <a:xfrm>
+            <a:off x="502920" y="2276856"/>
+            <a:ext cx="566928" cy="566928"/>
+          </a:xfrm>
+          <a:prstGeom prst="rect">
+            <a:avLst/>
+          </a:prstGeom>
+          <a:noFill/>
+          <a:ln/>
+        </p:spPr>
+        <p:txBody>
+          <a:bodyPr wrap="square" lIns="0" tIns="0" rIns="0" bIns="0" rtlCol="0" anchor="ctr"/>
+          <a:lstStyle/>
+          <a:p>
+            <a:pPr algn="ctr" indent="0" marL="0">
+              <a:buNone/>
+            </a:pPr>
+            <a:r>
+              <a:rPr lang="en-US" sz="1800" b="1" dirty="0">
+                <a:solidFill>
+                  <a:srgbClr val="FFFFFF"/>
+                </a:solidFill>
+                <a:latin typeface="Calibri" pitchFamily="34" charset="0"/>
+                <a:ea typeface="Calibri" pitchFamily="34" charset="-122"/>
+                <a:cs typeface="Calibri" pitchFamily="34" charset="-120"/>
+              </a:rPr>
+              <a:t>2</a:t>
+            </a:r>
+            <a:endParaRPr lang="en-US" sz="1800" dirty="0"/>
+          </a:p>
+        </p:txBody>
+      </p:sp>
+      <p:sp>
+        <p:nvSpPr>
+          <p:cNvPr id="9" name="Text 7"/>
+          <p:cNvSpPr/>
+          <p:nvPr/>
+        </p:nvSpPr>
+        <p:spPr>
+          <a:xfrm>
+            <a:off x="1216152" y="2240280"/>
+            <a:ext cx="4709160" cy="777240"/>
           </a:xfrm>
           <a:prstGeom prst="rect">
             <a:avLst/>
@@ -5715,108 +6099,94 @@
           <a:p>
             <a:pPr indent="0" marL="0">
               <a:lnSpc>
-                <a:spcPts val="1450"/>
+                <a:spcPts val="1500"/>
               </a:lnSpc>
               <a:buNone/>
             </a:pPr>
             <a:r>
-              <a:rPr lang="en-US" sz="1150" dirty="0">
-                <a:solidFill>
-                  <a:srgbClr val="5B6B7F"/>
-                </a:solidFill>
-                <a:latin typeface="Calibri" pitchFamily="34" charset="0"/>
-                <a:ea typeface="Calibri" pitchFamily="34" charset="-122"/>
-                <a:cs typeface="Calibri" pitchFamily="34" charset="-120"/>
-              </a:rPr>
-              <a:t>SDK 5.x is Lumina-based. Bare imports do nothing — call defineCustomElements() or you get "Custom element not found."</a:t>
-            </a:r>
-            <a:endParaRPr lang="en-US" sz="1150" dirty="0"/>
-          </a:p>
-        </p:txBody>
-      </p:sp>
-      <p:sp>
-        <p:nvSpPr>
-          <p:cNvPr id="8" name="Shape 5"/>
-          <p:cNvSpPr/>
-          <p:nvPr/>
-        </p:nvSpPr>
-        <p:spPr>
-          <a:xfrm>
-            <a:off x="4398264" y="1325880"/>
-            <a:ext cx="3657600" cy="2148840"/>
-          </a:xfrm>
-          <a:prstGeom prst="roundRect">
-            <a:avLst>
-              <a:gd name="adj" fmla="val 3404"/>
-            </a:avLst>
+              <a:rPr lang="en-US" sz="1250" dirty="0">
+                <a:solidFill>
+                  <a:srgbClr val="1E293B"/>
+                </a:solidFill>
+                <a:latin typeface="Calibri" pitchFamily="34" charset="0"/>
+                <a:ea typeface="Calibri" pitchFamily="34" charset="-122"/>
+                <a:cs typeface="Calibri" pitchFamily="34" charset="-120"/>
+              </a:rPr>
+              <a:t>Scaffold Vite + React + TS; scenarios/ folder from day one</a:t>
+            </a:r>
+            <a:endParaRPr lang="en-US" sz="1250" dirty="0"/>
+          </a:p>
+        </p:txBody>
+      </p:sp>
+      <p:sp>
+        <p:nvSpPr>
+          <p:cNvPr id="10" name="Shape 8"/>
+          <p:cNvSpPr/>
+          <p:nvPr/>
+        </p:nvSpPr>
+        <p:spPr>
+          <a:xfrm>
+            <a:off x="502920" y="3191256"/>
+            <a:ext cx="566928" cy="566928"/>
+          </a:xfrm>
+          <a:prstGeom prst="ellipse">
+            <a:avLst/>
           </a:prstGeom>
           <a:solidFill>
-            <a:srgbClr val="F4F7FA"/>
+            <a:srgbClr val="0B2545"/>
           </a:solidFill>
           <a:ln/>
-          <a:effectLst>
-            <a:outerShdw sx="100000" sy="100000" kx="0" ky="0" algn="bl" rotWithShape="0" blurRad="88900" dist="38100" dir="5400000">
-              <a:srgbClr val="000000">
-                <a:alpha val="12000"/>
-              </a:srgbClr>
-            </a:outerShdw>
-          </a:effectLst>
-        </p:spPr>
-      </p:sp>
-      <p:sp>
-        <p:nvSpPr>
-          <p:cNvPr id="9" name="Shape 6"/>
-          <p:cNvSpPr/>
-          <p:nvPr/>
-        </p:nvSpPr>
-        <p:spPr>
-          <a:xfrm>
-            <a:off x="4654296" y="1581912"/>
-            <a:ext cx="713232" cy="713232"/>
-          </a:xfrm>
-          <a:prstGeom prst="ellipse">
-            <a:avLst/>
-          </a:prstGeom>
-          <a:solidFill>
-            <a:srgbClr val="E8A33D"/>
-          </a:solidFill>
-          <a:ln/>
-        </p:spPr>
-      </p:sp>
-      <p:pic>
-        <p:nvPicPr>
-          <p:cNvPr id="10" name="Image 1" descr="preencoded.png">    </p:cNvPr>
-          <p:cNvPicPr>
-            <a:picLocks noChangeAspect="1"/>
-          </p:cNvPicPr>
-          <p:nvPr/>
-        </p:nvPicPr>
-        <p:blipFill>
-          <a:blip r:embed="rId2"/>
-          <a:stretch>
-            <a:fillRect/>
-          </a:stretch>
-        </p:blipFill>
-        <p:spPr>
-          <a:xfrm>
-            <a:off x="4839736" y="1767352"/>
-            <a:ext cx="342351" cy="342351"/>
-          </a:xfrm>
-          <a:prstGeom prst="rect">
-            <a:avLst/>
-          </a:prstGeom>
-        </p:spPr>
-      </p:pic>
-      <p:sp>
-        <p:nvSpPr>
-          <p:cNvPr id="11" name="Text 7"/>
-          <p:cNvSpPr/>
-          <p:nvPr/>
-        </p:nvSpPr>
-        <p:spPr>
-          <a:xfrm>
-            <a:off x="5495544" y="1600200"/>
-            <a:ext cx="2377440" cy="685800"/>
+        </p:spPr>
+      </p:sp>
+      <p:sp>
+        <p:nvSpPr>
+          <p:cNvPr id="11" name="Text 9"/>
+          <p:cNvSpPr/>
+          <p:nvPr/>
+        </p:nvSpPr>
+        <p:spPr>
+          <a:xfrm>
+            <a:off x="502920" y="3191256"/>
+            <a:ext cx="566928" cy="566928"/>
+          </a:xfrm>
+          <a:prstGeom prst="rect">
+            <a:avLst/>
+          </a:prstGeom>
+          <a:noFill/>
+          <a:ln/>
+        </p:spPr>
+        <p:txBody>
+          <a:bodyPr wrap="square" lIns="0" tIns="0" rIns="0" bIns="0" rtlCol="0" anchor="ctr"/>
+          <a:lstStyle/>
+          <a:p>
+            <a:pPr algn="ctr" indent="0" marL="0">
+              <a:buNone/>
+            </a:pPr>
+            <a:r>
+              <a:rPr lang="en-US" sz="1800" b="1" dirty="0">
+                <a:solidFill>
+                  <a:srgbClr val="FFFFFF"/>
+                </a:solidFill>
+                <a:latin typeface="Calibri" pitchFamily="34" charset="0"/>
+                <a:ea typeface="Calibri" pitchFamily="34" charset="-122"/>
+                <a:cs typeface="Calibri" pitchFamily="34" charset="-120"/>
+              </a:rPr>
+              <a:t>3</a:t>
+            </a:r>
+            <a:endParaRPr lang="en-US" sz="1800" dirty="0"/>
+          </a:p>
+        </p:txBody>
+      </p:sp>
+      <p:sp>
+        <p:nvSpPr>
+          <p:cNvPr id="12" name="Text 10"/>
+          <p:cNvSpPr/>
+          <p:nvPr/>
+        </p:nvSpPr>
+        <p:spPr>
+          <a:xfrm>
+            <a:off x="1216152" y="3154680"/>
+            <a:ext cx="4709160" cy="777240"/>
           </a:xfrm>
           <a:prstGeom prst="rect">
             <a:avLst/>
@@ -5830,35 +6200,94 @@
           <a:p>
             <a:pPr indent="0" marL="0">
               <a:lnSpc>
-                <a:spcPts val="1600"/>
+                <a:spcPts val="1500"/>
               </a:lnSpc>
               <a:buNone/>
             </a:pPr>
             <a:r>
-              <a:rPr lang="en-US" sz="1450" b="1" dirty="0">
-                <a:solidFill>
-                  <a:srgbClr val="0B2545"/>
-                </a:solidFill>
-                <a:latin typeface="Calibri" pitchFamily="34" charset="0"/>
-                <a:ea typeface="Calibri" pitchFamily="34" charset="-122"/>
-                <a:cs typeface="Calibri" pitchFamily="34" charset="-120"/>
-              </a:rPr>
-              <a:t>No ai-components-react</a:t>
-            </a:r>
-            <a:endParaRPr lang="en-US" sz="1450" dirty="0"/>
-          </a:p>
-        </p:txBody>
-      </p:sp>
-      <p:sp>
-        <p:nvSpPr>
-          <p:cNvPr id="12" name="Text 8"/>
-          <p:cNvSpPr/>
-          <p:nvPr/>
-        </p:nvSpPr>
-        <p:spPr>
-          <a:xfrm>
-            <a:off x="4654296" y="2350008"/>
-            <a:ext cx="3145536" cy="1005840"/>
+              <a:rPr lang="en-US" sz="1250" dirty="0">
+                <a:solidFill>
+                  <a:srgbClr val="1E293B"/>
+                </a:solidFill>
+                <a:latin typeface="Calibri" pitchFamily="34" charset="0"/>
+                <a:ea typeface="Calibri" pitchFamily="34" charset="-122"/>
+                <a:cs typeface="Calibri" pitchFamily="34" charset="-120"/>
+              </a:rPr>
+              <a:t>Pin real versions — all @arcgis/* at 5.0.x; no ai-components-react</a:t>
+            </a:r>
+            <a:endParaRPr lang="en-US" sz="1250" dirty="0"/>
+          </a:p>
+        </p:txBody>
+      </p:sp>
+      <p:sp>
+        <p:nvSpPr>
+          <p:cNvPr id="13" name="Shape 11"/>
+          <p:cNvSpPr/>
+          <p:nvPr/>
+        </p:nvSpPr>
+        <p:spPr>
+          <a:xfrm>
+            <a:off x="502920" y="4105656"/>
+            <a:ext cx="566928" cy="566928"/>
+          </a:xfrm>
+          <a:prstGeom prst="ellipse">
+            <a:avLst/>
+          </a:prstGeom>
+          <a:solidFill>
+            <a:srgbClr val="1C7293"/>
+          </a:solidFill>
+          <a:ln/>
+        </p:spPr>
+      </p:sp>
+      <p:sp>
+        <p:nvSpPr>
+          <p:cNvPr id="14" name="Text 12"/>
+          <p:cNvSpPr/>
+          <p:nvPr/>
+        </p:nvSpPr>
+        <p:spPr>
+          <a:xfrm>
+            <a:off x="502920" y="4105656"/>
+            <a:ext cx="566928" cy="566928"/>
+          </a:xfrm>
+          <a:prstGeom prst="rect">
+            <a:avLst/>
+          </a:prstGeom>
+          <a:noFill/>
+          <a:ln/>
+        </p:spPr>
+        <p:txBody>
+          <a:bodyPr wrap="square" lIns="0" tIns="0" rIns="0" bIns="0" rtlCol="0" anchor="ctr"/>
+          <a:lstStyle/>
+          <a:p>
+            <a:pPr algn="ctr" indent="0" marL="0">
+              <a:buNone/>
+            </a:pPr>
+            <a:r>
+              <a:rPr lang="en-US" sz="1800" b="1" dirty="0">
+                <a:solidFill>
+                  <a:srgbClr val="FFFFFF"/>
+                </a:solidFill>
+                <a:latin typeface="Calibri" pitchFamily="34" charset="0"/>
+                <a:ea typeface="Calibri" pitchFamily="34" charset="-122"/>
+                <a:cs typeface="Calibri" pitchFamily="34" charset="-120"/>
+              </a:rPr>
+              <a:t>4</a:t>
+            </a:r>
+            <a:endParaRPr lang="en-US" sz="1800" dirty="0"/>
+          </a:p>
+        </p:txBody>
+      </p:sp>
+      <p:sp>
+        <p:nvSpPr>
+          <p:cNvPr id="15" name="Text 13"/>
+          <p:cNvSpPr/>
+          <p:nvPr/>
+        </p:nvSpPr>
+        <p:spPr>
+          <a:xfrm>
+            <a:off x="1216152" y="4069080"/>
+            <a:ext cx="4709160" cy="777240"/>
           </a:xfrm>
           <a:prstGeom prst="rect">
             <a:avLst/>
@@ -5872,108 +6301,94 @@
           <a:p>
             <a:pPr indent="0" marL="0">
               <a:lnSpc>
-                <a:spcPts val="1450"/>
+                <a:spcPts val="1500"/>
               </a:lnSpc>
               <a:buNone/>
             </a:pPr>
             <a:r>
-              <a:rPr lang="en-US" sz="1150" dirty="0">
-                <a:solidFill>
-                  <a:srgbClr val="5B6B7F"/>
-                </a:solidFill>
-                <a:latin typeface="Calibri" pitchFamily="34" charset="0"/>
-                <a:ea typeface="Calibri" pitchFamily="34" charset="-122"/>
-                <a:cs typeface="Calibri" pitchFamily="34" charset="-120"/>
-              </a:rPr>
-              <a:t>AI components ship as raw web components only. Declare the tags in vite-env.d.ts; set props imperatively via refs.</a:t>
-            </a:r>
-            <a:endParaRPr lang="en-US" sz="1150" dirty="0"/>
-          </a:p>
-        </p:txBody>
-      </p:sp>
-      <p:sp>
-        <p:nvSpPr>
-          <p:cNvPr id="13" name="Shape 9"/>
-          <p:cNvSpPr/>
-          <p:nvPr/>
-        </p:nvSpPr>
-        <p:spPr>
-          <a:xfrm>
-            <a:off x="8293608" y="1325880"/>
-            <a:ext cx="3657600" cy="2148840"/>
-          </a:xfrm>
-          <a:prstGeom prst="roundRect">
-            <a:avLst>
-              <a:gd name="adj" fmla="val 3404"/>
-            </a:avLst>
+              <a:rPr lang="en-US" sz="1250" dirty="0">
+                <a:solidFill>
+                  <a:srgbClr val="1E293B"/>
+                </a:solidFill>
+                <a:latin typeface="Calibri" pitchFamily="34" charset="0"/>
+                <a:ea typeface="Calibri" pitchFamily="34" charset="-122"/>
+                <a:cs typeface="Calibri" pitchFamily="34" charset="-120"/>
+              </a:rPr>
+              <a:t>Register elements — defineCustomElements() from each /loader</a:t>
+            </a:r>
+            <a:endParaRPr lang="en-US" sz="1250" dirty="0"/>
+          </a:p>
+        </p:txBody>
+      </p:sp>
+      <p:sp>
+        <p:nvSpPr>
+          <p:cNvPr id="16" name="Shape 14"/>
+          <p:cNvSpPr/>
+          <p:nvPr/>
+        </p:nvSpPr>
+        <p:spPr>
+          <a:xfrm>
+            <a:off x="502920" y="5020056"/>
+            <a:ext cx="566928" cy="566928"/>
+          </a:xfrm>
+          <a:prstGeom prst="ellipse">
+            <a:avLst/>
           </a:prstGeom>
           <a:solidFill>
-            <a:srgbClr val="F4F7FA"/>
+            <a:srgbClr val="0B2545"/>
           </a:solidFill>
           <a:ln/>
-          <a:effectLst>
-            <a:outerShdw sx="100000" sy="100000" kx="0" ky="0" algn="bl" rotWithShape="0" blurRad="88900" dist="38100" dir="5400000">
-              <a:srgbClr val="000000">
-                <a:alpha val="12000"/>
-              </a:srgbClr>
-            </a:outerShdw>
-          </a:effectLst>
-        </p:spPr>
-      </p:sp>
-      <p:sp>
-        <p:nvSpPr>
-          <p:cNvPr id="14" name="Shape 10"/>
-          <p:cNvSpPr/>
-          <p:nvPr/>
-        </p:nvSpPr>
-        <p:spPr>
-          <a:xfrm>
-            <a:off x="8549640" y="1581912"/>
-            <a:ext cx="713232" cy="713232"/>
-          </a:xfrm>
-          <a:prstGeom prst="ellipse">
-            <a:avLst/>
-          </a:prstGeom>
-          <a:solidFill>
-            <a:srgbClr val="E8A33D"/>
-          </a:solidFill>
-          <a:ln/>
-        </p:spPr>
-      </p:sp>
-      <p:pic>
-        <p:nvPicPr>
-          <p:cNvPr id="15" name="Image 2" descr="preencoded.png">    </p:cNvPr>
-          <p:cNvPicPr>
-            <a:picLocks noChangeAspect="1"/>
-          </p:cNvPicPr>
-          <p:nvPr/>
-        </p:nvPicPr>
-        <p:blipFill>
-          <a:blip r:embed="rId3"/>
-          <a:stretch>
-            <a:fillRect/>
-          </a:stretch>
-        </p:blipFill>
-        <p:spPr>
-          <a:xfrm>
-            <a:off x="8735080" y="1767352"/>
-            <a:ext cx="342351" cy="342351"/>
-          </a:xfrm>
-          <a:prstGeom prst="rect">
-            <a:avLst/>
-          </a:prstGeom>
-        </p:spPr>
-      </p:pic>
-      <p:sp>
-        <p:nvSpPr>
-          <p:cNvPr id="16" name="Text 11"/>
-          <p:cNvSpPr/>
-          <p:nvPr/>
-        </p:nvSpPr>
-        <p:spPr>
-          <a:xfrm>
-            <a:off x="9390888" y="1600200"/>
-            <a:ext cx="2377440" cy="685800"/>
+        </p:spPr>
+      </p:sp>
+      <p:sp>
+        <p:nvSpPr>
+          <p:cNvPr id="17" name="Text 15"/>
+          <p:cNvSpPr/>
+          <p:nvPr/>
+        </p:nvSpPr>
+        <p:spPr>
+          <a:xfrm>
+            <a:off x="502920" y="5020056"/>
+            <a:ext cx="566928" cy="566928"/>
+          </a:xfrm>
+          <a:prstGeom prst="rect">
+            <a:avLst/>
+          </a:prstGeom>
+          <a:noFill/>
+          <a:ln/>
+        </p:spPr>
+        <p:txBody>
+          <a:bodyPr wrap="square" lIns="0" tIns="0" rIns="0" bIns="0" rtlCol="0" anchor="ctr"/>
+          <a:lstStyle/>
+          <a:p>
+            <a:pPr algn="ctr" indent="0" marL="0">
+              <a:buNone/>
+            </a:pPr>
+            <a:r>
+              <a:rPr lang="en-US" sz="1800" b="1" dirty="0">
+                <a:solidFill>
+                  <a:srgbClr val="FFFFFF"/>
+                </a:solidFill>
+                <a:latin typeface="Calibri" pitchFamily="34" charset="0"/>
+                <a:ea typeface="Calibri" pitchFamily="34" charset="-122"/>
+                <a:cs typeface="Calibri" pitchFamily="34" charset="-120"/>
+              </a:rPr>
+              <a:t>5</a:t>
+            </a:r>
+            <a:endParaRPr lang="en-US" sz="1800" dirty="0"/>
+          </a:p>
+        </p:txBody>
+      </p:sp>
+      <p:sp>
+        <p:nvSpPr>
+          <p:cNvPr id="18" name="Text 16"/>
+          <p:cNvSpPr/>
+          <p:nvPr/>
+        </p:nvSpPr>
+        <p:spPr>
+          <a:xfrm>
+            <a:off x="1216152" y="4983480"/>
+            <a:ext cx="4709160" cy="777240"/>
           </a:xfrm>
           <a:prstGeom prst="rect">
             <a:avLst/>
@@ -5987,35 +6402,94 @@
           <a:p>
             <a:pPr indent="0" marL="0">
               <a:lnSpc>
-                <a:spcPts val="1600"/>
+                <a:spcPts val="1500"/>
               </a:lnSpc>
               <a:buNone/>
             </a:pPr>
             <a:r>
-              <a:rPr lang="en-US" sz="1450" b="1" dirty="0">
-                <a:solidFill>
-                  <a:srgbClr val="0B2545"/>
-                </a:solidFill>
-                <a:latin typeface="Calibri" pitchFamily="34" charset="0"/>
-                <a:ea typeface="Calibri" pitchFamily="34" charset="-122"/>
-                <a:cs typeface="Calibri" pitchFamily="34" charset="-120"/>
-              </a:rPr>
-              <a:t>Embeddings 504 ≠ CORS</a:t>
-            </a:r>
-            <a:endParaRPr lang="en-US" sz="1450" dirty="0"/>
-          </a:p>
-        </p:txBody>
-      </p:sp>
-      <p:sp>
-        <p:nvSpPr>
-          <p:cNvPr id="17" name="Text 12"/>
-          <p:cNvSpPr/>
-          <p:nvPr/>
-        </p:nvSpPr>
-        <p:spPr>
-          <a:xfrm>
-            <a:off x="8549640" y="2350008"/>
-            <a:ext cx="3145536" cy="1005840"/>
+              <a:rPr lang="en-US" sz="1250" dirty="0">
+                <a:solidFill>
+                  <a:srgbClr val="1E293B"/>
+                </a:solidFill>
+                <a:latin typeface="Calibri" pitchFamily="34" charset="0"/>
+                <a:ea typeface="Calibri" pitchFamily="34" charset="-122"/>
+                <a:cs typeface="Calibri" pitchFamily="34" charset="-120"/>
+              </a:rPr>
+              <a:t>Declare AI web-component tags in vite-env.d.ts (no React wrappers)</a:t>
+            </a:r>
+            <a:endParaRPr lang="en-US" sz="1250" dirty="0"/>
+          </a:p>
+        </p:txBody>
+      </p:sp>
+      <p:sp>
+        <p:nvSpPr>
+          <p:cNvPr id="19" name="Shape 17"/>
+          <p:cNvSpPr/>
+          <p:nvPr/>
+        </p:nvSpPr>
+        <p:spPr>
+          <a:xfrm>
+            <a:off x="6309360" y="1362456"/>
+            <a:ext cx="566928" cy="566928"/>
+          </a:xfrm>
+          <a:prstGeom prst="ellipse">
+            <a:avLst/>
+          </a:prstGeom>
+          <a:solidFill>
+            <a:srgbClr val="1C7293"/>
+          </a:solidFill>
+          <a:ln/>
+        </p:spPr>
+      </p:sp>
+      <p:sp>
+        <p:nvSpPr>
+          <p:cNvPr id="20" name="Text 18"/>
+          <p:cNvSpPr/>
+          <p:nvPr/>
+        </p:nvSpPr>
+        <p:spPr>
+          <a:xfrm>
+            <a:off x="6309360" y="1362456"/>
+            <a:ext cx="566928" cy="566928"/>
+          </a:xfrm>
+          <a:prstGeom prst="rect">
+            <a:avLst/>
+          </a:prstGeom>
+          <a:noFill/>
+          <a:ln/>
+        </p:spPr>
+        <p:txBody>
+          <a:bodyPr wrap="square" lIns="0" tIns="0" rIns="0" bIns="0" rtlCol="0" anchor="ctr"/>
+          <a:lstStyle/>
+          <a:p>
+            <a:pPr algn="ctr" indent="0" marL="0">
+              <a:buNone/>
+            </a:pPr>
+            <a:r>
+              <a:rPr lang="en-US" sz="1800" b="1" dirty="0">
+                <a:solidFill>
+                  <a:srgbClr val="FFFFFF"/>
+                </a:solidFill>
+                <a:latin typeface="Calibri" pitchFamily="34" charset="0"/>
+                <a:ea typeface="Calibri" pitchFamily="34" charset="-122"/>
+                <a:cs typeface="Calibri" pitchFamily="34" charset="-120"/>
+              </a:rPr>
+              <a:t>6</a:t>
+            </a:r>
+            <a:endParaRPr lang="en-US" sz="1800" dirty="0"/>
+          </a:p>
+        </p:txBody>
+      </p:sp>
+      <p:sp>
+        <p:nvSpPr>
+          <p:cNvPr id="21" name="Text 19"/>
+          <p:cNvSpPr/>
+          <p:nvPr/>
+        </p:nvSpPr>
+        <p:spPr>
+          <a:xfrm>
+            <a:off x="7022592" y="1325880"/>
+            <a:ext cx="4709160" cy="777240"/>
           </a:xfrm>
           <a:prstGeom prst="rect">
             <a:avLst/>
@@ -6029,108 +6503,94 @@
           <a:p>
             <a:pPr indent="0" marL="0">
               <a:lnSpc>
-                <a:spcPts val="1450"/>
+                <a:spcPts val="1500"/>
               </a:lnSpc>
               <a:buNone/>
             </a:pPr>
             <a:r>
-              <a:rPr lang="en-US" sz="1150" dirty="0">
-                <a:solidFill>
-                  <a:srgbClr val="5B6B7F"/>
-                </a:solidFill>
-                <a:latin typeface="Calibri" pitchFamily="34" charset="0"/>
-                <a:ea typeface="Calibri" pitchFamily="34" charset="-122"/>
-                <a:cs typeface="Calibri" pitchFamily="34" charset="-120"/>
-              </a:rPr>
-              <a:t>Generic error looks like CORS but is a 504 timeout. Wide-schema reference layers trigger it; narrow ones succeed.</a:t>
-            </a:r>
-            <a:endParaRPr lang="en-US" sz="1150" dirty="0"/>
-          </a:p>
-        </p:txBody>
-      </p:sp>
-      <p:sp>
-        <p:nvSpPr>
-          <p:cNvPr id="18" name="Shape 13"/>
-          <p:cNvSpPr/>
-          <p:nvPr/>
-        </p:nvSpPr>
-        <p:spPr>
-          <a:xfrm>
-            <a:off x="502920" y="3749040"/>
-            <a:ext cx="3657600" cy="2148840"/>
-          </a:xfrm>
-          <a:prstGeom prst="roundRect">
-            <a:avLst>
-              <a:gd name="adj" fmla="val 3404"/>
-            </a:avLst>
+              <a:rPr lang="en-US" sz="1250" dirty="0">
+                <a:solidFill>
+                  <a:srgbClr val="1E293B"/>
+                </a:solidFill>
+                <a:latin typeface="Calibri" pitchFamily="34" charset="0"/>
+                <a:ea typeface="Calibri" pitchFamily="34" charset="-122"/>
+                <a:cs typeface="Calibri" pitchFamily="34" charset="-120"/>
+              </a:rPr>
+              <a:t>Map + assistant layout; set referenceElement to the real &lt;arcgis-map&gt;</a:t>
+            </a:r>
+            <a:endParaRPr lang="en-US" sz="1250" dirty="0"/>
+          </a:p>
+        </p:txBody>
+      </p:sp>
+      <p:sp>
+        <p:nvSpPr>
+          <p:cNvPr id="22" name="Shape 20"/>
+          <p:cNvSpPr/>
+          <p:nvPr/>
+        </p:nvSpPr>
+        <p:spPr>
+          <a:xfrm>
+            <a:off x="6309360" y="2276856"/>
+            <a:ext cx="566928" cy="566928"/>
+          </a:xfrm>
+          <a:prstGeom prst="ellipse">
+            <a:avLst/>
           </a:prstGeom>
           <a:solidFill>
-            <a:srgbClr val="F4F7FA"/>
+            <a:srgbClr val="0B2545"/>
           </a:solidFill>
           <a:ln/>
-          <a:effectLst>
-            <a:outerShdw sx="100000" sy="100000" kx="0" ky="0" algn="bl" rotWithShape="0" blurRad="88900" dist="38100" dir="5400000">
-              <a:srgbClr val="000000">
-                <a:alpha val="12000"/>
-              </a:srgbClr>
-            </a:outerShdw>
-          </a:effectLst>
-        </p:spPr>
-      </p:sp>
-      <p:sp>
-        <p:nvSpPr>
-          <p:cNvPr id="19" name="Shape 14"/>
-          <p:cNvSpPr/>
-          <p:nvPr/>
-        </p:nvSpPr>
-        <p:spPr>
-          <a:xfrm>
-            <a:off x="758952" y="4005072"/>
-            <a:ext cx="713232" cy="713232"/>
-          </a:xfrm>
-          <a:prstGeom prst="ellipse">
-            <a:avLst/>
-          </a:prstGeom>
-          <a:solidFill>
-            <a:srgbClr val="E8A33D"/>
-          </a:solidFill>
-          <a:ln/>
-        </p:spPr>
-      </p:sp>
-      <p:pic>
-        <p:nvPicPr>
-          <p:cNvPr id="20" name="Image 3" descr="preencoded.png">    </p:cNvPr>
-          <p:cNvPicPr>
-            <a:picLocks noChangeAspect="1"/>
-          </p:cNvPicPr>
-          <p:nvPr/>
-        </p:nvPicPr>
-        <p:blipFill>
-          <a:blip r:embed="rId4"/>
-          <a:stretch>
-            <a:fillRect/>
-          </a:stretch>
-        </p:blipFill>
-        <p:spPr>
-          <a:xfrm>
-            <a:off x="944392" y="4190512"/>
-            <a:ext cx="342351" cy="342351"/>
-          </a:xfrm>
-          <a:prstGeom prst="rect">
-            <a:avLst/>
-          </a:prstGeom>
-        </p:spPr>
-      </p:pic>
-      <p:sp>
-        <p:nvSpPr>
-          <p:cNvPr id="21" name="Text 15"/>
-          <p:cNvSpPr/>
-          <p:nvPr/>
-        </p:nvSpPr>
-        <p:spPr>
-          <a:xfrm>
-            <a:off x="1600200" y="4023360"/>
-            <a:ext cx="2377440" cy="685800"/>
+        </p:spPr>
+      </p:sp>
+      <p:sp>
+        <p:nvSpPr>
+          <p:cNvPr id="23" name="Text 21"/>
+          <p:cNvSpPr/>
+          <p:nvPr/>
+        </p:nvSpPr>
+        <p:spPr>
+          <a:xfrm>
+            <a:off x="6309360" y="2276856"/>
+            <a:ext cx="566928" cy="566928"/>
+          </a:xfrm>
+          <a:prstGeom prst="rect">
+            <a:avLst/>
+          </a:prstGeom>
+          <a:noFill/>
+          <a:ln/>
+        </p:spPr>
+        <p:txBody>
+          <a:bodyPr wrap="square" lIns="0" tIns="0" rIns="0" bIns="0" rtlCol="0" anchor="ctr"/>
+          <a:lstStyle/>
+          <a:p>
+            <a:pPr algn="ctr" indent="0" marL="0">
+              <a:buNone/>
+            </a:pPr>
+            <a:r>
+              <a:rPr lang="en-US" sz="1800" b="1" dirty="0">
+                <a:solidFill>
+                  <a:srgbClr val="FFFFFF"/>
+                </a:solidFill>
+                <a:latin typeface="Calibri" pitchFamily="34" charset="0"/>
+                <a:ea typeface="Calibri" pitchFamily="34" charset="-122"/>
+                <a:cs typeface="Calibri" pitchFamily="34" charset="-120"/>
+              </a:rPr>
+              <a:t>7</a:t>
+            </a:r>
+            <a:endParaRPr lang="en-US" sz="1800" dirty="0"/>
+          </a:p>
+        </p:txBody>
+      </p:sp>
+      <p:sp>
+        <p:nvSpPr>
+          <p:cNvPr id="24" name="Text 22"/>
+          <p:cNvSpPr/>
+          <p:nvPr/>
+        </p:nvSpPr>
+        <p:spPr>
+          <a:xfrm>
+            <a:off x="7022592" y="2240280"/>
+            <a:ext cx="4709160" cy="777240"/>
           </a:xfrm>
           <a:prstGeom prst="rect">
             <a:avLst/>
@@ -6144,35 +6604,94 @@
           <a:p>
             <a:pPr indent="0" marL="0">
               <a:lnSpc>
-                <a:spcPts val="1600"/>
+                <a:spcPts val="1500"/>
               </a:lnSpc>
               <a:buNone/>
             </a:pPr>
             <a:r>
-              <a:rPr lang="en-US" sz="1450" b="1" dirty="0">
-                <a:solidFill>
-                  <a:srgbClr val="0B2545"/>
-                </a:solidFill>
-                <a:latin typeface="Calibri" pitchFamily="34" charset="0"/>
-                <a:ea typeface="Calibri" pitchFamily="34" charset="-122"/>
-                <a:cs typeface="Calibri" pitchFamily="34" charset="-120"/>
-              </a:rPr>
-              <a:t>Cross-layer 413</a:t>
-            </a:r>
-            <a:endParaRPr lang="en-US" sz="1450" dirty="0"/>
-          </a:p>
-        </p:txBody>
-      </p:sp>
-      <p:sp>
-        <p:nvSpPr>
-          <p:cNvPr id="22" name="Text 16"/>
-          <p:cNvSpPr/>
-          <p:nvPr/>
-        </p:nvSpPr>
-        <p:spPr>
-          <a:xfrm>
-            <a:off x="758952" y="4773168"/>
-            <a:ext cx="3145536" cy="1005840"/>
+              <a:rPr lang="en-US" sz="1250" dirty="0">
+                <a:solidFill>
+                  <a:srgbClr val="1E293B"/>
+                </a:solidFill>
+                <a:latin typeface="Calibri" pitchFamily="34" charset="0"/>
+                <a:ea typeface="Calibri" pitchFamily="34" charset="-122"/>
+                <a:cs typeface="Calibri" pitchFamily="34" charset="-120"/>
+              </a:rPr>
+              <a:t>AuthGate (named-user OAuth) + ErrorBoundary</a:t>
+            </a:r>
+            <a:endParaRPr lang="en-US" sz="1250" dirty="0"/>
+          </a:p>
+        </p:txBody>
+      </p:sp>
+      <p:sp>
+        <p:nvSpPr>
+          <p:cNvPr id="25" name="Shape 23"/>
+          <p:cNvSpPr/>
+          <p:nvPr/>
+        </p:nvSpPr>
+        <p:spPr>
+          <a:xfrm>
+            <a:off x="6309360" y="3191256"/>
+            <a:ext cx="566928" cy="566928"/>
+          </a:xfrm>
+          <a:prstGeom prst="ellipse">
+            <a:avLst/>
+          </a:prstGeom>
+          <a:solidFill>
+            <a:srgbClr val="1C7293"/>
+          </a:solidFill>
+          <a:ln/>
+        </p:spPr>
+      </p:sp>
+      <p:sp>
+        <p:nvSpPr>
+          <p:cNvPr id="26" name="Text 24"/>
+          <p:cNvSpPr/>
+          <p:nvPr/>
+        </p:nvSpPr>
+        <p:spPr>
+          <a:xfrm>
+            <a:off x="6309360" y="3191256"/>
+            <a:ext cx="566928" cy="566928"/>
+          </a:xfrm>
+          <a:prstGeom prst="rect">
+            <a:avLst/>
+          </a:prstGeom>
+          <a:noFill/>
+          <a:ln/>
+        </p:spPr>
+        <p:txBody>
+          <a:bodyPr wrap="square" lIns="0" tIns="0" rIns="0" bIns="0" rtlCol="0" anchor="ctr"/>
+          <a:lstStyle/>
+          <a:p>
+            <a:pPr algn="ctr" indent="0" marL="0">
+              <a:buNone/>
+            </a:pPr>
+            <a:r>
+              <a:rPr lang="en-US" sz="1800" b="1" dirty="0">
+                <a:solidFill>
+                  <a:srgbClr val="FFFFFF"/>
+                </a:solidFill>
+                <a:latin typeface="Calibri" pitchFamily="34" charset="0"/>
+                <a:ea typeface="Calibri" pitchFamily="34" charset="-122"/>
+                <a:cs typeface="Calibri" pitchFamily="34" charset="-120"/>
+              </a:rPr>
+              <a:t>8</a:t>
+            </a:r>
+            <a:endParaRPr lang="en-US" sz="1800" dirty="0"/>
+          </a:p>
+        </p:txBody>
+      </p:sp>
+      <p:sp>
+        <p:nvSpPr>
+          <p:cNvPr id="27" name="Text 25"/>
+          <p:cNvSpPr/>
+          <p:nvPr/>
+        </p:nvSpPr>
+        <p:spPr>
+          <a:xfrm>
+            <a:off x="7022592" y="3154680"/>
+            <a:ext cx="4709160" cy="777240"/>
           </a:xfrm>
           <a:prstGeom prst="rect">
             <a:avLst/>
@@ -6186,108 +6705,94 @@
           <a:p>
             <a:pPr indent="0" marL="0">
               <a:lnSpc>
-                <a:spcPts val="1450"/>
+                <a:spcPts val="1500"/>
               </a:lnSpc>
               <a:buNone/>
             </a:pPr>
             <a:r>
-              <a:rPr lang="en-US" sz="1150" dirty="0">
-                <a:solidFill>
-                  <a:srgbClr val="5B6B7F"/>
-                </a:solidFill>
-                <a:latin typeface="Calibri" pitchFamily="34" charset="0"/>
-                <a:ea typeface="Calibri" pitchFamily="34" charset="-122"/>
-                <a:cs typeface="Calibri" pitchFamily="34" charset="-120"/>
-              </a:rPr>
-              <a:t>OOB agent submits national polygons as a spatial filter → 413. Fix: state-scope the prompt or pre-compute the attribute.</a:t>
-            </a:r>
-            <a:endParaRPr lang="en-US" sz="1150" dirty="0"/>
-          </a:p>
-        </p:txBody>
-      </p:sp>
-      <p:sp>
-        <p:nvSpPr>
-          <p:cNvPr id="23" name="Shape 17"/>
-          <p:cNvSpPr/>
-          <p:nvPr/>
-        </p:nvSpPr>
-        <p:spPr>
-          <a:xfrm>
-            <a:off x="4398264" y="3749040"/>
-            <a:ext cx="3657600" cy="2148840"/>
-          </a:xfrm>
-          <a:prstGeom prst="roundRect">
-            <a:avLst>
-              <a:gd name="adj" fmla="val 3404"/>
-            </a:avLst>
+              <a:rPr lang="en-US" sz="1250" dirty="0">
+                <a:solidFill>
+                  <a:srgbClr val="1E293B"/>
+                </a:solidFill>
+                <a:latin typeface="Calibri" pitchFamily="34" charset="0"/>
+                <a:ea typeface="Calibri" pitchFamily="34" charset="-122"/>
+                <a:cs typeface="Calibri" pitchFamily="34" charset="-120"/>
+              </a:rPr>
+              <a:t>Scenario config + prompts; copy stays out of components</a:t>
+            </a:r>
+            <a:endParaRPr lang="en-US" sz="1250" dirty="0"/>
+          </a:p>
+        </p:txBody>
+      </p:sp>
+      <p:sp>
+        <p:nvSpPr>
+          <p:cNvPr id="28" name="Shape 26"/>
+          <p:cNvSpPr/>
+          <p:nvPr/>
+        </p:nvSpPr>
+        <p:spPr>
+          <a:xfrm>
+            <a:off x="6309360" y="4105656"/>
+            <a:ext cx="566928" cy="566928"/>
+          </a:xfrm>
+          <a:prstGeom prst="ellipse">
+            <a:avLst/>
           </a:prstGeom>
           <a:solidFill>
-            <a:srgbClr val="F4F7FA"/>
+            <a:srgbClr val="0B2545"/>
           </a:solidFill>
           <a:ln/>
-          <a:effectLst>
-            <a:outerShdw sx="100000" sy="100000" kx="0" ky="0" algn="bl" rotWithShape="0" blurRad="88900" dist="38100" dir="5400000">
-              <a:srgbClr val="000000">
-                <a:alpha val="12000"/>
-              </a:srgbClr>
-            </a:outerShdw>
-          </a:effectLst>
-        </p:spPr>
-      </p:sp>
-      <p:sp>
-        <p:nvSpPr>
-          <p:cNvPr id="24" name="Shape 18"/>
-          <p:cNvSpPr/>
-          <p:nvPr/>
-        </p:nvSpPr>
-        <p:spPr>
-          <a:xfrm>
-            <a:off x="4654296" y="4005072"/>
-            <a:ext cx="713232" cy="713232"/>
-          </a:xfrm>
-          <a:prstGeom prst="ellipse">
-            <a:avLst/>
-          </a:prstGeom>
-          <a:solidFill>
-            <a:srgbClr val="E8A33D"/>
-          </a:solidFill>
-          <a:ln/>
-        </p:spPr>
-      </p:sp>
-      <p:pic>
-        <p:nvPicPr>
-          <p:cNvPr id="25" name="Image 4" descr="preencoded.png">    </p:cNvPr>
-          <p:cNvPicPr>
-            <a:picLocks noChangeAspect="1"/>
-          </p:cNvPicPr>
-          <p:nvPr/>
-        </p:nvPicPr>
-        <p:blipFill>
-          <a:blip r:embed="rId5"/>
-          <a:stretch>
-            <a:fillRect/>
-          </a:stretch>
-        </p:blipFill>
-        <p:spPr>
-          <a:xfrm>
-            <a:off x="4839736" y="4190512"/>
-            <a:ext cx="342351" cy="342351"/>
-          </a:xfrm>
-          <a:prstGeom prst="rect">
-            <a:avLst/>
-          </a:prstGeom>
-        </p:spPr>
-      </p:pic>
-      <p:sp>
-        <p:nvSpPr>
-          <p:cNvPr id="26" name="Text 19"/>
-          <p:cNvSpPr/>
-          <p:nvPr/>
-        </p:nvSpPr>
-        <p:spPr>
-          <a:xfrm>
-            <a:off x="5495544" y="4023360"/>
-            <a:ext cx="2377440" cy="685800"/>
+        </p:spPr>
+      </p:sp>
+      <p:sp>
+        <p:nvSpPr>
+          <p:cNvPr id="29" name="Text 27"/>
+          <p:cNvSpPr/>
+          <p:nvPr/>
+        </p:nvSpPr>
+        <p:spPr>
+          <a:xfrm>
+            <a:off x="6309360" y="4105656"/>
+            <a:ext cx="566928" cy="566928"/>
+          </a:xfrm>
+          <a:prstGeom prst="rect">
+            <a:avLst/>
+          </a:prstGeom>
+          <a:noFill/>
+          <a:ln/>
+        </p:spPr>
+        <p:txBody>
+          <a:bodyPr wrap="square" lIns="0" tIns="0" rIns="0" bIns="0" rtlCol="0" anchor="ctr"/>
+          <a:lstStyle/>
+          <a:p>
+            <a:pPr algn="ctr" indent="0" marL="0">
+              <a:buNone/>
+            </a:pPr>
+            <a:r>
+              <a:rPr lang="en-US" sz="1800" b="1" dirty="0">
+                <a:solidFill>
+                  <a:srgbClr val="FFFFFF"/>
+                </a:solidFill>
+                <a:latin typeface="Calibri" pitchFamily="34" charset="0"/>
+                <a:ea typeface="Calibri" pitchFamily="34" charset="-122"/>
+                <a:cs typeface="Calibri" pitchFamily="34" charset="-120"/>
+              </a:rPr>
+              <a:t>9</a:t>
+            </a:r>
+            <a:endParaRPr lang="en-US" sz="1800" dirty="0"/>
+          </a:p>
+        </p:txBody>
+      </p:sp>
+      <p:sp>
+        <p:nvSpPr>
+          <p:cNvPr id="30" name="Text 28"/>
+          <p:cNvSpPr/>
+          <p:nvPr/>
+        </p:nvSpPr>
+        <p:spPr>
+          <a:xfrm>
+            <a:off x="7022592" y="4069080"/>
+            <a:ext cx="4709160" cy="777240"/>
           </a:xfrm>
           <a:prstGeom prst="rect">
             <a:avLst/>
@@ -6301,35 +6806,94 @@
           <a:p>
             <a:pPr indent="0" marL="0">
               <a:lnSpc>
-                <a:spcPts val="1600"/>
+                <a:spcPts val="1500"/>
               </a:lnSpc>
               <a:buNone/>
             </a:pPr>
             <a:r>
-              <a:rPr lang="en-US" sz="1450" b="1" dirty="0">
-                <a:solidFill>
-                  <a:srgbClr val="0B2545"/>
-                </a:solidFill>
-                <a:latin typeface="Calibri" pitchFamily="34" charset="0"/>
-                <a:ea typeface="Calibri" pitchFamily="34" charset="-122"/>
-                <a:cs typeface="Calibri" pitchFamily="34" charset="-120"/>
-              </a:rPr>
-              <a:t>Schema introspection lies</a:t>
-            </a:r>
-            <a:endParaRPr lang="en-US" sz="1450" dirty="0"/>
-          </a:p>
-        </p:txBody>
-      </p:sp>
-      <p:sp>
-        <p:nvSpPr>
-          <p:cNvPr id="27" name="Text 20"/>
-          <p:cNvSpPr/>
-          <p:nvPr/>
-        </p:nvSpPr>
-        <p:spPr>
-          <a:xfrm>
-            <a:off x="4654296" y="4773168"/>
-            <a:ext cx="3145536" cy="1005840"/>
+              <a:rPr lang="en-US" sz="1250" dirty="0">
+                <a:solidFill>
+                  <a:srgbClr val="1E293B"/>
+                </a:solidFill>
+                <a:latin typeface="Calibri" pitchFamily="34" charset="0"/>
+                <a:ea typeface="Calibri" pitchFamily="34" charset="-122"/>
+                <a:cs typeface="Calibri" pitchFamily="34" charset="-120"/>
+              </a:rPr>
+              <a:t>Env vars + npm run dev → localhost:5173</a:t>
+            </a:r>
+            <a:endParaRPr lang="en-US" sz="1250" dirty="0"/>
+          </a:p>
+        </p:txBody>
+      </p:sp>
+      <p:sp>
+        <p:nvSpPr>
+          <p:cNvPr id="31" name="Shape 29"/>
+          <p:cNvSpPr/>
+          <p:nvPr/>
+        </p:nvSpPr>
+        <p:spPr>
+          <a:xfrm>
+            <a:off x="6309360" y="5020056"/>
+            <a:ext cx="566928" cy="566928"/>
+          </a:xfrm>
+          <a:prstGeom prst="ellipse">
+            <a:avLst/>
+          </a:prstGeom>
+          <a:solidFill>
+            <a:srgbClr val="1C7293"/>
+          </a:solidFill>
+          <a:ln/>
+        </p:spPr>
+      </p:sp>
+      <p:sp>
+        <p:nvSpPr>
+          <p:cNvPr id="32" name="Text 30"/>
+          <p:cNvSpPr/>
+          <p:nvPr/>
+        </p:nvSpPr>
+        <p:spPr>
+          <a:xfrm>
+            <a:off x="6309360" y="5020056"/>
+            <a:ext cx="566928" cy="566928"/>
+          </a:xfrm>
+          <a:prstGeom prst="rect">
+            <a:avLst/>
+          </a:prstGeom>
+          <a:noFill/>
+          <a:ln/>
+        </p:spPr>
+        <p:txBody>
+          <a:bodyPr wrap="square" lIns="0" tIns="0" rIns="0" bIns="0" rtlCol="0" anchor="ctr"/>
+          <a:lstStyle/>
+          <a:p>
+            <a:pPr algn="ctr" indent="0" marL="0">
+              <a:buNone/>
+            </a:pPr>
+            <a:r>
+              <a:rPr lang="en-US" sz="1800" b="1" dirty="0">
+                <a:solidFill>
+                  <a:srgbClr val="FFFFFF"/>
+                </a:solidFill>
+                <a:latin typeface="Calibri" pitchFamily="34" charset="0"/>
+                <a:ea typeface="Calibri" pitchFamily="34" charset="-122"/>
+                <a:cs typeface="Calibri" pitchFamily="34" charset="-120"/>
+              </a:rPr>
+              <a:t>10</a:t>
+            </a:r>
+            <a:endParaRPr lang="en-US" sz="1800" dirty="0"/>
+          </a:p>
+        </p:txBody>
+      </p:sp>
+      <p:sp>
+        <p:nvSpPr>
+          <p:cNvPr id="33" name="Text 31"/>
+          <p:cNvSpPr/>
+          <p:nvPr/>
+        </p:nvSpPr>
+        <p:spPr>
+          <a:xfrm>
+            <a:off x="7022592" y="4983480"/>
+            <a:ext cx="4709160" cy="777240"/>
           </a:xfrm>
           <a:prstGeom prst="rect">
             <a:avLst/>
@@ -6343,185 +6907,28 @@
           <a:p>
             <a:pPr indent="0" marL="0">
               <a:lnSpc>
-                <a:spcPts val="1450"/>
+                <a:spcPts val="1500"/>
               </a:lnSpc>
               <a:buNone/>
             </a:pPr>
             <a:r>
-              <a:rPr lang="en-US" sz="1150" dirty="0">
-                <a:solidFill>
-                  <a:srgbClr val="5B6B7F"/>
-                </a:solidFill>
-                <a:latin typeface="Calibri" pitchFamily="34" charset="0"/>
-                <a:ea typeface="Calibri" pitchFamily="34" charset="-122"/>
-                <a:cs typeface="Calibri" pitchFamily="34" charset="-120"/>
-              </a:rPr>
-              <a:t>"List fields" returned two contradictory lists in one turn. Verify schema via AGO Data → Fields — never the assistant.</a:t>
-            </a:r>
-            <a:endParaRPr lang="en-US" sz="1150" dirty="0"/>
-          </a:p>
-        </p:txBody>
-      </p:sp>
-      <p:sp>
-        <p:nvSpPr>
-          <p:cNvPr id="28" name="Shape 21"/>
-          <p:cNvSpPr/>
-          <p:nvPr/>
-        </p:nvSpPr>
-        <p:spPr>
-          <a:xfrm>
-            <a:off x="8293608" y="3749040"/>
-            <a:ext cx="3657600" cy="2148840"/>
-          </a:xfrm>
-          <a:prstGeom prst="roundRect">
-            <a:avLst>
-              <a:gd name="adj" fmla="val 3404"/>
-            </a:avLst>
-          </a:prstGeom>
-          <a:solidFill>
-            <a:srgbClr val="F4F7FA"/>
-          </a:solidFill>
-          <a:ln/>
-          <a:effectLst>
-            <a:outerShdw sx="100000" sy="100000" kx="0" ky="0" algn="bl" rotWithShape="0" blurRad="88900" dist="38100" dir="5400000">
-              <a:srgbClr val="000000">
-                <a:alpha val="12000"/>
-              </a:srgbClr>
-            </a:outerShdw>
-          </a:effectLst>
-        </p:spPr>
-      </p:sp>
-      <p:sp>
-        <p:nvSpPr>
-          <p:cNvPr id="29" name="Shape 22"/>
-          <p:cNvSpPr/>
-          <p:nvPr/>
-        </p:nvSpPr>
-        <p:spPr>
-          <a:xfrm>
-            <a:off x="8549640" y="4005072"/>
-            <a:ext cx="713232" cy="713232"/>
-          </a:xfrm>
-          <a:prstGeom prst="ellipse">
-            <a:avLst/>
-          </a:prstGeom>
-          <a:solidFill>
-            <a:srgbClr val="E8A33D"/>
-          </a:solidFill>
-          <a:ln/>
-        </p:spPr>
-      </p:sp>
-      <p:pic>
-        <p:nvPicPr>
-          <p:cNvPr id="30" name="Image 5" descr="preencoded.png">    </p:cNvPr>
-          <p:cNvPicPr>
-            <a:picLocks noChangeAspect="1"/>
-          </p:cNvPicPr>
-          <p:nvPr/>
-        </p:nvPicPr>
-        <p:blipFill>
-          <a:blip r:embed="rId6"/>
-          <a:stretch>
-            <a:fillRect/>
-          </a:stretch>
-        </p:blipFill>
-        <p:spPr>
-          <a:xfrm>
-            <a:off x="8735080" y="4190512"/>
-            <a:ext cx="342351" cy="342351"/>
-          </a:xfrm>
-          <a:prstGeom prst="rect">
-            <a:avLst/>
-          </a:prstGeom>
-        </p:spPr>
-      </p:pic>
-      <p:sp>
-        <p:nvSpPr>
-          <p:cNvPr id="31" name="Text 23"/>
-          <p:cNvSpPr/>
-          <p:nvPr/>
-        </p:nvSpPr>
-        <p:spPr>
-          <a:xfrm>
-            <a:off x="9390888" y="4023360"/>
-            <a:ext cx="2377440" cy="685800"/>
-          </a:xfrm>
-          <a:prstGeom prst="rect">
-            <a:avLst/>
-          </a:prstGeom>
-          <a:noFill/>
-          <a:ln/>
-        </p:spPr>
-        <p:txBody>
-          <a:bodyPr wrap="square" lIns="0" tIns="0" rIns="0" bIns="0" rtlCol="0" anchor="ctr"/>
-          <a:lstStyle/>
-          <a:p>
-            <a:pPr indent="0" marL="0">
-              <a:lnSpc>
-                <a:spcPts val="1600"/>
-              </a:lnSpc>
-              <a:buNone/>
-            </a:pPr>
-            <a:r>
-              <a:rPr lang="en-US" sz="1450" b="1" dirty="0">
-                <a:solidFill>
-                  <a:srgbClr val="0B2545"/>
-                </a:solidFill>
-                <a:latin typeface="Calibri" pitchFamily="34" charset="0"/>
-                <a:ea typeface="Calibri" pitchFamily="34" charset="-122"/>
-                <a:cs typeface="Calibri" pitchFamily="34" charset="-120"/>
-              </a:rPr>
-              <a:t>Verify, don't infer</a:t>
-            </a:r>
-            <a:endParaRPr lang="en-US" sz="1450" dirty="0"/>
-          </a:p>
-        </p:txBody>
-      </p:sp>
-      <p:sp>
-        <p:nvSpPr>
-          <p:cNvPr id="32" name="Text 24"/>
-          <p:cNvSpPr/>
-          <p:nvPr/>
-        </p:nvSpPr>
-        <p:spPr>
-          <a:xfrm>
-            <a:off x="8549640" y="4773168"/>
-            <a:ext cx="3145536" cy="1005840"/>
-          </a:xfrm>
-          <a:prstGeom prst="rect">
-            <a:avLst/>
-          </a:prstGeom>
-          <a:noFill/>
-          <a:ln/>
-        </p:spPr>
-        <p:txBody>
-          <a:bodyPr wrap="square" lIns="0" tIns="0" rIns="0" bIns="0" rtlCol="0" anchor="ctr"/>
-          <a:lstStyle/>
-          <a:p>
-            <a:pPr indent="0" marL="0">
-              <a:lnSpc>
-                <a:spcPts val="1450"/>
-              </a:lnSpc>
-              <a:buNone/>
-            </a:pPr>
-            <a:r>
-              <a:rPr lang="en-US" sz="1150" dirty="0">
-                <a:solidFill>
-                  <a:srgbClr val="5B6B7F"/>
-                </a:solidFill>
-                <a:latin typeface="Calibri" pitchFamily="34" charset="0"/>
-                <a:ea typeface="Calibri" pitchFamily="34" charset="-122"/>
-                <a:cs typeface="Calibri" pitchFamily="34" charset="-120"/>
-              </a:rPr>
-              <a:t>Filenames in dist/ aren't docs. We mounted a non-existent agent on a guess. Confirm against developers.arcgis.com.</a:t>
-            </a:r>
-            <a:endParaRPr lang="en-US" sz="1150" dirty="0"/>
-          </a:p>
-        </p:txBody>
-      </p:sp>
-      <p:sp>
-        <p:nvSpPr>
-          <p:cNvPr id="33" name="Text 25"/>
+              <a:rPr lang="en-US" sz="1250" dirty="0">
+                <a:solidFill>
+                  <a:srgbClr val="1E293B"/>
+                </a:solidFill>
+                <a:latin typeface="Calibri" pitchFamily="34" charset="0"/>
+                <a:ea typeface="Calibri" pitchFamily="34" charset="-122"/>
+                <a:cs typeface="Calibri" pitchFamily="34" charset="-120"/>
+              </a:rPr>
+              <a:t>Verify: force decompositions that reconcile before you trust it</a:t>
+            </a:r>
+            <a:endParaRPr lang="en-US" sz="1250" dirty="0"/>
+          </a:p>
+        </p:txBody>
+      </p:sp>
+      <p:sp>
+        <p:nvSpPr>
+          <p:cNvPr id="34" name="Text 32"/>
           <p:cNvSpPr/>
           <p:nvPr/>
         </p:nvSpPr>
@@ -6560,7 +6967,7 @@
       </p:sp>
       <p:sp>
         <p:nvSpPr>
-          <p:cNvPr id="34" name="Text 26"/>
+          <p:cNvPr id="35" name="Text 33"/>
           <p:cNvSpPr/>
           <p:nvPr/>
         </p:nvSpPr>
@@ -6638,7 +7045,7 @@
         <p:spPr>
           <a:xfrm>
             <a:off x="502920" y="411480"/>
-            <a:ext cx="11155680" cy="640080"/>
+            <a:ext cx="10972800" cy="640080"/>
           </a:xfrm>
           <a:prstGeom prst="rect">
             <a:avLst/>
@@ -6654,7 +7061,7 @@
               <a:buNone/>
             </a:pPr>
             <a:r>
-              <a:rPr lang="en-US" sz="2800" b="1" dirty="0">
+              <a:rPr lang="en-US" sz="3000" b="1" dirty="0">
                 <a:solidFill>
                   <a:srgbClr val="0B2545"/>
                 </a:solidFill>
@@ -6662,9 +7069,9 @@
                 <a:ea typeface="Bookman Old Style" pitchFamily="34" charset="-122"/>
                 <a:cs typeface="Bookman Old Style" pitchFamily="34" charset="-120"/>
               </a:rPr>
-              <a:t>Prompt engineering: what the OOB agent can do</a:t>
-            </a:r>
-            <a:endParaRPr lang="en-US" sz="2800" dirty="0"/>
+              <a:t>Gotchas that cost us a day</a:t>
+            </a:r>
+            <a:endParaRPr lang="en-US" sz="3000" dirty="0"/>
           </a:p>
         </p:txBody>
       </p:sp>
@@ -6676,16 +7083,16 @@
         </p:nvSpPr>
         <p:spPr>
           <a:xfrm>
-            <a:off x="502920" y="1371600"/>
-            <a:ext cx="5486400" cy="4572000"/>
+            <a:off x="502920" y="1325880"/>
+            <a:ext cx="3657600" cy="2148840"/>
           </a:xfrm>
           <a:prstGeom prst="roundRect">
             <a:avLst>
-              <a:gd name="adj" fmla="val 2000"/>
+              <a:gd name="adj" fmla="val 3404"/>
             </a:avLst>
           </a:prstGeom>
           <a:solidFill>
-            <a:srgbClr val="EAF4EF"/>
+            <a:srgbClr val="F4F7FA"/>
           </a:solidFill>
           <a:ln/>
           <a:effectLst>
@@ -6705,14 +7112,14 @@
         </p:nvSpPr>
         <p:spPr>
           <a:xfrm>
-            <a:off x="822960" y="1645920"/>
-            <a:ext cx="731520" cy="731520"/>
+            <a:off x="758952" y="1581912"/>
+            <a:ext cx="713232" cy="713232"/>
           </a:xfrm>
           <a:prstGeom prst="ellipse">
             <a:avLst/>
           </a:prstGeom>
           <a:solidFill>
-            <a:srgbClr val="2A9D6F"/>
+            <a:srgbClr val="E8A33D"/>
           </a:solidFill>
           <a:ln/>
         </p:spPr>
@@ -6733,8 +7140,8 @@
         </p:blipFill>
         <p:spPr>
           <a:xfrm>
-            <a:off x="1013155" y="1836115"/>
-            <a:ext cx="351130" cy="351130"/>
+            <a:off x="944392" y="1767352"/>
+            <a:ext cx="342351" cy="342351"/>
           </a:xfrm>
           <a:prstGeom prst="rect">
             <a:avLst/>
@@ -6749,8 +7156,8 @@
         </p:nvSpPr>
         <p:spPr>
           <a:xfrm>
-            <a:off x="1691640" y="1645920"/>
-            <a:ext cx="4114800" cy="731520"/>
+            <a:off x="1600200" y="1600200"/>
+            <a:ext cx="2377440" cy="685800"/>
           </a:xfrm>
           <a:prstGeom prst="rect">
             <a:avLst/>
@@ -6763,20 +7170,23 @@
           <a:lstStyle/>
           <a:p>
             <a:pPr indent="0" marL="0">
-              <a:buNone/>
-            </a:pPr>
-            <a:r>
-              <a:rPr lang="en-US" sz="1800" b="1" dirty="0">
-                <a:solidFill>
-                  <a:srgbClr val="2A9D6F"/>
-                </a:solidFill>
-                <a:latin typeface="Calibri" pitchFamily="34" charset="0"/>
-                <a:ea typeface="Calibri" pitchFamily="34" charset="-122"/>
-                <a:cs typeface="Calibri" pitchFamily="34" charset="-120"/>
-              </a:rPr>
-              <a:t>Reliable — demo these</a:t>
-            </a:r>
-            <a:endParaRPr lang="en-US" sz="1800" dirty="0"/>
+              <a:lnSpc>
+                <a:spcPts val="1600"/>
+              </a:lnSpc>
+              <a:buNone/>
+            </a:pPr>
+            <a:r>
+              <a:rPr lang="en-US" sz="1450" b="1" dirty="0">
+                <a:solidFill>
+                  <a:srgbClr val="0B2545"/>
+                </a:solidFill>
+                <a:latin typeface="Calibri" pitchFamily="34" charset="0"/>
+                <a:ea typeface="Calibri" pitchFamily="34" charset="-122"/>
+                <a:cs typeface="Calibri" pitchFamily="34" charset="-120"/>
+              </a:rPr>
+              <a:t>Elements don't auto-register</a:t>
+            </a:r>
+            <a:endParaRPr lang="en-US" sz="1450" dirty="0"/>
           </a:p>
         </p:txBody>
       </p:sp>
@@ -6788,137 +7198,37 @@
         </p:nvSpPr>
         <p:spPr>
           <a:xfrm>
-            <a:off x="868680" y="2651760"/>
-            <a:ext cx="4937760" cy="3108960"/>
-          </a:xfrm>
-          <a:prstGeom prst="rect">
-            <a:avLst/>
-          </a:prstGeom>
-          <a:noFill/>
-          <a:ln/>
-        </p:spPr>
-        <p:txBody>
-          <a:bodyPr wrap="square" lIns="0" tIns="0" rIns="0" bIns="0" rtlCol="0" anchor="ctr"/>
-          <a:lstStyle/>
-          <a:p>
-            <a:pPr marL="342900" indent="-342900">
+            <a:off x="758952" y="2350008"/>
+            <a:ext cx="3145536" cy="1005840"/>
+          </a:xfrm>
+          <a:prstGeom prst="rect">
+            <a:avLst/>
+          </a:prstGeom>
+          <a:noFill/>
+          <a:ln/>
+        </p:spPr>
+        <p:txBody>
+          <a:bodyPr wrap="square" lIns="0" tIns="0" rIns="0" bIns="0" rtlCol="0" anchor="ctr"/>
+          <a:lstStyle/>
+          <a:p>
+            <a:pPr indent="0" marL="0">
               <a:lnSpc>
-                <a:spcPts val="2200"/>
+                <a:spcPts val="1450"/>
               </a:lnSpc>
-              <a:spcAft>
-                <a:spcPts val="1200"/>
-              </a:spcAft>
-              <a:buSzPct val="100000"/>
-              <a:buChar char="•"/>
-            </a:pPr>
-            <a:r>
-              <a:rPr lang="en-US" sz="1350" dirty="0">
-                <a:solidFill>
-                  <a:srgbClr val="1E293B"/>
-                </a:solidFill>
-                <a:latin typeface="Calibri" pitchFamily="34" charset="0"/>
-                <a:ea typeface="Calibri" pitchFamily="34" charset="-122"/>
-                <a:cs typeface="Calibri" pitchFamily="34" charset="-120"/>
-              </a:rPr>
-              <a:t>Attribute filters  ("show the high-priority records")</a:t>
-            </a:r>
-            <a:endParaRPr lang="en-US" sz="1350" dirty="0"/>
-          </a:p>
-          <a:p>
-            <a:pPr marL="342900" indent="-342900">
-              <a:lnSpc>
-                <a:spcPts val="2200"/>
-              </a:lnSpc>
-              <a:spcAft>
-                <a:spcPts val="1200"/>
-              </a:spcAft>
-              <a:buSzPct val="100000"/>
-              <a:buChar char="•"/>
-            </a:pPr>
-            <a:r>
-              <a:rPr lang="en-US" sz="1350" dirty="0">
-                <a:solidFill>
-                  <a:srgbClr val="1E293B"/>
-                </a:solidFill>
-                <a:latin typeface="Calibri" pitchFamily="34" charset="0"/>
-                <a:ea typeface="Calibri" pitchFamily="34" charset="-122"/>
-                <a:cs typeface="Calibri" pitchFamily="34" charset="-120"/>
-              </a:rPr>
-              <a:t>Single-group stats  ("average metric for a group")</a:t>
-            </a:r>
-            <a:endParaRPr lang="en-US" sz="1350" dirty="0"/>
-          </a:p>
-          <a:p>
-            <a:pPr marL="342900" indent="-342900">
-              <a:lnSpc>
-                <a:spcPts val="2200"/>
-              </a:lnSpc>
-              <a:spcAft>
-                <a:spcPts val="1200"/>
-              </a:spcAft>
-              <a:buSzPct val="100000"/>
-              <a:buChar char="•"/>
-            </a:pPr>
-            <a:r>
-              <a:rPr lang="en-US" sz="1350" dirty="0">
-                <a:solidFill>
-                  <a:srgbClr val="1E293B"/>
-                </a:solidFill>
-                <a:latin typeface="Calibri" pitchFamily="34" charset="0"/>
-                <a:ea typeface="Calibri" pitchFamily="34" charset="-122"/>
-                <a:cs typeface="Calibri" pitchFamily="34" charset="-120"/>
-              </a:rPr>
-              <a:t>Multi-attribute combos  (filter on two fields)</a:t>
-            </a:r>
-            <a:endParaRPr lang="en-US" sz="1350" dirty="0"/>
-          </a:p>
-          <a:p>
-            <a:pPr marL="342900" indent="-342900">
-              <a:lnSpc>
-                <a:spcPts val="2200"/>
-              </a:lnSpc>
-              <a:spcAft>
-                <a:spcPts val="1200"/>
-              </a:spcAft>
-              <a:buSzPct val="100000"/>
-              <a:buChar char="•"/>
-            </a:pPr>
-            <a:r>
-              <a:rPr lang="en-US" sz="1350" dirty="0">
-                <a:solidFill>
-                  <a:srgbClr val="1E293B"/>
-                </a:solidFill>
-                <a:latin typeface="Calibri" pitchFamily="34" charset="0"/>
-                <a:ea typeface="Calibri" pitchFamily="34" charset="-122"/>
-                <a:cs typeface="Calibri" pitchFamily="34" charset="-120"/>
-              </a:rPr>
-              <a:t>State / region-scoped cross-layer intersects</a:t>
-            </a:r>
-            <a:endParaRPr lang="en-US" sz="1350" dirty="0"/>
-          </a:p>
-          <a:p>
-            <a:pPr marL="342900" indent="-342900">
-              <a:lnSpc>
-                <a:spcPts val="2200"/>
-              </a:lnSpc>
-              <a:spcAft>
-                <a:spcPts val="1200"/>
-              </a:spcAft>
-              <a:buSzPct val="100000"/>
-              <a:buChar char="•"/>
-            </a:pPr>
-            <a:r>
-              <a:rPr lang="en-US" sz="1350" dirty="0">
-                <a:solidFill>
-                  <a:srgbClr val="1E293B"/>
-                </a:solidFill>
-                <a:latin typeface="Calibri" pitchFamily="34" charset="0"/>
-                <a:ea typeface="Calibri" pitchFamily="34" charset="-122"/>
-                <a:cs typeface="Calibri" pitchFamily="34" charset="-120"/>
-              </a:rPr>
-              <a:t>Pointed, single-subject questions</a:t>
-            </a:r>
-            <a:endParaRPr lang="en-US" sz="1350" dirty="0"/>
+              <a:buNone/>
+            </a:pPr>
+            <a:r>
+              <a:rPr lang="en-US" sz="1150" dirty="0">
+                <a:solidFill>
+                  <a:srgbClr val="5B6B7F"/>
+                </a:solidFill>
+                <a:latin typeface="Calibri" pitchFamily="34" charset="0"/>
+                <a:ea typeface="Calibri" pitchFamily="34" charset="-122"/>
+                <a:cs typeface="Calibri" pitchFamily="34" charset="-120"/>
+              </a:rPr>
+              <a:t>SDK 5.x is Lumina-based. Bare imports do nothing — call defineCustomElements() or you get "Custom element not found."</a:t>
+            </a:r>
+            <a:endParaRPr lang="en-US" sz="1150" dirty="0"/>
           </a:p>
         </p:txBody>
       </p:sp>
@@ -6930,16 +7240,16 @@
         </p:nvSpPr>
         <p:spPr>
           <a:xfrm>
-            <a:off x="6217920" y="1371600"/>
-            <a:ext cx="5486400" cy="4572000"/>
+            <a:off x="4398264" y="1325880"/>
+            <a:ext cx="3657600" cy="2148840"/>
           </a:xfrm>
           <a:prstGeom prst="roundRect">
             <a:avLst>
-              <a:gd name="adj" fmla="val 2000"/>
+              <a:gd name="adj" fmla="val 3404"/>
             </a:avLst>
           </a:prstGeom>
           <a:solidFill>
-            <a:srgbClr val="FBEDEC"/>
+            <a:srgbClr val="F4F7FA"/>
           </a:solidFill>
           <a:ln/>
           <a:effectLst>
@@ -6959,14 +7269,14 @@
         </p:nvSpPr>
         <p:spPr>
           <a:xfrm>
-            <a:off x="6537960" y="1645920"/>
-            <a:ext cx="731520" cy="731520"/>
+            <a:off x="4654296" y="1581912"/>
+            <a:ext cx="713232" cy="713232"/>
           </a:xfrm>
           <a:prstGeom prst="ellipse">
             <a:avLst/>
           </a:prstGeom>
           <a:solidFill>
-            <a:srgbClr val="C24A45"/>
+            <a:srgbClr val="E8A33D"/>
           </a:solidFill>
           <a:ln/>
         </p:spPr>
@@ -6987,8 +7297,8 @@
         </p:blipFill>
         <p:spPr>
           <a:xfrm>
-            <a:off x="6728155" y="1836115"/>
-            <a:ext cx="351130" cy="351130"/>
+            <a:off x="4839736" y="1767352"/>
+            <a:ext cx="342351" cy="342351"/>
           </a:xfrm>
           <a:prstGeom prst="rect">
             <a:avLst/>
@@ -7003,8 +7313,8 @@
         </p:nvSpPr>
         <p:spPr>
           <a:xfrm>
-            <a:off x="7406640" y="1645920"/>
-            <a:ext cx="4114800" cy="731520"/>
+            <a:off x="5495544" y="1600200"/>
+            <a:ext cx="2377440" cy="685800"/>
           </a:xfrm>
           <a:prstGeom prst="rect">
             <a:avLst/>
@@ -7017,20 +7327,23 @@
           <a:lstStyle/>
           <a:p>
             <a:pPr indent="0" marL="0">
-              <a:buNone/>
-            </a:pPr>
-            <a:r>
-              <a:rPr lang="en-US" sz="1800" b="1" dirty="0">
-                <a:solidFill>
-                  <a:srgbClr val="C24A45"/>
-                </a:solidFill>
-                <a:latin typeface="Calibri" pitchFamily="34" charset="0"/>
-                <a:ea typeface="Calibri" pitchFamily="34" charset="-122"/>
-                <a:cs typeface="Calibri" pitchFamily="34" charset="-120"/>
-              </a:rPr>
-              <a:t>Fails / degrades — keep out</a:t>
-            </a:r>
-            <a:endParaRPr lang="en-US" sz="1800" dirty="0"/>
+              <a:lnSpc>
+                <a:spcPts val="1600"/>
+              </a:lnSpc>
+              <a:buNone/>
+            </a:pPr>
+            <a:r>
+              <a:rPr lang="en-US" sz="1450" b="1" dirty="0">
+                <a:solidFill>
+                  <a:srgbClr val="0B2545"/>
+                </a:solidFill>
+                <a:latin typeface="Calibri" pitchFamily="34" charset="0"/>
+                <a:ea typeface="Calibri" pitchFamily="34" charset="-122"/>
+                <a:cs typeface="Calibri" pitchFamily="34" charset="-120"/>
+              </a:rPr>
+              <a:t>No ai-components-react</a:t>
+            </a:r>
+            <a:endParaRPr lang="en-US" sz="1450" dirty="0"/>
           </a:p>
         </p:txBody>
       </p:sp>
@@ -7042,143 +7355,671 @@
         </p:nvSpPr>
         <p:spPr>
           <a:xfrm>
-            <a:off x="6583680" y="2651760"/>
-            <a:ext cx="4937760" cy="3108960"/>
-          </a:xfrm>
-          <a:prstGeom prst="rect">
-            <a:avLst/>
-          </a:prstGeom>
-          <a:noFill/>
-          <a:ln/>
-        </p:spPr>
-        <p:txBody>
-          <a:bodyPr wrap="square" lIns="0" tIns="0" rIns="0" bIns="0" rtlCol="0" anchor="ctr"/>
-          <a:lstStyle/>
-          <a:p>
-            <a:pPr marL="342900" indent="-342900">
+            <a:off x="4654296" y="2350008"/>
+            <a:ext cx="3145536" cy="1005840"/>
+          </a:xfrm>
+          <a:prstGeom prst="rect">
+            <a:avLst/>
+          </a:prstGeom>
+          <a:noFill/>
+          <a:ln/>
+        </p:spPr>
+        <p:txBody>
+          <a:bodyPr wrap="square" lIns="0" tIns="0" rIns="0" bIns="0" rtlCol="0" anchor="ctr"/>
+          <a:lstStyle/>
+          <a:p>
+            <a:pPr indent="0" marL="0">
               <a:lnSpc>
-                <a:spcPts val="2200"/>
+                <a:spcPts val="1450"/>
               </a:lnSpc>
-              <a:spcAft>
-                <a:spcPts val="1200"/>
-              </a:spcAft>
-              <a:buSzPct val="100000"/>
-              <a:buChar char="•"/>
-            </a:pPr>
-            <a:r>
-              <a:rPr lang="en-US" sz="1350" dirty="0">
-                <a:solidFill>
-                  <a:srgbClr val="1E293B"/>
-                </a:solidFill>
-                <a:latin typeface="Calibri" pitchFamily="34" charset="0"/>
-                <a:ea typeface="Calibri" pitchFamily="34" charset="-122"/>
-                <a:cs typeface="Calibri" pitchFamily="34" charset="-120"/>
-              </a:rPr>
-              <a:t>Schema introspection  ("list fields") — hallucinates</a:t>
-            </a:r>
-            <a:endParaRPr lang="en-US" sz="1350" dirty="0"/>
-          </a:p>
-          <a:p>
-            <a:pPr marL="342900" indent="-342900">
+              <a:buNone/>
+            </a:pPr>
+            <a:r>
+              <a:rPr lang="en-US" sz="1150" dirty="0">
+                <a:solidFill>
+                  <a:srgbClr val="5B6B7F"/>
+                </a:solidFill>
+                <a:latin typeface="Calibri" pitchFamily="34" charset="0"/>
+                <a:ea typeface="Calibri" pitchFamily="34" charset="-122"/>
+                <a:cs typeface="Calibri" pitchFamily="34" charset="-120"/>
+              </a:rPr>
+              <a:t>AI components ship as raw web components only. Declare the tags in vite-env.d.ts; set props imperatively via refs.</a:t>
+            </a:r>
+            <a:endParaRPr lang="en-US" sz="1150" dirty="0"/>
+          </a:p>
+        </p:txBody>
+      </p:sp>
+      <p:sp>
+        <p:nvSpPr>
+          <p:cNvPr id="13" name="Shape 9"/>
+          <p:cNvSpPr/>
+          <p:nvPr/>
+        </p:nvSpPr>
+        <p:spPr>
+          <a:xfrm>
+            <a:off x="8293608" y="1325880"/>
+            <a:ext cx="3657600" cy="2148840"/>
+          </a:xfrm>
+          <a:prstGeom prst="roundRect">
+            <a:avLst>
+              <a:gd name="adj" fmla="val 3404"/>
+            </a:avLst>
+          </a:prstGeom>
+          <a:solidFill>
+            <a:srgbClr val="F4F7FA"/>
+          </a:solidFill>
+          <a:ln/>
+          <a:effectLst>
+            <a:outerShdw sx="100000" sy="100000" kx="0" ky="0" algn="bl" rotWithShape="0" blurRad="88900" dist="38100" dir="5400000">
+              <a:srgbClr val="000000">
+                <a:alpha val="12000"/>
+              </a:srgbClr>
+            </a:outerShdw>
+          </a:effectLst>
+        </p:spPr>
+      </p:sp>
+      <p:sp>
+        <p:nvSpPr>
+          <p:cNvPr id="14" name="Shape 10"/>
+          <p:cNvSpPr/>
+          <p:nvPr/>
+        </p:nvSpPr>
+        <p:spPr>
+          <a:xfrm>
+            <a:off x="8549640" y="1581912"/>
+            <a:ext cx="713232" cy="713232"/>
+          </a:xfrm>
+          <a:prstGeom prst="ellipse">
+            <a:avLst/>
+          </a:prstGeom>
+          <a:solidFill>
+            <a:srgbClr val="E8A33D"/>
+          </a:solidFill>
+          <a:ln/>
+        </p:spPr>
+      </p:sp>
+      <p:pic>
+        <p:nvPicPr>
+          <p:cNvPr id="15" name="Image 2" descr="preencoded.png">    </p:cNvPr>
+          <p:cNvPicPr>
+            <a:picLocks noChangeAspect="1"/>
+          </p:cNvPicPr>
+          <p:nvPr/>
+        </p:nvPicPr>
+        <p:blipFill>
+          <a:blip r:embed="rId3"/>
+          <a:stretch>
+            <a:fillRect/>
+          </a:stretch>
+        </p:blipFill>
+        <p:spPr>
+          <a:xfrm>
+            <a:off x="8735080" y="1767352"/>
+            <a:ext cx="342351" cy="342351"/>
+          </a:xfrm>
+          <a:prstGeom prst="rect">
+            <a:avLst/>
+          </a:prstGeom>
+        </p:spPr>
+      </p:pic>
+      <p:sp>
+        <p:nvSpPr>
+          <p:cNvPr id="16" name="Text 11"/>
+          <p:cNvSpPr/>
+          <p:nvPr/>
+        </p:nvSpPr>
+        <p:spPr>
+          <a:xfrm>
+            <a:off x="9390888" y="1600200"/>
+            <a:ext cx="2377440" cy="685800"/>
+          </a:xfrm>
+          <a:prstGeom prst="rect">
+            <a:avLst/>
+          </a:prstGeom>
+          <a:noFill/>
+          <a:ln/>
+        </p:spPr>
+        <p:txBody>
+          <a:bodyPr wrap="square" lIns="0" tIns="0" rIns="0" bIns="0" rtlCol="0" anchor="ctr"/>
+          <a:lstStyle/>
+          <a:p>
+            <a:pPr indent="0" marL="0">
               <a:lnSpc>
-                <a:spcPts val="2200"/>
+                <a:spcPts val="1600"/>
               </a:lnSpc>
-              <a:spcAft>
-                <a:spcPts val="1200"/>
-              </a:spcAft>
-              <a:buSzPct val="100000"/>
-              <a:buChar char="•"/>
-            </a:pPr>
-            <a:r>
-              <a:rPr lang="en-US" sz="1350" dirty="0">
-                <a:solidFill>
-                  <a:srgbClr val="1E293B"/>
-                </a:solidFill>
-                <a:latin typeface="Calibri" pitchFamily="34" charset="0"/>
-                <a:ea typeface="Calibri" pitchFamily="34" charset="-122"/>
-                <a:cs typeface="Calibri" pitchFamily="34" charset="-120"/>
-              </a:rPr>
-              <a:t>Cross-category comparison — silently degrades</a:t>
-            </a:r>
-            <a:endParaRPr lang="en-US" sz="1350" dirty="0"/>
-          </a:p>
-          <a:p>
-            <a:pPr marL="342900" indent="-342900">
+              <a:buNone/>
+            </a:pPr>
+            <a:r>
+              <a:rPr lang="en-US" sz="1450" b="1" dirty="0">
+                <a:solidFill>
+                  <a:srgbClr val="0B2545"/>
+                </a:solidFill>
+                <a:latin typeface="Calibri" pitchFamily="34" charset="0"/>
+                <a:ea typeface="Calibri" pitchFamily="34" charset="-122"/>
+                <a:cs typeface="Calibri" pitchFamily="34" charset="-120"/>
+              </a:rPr>
+              <a:t>Embeddings 504 ≠ CORS</a:t>
+            </a:r>
+            <a:endParaRPr lang="en-US" sz="1450" dirty="0"/>
+          </a:p>
+        </p:txBody>
+      </p:sp>
+      <p:sp>
+        <p:nvSpPr>
+          <p:cNvPr id="17" name="Text 12"/>
+          <p:cNvSpPr/>
+          <p:nvPr/>
+        </p:nvSpPr>
+        <p:spPr>
+          <a:xfrm>
+            <a:off x="8549640" y="2350008"/>
+            <a:ext cx="3145536" cy="1005840"/>
+          </a:xfrm>
+          <a:prstGeom prst="rect">
+            <a:avLst/>
+          </a:prstGeom>
+          <a:noFill/>
+          <a:ln/>
+        </p:spPr>
+        <p:txBody>
+          <a:bodyPr wrap="square" lIns="0" tIns="0" rIns="0" bIns="0" rtlCol="0" anchor="ctr"/>
+          <a:lstStyle/>
+          <a:p>
+            <a:pPr indent="0" marL="0">
               <a:lnSpc>
-                <a:spcPts val="2200"/>
+                <a:spcPts val="1450"/>
               </a:lnSpc>
-              <a:spcAft>
-                <a:spcPts val="1200"/>
-              </a:spcAft>
-              <a:buSzPct val="100000"/>
-              <a:buChar char="•"/>
-            </a:pPr>
-            <a:r>
-              <a:rPr lang="en-US" sz="1350" dirty="0">
-                <a:solidFill>
-                  <a:srgbClr val="1E293B"/>
-                </a:solidFill>
-                <a:latin typeface="Calibri" pitchFamily="34" charset="0"/>
-                <a:ea typeface="Calibri" pitchFamily="34" charset="-122"/>
-                <a:cs typeface="Calibri" pitchFamily="34" charset="-120"/>
-              </a:rPr>
-              <a:t>Unbounded cross-layer  — 413 error</a:t>
-            </a:r>
-            <a:endParaRPr lang="en-US" sz="1350" dirty="0"/>
-          </a:p>
-          <a:p>
-            <a:pPr marL="342900" indent="-342900">
+              <a:buNone/>
+            </a:pPr>
+            <a:r>
+              <a:rPr lang="en-US" sz="1150" dirty="0">
+                <a:solidFill>
+                  <a:srgbClr val="5B6B7F"/>
+                </a:solidFill>
+                <a:latin typeface="Calibri" pitchFamily="34" charset="0"/>
+                <a:ea typeface="Calibri" pitchFamily="34" charset="-122"/>
+                <a:cs typeface="Calibri" pitchFamily="34" charset="-120"/>
+              </a:rPr>
+              <a:t>Generic error looks like CORS but is a 504 timeout. Wide-schema reference layers trigger it; narrow ones succeed.</a:t>
+            </a:r>
+            <a:endParaRPr lang="en-US" sz="1150" dirty="0"/>
+          </a:p>
+        </p:txBody>
+      </p:sp>
+      <p:sp>
+        <p:nvSpPr>
+          <p:cNvPr id="18" name="Shape 13"/>
+          <p:cNvSpPr/>
+          <p:nvPr/>
+        </p:nvSpPr>
+        <p:spPr>
+          <a:xfrm>
+            <a:off x="502920" y="3749040"/>
+            <a:ext cx="3657600" cy="2148840"/>
+          </a:xfrm>
+          <a:prstGeom prst="roundRect">
+            <a:avLst>
+              <a:gd name="adj" fmla="val 3404"/>
+            </a:avLst>
+          </a:prstGeom>
+          <a:solidFill>
+            <a:srgbClr val="F4F7FA"/>
+          </a:solidFill>
+          <a:ln/>
+          <a:effectLst>
+            <a:outerShdw sx="100000" sy="100000" kx="0" ky="0" algn="bl" rotWithShape="0" blurRad="88900" dist="38100" dir="5400000">
+              <a:srgbClr val="000000">
+                <a:alpha val="12000"/>
+              </a:srgbClr>
+            </a:outerShdw>
+          </a:effectLst>
+        </p:spPr>
+      </p:sp>
+      <p:sp>
+        <p:nvSpPr>
+          <p:cNvPr id="19" name="Shape 14"/>
+          <p:cNvSpPr/>
+          <p:nvPr/>
+        </p:nvSpPr>
+        <p:spPr>
+          <a:xfrm>
+            <a:off x="758952" y="4005072"/>
+            <a:ext cx="713232" cy="713232"/>
+          </a:xfrm>
+          <a:prstGeom prst="ellipse">
+            <a:avLst/>
+          </a:prstGeom>
+          <a:solidFill>
+            <a:srgbClr val="E8A33D"/>
+          </a:solidFill>
+          <a:ln/>
+        </p:spPr>
+      </p:sp>
+      <p:pic>
+        <p:nvPicPr>
+          <p:cNvPr id="20" name="Image 3" descr="preencoded.png">    </p:cNvPr>
+          <p:cNvPicPr>
+            <a:picLocks noChangeAspect="1"/>
+          </p:cNvPicPr>
+          <p:nvPr/>
+        </p:nvPicPr>
+        <p:blipFill>
+          <a:blip r:embed="rId4"/>
+          <a:stretch>
+            <a:fillRect/>
+          </a:stretch>
+        </p:blipFill>
+        <p:spPr>
+          <a:xfrm>
+            <a:off x="944392" y="4190512"/>
+            <a:ext cx="342351" cy="342351"/>
+          </a:xfrm>
+          <a:prstGeom prst="rect">
+            <a:avLst/>
+          </a:prstGeom>
+        </p:spPr>
+      </p:pic>
+      <p:sp>
+        <p:nvSpPr>
+          <p:cNvPr id="21" name="Text 15"/>
+          <p:cNvSpPr/>
+          <p:nvPr/>
+        </p:nvSpPr>
+        <p:spPr>
+          <a:xfrm>
+            <a:off x="1600200" y="4023360"/>
+            <a:ext cx="2377440" cy="685800"/>
+          </a:xfrm>
+          <a:prstGeom prst="rect">
+            <a:avLst/>
+          </a:prstGeom>
+          <a:noFill/>
+          <a:ln/>
+        </p:spPr>
+        <p:txBody>
+          <a:bodyPr wrap="square" lIns="0" tIns="0" rIns="0" bIns="0" rtlCol="0" anchor="ctr"/>
+          <a:lstStyle/>
+          <a:p>
+            <a:pPr indent="0" marL="0">
               <a:lnSpc>
-                <a:spcPts val="2200"/>
+                <a:spcPts val="1600"/>
               </a:lnSpc>
-              <a:spcAft>
-                <a:spcPts val="1200"/>
-              </a:spcAft>
-              <a:buSzPct val="100000"/>
-              <a:buChar char="•"/>
-            </a:pPr>
-            <a:r>
-              <a:rPr lang="en-US" sz="1350" dirty="0">
-                <a:solidFill>
-                  <a:srgbClr val="1E293B"/>
-                </a:solidFill>
-                <a:latin typeface="Calibri" pitchFamily="34" charset="0"/>
-                <a:ea typeface="Calibri" pitchFamily="34" charset="-122"/>
-                <a:cs typeface="Calibri" pitchFamily="34" charset="-120"/>
-              </a:rPr>
-              <a:t>Broad sweeps  (vague, unscoped questions)</a:t>
-            </a:r>
-            <a:endParaRPr lang="en-US" sz="1350" dirty="0"/>
-          </a:p>
-          <a:p>
-            <a:pPr marL="342900" indent="-342900">
+              <a:buNone/>
+            </a:pPr>
+            <a:r>
+              <a:rPr lang="en-US" sz="1450" b="1" dirty="0">
+                <a:solidFill>
+                  <a:srgbClr val="0B2545"/>
+                </a:solidFill>
+                <a:latin typeface="Calibri" pitchFamily="34" charset="0"/>
+                <a:ea typeface="Calibri" pitchFamily="34" charset="-122"/>
+                <a:cs typeface="Calibri" pitchFamily="34" charset="-120"/>
+              </a:rPr>
+              <a:t>Cross-layer 413</a:t>
+            </a:r>
+            <a:endParaRPr lang="en-US" sz="1450" dirty="0"/>
+          </a:p>
+        </p:txBody>
+      </p:sp>
+      <p:sp>
+        <p:nvSpPr>
+          <p:cNvPr id="22" name="Text 16"/>
+          <p:cNvSpPr/>
+          <p:nvPr/>
+        </p:nvSpPr>
+        <p:spPr>
+          <a:xfrm>
+            <a:off x="758952" y="4773168"/>
+            <a:ext cx="3145536" cy="1005840"/>
+          </a:xfrm>
+          <a:prstGeom prst="rect">
+            <a:avLst/>
+          </a:prstGeom>
+          <a:noFill/>
+          <a:ln/>
+        </p:spPr>
+        <p:txBody>
+          <a:bodyPr wrap="square" lIns="0" tIns="0" rIns="0" bIns="0" rtlCol="0" anchor="ctr"/>
+          <a:lstStyle/>
+          <a:p>
+            <a:pPr indent="0" marL="0">
               <a:lnSpc>
-                <a:spcPts val="2200"/>
+                <a:spcPts val="1450"/>
               </a:lnSpc>
-              <a:spcAft>
-                <a:spcPts val="1200"/>
-              </a:spcAft>
-              <a:buSzPct val="100000"/>
-              <a:buChar char="•"/>
-            </a:pPr>
-            <a:r>
-              <a:rPr lang="en-US" sz="1350" dirty="0">
-                <a:solidFill>
-                  <a:srgbClr val="1E293B"/>
-                </a:solidFill>
-                <a:latin typeface="Calibri" pitchFamily="34" charset="0"/>
-                <a:ea typeface="Calibri" pitchFamily="34" charset="-122"/>
-                <a:cs typeface="Calibri" pitchFamily="34" charset="-120"/>
-              </a:rPr>
-              <a:t>Charts · forecasts · email · user location</a:t>
-            </a:r>
-            <a:endParaRPr lang="en-US" sz="1350" dirty="0"/>
-          </a:p>
-        </p:txBody>
-      </p:sp>
-      <p:sp>
-        <p:nvSpPr>
-          <p:cNvPr id="13" name="Text 9"/>
+              <a:buNone/>
+            </a:pPr>
+            <a:r>
+              <a:rPr lang="en-US" sz="1150" dirty="0">
+                <a:solidFill>
+                  <a:srgbClr val="5B6B7F"/>
+                </a:solidFill>
+                <a:latin typeface="Calibri" pitchFamily="34" charset="0"/>
+                <a:ea typeface="Calibri" pitchFamily="34" charset="-122"/>
+                <a:cs typeface="Calibri" pitchFamily="34" charset="-120"/>
+              </a:rPr>
+              <a:t>OOB agent submits national polygons as a spatial filter → 413. Fix: state-scope the prompt or pre-compute the attribute.</a:t>
+            </a:r>
+            <a:endParaRPr lang="en-US" sz="1150" dirty="0"/>
+          </a:p>
+        </p:txBody>
+      </p:sp>
+      <p:sp>
+        <p:nvSpPr>
+          <p:cNvPr id="23" name="Shape 17"/>
+          <p:cNvSpPr/>
+          <p:nvPr/>
+        </p:nvSpPr>
+        <p:spPr>
+          <a:xfrm>
+            <a:off x="4398264" y="3749040"/>
+            <a:ext cx="3657600" cy="2148840"/>
+          </a:xfrm>
+          <a:prstGeom prst="roundRect">
+            <a:avLst>
+              <a:gd name="adj" fmla="val 3404"/>
+            </a:avLst>
+          </a:prstGeom>
+          <a:solidFill>
+            <a:srgbClr val="F4F7FA"/>
+          </a:solidFill>
+          <a:ln/>
+          <a:effectLst>
+            <a:outerShdw sx="100000" sy="100000" kx="0" ky="0" algn="bl" rotWithShape="0" blurRad="88900" dist="38100" dir="5400000">
+              <a:srgbClr val="000000">
+                <a:alpha val="12000"/>
+              </a:srgbClr>
+            </a:outerShdw>
+          </a:effectLst>
+        </p:spPr>
+      </p:sp>
+      <p:sp>
+        <p:nvSpPr>
+          <p:cNvPr id="24" name="Shape 18"/>
+          <p:cNvSpPr/>
+          <p:nvPr/>
+        </p:nvSpPr>
+        <p:spPr>
+          <a:xfrm>
+            <a:off x="4654296" y="4005072"/>
+            <a:ext cx="713232" cy="713232"/>
+          </a:xfrm>
+          <a:prstGeom prst="ellipse">
+            <a:avLst/>
+          </a:prstGeom>
+          <a:solidFill>
+            <a:srgbClr val="E8A33D"/>
+          </a:solidFill>
+          <a:ln/>
+        </p:spPr>
+      </p:sp>
+      <p:pic>
+        <p:nvPicPr>
+          <p:cNvPr id="25" name="Image 4" descr="preencoded.png">    </p:cNvPr>
+          <p:cNvPicPr>
+            <a:picLocks noChangeAspect="1"/>
+          </p:cNvPicPr>
+          <p:nvPr/>
+        </p:nvPicPr>
+        <p:blipFill>
+          <a:blip r:embed="rId5"/>
+          <a:stretch>
+            <a:fillRect/>
+          </a:stretch>
+        </p:blipFill>
+        <p:spPr>
+          <a:xfrm>
+            <a:off x="4839736" y="4190512"/>
+            <a:ext cx="342351" cy="342351"/>
+          </a:xfrm>
+          <a:prstGeom prst="rect">
+            <a:avLst/>
+          </a:prstGeom>
+        </p:spPr>
+      </p:pic>
+      <p:sp>
+        <p:nvSpPr>
+          <p:cNvPr id="26" name="Text 19"/>
+          <p:cNvSpPr/>
+          <p:nvPr/>
+        </p:nvSpPr>
+        <p:spPr>
+          <a:xfrm>
+            <a:off x="5495544" y="4023360"/>
+            <a:ext cx="2377440" cy="685800"/>
+          </a:xfrm>
+          <a:prstGeom prst="rect">
+            <a:avLst/>
+          </a:prstGeom>
+          <a:noFill/>
+          <a:ln/>
+        </p:spPr>
+        <p:txBody>
+          <a:bodyPr wrap="square" lIns="0" tIns="0" rIns="0" bIns="0" rtlCol="0" anchor="ctr"/>
+          <a:lstStyle/>
+          <a:p>
+            <a:pPr indent="0" marL="0">
+              <a:lnSpc>
+                <a:spcPts val="1600"/>
+              </a:lnSpc>
+              <a:buNone/>
+            </a:pPr>
+            <a:r>
+              <a:rPr lang="en-US" sz="1450" b="1" dirty="0">
+                <a:solidFill>
+                  <a:srgbClr val="0B2545"/>
+                </a:solidFill>
+                <a:latin typeface="Calibri" pitchFamily="34" charset="0"/>
+                <a:ea typeface="Calibri" pitchFamily="34" charset="-122"/>
+                <a:cs typeface="Calibri" pitchFamily="34" charset="-120"/>
+              </a:rPr>
+              <a:t>Schema introspection lies</a:t>
+            </a:r>
+            <a:endParaRPr lang="en-US" sz="1450" dirty="0"/>
+          </a:p>
+        </p:txBody>
+      </p:sp>
+      <p:sp>
+        <p:nvSpPr>
+          <p:cNvPr id="27" name="Text 20"/>
+          <p:cNvSpPr/>
+          <p:nvPr/>
+        </p:nvSpPr>
+        <p:spPr>
+          <a:xfrm>
+            <a:off x="4654296" y="4773168"/>
+            <a:ext cx="3145536" cy="1005840"/>
+          </a:xfrm>
+          <a:prstGeom prst="rect">
+            <a:avLst/>
+          </a:prstGeom>
+          <a:noFill/>
+          <a:ln/>
+        </p:spPr>
+        <p:txBody>
+          <a:bodyPr wrap="square" lIns="0" tIns="0" rIns="0" bIns="0" rtlCol="0" anchor="ctr"/>
+          <a:lstStyle/>
+          <a:p>
+            <a:pPr indent="0" marL="0">
+              <a:lnSpc>
+                <a:spcPts val="1450"/>
+              </a:lnSpc>
+              <a:buNone/>
+            </a:pPr>
+            <a:r>
+              <a:rPr lang="en-US" sz="1150" dirty="0">
+                <a:solidFill>
+                  <a:srgbClr val="5B6B7F"/>
+                </a:solidFill>
+                <a:latin typeface="Calibri" pitchFamily="34" charset="0"/>
+                <a:ea typeface="Calibri" pitchFamily="34" charset="-122"/>
+                <a:cs typeface="Calibri" pitchFamily="34" charset="-120"/>
+              </a:rPr>
+              <a:t>"List fields" returned two contradictory lists in one turn. Verify schema via AGO Data → Fields — never the assistant.</a:t>
+            </a:r>
+            <a:endParaRPr lang="en-US" sz="1150" dirty="0"/>
+          </a:p>
+        </p:txBody>
+      </p:sp>
+      <p:sp>
+        <p:nvSpPr>
+          <p:cNvPr id="28" name="Shape 21"/>
+          <p:cNvSpPr/>
+          <p:nvPr/>
+        </p:nvSpPr>
+        <p:spPr>
+          <a:xfrm>
+            <a:off x="8293608" y="3749040"/>
+            <a:ext cx="3657600" cy="2148840"/>
+          </a:xfrm>
+          <a:prstGeom prst="roundRect">
+            <a:avLst>
+              <a:gd name="adj" fmla="val 3404"/>
+            </a:avLst>
+          </a:prstGeom>
+          <a:solidFill>
+            <a:srgbClr val="F4F7FA"/>
+          </a:solidFill>
+          <a:ln/>
+          <a:effectLst>
+            <a:outerShdw sx="100000" sy="100000" kx="0" ky="0" algn="bl" rotWithShape="0" blurRad="88900" dist="38100" dir="5400000">
+              <a:srgbClr val="000000">
+                <a:alpha val="12000"/>
+              </a:srgbClr>
+            </a:outerShdw>
+          </a:effectLst>
+        </p:spPr>
+      </p:sp>
+      <p:sp>
+        <p:nvSpPr>
+          <p:cNvPr id="29" name="Shape 22"/>
+          <p:cNvSpPr/>
+          <p:nvPr/>
+        </p:nvSpPr>
+        <p:spPr>
+          <a:xfrm>
+            <a:off x="8549640" y="4005072"/>
+            <a:ext cx="713232" cy="713232"/>
+          </a:xfrm>
+          <a:prstGeom prst="ellipse">
+            <a:avLst/>
+          </a:prstGeom>
+          <a:solidFill>
+            <a:srgbClr val="E8A33D"/>
+          </a:solidFill>
+          <a:ln/>
+        </p:spPr>
+      </p:sp>
+      <p:pic>
+        <p:nvPicPr>
+          <p:cNvPr id="30" name="Image 5" descr="preencoded.png">    </p:cNvPr>
+          <p:cNvPicPr>
+            <a:picLocks noChangeAspect="1"/>
+          </p:cNvPicPr>
+          <p:nvPr/>
+        </p:nvPicPr>
+        <p:blipFill>
+          <a:blip r:embed="rId6"/>
+          <a:stretch>
+            <a:fillRect/>
+          </a:stretch>
+        </p:blipFill>
+        <p:spPr>
+          <a:xfrm>
+            <a:off x="8735080" y="4190512"/>
+            <a:ext cx="342351" cy="342351"/>
+          </a:xfrm>
+          <a:prstGeom prst="rect">
+            <a:avLst/>
+          </a:prstGeom>
+        </p:spPr>
+      </p:pic>
+      <p:sp>
+        <p:nvSpPr>
+          <p:cNvPr id="31" name="Text 23"/>
+          <p:cNvSpPr/>
+          <p:nvPr/>
+        </p:nvSpPr>
+        <p:spPr>
+          <a:xfrm>
+            <a:off x="9390888" y="4023360"/>
+            <a:ext cx="2377440" cy="685800"/>
+          </a:xfrm>
+          <a:prstGeom prst="rect">
+            <a:avLst/>
+          </a:prstGeom>
+          <a:noFill/>
+          <a:ln/>
+        </p:spPr>
+        <p:txBody>
+          <a:bodyPr wrap="square" lIns="0" tIns="0" rIns="0" bIns="0" rtlCol="0" anchor="ctr"/>
+          <a:lstStyle/>
+          <a:p>
+            <a:pPr indent="0" marL="0">
+              <a:lnSpc>
+                <a:spcPts val="1600"/>
+              </a:lnSpc>
+              <a:buNone/>
+            </a:pPr>
+            <a:r>
+              <a:rPr lang="en-US" sz="1450" b="1" dirty="0">
+                <a:solidFill>
+                  <a:srgbClr val="0B2545"/>
+                </a:solidFill>
+                <a:latin typeface="Calibri" pitchFamily="34" charset="0"/>
+                <a:ea typeface="Calibri" pitchFamily="34" charset="-122"/>
+                <a:cs typeface="Calibri" pitchFamily="34" charset="-120"/>
+              </a:rPr>
+              <a:t>Verify, don't infer</a:t>
+            </a:r>
+            <a:endParaRPr lang="en-US" sz="1450" dirty="0"/>
+          </a:p>
+        </p:txBody>
+      </p:sp>
+      <p:sp>
+        <p:nvSpPr>
+          <p:cNvPr id="32" name="Text 24"/>
+          <p:cNvSpPr/>
+          <p:nvPr/>
+        </p:nvSpPr>
+        <p:spPr>
+          <a:xfrm>
+            <a:off x="8549640" y="4773168"/>
+            <a:ext cx="3145536" cy="1005840"/>
+          </a:xfrm>
+          <a:prstGeom prst="rect">
+            <a:avLst/>
+          </a:prstGeom>
+          <a:noFill/>
+          <a:ln/>
+        </p:spPr>
+        <p:txBody>
+          <a:bodyPr wrap="square" lIns="0" tIns="0" rIns="0" bIns="0" rtlCol="0" anchor="ctr"/>
+          <a:lstStyle/>
+          <a:p>
+            <a:pPr indent="0" marL="0">
+              <a:lnSpc>
+                <a:spcPts val="1450"/>
+              </a:lnSpc>
+              <a:buNone/>
+            </a:pPr>
+            <a:r>
+              <a:rPr lang="en-US" sz="1150" dirty="0">
+                <a:solidFill>
+                  <a:srgbClr val="5B6B7F"/>
+                </a:solidFill>
+                <a:latin typeface="Calibri" pitchFamily="34" charset="0"/>
+                <a:ea typeface="Calibri" pitchFamily="34" charset="-122"/>
+                <a:cs typeface="Calibri" pitchFamily="34" charset="-120"/>
+              </a:rPr>
+              <a:t>Filenames in dist/ aren't docs. We mounted a non-existent agent on a guess. Confirm against developers.arcgis.com.</a:t>
+            </a:r>
+            <a:endParaRPr lang="en-US" sz="1150" dirty="0"/>
+          </a:p>
+        </p:txBody>
+      </p:sp>
+      <p:sp>
+        <p:nvSpPr>
+          <p:cNvPr id="33" name="Text 25"/>
           <p:cNvSpPr/>
           <p:nvPr/>
         </p:nvSpPr>
@@ -7217,7 +8058,7 @@
       </p:sp>
       <p:sp>
         <p:nvSpPr>
-          <p:cNvPr id="14" name="Text 10"/>
+          <p:cNvPr id="34" name="Text 26"/>
           <p:cNvSpPr/>
           <p:nvPr/>
         </p:nvSpPr>
@@ -7311,7 +8152,7 @@
               <a:buNone/>
             </a:pPr>
             <a:r>
-              <a:rPr lang="en-US" sz="3000" b="1" dirty="0">
+              <a:rPr lang="en-US" sz="2800" b="1" dirty="0">
                 <a:solidFill>
                   <a:srgbClr val="0B2545"/>
                 </a:solidFill>
@@ -7319,69 +8160,30 @@
                 <a:ea typeface="Bookman Old Style" pitchFamily="34" charset="-122"/>
                 <a:cs typeface="Bookman Old Style" pitchFamily="34" charset="-120"/>
               </a:rPr>
-              <a:t>The demo run sheet — prompt shapes that work</a:t>
-            </a:r>
-            <a:endParaRPr lang="en-US" sz="3000" dirty="0"/>
-          </a:p>
-        </p:txBody>
-      </p:sp>
-      <p:sp>
-        <p:nvSpPr>
-          <p:cNvPr id="3" name="Text 1"/>
-          <p:cNvSpPr/>
-          <p:nvPr/>
-        </p:nvSpPr>
-        <p:spPr>
-          <a:xfrm>
-            <a:off x="502920" y="1078992"/>
-            <a:ext cx="10972800" cy="457200"/>
-          </a:xfrm>
-          <a:prstGeom prst="rect">
-            <a:avLst/>
-          </a:prstGeom>
-          <a:noFill/>
-          <a:ln/>
-        </p:spPr>
-        <p:txBody>
-          <a:bodyPr wrap="square" lIns="0" tIns="0" rIns="0" bIns="0" rtlCol="0" anchor="ctr"/>
-          <a:lstStyle/>
-          <a:p>
-            <a:pPr indent="0" marL="0">
-              <a:buNone/>
-            </a:pPr>
-            <a:r>
-              <a:rPr lang="en-US" sz="1400" dirty="0">
-                <a:solidFill>
-                  <a:srgbClr val="5B6B7F"/>
-                </a:solidFill>
-                <a:latin typeface="Calibri" pitchFamily="34" charset="0"/>
-                <a:ea typeface="Calibri" pitchFamily="34" charset="-122"/>
-                <a:cs typeface="Calibri" pitchFamily="34" charset="-120"/>
-              </a:rPr>
-              <a:t>Fill these with prompts you've verified against your data. Build from simple to the strongest hook.</a:t>
-            </a:r>
-            <a:endParaRPr lang="en-US" sz="1400" dirty="0"/>
-          </a:p>
-        </p:txBody>
-      </p:sp>
-      <p:sp>
-        <p:nvSpPr>
-          <p:cNvPr id="4" name="Shape 2"/>
-          <p:cNvSpPr/>
-          <p:nvPr/>
-        </p:nvSpPr>
-        <p:spPr>
-          <a:xfrm>
-            <a:off x="502920" y="1783080"/>
-            <a:ext cx="11201400" cy="932688"/>
+              <a:t>Prompt engineering: what the OOB agent can do</a:t>
+            </a:r>
+            <a:endParaRPr lang="en-US" sz="2800" dirty="0"/>
+          </a:p>
+        </p:txBody>
+      </p:sp>
+      <p:sp>
+        <p:nvSpPr>
+          <p:cNvPr id="3" name="Shape 1"/>
+          <p:cNvSpPr/>
+          <p:nvPr/>
+        </p:nvSpPr>
+        <p:spPr>
+          <a:xfrm>
+            <a:off x="502920" y="1371600"/>
+            <a:ext cx="5486400" cy="4572000"/>
           </a:xfrm>
           <a:prstGeom prst="roundRect">
             <a:avLst>
-              <a:gd name="adj" fmla="val 7843"/>
+              <a:gd name="adj" fmla="val 2000"/>
             </a:avLst>
           </a:prstGeom>
           <a:solidFill>
-            <a:srgbClr val="F4F7FA"/>
+            <a:srgbClr val="EAF4EF"/>
           </a:solidFill>
           <a:ln/>
           <a:effectLst>
@@ -7395,58 +8197,82 @@
       </p:sp>
       <p:sp>
         <p:nvSpPr>
-          <p:cNvPr id="5" name="Shape 3"/>
-          <p:cNvSpPr/>
-          <p:nvPr/>
-        </p:nvSpPr>
-        <p:spPr>
-          <a:xfrm>
-            <a:off x="731520" y="1984248"/>
-            <a:ext cx="566928" cy="566928"/>
+          <p:cNvPr id="4" name="Shape 2"/>
+          <p:cNvSpPr/>
+          <p:nvPr/>
+        </p:nvSpPr>
+        <p:spPr>
+          <a:xfrm>
+            <a:off x="822960" y="1645920"/>
+            <a:ext cx="731520" cy="731520"/>
           </a:xfrm>
           <a:prstGeom prst="ellipse">
             <a:avLst/>
           </a:prstGeom>
           <a:solidFill>
-            <a:srgbClr val="1C7293"/>
+            <a:srgbClr val="2A9D6F"/>
           </a:solidFill>
           <a:ln/>
         </p:spPr>
       </p:sp>
-      <p:sp>
-        <p:nvSpPr>
-          <p:cNvPr id="6" name="Text 4"/>
-          <p:cNvSpPr/>
-          <p:nvPr/>
-        </p:nvSpPr>
-        <p:spPr>
-          <a:xfrm>
-            <a:off x="731520" y="1984248"/>
-            <a:ext cx="566928" cy="566928"/>
-          </a:xfrm>
-          <a:prstGeom prst="rect">
-            <a:avLst/>
-          </a:prstGeom>
-          <a:noFill/>
-          <a:ln/>
-        </p:spPr>
-        <p:txBody>
-          <a:bodyPr wrap="square" lIns="0" tIns="0" rIns="0" bIns="0" rtlCol="0" anchor="ctr"/>
-          <a:lstStyle/>
-          <a:p>
-            <a:pPr algn="ctr" indent="0" marL="0">
+      <p:pic>
+        <p:nvPicPr>
+          <p:cNvPr id="5" name="Image 0" descr="preencoded.png">    </p:cNvPr>
+          <p:cNvPicPr>
+            <a:picLocks noChangeAspect="1"/>
+          </p:cNvPicPr>
+          <p:nvPr/>
+        </p:nvPicPr>
+        <p:blipFill>
+          <a:blip r:embed="rId1"/>
+          <a:stretch>
+            <a:fillRect/>
+          </a:stretch>
+        </p:blipFill>
+        <p:spPr>
+          <a:xfrm>
+            <a:off x="1013155" y="1836115"/>
+            <a:ext cx="351130" cy="351130"/>
+          </a:xfrm>
+          <a:prstGeom prst="rect">
+            <a:avLst/>
+          </a:prstGeom>
+        </p:spPr>
+      </p:pic>
+      <p:sp>
+        <p:nvSpPr>
+          <p:cNvPr id="6" name="Text 3"/>
+          <p:cNvSpPr/>
+          <p:nvPr/>
+        </p:nvSpPr>
+        <p:spPr>
+          <a:xfrm>
+            <a:off x="1691640" y="1645920"/>
+            <a:ext cx="4114800" cy="731520"/>
+          </a:xfrm>
+          <a:prstGeom prst="rect">
+            <a:avLst/>
+          </a:prstGeom>
+          <a:noFill/>
+          <a:ln/>
+        </p:spPr>
+        <p:txBody>
+          <a:bodyPr wrap="square" lIns="0" tIns="0" rIns="0" bIns="0" rtlCol="0" anchor="ctr"/>
+          <a:lstStyle/>
+          <a:p>
+            <a:pPr indent="0" marL="0">
               <a:buNone/>
             </a:pPr>
             <a:r>
               <a:rPr lang="en-US" sz="1800" b="1" dirty="0">
                 <a:solidFill>
-                  <a:srgbClr val="FFFFFF"/>
-                </a:solidFill>
-                <a:latin typeface="Calibri" pitchFamily="34" charset="0"/>
-                <a:ea typeface="Calibri" pitchFamily="34" charset="-122"/>
-                <a:cs typeface="Calibri" pitchFamily="34" charset="-120"/>
-              </a:rPr>
-              <a:t>1</a:t>
+                  <a:srgbClr val="2A9D6F"/>
+                </a:solidFill>
+                <a:latin typeface="Calibri" pitchFamily="34" charset="0"/>
+                <a:ea typeface="Calibri" pitchFamily="34" charset="-122"/>
+                <a:cs typeface="Calibri" pitchFamily="34" charset="-120"/>
+              </a:rPr>
+              <a:t>Reliable — demo these</a:t>
             </a:r>
             <a:endParaRPr lang="en-US" sz="1800" dirty="0"/>
           </a:p>
@@ -7454,100 +8280,164 @@
       </p:sp>
       <p:sp>
         <p:nvSpPr>
-          <p:cNvPr id="7" name="Text 5"/>
-          <p:cNvSpPr/>
-          <p:nvPr/>
-        </p:nvSpPr>
-        <p:spPr>
-          <a:xfrm>
-            <a:off x="1508760" y="1892808"/>
-            <a:ext cx="10058400" cy="438912"/>
-          </a:xfrm>
-          <a:prstGeom prst="rect">
-            <a:avLst/>
-          </a:prstGeom>
-          <a:noFill/>
-          <a:ln/>
-        </p:spPr>
-        <p:txBody>
-          <a:bodyPr wrap="square" lIns="0" tIns="0" rIns="0" bIns="0" rtlCol="0" anchor="ctr"/>
-          <a:lstStyle/>
-          <a:p>
-            <a:pPr indent="0" marL="0">
-              <a:buNone/>
-            </a:pPr>
-            <a:r>
-              <a:rPr lang="en-US" sz="1550" b="1" dirty="0">
-                <a:solidFill>
-                  <a:srgbClr val="0B2545"/>
-                </a:solidFill>
-                <a:latin typeface="Calibri" pitchFamily="34" charset="0"/>
-                <a:ea typeface="Calibri" pitchFamily="34" charset="-122"/>
-                <a:cs typeface="Calibri" pitchFamily="34" charset="-120"/>
-              </a:rPr>
-              <a:t>"Show me the &lt;high-priority&gt; &lt;records&gt;."</a:t>
-            </a:r>
-            <a:endParaRPr lang="en-US" sz="1550" dirty="0"/>
-          </a:p>
-        </p:txBody>
-      </p:sp>
-      <p:sp>
-        <p:nvSpPr>
-          <p:cNvPr id="8" name="Text 6"/>
-          <p:cNvSpPr/>
-          <p:nvPr/>
-        </p:nvSpPr>
-        <p:spPr>
-          <a:xfrm>
-            <a:off x="1508760" y="2286000"/>
-            <a:ext cx="10058400" cy="384048"/>
-          </a:xfrm>
-          <a:prstGeom prst="rect">
-            <a:avLst/>
-          </a:prstGeom>
-          <a:noFill/>
-          <a:ln/>
-        </p:spPr>
-        <p:txBody>
-          <a:bodyPr wrap="square" lIns="0" tIns="0" rIns="0" bIns="0" rtlCol="0" anchor="ctr"/>
-          <a:lstStyle/>
-          <a:p>
-            <a:pPr indent="0" marL="0">
-              <a:buNone/>
-            </a:pPr>
-            <a:r>
-              <a:rPr lang="en-US" sz="1250" dirty="0">
-                <a:solidFill>
-                  <a:srgbClr val="5B6B7F"/>
-                </a:solidFill>
-                <a:latin typeface="Calibri" pitchFamily="34" charset="0"/>
-                <a:ea typeface="Calibri" pitchFamily="34" charset="-122"/>
-                <a:cs typeface="Calibri" pitchFamily="34" charset="-120"/>
-              </a:rPr>
-              <a:t>Opener — single-attribute filter. Verify the count is stable.</a:t>
-            </a:r>
-            <a:endParaRPr lang="en-US" sz="1250" dirty="0"/>
-          </a:p>
-        </p:txBody>
-      </p:sp>
-      <p:sp>
-        <p:nvSpPr>
-          <p:cNvPr id="9" name="Shape 7"/>
-          <p:cNvSpPr/>
-          <p:nvPr/>
-        </p:nvSpPr>
-        <p:spPr>
-          <a:xfrm>
-            <a:off x="502920" y="2862072"/>
-            <a:ext cx="11201400" cy="932688"/>
+          <p:cNvPr id="7" name="Text 4"/>
+          <p:cNvSpPr/>
+          <p:nvPr/>
+        </p:nvSpPr>
+        <p:spPr>
+          <a:xfrm>
+            <a:off x="868680" y="2651760"/>
+            <a:ext cx="4937760" cy="3108960"/>
+          </a:xfrm>
+          <a:prstGeom prst="rect">
+            <a:avLst/>
+          </a:prstGeom>
+          <a:noFill/>
+          <a:ln/>
+        </p:spPr>
+        <p:txBody>
+          <a:bodyPr wrap="square" lIns="0" tIns="0" rIns="0" bIns="0" rtlCol="0" anchor="ctr"/>
+          <a:lstStyle/>
+          <a:p>
+            <a:pPr marL="342900" indent="-342900">
+              <a:lnSpc>
+                <a:spcPts val="2200"/>
+              </a:lnSpc>
+              <a:spcAft>
+                <a:spcPts val="1200"/>
+              </a:spcAft>
+              <a:buSzPct val="100000"/>
+              <a:buChar char="•"/>
+            </a:pPr>
+            <a:r>
+              <a:rPr lang="en-US" sz="1350" dirty="0">
+                <a:solidFill>
+                  <a:srgbClr val="1E293B"/>
+                </a:solidFill>
+                <a:latin typeface="Calibri" pitchFamily="34" charset="0"/>
+                <a:ea typeface="Calibri" pitchFamily="34" charset="-122"/>
+                <a:cs typeface="Calibri" pitchFamily="34" charset="-120"/>
+              </a:rPr>
+              <a:t>Attribute filters  ("show the high-priority records")</a:t>
+            </a:r>
+            <a:endParaRPr lang="en-US" sz="1350" dirty="0"/>
+          </a:p>
+          <a:p>
+            <a:pPr marL="342900" indent="-342900">
+              <a:lnSpc>
+                <a:spcPts val="2200"/>
+              </a:lnSpc>
+              <a:spcAft>
+                <a:spcPts val="1200"/>
+              </a:spcAft>
+              <a:buSzPct val="100000"/>
+              <a:buChar char="•"/>
+            </a:pPr>
+            <a:r>
+              <a:rPr lang="en-US" sz="1350" dirty="0">
+                <a:solidFill>
+                  <a:srgbClr val="1E293B"/>
+                </a:solidFill>
+                <a:latin typeface="Calibri" pitchFamily="34" charset="0"/>
+                <a:ea typeface="Calibri" pitchFamily="34" charset="-122"/>
+                <a:cs typeface="Calibri" pitchFamily="34" charset="-120"/>
+              </a:rPr>
+              <a:t>Single-group stats  ("average metric for a group")</a:t>
+            </a:r>
+            <a:endParaRPr lang="en-US" sz="1350" dirty="0"/>
+          </a:p>
+          <a:p>
+            <a:pPr marL="342900" indent="-342900">
+              <a:lnSpc>
+                <a:spcPts val="2200"/>
+              </a:lnSpc>
+              <a:spcAft>
+                <a:spcPts val="1200"/>
+              </a:spcAft>
+              <a:buSzPct val="100000"/>
+              <a:buChar char="•"/>
+            </a:pPr>
+            <a:r>
+              <a:rPr lang="en-US" sz="1350" dirty="0">
+                <a:solidFill>
+                  <a:srgbClr val="1E293B"/>
+                </a:solidFill>
+                <a:latin typeface="Calibri" pitchFamily="34" charset="0"/>
+                <a:ea typeface="Calibri" pitchFamily="34" charset="-122"/>
+                <a:cs typeface="Calibri" pitchFamily="34" charset="-120"/>
+              </a:rPr>
+              <a:t>Multi-attribute combos  (filter on two fields)</a:t>
+            </a:r>
+            <a:endParaRPr lang="en-US" sz="1350" dirty="0"/>
+          </a:p>
+          <a:p>
+            <a:pPr marL="342900" indent="-342900">
+              <a:lnSpc>
+                <a:spcPts val="2200"/>
+              </a:lnSpc>
+              <a:spcAft>
+                <a:spcPts val="1200"/>
+              </a:spcAft>
+              <a:buSzPct val="100000"/>
+              <a:buChar char="•"/>
+            </a:pPr>
+            <a:r>
+              <a:rPr lang="en-US" sz="1350" dirty="0">
+                <a:solidFill>
+                  <a:srgbClr val="1E293B"/>
+                </a:solidFill>
+                <a:latin typeface="Calibri" pitchFamily="34" charset="0"/>
+                <a:ea typeface="Calibri" pitchFamily="34" charset="-122"/>
+                <a:cs typeface="Calibri" pitchFamily="34" charset="-120"/>
+              </a:rPr>
+              <a:t>State / region-scoped cross-layer intersects</a:t>
+            </a:r>
+            <a:endParaRPr lang="en-US" sz="1350" dirty="0"/>
+          </a:p>
+          <a:p>
+            <a:pPr marL="342900" indent="-342900">
+              <a:lnSpc>
+                <a:spcPts val="2200"/>
+              </a:lnSpc>
+              <a:spcAft>
+                <a:spcPts val="1200"/>
+              </a:spcAft>
+              <a:buSzPct val="100000"/>
+              <a:buChar char="•"/>
+            </a:pPr>
+            <a:r>
+              <a:rPr lang="en-US" sz="1350" dirty="0">
+                <a:solidFill>
+                  <a:srgbClr val="1E293B"/>
+                </a:solidFill>
+                <a:latin typeface="Calibri" pitchFamily="34" charset="0"/>
+                <a:ea typeface="Calibri" pitchFamily="34" charset="-122"/>
+                <a:cs typeface="Calibri" pitchFamily="34" charset="-120"/>
+              </a:rPr>
+              <a:t>Pointed, single-subject questions</a:t>
+            </a:r>
+            <a:endParaRPr lang="en-US" sz="1350" dirty="0"/>
+          </a:p>
+        </p:txBody>
+      </p:sp>
+      <p:sp>
+        <p:nvSpPr>
+          <p:cNvPr id="8" name="Shape 5"/>
+          <p:cNvSpPr/>
+          <p:nvPr/>
+        </p:nvSpPr>
+        <p:spPr>
+          <a:xfrm>
+            <a:off x="6217920" y="1371600"/>
+            <a:ext cx="5486400" cy="4572000"/>
           </a:xfrm>
           <a:prstGeom prst="roundRect">
             <a:avLst>
-              <a:gd name="adj" fmla="val 7843"/>
+              <a:gd name="adj" fmla="val 2000"/>
             </a:avLst>
           </a:prstGeom>
           <a:solidFill>
-            <a:srgbClr val="F4F7FA"/>
+            <a:srgbClr val="FBEDEC"/>
           </a:solidFill>
           <a:ln/>
           <a:effectLst>
@@ -7561,58 +8451,82 @@
       </p:sp>
       <p:sp>
         <p:nvSpPr>
-          <p:cNvPr id="10" name="Shape 8"/>
-          <p:cNvSpPr/>
-          <p:nvPr/>
-        </p:nvSpPr>
-        <p:spPr>
-          <a:xfrm>
-            <a:off x="731520" y="3063240"/>
-            <a:ext cx="566928" cy="566928"/>
+          <p:cNvPr id="9" name="Shape 6"/>
+          <p:cNvSpPr/>
+          <p:nvPr/>
+        </p:nvSpPr>
+        <p:spPr>
+          <a:xfrm>
+            <a:off x="6537960" y="1645920"/>
+            <a:ext cx="731520" cy="731520"/>
           </a:xfrm>
           <a:prstGeom prst="ellipse">
             <a:avLst/>
           </a:prstGeom>
           <a:solidFill>
-            <a:srgbClr val="1C7293"/>
+            <a:srgbClr val="C24A45"/>
           </a:solidFill>
           <a:ln/>
         </p:spPr>
       </p:sp>
-      <p:sp>
-        <p:nvSpPr>
-          <p:cNvPr id="11" name="Text 9"/>
-          <p:cNvSpPr/>
-          <p:nvPr/>
-        </p:nvSpPr>
-        <p:spPr>
-          <a:xfrm>
-            <a:off x="731520" y="3063240"/>
-            <a:ext cx="566928" cy="566928"/>
-          </a:xfrm>
-          <a:prstGeom prst="rect">
-            <a:avLst/>
-          </a:prstGeom>
-          <a:noFill/>
-          <a:ln/>
-        </p:spPr>
-        <p:txBody>
-          <a:bodyPr wrap="square" lIns="0" tIns="0" rIns="0" bIns="0" rtlCol="0" anchor="ctr"/>
-          <a:lstStyle/>
-          <a:p>
-            <a:pPr algn="ctr" indent="0" marL="0">
+      <p:pic>
+        <p:nvPicPr>
+          <p:cNvPr id="10" name="Image 1" descr="preencoded.png">    </p:cNvPr>
+          <p:cNvPicPr>
+            <a:picLocks noChangeAspect="1"/>
+          </p:cNvPicPr>
+          <p:nvPr/>
+        </p:nvPicPr>
+        <p:blipFill>
+          <a:blip r:embed="rId2"/>
+          <a:stretch>
+            <a:fillRect/>
+          </a:stretch>
+        </p:blipFill>
+        <p:spPr>
+          <a:xfrm>
+            <a:off x="6728155" y="1836115"/>
+            <a:ext cx="351130" cy="351130"/>
+          </a:xfrm>
+          <a:prstGeom prst="rect">
+            <a:avLst/>
+          </a:prstGeom>
+        </p:spPr>
+      </p:pic>
+      <p:sp>
+        <p:nvSpPr>
+          <p:cNvPr id="11" name="Text 7"/>
+          <p:cNvSpPr/>
+          <p:nvPr/>
+        </p:nvSpPr>
+        <p:spPr>
+          <a:xfrm>
+            <a:off x="7406640" y="1645920"/>
+            <a:ext cx="4114800" cy="731520"/>
+          </a:xfrm>
+          <a:prstGeom prst="rect">
+            <a:avLst/>
+          </a:prstGeom>
+          <a:noFill/>
+          <a:ln/>
+        </p:spPr>
+        <p:txBody>
+          <a:bodyPr wrap="square" lIns="0" tIns="0" rIns="0" bIns="0" rtlCol="0" anchor="ctr"/>
+          <a:lstStyle/>
+          <a:p>
+            <a:pPr indent="0" marL="0">
               <a:buNone/>
             </a:pPr>
             <a:r>
               <a:rPr lang="en-US" sz="1800" b="1" dirty="0">
                 <a:solidFill>
-                  <a:srgbClr val="FFFFFF"/>
-                </a:solidFill>
-                <a:latin typeface="Calibri" pitchFamily="34" charset="0"/>
-                <a:ea typeface="Calibri" pitchFamily="34" charset="-122"/>
-                <a:cs typeface="Calibri" pitchFamily="34" charset="-120"/>
-              </a:rPr>
-              <a:t>2</a:t>
+                  <a:srgbClr val="C24A45"/>
+                </a:solidFill>
+                <a:latin typeface="Calibri" pitchFamily="34" charset="0"/>
+                <a:ea typeface="Calibri" pitchFamily="34" charset="-122"/>
+                <a:cs typeface="Calibri" pitchFamily="34" charset="-120"/>
+              </a:rPr>
+              <a:t>Fails / degrades — keep out</a:t>
             </a:r>
             <a:endParaRPr lang="en-US" sz="1800" dirty="0"/>
           </a:p>
@@ -7620,417 +8534,149 @@
       </p:sp>
       <p:sp>
         <p:nvSpPr>
-          <p:cNvPr id="12" name="Text 10"/>
-          <p:cNvSpPr/>
-          <p:nvPr/>
-        </p:nvSpPr>
-        <p:spPr>
-          <a:xfrm>
-            <a:off x="1508760" y="2971800"/>
-            <a:ext cx="10058400" cy="438912"/>
-          </a:xfrm>
-          <a:prstGeom prst="rect">
-            <a:avLst/>
-          </a:prstGeom>
-          <a:noFill/>
-          <a:ln/>
-        </p:spPr>
-        <p:txBody>
-          <a:bodyPr wrap="square" lIns="0" tIns="0" rIns="0" bIns="0" rtlCol="0" anchor="ctr"/>
-          <a:lstStyle/>
-          <a:p>
-            <a:pPr indent="0" marL="0">
-              <a:buNone/>
-            </a:pPr>
-            <a:r>
-              <a:rPr lang="en-US" sz="1550" b="1" dirty="0">
-                <a:solidFill>
-                  <a:srgbClr val="0B2545"/>
-                </a:solidFill>
-                <a:latin typeface="Calibri" pitchFamily="34" charset="0"/>
-                <a:ea typeface="Calibri" pitchFamily="34" charset="-122"/>
-                <a:cs typeface="Calibri" pitchFamily="34" charset="-120"/>
-              </a:rPr>
-              <a:t>"Average &lt;metric&gt; for &lt;one category&gt;?"</a:t>
-            </a:r>
-            <a:endParaRPr lang="en-US" sz="1550" dirty="0"/>
-          </a:p>
-        </p:txBody>
-      </p:sp>
-      <p:sp>
-        <p:nvSpPr>
-          <p:cNvPr id="13" name="Text 11"/>
-          <p:cNvSpPr/>
-          <p:nvPr/>
-        </p:nvSpPr>
-        <p:spPr>
-          <a:xfrm>
-            <a:off x="1508760" y="3364992"/>
-            <a:ext cx="10058400" cy="384048"/>
-          </a:xfrm>
-          <a:prstGeom prst="rect">
-            <a:avLst/>
-          </a:prstGeom>
-          <a:noFill/>
-          <a:ln/>
-        </p:spPr>
-        <p:txBody>
-          <a:bodyPr wrap="square" lIns="0" tIns="0" rIns="0" bIns="0" rtlCol="0" anchor="ctr"/>
-          <a:lstStyle/>
-          <a:p>
-            <a:pPr indent="0" marL="0">
-              <a:buNone/>
-            </a:pPr>
-            <a:r>
-              <a:rPr lang="en-US" sz="1250" dirty="0">
-                <a:solidFill>
-                  <a:srgbClr val="5B6B7F"/>
-                </a:solidFill>
-                <a:latin typeface="Calibri" pitchFamily="34" charset="0"/>
-                <a:ea typeface="Calibri" pitchFamily="34" charset="-122"/>
-                <a:cs typeface="Calibri" pitchFamily="34" charset="-120"/>
-              </a:rPr>
-              <a:t>Single-group stat. (Don't ask it to COMPARE two categories live.)</a:t>
-            </a:r>
-            <a:endParaRPr lang="en-US" sz="1250" dirty="0"/>
-          </a:p>
-        </p:txBody>
-      </p:sp>
-      <p:sp>
-        <p:nvSpPr>
-          <p:cNvPr id="14" name="Shape 12"/>
-          <p:cNvSpPr/>
-          <p:nvPr/>
-        </p:nvSpPr>
-        <p:spPr>
-          <a:xfrm>
-            <a:off x="502920" y="3941064"/>
-            <a:ext cx="11201400" cy="932688"/>
-          </a:xfrm>
-          <a:prstGeom prst="roundRect">
-            <a:avLst>
-              <a:gd name="adj" fmla="val 7843"/>
-            </a:avLst>
-          </a:prstGeom>
-          <a:solidFill>
-            <a:srgbClr val="F4F7FA"/>
-          </a:solidFill>
-          <a:ln/>
-          <a:effectLst>
-            <a:outerShdw sx="100000" sy="100000" kx="0" ky="0" algn="bl" rotWithShape="0" blurRad="88900" dist="38100" dir="5400000">
-              <a:srgbClr val="000000">
-                <a:alpha val="12000"/>
-              </a:srgbClr>
-            </a:outerShdw>
-          </a:effectLst>
-        </p:spPr>
-      </p:sp>
-      <p:sp>
-        <p:nvSpPr>
-          <p:cNvPr id="15" name="Shape 13"/>
-          <p:cNvSpPr/>
-          <p:nvPr/>
-        </p:nvSpPr>
-        <p:spPr>
-          <a:xfrm>
-            <a:off x="731520" y="4142232"/>
-            <a:ext cx="566928" cy="566928"/>
-          </a:xfrm>
-          <a:prstGeom prst="ellipse">
-            <a:avLst/>
-          </a:prstGeom>
-          <a:solidFill>
-            <a:srgbClr val="E8A33D"/>
-          </a:solidFill>
-          <a:ln/>
-        </p:spPr>
-      </p:sp>
-      <p:sp>
-        <p:nvSpPr>
-          <p:cNvPr id="16" name="Text 14"/>
-          <p:cNvSpPr/>
-          <p:nvPr/>
-        </p:nvSpPr>
-        <p:spPr>
-          <a:xfrm>
-            <a:off x="731520" y="4142232"/>
-            <a:ext cx="566928" cy="566928"/>
-          </a:xfrm>
-          <a:prstGeom prst="rect">
-            <a:avLst/>
-          </a:prstGeom>
-          <a:noFill/>
-          <a:ln/>
-        </p:spPr>
-        <p:txBody>
-          <a:bodyPr wrap="square" lIns="0" tIns="0" rIns="0" bIns="0" rtlCol="0" anchor="ctr"/>
-          <a:lstStyle/>
-          <a:p>
-            <a:pPr algn="ctr" indent="0" marL="0">
-              <a:buNone/>
-            </a:pPr>
-            <a:r>
-              <a:rPr lang="en-US" sz="1800" b="1" dirty="0">
-                <a:solidFill>
-                  <a:srgbClr val="FFFFFF"/>
-                </a:solidFill>
-                <a:latin typeface="Calibri" pitchFamily="34" charset="0"/>
-                <a:ea typeface="Calibri" pitchFamily="34" charset="-122"/>
-                <a:cs typeface="Calibri" pitchFamily="34" charset="-120"/>
-              </a:rPr>
-              <a:t>3</a:t>
-            </a:r>
-            <a:endParaRPr lang="en-US" sz="1800" dirty="0"/>
-          </a:p>
-        </p:txBody>
-      </p:sp>
-      <p:sp>
-        <p:nvSpPr>
-          <p:cNvPr id="17" name="Text 15"/>
-          <p:cNvSpPr/>
-          <p:nvPr/>
-        </p:nvSpPr>
-        <p:spPr>
-          <a:xfrm>
-            <a:off x="1508760" y="4050792"/>
-            <a:ext cx="10058400" cy="438912"/>
-          </a:xfrm>
-          <a:prstGeom prst="rect">
-            <a:avLst/>
-          </a:prstGeom>
-          <a:noFill/>
-          <a:ln/>
-        </p:spPr>
-        <p:txBody>
-          <a:bodyPr wrap="square" lIns="0" tIns="0" rIns="0" bIns="0" rtlCol="0" anchor="ctr"/>
-          <a:lstStyle/>
-          <a:p>
-            <a:pPr indent="0" marL="0">
-              <a:buNone/>
-            </a:pPr>
-            <a:r>
-              <a:rPr lang="en-US" sz="1550" b="1" dirty="0">
-                <a:solidFill>
-                  <a:srgbClr val="0B2545"/>
-                </a:solidFill>
-                <a:latin typeface="Calibri" pitchFamily="34" charset="0"/>
-                <a:ea typeface="Calibri" pitchFamily="34" charset="-122"/>
-                <a:cs typeface="Calibri" pitchFamily="34" charset="-120"/>
-              </a:rPr>
-              <a:t>"Which &lt;high-priority&gt; &lt;records&gt; also &lt;2nd condition&gt;?"</a:t>
-            </a:r>
-            <a:endParaRPr lang="en-US" sz="1550" dirty="0"/>
-          </a:p>
-        </p:txBody>
-      </p:sp>
-      <p:sp>
-        <p:nvSpPr>
-          <p:cNvPr id="18" name="Text 16"/>
-          <p:cNvSpPr/>
-          <p:nvPr/>
-        </p:nvSpPr>
-        <p:spPr>
-          <a:xfrm>
-            <a:off x="1508760" y="4443984"/>
-            <a:ext cx="10058400" cy="384048"/>
-          </a:xfrm>
-          <a:prstGeom prst="rect">
-            <a:avLst/>
-          </a:prstGeom>
-          <a:noFill/>
-          <a:ln/>
-        </p:spPr>
-        <p:txBody>
-          <a:bodyPr wrap="square" lIns="0" tIns="0" rIns="0" bIns="0" rtlCol="0" anchor="ctr"/>
-          <a:lstStyle/>
-          <a:p>
-            <a:pPr indent="0" marL="0">
-              <a:buNone/>
-            </a:pPr>
-            <a:r>
-              <a:rPr lang="en-US" sz="1250" dirty="0">
-                <a:solidFill>
-                  <a:srgbClr val="5B6B7F"/>
-                </a:solidFill>
-                <a:latin typeface="Calibri" pitchFamily="34" charset="0"/>
-                <a:ea typeface="Calibri" pitchFamily="34" charset="-122"/>
-                <a:cs typeface="Calibri" pitchFamily="34" charset="-120"/>
-              </a:rPr>
-              <a:t>Centerpiece — a multi-attribute insight with a clear takeaway.</a:t>
-            </a:r>
-            <a:endParaRPr lang="en-US" sz="1250" dirty="0"/>
-          </a:p>
-        </p:txBody>
-      </p:sp>
-      <p:sp>
-        <p:nvSpPr>
-          <p:cNvPr id="19" name="Shape 17"/>
-          <p:cNvSpPr/>
-          <p:nvPr/>
-        </p:nvSpPr>
-        <p:spPr>
-          <a:xfrm>
-            <a:off x="502920" y="5020056"/>
-            <a:ext cx="11201400" cy="932688"/>
-          </a:xfrm>
-          <a:prstGeom prst="roundRect">
-            <a:avLst>
-              <a:gd name="adj" fmla="val 7843"/>
-            </a:avLst>
-          </a:prstGeom>
-          <a:solidFill>
-            <a:srgbClr val="F4F7FA"/>
-          </a:solidFill>
-          <a:ln/>
-          <a:effectLst>
-            <a:outerShdw sx="100000" sy="100000" kx="0" ky="0" algn="bl" rotWithShape="0" blurRad="88900" dist="38100" dir="5400000">
-              <a:srgbClr val="000000">
-                <a:alpha val="12000"/>
-              </a:srgbClr>
-            </a:outerShdw>
-          </a:effectLst>
-        </p:spPr>
-      </p:sp>
-      <p:sp>
-        <p:nvSpPr>
-          <p:cNvPr id="20" name="Shape 18"/>
-          <p:cNvSpPr/>
-          <p:nvPr/>
-        </p:nvSpPr>
-        <p:spPr>
-          <a:xfrm>
-            <a:off x="731520" y="5221224"/>
-            <a:ext cx="566928" cy="566928"/>
-          </a:xfrm>
-          <a:prstGeom prst="ellipse">
-            <a:avLst/>
-          </a:prstGeom>
-          <a:solidFill>
-            <a:srgbClr val="0B2545"/>
-          </a:solidFill>
-          <a:ln/>
-        </p:spPr>
-      </p:sp>
-      <p:sp>
-        <p:nvSpPr>
-          <p:cNvPr id="21" name="Text 19"/>
-          <p:cNvSpPr/>
-          <p:nvPr/>
-        </p:nvSpPr>
-        <p:spPr>
-          <a:xfrm>
-            <a:off x="731520" y="5221224"/>
-            <a:ext cx="566928" cy="566928"/>
-          </a:xfrm>
-          <a:prstGeom prst="rect">
-            <a:avLst/>
-          </a:prstGeom>
-          <a:noFill/>
-          <a:ln/>
-        </p:spPr>
-        <p:txBody>
-          <a:bodyPr wrap="square" lIns="0" tIns="0" rIns="0" bIns="0" rtlCol="0" anchor="ctr"/>
-          <a:lstStyle/>
-          <a:p>
-            <a:pPr algn="ctr" indent="0" marL="0">
-              <a:buNone/>
-            </a:pPr>
-            <a:r>
-              <a:rPr lang="en-US" sz="1800" b="1" dirty="0">
-                <a:solidFill>
-                  <a:srgbClr val="FFFFFF"/>
-                </a:solidFill>
-                <a:latin typeface="Calibri" pitchFamily="34" charset="0"/>
-                <a:ea typeface="Calibri" pitchFamily="34" charset="-122"/>
-                <a:cs typeface="Calibri" pitchFamily="34" charset="-120"/>
-              </a:rPr>
-              <a:t>4</a:t>
-            </a:r>
-            <a:endParaRPr lang="en-US" sz="1800" dirty="0"/>
-          </a:p>
-        </p:txBody>
-      </p:sp>
-      <p:sp>
-        <p:nvSpPr>
-          <p:cNvPr id="22" name="Text 20"/>
-          <p:cNvSpPr/>
-          <p:nvPr/>
-        </p:nvSpPr>
-        <p:spPr>
-          <a:xfrm>
-            <a:off x="1508760" y="5129784"/>
-            <a:ext cx="10058400" cy="438912"/>
-          </a:xfrm>
-          <a:prstGeom prst="rect">
-            <a:avLst/>
-          </a:prstGeom>
-          <a:noFill/>
-          <a:ln/>
-        </p:spPr>
-        <p:txBody>
-          <a:bodyPr wrap="square" lIns="0" tIns="0" rIns="0" bIns="0" rtlCol="0" anchor="ctr"/>
-          <a:lstStyle/>
-          <a:p>
-            <a:pPr indent="0" marL="0">
-              <a:buNone/>
-            </a:pPr>
-            <a:r>
-              <a:rPr lang="en-US" sz="1550" b="1" dirty="0">
-                <a:solidFill>
-                  <a:srgbClr val="0B2545"/>
-                </a:solidFill>
-                <a:latin typeface="Calibri" pitchFamily="34" charset="0"/>
-                <a:ea typeface="Calibri" pitchFamily="34" charset="-122"/>
-                <a:cs typeface="Calibri" pitchFamily="34" charset="-120"/>
-              </a:rPr>
-              <a:t>"Which &lt;records&gt; in &lt;region&gt; intersect &lt;layer&gt;?"</a:t>
-            </a:r>
-            <a:endParaRPr lang="en-US" sz="1550" dirty="0"/>
-          </a:p>
-        </p:txBody>
-      </p:sp>
-      <p:sp>
-        <p:nvSpPr>
-          <p:cNvPr id="23" name="Text 21"/>
-          <p:cNvSpPr/>
-          <p:nvPr/>
-        </p:nvSpPr>
-        <p:spPr>
-          <a:xfrm>
-            <a:off x="1508760" y="5522976"/>
-            <a:ext cx="10058400" cy="384048"/>
-          </a:xfrm>
-          <a:prstGeom prst="rect">
-            <a:avLst/>
-          </a:prstGeom>
-          <a:noFill/>
-          <a:ln/>
-        </p:spPr>
-        <p:txBody>
-          <a:bodyPr wrap="square" lIns="0" tIns="0" rIns="0" bIns="0" rtlCol="0" anchor="ctr"/>
-          <a:lstStyle/>
-          <a:p>
-            <a:pPr indent="0" marL="0">
-              <a:buNone/>
-            </a:pPr>
-            <a:r>
-              <a:rPr lang="en-US" sz="1250" dirty="0">
-                <a:solidFill>
-                  <a:srgbClr val="5B6B7F"/>
-                </a:solidFill>
-                <a:latin typeface="Calibri" pitchFamily="34" charset="0"/>
-                <a:ea typeface="Calibri" pitchFamily="34" charset="-122"/>
-                <a:cs typeface="Calibri" pitchFamily="34" charset="-120"/>
-              </a:rPr>
-              <a:t>Cross-layer reveal — must stay region-scoped (else 413).</a:t>
-            </a:r>
-            <a:endParaRPr lang="en-US" sz="1250" dirty="0"/>
-          </a:p>
-        </p:txBody>
-      </p:sp>
-      <p:sp>
-        <p:nvSpPr>
-          <p:cNvPr id="24" name="Text 22"/>
+          <p:cNvPr id="12" name="Text 8"/>
+          <p:cNvSpPr/>
+          <p:nvPr/>
+        </p:nvSpPr>
+        <p:spPr>
+          <a:xfrm>
+            <a:off x="6583680" y="2651760"/>
+            <a:ext cx="4937760" cy="3108960"/>
+          </a:xfrm>
+          <a:prstGeom prst="rect">
+            <a:avLst/>
+          </a:prstGeom>
+          <a:noFill/>
+          <a:ln/>
+        </p:spPr>
+        <p:txBody>
+          <a:bodyPr wrap="square" lIns="0" tIns="0" rIns="0" bIns="0" rtlCol="0" anchor="ctr"/>
+          <a:lstStyle/>
+          <a:p>
+            <a:pPr marL="342900" indent="-342900">
+              <a:lnSpc>
+                <a:spcPts val="2200"/>
+              </a:lnSpc>
+              <a:spcAft>
+                <a:spcPts val="1200"/>
+              </a:spcAft>
+              <a:buSzPct val="100000"/>
+              <a:buChar char="•"/>
+            </a:pPr>
+            <a:r>
+              <a:rPr lang="en-US" sz="1350" dirty="0">
+                <a:solidFill>
+                  <a:srgbClr val="1E293B"/>
+                </a:solidFill>
+                <a:latin typeface="Calibri" pitchFamily="34" charset="0"/>
+                <a:ea typeface="Calibri" pitchFamily="34" charset="-122"/>
+                <a:cs typeface="Calibri" pitchFamily="34" charset="-120"/>
+              </a:rPr>
+              <a:t>Schema introspection  ("list fields") — hallucinates</a:t>
+            </a:r>
+            <a:endParaRPr lang="en-US" sz="1350" dirty="0"/>
+          </a:p>
+          <a:p>
+            <a:pPr marL="342900" indent="-342900">
+              <a:lnSpc>
+                <a:spcPts val="2200"/>
+              </a:lnSpc>
+              <a:spcAft>
+                <a:spcPts val="1200"/>
+              </a:spcAft>
+              <a:buSzPct val="100000"/>
+              <a:buChar char="•"/>
+            </a:pPr>
+            <a:r>
+              <a:rPr lang="en-US" sz="1350" dirty="0">
+                <a:solidFill>
+                  <a:srgbClr val="1E293B"/>
+                </a:solidFill>
+                <a:latin typeface="Calibri" pitchFamily="34" charset="0"/>
+                <a:ea typeface="Calibri" pitchFamily="34" charset="-122"/>
+                <a:cs typeface="Calibri" pitchFamily="34" charset="-120"/>
+              </a:rPr>
+              <a:t>Cross-category comparison — silently degrades</a:t>
+            </a:r>
+            <a:endParaRPr lang="en-US" sz="1350" dirty="0"/>
+          </a:p>
+          <a:p>
+            <a:pPr marL="342900" indent="-342900">
+              <a:lnSpc>
+                <a:spcPts val="2200"/>
+              </a:lnSpc>
+              <a:spcAft>
+                <a:spcPts val="1200"/>
+              </a:spcAft>
+              <a:buSzPct val="100000"/>
+              <a:buChar char="•"/>
+            </a:pPr>
+            <a:r>
+              <a:rPr lang="en-US" sz="1350" dirty="0">
+                <a:solidFill>
+                  <a:srgbClr val="1E293B"/>
+                </a:solidFill>
+                <a:latin typeface="Calibri" pitchFamily="34" charset="0"/>
+                <a:ea typeface="Calibri" pitchFamily="34" charset="-122"/>
+                <a:cs typeface="Calibri" pitchFamily="34" charset="-120"/>
+              </a:rPr>
+              <a:t>Unbounded cross-layer  — 413 error</a:t>
+            </a:r>
+            <a:endParaRPr lang="en-US" sz="1350" dirty="0"/>
+          </a:p>
+          <a:p>
+            <a:pPr marL="342900" indent="-342900">
+              <a:lnSpc>
+                <a:spcPts val="2200"/>
+              </a:lnSpc>
+              <a:spcAft>
+                <a:spcPts val="1200"/>
+              </a:spcAft>
+              <a:buSzPct val="100000"/>
+              <a:buChar char="•"/>
+            </a:pPr>
+            <a:r>
+              <a:rPr lang="en-US" sz="1350" dirty="0">
+                <a:solidFill>
+                  <a:srgbClr val="1E293B"/>
+                </a:solidFill>
+                <a:latin typeface="Calibri" pitchFamily="34" charset="0"/>
+                <a:ea typeface="Calibri" pitchFamily="34" charset="-122"/>
+                <a:cs typeface="Calibri" pitchFamily="34" charset="-120"/>
+              </a:rPr>
+              <a:t>Broad sweeps  (vague, unscoped questions)</a:t>
+            </a:r>
+            <a:endParaRPr lang="en-US" sz="1350" dirty="0"/>
+          </a:p>
+          <a:p>
+            <a:pPr marL="342900" indent="-342900">
+              <a:lnSpc>
+                <a:spcPts val="2200"/>
+              </a:lnSpc>
+              <a:spcAft>
+                <a:spcPts val="1200"/>
+              </a:spcAft>
+              <a:buSzPct val="100000"/>
+              <a:buChar char="•"/>
+            </a:pPr>
+            <a:r>
+              <a:rPr lang="en-US" sz="1350" dirty="0">
+                <a:solidFill>
+                  <a:srgbClr val="1E293B"/>
+                </a:solidFill>
+                <a:latin typeface="Calibri" pitchFamily="34" charset="0"/>
+                <a:ea typeface="Calibri" pitchFamily="34" charset="-122"/>
+                <a:cs typeface="Calibri" pitchFamily="34" charset="-120"/>
+              </a:rPr>
+              <a:t>Charts · forecasts · email · user location</a:t>
+            </a:r>
+            <a:endParaRPr lang="en-US" sz="1350" dirty="0"/>
+          </a:p>
+        </p:txBody>
+      </p:sp>
+      <p:sp>
+        <p:nvSpPr>
+          <p:cNvPr id="13" name="Text 9"/>
           <p:cNvSpPr/>
           <p:nvPr/>
         </p:nvSpPr>
@@ -8069,7 +8715,7 @@
       </p:sp>
       <p:sp>
         <p:nvSpPr>
-          <p:cNvPr id="25" name="Text 23"/>
+          <p:cNvPr id="14" name="Text 10"/>
           <p:cNvSpPr/>
           <p:nvPr/>
         </p:nvSpPr>
@@ -8120,7 +8766,7 @@
     <p:bg>
       <p:bgPr>
         <a:solidFill>
-          <a:srgbClr val="0B2545"/>
+          <a:srgbClr val="FFFFFF"/>
         </a:solidFill>
       </p:bgPr>
     </p:bg>
@@ -8140,34 +8786,453 @@
       </p:grpSpPr>
       <p:sp>
         <p:nvSpPr>
-          <p:cNvPr id="2" name="Shape 0"/>
-          <p:cNvSpPr/>
-          <p:nvPr/>
-        </p:nvSpPr>
-        <p:spPr>
-          <a:xfrm>
-            <a:off x="-1463040" y="4023360"/>
-            <a:ext cx="4754880" cy="4754880"/>
+          <p:cNvPr id="2" name="Text 0"/>
+          <p:cNvSpPr/>
+          <p:nvPr/>
+        </p:nvSpPr>
+        <p:spPr>
+          <a:xfrm>
+            <a:off x="502920" y="411480"/>
+            <a:ext cx="11155680" cy="640080"/>
+          </a:xfrm>
+          <a:prstGeom prst="rect">
+            <a:avLst/>
+          </a:prstGeom>
+          <a:noFill/>
+          <a:ln/>
+        </p:spPr>
+        <p:txBody>
+          <a:bodyPr wrap="square" lIns="0" tIns="0" rIns="0" bIns="0" rtlCol="0" anchor="ctr"/>
+          <a:lstStyle/>
+          <a:p>
+            <a:pPr indent="0" marL="0">
+              <a:buNone/>
+            </a:pPr>
+            <a:r>
+              <a:rPr lang="en-US" sz="3000" b="1" dirty="0">
+                <a:solidFill>
+                  <a:srgbClr val="0B2545"/>
+                </a:solidFill>
+                <a:latin typeface="Bookman Old Style" pitchFamily="34" charset="0"/>
+                <a:ea typeface="Bookman Old Style" pitchFamily="34" charset="-122"/>
+                <a:cs typeface="Bookman Old Style" pitchFamily="34" charset="-120"/>
+              </a:rPr>
+              <a:t>The demo run sheet — prompt shapes that work</a:t>
+            </a:r>
+            <a:endParaRPr lang="en-US" sz="3000" dirty="0"/>
+          </a:p>
+        </p:txBody>
+      </p:sp>
+      <p:sp>
+        <p:nvSpPr>
+          <p:cNvPr id="3" name="Text 1"/>
+          <p:cNvSpPr/>
+          <p:nvPr/>
+        </p:nvSpPr>
+        <p:spPr>
+          <a:xfrm>
+            <a:off x="502920" y="1078992"/>
+            <a:ext cx="10972800" cy="457200"/>
+          </a:xfrm>
+          <a:prstGeom prst="rect">
+            <a:avLst/>
+          </a:prstGeom>
+          <a:noFill/>
+          <a:ln/>
+        </p:spPr>
+        <p:txBody>
+          <a:bodyPr wrap="square" lIns="0" tIns="0" rIns="0" bIns="0" rtlCol="0" anchor="ctr"/>
+          <a:lstStyle/>
+          <a:p>
+            <a:pPr indent="0" marL="0">
+              <a:buNone/>
+            </a:pPr>
+            <a:r>
+              <a:rPr lang="en-US" sz="1400" dirty="0">
+                <a:solidFill>
+                  <a:srgbClr val="5B6B7F"/>
+                </a:solidFill>
+                <a:latin typeface="Calibri" pitchFamily="34" charset="0"/>
+                <a:ea typeface="Calibri" pitchFamily="34" charset="-122"/>
+                <a:cs typeface="Calibri" pitchFamily="34" charset="-120"/>
+              </a:rPr>
+              <a:t>Fill these with prompts you've verified against your data. Build from simple to the strongest hook.</a:t>
+            </a:r>
+            <a:endParaRPr lang="en-US" sz="1400" dirty="0"/>
+          </a:p>
+        </p:txBody>
+      </p:sp>
+      <p:sp>
+        <p:nvSpPr>
+          <p:cNvPr id="4" name="Shape 2"/>
+          <p:cNvSpPr/>
+          <p:nvPr/>
+        </p:nvSpPr>
+        <p:spPr>
+          <a:xfrm>
+            <a:off x="502920" y="1783080"/>
+            <a:ext cx="11201400" cy="932688"/>
+          </a:xfrm>
+          <a:prstGeom prst="roundRect">
+            <a:avLst>
+              <a:gd name="adj" fmla="val 7843"/>
+            </a:avLst>
+          </a:prstGeom>
+          <a:solidFill>
+            <a:srgbClr val="F4F7FA"/>
+          </a:solidFill>
+          <a:ln/>
+          <a:effectLst>
+            <a:outerShdw sx="100000" sy="100000" kx="0" ky="0" algn="bl" rotWithShape="0" blurRad="88900" dist="38100" dir="5400000">
+              <a:srgbClr val="000000">
+                <a:alpha val="12000"/>
+              </a:srgbClr>
+            </a:outerShdw>
+          </a:effectLst>
+        </p:spPr>
+      </p:sp>
+      <p:sp>
+        <p:nvSpPr>
+          <p:cNvPr id="5" name="Shape 3"/>
+          <p:cNvSpPr/>
+          <p:nvPr/>
+        </p:nvSpPr>
+        <p:spPr>
+          <a:xfrm>
+            <a:off x="731520" y="1984248"/>
+            <a:ext cx="566928" cy="566928"/>
           </a:xfrm>
           <a:prstGeom prst="ellipse">
             <a:avLst/>
           </a:prstGeom>
           <a:solidFill>
-            <a:srgbClr val="13315C"/>
+            <a:srgbClr val="1C7293"/>
           </a:solidFill>
           <a:ln/>
         </p:spPr>
       </p:sp>
       <p:sp>
         <p:nvSpPr>
-          <p:cNvPr id="3" name="Shape 1"/>
-          <p:cNvSpPr/>
-          <p:nvPr/>
-        </p:nvSpPr>
-        <p:spPr>
-          <a:xfrm>
-            <a:off x="777240" y="685800"/>
-            <a:ext cx="914400" cy="914400"/>
+          <p:cNvPr id="6" name="Text 4"/>
+          <p:cNvSpPr/>
+          <p:nvPr/>
+        </p:nvSpPr>
+        <p:spPr>
+          <a:xfrm>
+            <a:off x="731520" y="1984248"/>
+            <a:ext cx="566928" cy="566928"/>
+          </a:xfrm>
+          <a:prstGeom prst="rect">
+            <a:avLst/>
+          </a:prstGeom>
+          <a:noFill/>
+          <a:ln/>
+        </p:spPr>
+        <p:txBody>
+          <a:bodyPr wrap="square" lIns="0" tIns="0" rIns="0" bIns="0" rtlCol="0" anchor="ctr"/>
+          <a:lstStyle/>
+          <a:p>
+            <a:pPr algn="ctr" indent="0" marL="0">
+              <a:buNone/>
+            </a:pPr>
+            <a:r>
+              <a:rPr lang="en-US" sz="1800" b="1" dirty="0">
+                <a:solidFill>
+                  <a:srgbClr val="FFFFFF"/>
+                </a:solidFill>
+                <a:latin typeface="Calibri" pitchFamily="34" charset="0"/>
+                <a:ea typeface="Calibri" pitchFamily="34" charset="-122"/>
+                <a:cs typeface="Calibri" pitchFamily="34" charset="-120"/>
+              </a:rPr>
+              <a:t>1</a:t>
+            </a:r>
+            <a:endParaRPr lang="en-US" sz="1800" dirty="0"/>
+          </a:p>
+        </p:txBody>
+      </p:sp>
+      <p:sp>
+        <p:nvSpPr>
+          <p:cNvPr id="7" name="Text 5"/>
+          <p:cNvSpPr/>
+          <p:nvPr/>
+        </p:nvSpPr>
+        <p:spPr>
+          <a:xfrm>
+            <a:off x="1508760" y="1892808"/>
+            <a:ext cx="10058400" cy="438912"/>
+          </a:xfrm>
+          <a:prstGeom prst="rect">
+            <a:avLst/>
+          </a:prstGeom>
+          <a:noFill/>
+          <a:ln/>
+        </p:spPr>
+        <p:txBody>
+          <a:bodyPr wrap="square" lIns="0" tIns="0" rIns="0" bIns="0" rtlCol="0" anchor="ctr"/>
+          <a:lstStyle/>
+          <a:p>
+            <a:pPr indent="0" marL="0">
+              <a:buNone/>
+            </a:pPr>
+            <a:r>
+              <a:rPr lang="en-US" sz="1550" b="1" dirty="0">
+                <a:solidFill>
+                  <a:srgbClr val="0B2545"/>
+                </a:solidFill>
+                <a:latin typeface="Calibri" pitchFamily="34" charset="0"/>
+                <a:ea typeface="Calibri" pitchFamily="34" charset="-122"/>
+                <a:cs typeface="Calibri" pitchFamily="34" charset="-120"/>
+              </a:rPr>
+              <a:t>"Show me the &lt;high-priority&gt; &lt;records&gt;."</a:t>
+            </a:r>
+            <a:endParaRPr lang="en-US" sz="1550" dirty="0"/>
+          </a:p>
+        </p:txBody>
+      </p:sp>
+      <p:sp>
+        <p:nvSpPr>
+          <p:cNvPr id="8" name="Text 6"/>
+          <p:cNvSpPr/>
+          <p:nvPr/>
+        </p:nvSpPr>
+        <p:spPr>
+          <a:xfrm>
+            <a:off x="1508760" y="2286000"/>
+            <a:ext cx="10058400" cy="384048"/>
+          </a:xfrm>
+          <a:prstGeom prst="rect">
+            <a:avLst/>
+          </a:prstGeom>
+          <a:noFill/>
+          <a:ln/>
+        </p:spPr>
+        <p:txBody>
+          <a:bodyPr wrap="square" lIns="0" tIns="0" rIns="0" bIns="0" rtlCol="0" anchor="ctr"/>
+          <a:lstStyle/>
+          <a:p>
+            <a:pPr indent="0" marL="0">
+              <a:buNone/>
+            </a:pPr>
+            <a:r>
+              <a:rPr lang="en-US" sz="1250" dirty="0">
+                <a:solidFill>
+                  <a:srgbClr val="5B6B7F"/>
+                </a:solidFill>
+                <a:latin typeface="Calibri" pitchFamily="34" charset="0"/>
+                <a:ea typeface="Calibri" pitchFamily="34" charset="-122"/>
+                <a:cs typeface="Calibri" pitchFamily="34" charset="-120"/>
+              </a:rPr>
+              <a:t>Opener — single-attribute filter. Verify the count is stable.</a:t>
+            </a:r>
+            <a:endParaRPr lang="en-US" sz="1250" dirty="0"/>
+          </a:p>
+        </p:txBody>
+      </p:sp>
+      <p:sp>
+        <p:nvSpPr>
+          <p:cNvPr id="9" name="Shape 7"/>
+          <p:cNvSpPr/>
+          <p:nvPr/>
+        </p:nvSpPr>
+        <p:spPr>
+          <a:xfrm>
+            <a:off x="502920" y="2862072"/>
+            <a:ext cx="11201400" cy="932688"/>
+          </a:xfrm>
+          <a:prstGeom prst="roundRect">
+            <a:avLst>
+              <a:gd name="adj" fmla="val 7843"/>
+            </a:avLst>
+          </a:prstGeom>
+          <a:solidFill>
+            <a:srgbClr val="F4F7FA"/>
+          </a:solidFill>
+          <a:ln/>
+          <a:effectLst>
+            <a:outerShdw sx="100000" sy="100000" kx="0" ky="0" algn="bl" rotWithShape="0" blurRad="88900" dist="38100" dir="5400000">
+              <a:srgbClr val="000000">
+                <a:alpha val="12000"/>
+              </a:srgbClr>
+            </a:outerShdw>
+          </a:effectLst>
+        </p:spPr>
+      </p:sp>
+      <p:sp>
+        <p:nvSpPr>
+          <p:cNvPr id="10" name="Shape 8"/>
+          <p:cNvSpPr/>
+          <p:nvPr/>
+        </p:nvSpPr>
+        <p:spPr>
+          <a:xfrm>
+            <a:off x="731520" y="3063240"/>
+            <a:ext cx="566928" cy="566928"/>
+          </a:xfrm>
+          <a:prstGeom prst="ellipse">
+            <a:avLst/>
+          </a:prstGeom>
+          <a:solidFill>
+            <a:srgbClr val="1C7293"/>
+          </a:solidFill>
+          <a:ln/>
+        </p:spPr>
+      </p:sp>
+      <p:sp>
+        <p:nvSpPr>
+          <p:cNvPr id="11" name="Text 9"/>
+          <p:cNvSpPr/>
+          <p:nvPr/>
+        </p:nvSpPr>
+        <p:spPr>
+          <a:xfrm>
+            <a:off x="731520" y="3063240"/>
+            <a:ext cx="566928" cy="566928"/>
+          </a:xfrm>
+          <a:prstGeom prst="rect">
+            <a:avLst/>
+          </a:prstGeom>
+          <a:noFill/>
+          <a:ln/>
+        </p:spPr>
+        <p:txBody>
+          <a:bodyPr wrap="square" lIns="0" tIns="0" rIns="0" bIns="0" rtlCol="0" anchor="ctr"/>
+          <a:lstStyle/>
+          <a:p>
+            <a:pPr algn="ctr" indent="0" marL="0">
+              <a:buNone/>
+            </a:pPr>
+            <a:r>
+              <a:rPr lang="en-US" sz="1800" b="1" dirty="0">
+                <a:solidFill>
+                  <a:srgbClr val="FFFFFF"/>
+                </a:solidFill>
+                <a:latin typeface="Calibri" pitchFamily="34" charset="0"/>
+                <a:ea typeface="Calibri" pitchFamily="34" charset="-122"/>
+                <a:cs typeface="Calibri" pitchFamily="34" charset="-120"/>
+              </a:rPr>
+              <a:t>2</a:t>
+            </a:r>
+            <a:endParaRPr lang="en-US" sz="1800" dirty="0"/>
+          </a:p>
+        </p:txBody>
+      </p:sp>
+      <p:sp>
+        <p:nvSpPr>
+          <p:cNvPr id="12" name="Text 10"/>
+          <p:cNvSpPr/>
+          <p:nvPr/>
+        </p:nvSpPr>
+        <p:spPr>
+          <a:xfrm>
+            <a:off x="1508760" y="2971800"/>
+            <a:ext cx="10058400" cy="438912"/>
+          </a:xfrm>
+          <a:prstGeom prst="rect">
+            <a:avLst/>
+          </a:prstGeom>
+          <a:noFill/>
+          <a:ln/>
+        </p:spPr>
+        <p:txBody>
+          <a:bodyPr wrap="square" lIns="0" tIns="0" rIns="0" bIns="0" rtlCol="0" anchor="ctr"/>
+          <a:lstStyle/>
+          <a:p>
+            <a:pPr indent="0" marL="0">
+              <a:buNone/>
+            </a:pPr>
+            <a:r>
+              <a:rPr lang="en-US" sz="1550" b="1" dirty="0">
+                <a:solidFill>
+                  <a:srgbClr val="0B2545"/>
+                </a:solidFill>
+                <a:latin typeface="Calibri" pitchFamily="34" charset="0"/>
+                <a:ea typeface="Calibri" pitchFamily="34" charset="-122"/>
+                <a:cs typeface="Calibri" pitchFamily="34" charset="-120"/>
+              </a:rPr>
+              <a:t>"Average &lt;metric&gt; for &lt;one category&gt;?"</a:t>
+            </a:r>
+            <a:endParaRPr lang="en-US" sz="1550" dirty="0"/>
+          </a:p>
+        </p:txBody>
+      </p:sp>
+      <p:sp>
+        <p:nvSpPr>
+          <p:cNvPr id="13" name="Text 11"/>
+          <p:cNvSpPr/>
+          <p:nvPr/>
+        </p:nvSpPr>
+        <p:spPr>
+          <a:xfrm>
+            <a:off x="1508760" y="3364992"/>
+            <a:ext cx="10058400" cy="384048"/>
+          </a:xfrm>
+          <a:prstGeom prst="rect">
+            <a:avLst/>
+          </a:prstGeom>
+          <a:noFill/>
+          <a:ln/>
+        </p:spPr>
+        <p:txBody>
+          <a:bodyPr wrap="square" lIns="0" tIns="0" rIns="0" bIns="0" rtlCol="0" anchor="ctr"/>
+          <a:lstStyle/>
+          <a:p>
+            <a:pPr indent="0" marL="0">
+              <a:buNone/>
+            </a:pPr>
+            <a:r>
+              <a:rPr lang="en-US" sz="1250" dirty="0">
+                <a:solidFill>
+                  <a:srgbClr val="5B6B7F"/>
+                </a:solidFill>
+                <a:latin typeface="Calibri" pitchFamily="34" charset="0"/>
+                <a:ea typeface="Calibri" pitchFamily="34" charset="-122"/>
+                <a:cs typeface="Calibri" pitchFamily="34" charset="-120"/>
+              </a:rPr>
+              <a:t>Single-group stat. (Don't ask it to COMPARE two categories live.)</a:t>
+            </a:r>
+            <a:endParaRPr lang="en-US" sz="1250" dirty="0"/>
+          </a:p>
+        </p:txBody>
+      </p:sp>
+      <p:sp>
+        <p:nvSpPr>
+          <p:cNvPr id="14" name="Shape 12"/>
+          <p:cNvSpPr/>
+          <p:nvPr/>
+        </p:nvSpPr>
+        <p:spPr>
+          <a:xfrm>
+            <a:off x="502920" y="3941064"/>
+            <a:ext cx="11201400" cy="932688"/>
+          </a:xfrm>
+          <a:prstGeom prst="roundRect">
+            <a:avLst>
+              <a:gd name="adj" fmla="val 7843"/>
+            </a:avLst>
+          </a:prstGeom>
+          <a:solidFill>
+            <a:srgbClr val="F4F7FA"/>
+          </a:solidFill>
+          <a:ln/>
+          <a:effectLst>
+            <a:outerShdw sx="100000" sy="100000" kx="0" ky="0" algn="bl" rotWithShape="0" blurRad="88900" dist="38100" dir="5400000">
+              <a:srgbClr val="000000">
+                <a:alpha val="12000"/>
+              </a:srgbClr>
+            </a:outerShdw>
+          </a:effectLst>
+        </p:spPr>
+      </p:sp>
+      <p:sp>
+        <p:nvSpPr>
+          <p:cNvPr id="15" name="Shape 13"/>
+          <p:cNvSpPr/>
+          <p:nvPr/>
+        </p:nvSpPr>
+        <p:spPr>
+          <a:xfrm>
+            <a:off x="731520" y="4142232"/>
+            <a:ext cx="566928" cy="566928"/>
           </a:xfrm>
           <a:prstGeom prst="ellipse">
             <a:avLst/>
@@ -8178,40 +9243,55 @@
           <a:ln/>
         </p:spPr>
       </p:sp>
-      <p:pic>
-        <p:nvPicPr>
-          <p:cNvPr id="4" name="Image 0" descr="preencoded.png">    </p:cNvPr>
-          <p:cNvPicPr>
-            <a:picLocks noChangeAspect="1"/>
-          </p:cNvPicPr>
-          <p:nvPr/>
-        </p:nvPicPr>
-        <p:blipFill>
-          <a:blip r:embed="rId1"/>
-          <a:stretch>
-            <a:fillRect/>
-          </a:stretch>
-        </p:blipFill>
-        <p:spPr>
-          <a:xfrm>
-            <a:off x="1014984" y="923544"/>
-            <a:ext cx="438912" cy="438912"/>
-          </a:xfrm>
-          <a:prstGeom prst="rect">
-            <a:avLst/>
-          </a:prstGeom>
-        </p:spPr>
-      </p:pic>
-      <p:sp>
-        <p:nvSpPr>
-          <p:cNvPr id="5" name="Text 2"/>
-          <p:cNvSpPr/>
-          <p:nvPr/>
-        </p:nvSpPr>
-        <p:spPr>
-          <a:xfrm>
-            <a:off x="1874520" y="777240"/>
-            <a:ext cx="9601200" cy="731520"/>
+      <p:sp>
+        <p:nvSpPr>
+          <p:cNvPr id="16" name="Text 14"/>
+          <p:cNvSpPr/>
+          <p:nvPr/>
+        </p:nvSpPr>
+        <p:spPr>
+          <a:xfrm>
+            <a:off x="731520" y="4142232"/>
+            <a:ext cx="566928" cy="566928"/>
+          </a:xfrm>
+          <a:prstGeom prst="rect">
+            <a:avLst/>
+          </a:prstGeom>
+          <a:noFill/>
+          <a:ln/>
+        </p:spPr>
+        <p:txBody>
+          <a:bodyPr wrap="square" lIns="0" tIns="0" rIns="0" bIns="0" rtlCol="0" anchor="ctr"/>
+          <a:lstStyle/>
+          <a:p>
+            <a:pPr algn="ctr" indent="0" marL="0">
+              <a:buNone/>
+            </a:pPr>
+            <a:r>
+              <a:rPr lang="en-US" sz="1800" b="1" dirty="0">
+                <a:solidFill>
+                  <a:srgbClr val="FFFFFF"/>
+                </a:solidFill>
+                <a:latin typeface="Calibri" pitchFamily="34" charset="0"/>
+                <a:ea typeface="Calibri" pitchFamily="34" charset="-122"/>
+                <a:cs typeface="Calibri" pitchFamily="34" charset="-120"/>
+              </a:rPr>
+              <a:t>3</a:t>
+            </a:r>
+            <a:endParaRPr lang="en-US" sz="1800" dirty="0"/>
+          </a:p>
+        </p:txBody>
+      </p:sp>
+      <p:sp>
+        <p:nvSpPr>
+          <p:cNvPr id="17" name="Text 15"/>
+          <p:cNvSpPr/>
+          <p:nvPr/>
+        </p:nvSpPr>
+        <p:spPr>
+          <a:xfrm>
+            <a:off x="1508760" y="4050792"/>
+            <a:ext cx="10058400" cy="438912"/>
           </a:xfrm>
           <a:prstGeom prst="rect">
             <a:avLst/>
@@ -8227,54 +9307,30 @@
               <a:buNone/>
             </a:pPr>
             <a:r>
-              <a:rPr lang="en-US" sz="2800" b="1" dirty="0">
-                <a:solidFill>
-                  <a:srgbClr val="FFFFFF"/>
-                </a:solidFill>
-                <a:latin typeface="Bookman Old Style" pitchFamily="34" charset="0"/>
-                <a:ea typeface="Bookman Old Style" pitchFamily="34" charset="-122"/>
-                <a:cs typeface="Bookman Old Style" pitchFamily="34" charset="-120"/>
-              </a:rPr>
-              <a:t>Guidelines to expedite the next build</a:t>
-            </a:r>
-            <a:endParaRPr lang="en-US" sz="2800" dirty="0"/>
-          </a:p>
-        </p:txBody>
-      </p:sp>
-      <p:pic>
-        <p:nvPicPr>
-          <p:cNvPr id="6" name="Image 1" descr="preencoded.png">    </p:cNvPr>
-          <p:cNvPicPr>
-            <a:picLocks noChangeAspect="1"/>
-          </p:cNvPicPr>
-          <p:nvPr/>
-        </p:nvPicPr>
-        <p:blipFill>
-          <a:blip r:embed="rId2"/>
-          <a:stretch>
-            <a:fillRect/>
-          </a:stretch>
-        </p:blipFill>
-        <p:spPr>
-          <a:xfrm>
-            <a:off x="868680" y="2002536"/>
-            <a:ext cx="310896" cy="310896"/>
-          </a:xfrm>
-          <a:prstGeom prst="rect">
-            <a:avLst/>
-          </a:prstGeom>
-        </p:spPr>
-      </p:pic>
-      <p:sp>
-        <p:nvSpPr>
-          <p:cNvPr id="7" name="Text 3"/>
-          <p:cNvSpPr/>
-          <p:nvPr/>
-        </p:nvSpPr>
-        <p:spPr>
-          <a:xfrm>
-            <a:off x="1371600" y="1965960"/>
-            <a:ext cx="10058400" cy="502920"/>
+              <a:rPr lang="en-US" sz="1550" b="1" dirty="0">
+                <a:solidFill>
+                  <a:srgbClr val="0B2545"/>
+                </a:solidFill>
+                <a:latin typeface="Calibri" pitchFamily="34" charset="0"/>
+                <a:ea typeface="Calibri" pitchFamily="34" charset="-122"/>
+                <a:cs typeface="Calibri" pitchFamily="34" charset="-120"/>
+              </a:rPr>
+              <a:t>"Which &lt;high-priority&gt; &lt;records&gt; also &lt;2nd condition&gt;?"</a:t>
+            </a:r>
+            <a:endParaRPr lang="en-US" sz="1550" dirty="0"/>
+          </a:p>
+        </p:txBody>
+      </p:sp>
+      <p:sp>
+        <p:nvSpPr>
+          <p:cNvPr id="18" name="Text 16"/>
+          <p:cNvSpPr/>
+          <p:nvPr/>
+        </p:nvSpPr>
+        <p:spPr>
+          <a:xfrm>
+            <a:off x="1508760" y="4443984"/>
+            <a:ext cx="10058400" cy="384048"/>
           </a:xfrm>
           <a:prstGeom prst="rect">
             <a:avLst/>
@@ -8287,407 +9343,121 @@
           <a:lstStyle/>
           <a:p>
             <a:pPr indent="0" marL="0">
-              <a:lnSpc>
-                <a:spcPts val="1800"/>
-              </a:lnSpc>
-              <a:buNone/>
-            </a:pPr>
-            <a:r>
-              <a:rPr lang="en-US" sz="1500" b="1" dirty="0">
-                <a:solidFill>
-                  <a:srgbClr val="FFFFFF"/>
-                </a:solidFill>
-                <a:latin typeface="Calibri" pitchFamily="34" charset="0"/>
-                <a:ea typeface="Calibri" pitchFamily="34" charset="-122"/>
-                <a:cs typeface="Calibri" pitchFamily="34" charset="-120"/>
-              </a:rPr>
-              <a:t>Start the upstream prep first.  </a:t>
-            </a:r>
-            <a:pPr indent="0" marL="0">
-              <a:lnSpc>
-                <a:spcPts val="1800"/>
-              </a:lnSpc>
-              <a:buNone/>
-            </a:pPr>
-            <a:r>
-              <a:rPr lang="en-US" sz="1500" dirty="0">
-                <a:solidFill>
-                  <a:srgbClr val="C9D6E5"/>
-                </a:solidFill>
-                <a:latin typeface="Calibri" pitchFamily="34" charset="0"/>
-                <a:ea typeface="Calibri" pitchFamily="34" charset="-122"/>
-                <a:cs typeface="Calibri" pitchFamily="34" charset="-120"/>
-              </a:rPr>
-              <a:t>Embeddings + OAuth are the long pole — they gate all app code.</a:t>
-            </a:r>
-            <a:endParaRPr lang="en-US" sz="1500" dirty="0"/>
-          </a:p>
-        </p:txBody>
-      </p:sp>
-      <p:pic>
-        <p:nvPicPr>
-          <p:cNvPr id="8" name="Image 2" descr="preencoded.png">    </p:cNvPr>
-          <p:cNvPicPr>
-            <a:picLocks noChangeAspect="1"/>
-          </p:cNvPicPr>
-          <p:nvPr/>
-        </p:nvPicPr>
-        <p:blipFill>
-          <a:blip r:embed="rId3"/>
-          <a:stretch>
-            <a:fillRect/>
-          </a:stretch>
-        </p:blipFill>
-        <p:spPr>
-          <a:xfrm>
-            <a:off x="868680" y="2660904"/>
-            <a:ext cx="310896" cy="310896"/>
-          </a:xfrm>
-          <a:prstGeom prst="rect">
-            <a:avLst/>
-          </a:prstGeom>
-        </p:spPr>
-      </p:pic>
-      <p:sp>
-        <p:nvSpPr>
-          <p:cNvPr id="9" name="Text 4"/>
-          <p:cNvSpPr/>
-          <p:nvPr/>
-        </p:nvSpPr>
-        <p:spPr>
-          <a:xfrm>
-            <a:off x="1371600" y="2624328"/>
-            <a:ext cx="10058400" cy="502920"/>
-          </a:xfrm>
-          <a:prstGeom prst="rect">
-            <a:avLst/>
-          </a:prstGeom>
-          <a:noFill/>
-          <a:ln/>
-        </p:spPr>
-        <p:txBody>
-          <a:bodyPr wrap="square" lIns="0" tIns="0" rIns="0" bIns="0" rtlCol="0" anchor="ctr"/>
-          <a:lstStyle/>
-          <a:p>
-            <a:pPr indent="0" marL="0">
-              <a:lnSpc>
-                <a:spcPts val="1800"/>
-              </a:lnSpc>
-              <a:buNone/>
-            </a:pPr>
-            <a:r>
-              <a:rPr lang="en-US" sz="1500" b="1" dirty="0">
-                <a:solidFill>
-                  <a:srgbClr val="FFFFFF"/>
-                </a:solidFill>
-                <a:latin typeface="Calibri" pitchFamily="34" charset="0"/>
-                <a:ea typeface="Calibri" pitchFamily="34" charset="-122"/>
-                <a:cs typeface="Calibri" pitchFamily="34" charset="-120"/>
-              </a:rPr>
-              <a:t>Verify against docs, not filenames.  </a:t>
-            </a:r>
-            <a:pPr indent="0" marL="0">
-              <a:lnSpc>
-                <a:spcPts val="1800"/>
-              </a:lnSpc>
-              <a:buNone/>
-            </a:pPr>
-            <a:r>
-              <a:rPr lang="en-US" sz="1500" dirty="0">
-                <a:solidFill>
-                  <a:srgbClr val="C9D6E5"/>
-                </a:solidFill>
-                <a:latin typeface="Calibri" pitchFamily="34" charset="0"/>
-                <a:ea typeface="Calibri" pitchFamily="34" charset="-122"/>
-                <a:cs typeface="Calibri" pitchFamily="34" charset="-120"/>
-              </a:rPr>
-              <a:t>Confirm every element/version/API against developers.arcgis.com.</a:t>
-            </a:r>
-            <a:endParaRPr lang="en-US" sz="1500" dirty="0"/>
-          </a:p>
-        </p:txBody>
-      </p:sp>
-      <p:pic>
-        <p:nvPicPr>
-          <p:cNvPr id="10" name="Image 3" descr="preencoded.png">    </p:cNvPr>
-          <p:cNvPicPr>
-            <a:picLocks noChangeAspect="1"/>
-          </p:cNvPicPr>
-          <p:nvPr/>
-        </p:nvPicPr>
-        <p:blipFill>
-          <a:blip r:embed="rId4"/>
-          <a:stretch>
-            <a:fillRect/>
-          </a:stretch>
-        </p:blipFill>
-        <p:spPr>
-          <a:xfrm>
-            <a:off x="868680" y="3319272"/>
-            <a:ext cx="310896" cy="310896"/>
-          </a:xfrm>
-          <a:prstGeom prst="rect">
-            <a:avLst/>
-          </a:prstGeom>
-        </p:spPr>
-      </p:pic>
-      <p:sp>
-        <p:nvSpPr>
-          <p:cNvPr id="11" name="Text 5"/>
-          <p:cNvSpPr/>
-          <p:nvPr/>
-        </p:nvSpPr>
-        <p:spPr>
-          <a:xfrm>
-            <a:off x="1371600" y="3282696"/>
-            <a:ext cx="10058400" cy="502920"/>
-          </a:xfrm>
-          <a:prstGeom prst="rect">
-            <a:avLst/>
-          </a:prstGeom>
-          <a:noFill/>
-          <a:ln/>
-        </p:spPr>
-        <p:txBody>
-          <a:bodyPr wrap="square" lIns="0" tIns="0" rIns="0" bIns="0" rtlCol="0" anchor="ctr"/>
-          <a:lstStyle/>
-          <a:p>
-            <a:pPr indent="0" marL="0">
-              <a:lnSpc>
-                <a:spcPts val="1800"/>
-              </a:lnSpc>
-              <a:buNone/>
-            </a:pPr>
-            <a:r>
-              <a:rPr lang="en-US" sz="1500" b="1" dirty="0">
-                <a:solidFill>
-                  <a:srgbClr val="FFFFFF"/>
-                </a:solidFill>
-                <a:latin typeface="Calibri" pitchFamily="34" charset="0"/>
-                <a:ea typeface="Calibri" pitchFamily="34" charset="-122"/>
-                <a:cs typeface="Calibri" pitchFamily="34" charset="-120"/>
-              </a:rPr>
-              <a:t>Prefer narrow-schema reference layers.  </a:t>
-            </a:r>
-            <a:pPr indent="0" marL="0">
-              <a:lnSpc>
-                <a:spcPts val="1800"/>
-              </a:lnSpc>
-              <a:buNone/>
-            </a:pPr>
-            <a:r>
-              <a:rPr lang="en-US" sz="1500" dirty="0">
-                <a:solidFill>
-                  <a:srgbClr val="C9D6E5"/>
-                </a:solidFill>
-                <a:latin typeface="Calibri" pitchFamily="34" charset="0"/>
-                <a:ea typeface="Calibri" pitchFamily="34" charset="-122"/>
-                <a:cs typeface="Calibri" pitchFamily="34" charset="-120"/>
-              </a:rPr>
-              <a:t>Wide composite-index layers 504 the embedding pipeline.</a:t>
-            </a:r>
-            <a:endParaRPr lang="en-US" sz="1500" dirty="0"/>
-          </a:p>
-        </p:txBody>
-      </p:sp>
-      <p:pic>
-        <p:nvPicPr>
-          <p:cNvPr id="12" name="Image 4" descr="preencoded.png">    </p:cNvPr>
-          <p:cNvPicPr>
-            <a:picLocks noChangeAspect="1"/>
-          </p:cNvPicPr>
-          <p:nvPr/>
-        </p:nvPicPr>
-        <p:blipFill>
-          <a:blip r:embed="rId5"/>
-          <a:stretch>
-            <a:fillRect/>
-          </a:stretch>
-        </p:blipFill>
-        <p:spPr>
-          <a:xfrm>
-            <a:off x="868680" y="3977640"/>
-            <a:ext cx="310896" cy="310896"/>
-          </a:xfrm>
-          <a:prstGeom prst="rect">
-            <a:avLst/>
-          </a:prstGeom>
-        </p:spPr>
-      </p:pic>
-      <p:sp>
-        <p:nvSpPr>
-          <p:cNvPr id="13" name="Text 6"/>
-          <p:cNvSpPr/>
-          <p:nvPr/>
-        </p:nvSpPr>
-        <p:spPr>
-          <a:xfrm>
-            <a:off x="1371600" y="3941064"/>
-            <a:ext cx="10058400" cy="502920"/>
-          </a:xfrm>
-          <a:prstGeom prst="rect">
-            <a:avLst/>
-          </a:prstGeom>
-          <a:noFill/>
-          <a:ln/>
-        </p:spPr>
-        <p:txBody>
-          <a:bodyPr wrap="square" lIns="0" tIns="0" rIns="0" bIns="0" rtlCol="0" anchor="ctr"/>
-          <a:lstStyle/>
-          <a:p>
-            <a:pPr indent="0" marL="0">
-              <a:lnSpc>
-                <a:spcPts val="1800"/>
-              </a:lnSpc>
-              <a:buNone/>
-            </a:pPr>
-            <a:r>
-              <a:rPr lang="en-US" sz="1500" b="1" dirty="0">
-                <a:solidFill>
-                  <a:srgbClr val="FFFFFF"/>
-                </a:solidFill>
-                <a:latin typeface="Calibri" pitchFamily="34" charset="0"/>
-                <a:ea typeface="Calibri" pitchFamily="34" charset="-122"/>
-                <a:cs typeface="Calibri" pitchFamily="34" charset="-120"/>
-              </a:rPr>
-              <a:t>Write pointed, data-querying prompts.  </a:t>
-            </a:r>
-            <a:pPr indent="0" marL="0">
-              <a:lnSpc>
-                <a:spcPts val="1800"/>
-              </a:lnSpc>
-              <a:buNone/>
-            </a:pPr>
-            <a:r>
-              <a:rPr lang="en-US" sz="1500" dirty="0">
-                <a:solidFill>
-                  <a:srgbClr val="C9D6E5"/>
-                </a:solidFill>
-                <a:latin typeface="Calibri" pitchFamily="34" charset="0"/>
-                <a:ea typeface="Calibri" pitchFamily="34" charset="-122"/>
-                <a:cs typeface="Calibri" pitchFamily="34" charset="-120"/>
-              </a:rPr>
-              <a:t>Never demo schema introspection; force results that reconcile.</a:t>
-            </a:r>
-            <a:endParaRPr lang="en-US" sz="1500" dirty="0"/>
-          </a:p>
-        </p:txBody>
-      </p:sp>
-      <p:pic>
-        <p:nvPicPr>
-          <p:cNvPr id="14" name="Image 5" descr="preencoded.png">    </p:cNvPr>
-          <p:cNvPicPr>
-            <a:picLocks noChangeAspect="1"/>
-          </p:cNvPicPr>
-          <p:nvPr/>
-        </p:nvPicPr>
-        <p:blipFill>
-          <a:blip r:embed="rId6"/>
-          <a:stretch>
-            <a:fillRect/>
-          </a:stretch>
-        </p:blipFill>
-        <p:spPr>
-          <a:xfrm>
-            <a:off x="868680" y="4636008"/>
-            <a:ext cx="310896" cy="310896"/>
-          </a:xfrm>
-          <a:prstGeom prst="rect">
-            <a:avLst/>
-          </a:prstGeom>
-        </p:spPr>
-      </p:pic>
-      <p:sp>
-        <p:nvSpPr>
-          <p:cNvPr id="15" name="Text 7"/>
-          <p:cNvSpPr/>
-          <p:nvPr/>
-        </p:nvSpPr>
-        <p:spPr>
-          <a:xfrm>
-            <a:off x="1371600" y="4599432"/>
-            <a:ext cx="10058400" cy="502920"/>
-          </a:xfrm>
-          <a:prstGeom prst="rect">
-            <a:avLst/>
-          </a:prstGeom>
-          <a:noFill/>
-          <a:ln/>
-        </p:spPr>
-        <p:txBody>
-          <a:bodyPr wrap="square" lIns="0" tIns="0" rIns="0" bIns="0" rtlCol="0" anchor="ctr"/>
-          <a:lstStyle/>
-          <a:p>
-            <a:pPr indent="0" marL="0">
-              <a:lnSpc>
-                <a:spcPts val="1800"/>
-              </a:lnSpc>
-              <a:buNone/>
-            </a:pPr>
-            <a:r>
-              <a:rPr lang="en-US" sz="1500" b="1" dirty="0">
-                <a:solidFill>
-                  <a:srgbClr val="FFFFFF"/>
-                </a:solidFill>
-                <a:latin typeface="Calibri" pitchFamily="34" charset="0"/>
-                <a:ea typeface="Calibri" pitchFamily="34" charset="-122"/>
-                <a:cs typeface="Calibri" pitchFamily="34" charset="-120"/>
-              </a:rPr>
-              <a:t>Treat reasoning gaps as Phase 2.  </a:t>
-            </a:r>
-            <a:pPr indent="0" marL="0">
-              <a:lnSpc>
-                <a:spcPts val="1800"/>
-              </a:lnSpc>
-              <a:buNone/>
-            </a:pPr>
-            <a:r>
-              <a:rPr lang="en-US" sz="1500" dirty="0">
-                <a:solidFill>
-                  <a:srgbClr val="C9D6E5"/>
-                </a:solidFill>
-                <a:latin typeface="Calibri" pitchFamily="34" charset="0"/>
-                <a:ea typeface="Calibri" pitchFamily="34" charset="-122"/>
-                <a:cs typeface="Calibri" pitchFamily="34" charset="-120"/>
-              </a:rPr>
-              <a:t>Comparison &amp; query-direction are agent-shaped, not layer-shaped.</a:t>
-            </a:r>
-            <a:endParaRPr lang="en-US" sz="1500" dirty="0"/>
-          </a:p>
-        </p:txBody>
-      </p:sp>
-      <p:sp>
-        <p:nvSpPr>
-          <p:cNvPr id="16" name="Shape 8"/>
-          <p:cNvSpPr/>
-          <p:nvPr/>
-        </p:nvSpPr>
-        <p:spPr>
-          <a:xfrm>
-            <a:off x="822960" y="5440680"/>
-            <a:ext cx="10515600" cy="914400"/>
+              <a:buNone/>
+            </a:pPr>
+            <a:r>
+              <a:rPr lang="en-US" sz="1250" dirty="0">
+                <a:solidFill>
+                  <a:srgbClr val="5B6B7F"/>
+                </a:solidFill>
+                <a:latin typeface="Calibri" pitchFamily="34" charset="0"/>
+                <a:ea typeface="Calibri" pitchFamily="34" charset="-122"/>
+                <a:cs typeface="Calibri" pitchFamily="34" charset="-120"/>
+              </a:rPr>
+              <a:t>Centerpiece — a multi-attribute insight with a clear takeaway.</a:t>
+            </a:r>
+            <a:endParaRPr lang="en-US" sz="1250" dirty="0"/>
+          </a:p>
+        </p:txBody>
+      </p:sp>
+      <p:sp>
+        <p:nvSpPr>
+          <p:cNvPr id="19" name="Shape 17"/>
+          <p:cNvSpPr/>
+          <p:nvPr/>
+        </p:nvSpPr>
+        <p:spPr>
+          <a:xfrm>
+            <a:off x="502920" y="5020056"/>
+            <a:ext cx="11201400" cy="932688"/>
           </a:xfrm>
           <a:prstGeom prst="roundRect">
             <a:avLst>
-              <a:gd name="adj" fmla="val 8000"/>
+              <a:gd name="adj" fmla="val 7843"/>
             </a:avLst>
           </a:prstGeom>
           <a:solidFill>
-            <a:srgbClr val="13315C"/>
+            <a:srgbClr val="F4F7FA"/>
           </a:solidFill>
           <a:ln/>
-        </p:spPr>
-      </p:sp>
-      <p:sp>
-        <p:nvSpPr>
-          <p:cNvPr id="17" name="Text 9"/>
-          <p:cNvSpPr/>
-          <p:nvPr/>
-        </p:nvSpPr>
-        <p:spPr>
-          <a:xfrm>
-            <a:off x="1097280" y="5669280"/>
-            <a:ext cx="10058400" cy="457200"/>
+          <a:effectLst>
+            <a:outerShdw sx="100000" sy="100000" kx="0" ky="0" algn="bl" rotWithShape="0" blurRad="88900" dist="38100" dir="5400000">
+              <a:srgbClr val="000000">
+                <a:alpha val="12000"/>
+              </a:srgbClr>
+            </a:outerShdw>
+          </a:effectLst>
+        </p:spPr>
+      </p:sp>
+      <p:sp>
+        <p:nvSpPr>
+          <p:cNvPr id="20" name="Shape 18"/>
+          <p:cNvSpPr/>
+          <p:nvPr/>
+        </p:nvSpPr>
+        <p:spPr>
+          <a:xfrm>
+            <a:off x="731520" y="5221224"/>
+            <a:ext cx="566928" cy="566928"/>
+          </a:xfrm>
+          <a:prstGeom prst="ellipse">
+            <a:avLst/>
+          </a:prstGeom>
+          <a:solidFill>
+            <a:srgbClr val="0B2545"/>
+          </a:solidFill>
+          <a:ln/>
+        </p:spPr>
+      </p:sp>
+      <p:sp>
+        <p:nvSpPr>
+          <p:cNvPr id="21" name="Text 19"/>
+          <p:cNvSpPr/>
+          <p:nvPr/>
+        </p:nvSpPr>
+        <p:spPr>
+          <a:xfrm>
+            <a:off x="731520" y="5221224"/>
+            <a:ext cx="566928" cy="566928"/>
+          </a:xfrm>
+          <a:prstGeom prst="rect">
+            <a:avLst/>
+          </a:prstGeom>
+          <a:noFill/>
+          <a:ln/>
+        </p:spPr>
+        <p:txBody>
+          <a:bodyPr wrap="square" lIns="0" tIns="0" rIns="0" bIns="0" rtlCol="0" anchor="ctr"/>
+          <a:lstStyle/>
+          <a:p>
+            <a:pPr algn="ctr" indent="0" marL="0">
+              <a:buNone/>
+            </a:pPr>
+            <a:r>
+              <a:rPr lang="en-US" sz="1800" b="1" dirty="0">
+                <a:solidFill>
+                  <a:srgbClr val="FFFFFF"/>
+                </a:solidFill>
+                <a:latin typeface="Calibri" pitchFamily="34" charset="0"/>
+                <a:ea typeface="Calibri" pitchFamily="34" charset="-122"/>
+                <a:cs typeface="Calibri" pitchFamily="34" charset="-120"/>
+              </a:rPr>
+              <a:t>4</a:t>
+            </a:r>
+            <a:endParaRPr lang="en-US" sz="1800" dirty="0"/>
+          </a:p>
+        </p:txBody>
+      </p:sp>
+      <p:sp>
+        <p:nvSpPr>
+          <p:cNvPr id="22" name="Text 20"/>
+          <p:cNvSpPr/>
+          <p:nvPr/>
+        </p:nvSpPr>
+        <p:spPr>
+          <a:xfrm>
+            <a:off x="1508760" y="5129784"/>
+            <a:ext cx="10058400" cy="438912"/>
           </a:xfrm>
           <a:prstGeom prst="rect">
             <a:avLst/>
@@ -8703,129 +9473,134 @@
               <a:buNone/>
             </a:pPr>
             <a:r>
-              <a:rPr lang="en-US" sz="1350" b="1" dirty="0">
-                <a:solidFill>
-                  <a:srgbClr val="E8A33D"/>
-                </a:solidFill>
-                <a:latin typeface="Calibri" pitchFamily="34" charset="0"/>
-                <a:ea typeface="Calibri" pitchFamily="34" charset="-122"/>
-                <a:cs typeface="Calibri" pitchFamily="34" charset="-120"/>
-              </a:rPr>
-              <a:t>Read next:  </a:t>
-            </a:r>
+              <a:rPr lang="en-US" sz="1550" b="1" dirty="0">
+                <a:solidFill>
+                  <a:srgbClr val="0B2545"/>
+                </a:solidFill>
+                <a:latin typeface="Calibri" pitchFamily="34" charset="0"/>
+                <a:ea typeface="Calibri" pitchFamily="34" charset="-122"/>
+                <a:cs typeface="Calibri" pitchFamily="34" charset="-120"/>
+              </a:rPr>
+              <a:t>"Which &lt;records&gt; in &lt;region&gt; intersect &lt;layer&gt;?"</a:t>
+            </a:r>
+            <a:endParaRPr lang="en-US" sz="1550" dirty="0"/>
+          </a:p>
+        </p:txBody>
+      </p:sp>
+      <p:sp>
+        <p:nvSpPr>
+          <p:cNvPr id="23" name="Text 21"/>
+          <p:cNvSpPr/>
+          <p:nvPr/>
+        </p:nvSpPr>
+        <p:spPr>
+          <a:xfrm>
+            <a:off x="1508760" y="5522976"/>
+            <a:ext cx="10058400" cy="384048"/>
+          </a:xfrm>
+          <a:prstGeom prst="rect">
+            <a:avLst/>
+          </a:prstGeom>
+          <a:noFill/>
+          <a:ln/>
+        </p:spPr>
+        <p:txBody>
+          <a:bodyPr wrap="square" lIns="0" tIns="0" rIns="0" bIns="0" rtlCol="0" anchor="ctr"/>
+          <a:lstStyle/>
+          <a:p>
             <a:pPr indent="0" marL="0">
               <a:buNone/>
             </a:pPr>
             <a:r>
-              <a:rPr lang="en-US" sz="1350" b="1" dirty="0">
-                <a:solidFill>
-                  <a:srgbClr val="FFFFFF"/>
-                </a:solidFill>
-                <a:latin typeface="Calibri" pitchFamily="34" charset="0"/>
-                <a:ea typeface="Calibri" pitchFamily="34" charset="-122"/>
-                <a:cs typeface="Calibri" pitchFamily="34" charset="-120"/>
-              </a:rPr>
-              <a:t>WALKTHROUGH.md</a:t>
-            </a:r>
-            <a:pPr indent="0" marL="0">
-              <a:buNone/>
-            </a:pPr>
-            <a:r>
-              <a:rPr lang="en-US" sz="1350" dirty="0">
-                <a:solidFill>
-                  <a:srgbClr val="C9D6E5"/>
-                </a:solidFill>
-                <a:latin typeface="Calibri" pitchFamily="34" charset="0"/>
-                <a:ea typeface="Calibri" pitchFamily="34" charset="-122"/>
-                <a:cs typeface="Calibri" pitchFamily="34" charset="-120"/>
-              </a:rPr>
-              <a:t> (build)  ·  </a:t>
-            </a:r>
-            <a:pPr indent="0" marL="0">
-              <a:buNone/>
-            </a:pPr>
-            <a:r>
-              <a:rPr lang="en-US" sz="1350" b="1" dirty="0">
-                <a:solidFill>
-                  <a:srgbClr val="FFFFFF"/>
-                </a:solidFill>
-                <a:latin typeface="Calibri" pitchFamily="34" charset="0"/>
-                <a:ea typeface="Calibri" pitchFamily="34" charset="-122"/>
-                <a:cs typeface="Calibri" pitchFamily="34" charset="-120"/>
-              </a:rPr>
-              <a:t>LESSONS-LEARNED.md</a:t>
-            </a:r>
-            <a:pPr indent="0" marL="0">
-              <a:buNone/>
-            </a:pPr>
-            <a:r>
-              <a:rPr lang="en-US" sz="1350" dirty="0">
-                <a:solidFill>
-                  <a:srgbClr val="C9D6E5"/>
-                </a:solidFill>
-                <a:latin typeface="Calibri" pitchFamily="34" charset="0"/>
-                <a:ea typeface="Calibri" pitchFamily="34" charset="-122"/>
-                <a:cs typeface="Calibri" pitchFamily="34" charset="-120"/>
-              </a:rPr>
-              <a:t> (why)  ·  </a:t>
-            </a:r>
-            <a:pPr indent="0" marL="0">
-              <a:buNone/>
-            </a:pPr>
-            <a:r>
-              <a:rPr lang="en-US" sz="1350" b="1" dirty="0">
-                <a:solidFill>
-                  <a:srgbClr val="FFFFFF"/>
-                </a:solidFill>
-                <a:latin typeface="Calibri" pitchFamily="34" charset="0"/>
-                <a:ea typeface="Calibri" pitchFamily="34" charset="-122"/>
-                <a:cs typeface="Calibri" pitchFamily="34" charset="-120"/>
-              </a:rPr>
-              <a:t>DEMO.md</a:t>
-            </a:r>
-            <a:pPr indent="0" marL="0">
-              <a:buNone/>
-            </a:pPr>
-            <a:r>
-              <a:rPr lang="en-US" sz="1350" dirty="0">
-                <a:solidFill>
-                  <a:srgbClr val="C9D6E5"/>
-                </a:solidFill>
-                <a:latin typeface="Calibri" pitchFamily="34" charset="0"/>
-                <a:ea typeface="Calibri" pitchFamily="34" charset="-122"/>
-                <a:cs typeface="Calibri" pitchFamily="34" charset="-120"/>
-              </a:rPr>
-              <a:t> (present)  ·  </a:t>
-            </a:r>
-            <a:pPr indent="0" marL="0">
-              <a:buNone/>
-            </a:pPr>
-            <a:r>
-              <a:rPr lang="en-US" sz="1350" b="1" dirty="0">
-                <a:solidFill>
-                  <a:srgbClr val="FFFFFF"/>
-                </a:solidFill>
-                <a:latin typeface="Calibri" pitchFamily="34" charset="0"/>
-                <a:ea typeface="Calibri" pitchFamily="34" charset="-122"/>
-                <a:cs typeface="Calibri" pitchFamily="34" charset="-120"/>
-              </a:rPr>
-              <a:t>CLAUDE.md</a:t>
-            </a:r>
-            <a:pPr indent="0" marL="0">
-              <a:buNone/>
-            </a:pPr>
-            <a:r>
-              <a:rPr lang="en-US" sz="1350" dirty="0">
-                <a:solidFill>
-                  <a:srgbClr val="C9D6E5"/>
-                </a:solidFill>
-                <a:latin typeface="Calibri" pitchFamily="34" charset="0"/>
-                <a:ea typeface="Calibri" pitchFamily="34" charset="-122"/>
-                <a:cs typeface="Calibri" pitchFamily="34" charset="-120"/>
-              </a:rPr>
-              <a:t> (full context)</a:t>
-            </a:r>
-            <a:endParaRPr lang="en-US" sz="1350" dirty="0"/>
+              <a:rPr lang="en-US" sz="1250" dirty="0">
+                <a:solidFill>
+                  <a:srgbClr val="5B6B7F"/>
+                </a:solidFill>
+                <a:latin typeface="Calibri" pitchFamily="34" charset="0"/>
+                <a:ea typeface="Calibri" pitchFamily="34" charset="-122"/>
+                <a:cs typeface="Calibri" pitchFamily="34" charset="-120"/>
+              </a:rPr>
+              <a:t>Cross-layer reveal — must stay region-scoped (else 413).</a:t>
+            </a:r>
+            <a:endParaRPr lang="en-US" sz="1250" dirty="0"/>
+          </a:p>
+        </p:txBody>
+      </p:sp>
+      <p:sp>
+        <p:nvSpPr>
+          <p:cNvPr id="24" name="Text 22"/>
+          <p:cNvSpPr/>
+          <p:nvPr/>
+        </p:nvSpPr>
+        <p:spPr>
+          <a:xfrm>
+            <a:off x="502920" y="6473952"/>
+            <a:ext cx="7315200" cy="274320"/>
+          </a:xfrm>
+          <a:prstGeom prst="rect">
+            <a:avLst/>
+          </a:prstGeom>
+          <a:noFill/>
+          <a:ln/>
+        </p:spPr>
+        <p:txBody>
+          <a:bodyPr wrap="square" lIns="0" tIns="0" rIns="0" bIns="0" rtlCol="0" anchor="ctr"/>
+          <a:lstStyle/>
+          <a:p>
+            <a:pPr algn="l" indent="0" marL="0">
+              <a:buNone/>
+            </a:pPr>
+            <a:r>
+              <a:rPr lang="en-US" sz="900" dirty="0">
+                <a:solidFill>
+                  <a:srgbClr val="5B6B7F"/>
+                </a:solidFill>
+                <a:latin typeface="Calibri" pitchFamily="34" charset="0"/>
+                <a:ea typeface="Calibri" pitchFamily="34" charset="-122"/>
+                <a:cs typeface="Calibri" pitchFamily="34" charset="-120"/>
+              </a:rPr>
+              <a:t>ArcGIS Maps SDK 5.0 · AI Components Demo</a:t>
+            </a:r>
+            <a:endParaRPr lang="en-US" sz="900" dirty="0"/>
+          </a:p>
+        </p:txBody>
+      </p:sp>
+      <p:sp>
+        <p:nvSpPr>
+          <p:cNvPr id="25" name="Text 23"/>
+          <p:cNvSpPr/>
+          <p:nvPr/>
+        </p:nvSpPr>
+        <p:spPr>
+          <a:xfrm>
+            <a:off x="11277295" y="6473952"/>
+            <a:ext cx="457200" cy="274320"/>
+          </a:xfrm>
+          <a:prstGeom prst="rect">
+            <a:avLst/>
+          </a:prstGeom>
+          <a:noFill/>
+          <a:ln/>
+        </p:spPr>
+        <p:txBody>
+          <a:bodyPr wrap="square" lIns="0" tIns="0" rIns="0" bIns="0" rtlCol="0" anchor="ctr"/>
+          <a:lstStyle/>
+          <a:p>
+            <a:pPr algn="r" indent="0" marL="0">
+              <a:buNone/>
+            </a:pPr>
+            <a:r>
+              <a:rPr lang="en-US" sz="900" dirty="0">
+                <a:solidFill>
+                  <a:srgbClr val="5B6B7F"/>
+                </a:solidFill>
+                <a:latin typeface="Calibri" pitchFamily="34" charset="0"/>
+                <a:ea typeface="Calibri" pitchFamily="34" charset="-122"/>
+                <a:cs typeface="Calibri" pitchFamily="34" charset="-120"/>
+              </a:rPr>
+              <a:t>9</a:t>
+            </a:r>
+            <a:endParaRPr lang="en-US" sz="900" dirty="0"/>
           </a:p>
         </p:txBody>
       </p:sp>

--- a/docs/slides/ArcGIS-AI-Components-Walkthrough.pptx
+++ b/docs/slides/ArcGIS-AI-Components-Walkthrough.pptx
@@ -15,9 +15,10 @@
     <p:sldId id="263" r:id="rId9"/>
     <p:sldId id="264" r:id="rId10"/>
     <p:sldId id="265" r:id="rId11"/>
+    <p:sldId id="266" r:id="rId12"/>
   </p:sldIdLst>
   <p:notesMasterIdLst>
-    <p:notesMasterId r:id="rId12"/>
+    <p:notesMasterId r:id="rId13"/>
   </p:notesMasterIdLst>
   <p:sldSz cx="12191695" cy="6858000"/>
   <p:notesSz cx="6858000" cy="12191695"/>
@@ -623,6 +624,94 @@
             <a:fld id="{F7021451-1387-4CA6-816F-3879F97B5CBC}" type="slidenum">
               <a:rPr lang="en-US"/>
               <a:t>10</a:t>
+            </a:fld>
+            <a:endParaRPr lang="en-US"/>
+          </a:p>
+        </p:txBody>
+      </p:sp>
+    </p:spTree>
+    <p:extLst>
+      <p:ext uri="{BB962C8B-B14F-4D97-AF65-F5344CB8AC3E}">
+        <p14:creationId xmlns:p14="http://schemas.microsoft.com/office/powerpoint/2010/main" val="1024086991"/>
+      </p:ext>
+    </p:extLst>
+  </p:cSld>
+  <p:clrMapOvr>
+    <a:masterClrMapping/>
+  </p:clrMapOvr>
+</p:notes>
+</file>
+
+<file path=ppt/notesSlides/notesSlide11.xml><?xml version="1.0" encoding="utf-8"?>
+<p:notes xmlns:a="http://schemas.openxmlformats.org/drawingml/2006/main" xmlns:r="http://schemas.openxmlformats.org/officeDocument/2006/relationships" xmlns:p="http://schemas.openxmlformats.org/presentationml/2006/main">
+  <p:cSld>
+    <p:spTree>
+      <p:nvGrpSpPr>
+        <p:cNvPr id="1" name=""/>
+        <p:cNvGrpSpPr/>
+        <p:nvPr/>
+      </p:nvGrpSpPr>
+      <p:grpSpPr>
+        <a:xfrm>
+          <a:off x="0" y="0"/>
+          <a:ext cx="0" cy="0"/>
+          <a:chOff x="0" y="0"/>
+          <a:chExt cx="0" cy="0"/>
+        </a:xfrm>
+      </p:grpSpPr>
+      <p:sp>
+        <p:nvSpPr>
+          <p:cNvPr id="2" name="Slide Image Placeholder 1"/>
+          <p:cNvSpPr>
+            <a:spLocks noGrp="1" noRot="1" noChangeAspect="1"/>
+          </p:cNvSpPr>
+          <p:nvPr>
+            <p:ph type="sldImg"/>
+          </p:nvPr>
+        </p:nvSpPr>
+        <p:spPr/>
+      </p:sp>
+      <p:sp>
+        <p:nvSpPr>
+          <p:cNvPr id="3" name="Notes Placeholder 2"/>
+          <p:cNvSpPr>
+            <a:spLocks noGrp="1"/>
+          </p:cNvSpPr>
+          <p:nvPr>
+            <p:ph type="body" idx="1"/>
+          </p:nvPr>
+        </p:nvSpPr>
+        <p:spPr/>
+        <p:txBody>
+          <a:bodyPr/>
+          <a:lstStyle/>
+          <a:p>
+            <a:r>
+              <a:rPr lang="en-US" dirty="0"/>
+              <a:t/>
+            </a:r>
+            <a:endParaRPr lang="en-US" dirty="0"/>
+          </a:p>
+        </p:txBody>
+      </p:sp>
+      <p:sp>
+        <p:nvSpPr>
+          <p:cNvPr id="4" name="Slide Number Placeholder 3"/>
+          <p:cNvSpPr>
+            <a:spLocks noGrp="1"/>
+          </p:cNvSpPr>
+          <p:nvPr>
+            <p:ph type="sldNum" sz="quarter" idx="10"/>
+          </p:nvPr>
+        </p:nvSpPr>
+        <p:spPr/>
+        <p:txBody>
+          <a:bodyPr/>
+          <a:lstStyle/>
+          <a:p>
+            <a:fld id="{F7021451-1387-4CA6-816F-3879F97B5CBC}" type="slidenum">
+              <a:rPr lang="en-US"/>
+              <a:t>11</a:t>
             </a:fld>
             <a:endParaRPr lang="en-US"/>
           </a:p>
@@ -1952,6 +2041,858 @@
     <p:bg>
       <p:bgPr>
         <a:solidFill>
+          <a:srgbClr val="FFFFFF"/>
+        </a:solidFill>
+      </p:bgPr>
+    </p:bg>
+    <p:spTree>
+      <p:nvGrpSpPr>
+        <p:cNvPr id="1" name=""/>
+        <p:cNvGrpSpPr/>
+        <p:nvPr/>
+      </p:nvGrpSpPr>
+      <p:grpSpPr>
+        <a:xfrm>
+          <a:off x="0" y="0"/>
+          <a:ext cx="0" cy="0"/>
+          <a:chOff x="0" y="0"/>
+          <a:chExt cx="0" cy="0"/>
+        </a:xfrm>
+      </p:grpSpPr>
+      <p:sp>
+        <p:nvSpPr>
+          <p:cNvPr id="2" name="Text 0"/>
+          <p:cNvSpPr/>
+          <p:nvPr/>
+        </p:nvSpPr>
+        <p:spPr>
+          <a:xfrm>
+            <a:off x="502920" y="411480"/>
+            <a:ext cx="11155680" cy="640080"/>
+          </a:xfrm>
+          <a:prstGeom prst="rect">
+            <a:avLst/>
+          </a:prstGeom>
+          <a:noFill/>
+          <a:ln/>
+        </p:spPr>
+        <p:txBody>
+          <a:bodyPr wrap="square" lIns="0" tIns="0" rIns="0" bIns="0" rtlCol="0" anchor="ctr"/>
+          <a:lstStyle/>
+          <a:p>
+            <a:pPr indent="0" marL="0">
+              <a:buNone/>
+            </a:pPr>
+            <a:r>
+              <a:rPr lang="en-US" sz="3000" b="1" dirty="0">
+                <a:solidFill>
+                  <a:srgbClr val="0B2545"/>
+                </a:solidFill>
+                <a:latin typeface="Bookman Old Style" pitchFamily="34" charset="0"/>
+                <a:ea typeface="Bookman Old Style" pitchFamily="34" charset="-122"/>
+                <a:cs typeface="Bookman Old Style" pitchFamily="34" charset="-120"/>
+              </a:rPr>
+              <a:t>The demo run sheet — prompt shapes that work</a:t>
+            </a:r>
+            <a:endParaRPr lang="en-US" sz="3000" dirty="0"/>
+          </a:p>
+        </p:txBody>
+      </p:sp>
+      <p:sp>
+        <p:nvSpPr>
+          <p:cNvPr id="3" name="Text 1"/>
+          <p:cNvSpPr/>
+          <p:nvPr/>
+        </p:nvSpPr>
+        <p:spPr>
+          <a:xfrm>
+            <a:off x="502920" y="1078992"/>
+            <a:ext cx="10972800" cy="457200"/>
+          </a:xfrm>
+          <a:prstGeom prst="rect">
+            <a:avLst/>
+          </a:prstGeom>
+          <a:noFill/>
+          <a:ln/>
+        </p:spPr>
+        <p:txBody>
+          <a:bodyPr wrap="square" lIns="0" tIns="0" rIns="0" bIns="0" rtlCol="0" anchor="ctr"/>
+          <a:lstStyle/>
+          <a:p>
+            <a:pPr indent="0" marL="0">
+              <a:buNone/>
+            </a:pPr>
+            <a:r>
+              <a:rPr lang="en-US" sz="1400" dirty="0">
+                <a:solidFill>
+                  <a:srgbClr val="5B6B7F"/>
+                </a:solidFill>
+                <a:latin typeface="Calibri" pitchFamily="34" charset="0"/>
+                <a:ea typeface="Calibri" pitchFamily="34" charset="-122"/>
+                <a:cs typeface="Calibri" pitchFamily="34" charset="-120"/>
+              </a:rPr>
+              <a:t>Fill these with prompts you've verified against your data. Build from simple to the strongest hook.</a:t>
+            </a:r>
+            <a:endParaRPr lang="en-US" sz="1400" dirty="0"/>
+          </a:p>
+        </p:txBody>
+      </p:sp>
+      <p:sp>
+        <p:nvSpPr>
+          <p:cNvPr id="4" name="Shape 2"/>
+          <p:cNvSpPr/>
+          <p:nvPr/>
+        </p:nvSpPr>
+        <p:spPr>
+          <a:xfrm>
+            <a:off x="502920" y="1783080"/>
+            <a:ext cx="11201400" cy="932688"/>
+          </a:xfrm>
+          <a:prstGeom prst="roundRect">
+            <a:avLst>
+              <a:gd name="adj" fmla="val 7843"/>
+            </a:avLst>
+          </a:prstGeom>
+          <a:solidFill>
+            <a:srgbClr val="F4F7FA"/>
+          </a:solidFill>
+          <a:ln/>
+          <a:effectLst>
+            <a:outerShdw sx="100000" sy="100000" kx="0" ky="0" algn="bl" rotWithShape="0" blurRad="88900" dist="38100" dir="5400000">
+              <a:srgbClr val="000000">
+                <a:alpha val="12000"/>
+              </a:srgbClr>
+            </a:outerShdw>
+          </a:effectLst>
+        </p:spPr>
+      </p:sp>
+      <p:sp>
+        <p:nvSpPr>
+          <p:cNvPr id="5" name="Shape 3"/>
+          <p:cNvSpPr/>
+          <p:nvPr/>
+        </p:nvSpPr>
+        <p:spPr>
+          <a:xfrm>
+            <a:off x="731520" y="1984248"/>
+            <a:ext cx="566928" cy="566928"/>
+          </a:xfrm>
+          <a:prstGeom prst="ellipse">
+            <a:avLst/>
+          </a:prstGeom>
+          <a:solidFill>
+            <a:srgbClr val="1C7293"/>
+          </a:solidFill>
+          <a:ln/>
+        </p:spPr>
+      </p:sp>
+      <p:sp>
+        <p:nvSpPr>
+          <p:cNvPr id="6" name="Text 4"/>
+          <p:cNvSpPr/>
+          <p:nvPr/>
+        </p:nvSpPr>
+        <p:spPr>
+          <a:xfrm>
+            <a:off x="731520" y="1984248"/>
+            <a:ext cx="566928" cy="566928"/>
+          </a:xfrm>
+          <a:prstGeom prst="rect">
+            <a:avLst/>
+          </a:prstGeom>
+          <a:noFill/>
+          <a:ln/>
+        </p:spPr>
+        <p:txBody>
+          <a:bodyPr wrap="square" lIns="0" tIns="0" rIns="0" bIns="0" rtlCol="0" anchor="ctr"/>
+          <a:lstStyle/>
+          <a:p>
+            <a:pPr algn="ctr" indent="0" marL="0">
+              <a:buNone/>
+            </a:pPr>
+            <a:r>
+              <a:rPr lang="en-US" sz="1800" b="1" dirty="0">
+                <a:solidFill>
+                  <a:srgbClr val="FFFFFF"/>
+                </a:solidFill>
+                <a:latin typeface="Calibri" pitchFamily="34" charset="0"/>
+                <a:ea typeface="Calibri" pitchFamily="34" charset="-122"/>
+                <a:cs typeface="Calibri" pitchFamily="34" charset="-120"/>
+              </a:rPr>
+              <a:t>1</a:t>
+            </a:r>
+            <a:endParaRPr lang="en-US" sz="1800" dirty="0"/>
+          </a:p>
+        </p:txBody>
+      </p:sp>
+      <p:sp>
+        <p:nvSpPr>
+          <p:cNvPr id="7" name="Text 5"/>
+          <p:cNvSpPr/>
+          <p:nvPr/>
+        </p:nvSpPr>
+        <p:spPr>
+          <a:xfrm>
+            <a:off x="1508760" y="1892808"/>
+            <a:ext cx="10058400" cy="438912"/>
+          </a:xfrm>
+          <a:prstGeom prst="rect">
+            <a:avLst/>
+          </a:prstGeom>
+          <a:noFill/>
+          <a:ln/>
+        </p:spPr>
+        <p:txBody>
+          <a:bodyPr wrap="square" lIns="0" tIns="0" rIns="0" bIns="0" rtlCol="0" anchor="ctr"/>
+          <a:lstStyle/>
+          <a:p>
+            <a:pPr indent="0" marL="0">
+              <a:buNone/>
+            </a:pPr>
+            <a:r>
+              <a:rPr lang="en-US" sz="1550" b="1" dirty="0">
+                <a:solidFill>
+                  <a:srgbClr val="0B2545"/>
+                </a:solidFill>
+                <a:latin typeface="Calibri" pitchFamily="34" charset="0"/>
+                <a:ea typeface="Calibri" pitchFamily="34" charset="-122"/>
+                <a:cs typeface="Calibri" pitchFamily="34" charset="-120"/>
+              </a:rPr>
+              <a:t>"Show me the &lt;high-priority&gt; &lt;records&gt;."</a:t>
+            </a:r>
+            <a:endParaRPr lang="en-US" sz="1550" dirty="0"/>
+          </a:p>
+        </p:txBody>
+      </p:sp>
+      <p:sp>
+        <p:nvSpPr>
+          <p:cNvPr id="8" name="Text 6"/>
+          <p:cNvSpPr/>
+          <p:nvPr/>
+        </p:nvSpPr>
+        <p:spPr>
+          <a:xfrm>
+            <a:off x="1508760" y="2286000"/>
+            <a:ext cx="10058400" cy="384048"/>
+          </a:xfrm>
+          <a:prstGeom prst="rect">
+            <a:avLst/>
+          </a:prstGeom>
+          <a:noFill/>
+          <a:ln/>
+        </p:spPr>
+        <p:txBody>
+          <a:bodyPr wrap="square" lIns="0" tIns="0" rIns="0" bIns="0" rtlCol="0" anchor="ctr"/>
+          <a:lstStyle/>
+          <a:p>
+            <a:pPr indent="0" marL="0">
+              <a:buNone/>
+            </a:pPr>
+            <a:r>
+              <a:rPr lang="en-US" sz="1250" dirty="0">
+                <a:solidFill>
+                  <a:srgbClr val="5B6B7F"/>
+                </a:solidFill>
+                <a:latin typeface="Calibri" pitchFamily="34" charset="0"/>
+                <a:ea typeface="Calibri" pitchFamily="34" charset="-122"/>
+                <a:cs typeface="Calibri" pitchFamily="34" charset="-120"/>
+              </a:rPr>
+              <a:t>Opener — single-attribute filter. Verify the count is stable.</a:t>
+            </a:r>
+            <a:endParaRPr lang="en-US" sz="1250" dirty="0"/>
+          </a:p>
+        </p:txBody>
+      </p:sp>
+      <p:sp>
+        <p:nvSpPr>
+          <p:cNvPr id="9" name="Shape 7"/>
+          <p:cNvSpPr/>
+          <p:nvPr/>
+        </p:nvSpPr>
+        <p:spPr>
+          <a:xfrm>
+            <a:off x="502920" y="2862072"/>
+            <a:ext cx="11201400" cy="932688"/>
+          </a:xfrm>
+          <a:prstGeom prst="roundRect">
+            <a:avLst>
+              <a:gd name="adj" fmla="val 7843"/>
+            </a:avLst>
+          </a:prstGeom>
+          <a:solidFill>
+            <a:srgbClr val="F4F7FA"/>
+          </a:solidFill>
+          <a:ln/>
+          <a:effectLst>
+            <a:outerShdw sx="100000" sy="100000" kx="0" ky="0" algn="bl" rotWithShape="0" blurRad="88900" dist="38100" dir="5400000">
+              <a:srgbClr val="000000">
+                <a:alpha val="12000"/>
+              </a:srgbClr>
+            </a:outerShdw>
+          </a:effectLst>
+        </p:spPr>
+      </p:sp>
+      <p:sp>
+        <p:nvSpPr>
+          <p:cNvPr id="10" name="Shape 8"/>
+          <p:cNvSpPr/>
+          <p:nvPr/>
+        </p:nvSpPr>
+        <p:spPr>
+          <a:xfrm>
+            <a:off x="731520" y="3063240"/>
+            <a:ext cx="566928" cy="566928"/>
+          </a:xfrm>
+          <a:prstGeom prst="ellipse">
+            <a:avLst/>
+          </a:prstGeom>
+          <a:solidFill>
+            <a:srgbClr val="1C7293"/>
+          </a:solidFill>
+          <a:ln/>
+        </p:spPr>
+      </p:sp>
+      <p:sp>
+        <p:nvSpPr>
+          <p:cNvPr id="11" name="Text 9"/>
+          <p:cNvSpPr/>
+          <p:nvPr/>
+        </p:nvSpPr>
+        <p:spPr>
+          <a:xfrm>
+            <a:off x="731520" y="3063240"/>
+            <a:ext cx="566928" cy="566928"/>
+          </a:xfrm>
+          <a:prstGeom prst="rect">
+            <a:avLst/>
+          </a:prstGeom>
+          <a:noFill/>
+          <a:ln/>
+        </p:spPr>
+        <p:txBody>
+          <a:bodyPr wrap="square" lIns="0" tIns="0" rIns="0" bIns="0" rtlCol="0" anchor="ctr"/>
+          <a:lstStyle/>
+          <a:p>
+            <a:pPr algn="ctr" indent="0" marL="0">
+              <a:buNone/>
+            </a:pPr>
+            <a:r>
+              <a:rPr lang="en-US" sz="1800" b="1" dirty="0">
+                <a:solidFill>
+                  <a:srgbClr val="FFFFFF"/>
+                </a:solidFill>
+                <a:latin typeface="Calibri" pitchFamily="34" charset="0"/>
+                <a:ea typeface="Calibri" pitchFamily="34" charset="-122"/>
+                <a:cs typeface="Calibri" pitchFamily="34" charset="-120"/>
+              </a:rPr>
+              <a:t>2</a:t>
+            </a:r>
+            <a:endParaRPr lang="en-US" sz="1800" dirty="0"/>
+          </a:p>
+        </p:txBody>
+      </p:sp>
+      <p:sp>
+        <p:nvSpPr>
+          <p:cNvPr id="12" name="Text 10"/>
+          <p:cNvSpPr/>
+          <p:nvPr/>
+        </p:nvSpPr>
+        <p:spPr>
+          <a:xfrm>
+            <a:off x="1508760" y="2971800"/>
+            <a:ext cx="10058400" cy="438912"/>
+          </a:xfrm>
+          <a:prstGeom prst="rect">
+            <a:avLst/>
+          </a:prstGeom>
+          <a:noFill/>
+          <a:ln/>
+        </p:spPr>
+        <p:txBody>
+          <a:bodyPr wrap="square" lIns="0" tIns="0" rIns="0" bIns="0" rtlCol="0" anchor="ctr"/>
+          <a:lstStyle/>
+          <a:p>
+            <a:pPr indent="0" marL="0">
+              <a:buNone/>
+            </a:pPr>
+            <a:r>
+              <a:rPr lang="en-US" sz="1550" b="1" dirty="0">
+                <a:solidFill>
+                  <a:srgbClr val="0B2545"/>
+                </a:solidFill>
+                <a:latin typeface="Calibri" pitchFamily="34" charset="0"/>
+                <a:ea typeface="Calibri" pitchFamily="34" charset="-122"/>
+                <a:cs typeface="Calibri" pitchFamily="34" charset="-120"/>
+              </a:rPr>
+              <a:t>"Average &lt;metric&gt; for &lt;one category&gt;?"</a:t>
+            </a:r>
+            <a:endParaRPr lang="en-US" sz="1550" dirty="0"/>
+          </a:p>
+        </p:txBody>
+      </p:sp>
+      <p:sp>
+        <p:nvSpPr>
+          <p:cNvPr id="13" name="Text 11"/>
+          <p:cNvSpPr/>
+          <p:nvPr/>
+        </p:nvSpPr>
+        <p:spPr>
+          <a:xfrm>
+            <a:off x="1508760" y="3364992"/>
+            <a:ext cx="10058400" cy="384048"/>
+          </a:xfrm>
+          <a:prstGeom prst="rect">
+            <a:avLst/>
+          </a:prstGeom>
+          <a:noFill/>
+          <a:ln/>
+        </p:spPr>
+        <p:txBody>
+          <a:bodyPr wrap="square" lIns="0" tIns="0" rIns="0" bIns="0" rtlCol="0" anchor="ctr"/>
+          <a:lstStyle/>
+          <a:p>
+            <a:pPr indent="0" marL="0">
+              <a:buNone/>
+            </a:pPr>
+            <a:r>
+              <a:rPr lang="en-US" sz="1250" dirty="0">
+                <a:solidFill>
+                  <a:srgbClr val="5B6B7F"/>
+                </a:solidFill>
+                <a:latin typeface="Calibri" pitchFamily="34" charset="0"/>
+                <a:ea typeface="Calibri" pitchFamily="34" charset="-122"/>
+                <a:cs typeface="Calibri" pitchFamily="34" charset="-120"/>
+              </a:rPr>
+              <a:t>Single-group stat. (Don't ask it to COMPARE two categories live.)</a:t>
+            </a:r>
+            <a:endParaRPr lang="en-US" sz="1250" dirty="0"/>
+          </a:p>
+        </p:txBody>
+      </p:sp>
+      <p:sp>
+        <p:nvSpPr>
+          <p:cNvPr id="14" name="Shape 12"/>
+          <p:cNvSpPr/>
+          <p:nvPr/>
+        </p:nvSpPr>
+        <p:spPr>
+          <a:xfrm>
+            <a:off x="502920" y="3941064"/>
+            <a:ext cx="11201400" cy="932688"/>
+          </a:xfrm>
+          <a:prstGeom prst="roundRect">
+            <a:avLst>
+              <a:gd name="adj" fmla="val 7843"/>
+            </a:avLst>
+          </a:prstGeom>
+          <a:solidFill>
+            <a:srgbClr val="F4F7FA"/>
+          </a:solidFill>
+          <a:ln/>
+          <a:effectLst>
+            <a:outerShdw sx="100000" sy="100000" kx="0" ky="0" algn="bl" rotWithShape="0" blurRad="88900" dist="38100" dir="5400000">
+              <a:srgbClr val="000000">
+                <a:alpha val="12000"/>
+              </a:srgbClr>
+            </a:outerShdw>
+          </a:effectLst>
+        </p:spPr>
+      </p:sp>
+      <p:sp>
+        <p:nvSpPr>
+          <p:cNvPr id="15" name="Shape 13"/>
+          <p:cNvSpPr/>
+          <p:nvPr/>
+        </p:nvSpPr>
+        <p:spPr>
+          <a:xfrm>
+            <a:off x="731520" y="4142232"/>
+            <a:ext cx="566928" cy="566928"/>
+          </a:xfrm>
+          <a:prstGeom prst="ellipse">
+            <a:avLst/>
+          </a:prstGeom>
+          <a:solidFill>
+            <a:srgbClr val="E8A33D"/>
+          </a:solidFill>
+          <a:ln/>
+        </p:spPr>
+      </p:sp>
+      <p:sp>
+        <p:nvSpPr>
+          <p:cNvPr id="16" name="Text 14"/>
+          <p:cNvSpPr/>
+          <p:nvPr/>
+        </p:nvSpPr>
+        <p:spPr>
+          <a:xfrm>
+            <a:off x="731520" y="4142232"/>
+            <a:ext cx="566928" cy="566928"/>
+          </a:xfrm>
+          <a:prstGeom prst="rect">
+            <a:avLst/>
+          </a:prstGeom>
+          <a:noFill/>
+          <a:ln/>
+        </p:spPr>
+        <p:txBody>
+          <a:bodyPr wrap="square" lIns="0" tIns="0" rIns="0" bIns="0" rtlCol="0" anchor="ctr"/>
+          <a:lstStyle/>
+          <a:p>
+            <a:pPr algn="ctr" indent="0" marL="0">
+              <a:buNone/>
+            </a:pPr>
+            <a:r>
+              <a:rPr lang="en-US" sz="1800" b="1" dirty="0">
+                <a:solidFill>
+                  <a:srgbClr val="FFFFFF"/>
+                </a:solidFill>
+                <a:latin typeface="Calibri" pitchFamily="34" charset="0"/>
+                <a:ea typeface="Calibri" pitchFamily="34" charset="-122"/>
+                <a:cs typeface="Calibri" pitchFamily="34" charset="-120"/>
+              </a:rPr>
+              <a:t>3</a:t>
+            </a:r>
+            <a:endParaRPr lang="en-US" sz="1800" dirty="0"/>
+          </a:p>
+        </p:txBody>
+      </p:sp>
+      <p:sp>
+        <p:nvSpPr>
+          <p:cNvPr id="17" name="Text 15"/>
+          <p:cNvSpPr/>
+          <p:nvPr/>
+        </p:nvSpPr>
+        <p:spPr>
+          <a:xfrm>
+            <a:off x="1508760" y="4050792"/>
+            <a:ext cx="10058400" cy="438912"/>
+          </a:xfrm>
+          <a:prstGeom prst="rect">
+            <a:avLst/>
+          </a:prstGeom>
+          <a:noFill/>
+          <a:ln/>
+        </p:spPr>
+        <p:txBody>
+          <a:bodyPr wrap="square" lIns="0" tIns="0" rIns="0" bIns="0" rtlCol="0" anchor="ctr"/>
+          <a:lstStyle/>
+          <a:p>
+            <a:pPr indent="0" marL="0">
+              <a:buNone/>
+            </a:pPr>
+            <a:r>
+              <a:rPr lang="en-US" sz="1550" b="1" dirty="0">
+                <a:solidFill>
+                  <a:srgbClr val="0B2545"/>
+                </a:solidFill>
+                <a:latin typeface="Calibri" pitchFamily="34" charset="0"/>
+                <a:ea typeface="Calibri" pitchFamily="34" charset="-122"/>
+                <a:cs typeface="Calibri" pitchFamily="34" charset="-120"/>
+              </a:rPr>
+              <a:t>"Which &lt;high-priority&gt; &lt;records&gt; also &lt;2nd condition&gt;?"</a:t>
+            </a:r>
+            <a:endParaRPr lang="en-US" sz="1550" dirty="0"/>
+          </a:p>
+        </p:txBody>
+      </p:sp>
+      <p:sp>
+        <p:nvSpPr>
+          <p:cNvPr id="18" name="Text 16"/>
+          <p:cNvSpPr/>
+          <p:nvPr/>
+        </p:nvSpPr>
+        <p:spPr>
+          <a:xfrm>
+            <a:off x="1508760" y="4443984"/>
+            <a:ext cx="10058400" cy="384048"/>
+          </a:xfrm>
+          <a:prstGeom prst="rect">
+            <a:avLst/>
+          </a:prstGeom>
+          <a:noFill/>
+          <a:ln/>
+        </p:spPr>
+        <p:txBody>
+          <a:bodyPr wrap="square" lIns="0" tIns="0" rIns="0" bIns="0" rtlCol="0" anchor="ctr"/>
+          <a:lstStyle/>
+          <a:p>
+            <a:pPr indent="0" marL="0">
+              <a:buNone/>
+            </a:pPr>
+            <a:r>
+              <a:rPr lang="en-US" sz="1250" dirty="0">
+                <a:solidFill>
+                  <a:srgbClr val="5B6B7F"/>
+                </a:solidFill>
+                <a:latin typeface="Calibri" pitchFamily="34" charset="0"/>
+                <a:ea typeface="Calibri" pitchFamily="34" charset="-122"/>
+                <a:cs typeface="Calibri" pitchFamily="34" charset="-120"/>
+              </a:rPr>
+              <a:t>Centerpiece — a multi-attribute insight with a clear takeaway.</a:t>
+            </a:r>
+            <a:endParaRPr lang="en-US" sz="1250" dirty="0"/>
+          </a:p>
+        </p:txBody>
+      </p:sp>
+      <p:sp>
+        <p:nvSpPr>
+          <p:cNvPr id="19" name="Shape 17"/>
+          <p:cNvSpPr/>
+          <p:nvPr/>
+        </p:nvSpPr>
+        <p:spPr>
+          <a:xfrm>
+            <a:off x="502920" y="5020056"/>
+            <a:ext cx="11201400" cy="932688"/>
+          </a:xfrm>
+          <a:prstGeom prst="roundRect">
+            <a:avLst>
+              <a:gd name="adj" fmla="val 7843"/>
+            </a:avLst>
+          </a:prstGeom>
+          <a:solidFill>
+            <a:srgbClr val="F4F7FA"/>
+          </a:solidFill>
+          <a:ln/>
+          <a:effectLst>
+            <a:outerShdw sx="100000" sy="100000" kx="0" ky="0" algn="bl" rotWithShape="0" blurRad="88900" dist="38100" dir="5400000">
+              <a:srgbClr val="000000">
+                <a:alpha val="12000"/>
+              </a:srgbClr>
+            </a:outerShdw>
+          </a:effectLst>
+        </p:spPr>
+      </p:sp>
+      <p:sp>
+        <p:nvSpPr>
+          <p:cNvPr id="20" name="Shape 18"/>
+          <p:cNvSpPr/>
+          <p:nvPr/>
+        </p:nvSpPr>
+        <p:spPr>
+          <a:xfrm>
+            <a:off x="731520" y="5221224"/>
+            <a:ext cx="566928" cy="566928"/>
+          </a:xfrm>
+          <a:prstGeom prst="ellipse">
+            <a:avLst/>
+          </a:prstGeom>
+          <a:solidFill>
+            <a:srgbClr val="0B2545"/>
+          </a:solidFill>
+          <a:ln/>
+        </p:spPr>
+      </p:sp>
+      <p:sp>
+        <p:nvSpPr>
+          <p:cNvPr id="21" name="Text 19"/>
+          <p:cNvSpPr/>
+          <p:nvPr/>
+        </p:nvSpPr>
+        <p:spPr>
+          <a:xfrm>
+            <a:off x="731520" y="5221224"/>
+            <a:ext cx="566928" cy="566928"/>
+          </a:xfrm>
+          <a:prstGeom prst="rect">
+            <a:avLst/>
+          </a:prstGeom>
+          <a:noFill/>
+          <a:ln/>
+        </p:spPr>
+        <p:txBody>
+          <a:bodyPr wrap="square" lIns="0" tIns="0" rIns="0" bIns="0" rtlCol="0" anchor="ctr"/>
+          <a:lstStyle/>
+          <a:p>
+            <a:pPr algn="ctr" indent="0" marL="0">
+              <a:buNone/>
+            </a:pPr>
+            <a:r>
+              <a:rPr lang="en-US" sz="1800" b="1" dirty="0">
+                <a:solidFill>
+                  <a:srgbClr val="FFFFFF"/>
+                </a:solidFill>
+                <a:latin typeface="Calibri" pitchFamily="34" charset="0"/>
+                <a:ea typeface="Calibri" pitchFamily="34" charset="-122"/>
+                <a:cs typeface="Calibri" pitchFamily="34" charset="-120"/>
+              </a:rPr>
+              <a:t>4</a:t>
+            </a:r>
+            <a:endParaRPr lang="en-US" sz="1800" dirty="0"/>
+          </a:p>
+        </p:txBody>
+      </p:sp>
+      <p:sp>
+        <p:nvSpPr>
+          <p:cNvPr id="22" name="Text 20"/>
+          <p:cNvSpPr/>
+          <p:nvPr/>
+        </p:nvSpPr>
+        <p:spPr>
+          <a:xfrm>
+            <a:off x="1508760" y="5129784"/>
+            <a:ext cx="10058400" cy="438912"/>
+          </a:xfrm>
+          <a:prstGeom prst="rect">
+            <a:avLst/>
+          </a:prstGeom>
+          <a:noFill/>
+          <a:ln/>
+        </p:spPr>
+        <p:txBody>
+          <a:bodyPr wrap="square" lIns="0" tIns="0" rIns="0" bIns="0" rtlCol="0" anchor="ctr"/>
+          <a:lstStyle/>
+          <a:p>
+            <a:pPr indent="0" marL="0">
+              <a:buNone/>
+            </a:pPr>
+            <a:r>
+              <a:rPr lang="en-US" sz="1550" b="1" dirty="0">
+                <a:solidFill>
+                  <a:srgbClr val="0B2545"/>
+                </a:solidFill>
+                <a:latin typeface="Calibri" pitchFamily="34" charset="0"/>
+                <a:ea typeface="Calibri" pitchFamily="34" charset="-122"/>
+                <a:cs typeface="Calibri" pitchFamily="34" charset="-120"/>
+              </a:rPr>
+              <a:t>"Which &lt;records&gt; in &lt;region&gt; intersect &lt;layer&gt;?"</a:t>
+            </a:r>
+            <a:endParaRPr lang="en-US" sz="1550" dirty="0"/>
+          </a:p>
+        </p:txBody>
+      </p:sp>
+      <p:sp>
+        <p:nvSpPr>
+          <p:cNvPr id="23" name="Text 21"/>
+          <p:cNvSpPr/>
+          <p:nvPr/>
+        </p:nvSpPr>
+        <p:spPr>
+          <a:xfrm>
+            <a:off x="1508760" y="5522976"/>
+            <a:ext cx="10058400" cy="384048"/>
+          </a:xfrm>
+          <a:prstGeom prst="rect">
+            <a:avLst/>
+          </a:prstGeom>
+          <a:noFill/>
+          <a:ln/>
+        </p:spPr>
+        <p:txBody>
+          <a:bodyPr wrap="square" lIns="0" tIns="0" rIns="0" bIns="0" rtlCol="0" anchor="ctr"/>
+          <a:lstStyle/>
+          <a:p>
+            <a:pPr indent="0" marL="0">
+              <a:buNone/>
+            </a:pPr>
+            <a:r>
+              <a:rPr lang="en-US" sz="1250" dirty="0">
+                <a:solidFill>
+                  <a:srgbClr val="5B6B7F"/>
+                </a:solidFill>
+                <a:latin typeface="Calibri" pitchFamily="34" charset="0"/>
+                <a:ea typeface="Calibri" pitchFamily="34" charset="-122"/>
+                <a:cs typeface="Calibri" pitchFamily="34" charset="-120"/>
+              </a:rPr>
+              <a:t>Cross-layer reveal — must stay region-scoped (else 413).</a:t>
+            </a:r>
+            <a:endParaRPr lang="en-US" sz="1250" dirty="0"/>
+          </a:p>
+        </p:txBody>
+      </p:sp>
+      <p:sp>
+        <p:nvSpPr>
+          <p:cNvPr id="24" name="Text 22"/>
+          <p:cNvSpPr/>
+          <p:nvPr/>
+        </p:nvSpPr>
+        <p:spPr>
+          <a:xfrm>
+            <a:off x="502920" y="6473952"/>
+            <a:ext cx="7315200" cy="274320"/>
+          </a:xfrm>
+          <a:prstGeom prst="rect">
+            <a:avLst/>
+          </a:prstGeom>
+          <a:noFill/>
+          <a:ln/>
+        </p:spPr>
+        <p:txBody>
+          <a:bodyPr wrap="square" lIns="0" tIns="0" rIns="0" bIns="0" rtlCol="0" anchor="ctr"/>
+          <a:lstStyle/>
+          <a:p>
+            <a:pPr algn="l" indent="0" marL="0">
+              <a:buNone/>
+            </a:pPr>
+            <a:r>
+              <a:rPr lang="en-US" sz="900" dirty="0">
+                <a:solidFill>
+                  <a:srgbClr val="5B6B7F"/>
+                </a:solidFill>
+                <a:latin typeface="Calibri" pitchFamily="34" charset="0"/>
+                <a:ea typeface="Calibri" pitchFamily="34" charset="-122"/>
+                <a:cs typeface="Calibri" pitchFamily="34" charset="-120"/>
+              </a:rPr>
+              <a:t>ArcGIS Maps SDK 5.0 · AI Components Demo</a:t>
+            </a:r>
+            <a:endParaRPr lang="en-US" sz="900" dirty="0"/>
+          </a:p>
+        </p:txBody>
+      </p:sp>
+      <p:sp>
+        <p:nvSpPr>
+          <p:cNvPr id="25" name="Text 23"/>
+          <p:cNvSpPr/>
+          <p:nvPr/>
+        </p:nvSpPr>
+        <p:spPr>
+          <a:xfrm>
+            <a:off x="11277295" y="6473952"/>
+            <a:ext cx="457200" cy="274320"/>
+          </a:xfrm>
+          <a:prstGeom prst="rect">
+            <a:avLst/>
+          </a:prstGeom>
+          <a:noFill/>
+          <a:ln/>
+        </p:spPr>
+        <p:txBody>
+          <a:bodyPr wrap="square" lIns="0" tIns="0" rIns="0" bIns="0" rtlCol="0" anchor="ctr"/>
+          <a:lstStyle/>
+          <a:p>
+            <a:pPr algn="r" indent="0" marL="0">
+              <a:buNone/>
+            </a:pPr>
+            <a:r>
+              <a:rPr lang="en-US" sz="900" dirty="0">
+                <a:solidFill>
+                  <a:srgbClr val="5B6B7F"/>
+                </a:solidFill>
+                <a:latin typeface="Calibri" pitchFamily="34" charset="0"/>
+                <a:ea typeface="Calibri" pitchFamily="34" charset="-122"/>
+                <a:cs typeface="Calibri" pitchFamily="34" charset="-120"/>
+              </a:rPr>
+              <a:t>10</a:t>
+            </a:r>
+            <a:endParaRPr lang="en-US" sz="900" dirty="0"/>
+          </a:p>
+        </p:txBody>
+      </p:sp>
+    </p:spTree>
+  </p:cSld>
+  <p:clrMapOvr>
+    <a:masterClrMapping/>
+  </p:clrMapOvr>
+</p:sld>
+</file>
+
+<file path=ppt/slides/slide11.xml><?xml version="1.0" encoding="utf-8"?>
+<p:sld xmlns:a="http://schemas.openxmlformats.org/drawingml/2006/main" xmlns:r="http://schemas.openxmlformats.org/officeDocument/2006/relationships" xmlns:p="http://schemas.openxmlformats.org/presentationml/2006/main">
+  <p:cSld name="Slide 11">
+    <p:bg>
+      <p:bgPr>
+        <a:solidFill>
           <a:srgbClr val="0B2545"/>
         </a:solidFill>
       </p:bgPr>
@@ -7045,7 +7986,7 @@
         <p:spPr>
           <a:xfrm>
             <a:off x="502920" y="411480"/>
-            <a:ext cx="10972800" cy="640080"/>
+            <a:ext cx="11155680" cy="640080"/>
           </a:xfrm>
           <a:prstGeom prst="rect">
             <a:avLst/>
@@ -7069,7 +8010,7 @@
                 <a:ea typeface="Bookman Old Style" pitchFamily="34" charset="-122"/>
                 <a:cs typeface="Bookman Old Style" pitchFamily="34" charset="-120"/>
               </a:rPr>
-              <a:t>Gotchas that cost us a day</a:t>
+              <a:t>Connecting users: SAML vs built-in</a:t>
             </a:r>
             <a:endParaRPr lang="en-US" sz="3000" dirty="0"/>
           </a:p>
@@ -7077,18 +8018,57 @@
       </p:sp>
       <p:sp>
         <p:nvSpPr>
-          <p:cNvPr id="3" name="Shape 1"/>
-          <p:cNvSpPr/>
-          <p:nvPr/>
-        </p:nvSpPr>
-        <p:spPr>
-          <a:xfrm>
-            <a:off x="502920" y="1325880"/>
-            <a:ext cx="3657600" cy="2148840"/>
+          <p:cNvPr id="3" name="Text 1"/>
+          <p:cNvSpPr/>
+          <p:nvPr/>
+        </p:nvSpPr>
+        <p:spPr>
+          <a:xfrm>
+            <a:off x="502920" y="1078992"/>
+            <a:ext cx="10972800" cy="548640"/>
+          </a:xfrm>
+          <a:prstGeom prst="rect">
+            <a:avLst/>
+          </a:prstGeom>
+          <a:noFill/>
+          <a:ln/>
+        </p:spPr>
+        <p:txBody>
+          <a:bodyPr wrap="square" lIns="0" tIns="0" rIns="0" bIns="0" rtlCol="0" anchor="ctr"/>
+          <a:lstStyle/>
+          <a:p>
+            <a:pPr indent="0" marL="0">
+              <a:buNone/>
+            </a:pPr>
+            <a:r>
+              <a:rPr lang="en-US" sz="1400" dirty="0">
+                <a:solidFill>
+                  <a:srgbClr val="5B6B7F"/>
+                </a:solidFill>
+                <a:latin typeface="Calibri" pitchFamily="34" charset="0"/>
+                <a:ea typeface="Calibri" pitchFamily="34" charset="-122"/>
+                <a:cs typeface="Calibri" pitchFamily="34" charset="-120"/>
+              </a:rPr>
+              <a:t>Both use the same OAuth 2.0 user-auth flow and the same app code — the only lever is the portal URL.</a:t>
+            </a:r>
+            <a:endParaRPr lang="en-US" sz="1400" dirty="0"/>
+          </a:p>
+        </p:txBody>
+      </p:sp>
+      <p:sp>
+        <p:nvSpPr>
+          <p:cNvPr id="4" name="Shape 2"/>
+          <p:cNvSpPr/>
+          <p:nvPr/>
+        </p:nvSpPr>
+        <p:spPr>
+          <a:xfrm>
+            <a:off x="502920" y="1783080"/>
+            <a:ext cx="5486400" cy="3108960"/>
           </a:xfrm>
           <a:prstGeom prst="roundRect">
             <a:avLst>
-              <a:gd name="adj" fmla="val 3404"/>
+              <a:gd name="adj" fmla="val 2941"/>
             </a:avLst>
           </a:prstGeom>
           <a:solidFill>
@@ -7106,27 +8086,27 @@
       </p:sp>
       <p:sp>
         <p:nvSpPr>
-          <p:cNvPr id="4" name="Shape 2"/>
-          <p:cNvSpPr/>
-          <p:nvPr/>
-        </p:nvSpPr>
-        <p:spPr>
-          <a:xfrm>
-            <a:off x="758952" y="1581912"/>
-            <a:ext cx="713232" cy="713232"/>
+          <p:cNvPr id="5" name="Shape 3"/>
+          <p:cNvSpPr/>
+          <p:nvPr/>
+        </p:nvSpPr>
+        <p:spPr>
+          <a:xfrm>
+            <a:off x="868680" y="2057400"/>
+            <a:ext cx="822960" cy="822960"/>
           </a:xfrm>
           <a:prstGeom prst="ellipse">
             <a:avLst/>
           </a:prstGeom>
           <a:solidFill>
-            <a:srgbClr val="E8A33D"/>
+            <a:srgbClr val="1C7293"/>
           </a:solidFill>
           <a:ln/>
         </p:spPr>
       </p:sp>
       <p:pic>
         <p:nvPicPr>
-          <p:cNvPr id="5" name="Image 0" descr="preencoded.png">    </p:cNvPr>
+          <p:cNvPr id="6" name="Image 0" descr="preencoded.png">    </p:cNvPr>
           <p:cNvPicPr>
             <a:picLocks noChangeAspect="1"/>
           </p:cNvPicPr>
@@ -7140,8 +8120,8 @@
         </p:blipFill>
         <p:spPr>
           <a:xfrm>
-            <a:off x="944392" y="1767352"/>
-            <a:ext cx="342351" cy="342351"/>
+            <a:off x="1082650" y="2271370"/>
+            <a:ext cx="395021" cy="395021"/>
           </a:xfrm>
           <a:prstGeom prst="rect">
             <a:avLst/>
@@ -7150,14 +8130,14 @@
       </p:pic>
       <p:sp>
         <p:nvSpPr>
-          <p:cNvPr id="6" name="Text 3"/>
-          <p:cNvSpPr/>
-          <p:nvPr/>
-        </p:nvSpPr>
-        <p:spPr>
-          <a:xfrm>
-            <a:off x="1600200" y="1600200"/>
-            <a:ext cx="2377440" cy="685800"/>
+          <p:cNvPr id="7" name="Text 4"/>
+          <p:cNvSpPr/>
+          <p:nvPr/>
+        </p:nvSpPr>
+        <p:spPr>
+          <a:xfrm>
+            <a:off x="1783080" y="2103120"/>
+            <a:ext cx="4023360" cy="731520"/>
           </a:xfrm>
           <a:prstGeom prst="rect">
             <a:avLst/>
@@ -7170,88 +8150,166 @@
           <a:lstStyle/>
           <a:p>
             <a:pPr indent="0" marL="0">
+              <a:buNone/>
+            </a:pPr>
+            <a:r>
+              <a:rPr lang="en-US" sz="1600" b="1" dirty="0">
+                <a:solidFill>
+                  <a:srgbClr val="0B2545"/>
+                </a:solidFill>
+                <a:latin typeface="Calibri" pitchFamily="34" charset="0"/>
+                <a:ea typeface="Calibri" pitchFamily="34" charset="-122"/>
+                <a:cs typeface="Calibri" pitchFamily="34" charset="-120"/>
+              </a:rPr>
+              <a:t>Built-in account</a:t>
+            </a:r>
+            <a:endParaRPr lang="en-US" sz="1600" dirty="0"/>
+          </a:p>
+        </p:txBody>
+      </p:sp>
+      <p:sp>
+        <p:nvSpPr>
+          <p:cNvPr id="8" name="Text 5"/>
+          <p:cNvSpPr/>
+          <p:nvPr/>
+        </p:nvSpPr>
+        <p:spPr>
+          <a:xfrm>
+            <a:off x="868680" y="2971800"/>
+            <a:ext cx="4800600" cy="1828800"/>
+          </a:xfrm>
+          <a:prstGeom prst="rect">
+            <a:avLst/>
+          </a:prstGeom>
+          <a:noFill/>
+          <a:ln/>
+        </p:spPr>
+        <p:txBody>
+          <a:bodyPr wrap="square" lIns="0" tIns="0" rIns="0" bIns="0" rtlCol="0" anchor="ctr"/>
+          <a:lstStyle/>
+          <a:p>
+            <a:pPr marL="342900" indent="-342900">
               <a:lnSpc>
-                <a:spcPts val="1600"/>
+                <a:spcPts val="1800"/>
               </a:lnSpc>
-              <a:buNone/>
-            </a:pPr>
-            <a:r>
-              <a:rPr lang="en-US" sz="1450" b="1" dirty="0">
-                <a:solidFill>
-                  <a:srgbClr val="0B2545"/>
-                </a:solidFill>
-                <a:latin typeface="Calibri" pitchFamily="34" charset="0"/>
-                <a:ea typeface="Calibri" pitchFamily="34" charset="-122"/>
-                <a:cs typeface="Calibri" pitchFamily="34" charset="-120"/>
-              </a:rPr>
-              <a:t>Elements don't auto-register</a:t>
-            </a:r>
-            <a:endParaRPr lang="en-US" sz="1450" dirty="0"/>
-          </a:p>
-        </p:txBody>
-      </p:sp>
-      <p:sp>
-        <p:nvSpPr>
-          <p:cNvPr id="7" name="Text 4"/>
-          <p:cNvSpPr/>
-          <p:nvPr/>
-        </p:nvSpPr>
-        <p:spPr>
-          <a:xfrm>
-            <a:off x="758952" y="2350008"/>
-            <a:ext cx="3145536" cy="1005840"/>
-          </a:xfrm>
-          <a:prstGeom prst="rect">
-            <a:avLst/>
-          </a:prstGeom>
-          <a:noFill/>
-          <a:ln/>
-        </p:spPr>
-        <p:txBody>
-          <a:bodyPr wrap="square" lIns="0" tIns="0" rIns="0" bIns="0" rtlCol="0" anchor="ctr"/>
-          <a:lstStyle/>
-          <a:p>
-            <a:pPr indent="0" marL="0">
+              <a:spcAft>
+                <a:spcPts val="800"/>
+              </a:spcAft>
+              <a:buSzPct val="100000"/>
+              <a:buChar char="•"/>
+            </a:pPr>
+            <a:r>
+              <a:rPr lang="en-US" sz="1250" dirty="0">
+                <a:solidFill>
+                  <a:srgbClr val="1E293B"/>
+                </a:solidFill>
+                <a:latin typeface="Calibri" pitchFamily="34" charset="0"/>
+                <a:ea typeface="Calibri" pitchFamily="34" charset="-122"/>
+                <a:cs typeface="Calibri" pitchFamily="34" charset="-120"/>
+              </a:rPr>
+              <a:t>Credentials live in ArcGIS Online</a:t>
+            </a:r>
+            <a:endParaRPr lang="en-US" sz="1250" dirty="0"/>
+          </a:p>
+          <a:p>
+            <a:pPr marL="342900" indent="-342900">
               <a:lnSpc>
-                <a:spcPts val="1450"/>
+                <a:spcPts val="1800"/>
               </a:lnSpc>
-              <a:buNone/>
-            </a:pPr>
-            <a:r>
-              <a:rPr lang="en-US" sz="1150" dirty="0">
-                <a:solidFill>
-                  <a:srgbClr val="5B6B7F"/>
-                </a:solidFill>
-                <a:latin typeface="Calibri" pitchFamily="34" charset="0"/>
-                <a:ea typeface="Calibri" pitchFamily="34" charset="-122"/>
-                <a:cs typeface="Calibri" pitchFamily="34" charset="-120"/>
-              </a:rPr>
-              <a:t>SDK 5.x is Lumina-based. Bare imports do nothing — call defineCustomElements() or you get "Custom element not found."</a:t>
-            </a:r>
-            <a:endParaRPr lang="en-US" sz="1150" dirty="0"/>
-          </a:p>
-        </p:txBody>
-      </p:sp>
-      <p:sp>
-        <p:nvSpPr>
-          <p:cNvPr id="8" name="Shape 5"/>
-          <p:cNvSpPr/>
-          <p:nvPr/>
-        </p:nvSpPr>
-        <p:spPr>
-          <a:xfrm>
-            <a:off x="4398264" y="1325880"/>
-            <a:ext cx="3657600" cy="2148840"/>
+              <a:spcAft>
+                <a:spcPts val="800"/>
+              </a:spcAft>
+              <a:buSzPct val="100000"/>
+              <a:buChar char="•"/>
+            </a:pPr>
+            <a:r>
+              <a:rPr lang="en-US" sz="1250" dirty="0">
+                <a:solidFill>
+                  <a:srgbClr val="1E293B"/>
+                </a:solidFill>
+                <a:latin typeface="Calibri" pitchFamily="34" charset="0"/>
+                <a:ea typeface="Calibri" pitchFamily="34" charset="-122"/>
+                <a:cs typeface="Calibri" pitchFamily="34" charset="-120"/>
+              </a:rPr>
+              <a:t>Signs in directly on the ArcGIS sign-in page</a:t>
+            </a:r>
+            <a:endParaRPr lang="en-US" sz="1250" dirty="0"/>
+          </a:p>
+          <a:p>
+            <a:pPr marL="342900" indent="-342900">
+              <a:lnSpc>
+                <a:spcPts val="1800"/>
+              </a:lnSpc>
+              <a:spcAft>
+                <a:spcPts val="800"/>
+              </a:spcAft>
+              <a:buSzPct val="100000"/>
+              <a:buChar char="•"/>
+            </a:pPr>
+            <a:r>
+              <a:rPr lang="en-US" sz="1250" dirty="0">
+                <a:solidFill>
+                  <a:srgbClr val="1E293B"/>
+                </a:solidFill>
+                <a:latin typeface="Calibri" pitchFamily="34" charset="0"/>
+                <a:ea typeface="Calibri" pitchFamily="34" charset="-122"/>
+                <a:cs typeface="Calibri" pitchFamily="34" charset="-120"/>
+              </a:rPr>
+              <a:t>Org password policy applies</a:t>
+            </a:r>
+            <a:endParaRPr lang="en-US" sz="1250" dirty="0"/>
+          </a:p>
+          <a:p>
+            <a:pPr marL="342900" indent="-342900">
+              <a:lnSpc>
+                <a:spcPts val="1800"/>
+              </a:lnSpc>
+              <a:spcAft>
+                <a:spcPts val="800"/>
+              </a:spcAft>
+              <a:buSzPct val="100000"/>
+              <a:buChar char="•"/>
+            </a:pPr>
+            <a:r>
+              <a:rPr lang="en-US" sz="1250" dirty="0">
+                <a:solidFill>
+                  <a:srgbClr val="1E293B"/>
+                </a:solidFill>
+                <a:latin typeface="Calibri" pitchFamily="34" charset="0"/>
+                <a:ea typeface="Calibri" pitchFamily="34" charset="-122"/>
+                <a:cs typeface="Calibri" pitchFamily="34" charset="-120"/>
+              </a:rPr>
+              <a:t>Username, e.g. jsmith</a:t>
+            </a:r>
+            <a:endParaRPr lang="en-US" sz="1250" dirty="0"/>
+          </a:p>
+        </p:txBody>
+      </p:sp>
+      <p:sp>
+        <p:nvSpPr>
+          <p:cNvPr id="9" name="Shape 6"/>
+          <p:cNvSpPr/>
+          <p:nvPr/>
+        </p:nvSpPr>
+        <p:spPr>
+          <a:xfrm>
+            <a:off x="6217920" y="1783080"/>
+            <a:ext cx="5486400" cy="3108960"/>
           </a:xfrm>
           <a:prstGeom prst="roundRect">
             <a:avLst>
-              <a:gd name="adj" fmla="val 3404"/>
+              <a:gd name="adj" fmla="val 2941"/>
             </a:avLst>
           </a:prstGeom>
           <a:solidFill>
             <a:srgbClr val="F4F7FA"/>
           </a:solidFill>
-          <a:ln/>
+          <a:ln w="12700">
+            <a:solidFill>
+              <a:srgbClr val="1C7293"/>
+            </a:solidFill>
+            <a:prstDash val="solid"/>
+          </a:ln>
           <a:effectLst>
             <a:outerShdw sx="100000" sy="100000" kx="0" ky="0" algn="bl" rotWithShape="0" blurRad="88900" dist="38100" dir="5400000">
               <a:srgbClr val="000000">
@@ -7263,14 +8321,14 @@
       </p:sp>
       <p:sp>
         <p:nvSpPr>
-          <p:cNvPr id="9" name="Shape 6"/>
-          <p:cNvSpPr/>
-          <p:nvPr/>
-        </p:nvSpPr>
-        <p:spPr>
-          <a:xfrm>
-            <a:off x="4654296" y="1581912"/>
-            <a:ext cx="713232" cy="713232"/>
+          <p:cNvPr id="10" name="Shape 7"/>
+          <p:cNvSpPr/>
+          <p:nvPr/>
+        </p:nvSpPr>
+        <p:spPr>
+          <a:xfrm>
+            <a:off x="6583680" y="2057400"/>
+            <a:ext cx="822960" cy="822960"/>
           </a:xfrm>
           <a:prstGeom prst="ellipse">
             <a:avLst/>
@@ -7283,7 +8341,7 @@
       </p:sp>
       <p:pic>
         <p:nvPicPr>
-          <p:cNvPr id="10" name="Image 1" descr="preencoded.png">    </p:cNvPr>
+          <p:cNvPr id="11" name="Image 1" descr="preencoded.png">    </p:cNvPr>
           <p:cNvPicPr>
             <a:picLocks noChangeAspect="1"/>
           </p:cNvPicPr>
@@ -7297,8 +8355,8 @@
         </p:blipFill>
         <p:spPr>
           <a:xfrm>
-            <a:off x="4839736" y="1767352"/>
-            <a:ext cx="342351" cy="342351"/>
+            <a:off x="6797650" y="2271370"/>
+            <a:ext cx="395021" cy="395021"/>
           </a:xfrm>
           <a:prstGeom prst="rect">
             <a:avLst/>
@@ -7307,14 +8365,193 @@
       </p:pic>
       <p:sp>
         <p:nvSpPr>
-          <p:cNvPr id="11" name="Text 7"/>
-          <p:cNvSpPr/>
-          <p:nvPr/>
-        </p:nvSpPr>
-        <p:spPr>
-          <a:xfrm>
-            <a:off x="5495544" y="1600200"/>
-            <a:ext cx="2377440" cy="685800"/>
+          <p:cNvPr id="12" name="Text 8"/>
+          <p:cNvSpPr/>
+          <p:nvPr/>
+        </p:nvSpPr>
+        <p:spPr>
+          <a:xfrm>
+            <a:off x="7498080" y="2103120"/>
+            <a:ext cx="4069080" cy="731520"/>
+          </a:xfrm>
+          <a:prstGeom prst="rect">
+            <a:avLst/>
+          </a:prstGeom>
+          <a:noFill/>
+          <a:ln/>
+        </p:spPr>
+        <p:txBody>
+          <a:bodyPr wrap="square" lIns="0" tIns="0" rIns="0" bIns="0" rtlCol="0" anchor="ctr"/>
+          <a:lstStyle/>
+          <a:p>
+            <a:pPr indent="0" marL="0">
+              <a:buNone/>
+            </a:pPr>
+            <a:r>
+              <a:rPr lang="en-US" sz="1600" b="1" dirty="0">
+                <a:solidFill>
+                  <a:srgbClr val="0B2545"/>
+                </a:solidFill>
+                <a:latin typeface="Calibri" pitchFamily="34" charset="0"/>
+                <a:ea typeface="Calibri" pitchFamily="34" charset="-122"/>
+                <a:cs typeface="Calibri" pitchFamily="34" charset="-120"/>
+              </a:rPr>
+              <a:t>SAML / org-specific login</a:t>
+            </a:r>
+            <a:endParaRPr lang="en-US" sz="1600" dirty="0"/>
+          </a:p>
+        </p:txBody>
+      </p:sp>
+      <p:sp>
+        <p:nvSpPr>
+          <p:cNvPr id="13" name="Text 9"/>
+          <p:cNvSpPr/>
+          <p:nvPr/>
+        </p:nvSpPr>
+        <p:spPr>
+          <a:xfrm>
+            <a:off x="6583680" y="2971800"/>
+            <a:ext cx="4800600" cy="1828800"/>
+          </a:xfrm>
+          <a:prstGeom prst="rect">
+            <a:avLst/>
+          </a:prstGeom>
+          <a:noFill/>
+          <a:ln/>
+        </p:spPr>
+        <p:txBody>
+          <a:bodyPr wrap="square" lIns="0" tIns="0" rIns="0" bIns="0" rtlCol="0" anchor="ctr"/>
+          <a:lstStyle/>
+          <a:p>
+            <a:pPr marL="342900" indent="-342900">
+              <a:lnSpc>
+                <a:spcPts val="1800"/>
+              </a:lnSpc>
+              <a:spcAft>
+                <a:spcPts val="800"/>
+              </a:spcAft>
+              <a:buSzPct val="100000"/>
+              <a:buChar char="•"/>
+            </a:pPr>
+            <a:r>
+              <a:rPr lang="en-US" sz="1250" dirty="0">
+                <a:solidFill>
+                  <a:srgbClr val="1E293B"/>
+                </a:solidFill>
+                <a:latin typeface="Calibri" pitchFamily="34" charset="0"/>
+                <a:ea typeface="Calibri" pitchFamily="34" charset="-122"/>
+                <a:cs typeface="Calibri" pitchFamily="34" charset="-120"/>
+              </a:rPr>
+              <a:t>Credentials live in your identity provider (IdP)</a:t>
+            </a:r>
+            <a:endParaRPr lang="en-US" sz="1250" dirty="0"/>
+          </a:p>
+          <a:p>
+            <a:pPr marL="342900" indent="-342900">
+              <a:lnSpc>
+                <a:spcPts val="1800"/>
+              </a:lnSpc>
+              <a:spcAft>
+                <a:spcPts val="800"/>
+              </a:spcAft>
+              <a:buSzPct val="100000"/>
+              <a:buChar char="•"/>
+            </a:pPr>
+            <a:r>
+              <a:rPr lang="en-US" sz="1250" dirty="0">
+                <a:solidFill>
+                  <a:srgbClr val="1E293B"/>
+                </a:solidFill>
+                <a:latin typeface="Calibri" pitchFamily="34" charset="0"/>
+                <a:ea typeface="Calibri" pitchFamily="34" charset="-122"/>
+                <a:cs typeface="Calibri" pitchFamily="34" charset="-120"/>
+              </a:rPr>
+              <a:t>Redirected to your IdP to sign in</a:t>
+            </a:r>
+            <a:endParaRPr lang="en-US" sz="1250" dirty="0"/>
+          </a:p>
+          <a:p>
+            <a:pPr marL="342900" indent="-342900">
+              <a:lnSpc>
+                <a:spcPts val="1800"/>
+              </a:lnSpc>
+              <a:spcAft>
+                <a:spcPts val="800"/>
+              </a:spcAft>
+              <a:buSzPct val="100000"/>
+              <a:buChar char="•"/>
+            </a:pPr>
+            <a:r>
+              <a:rPr lang="en-US" sz="1250" dirty="0">
+                <a:solidFill>
+                  <a:srgbClr val="1E293B"/>
+                </a:solidFill>
+                <a:latin typeface="Calibri" pitchFamily="34" charset="0"/>
+                <a:ea typeface="Calibri" pitchFamily="34" charset="-122"/>
+                <a:cs typeface="Calibri" pitchFamily="34" charset="-120"/>
+              </a:rPr>
+              <a:t>Formerly called "enterprise logins"</a:t>
+            </a:r>
+            <a:endParaRPr lang="en-US" sz="1250" dirty="0"/>
+          </a:p>
+          <a:p>
+            <a:pPr marL="342900" indent="-342900">
+              <a:lnSpc>
+                <a:spcPts val="1800"/>
+              </a:lnSpc>
+              <a:spcAft>
+                <a:spcPts val="800"/>
+              </a:spcAft>
+              <a:buSzPct val="100000"/>
+              <a:buChar char="•"/>
+            </a:pPr>
+            <a:r>
+              <a:rPr lang="en-US" sz="1250" dirty="0">
+                <a:solidFill>
+                  <a:srgbClr val="1E293B"/>
+                </a:solidFill>
+                <a:latin typeface="Calibri" pitchFamily="34" charset="0"/>
+                <a:ea typeface="Calibri" pitchFamily="34" charset="-122"/>
+                <a:cs typeface="Calibri" pitchFamily="34" charset="-120"/>
+              </a:rPr>
+              <a:t>Username carries the org-key suffix: jsmith@ORG</a:t>
+            </a:r>
+            <a:endParaRPr lang="en-US" sz="1250" dirty="0"/>
+          </a:p>
+        </p:txBody>
+      </p:sp>
+      <p:sp>
+        <p:nvSpPr>
+          <p:cNvPr id="14" name="Shape 10"/>
+          <p:cNvSpPr/>
+          <p:nvPr/>
+        </p:nvSpPr>
+        <p:spPr>
+          <a:xfrm>
+            <a:off x="502920" y="5120640"/>
+            <a:ext cx="11201400" cy="960120"/>
+          </a:xfrm>
+          <a:prstGeom prst="roundRect">
+            <a:avLst>
+              <a:gd name="adj" fmla="val 7619"/>
+            </a:avLst>
+          </a:prstGeom>
+          <a:solidFill>
+            <a:srgbClr val="0B2545"/>
+          </a:solidFill>
+          <a:ln/>
+        </p:spPr>
+      </p:sp>
+      <p:sp>
+        <p:nvSpPr>
+          <p:cNvPr id="15" name="Text 11"/>
+          <p:cNvSpPr/>
+          <p:nvPr/>
+        </p:nvSpPr>
+        <p:spPr>
+          <a:xfrm>
+            <a:off x="868680" y="5120640"/>
+            <a:ext cx="10515600" cy="960120"/>
           </a:xfrm>
           <a:prstGeom prst="rect">
             <a:avLst/>
@@ -7328,698 +8565,45 @@
           <a:p>
             <a:pPr indent="0" marL="0">
               <a:lnSpc>
-                <a:spcPts val="1600"/>
+                <a:spcPts val="1700"/>
               </a:lnSpc>
               <a:buNone/>
             </a:pPr>
             <a:r>
-              <a:rPr lang="en-US" sz="1450" b="1" dirty="0">
-                <a:solidFill>
-                  <a:srgbClr val="0B2545"/>
-                </a:solidFill>
-                <a:latin typeface="Calibri" pitchFamily="34" charset="0"/>
-                <a:ea typeface="Calibri" pitchFamily="34" charset="-122"/>
-                <a:cs typeface="Calibri" pitchFamily="34" charset="-120"/>
-              </a:rPr>
-              <a:t>No ai-components-react</a:t>
-            </a:r>
-            <a:endParaRPr lang="en-US" sz="1450" dirty="0"/>
-          </a:p>
-        </p:txBody>
-      </p:sp>
-      <p:sp>
-        <p:nvSpPr>
-          <p:cNvPr id="12" name="Text 8"/>
-          <p:cNvSpPr/>
-          <p:nvPr/>
-        </p:nvSpPr>
-        <p:spPr>
-          <a:xfrm>
-            <a:off x="4654296" y="2350008"/>
-            <a:ext cx="3145536" cy="1005840"/>
-          </a:xfrm>
-          <a:prstGeom prst="rect">
-            <a:avLst/>
-          </a:prstGeom>
-          <a:noFill/>
-          <a:ln/>
-        </p:spPr>
-        <p:txBody>
-          <a:bodyPr wrap="square" lIns="0" tIns="0" rIns="0" bIns="0" rtlCol="0" anchor="ctr"/>
-          <a:lstStyle/>
-          <a:p>
+              <a:rPr lang="en-US" sz="1300" b="1" dirty="0">
+                <a:solidFill>
+                  <a:srgbClr val="E8A33D"/>
+                </a:solidFill>
+                <a:latin typeface="Calibri" pitchFamily="34" charset="0"/>
+                <a:ea typeface="Calibri" pitchFamily="34" charset="-122"/>
+                <a:cs typeface="Calibri" pitchFamily="34" charset="-120"/>
+              </a:rPr>
+              <a:t>The only lever is VITE_PORTAL_URL:  </a:t>
+            </a:r>
             <a:pPr indent="0" marL="0">
               <a:lnSpc>
-                <a:spcPts val="1450"/>
+                <a:spcPts val="1700"/>
               </a:lnSpc>
               <a:buNone/>
             </a:pPr>
             <a:r>
-              <a:rPr lang="en-US" sz="1150" dirty="0">
-                <a:solidFill>
-                  <a:srgbClr val="5B6B7F"/>
-                </a:solidFill>
-                <a:latin typeface="Calibri" pitchFamily="34" charset="0"/>
-                <a:ea typeface="Calibri" pitchFamily="34" charset="-122"/>
-                <a:cs typeface="Calibri" pitchFamily="34" charset="-120"/>
-              </a:rPr>
-              <a:t>AI components ship as raw web components only. Declare the tags in vite-env.d.ts; set props imperatively via refs.</a:t>
-            </a:r>
-            <a:endParaRPr lang="en-US" sz="1150" dirty="0"/>
-          </a:p>
-        </p:txBody>
-      </p:sp>
-      <p:sp>
-        <p:nvSpPr>
-          <p:cNvPr id="13" name="Shape 9"/>
-          <p:cNvSpPr/>
-          <p:nvPr/>
-        </p:nvSpPr>
-        <p:spPr>
-          <a:xfrm>
-            <a:off x="8293608" y="1325880"/>
-            <a:ext cx="3657600" cy="2148840"/>
-          </a:xfrm>
-          <a:prstGeom prst="roundRect">
-            <a:avLst>
-              <a:gd name="adj" fmla="val 3404"/>
-            </a:avLst>
-          </a:prstGeom>
-          <a:solidFill>
-            <a:srgbClr val="F4F7FA"/>
-          </a:solidFill>
-          <a:ln/>
-          <a:effectLst>
-            <a:outerShdw sx="100000" sy="100000" kx="0" ky="0" algn="bl" rotWithShape="0" blurRad="88900" dist="38100" dir="5400000">
-              <a:srgbClr val="000000">
-                <a:alpha val="12000"/>
-              </a:srgbClr>
-            </a:outerShdw>
-          </a:effectLst>
-        </p:spPr>
-      </p:sp>
-      <p:sp>
-        <p:nvSpPr>
-          <p:cNvPr id="14" name="Shape 10"/>
-          <p:cNvSpPr/>
-          <p:nvPr/>
-        </p:nvSpPr>
-        <p:spPr>
-          <a:xfrm>
-            <a:off x="8549640" y="1581912"/>
-            <a:ext cx="713232" cy="713232"/>
-          </a:xfrm>
-          <a:prstGeom prst="ellipse">
-            <a:avLst/>
-          </a:prstGeom>
-          <a:solidFill>
-            <a:srgbClr val="E8A33D"/>
-          </a:solidFill>
-          <a:ln/>
-        </p:spPr>
-      </p:sp>
-      <p:pic>
-        <p:nvPicPr>
-          <p:cNvPr id="15" name="Image 2" descr="preencoded.png">    </p:cNvPr>
-          <p:cNvPicPr>
-            <a:picLocks noChangeAspect="1"/>
-          </p:cNvPicPr>
-          <p:nvPr/>
-        </p:nvPicPr>
-        <p:blipFill>
-          <a:blip r:embed="rId3"/>
-          <a:stretch>
-            <a:fillRect/>
-          </a:stretch>
-        </p:blipFill>
-        <p:spPr>
-          <a:xfrm>
-            <a:off x="8735080" y="1767352"/>
-            <a:ext cx="342351" cy="342351"/>
-          </a:xfrm>
-          <a:prstGeom prst="rect">
-            <a:avLst/>
-          </a:prstGeom>
-        </p:spPr>
-      </p:pic>
-      <p:sp>
-        <p:nvSpPr>
-          <p:cNvPr id="16" name="Text 11"/>
-          <p:cNvSpPr/>
-          <p:nvPr/>
-        </p:nvSpPr>
-        <p:spPr>
-          <a:xfrm>
-            <a:off x="9390888" y="1600200"/>
-            <a:ext cx="2377440" cy="685800"/>
-          </a:xfrm>
-          <a:prstGeom prst="rect">
-            <a:avLst/>
-          </a:prstGeom>
-          <a:noFill/>
-          <a:ln/>
-        </p:spPr>
-        <p:txBody>
-          <a:bodyPr wrap="square" lIns="0" tIns="0" rIns="0" bIns="0" rtlCol="0" anchor="ctr"/>
-          <a:lstStyle/>
-          <a:p>
-            <a:pPr indent="0" marL="0">
-              <a:lnSpc>
-                <a:spcPts val="1600"/>
-              </a:lnSpc>
-              <a:buNone/>
-            </a:pPr>
-            <a:r>
-              <a:rPr lang="en-US" sz="1450" b="1" dirty="0">
-                <a:solidFill>
-                  <a:srgbClr val="0B2545"/>
-                </a:solidFill>
-                <a:latin typeface="Calibri" pitchFamily="34" charset="0"/>
-                <a:ea typeface="Calibri" pitchFamily="34" charset="-122"/>
-                <a:cs typeface="Calibri" pitchFamily="34" charset="-120"/>
-              </a:rPr>
-              <a:t>Embeddings 504 ≠ CORS</a:t>
-            </a:r>
-            <a:endParaRPr lang="en-US" sz="1450" dirty="0"/>
-          </a:p>
-        </p:txBody>
-      </p:sp>
-      <p:sp>
-        <p:nvSpPr>
-          <p:cNvPr id="17" name="Text 12"/>
-          <p:cNvSpPr/>
-          <p:nvPr/>
-        </p:nvSpPr>
-        <p:spPr>
-          <a:xfrm>
-            <a:off x="8549640" y="2350008"/>
-            <a:ext cx="3145536" cy="1005840"/>
-          </a:xfrm>
-          <a:prstGeom prst="rect">
-            <a:avLst/>
-          </a:prstGeom>
-          <a:noFill/>
-          <a:ln/>
-        </p:spPr>
-        <p:txBody>
-          <a:bodyPr wrap="square" lIns="0" tIns="0" rIns="0" bIns="0" rtlCol="0" anchor="ctr"/>
-          <a:lstStyle/>
-          <a:p>
-            <a:pPr indent="0" marL="0">
-              <a:lnSpc>
-                <a:spcPts val="1450"/>
-              </a:lnSpc>
-              <a:buNone/>
-            </a:pPr>
-            <a:r>
-              <a:rPr lang="en-US" sz="1150" dirty="0">
-                <a:solidFill>
-                  <a:srgbClr val="5B6B7F"/>
-                </a:solidFill>
-                <a:latin typeface="Calibri" pitchFamily="34" charset="0"/>
-                <a:ea typeface="Calibri" pitchFamily="34" charset="-122"/>
-                <a:cs typeface="Calibri" pitchFamily="34" charset="-120"/>
-              </a:rPr>
-              <a:t>Generic error looks like CORS but is a 504 timeout. Wide-schema reference layers trigger it; narrow ones succeed.</a:t>
-            </a:r>
-            <a:endParaRPr lang="en-US" sz="1150" dirty="0"/>
-          </a:p>
-        </p:txBody>
-      </p:sp>
-      <p:sp>
-        <p:nvSpPr>
-          <p:cNvPr id="18" name="Shape 13"/>
-          <p:cNvSpPr/>
-          <p:nvPr/>
-        </p:nvSpPr>
-        <p:spPr>
-          <a:xfrm>
-            <a:off x="502920" y="3749040"/>
-            <a:ext cx="3657600" cy="2148840"/>
-          </a:xfrm>
-          <a:prstGeom prst="roundRect">
-            <a:avLst>
-              <a:gd name="adj" fmla="val 3404"/>
-            </a:avLst>
-          </a:prstGeom>
-          <a:solidFill>
-            <a:srgbClr val="F4F7FA"/>
-          </a:solidFill>
-          <a:ln/>
-          <a:effectLst>
-            <a:outerShdw sx="100000" sy="100000" kx="0" ky="0" algn="bl" rotWithShape="0" blurRad="88900" dist="38100" dir="5400000">
-              <a:srgbClr val="000000">
-                <a:alpha val="12000"/>
-              </a:srgbClr>
-            </a:outerShdw>
-          </a:effectLst>
-        </p:spPr>
-      </p:sp>
-      <p:sp>
-        <p:nvSpPr>
-          <p:cNvPr id="19" name="Shape 14"/>
-          <p:cNvSpPr/>
-          <p:nvPr/>
-        </p:nvSpPr>
-        <p:spPr>
-          <a:xfrm>
-            <a:off x="758952" y="4005072"/>
-            <a:ext cx="713232" cy="713232"/>
-          </a:xfrm>
-          <a:prstGeom prst="ellipse">
-            <a:avLst/>
-          </a:prstGeom>
-          <a:solidFill>
-            <a:srgbClr val="E8A33D"/>
-          </a:solidFill>
-          <a:ln/>
-        </p:spPr>
-      </p:sp>
-      <p:pic>
-        <p:nvPicPr>
-          <p:cNvPr id="20" name="Image 3" descr="preencoded.png">    </p:cNvPr>
-          <p:cNvPicPr>
-            <a:picLocks noChangeAspect="1"/>
-          </p:cNvPicPr>
-          <p:nvPr/>
-        </p:nvPicPr>
-        <p:blipFill>
-          <a:blip r:embed="rId4"/>
-          <a:stretch>
-            <a:fillRect/>
-          </a:stretch>
-        </p:blipFill>
-        <p:spPr>
-          <a:xfrm>
-            <a:off x="944392" y="4190512"/>
-            <a:ext cx="342351" cy="342351"/>
-          </a:xfrm>
-          <a:prstGeom prst="rect">
-            <a:avLst/>
-          </a:prstGeom>
-        </p:spPr>
-      </p:pic>
-      <p:sp>
-        <p:nvSpPr>
-          <p:cNvPr id="21" name="Text 15"/>
-          <p:cNvSpPr/>
-          <p:nvPr/>
-        </p:nvSpPr>
-        <p:spPr>
-          <a:xfrm>
-            <a:off x="1600200" y="4023360"/>
-            <a:ext cx="2377440" cy="685800"/>
-          </a:xfrm>
-          <a:prstGeom prst="rect">
-            <a:avLst/>
-          </a:prstGeom>
-          <a:noFill/>
-          <a:ln/>
-        </p:spPr>
-        <p:txBody>
-          <a:bodyPr wrap="square" lIns="0" tIns="0" rIns="0" bIns="0" rtlCol="0" anchor="ctr"/>
-          <a:lstStyle/>
-          <a:p>
-            <a:pPr indent="0" marL="0">
-              <a:lnSpc>
-                <a:spcPts val="1600"/>
-              </a:lnSpc>
-              <a:buNone/>
-            </a:pPr>
-            <a:r>
-              <a:rPr lang="en-US" sz="1450" b="1" dirty="0">
-                <a:solidFill>
-                  <a:srgbClr val="0B2545"/>
-                </a:solidFill>
-                <a:latin typeface="Calibri" pitchFamily="34" charset="0"/>
-                <a:ea typeface="Calibri" pitchFamily="34" charset="-122"/>
-                <a:cs typeface="Calibri" pitchFamily="34" charset="-120"/>
-              </a:rPr>
-              <a:t>Cross-layer 413</a:t>
-            </a:r>
-            <a:endParaRPr lang="en-US" sz="1450" dirty="0"/>
-          </a:p>
-        </p:txBody>
-      </p:sp>
-      <p:sp>
-        <p:nvSpPr>
-          <p:cNvPr id="22" name="Text 16"/>
-          <p:cNvSpPr/>
-          <p:nvPr/>
-        </p:nvSpPr>
-        <p:spPr>
-          <a:xfrm>
-            <a:off x="758952" y="4773168"/>
-            <a:ext cx="3145536" cy="1005840"/>
-          </a:xfrm>
-          <a:prstGeom prst="rect">
-            <a:avLst/>
-          </a:prstGeom>
-          <a:noFill/>
-          <a:ln/>
-        </p:spPr>
-        <p:txBody>
-          <a:bodyPr wrap="square" lIns="0" tIns="0" rIns="0" bIns="0" rtlCol="0" anchor="ctr"/>
-          <a:lstStyle/>
-          <a:p>
-            <a:pPr indent="0" marL="0">
-              <a:lnSpc>
-                <a:spcPts val="1450"/>
-              </a:lnSpc>
-              <a:buNone/>
-            </a:pPr>
-            <a:r>
-              <a:rPr lang="en-US" sz="1150" dirty="0">
-                <a:solidFill>
-                  <a:srgbClr val="5B6B7F"/>
-                </a:solidFill>
-                <a:latin typeface="Calibri" pitchFamily="34" charset="0"/>
-                <a:ea typeface="Calibri" pitchFamily="34" charset="-122"/>
-                <a:cs typeface="Calibri" pitchFamily="34" charset="-120"/>
-              </a:rPr>
-              <a:t>OOB agent submits national polygons as a spatial filter → 413. Fix: state-scope the prompt or pre-compute the attribute.</a:t>
-            </a:r>
-            <a:endParaRPr lang="en-US" sz="1150" dirty="0"/>
-          </a:p>
-        </p:txBody>
-      </p:sp>
-      <p:sp>
-        <p:nvSpPr>
-          <p:cNvPr id="23" name="Shape 17"/>
-          <p:cNvSpPr/>
-          <p:nvPr/>
-        </p:nvSpPr>
-        <p:spPr>
-          <a:xfrm>
-            <a:off x="4398264" y="3749040"/>
-            <a:ext cx="3657600" cy="2148840"/>
-          </a:xfrm>
-          <a:prstGeom prst="roundRect">
-            <a:avLst>
-              <a:gd name="adj" fmla="val 3404"/>
-            </a:avLst>
-          </a:prstGeom>
-          <a:solidFill>
-            <a:srgbClr val="F4F7FA"/>
-          </a:solidFill>
-          <a:ln/>
-          <a:effectLst>
-            <a:outerShdw sx="100000" sy="100000" kx="0" ky="0" algn="bl" rotWithShape="0" blurRad="88900" dist="38100" dir="5400000">
-              <a:srgbClr val="000000">
-                <a:alpha val="12000"/>
-              </a:srgbClr>
-            </a:outerShdw>
-          </a:effectLst>
-        </p:spPr>
-      </p:sp>
-      <p:sp>
-        <p:nvSpPr>
-          <p:cNvPr id="24" name="Shape 18"/>
-          <p:cNvSpPr/>
-          <p:nvPr/>
-        </p:nvSpPr>
-        <p:spPr>
-          <a:xfrm>
-            <a:off x="4654296" y="4005072"/>
-            <a:ext cx="713232" cy="713232"/>
-          </a:xfrm>
-          <a:prstGeom prst="ellipse">
-            <a:avLst/>
-          </a:prstGeom>
-          <a:solidFill>
-            <a:srgbClr val="E8A33D"/>
-          </a:solidFill>
-          <a:ln/>
-        </p:spPr>
-      </p:sp>
-      <p:pic>
-        <p:nvPicPr>
-          <p:cNvPr id="25" name="Image 4" descr="preencoded.png">    </p:cNvPr>
-          <p:cNvPicPr>
-            <a:picLocks noChangeAspect="1"/>
-          </p:cNvPicPr>
-          <p:nvPr/>
-        </p:nvPicPr>
-        <p:blipFill>
-          <a:blip r:embed="rId5"/>
-          <a:stretch>
-            <a:fillRect/>
-          </a:stretch>
-        </p:blipFill>
-        <p:spPr>
-          <a:xfrm>
-            <a:off x="4839736" y="4190512"/>
-            <a:ext cx="342351" cy="342351"/>
-          </a:xfrm>
-          <a:prstGeom prst="rect">
-            <a:avLst/>
-          </a:prstGeom>
-        </p:spPr>
-      </p:pic>
-      <p:sp>
-        <p:nvSpPr>
-          <p:cNvPr id="26" name="Text 19"/>
-          <p:cNvSpPr/>
-          <p:nvPr/>
-        </p:nvSpPr>
-        <p:spPr>
-          <a:xfrm>
-            <a:off x="5495544" y="4023360"/>
-            <a:ext cx="2377440" cy="685800"/>
-          </a:xfrm>
-          <a:prstGeom prst="rect">
-            <a:avLst/>
-          </a:prstGeom>
-          <a:noFill/>
-          <a:ln/>
-        </p:spPr>
-        <p:txBody>
-          <a:bodyPr wrap="square" lIns="0" tIns="0" rIns="0" bIns="0" rtlCol="0" anchor="ctr"/>
-          <a:lstStyle/>
-          <a:p>
-            <a:pPr indent="0" marL="0">
-              <a:lnSpc>
-                <a:spcPts val="1600"/>
-              </a:lnSpc>
-              <a:buNone/>
-            </a:pPr>
-            <a:r>
-              <a:rPr lang="en-US" sz="1450" b="1" dirty="0">
-                <a:solidFill>
-                  <a:srgbClr val="0B2545"/>
-                </a:solidFill>
-                <a:latin typeface="Calibri" pitchFamily="34" charset="0"/>
-                <a:ea typeface="Calibri" pitchFamily="34" charset="-122"/>
-                <a:cs typeface="Calibri" pitchFamily="34" charset="-120"/>
-              </a:rPr>
-              <a:t>Schema introspection lies</a:t>
-            </a:r>
-            <a:endParaRPr lang="en-US" sz="1450" dirty="0"/>
-          </a:p>
-        </p:txBody>
-      </p:sp>
-      <p:sp>
-        <p:nvSpPr>
-          <p:cNvPr id="27" name="Text 20"/>
-          <p:cNvSpPr/>
-          <p:nvPr/>
-        </p:nvSpPr>
-        <p:spPr>
-          <a:xfrm>
-            <a:off x="4654296" y="4773168"/>
-            <a:ext cx="3145536" cy="1005840"/>
-          </a:xfrm>
-          <a:prstGeom prst="rect">
-            <a:avLst/>
-          </a:prstGeom>
-          <a:noFill/>
-          <a:ln/>
-        </p:spPr>
-        <p:txBody>
-          <a:bodyPr wrap="square" lIns="0" tIns="0" rIns="0" bIns="0" rtlCol="0" anchor="ctr"/>
-          <a:lstStyle/>
-          <a:p>
-            <a:pPr indent="0" marL="0">
-              <a:lnSpc>
-                <a:spcPts val="1450"/>
-              </a:lnSpc>
-              <a:buNone/>
-            </a:pPr>
-            <a:r>
-              <a:rPr lang="en-US" sz="1150" dirty="0">
-                <a:solidFill>
-                  <a:srgbClr val="5B6B7F"/>
-                </a:solidFill>
-                <a:latin typeface="Calibri" pitchFamily="34" charset="0"/>
-                <a:ea typeface="Calibri" pitchFamily="34" charset="-122"/>
-                <a:cs typeface="Calibri" pitchFamily="34" charset="-120"/>
-              </a:rPr>
-              <a:t>"List fields" returned two contradictory lists in one turn. Verify schema via AGO Data → Fields — never the assistant.</a:t>
-            </a:r>
-            <a:endParaRPr lang="en-US" sz="1150" dirty="0"/>
-          </a:p>
-        </p:txBody>
-      </p:sp>
-      <p:sp>
-        <p:nvSpPr>
-          <p:cNvPr id="28" name="Shape 21"/>
-          <p:cNvSpPr/>
-          <p:nvPr/>
-        </p:nvSpPr>
-        <p:spPr>
-          <a:xfrm>
-            <a:off x="8293608" y="3749040"/>
-            <a:ext cx="3657600" cy="2148840"/>
-          </a:xfrm>
-          <a:prstGeom prst="roundRect">
-            <a:avLst>
-              <a:gd name="adj" fmla="val 3404"/>
-            </a:avLst>
-          </a:prstGeom>
-          <a:solidFill>
-            <a:srgbClr val="F4F7FA"/>
-          </a:solidFill>
-          <a:ln/>
-          <a:effectLst>
-            <a:outerShdw sx="100000" sy="100000" kx="0" ky="0" algn="bl" rotWithShape="0" blurRad="88900" dist="38100" dir="5400000">
-              <a:srgbClr val="000000">
-                <a:alpha val="12000"/>
-              </a:srgbClr>
-            </a:outerShdw>
-          </a:effectLst>
-        </p:spPr>
-      </p:sp>
-      <p:sp>
-        <p:nvSpPr>
-          <p:cNvPr id="29" name="Shape 22"/>
-          <p:cNvSpPr/>
-          <p:nvPr/>
-        </p:nvSpPr>
-        <p:spPr>
-          <a:xfrm>
-            <a:off x="8549640" y="4005072"/>
-            <a:ext cx="713232" cy="713232"/>
-          </a:xfrm>
-          <a:prstGeom prst="ellipse">
-            <a:avLst/>
-          </a:prstGeom>
-          <a:solidFill>
-            <a:srgbClr val="E8A33D"/>
-          </a:solidFill>
-          <a:ln/>
-        </p:spPr>
-      </p:sp>
-      <p:pic>
-        <p:nvPicPr>
-          <p:cNvPr id="30" name="Image 5" descr="preencoded.png">    </p:cNvPr>
-          <p:cNvPicPr>
-            <a:picLocks noChangeAspect="1"/>
-          </p:cNvPicPr>
-          <p:nvPr/>
-        </p:nvPicPr>
-        <p:blipFill>
-          <a:blip r:embed="rId6"/>
-          <a:stretch>
-            <a:fillRect/>
-          </a:stretch>
-        </p:blipFill>
-        <p:spPr>
-          <a:xfrm>
-            <a:off x="8735080" y="4190512"/>
-            <a:ext cx="342351" cy="342351"/>
-          </a:xfrm>
-          <a:prstGeom prst="rect">
-            <a:avLst/>
-          </a:prstGeom>
-        </p:spPr>
-      </p:pic>
-      <p:sp>
-        <p:nvSpPr>
-          <p:cNvPr id="31" name="Text 23"/>
-          <p:cNvSpPr/>
-          <p:nvPr/>
-        </p:nvSpPr>
-        <p:spPr>
-          <a:xfrm>
-            <a:off x="9390888" y="4023360"/>
-            <a:ext cx="2377440" cy="685800"/>
-          </a:xfrm>
-          <a:prstGeom prst="rect">
-            <a:avLst/>
-          </a:prstGeom>
-          <a:noFill/>
-          <a:ln/>
-        </p:spPr>
-        <p:txBody>
-          <a:bodyPr wrap="square" lIns="0" tIns="0" rIns="0" bIns="0" rtlCol="0" anchor="ctr"/>
-          <a:lstStyle/>
-          <a:p>
-            <a:pPr indent="0" marL="0">
-              <a:lnSpc>
-                <a:spcPts val="1600"/>
-              </a:lnSpc>
-              <a:buNone/>
-            </a:pPr>
-            <a:r>
-              <a:rPr lang="en-US" sz="1450" b="1" dirty="0">
-                <a:solidFill>
-                  <a:srgbClr val="0B2545"/>
-                </a:solidFill>
-                <a:latin typeface="Calibri" pitchFamily="34" charset="0"/>
-                <a:ea typeface="Calibri" pitchFamily="34" charset="-122"/>
-                <a:cs typeface="Calibri" pitchFamily="34" charset="-120"/>
-              </a:rPr>
-              <a:t>Verify, don't infer</a:t>
-            </a:r>
-            <a:endParaRPr lang="en-US" sz="1450" dirty="0"/>
-          </a:p>
-        </p:txBody>
-      </p:sp>
-      <p:sp>
-        <p:nvSpPr>
-          <p:cNvPr id="32" name="Text 24"/>
-          <p:cNvSpPr/>
-          <p:nvPr/>
-        </p:nvSpPr>
-        <p:spPr>
-          <a:xfrm>
-            <a:off x="8549640" y="4773168"/>
-            <a:ext cx="3145536" cy="1005840"/>
-          </a:xfrm>
-          <a:prstGeom prst="rect">
-            <a:avLst/>
-          </a:prstGeom>
-          <a:noFill/>
-          <a:ln/>
-        </p:spPr>
-        <p:txBody>
-          <a:bodyPr wrap="square" lIns="0" tIns="0" rIns="0" bIns="0" rtlCol="0" anchor="ctr"/>
-          <a:lstStyle/>
-          <a:p>
-            <a:pPr indent="0" marL="0">
-              <a:lnSpc>
-                <a:spcPts val="1450"/>
-              </a:lnSpc>
-              <a:buNone/>
-            </a:pPr>
-            <a:r>
-              <a:rPr lang="en-US" sz="1150" dirty="0">
-                <a:solidFill>
-                  <a:srgbClr val="5B6B7F"/>
-                </a:solidFill>
-                <a:latin typeface="Calibri" pitchFamily="34" charset="0"/>
-                <a:ea typeface="Calibri" pitchFamily="34" charset="-122"/>
-                <a:cs typeface="Calibri" pitchFamily="34" charset="-120"/>
-              </a:rPr>
-              <a:t>Filenames in dist/ aren't docs. We mounted a non-existent agent on a guess. Confirm against developers.arcgis.com.</a:t>
-            </a:r>
-            <a:endParaRPr lang="en-US" sz="1150" dirty="0"/>
-          </a:p>
-        </p:txBody>
-      </p:sp>
-      <p:sp>
-        <p:nvSpPr>
-          <p:cNvPr id="33" name="Text 25"/>
+              <a:rPr lang="en-US" sz="1300" dirty="0">
+                <a:solidFill>
+                  <a:srgbClr val="C9D6E5"/>
+                </a:solidFill>
+                <a:latin typeface="Calibri" pitchFamily="34" charset="0"/>
+                <a:ea typeface="Calibri" pitchFamily="34" charset="-122"/>
+                <a:cs typeface="Calibri" pitchFamily="34" charset="-120"/>
+              </a:rPr>
+              <a:t>www.arcgis.com (generic sign-in)  vs  https://&lt;org-key&gt;.maps.arcgis.com (targets your org → routes SAML members to your IdP).</a:t>
+            </a:r>
+            <a:endParaRPr lang="en-US" sz="1300" dirty="0"/>
+          </a:p>
+        </p:txBody>
+      </p:sp>
+      <p:sp>
+        <p:nvSpPr>
+          <p:cNvPr id="16" name="Text 12"/>
           <p:cNvSpPr/>
           <p:nvPr/>
         </p:nvSpPr>
@@ -8058,7 +8642,7 @@
       </p:sp>
       <p:sp>
         <p:nvSpPr>
-          <p:cNvPr id="34" name="Text 26"/>
+          <p:cNvPr id="17" name="Text 13"/>
           <p:cNvSpPr/>
           <p:nvPr/>
         </p:nvSpPr>
@@ -8136,7 +8720,7 @@
         <p:spPr>
           <a:xfrm>
             <a:off x="502920" y="411480"/>
-            <a:ext cx="11155680" cy="640080"/>
+            <a:ext cx="10972800" cy="640080"/>
           </a:xfrm>
           <a:prstGeom prst="rect">
             <a:avLst/>
@@ -8152,7 +8736,7 @@
               <a:buNone/>
             </a:pPr>
             <a:r>
-              <a:rPr lang="en-US" sz="2800" b="1" dirty="0">
+              <a:rPr lang="en-US" sz="3000" b="1" dirty="0">
                 <a:solidFill>
                   <a:srgbClr val="0B2545"/>
                 </a:solidFill>
@@ -8160,9 +8744,9 @@
                 <a:ea typeface="Bookman Old Style" pitchFamily="34" charset="-122"/>
                 <a:cs typeface="Bookman Old Style" pitchFamily="34" charset="-120"/>
               </a:rPr>
-              <a:t>Prompt engineering: what the OOB agent can do</a:t>
-            </a:r>
-            <a:endParaRPr lang="en-US" sz="2800" dirty="0"/>
+              <a:t>Gotchas that cost us a day</a:t>
+            </a:r>
+            <a:endParaRPr lang="en-US" sz="3000" dirty="0"/>
           </a:p>
         </p:txBody>
       </p:sp>
@@ -8174,16 +8758,16 @@
         </p:nvSpPr>
         <p:spPr>
           <a:xfrm>
-            <a:off x="502920" y="1371600"/>
-            <a:ext cx="5486400" cy="4572000"/>
+            <a:off x="502920" y="1325880"/>
+            <a:ext cx="3657600" cy="2148840"/>
           </a:xfrm>
           <a:prstGeom prst="roundRect">
             <a:avLst>
-              <a:gd name="adj" fmla="val 2000"/>
+              <a:gd name="adj" fmla="val 3404"/>
             </a:avLst>
           </a:prstGeom>
           <a:solidFill>
-            <a:srgbClr val="EAF4EF"/>
+            <a:srgbClr val="F4F7FA"/>
           </a:solidFill>
           <a:ln/>
           <a:effectLst>
@@ -8203,14 +8787,14 @@
         </p:nvSpPr>
         <p:spPr>
           <a:xfrm>
-            <a:off x="822960" y="1645920"/>
-            <a:ext cx="731520" cy="731520"/>
+            <a:off x="758952" y="1581912"/>
+            <a:ext cx="713232" cy="713232"/>
           </a:xfrm>
           <a:prstGeom prst="ellipse">
             <a:avLst/>
           </a:prstGeom>
           <a:solidFill>
-            <a:srgbClr val="2A9D6F"/>
+            <a:srgbClr val="E8A33D"/>
           </a:solidFill>
           <a:ln/>
         </p:spPr>
@@ -8231,8 +8815,8 @@
         </p:blipFill>
         <p:spPr>
           <a:xfrm>
-            <a:off x="1013155" y="1836115"/>
-            <a:ext cx="351130" cy="351130"/>
+            <a:off x="944392" y="1767352"/>
+            <a:ext cx="342351" cy="342351"/>
           </a:xfrm>
           <a:prstGeom prst="rect">
             <a:avLst/>
@@ -8247,8 +8831,8 @@
         </p:nvSpPr>
         <p:spPr>
           <a:xfrm>
-            <a:off x="1691640" y="1645920"/>
-            <a:ext cx="4114800" cy="731520"/>
+            <a:off x="1600200" y="1600200"/>
+            <a:ext cx="2377440" cy="685800"/>
           </a:xfrm>
           <a:prstGeom prst="rect">
             <a:avLst/>
@@ -8261,20 +8845,23 @@
           <a:lstStyle/>
           <a:p>
             <a:pPr indent="0" marL="0">
-              <a:buNone/>
-            </a:pPr>
-            <a:r>
-              <a:rPr lang="en-US" sz="1800" b="1" dirty="0">
-                <a:solidFill>
-                  <a:srgbClr val="2A9D6F"/>
-                </a:solidFill>
-                <a:latin typeface="Calibri" pitchFamily="34" charset="0"/>
-                <a:ea typeface="Calibri" pitchFamily="34" charset="-122"/>
-                <a:cs typeface="Calibri" pitchFamily="34" charset="-120"/>
-              </a:rPr>
-              <a:t>Reliable — demo these</a:t>
-            </a:r>
-            <a:endParaRPr lang="en-US" sz="1800" dirty="0"/>
+              <a:lnSpc>
+                <a:spcPts val="1600"/>
+              </a:lnSpc>
+              <a:buNone/>
+            </a:pPr>
+            <a:r>
+              <a:rPr lang="en-US" sz="1450" b="1" dirty="0">
+                <a:solidFill>
+                  <a:srgbClr val="0B2545"/>
+                </a:solidFill>
+                <a:latin typeface="Calibri" pitchFamily="34" charset="0"/>
+                <a:ea typeface="Calibri" pitchFamily="34" charset="-122"/>
+                <a:cs typeface="Calibri" pitchFamily="34" charset="-120"/>
+              </a:rPr>
+              <a:t>Elements don't auto-register</a:t>
+            </a:r>
+            <a:endParaRPr lang="en-US" sz="1450" dirty="0"/>
           </a:p>
         </p:txBody>
       </p:sp>
@@ -8286,137 +8873,37 @@
         </p:nvSpPr>
         <p:spPr>
           <a:xfrm>
-            <a:off x="868680" y="2651760"/>
-            <a:ext cx="4937760" cy="3108960"/>
-          </a:xfrm>
-          <a:prstGeom prst="rect">
-            <a:avLst/>
-          </a:prstGeom>
-          <a:noFill/>
-          <a:ln/>
-        </p:spPr>
-        <p:txBody>
-          <a:bodyPr wrap="square" lIns="0" tIns="0" rIns="0" bIns="0" rtlCol="0" anchor="ctr"/>
-          <a:lstStyle/>
-          <a:p>
-            <a:pPr marL="342900" indent="-342900">
+            <a:off x="758952" y="2350008"/>
+            <a:ext cx="3145536" cy="1005840"/>
+          </a:xfrm>
+          <a:prstGeom prst="rect">
+            <a:avLst/>
+          </a:prstGeom>
+          <a:noFill/>
+          <a:ln/>
+        </p:spPr>
+        <p:txBody>
+          <a:bodyPr wrap="square" lIns="0" tIns="0" rIns="0" bIns="0" rtlCol="0" anchor="ctr"/>
+          <a:lstStyle/>
+          <a:p>
+            <a:pPr indent="0" marL="0">
               <a:lnSpc>
-                <a:spcPts val="2200"/>
+                <a:spcPts val="1450"/>
               </a:lnSpc>
-              <a:spcAft>
-                <a:spcPts val="1200"/>
-              </a:spcAft>
-              <a:buSzPct val="100000"/>
-              <a:buChar char="•"/>
-            </a:pPr>
-            <a:r>
-              <a:rPr lang="en-US" sz="1350" dirty="0">
-                <a:solidFill>
-                  <a:srgbClr val="1E293B"/>
-                </a:solidFill>
-                <a:latin typeface="Calibri" pitchFamily="34" charset="0"/>
-                <a:ea typeface="Calibri" pitchFamily="34" charset="-122"/>
-                <a:cs typeface="Calibri" pitchFamily="34" charset="-120"/>
-              </a:rPr>
-              <a:t>Attribute filters  ("show the high-priority records")</a:t>
-            </a:r>
-            <a:endParaRPr lang="en-US" sz="1350" dirty="0"/>
-          </a:p>
-          <a:p>
-            <a:pPr marL="342900" indent="-342900">
-              <a:lnSpc>
-                <a:spcPts val="2200"/>
-              </a:lnSpc>
-              <a:spcAft>
-                <a:spcPts val="1200"/>
-              </a:spcAft>
-              <a:buSzPct val="100000"/>
-              <a:buChar char="•"/>
-            </a:pPr>
-            <a:r>
-              <a:rPr lang="en-US" sz="1350" dirty="0">
-                <a:solidFill>
-                  <a:srgbClr val="1E293B"/>
-                </a:solidFill>
-                <a:latin typeface="Calibri" pitchFamily="34" charset="0"/>
-                <a:ea typeface="Calibri" pitchFamily="34" charset="-122"/>
-                <a:cs typeface="Calibri" pitchFamily="34" charset="-120"/>
-              </a:rPr>
-              <a:t>Single-group stats  ("average metric for a group")</a:t>
-            </a:r>
-            <a:endParaRPr lang="en-US" sz="1350" dirty="0"/>
-          </a:p>
-          <a:p>
-            <a:pPr marL="342900" indent="-342900">
-              <a:lnSpc>
-                <a:spcPts val="2200"/>
-              </a:lnSpc>
-              <a:spcAft>
-                <a:spcPts val="1200"/>
-              </a:spcAft>
-              <a:buSzPct val="100000"/>
-              <a:buChar char="•"/>
-            </a:pPr>
-            <a:r>
-              <a:rPr lang="en-US" sz="1350" dirty="0">
-                <a:solidFill>
-                  <a:srgbClr val="1E293B"/>
-                </a:solidFill>
-                <a:latin typeface="Calibri" pitchFamily="34" charset="0"/>
-                <a:ea typeface="Calibri" pitchFamily="34" charset="-122"/>
-                <a:cs typeface="Calibri" pitchFamily="34" charset="-120"/>
-              </a:rPr>
-              <a:t>Multi-attribute combos  (filter on two fields)</a:t>
-            </a:r>
-            <a:endParaRPr lang="en-US" sz="1350" dirty="0"/>
-          </a:p>
-          <a:p>
-            <a:pPr marL="342900" indent="-342900">
-              <a:lnSpc>
-                <a:spcPts val="2200"/>
-              </a:lnSpc>
-              <a:spcAft>
-                <a:spcPts val="1200"/>
-              </a:spcAft>
-              <a:buSzPct val="100000"/>
-              <a:buChar char="•"/>
-            </a:pPr>
-            <a:r>
-              <a:rPr lang="en-US" sz="1350" dirty="0">
-                <a:solidFill>
-                  <a:srgbClr val="1E293B"/>
-                </a:solidFill>
-                <a:latin typeface="Calibri" pitchFamily="34" charset="0"/>
-                <a:ea typeface="Calibri" pitchFamily="34" charset="-122"/>
-                <a:cs typeface="Calibri" pitchFamily="34" charset="-120"/>
-              </a:rPr>
-              <a:t>State / region-scoped cross-layer intersects</a:t>
-            </a:r>
-            <a:endParaRPr lang="en-US" sz="1350" dirty="0"/>
-          </a:p>
-          <a:p>
-            <a:pPr marL="342900" indent="-342900">
-              <a:lnSpc>
-                <a:spcPts val="2200"/>
-              </a:lnSpc>
-              <a:spcAft>
-                <a:spcPts val="1200"/>
-              </a:spcAft>
-              <a:buSzPct val="100000"/>
-              <a:buChar char="•"/>
-            </a:pPr>
-            <a:r>
-              <a:rPr lang="en-US" sz="1350" dirty="0">
-                <a:solidFill>
-                  <a:srgbClr val="1E293B"/>
-                </a:solidFill>
-                <a:latin typeface="Calibri" pitchFamily="34" charset="0"/>
-                <a:ea typeface="Calibri" pitchFamily="34" charset="-122"/>
-                <a:cs typeface="Calibri" pitchFamily="34" charset="-120"/>
-              </a:rPr>
-              <a:t>Pointed, single-subject questions</a:t>
-            </a:r>
-            <a:endParaRPr lang="en-US" sz="1350" dirty="0"/>
+              <a:buNone/>
+            </a:pPr>
+            <a:r>
+              <a:rPr lang="en-US" sz="1150" dirty="0">
+                <a:solidFill>
+                  <a:srgbClr val="5B6B7F"/>
+                </a:solidFill>
+                <a:latin typeface="Calibri" pitchFamily="34" charset="0"/>
+                <a:ea typeface="Calibri" pitchFamily="34" charset="-122"/>
+                <a:cs typeface="Calibri" pitchFamily="34" charset="-120"/>
+              </a:rPr>
+              <a:t>SDK 5.x is Lumina-based. Bare imports do nothing — call defineCustomElements() or you get "Custom element not found."</a:t>
+            </a:r>
+            <a:endParaRPr lang="en-US" sz="1150" dirty="0"/>
           </a:p>
         </p:txBody>
       </p:sp>
@@ -8428,16 +8915,16 @@
         </p:nvSpPr>
         <p:spPr>
           <a:xfrm>
-            <a:off x="6217920" y="1371600"/>
-            <a:ext cx="5486400" cy="4572000"/>
+            <a:off x="4398264" y="1325880"/>
+            <a:ext cx="3657600" cy="2148840"/>
           </a:xfrm>
           <a:prstGeom prst="roundRect">
             <a:avLst>
-              <a:gd name="adj" fmla="val 2000"/>
+              <a:gd name="adj" fmla="val 3404"/>
             </a:avLst>
           </a:prstGeom>
           <a:solidFill>
-            <a:srgbClr val="FBEDEC"/>
+            <a:srgbClr val="F4F7FA"/>
           </a:solidFill>
           <a:ln/>
           <a:effectLst>
@@ -8457,14 +8944,14 @@
         </p:nvSpPr>
         <p:spPr>
           <a:xfrm>
-            <a:off x="6537960" y="1645920"/>
-            <a:ext cx="731520" cy="731520"/>
+            <a:off x="4654296" y="1581912"/>
+            <a:ext cx="713232" cy="713232"/>
           </a:xfrm>
           <a:prstGeom prst="ellipse">
             <a:avLst/>
           </a:prstGeom>
           <a:solidFill>
-            <a:srgbClr val="C24A45"/>
+            <a:srgbClr val="E8A33D"/>
           </a:solidFill>
           <a:ln/>
         </p:spPr>
@@ -8485,8 +8972,8 @@
         </p:blipFill>
         <p:spPr>
           <a:xfrm>
-            <a:off x="6728155" y="1836115"/>
-            <a:ext cx="351130" cy="351130"/>
+            <a:off x="4839736" y="1767352"/>
+            <a:ext cx="342351" cy="342351"/>
           </a:xfrm>
           <a:prstGeom prst="rect">
             <a:avLst/>
@@ -8501,8 +8988,8 @@
         </p:nvSpPr>
         <p:spPr>
           <a:xfrm>
-            <a:off x="7406640" y="1645920"/>
-            <a:ext cx="4114800" cy="731520"/>
+            <a:off x="5495544" y="1600200"/>
+            <a:ext cx="2377440" cy="685800"/>
           </a:xfrm>
           <a:prstGeom prst="rect">
             <a:avLst/>
@@ -8515,20 +9002,23 @@
           <a:lstStyle/>
           <a:p>
             <a:pPr indent="0" marL="0">
-              <a:buNone/>
-            </a:pPr>
-            <a:r>
-              <a:rPr lang="en-US" sz="1800" b="1" dirty="0">
-                <a:solidFill>
-                  <a:srgbClr val="C24A45"/>
-                </a:solidFill>
-                <a:latin typeface="Calibri" pitchFamily="34" charset="0"/>
-                <a:ea typeface="Calibri" pitchFamily="34" charset="-122"/>
-                <a:cs typeface="Calibri" pitchFamily="34" charset="-120"/>
-              </a:rPr>
-              <a:t>Fails / degrades — keep out</a:t>
-            </a:r>
-            <a:endParaRPr lang="en-US" sz="1800" dirty="0"/>
+              <a:lnSpc>
+                <a:spcPts val="1600"/>
+              </a:lnSpc>
+              <a:buNone/>
+            </a:pPr>
+            <a:r>
+              <a:rPr lang="en-US" sz="1450" b="1" dirty="0">
+                <a:solidFill>
+                  <a:srgbClr val="0B2545"/>
+                </a:solidFill>
+                <a:latin typeface="Calibri" pitchFamily="34" charset="0"/>
+                <a:ea typeface="Calibri" pitchFamily="34" charset="-122"/>
+                <a:cs typeface="Calibri" pitchFamily="34" charset="-120"/>
+              </a:rPr>
+              <a:t>No ai-components-react</a:t>
+            </a:r>
+            <a:endParaRPr lang="en-US" sz="1450" dirty="0"/>
           </a:p>
         </p:txBody>
       </p:sp>
@@ -8540,143 +9030,671 @@
         </p:nvSpPr>
         <p:spPr>
           <a:xfrm>
-            <a:off x="6583680" y="2651760"/>
-            <a:ext cx="4937760" cy="3108960"/>
-          </a:xfrm>
-          <a:prstGeom prst="rect">
-            <a:avLst/>
-          </a:prstGeom>
-          <a:noFill/>
-          <a:ln/>
-        </p:spPr>
-        <p:txBody>
-          <a:bodyPr wrap="square" lIns="0" tIns="0" rIns="0" bIns="0" rtlCol="0" anchor="ctr"/>
-          <a:lstStyle/>
-          <a:p>
-            <a:pPr marL="342900" indent="-342900">
+            <a:off x="4654296" y="2350008"/>
+            <a:ext cx="3145536" cy="1005840"/>
+          </a:xfrm>
+          <a:prstGeom prst="rect">
+            <a:avLst/>
+          </a:prstGeom>
+          <a:noFill/>
+          <a:ln/>
+        </p:spPr>
+        <p:txBody>
+          <a:bodyPr wrap="square" lIns="0" tIns="0" rIns="0" bIns="0" rtlCol="0" anchor="ctr"/>
+          <a:lstStyle/>
+          <a:p>
+            <a:pPr indent="0" marL="0">
               <a:lnSpc>
-                <a:spcPts val="2200"/>
+                <a:spcPts val="1450"/>
               </a:lnSpc>
-              <a:spcAft>
-                <a:spcPts val="1200"/>
-              </a:spcAft>
-              <a:buSzPct val="100000"/>
-              <a:buChar char="•"/>
-            </a:pPr>
-            <a:r>
-              <a:rPr lang="en-US" sz="1350" dirty="0">
-                <a:solidFill>
-                  <a:srgbClr val="1E293B"/>
-                </a:solidFill>
-                <a:latin typeface="Calibri" pitchFamily="34" charset="0"/>
-                <a:ea typeface="Calibri" pitchFamily="34" charset="-122"/>
-                <a:cs typeface="Calibri" pitchFamily="34" charset="-120"/>
-              </a:rPr>
-              <a:t>Schema introspection  ("list fields") — hallucinates</a:t>
-            </a:r>
-            <a:endParaRPr lang="en-US" sz="1350" dirty="0"/>
-          </a:p>
-          <a:p>
-            <a:pPr marL="342900" indent="-342900">
+              <a:buNone/>
+            </a:pPr>
+            <a:r>
+              <a:rPr lang="en-US" sz="1150" dirty="0">
+                <a:solidFill>
+                  <a:srgbClr val="5B6B7F"/>
+                </a:solidFill>
+                <a:latin typeface="Calibri" pitchFamily="34" charset="0"/>
+                <a:ea typeface="Calibri" pitchFamily="34" charset="-122"/>
+                <a:cs typeface="Calibri" pitchFamily="34" charset="-120"/>
+              </a:rPr>
+              <a:t>AI components ship as raw web components only. Declare the tags in vite-env.d.ts; set props imperatively via refs.</a:t>
+            </a:r>
+            <a:endParaRPr lang="en-US" sz="1150" dirty="0"/>
+          </a:p>
+        </p:txBody>
+      </p:sp>
+      <p:sp>
+        <p:nvSpPr>
+          <p:cNvPr id="13" name="Shape 9"/>
+          <p:cNvSpPr/>
+          <p:nvPr/>
+        </p:nvSpPr>
+        <p:spPr>
+          <a:xfrm>
+            <a:off x="8293608" y="1325880"/>
+            <a:ext cx="3657600" cy="2148840"/>
+          </a:xfrm>
+          <a:prstGeom prst="roundRect">
+            <a:avLst>
+              <a:gd name="adj" fmla="val 3404"/>
+            </a:avLst>
+          </a:prstGeom>
+          <a:solidFill>
+            <a:srgbClr val="F4F7FA"/>
+          </a:solidFill>
+          <a:ln/>
+          <a:effectLst>
+            <a:outerShdw sx="100000" sy="100000" kx="0" ky="0" algn="bl" rotWithShape="0" blurRad="88900" dist="38100" dir="5400000">
+              <a:srgbClr val="000000">
+                <a:alpha val="12000"/>
+              </a:srgbClr>
+            </a:outerShdw>
+          </a:effectLst>
+        </p:spPr>
+      </p:sp>
+      <p:sp>
+        <p:nvSpPr>
+          <p:cNvPr id="14" name="Shape 10"/>
+          <p:cNvSpPr/>
+          <p:nvPr/>
+        </p:nvSpPr>
+        <p:spPr>
+          <a:xfrm>
+            <a:off x="8549640" y="1581912"/>
+            <a:ext cx="713232" cy="713232"/>
+          </a:xfrm>
+          <a:prstGeom prst="ellipse">
+            <a:avLst/>
+          </a:prstGeom>
+          <a:solidFill>
+            <a:srgbClr val="E8A33D"/>
+          </a:solidFill>
+          <a:ln/>
+        </p:spPr>
+      </p:sp>
+      <p:pic>
+        <p:nvPicPr>
+          <p:cNvPr id="15" name="Image 2" descr="preencoded.png">    </p:cNvPr>
+          <p:cNvPicPr>
+            <a:picLocks noChangeAspect="1"/>
+          </p:cNvPicPr>
+          <p:nvPr/>
+        </p:nvPicPr>
+        <p:blipFill>
+          <a:blip r:embed="rId3"/>
+          <a:stretch>
+            <a:fillRect/>
+          </a:stretch>
+        </p:blipFill>
+        <p:spPr>
+          <a:xfrm>
+            <a:off x="8735080" y="1767352"/>
+            <a:ext cx="342351" cy="342351"/>
+          </a:xfrm>
+          <a:prstGeom prst="rect">
+            <a:avLst/>
+          </a:prstGeom>
+        </p:spPr>
+      </p:pic>
+      <p:sp>
+        <p:nvSpPr>
+          <p:cNvPr id="16" name="Text 11"/>
+          <p:cNvSpPr/>
+          <p:nvPr/>
+        </p:nvSpPr>
+        <p:spPr>
+          <a:xfrm>
+            <a:off x="9390888" y="1600200"/>
+            <a:ext cx="2377440" cy="685800"/>
+          </a:xfrm>
+          <a:prstGeom prst="rect">
+            <a:avLst/>
+          </a:prstGeom>
+          <a:noFill/>
+          <a:ln/>
+        </p:spPr>
+        <p:txBody>
+          <a:bodyPr wrap="square" lIns="0" tIns="0" rIns="0" bIns="0" rtlCol="0" anchor="ctr"/>
+          <a:lstStyle/>
+          <a:p>
+            <a:pPr indent="0" marL="0">
               <a:lnSpc>
-                <a:spcPts val="2200"/>
+                <a:spcPts val="1600"/>
               </a:lnSpc>
-              <a:spcAft>
-                <a:spcPts val="1200"/>
-              </a:spcAft>
-              <a:buSzPct val="100000"/>
-              <a:buChar char="•"/>
-            </a:pPr>
-            <a:r>
-              <a:rPr lang="en-US" sz="1350" dirty="0">
-                <a:solidFill>
-                  <a:srgbClr val="1E293B"/>
-                </a:solidFill>
-                <a:latin typeface="Calibri" pitchFamily="34" charset="0"/>
-                <a:ea typeface="Calibri" pitchFamily="34" charset="-122"/>
-                <a:cs typeface="Calibri" pitchFamily="34" charset="-120"/>
-              </a:rPr>
-              <a:t>Cross-category comparison — silently degrades</a:t>
-            </a:r>
-            <a:endParaRPr lang="en-US" sz="1350" dirty="0"/>
-          </a:p>
-          <a:p>
-            <a:pPr marL="342900" indent="-342900">
+              <a:buNone/>
+            </a:pPr>
+            <a:r>
+              <a:rPr lang="en-US" sz="1450" b="1" dirty="0">
+                <a:solidFill>
+                  <a:srgbClr val="0B2545"/>
+                </a:solidFill>
+                <a:latin typeface="Calibri" pitchFamily="34" charset="0"/>
+                <a:ea typeface="Calibri" pitchFamily="34" charset="-122"/>
+                <a:cs typeface="Calibri" pitchFamily="34" charset="-120"/>
+              </a:rPr>
+              <a:t>Embeddings 504 ≠ CORS</a:t>
+            </a:r>
+            <a:endParaRPr lang="en-US" sz="1450" dirty="0"/>
+          </a:p>
+        </p:txBody>
+      </p:sp>
+      <p:sp>
+        <p:nvSpPr>
+          <p:cNvPr id="17" name="Text 12"/>
+          <p:cNvSpPr/>
+          <p:nvPr/>
+        </p:nvSpPr>
+        <p:spPr>
+          <a:xfrm>
+            <a:off x="8549640" y="2350008"/>
+            <a:ext cx="3145536" cy="1005840"/>
+          </a:xfrm>
+          <a:prstGeom prst="rect">
+            <a:avLst/>
+          </a:prstGeom>
+          <a:noFill/>
+          <a:ln/>
+        </p:spPr>
+        <p:txBody>
+          <a:bodyPr wrap="square" lIns="0" tIns="0" rIns="0" bIns="0" rtlCol="0" anchor="ctr"/>
+          <a:lstStyle/>
+          <a:p>
+            <a:pPr indent="0" marL="0">
               <a:lnSpc>
-                <a:spcPts val="2200"/>
+                <a:spcPts val="1450"/>
               </a:lnSpc>
-              <a:spcAft>
-                <a:spcPts val="1200"/>
-              </a:spcAft>
-              <a:buSzPct val="100000"/>
-              <a:buChar char="•"/>
-            </a:pPr>
-            <a:r>
-              <a:rPr lang="en-US" sz="1350" dirty="0">
-                <a:solidFill>
-                  <a:srgbClr val="1E293B"/>
-                </a:solidFill>
-                <a:latin typeface="Calibri" pitchFamily="34" charset="0"/>
-                <a:ea typeface="Calibri" pitchFamily="34" charset="-122"/>
-                <a:cs typeface="Calibri" pitchFamily="34" charset="-120"/>
-              </a:rPr>
-              <a:t>Unbounded cross-layer  — 413 error</a:t>
-            </a:r>
-            <a:endParaRPr lang="en-US" sz="1350" dirty="0"/>
-          </a:p>
-          <a:p>
-            <a:pPr marL="342900" indent="-342900">
+              <a:buNone/>
+            </a:pPr>
+            <a:r>
+              <a:rPr lang="en-US" sz="1150" dirty="0">
+                <a:solidFill>
+                  <a:srgbClr val="5B6B7F"/>
+                </a:solidFill>
+                <a:latin typeface="Calibri" pitchFamily="34" charset="0"/>
+                <a:ea typeface="Calibri" pitchFamily="34" charset="-122"/>
+                <a:cs typeface="Calibri" pitchFamily="34" charset="-120"/>
+              </a:rPr>
+              <a:t>Generic error looks like CORS but is a 504 timeout. Wide-schema reference layers trigger it; narrow ones succeed.</a:t>
+            </a:r>
+            <a:endParaRPr lang="en-US" sz="1150" dirty="0"/>
+          </a:p>
+        </p:txBody>
+      </p:sp>
+      <p:sp>
+        <p:nvSpPr>
+          <p:cNvPr id="18" name="Shape 13"/>
+          <p:cNvSpPr/>
+          <p:nvPr/>
+        </p:nvSpPr>
+        <p:spPr>
+          <a:xfrm>
+            <a:off x="502920" y="3749040"/>
+            <a:ext cx="3657600" cy="2148840"/>
+          </a:xfrm>
+          <a:prstGeom prst="roundRect">
+            <a:avLst>
+              <a:gd name="adj" fmla="val 3404"/>
+            </a:avLst>
+          </a:prstGeom>
+          <a:solidFill>
+            <a:srgbClr val="F4F7FA"/>
+          </a:solidFill>
+          <a:ln/>
+          <a:effectLst>
+            <a:outerShdw sx="100000" sy="100000" kx="0" ky="0" algn="bl" rotWithShape="0" blurRad="88900" dist="38100" dir="5400000">
+              <a:srgbClr val="000000">
+                <a:alpha val="12000"/>
+              </a:srgbClr>
+            </a:outerShdw>
+          </a:effectLst>
+        </p:spPr>
+      </p:sp>
+      <p:sp>
+        <p:nvSpPr>
+          <p:cNvPr id="19" name="Shape 14"/>
+          <p:cNvSpPr/>
+          <p:nvPr/>
+        </p:nvSpPr>
+        <p:spPr>
+          <a:xfrm>
+            <a:off x="758952" y="4005072"/>
+            <a:ext cx="713232" cy="713232"/>
+          </a:xfrm>
+          <a:prstGeom prst="ellipse">
+            <a:avLst/>
+          </a:prstGeom>
+          <a:solidFill>
+            <a:srgbClr val="E8A33D"/>
+          </a:solidFill>
+          <a:ln/>
+        </p:spPr>
+      </p:sp>
+      <p:pic>
+        <p:nvPicPr>
+          <p:cNvPr id="20" name="Image 3" descr="preencoded.png">    </p:cNvPr>
+          <p:cNvPicPr>
+            <a:picLocks noChangeAspect="1"/>
+          </p:cNvPicPr>
+          <p:nvPr/>
+        </p:nvPicPr>
+        <p:blipFill>
+          <a:blip r:embed="rId4"/>
+          <a:stretch>
+            <a:fillRect/>
+          </a:stretch>
+        </p:blipFill>
+        <p:spPr>
+          <a:xfrm>
+            <a:off x="944392" y="4190512"/>
+            <a:ext cx="342351" cy="342351"/>
+          </a:xfrm>
+          <a:prstGeom prst="rect">
+            <a:avLst/>
+          </a:prstGeom>
+        </p:spPr>
+      </p:pic>
+      <p:sp>
+        <p:nvSpPr>
+          <p:cNvPr id="21" name="Text 15"/>
+          <p:cNvSpPr/>
+          <p:nvPr/>
+        </p:nvSpPr>
+        <p:spPr>
+          <a:xfrm>
+            <a:off x="1600200" y="4023360"/>
+            <a:ext cx="2377440" cy="685800"/>
+          </a:xfrm>
+          <a:prstGeom prst="rect">
+            <a:avLst/>
+          </a:prstGeom>
+          <a:noFill/>
+          <a:ln/>
+        </p:spPr>
+        <p:txBody>
+          <a:bodyPr wrap="square" lIns="0" tIns="0" rIns="0" bIns="0" rtlCol="0" anchor="ctr"/>
+          <a:lstStyle/>
+          <a:p>
+            <a:pPr indent="0" marL="0">
               <a:lnSpc>
-                <a:spcPts val="2200"/>
+                <a:spcPts val="1600"/>
               </a:lnSpc>
-              <a:spcAft>
-                <a:spcPts val="1200"/>
-              </a:spcAft>
-              <a:buSzPct val="100000"/>
-              <a:buChar char="•"/>
-            </a:pPr>
-            <a:r>
-              <a:rPr lang="en-US" sz="1350" dirty="0">
-                <a:solidFill>
-                  <a:srgbClr val="1E293B"/>
-                </a:solidFill>
-                <a:latin typeface="Calibri" pitchFamily="34" charset="0"/>
-                <a:ea typeface="Calibri" pitchFamily="34" charset="-122"/>
-                <a:cs typeface="Calibri" pitchFamily="34" charset="-120"/>
-              </a:rPr>
-              <a:t>Broad sweeps  (vague, unscoped questions)</a:t>
-            </a:r>
-            <a:endParaRPr lang="en-US" sz="1350" dirty="0"/>
-          </a:p>
-          <a:p>
-            <a:pPr marL="342900" indent="-342900">
+              <a:buNone/>
+            </a:pPr>
+            <a:r>
+              <a:rPr lang="en-US" sz="1450" b="1" dirty="0">
+                <a:solidFill>
+                  <a:srgbClr val="0B2545"/>
+                </a:solidFill>
+                <a:latin typeface="Calibri" pitchFamily="34" charset="0"/>
+                <a:ea typeface="Calibri" pitchFamily="34" charset="-122"/>
+                <a:cs typeface="Calibri" pitchFamily="34" charset="-120"/>
+              </a:rPr>
+              <a:t>Cross-layer 413</a:t>
+            </a:r>
+            <a:endParaRPr lang="en-US" sz="1450" dirty="0"/>
+          </a:p>
+        </p:txBody>
+      </p:sp>
+      <p:sp>
+        <p:nvSpPr>
+          <p:cNvPr id="22" name="Text 16"/>
+          <p:cNvSpPr/>
+          <p:nvPr/>
+        </p:nvSpPr>
+        <p:spPr>
+          <a:xfrm>
+            <a:off x="758952" y="4773168"/>
+            <a:ext cx="3145536" cy="1005840"/>
+          </a:xfrm>
+          <a:prstGeom prst="rect">
+            <a:avLst/>
+          </a:prstGeom>
+          <a:noFill/>
+          <a:ln/>
+        </p:spPr>
+        <p:txBody>
+          <a:bodyPr wrap="square" lIns="0" tIns="0" rIns="0" bIns="0" rtlCol="0" anchor="ctr"/>
+          <a:lstStyle/>
+          <a:p>
+            <a:pPr indent="0" marL="0">
               <a:lnSpc>
-                <a:spcPts val="2200"/>
+                <a:spcPts val="1450"/>
               </a:lnSpc>
-              <a:spcAft>
-                <a:spcPts val="1200"/>
-              </a:spcAft>
-              <a:buSzPct val="100000"/>
-              <a:buChar char="•"/>
-            </a:pPr>
-            <a:r>
-              <a:rPr lang="en-US" sz="1350" dirty="0">
-                <a:solidFill>
-                  <a:srgbClr val="1E293B"/>
-                </a:solidFill>
-                <a:latin typeface="Calibri" pitchFamily="34" charset="0"/>
-                <a:ea typeface="Calibri" pitchFamily="34" charset="-122"/>
-                <a:cs typeface="Calibri" pitchFamily="34" charset="-120"/>
-              </a:rPr>
-              <a:t>Charts · forecasts · email · user location</a:t>
-            </a:r>
-            <a:endParaRPr lang="en-US" sz="1350" dirty="0"/>
-          </a:p>
-        </p:txBody>
-      </p:sp>
-      <p:sp>
-        <p:nvSpPr>
-          <p:cNvPr id="13" name="Text 9"/>
+              <a:buNone/>
+            </a:pPr>
+            <a:r>
+              <a:rPr lang="en-US" sz="1150" dirty="0">
+                <a:solidFill>
+                  <a:srgbClr val="5B6B7F"/>
+                </a:solidFill>
+                <a:latin typeface="Calibri" pitchFamily="34" charset="0"/>
+                <a:ea typeface="Calibri" pitchFamily="34" charset="-122"/>
+                <a:cs typeface="Calibri" pitchFamily="34" charset="-120"/>
+              </a:rPr>
+              <a:t>OOB agent submits national polygons as a spatial filter → 413. Fix: state-scope the prompt or pre-compute the attribute.</a:t>
+            </a:r>
+            <a:endParaRPr lang="en-US" sz="1150" dirty="0"/>
+          </a:p>
+        </p:txBody>
+      </p:sp>
+      <p:sp>
+        <p:nvSpPr>
+          <p:cNvPr id="23" name="Shape 17"/>
+          <p:cNvSpPr/>
+          <p:nvPr/>
+        </p:nvSpPr>
+        <p:spPr>
+          <a:xfrm>
+            <a:off x="4398264" y="3749040"/>
+            <a:ext cx="3657600" cy="2148840"/>
+          </a:xfrm>
+          <a:prstGeom prst="roundRect">
+            <a:avLst>
+              <a:gd name="adj" fmla="val 3404"/>
+            </a:avLst>
+          </a:prstGeom>
+          <a:solidFill>
+            <a:srgbClr val="F4F7FA"/>
+          </a:solidFill>
+          <a:ln/>
+          <a:effectLst>
+            <a:outerShdw sx="100000" sy="100000" kx="0" ky="0" algn="bl" rotWithShape="0" blurRad="88900" dist="38100" dir="5400000">
+              <a:srgbClr val="000000">
+                <a:alpha val="12000"/>
+              </a:srgbClr>
+            </a:outerShdw>
+          </a:effectLst>
+        </p:spPr>
+      </p:sp>
+      <p:sp>
+        <p:nvSpPr>
+          <p:cNvPr id="24" name="Shape 18"/>
+          <p:cNvSpPr/>
+          <p:nvPr/>
+        </p:nvSpPr>
+        <p:spPr>
+          <a:xfrm>
+            <a:off x="4654296" y="4005072"/>
+            <a:ext cx="713232" cy="713232"/>
+          </a:xfrm>
+          <a:prstGeom prst="ellipse">
+            <a:avLst/>
+          </a:prstGeom>
+          <a:solidFill>
+            <a:srgbClr val="E8A33D"/>
+          </a:solidFill>
+          <a:ln/>
+        </p:spPr>
+      </p:sp>
+      <p:pic>
+        <p:nvPicPr>
+          <p:cNvPr id="25" name="Image 4" descr="preencoded.png">    </p:cNvPr>
+          <p:cNvPicPr>
+            <a:picLocks noChangeAspect="1"/>
+          </p:cNvPicPr>
+          <p:nvPr/>
+        </p:nvPicPr>
+        <p:blipFill>
+          <a:blip r:embed="rId5"/>
+          <a:stretch>
+            <a:fillRect/>
+          </a:stretch>
+        </p:blipFill>
+        <p:spPr>
+          <a:xfrm>
+            <a:off x="4839736" y="4190512"/>
+            <a:ext cx="342351" cy="342351"/>
+          </a:xfrm>
+          <a:prstGeom prst="rect">
+            <a:avLst/>
+          </a:prstGeom>
+        </p:spPr>
+      </p:pic>
+      <p:sp>
+        <p:nvSpPr>
+          <p:cNvPr id="26" name="Text 19"/>
+          <p:cNvSpPr/>
+          <p:nvPr/>
+        </p:nvSpPr>
+        <p:spPr>
+          <a:xfrm>
+            <a:off x="5495544" y="4023360"/>
+            <a:ext cx="2377440" cy="685800"/>
+          </a:xfrm>
+          <a:prstGeom prst="rect">
+            <a:avLst/>
+          </a:prstGeom>
+          <a:noFill/>
+          <a:ln/>
+        </p:spPr>
+        <p:txBody>
+          <a:bodyPr wrap="square" lIns="0" tIns="0" rIns="0" bIns="0" rtlCol="0" anchor="ctr"/>
+          <a:lstStyle/>
+          <a:p>
+            <a:pPr indent="0" marL="0">
+              <a:lnSpc>
+                <a:spcPts val="1600"/>
+              </a:lnSpc>
+              <a:buNone/>
+            </a:pPr>
+            <a:r>
+              <a:rPr lang="en-US" sz="1450" b="1" dirty="0">
+                <a:solidFill>
+                  <a:srgbClr val="0B2545"/>
+                </a:solidFill>
+                <a:latin typeface="Calibri" pitchFamily="34" charset="0"/>
+                <a:ea typeface="Calibri" pitchFamily="34" charset="-122"/>
+                <a:cs typeface="Calibri" pitchFamily="34" charset="-120"/>
+              </a:rPr>
+              <a:t>Schema introspection lies</a:t>
+            </a:r>
+            <a:endParaRPr lang="en-US" sz="1450" dirty="0"/>
+          </a:p>
+        </p:txBody>
+      </p:sp>
+      <p:sp>
+        <p:nvSpPr>
+          <p:cNvPr id="27" name="Text 20"/>
+          <p:cNvSpPr/>
+          <p:nvPr/>
+        </p:nvSpPr>
+        <p:spPr>
+          <a:xfrm>
+            <a:off x="4654296" y="4773168"/>
+            <a:ext cx="3145536" cy="1005840"/>
+          </a:xfrm>
+          <a:prstGeom prst="rect">
+            <a:avLst/>
+          </a:prstGeom>
+          <a:noFill/>
+          <a:ln/>
+        </p:spPr>
+        <p:txBody>
+          <a:bodyPr wrap="square" lIns="0" tIns="0" rIns="0" bIns="0" rtlCol="0" anchor="ctr"/>
+          <a:lstStyle/>
+          <a:p>
+            <a:pPr indent="0" marL="0">
+              <a:lnSpc>
+                <a:spcPts val="1450"/>
+              </a:lnSpc>
+              <a:buNone/>
+            </a:pPr>
+            <a:r>
+              <a:rPr lang="en-US" sz="1150" dirty="0">
+                <a:solidFill>
+                  <a:srgbClr val="5B6B7F"/>
+                </a:solidFill>
+                <a:latin typeface="Calibri" pitchFamily="34" charset="0"/>
+                <a:ea typeface="Calibri" pitchFamily="34" charset="-122"/>
+                <a:cs typeface="Calibri" pitchFamily="34" charset="-120"/>
+              </a:rPr>
+              <a:t>"List fields" returned two contradictory lists in one turn. Verify schema via AGO Data → Fields — never the assistant.</a:t>
+            </a:r>
+            <a:endParaRPr lang="en-US" sz="1150" dirty="0"/>
+          </a:p>
+        </p:txBody>
+      </p:sp>
+      <p:sp>
+        <p:nvSpPr>
+          <p:cNvPr id="28" name="Shape 21"/>
+          <p:cNvSpPr/>
+          <p:nvPr/>
+        </p:nvSpPr>
+        <p:spPr>
+          <a:xfrm>
+            <a:off x="8293608" y="3749040"/>
+            <a:ext cx="3657600" cy="2148840"/>
+          </a:xfrm>
+          <a:prstGeom prst="roundRect">
+            <a:avLst>
+              <a:gd name="adj" fmla="val 3404"/>
+            </a:avLst>
+          </a:prstGeom>
+          <a:solidFill>
+            <a:srgbClr val="F4F7FA"/>
+          </a:solidFill>
+          <a:ln/>
+          <a:effectLst>
+            <a:outerShdw sx="100000" sy="100000" kx="0" ky="0" algn="bl" rotWithShape="0" blurRad="88900" dist="38100" dir="5400000">
+              <a:srgbClr val="000000">
+                <a:alpha val="12000"/>
+              </a:srgbClr>
+            </a:outerShdw>
+          </a:effectLst>
+        </p:spPr>
+      </p:sp>
+      <p:sp>
+        <p:nvSpPr>
+          <p:cNvPr id="29" name="Shape 22"/>
+          <p:cNvSpPr/>
+          <p:nvPr/>
+        </p:nvSpPr>
+        <p:spPr>
+          <a:xfrm>
+            <a:off x="8549640" y="4005072"/>
+            <a:ext cx="713232" cy="713232"/>
+          </a:xfrm>
+          <a:prstGeom prst="ellipse">
+            <a:avLst/>
+          </a:prstGeom>
+          <a:solidFill>
+            <a:srgbClr val="E8A33D"/>
+          </a:solidFill>
+          <a:ln/>
+        </p:spPr>
+      </p:sp>
+      <p:pic>
+        <p:nvPicPr>
+          <p:cNvPr id="30" name="Image 5" descr="preencoded.png">    </p:cNvPr>
+          <p:cNvPicPr>
+            <a:picLocks noChangeAspect="1"/>
+          </p:cNvPicPr>
+          <p:nvPr/>
+        </p:nvPicPr>
+        <p:blipFill>
+          <a:blip r:embed="rId6"/>
+          <a:stretch>
+            <a:fillRect/>
+          </a:stretch>
+        </p:blipFill>
+        <p:spPr>
+          <a:xfrm>
+            <a:off x="8735080" y="4190512"/>
+            <a:ext cx="342351" cy="342351"/>
+          </a:xfrm>
+          <a:prstGeom prst="rect">
+            <a:avLst/>
+          </a:prstGeom>
+        </p:spPr>
+      </p:pic>
+      <p:sp>
+        <p:nvSpPr>
+          <p:cNvPr id="31" name="Text 23"/>
+          <p:cNvSpPr/>
+          <p:nvPr/>
+        </p:nvSpPr>
+        <p:spPr>
+          <a:xfrm>
+            <a:off x="9390888" y="4023360"/>
+            <a:ext cx="2377440" cy="685800"/>
+          </a:xfrm>
+          <a:prstGeom prst="rect">
+            <a:avLst/>
+          </a:prstGeom>
+          <a:noFill/>
+          <a:ln/>
+        </p:spPr>
+        <p:txBody>
+          <a:bodyPr wrap="square" lIns="0" tIns="0" rIns="0" bIns="0" rtlCol="0" anchor="ctr"/>
+          <a:lstStyle/>
+          <a:p>
+            <a:pPr indent="0" marL="0">
+              <a:lnSpc>
+                <a:spcPts val="1600"/>
+              </a:lnSpc>
+              <a:buNone/>
+            </a:pPr>
+            <a:r>
+              <a:rPr lang="en-US" sz="1450" b="1" dirty="0">
+                <a:solidFill>
+                  <a:srgbClr val="0B2545"/>
+                </a:solidFill>
+                <a:latin typeface="Calibri" pitchFamily="34" charset="0"/>
+                <a:ea typeface="Calibri" pitchFamily="34" charset="-122"/>
+                <a:cs typeface="Calibri" pitchFamily="34" charset="-120"/>
+              </a:rPr>
+              <a:t>Verify, don't infer</a:t>
+            </a:r>
+            <a:endParaRPr lang="en-US" sz="1450" dirty="0"/>
+          </a:p>
+        </p:txBody>
+      </p:sp>
+      <p:sp>
+        <p:nvSpPr>
+          <p:cNvPr id="32" name="Text 24"/>
+          <p:cNvSpPr/>
+          <p:nvPr/>
+        </p:nvSpPr>
+        <p:spPr>
+          <a:xfrm>
+            <a:off x="8549640" y="4773168"/>
+            <a:ext cx="3145536" cy="1005840"/>
+          </a:xfrm>
+          <a:prstGeom prst="rect">
+            <a:avLst/>
+          </a:prstGeom>
+          <a:noFill/>
+          <a:ln/>
+        </p:spPr>
+        <p:txBody>
+          <a:bodyPr wrap="square" lIns="0" tIns="0" rIns="0" bIns="0" rtlCol="0" anchor="ctr"/>
+          <a:lstStyle/>
+          <a:p>
+            <a:pPr indent="0" marL="0">
+              <a:lnSpc>
+                <a:spcPts val="1450"/>
+              </a:lnSpc>
+              <a:buNone/>
+            </a:pPr>
+            <a:r>
+              <a:rPr lang="en-US" sz="1150" dirty="0">
+                <a:solidFill>
+                  <a:srgbClr val="5B6B7F"/>
+                </a:solidFill>
+                <a:latin typeface="Calibri" pitchFamily="34" charset="0"/>
+                <a:ea typeface="Calibri" pitchFamily="34" charset="-122"/>
+                <a:cs typeface="Calibri" pitchFamily="34" charset="-120"/>
+              </a:rPr>
+              <a:t>Filenames in dist/ aren't docs. We mounted a non-existent agent on a guess. Confirm against developers.arcgis.com.</a:t>
+            </a:r>
+            <a:endParaRPr lang="en-US" sz="1150" dirty="0"/>
+          </a:p>
+        </p:txBody>
+      </p:sp>
+      <p:sp>
+        <p:nvSpPr>
+          <p:cNvPr id="33" name="Text 25"/>
           <p:cNvSpPr/>
           <p:nvPr/>
         </p:nvSpPr>
@@ -8715,7 +9733,7 @@
       </p:sp>
       <p:sp>
         <p:nvSpPr>
-          <p:cNvPr id="14" name="Text 10"/>
+          <p:cNvPr id="34" name="Text 26"/>
           <p:cNvSpPr/>
           <p:nvPr/>
         </p:nvSpPr>
@@ -8809,7 +9827,7 @@
               <a:buNone/>
             </a:pPr>
             <a:r>
-              <a:rPr lang="en-US" sz="3000" b="1" dirty="0">
+              <a:rPr lang="en-US" sz="2800" b="1" dirty="0">
                 <a:solidFill>
                   <a:srgbClr val="0B2545"/>
                 </a:solidFill>
@@ -8817,69 +9835,30 @@
                 <a:ea typeface="Bookman Old Style" pitchFamily="34" charset="-122"/>
                 <a:cs typeface="Bookman Old Style" pitchFamily="34" charset="-120"/>
               </a:rPr>
-              <a:t>The demo run sheet — prompt shapes that work</a:t>
-            </a:r>
-            <a:endParaRPr lang="en-US" sz="3000" dirty="0"/>
-          </a:p>
-        </p:txBody>
-      </p:sp>
-      <p:sp>
-        <p:nvSpPr>
-          <p:cNvPr id="3" name="Text 1"/>
-          <p:cNvSpPr/>
-          <p:nvPr/>
-        </p:nvSpPr>
-        <p:spPr>
-          <a:xfrm>
-            <a:off x="502920" y="1078992"/>
-            <a:ext cx="10972800" cy="457200"/>
-          </a:xfrm>
-          <a:prstGeom prst="rect">
-            <a:avLst/>
-          </a:prstGeom>
-          <a:noFill/>
-          <a:ln/>
-        </p:spPr>
-        <p:txBody>
-          <a:bodyPr wrap="square" lIns="0" tIns="0" rIns="0" bIns="0" rtlCol="0" anchor="ctr"/>
-          <a:lstStyle/>
-          <a:p>
-            <a:pPr indent="0" marL="0">
-              <a:buNone/>
-            </a:pPr>
-            <a:r>
-              <a:rPr lang="en-US" sz="1400" dirty="0">
-                <a:solidFill>
-                  <a:srgbClr val="5B6B7F"/>
-                </a:solidFill>
-                <a:latin typeface="Calibri" pitchFamily="34" charset="0"/>
-                <a:ea typeface="Calibri" pitchFamily="34" charset="-122"/>
-                <a:cs typeface="Calibri" pitchFamily="34" charset="-120"/>
-              </a:rPr>
-              <a:t>Fill these with prompts you've verified against your data. Build from simple to the strongest hook.</a:t>
-            </a:r>
-            <a:endParaRPr lang="en-US" sz="1400" dirty="0"/>
-          </a:p>
-        </p:txBody>
-      </p:sp>
-      <p:sp>
-        <p:nvSpPr>
-          <p:cNvPr id="4" name="Shape 2"/>
-          <p:cNvSpPr/>
-          <p:nvPr/>
-        </p:nvSpPr>
-        <p:spPr>
-          <a:xfrm>
-            <a:off x="502920" y="1783080"/>
-            <a:ext cx="11201400" cy="932688"/>
+              <a:t>Prompt engineering: what the OOB agent can do</a:t>
+            </a:r>
+            <a:endParaRPr lang="en-US" sz="2800" dirty="0"/>
+          </a:p>
+        </p:txBody>
+      </p:sp>
+      <p:sp>
+        <p:nvSpPr>
+          <p:cNvPr id="3" name="Shape 1"/>
+          <p:cNvSpPr/>
+          <p:nvPr/>
+        </p:nvSpPr>
+        <p:spPr>
+          <a:xfrm>
+            <a:off x="502920" y="1371600"/>
+            <a:ext cx="5486400" cy="4572000"/>
           </a:xfrm>
           <a:prstGeom prst="roundRect">
             <a:avLst>
-              <a:gd name="adj" fmla="val 7843"/>
+              <a:gd name="adj" fmla="val 2000"/>
             </a:avLst>
           </a:prstGeom>
           <a:solidFill>
-            <a:srgbClr val="F4F7FA"/>
+            <a:srgbClr val="EAF4EF"/>
           </a:solidFill>
           <a:ln/>
           <a:effectLst>
@@ -8893,58 +9872,82 @@
       </p:sp>
       <p:sp>
         <p:nvSpPr>
-          <p:cNvPr id="5" name="Shape 3"/>
-          <p:cNvSpPr/>
-          <p:nvPr/>
-        </p:nvSpPr>
-        <p:spPr>
-          <a:xfrm>
-            <a:off x="731520" y="1984248"/>
-            <a:ext cx="566928" cy="566928"/>
+          <p:cNvPr id="4" name="Shape 2"/>
+          <p:cNvSpPr/>
+          <p:nvPr/>
+        </p:nvSpPr>
+        <p:spPr>
+          <a:xfrm>
+            <a:off x="822960" y="1645920"/>
+            <a:ext cx="731520" cy="731520"/>
           </a:xfrm>
           <a:prstGeom prst="ellipse">
             <a:avLst/>
           </a:prstGeom>
           <a:solidFill>
-            <a:srgbClr val="1C7293"/>
+            <a:srgbClr val="2A9D6F"/>
           </a:solidFill>
           <a:ln/>
         </p:spPr>
       </p:sp>
-      <p:sp>
-        <p:nvSpPr>
-          <p:cNvPr id="6" name="Text 4"/>
-          <p:cNvSpPr/>
-          <p:nvPr/>
-        </p:nvSpPr>
-        <p:spPr>
-          <a:xfrm>
-            <a:off x="731520" y="1984248"/>
-            <a:ext cx="566928" cy="566928"/>
-          </a:xfrm>
-          <a:prstGeom prst="rect">
-            <a:avLst/>
-          </a:prstGeom>
-          <a:noFill/>
-          <a:ln/>
-        </p:spPr>
-        <p:txBody>
-          <a:bodyPr wrap="square" lIns="0" tIns="0" rIns="0" bIns="0" rtlCol="0" anchor="ctr"/>
-          <a:lstStyle/>
-          <a:p>
-            <a:pPr algn="ctr" indent="0" marL="0">
+      <p:pic>
+        <p:nvPicPr>
+          <p:cNvPr id="5" name="Image 0" descr="preencoded.png">    </p:cNvPr>
+          <p:cNvPicPr>
+            <a:picLocks noChangeAspect="1"/>
+          </p:cNvPicPr>
+          <p:nvPr/>
+        </p:nvPicPr>
+        <p:blipFill>
+          <a:blip r:embed="rId1"/>
+          <a:stretch>
+            <a:fillRect/>
+          </a:stretch>
+        </p:blipFill>
+        <p:spPr>
+          <a:xfrm>
+            <a:off x="1013155" y="1836115"/>
+            <a:ext cx="351130" cy="351130"/>
+          </a:xfrm>
+          <a:prstGeom prst="rect">
+            <a:avLst/>
+          </a:prstGeom>
+        </p:spPr>
+      </p:pic>
+      <p:sp>
+        <p:nvSpPr>
+          <p:cNvPr id="6" name="Text 3"/>
+          <p:cNvSpPr/>
+          <p:nvPr/>
+        </p:nvSpPr>
+        <p:spPr>
+          <a:xfrm>
+            <a:off x="1691640" y="1645920"/>
+            <a:ext cx="4114800" cy="731520"/>
+          </a:xfrm>
+          <a:prstGeom prst="rect">
+            <a:avLst/>
+          </a:prstGeom>
+          <a:noFill/>
+          <a:ln/>
+        </p:spPr>
+        <p:txBody>
+          <a:bodyPr wrap="square" lIns="0" tIns="0" rIns="0" bIns="0" rtlCol="0" anchor="ctr"/>
+          <a:lstStyle/>
+          <a:p>
+            <a:pPr indent="0" marL="0">
               <a:buNone/>
             </a:pPr>
             <a:r>
               <a:rPr lang="en-US" sz="1800" b="1" dirty="0">
                 <a:solidFill>
-                  <a:srgbClr val="FFFFFF"/>
-                </a:solidFill>
-                <a:latin typeface="Calibri" pitchFamily="34" charset="0"/>
-                <a:ea typeface="Calibri" pitchFamily="34" charset="-122"/>
-                <a:cs typeface="Calibri" pitchFamily="34" charset="-120"/>
-              </a:rPr>
-              <a:t>1</a:t>
+                  <a:srgbClr val="2A9D6F"/>
+                </a:solidFill>
+                <a:latin typeface="Calibri" pitchFamily="34" charset="0"/>
+                <a:ea typeface="Calibri" pitchFamily="34" charset="-122"/>
+                <a:cs typeface="Calibri" pitchFamily="34" charset="-120"/>
+              </a:rPr>
+              <a:t>Reliable — demo these</a:t>
             </a:r>
             <a:endParaRPr lang="en-US" sz="1800" dirty="0"/>
           </a:p>
@@ -8952,100 +9955,164 @@
       </p:sp>
       <p:sp>
         <p:nvSpPr>
-          <p:cNvPr id="7" name="Text 5"/>
-          <p:cNvSpPr/>
-          <p:nvPr/>
-        </p:nvSpPr>
-        <p:spPr>
-          <a:xfrm>
-            <a:off x="1508760" y="1892808"/>
-            <a:ext cx="10058400" cy="438912"/>
-          </a:xfrm>
-          <a:prstGeom prst="rect">
-            <a:avLst/>
-          </a:prstGeom>
-          <a:noFill/>
-          <a:ln/>
-        </p:spPr>
-        <p:txBody>
-          <a:bodyPr wrap="square" lIns="0" tIns="0" rIns="0" bIns="0" rtlCol="0" anchor="ctr"/>
-          <a:lstStyle/>
-          <a:p>
-            <a:pPr indent="0" marL="0">
-              <a:buNone/>
-            </a:pPr>
-            <a:r>
-              <a:rPr lang="en-US" sz="1550" b="1" dirty="0">
-                <a:solidFill>
-                  <a:srgbClr val="0B2545"/>
-                </a:solidFill>
-                <a:latin typeface="Calibri" pitchFamily="34" charset="0"/>
-                <a:ea typeface="Calibri" pitchFamily="34" charset="-122"/>
-                <a:cs typeface="Calibri" pitchFamily="34" charset="-120"/>
-              </a:rPr>
-              <a:t>"Show me the &lt;high-priority&gt; &lt;records&gt;."</a:t>
-            </a:r>
-            <a:endParaRPr lang="en-US" sz="1550" dirty="0"/>
-          </a:p>
-        </p:txBody>
-      </p:sp>
-      <p:sp>
-        <p:nvSpPr>
-          <p:cNvPr id="8" name="Text 6"/>
-          <p:cNvSpPr/>
-          <p:nvPr/>
-        </p:nvSpPr>
-        <p:spPr>
-          <a:xfrm>
-            <a:off x="1508760" y="2286000"/>
-            <a:ext cx="10058400" cy="384048"/>
-          </a:xfrm>
-          <a:prstGeom prst="rect">
-            <a:avLst/>
-          </a:prstGeom>
-          <a:noFill/>
-          <a:ln/>
-        </p:spPr>
-        <p:txBody>
-          <a:bodyPr wrap="square" lIns="0" tIns="0" rIns="0" bIns="0" rtlCol="0" anchor="ctr"/>
-          <a:lstStyle/>
-          <a:p>
-            <a:pPr indent="0" marL="0">
-              <a:buNone/>
-            </a:pPr>
-            <a:r>
-              <a:rPr lang="en-US" sz="1250" dirty="0">
-                <a:solidFill>
-                  <a:srgbClr val="5B6B7F"/>
-                </a:solidFill>
-                <a:latin typeface="Calibri" pitchFamily="34" charset="0"/>
-                <a:ea typeface="Calibri" pitchFamily="34" charset="-122"/>
-                <a:cs typeface="Calibri" pitchFamily="34" charset="-120"/>
-              </a:rPr>
-              <a:t>Opener — single-attribute filter. Verify the count is stable.</a:t>
-            </a:r>
-            <a:endParaRPr lang="en-US" sz="1250" dirty="0"/>
-          </a:p>
-        </p:txBody>
-      </p:sp>
-      <p:sp>
-        <p:nvSpPr>
-          <p:cNvPr id="9" name="Shape 7"/>
-          <p:cNvSpPr/>
-          <p:nvPr/>
-        </p:nvSpPr>
-        <p:spPr>
-          <a:xfrm>
-            <a:off x="502920" y="2862072"/>
-            <a:ext cx="11201400" cy="932688"/>
+          <p:cNvPr id="7" name="Text 4"/>
+          <p:cNvSpPr/>
+          <p:nvPr/>
+        </p:nvSpPr>
+        <p:spPr>
+          <a:xfrm>
+            <a:off x="868680" y="2651760"/>
+            <a:ext cx="4937760" cy="3108960"/>
+          </a:xfrm>
+          <a:prstGeom prst="rect">
+            <a:avLst/>
+          </a:prstGeom>
+          <a:noFill/>
+          <a:ln/>
+        </p:spPr>
+        <p:txBody>
+          <a:bodyPr wrap="square" lIns="0" tIns="0" rIns="0" bIns="0" rtlCol="0" anchor="ctr"/>
+          <a:lstStyle/>
+          <a:p>
+            <a:pPr marL="342900" indent="-342900">
+              <a:lnSpc>
+                <a:spcPts val="2200"/>
+              </a:lnSpc>
+              <a:spcAft>
+                <a:spcPts val="1200"/>
+              </a:spcAft>
+              <a:buSzPct val="100000"/>
+              <a:buChar char="•"/>
+            </a:pPr>
+            <a:r>
+              <a:rPr lang="en-US" sz="1350" dirty="0">
+                <a:solidFill>
+                  <a:srgbClr val="1E293B"/>
+                </a:solidFill>
+                <a:latin typeface="Calibri" pitchFamily="34" charset="0"/>
+                <a:ea typeface="Calibri" pitchFamily="34" charset="-122"/>
+                <a:cs typeface="Calibri" pitchFamily="34" charset="-120"/>
+              </a:rPr>
+              <a:t>Attribute filters  ("show the high-priority records")</a:t>
+            </a:r>
+            <a:endParaRPr lang="en-US" sz="1350" dirty="0"/>
+          </a:p>
+          <a:p>
+            <a:pPr marL="342900" indent="-342900">
+              <a:lnSpc>
+                <a:spcPts val="2200"/>
+              </a:lnSpc>
+              <a:spcAft>
+                <a:spcPts val="1200"/>
+              </a:spcAft>
+              <a:buSzPct val="100000"/>
+              <a:buChar char="•"/>
+            </a:pPr>
+            <a:r>
+              <a:rPr lang="en-US" sz="1350" dirty="0">
+                <a:solidFill>
+                  <a:srgbClr val="1E293B"/>
+                </a:solidFill>
+                <a:latin typeface="Calibri" pitchFamily="34" charset="0"/>
+                <a:ea typeface="Calibri" pitchFamily="34" charset="-122"/>
+                <a:cs typeface="Calibri" pitchFamily="34" charset="-120"/>
+              </a:rPr>
+              <a:t>Single-group stats  ("average metric for a group")</a:t>
+            </a:r>
+            <a:endParaRPr lang="en-US" sz="1350" dirty="0"/>
+          </a:p>
+          <a:p>
+            <a:pPr marL="342900" indent="-342900">
+              <a:lnSpc>
+                <a:spcPts val="2200"/>
+              </a:lnSpc>
+              <a:spcAft>
+                <a:spcPts val="1200"/>
+              </a:spcAft>
+              <a:buSzPct val="100000"/>
+              <a:buChar char="•"/>
+            </a:pPr>
+            <a:r>
+              <a:rPr lang="en-US" sz="1350" dirty="0">
+                <a:solidFill>
+                  <a:srgbClr val="1E293B"/>
+                </a:solidFill>
+                <a:latin typeface="Calibri" pitchFamily="34" charset="0"/>
+                <a:ea typeface="Calibri" pitchFamily="34" charset="-122"/>
+                <a:cs typeface="Calibri" pitchFamily="34" charset="-120"/>
+              </a:rPr>
+              <a:t>Multi-attribute combos  (filter on two fields)</a:t>
+            </a:r>
+            <a:endParaRPr lang="en-US" sz="1350" dirty="0"/>
+          </a:p>
+          <a:p>
+            <a:pPr marL="342900" indent="-342900">
+              <a:lnSpc>
+                <a:spcPts val="2200"/>
+              </a:lnSpc>
+              <a:spcAft>
+                <a:spcPts val="1200"/>
+              </a:spcAft>
+              <a:buSzPct val="100000"/>
+              <a:buChar char="•"/>
+            </a:pPr>
+            <a:r>
+              <a:rPr lang="en-US" sz="1350" dirty="0">
+                <a:solidFill>
+                  <a:srgbClr val="1E293B"/>
+                </a:solidFill>
+                <a:latin typeface="Calibri" pitchFamily="34" charset="0"/>
+                <a:ea typeface="Calibri" pitchFamily="34" charset="-122"/>
+                <a:cs typeface="Calibri" pitchFamily="34" charset="-120"/>
+              </a:rPr>
+              <a:t>State / region-scoped cross-layer intersects</a:t>
+            </a:r>
+            <a:endParaRPr lang="en-US" sz="1350" dirty="0"/>
+          </a:p>
+          <a:p>
+            <a:pPr marL="342900" indent="-342900">
+              <a:lnSpc>
+                <a:spcPts val="2200"/>
+              </a:lnSpc>
+              <a:spcAft>
+                <a:spcPts val="1200"/>
+              </a:spcAft>
+              <a:buSzPct val="100000"/>
+              <a:buChar char="•"/>
+            </a:pPr>
+            <a:r>
+              <a:rPr lang="en-US" sz="1350" dirty="0">
+                <a:solidFill>
+                  <a:srgbClr val="1E293B"/>
+                </a:solidFill>
+                <a:latin typeface="Calibri" pitchFamily="34" charset="0"/>
+                <a:ea typeface="Calibri" pitchFamily="34" charset="-122"/>
+                <a:cs typeface="Calibri" pitchFamily="34" charset="-120"/>
+              </a:rPr>
+              <a:t>Pointed, single-subject questions</a:t>
+            </a:r>
+            <a:endParaRPr lang="en-US" sz="1350" dirty="0"/>
+          </a:p>
+        </p:txBody>
+      </p:sp>
+      <p:sp>
+        <p:nvSpPr>
+          <p:cNvPr id="8" name="Shape 5"/>
+          <p:cNvSpPr/>
+          <p:nvPr/>
+        </p:nvSpPr>
+        <p:spPr>
+          <a:xfrm>
+            <a:off x="6217920" y="1371600"/>
+            <a:ext cx="5486400" cy="4572000"/>
           </a:xfrm>
           <a:prstGeom prst="roundRect">
             <a:avLst>
-              <a:gd name="adj" fmla="val 7843"/>
+              <a:gd name="adj" fmla="val 2000"/>
             </a:avLst>
           </a:prstGeom>
           <a:solidFill>
-            <a:srgbClr val="F4F7FA"/>
+            <a:srgbClr val="FBEDEC"/>
           </a:solidFill>
           <a:ln/>
           <a:effectLst>
@@ -9059,58 +10126,82 @@
       </p:sp>
       <p:sp>
         <p:nvSpPr>
-          <p:cNvPr id="10" name="Shape 8"/>
-          <p:cNvSpPr/>
-          <p:nvPr/>
-        </p:nvSpPr>
-        <p:spPr>
-          <a:xfrm>
-            <a:off x="731520" y="3063240"/>
-            <a:ext cx="566928" cy="566928"/>
+          <p:cNvPr id="9" name="Shape 6"/>
+          <p:cNvSpPr/>
+          <p:nvPr/>
+        </p:nvSpPr>
+        <p:spPr>
+          <a:xfrm>
+            <a:off x="6537960" y="1645920"/>
+            <a:ext cx="731520" cy="731520"/>
           </a:xfrm>
           <a:prstGeom prst="ellipse">
             <a:avLst/>
           </a:prstGeom>
           <a:solidFill>
-            <a:srgbClr val="1C7293"/>
+            <a:srgbClr val="C24A45"/>
           </a:solidFill>
           <a:ln/>
         </p:spPr>
       </p:sp>
-      <p:sp>
-        <p:nvSpPr>
-          <p:cNvPr id="11" name="Text 9"/>
-          <p:cNvSpPr/>
-          <p:nvPr/>
-        </p:nvSpPr>
-        <p:spPr>
-          <a:xfrm>
-            <a:off x="731520" y="3063240"/>
-            <a:ext cx="566928" cy="566928"/>
-          </a:xfrm>
-          <a:prstGeom prst="rect">
-            <a:avLst/>
-          </a:prstGeom>
-          <a:noFill/>
-          <a:ln/>
-        </p:spPr>
-        <p:txBody>
-          <a:bodyPr wrap="square" lIns="0" tIns="0" rIns="0" bIns="0" rtlCol="0" anchor="ctr"/>
-          <a:lstStyle/>
-          <a:p>
-            <a:pPr algn="ctr" indent="0" marL="0">
+      <p:pic>
+        <p:nvPicPr>
+          <p:cNvPr id="10" name="Image 1" descr="preencoded.png">    </p:cNvPr>
+          <p:cNvPicPr>
+            <a:picLocks noChangeAspect="1"/>
+          </p:cNvPicPr>
+          <p:nvPr/>
+        </p:nvPicPr>
+        <p:blipFill>
+          <a:blip r:embed="rId2"/>
+          <a:stretch>
+            <a:fillRect/>
+          </a:stretch>
+        </p:blipFill>
+        <p:spPr>
+          <a:xfrm>
+            <a:off x="6728155" y="1836115"/>
+            <a:ext cx="351130" cy="351130"/>
+          </a:xfrm>
+          <a:prstGeom prst="rect">
+            <a:avLst/>
+          </a:prstGeom>
+        </p:spPr>
+      </p:pic>
+      <p:sp>
+        <p:nvSpPr>
+          <p:cNvPr id="11" name="Text 7"/>
+          <p:cNvSpPr/>
+          <p:nvPr/>
+        </p:nvSpPr>
+        <p:spPr>
+          <a:xfrm>
+            <a:off x="7406640" y="1645920"/>
+            <a:ext cx="4114800" cy="731520"/>
+          </a:xfrm>
+          <a:prstGeom prst="rect">
+            <a:avLst/>
+          </a:prstGeom>
+          <a:noFill/>
+          <a:ln/>
+        </p:spPr>
+        <p:txBody>
+          <a:bodyPr wrap="square" lIns="0" tIns="0" rIns="0" bIns="0" rtlCol="0" anchor="ctr"/>
+          <a:lstStyle/>
+          <a:p>
+            <a:pPr indent="0" marL="0">
               <a:buNone/>
             </a:pPr>
             <a:r>
               <a:rPr lang="en-US" sz="1800" b="1" dirty="0">
                 <a:solidFill>
-                  <a:srgbClr val="FFFFFF"/>
-                </a:solidFill>
-                <a:latin typeface="Calibri" pitchFamily="34" charset="0"/>
-                <a:ea typeface="Calibri" pitchFamily="34" charset="-122"/>
-                <a:cs typeface="Calibri" pitchFamily="34" charset="-120"/>
-              </a:rPr>
-              <a:t>2</a:t>
+                  <a:srgbClr val="C24A45"/>
+                </a:solidFill>
+                <a:latin typeface="Calibri" pitchFamily="34" charset="0"/>
+                <a:ea typeface="Calibri" pitchFamily="34" charset="-122"/>
+                <a:cs typeface="Calibri" pitchFamily="34" charset="-120"/>
+              </a:rPr>
+              <a:t>Fails / degrades — keep out</a:t>
             </a:r>
             <a:endParaRPr lang="en-US" sz="1800" dirty="0"/>
           </a:p>
@@ -9118,417 +10209,149 @@
       </p:sp>
       <p:sp>
         <p:nvSpPr>
-          <p:cNvPr id="12" name="Text 10"/>
-          <p:cNvSpPr/>
-          <p:nvPr/>
-        </p:nvSpPr>
-        <p:spPr>
-          <a:xfrm>
-            <a:off x="1508760" y="2971800"/>
-            <a:ext cx="10058400" cy="438912"/>
-          </a:xfrm>
-          <a:prstGeom prst="rect">
-            <a:avLst/>
-          </a:prstGeom>
-          <a:noFill/>
-          <a:ln/>
-        </p:spPr>
-        <p:txBody>
-          <a:bodyPr wrap="square" lIns="0" tIns="0" rIns="0" bIns="0" rtlCol="0" anchor="ctr"/>
-          <a:lstStyle/>
-          <a:p>
-            <a:pPr indent="0" marL="0">
-              <a:buNone/>
-            </a:pPr>
-            <a:r>
-              <a:rPr lang="en-US" sz="1550" b="1" dirty="0">
-                <a:solidFill>
-                  <a:srgbClr val="0B2545"/>
-                </a:solidFill>
-                <a:latin typeface="Calibri" pitchFamily="34" charset="0"/>
-                <a:ea typeface="Calibri" pitchFamily="34" charset="-122"/>
-                <a:cs typeface="Calibri" pitchFamily="34" charset="-120"/>
-              </a:rPr>
-              <a:t>"Average &lt;metric&gt; for &lt;one category&gt;?"</a:t>
-            </a:r>
-            <a:endParaRPr lang="en-US" sz="1550" dirty="0"/>
-          </a:p>
-        </p:txBody>
-      </p:sp>
-      <p:sp>
-        <p:nvSpPr>
-          <p:cNvPr id="13" name="Text 11"/>
-          <p:cNvSpPr/>
-          <p:nvPr/>
-        </p:nvSpPr>
-        <p:spPr>
-          <a:xfrm>
-            <a:off x="1508760" y="3364992"/>
-            <a:ext cx="10058400" cy="384048"/>
-          </a:xfrm>
-          <a:prstGeom prst="rect">
-            <a:avLst/>
-          </a:prstGeom>
-          <a:noFill/>
-          <a:ln/>
-        </p:spPr>
-        <p:txBody>
-          <a:bodyPr wrap="square" lIns="0" tIns="0" rIns="0" bIns="0" rtlCol="0" anchor="ctr"/>
-          <a:lstStyle/>
-          <a:p>
-            <a:pPr indent="0" marL="0">
-              <a:buNone/>
-            </a:pPr>
-            <a:r>
-              <a:rPr lang="en-US" sz="1250" dirty="0">
-                <a:solidFill>
-                  <a:srgbClr val="5B6B7F"/>
-                </a:solidFill>
-                <a:latin typeface="Calibri" pitchFamily="34" charset="0"/>
-                <a:ea typeface="Calibri" pitchFamily="34" charset="-122"/>
-                <a:cs typeface="Calibri" pitchFamily="34" charset="-120"/>
-              </a:rPr>
-              <a:t>Single-group stat. (Don't ask it to COMPARE two categories live.)</a:t>
-            </a:r>
-            <a:endParaRPr lang="en-US" sz="1250" dirty="0"/>
-          </a:p>
-        </p:txBody>
-      </p:sp>
-      <p:sp>
-        <p:nvSpPr>
-          <p:cNvPr id="14" name="Shape 12"/>
-          <p:cNvSpPr/>
-          <p:nvPr/>
-        </p:nvSpPr>
-        <p:spPr>
-          <a:xfrm>
-            <a:off x="502920" y="3941064"/>
-            <a:ext cx="11201400" cy="932688"/>
-          </a:xfrm>
-          <a:prstGeom prst="roundRect">
-            <a:avLst>
-              <a:gd name="adj" fmla="val 7843"/>
-            </a:avLst>
-          </a:prstGeom>
-          <a:solidFill>
-            <a:srgbClr val="F4F7FA"/>
-          </a:solidFill>
-          <a:ln/>
-          <a:effectLst>
-            <a:outerShdw sx="100000" sy="100000" kx="0" ky="0" algn="bl" rotWithShape="0" blurRad="88900" dist="38100" dir="5400000">
-              <a:srgbClr val="000000">
-                <a:alpha val="12000"/>
-              </a:srgbClr>
-            </a:outerShdw>
-          </a:effectLst>
-        </p:spPr>
-      </p:sp>
-      <p:sp>
-        <p:nvSpPr>
-          <p:cNvPr id="15" name="Shape 13"/>
-          <p:cNvSpPr/>
-          <p:nvPr/>
-        </p:nvSpPr>
-        <p:spPr>
-          <a:xfrm>
-            <a:off x="731520" y="4142232"/>
-            <a:ext cx="566928" cy="566928"/>
-          </a:xfrm>
-          <a:prstGeom prst="ellipse">
-            <a:avLst/>
-          </a:prstGeom>
-          <a:solidFill>
-            <a:srgbClr val="E8A33D"/>
-          </a:solidFill>
-          <a:ln/>
-        </p:spPr>
-      </p:sp>
-      <p:sp>
-        <p:nvSpPr>
-          <p:cNvPr id="16" name="Text 14"/>
-          <p:cNvSpPr/>
-          <p:nvPr/>
-        </p:nvSpPr>
-        <p:spPr>
-          <a:xfrm>
-            <a:off x="731520" y="4142232"/>
-            <a:ext cx="566928" cy="566928"/>
-          </a:xfrm>
-          <a:prstGeom prst="rect">
-            <a:avLst/>
-          </a:prstGeom>
-          <a:noFill/>
-          <a:ln/>
-        </p:spPr>
-        <p:txBody>
-          <a:bodyPr wrap="square" lIns="0" tIns="0" rIns="0" bIns="0" rtlCol="0" anchor="ctr"/>
-          <a:lstStyle/>
-          <a:p>
-            <a:pPr algn="ctr" indent="0" marL="0">
-              <a:buNone/>
-            </a:pPr>
-            <a:r>
-              <a:rPr lang="en-US" sz="1800" b="1" dirty="0">
-                <a:solidFill>
-                  <a:srgbClr val="FFFFFF"/>
-                </a:solidFill>
-                <a:latin typeface="Calibri" pitchFamily="34" charset="0"/>
-                <a:ea typeface="Calibri" pitchFamily="34" charset="-122"/>
-                <a:cs typeface="Calibri" pitchFamily="34" charset="-120"/>
-              </a:rPr>
-              <a:t>3</a:t>
-            </a:r>
-            <a:endParaRPr lang="en-US" sz="1800" dirty="0"/>
-          </a:p>
-        </p:txBody>
-      </p:sp>
-      <p:sp>
-        <p:nvSpPr>
-          <p:cNvPr id="17" name="Text 15"/>
-          <p:cNvSpPr/>
-          <p:nvPr/>
-        </p:nvSpPr>
-        <p:spPr>
-          <a:xfrm>
-            <a:off x="1508760" y="4050792"/>
-            <a:ext cx="10058400" cy="438912"/>
-          </a:xfrm>
-          <a:prstGeom prst="rect">
-            <a:avLst/>
-          </a:prstGeom>
-          <a:noFill/>
-          <a:ln/>
-        </p:spPr>
-        <p:txBody>
-          <a:bodyPr wrap="square" lIns="0" tIns="0" rIns="0" bIns="0" rtlCol="0" anchor="ctr"/>
-          <a:lstStyle/>
-          <a:p>
-            <a:pPr indent="0" marL="0">
-              <a:buNone/>
-            </a:pPr>
-            <a:r>
-              <a:rPr lang="en-US" sz="1550" b="1" dirty="0">
-                <a:solidFill>
-                  <a:srgbClr val="0B2545"/>
-                </a:solidFill>
-                <a:latin typeface="Calibri" pitchFamily="34" charset="0"/>
-                <a:ea typeface="Calibri" pitchFamily="34" charset="-122"/>
-                <a:cs typeface="Calibri" pitchFamily="34" charset="-120"/>
-              </a:rPr>
-              <a:t>"Which &lt;high-priority&gt; &lt;records&gt; also &lt;2nd condition&gt;?"</a:t>
-            </a:r>
-            <a:endParaRPr lang="en-US" sz="1550" dirty="0"/>
-          </a:p>
-        </p:txBody>
-      </p:sp>
-      <p:sp>
-        <p:nvSpPr>
-          <p:cNvPr id="18" name="Text 16"/>
-          <p:cNvSpPr/>
-          <p:nvPr/>
-        </p:nvSpPr>
-        <p:spPr>
-          <a:xfrm>
-            <a:off x="1508760" y="4443984"/>
-            <a:ext cx="10058400" cy="384048"/>
-          </a:xfrm>
-          <a:prstGeom prst="rect">
-            <a:avLst/>
-          </a:prstGeom>
-          <a:noFill/>
-          <a:ln/>
-        </p:spPr>
-        <p:txBody>
-          <a:bodyPr wrap="square" lIns="0" tIns="0" rIns="0" bIns="0" rtlCol="0" anchor="ctr"/>
-          <a:lstStyle/>
-          <a:p>
-            <a:pPr indent="0" marL="0">
-              <a:buNone/>
-            </a:pPr>
-            <a:r>
-              <a:rPr lang="en-US" sz="1250" dirty="0">
-                <a:solidFill>
-                  <a:srgbClr val="5B6B7F"/>
-                </a:solidFill>
-                <a:latin typeface="Calibri" pitchFamily="34" charset="0"/>
-                <a:ea typeface="Calibri" pitchFamily="34" charset="-122"/>
-                <a:cs typeface="Calibri" pitchFamily="34" charset="-120"/>
-              </a:rPr>
-              <a:t>Centerpiece — a multi-attribute insight with a clear takeaway.</a:t>
-            </a:r>
-            <a:endParaRPr lang="en-US" sz="1250" dirty="0"/>
-          </a:p>
-        </p:txBody>
-      </p:sp>
-      <p:sp>
-        <p:nvSpPr>
-          <p:cNvPr id="19" name="Shape 17"/>
-          <p:cNvSpPr/>
-          <p:nvPr/>
-        </p:nvSpPr>
-        <p:spPr>
-          <a:xfrm>
-            <a:off x="502920" y="5020056"/>
-            <a:ext cx="11201400" cy="932688"/>
-          </a:xfrm>
-          <a:prstGeom prst="roundRect">
-            <a:avLst>
-              <a:gd name="adj" fmla="val 7843"/>
-            </a:avLst>
-          </a:prstGeom>
-          <a:solidFill>
-            <a:srgbClr val="F4F7FA"/>
-          </a:solidFill>
-          <a:ln/>
-          <a:effectLst>
-            <a:outerShdw sx="100000" sy="100000" kx="0" ky="0" algn="bl" rotWithShape="0" blurRad="88900" dist="38100" dir="5400000">
-              <a:srgbClr val="000000">
-                <a:alpha val="12000"/>
-              </a:srgbClr>
-            </a:outerShdw>
-          </a:effectLst>
-        </p:spPr>
-      </p:sp>
-      <p:sp>
-        <p:nvSpPr>
-          <p:cNvPr id="20" name="Shape 18"/>
-          <p:cNvSpPr/>
-          <p:nvPr/>
-        </p:nvSpPr>
-        <p:spPr>
-          <a:xfrm>
-            <a:off x="731520" y="5221224"/>
-            <a:ext cx="566928" cy="566928"/>
-          </a:xfrm>
-          <a:prstGeom prst="ellipse">
-            <a:avLst/>
-          </a:prstGeom>
-          <a:solidFill>
-            <a:srgbClr val="0B2545"/>
-          </a:solidFill>
-          <a:ln/>
-        </p:spPr>
-      </p:sp>
-      <p:sp>
-        <p:nvSpPr>
-          <p:cNvPr id="21" name="Text 19"/>
-          <p:cNvSpPr/>
-          <p:nvPr/>
-        </p:nvSpPr>
-        <p:spPr>
-          <a:xfrm>
-            <a:off x="731520" y="5221224"/>
-            <a:ext cx="566928" cy="566928"/>
-          </a:xfrm>
-          <a:prstGeom prst="rect">
-            <a:avLst/>
-          </a:prstGeom>
-          <a:noFill/>
-          <a:ln/>
-        </p:spPr>
-        <p:txBody>
-          <a:bodyPr wrap="square" lIns="0" tIns="0" rIns="0" bIns="0" rtlCol="0" anchor="ctr"/>
-          <a:lstStyle/>
-          <a:p>
-            <a:pPr algn="ctr" indent="0" marL="0">
-              <a:buNone/>
-            </a:pPr>
-            <a:r>
-              <a:rPr lang="en-US" sz="1800" b="1" dirty="0">
-                <a:solidFill>
-                  <a:srgbClr val="FFFFFF"/>
-                </a:solidFill>
-                <a:latin typeface="Calibri" pitchFamily="34" charset="0"/>
-                <a:ea typeface="Calibri" pitchFamily="34" charset="-122"/>
-                <a:cs typeface="Calibri" pitchFamily="34" charset="-120"/>
-              </a:rPr>
-              <a:t>4</a:t>
-            </a:r>
-            <a:endParaRPr lang="en-US" sz="1800" dirty="0"/>
-          </a:p>
-        </p:txBody>
-      </p:sp>
-      <p:sp>
-        <p:nvSpPr>
-          <p:cNvPr id="22" name="Text 20"/>
-          <p:cNvSpPr/>
-          <p:nvPr/>
-        </p:nvSpPr>
-        <p:spPr>
-          <a:xfrm>
-            <a:off x="1508760" y="5129784"/>
-            <a:ext cx="10058400" cy="438912"/>
-          </a:xfrm>
-          <a:prstGeom prst="rect">
-            <a:avLst/>
-          </a:prstGeom>
-          <a:noFill/>
-          <a:ln/>
-        </p:spPr>
-        <p:txBody>
-          <a:bodyPr wrap="square" lIns="0" tIns="0" rIns="0" bIns="0" rtlCol="0" anchor="ctr"/>
-          <a:lstStyle/>
-          <a:p>
-            <a:pPr indent="0" marL="0">
-              <a:buNone/>
-            </a:pPr>
-            <a:r>
-              <a:rPr lang="en-US" sz="1550" b="1" dirty="0">
-                <a:solidFill>
-                  <a:srgbClr val="0B2545"/>
-                </a:solidFill>
-                <a:latin typeface="Calibri" pitchFamily="34" charset="0"/>
-                <a:ea typeface="Calibri" pitchFamily="34" charset="-122"/>
-                <a:cs typeface="Calibri" pitchFamily="34" charset="-120"/>
-              </a:rPr>
-              <a:t>"Which &lt;records&gt; in &lt;region&gt; intersect &lt;layer&gt;?"</a:t>
-            </a:r>
-            <a:endParaRPr lang="en-US" sz="1550" dirty="0"/>
-          </a:p>
-        </p:txBody>
-      </p:sp>
-      <p:sp>
-        <p:nvSpPr>
-          <p:cNvPr id="23" name="Text 21"/>
-          <p:cNvSpPr/>
-          <p:nvPr/>
-        </p:nvSpPr>
-        <p:spPr>
-          <a:xfrm>
-            <a:off x="1508760" y="5522976"/>
-            <a:ext cx="10058400" cy="384048"/>
-          </a:xfrm>
-          <a:prstGeom prst="rect">
-            <a:avLst/>
-          </a:prstGeom>
-          <a:noFill/>
-          <a:ln/>
-        </p:spPr>
-        <p:txBody>
-          <a:bodyPr wrap="square" lIns="0" tIns="0" rIns="0" bIns="0" rtlCol="0" anchor="ctr"/>
-          <a:lstStyle/>
-          <a:p>
-            <a:pPr indent="0" marL="0">
-              <a:buNone/>
-            </a:pPr>
-            <a:r>
-              <a:rPr lang="en-US" sz="1250" dirty="0">
-                <a:solidFill>
-                  <a:srgbClr val="5B6B7F"/>
-                </a:solidFill>
-                <a:latin typeface="Calibri" pitchFamily="34" charset="0"/>
-                <a:ea typeface="Calibri" pitchFamily="34" charset="-122"/>
-                <a:cs typeface="Calibri" pitchFamily="34" charset="-120"/>
-              </a:rPr>
-              <a:t>Cross-layer reveal — must stay region-scoped (else 413).</a:t>
-            </a:r>
-            <a:endParaRPr lang="en-US" sz="1250" dirty="0"/>
-          </a:p>
-        </p:txBody>
-      </p:sp>
-      <p:sp>
-        <p:nvSpPr>
-          <p:cNvPr id="24" name="Text 22"/>
+          <p:cNvPr id="12" name="Text 8"/>
+          <p:cNvSpPr/>
+          <p:nvPr/>
+        </p:nvSpPr>
+        <p:spPr>
+          <a:xfrm>
+            <a:off x="6583680" y="2651760"/>
+            <a:ext cx="4937760" cy="3108960"/>
+          </a:xfrm>
+          <a:prstGeom prst="rect">
+            <a:avLst/>
+          </a:prstGeom>
+          <a:noFill/>
+          <a:ln/>
+        </p:spPr>
+        <p:txBody>
+          <a:bodyPr wrap="square" lIns="0" tIns="0" rIns="0" bIns="0" rtlCol="0" anchor="ctr"/>
+          <a:lstStyle/>
+          <a:p>
+            <a:pPr marL="342900" indent="-342900">
+              <a:lnSpc>
+                <a:spcPts val="2200"/>
+              </a:lnSpc>
+              <a:spcAft>
+                <a:spcPts val="1200"/>
+              </a:spcAft>
+              <a:buSzPct val="100000"/>
+              <a:buChar char="•"/>
+            </a:pPr>
+            <a:r>
+              <a:rPr lang="en-US" sz="1350" dirty="0">
+                <a:solidFill>
+                  <a:srgbClr val="1E293B"/>
+                </a:solidFill>
+                <a:latin typeface="Calibri" pitchFamily="34" charset="0"/>
+                <a:ea typeface="Calibri" pitchFamily="34" charset="-122"/>
+                <a:cs typeface="Calibri" pitchFamily="34" charset="-120"/>
+              </a:rPr>
+              <a:t>Schema introspection  ("list fields") — hallucinates</a:t>
+            </a:r>
+            <a:endParaRPr lang="en-US" sz="1350" dirty="0"/>
+          </a:p>
+          <a:p>
+            <a:pPr marL="342900" indent="-342900">
+              <a:lnSpc>
+                <a:spcPts val="2200"/>
+              </a:lnSpc>
+              <a:spcAft>
+                <a:spcPts val="1200"/>
+              </a:spcAft>
+              <a:buSzPct val="100000"/>
+              <a:buChar char="•"/>
+            </a:pPr>
+            <a:r>
+              <a:rPr lang="en-US" sz="1350" dirty="0">
+                <a:solidFill>
+                  <a:srgbClr val="1E293B"/>
+                </a:solidFill>
+                <a:latin typeface="Calibri" pitchFamily="34" charset="0"/>
+                <a:ea typeface="Calibri" pitchFamily="34" charset="-122"/>
+                <a:cs typeface="Calibri" pitchFamily="34" charset="-120"/>
+              </a:rPr>
+              <a:t>Cross-category comparison — silently degrades</a:t>
+            </a:r>
+            <a:endParaRPr lang="en-US" sz="1350" dirty="0"/>
+          </a:p>
+          <a:p>
+            <a:pPr marL="342900" indent="-342900">
+              <a:lnSpc>
+                <a:spcPts val="2200"/>
+              </a:lnSpc>
+              <a:spcAft>
+                <a:spcPts val="1200"/>
+              </a:spcAft>
+              <a:buSzPct val="100000"/>
+              <a:buChar char="•"/>
+            </a:pPr>
+            <a:r>
+              <a:rPr lang="en-US" sz="1350" dirty="0">
+                <a:solidFill>
+                  <a:srgbClr val="1E293B"/>
+                </a:solidFill>
+                <a:latin typeface="Calibri" pitchFamily="34" charset="0"/>
+                <a:ea typeface="Calibri" pitchFamily="34" charset="-122"/>
+                <a:cs typeface="Calibri" pitchFamily="34" charset="-120"/>
+              </a:rPr>
+              <a:t>Unbounded cross-layer  — 413 error</a:t>
+            </a:r>
+            <a:endParaRPr lang="en-US" sz="1350" dirty="0"/>
+          </a:p>
+          <a:p>
+            <a:pPr marL="342900" indent="-342900">
+              <a:lnSpc>
+                <a:spcPts val="2200"/>
+              </a:lnSpc>
+              <a:spcAft>
+                <a:spcPts val="1200"/>
+              </a:spcAft>
+              <a:buSzPct val="100000"/>
+              <a:buChar char="•"/>
+            </a:pPr>
+            <a:r>
+              <a:rPr lang="en-US" sz="1350" dirty="0">
+                <a:solidFill>
+                  <a:srgbClr val="1E293B"/>
+                </a:solidFill>
+                <a:latin typeface="Calibri" pitchFamily="34" charset="0"/>
+                <a:ea typeface="Calibri" pitchFamily="34" charset="-122"/>
+                <a:cs typeface="Calibri" pitchFamily="34" charset="-120"/>
+              </a:rPr>
+              <a:t>Broad sweeps  (vague, unscoped questions)</a:t>
+            </a:r>
+            <a:endParaRPr lang="en-US" sz="1350" dirty="0"/>
+          </a:p>
+          <a:p>
+            <a:pPr marL="342900" indent="-342900">
+              <a:lnSpc>
+                <a:spcPts val="2200"/>
+              </a:lnSpc>
+              <a:spcAft>
+                <a:spcPts val="1200"/>
+              </a:spcAft>
+              <a:buSzPct val="100000"/>
+              <a:buChar char="•"/>
+            </a:pPr>
+            <a:r>
+              <a:rPr lang="en-US" sz="1350" dirty="0">
+                <a:solidFill>
+                  <a:srgbClr val="1E293B"/>
+                </a:solidFill>
+                <a:latin typeface="Calibri" pitchFamily="34" charset="0"/>
+                <a:ea typeface="Calibri" pitchFamily="34" charset="-122"/>
+                <a:cs typeface="Calibri" pitchFamily="34" charset="-120"/>
+              </a:rPr>
+              <a:t>Charts · forecasts · email · user location</a:t>
+            </a:r>
+            <a:endParaRPr lang="en-US" sz="1350" dirty="0"/>
+          </a:p>
+        </p:txBody>
+      </p:sp>
+      <p:sp>
+        <p:nvSpPr>
+          <p:cNvPr id="13" name="Text 9"/>
           <p:cNvSpPr/>
           <p:nvPr/>
         </p:nvSpPr>
@@ -9567,7 +10390,7 @@
       </p:sp>
       <p:sp>
         <p:nvSpPr>
-          <p:cNvPr id="25" name="Text 23"/>
+          <p:cNvPr id="14" name="Text 10"/>
           <p:cNvSpPr/>
           <p:nvPr/>
         </p:nvSpPr>

--- a/docs/slides/ArcGIS-AI-Components-Walkthrough.pptx
+++ b/docs/slides/ArcGIS-AI-Components-Walkthrough.pptx
@@ -16,9 +16,11 @@
     <p:sldId id="264" r:id="rId10"/>
     <p:sldId id="265" r:id="rId11"/>
     <p:sldId id="266" r:id="rId12"/>
+    <p:sldId id="267" r:id="rId13"/>
+    <p:sldId id="268" r:id="rId14"/>
   </p:sldIdLst>
   <p:notesMasterIdLst>
-    <p:notesMasterId r:id="rId13"/>
+    <p:notesMasterId r:id="rId15"/>
   </p:notesMasterIdLst>
   <p:sldSz cx="12191695" cy="6858000"/>
   <p:notesSz cx="6858000" cy="12191695"/>
@@ -712,6 +714,182 @@
             <a:fld id="{F7021451-1387-4CA6-816F-3879F97B5CBC}" type="slidenum">
               <a:rPr lang="en-US"/>
               <a:t>11</a:t>
+            </a:fld>
+            <a:endParaRPr lang="en-US"/>
+          </a:p>
+        </p:txBody>
+      </p:sp>
+    </p:spTree>
+    <p:extLst>
+      <p:ext uri="{BB962C8B-B14F-4D97-AF65-F5344CB8AC3E}">
+        <p14:creationId xmlns:p14="http://schemas.microsoft.com/office/powerpoint/2010/main" val="1024086991"/>
+      </p:ext>
+    </p:extLst>
+  </p:cSld>
+  <p:clrMapOvr>
+    <a:masterClrMapping/>
+  </p:clrMapOvr>
+</p:notes>
+</file>
+
+<file path=ppt/notesSlides/notesSlide12.xml><?xml version="1.0" encoding="utf-8"?>
+<p:notes xmlns:a="http://schemas.openxmlformats.org/drawingml/2006/main" xmlns:r="http://schemas.openxmlformats.org/officeDocument/2006/relationships" xmlns:p="http://schemas.openxmlformats.org/presentationml/2006/main">
+  <p:cSld>
+    <p:spTree>
+      <p:nvGrpSpPr>
+        <p:cNvPr id="1" name=""/>
+        <p:cNvGrpSpPr/>
+        <p:nvPr/>
+      </p:nvGrpSpPr>
+      <p:grpSpPr>
+        <a:xfrm>
+          <a:off x="0" y="0"/>
+          <a:ext cx="0" cy="0"/>
+          <a:chOff x="0" y="0"/>
+          <a:chExt cx="0" cy="0"/>
+        </a:xfrm>
+      </p:grpSpPr>
+      <p:sp>
+        <p:nvSpPr>
+          <p:cNvPr id="2" name="Slide Image Placeholder 1"/>
+          <p:cNvSpPr>
+            <a:spLocks noGrp="1" noRot="1" noChangeAspect="1"/>
+          </p:cNvSpPr>
+          <p:nvPr>
+            <p:ph type="sldImg"/>
+          </p:nvPr>
+        </p:nvSpPr>
+        <p:spPr/>
+      </p:sp>
+      <p:sp>
+        <p:nvSpPr>
+          <p:cNvPr id="3" name="Notes Placeholder 2"/>
+          <p:cNvSpPr>
+            <a:spLocks noGrp="1"/>
+          </p:cNvSpPr>
+          <p:nvPr>
+            <p:ph type="body" idx="1"/>
+          </p:nvPr>
+        </p:nvSpPr>
+        <p:spPr/>
+        <p:txBody>
+          <a:bodyPr/>
+          <a:lstStyle/>
+          <a:p>
+            <a:r>
+              <a:rPr lang="en-US" dirty="0"/>
+              <a:t/>
+            </a:r>
+            <a:endParaRPr lang="en-US" dirty="0"/>
+          </a:p>
+        </p:txBody>
+      </p:sp>
+      <p:sp>
+        <p:nvSpPr>
+          <p:cNvPr id="4" name="Slide Number Placeholder 3"/>
+          <p:cNvSpPr>
+            <a:spLocks noGrp="1"/>
+          </p:cNvSpPr>
+          <p:nvPr>
+            <p:ph type="sldNum" sz="quarter" idx="10"/>
+          </p:nvPr>
+        </p:nvSpPr>
+        <p:spPr/>
+        <p:txBody>
+          <a:bodyPr/>
+          <a:lstStyle/>
+          <a:p>
+            <a:fld id="{F7021451-1387-4CA6-816F-3879F97B5CBC}" type="slidenum">
+              <a:rPr lang="en-US"/>
+              <a:t>12</a:t>
+            </a:fld>
+            <a:endParaRPr lang="en-US"/>
+          </a:p>
+        </p:txBody>
+      </p:sp>
+    </p:spTree>
+    <p:extLst>
+      <p:ext uri="{BB962C8B-B14F-4D97-AF65-F5344CB8AC3E}">
+        <p14:creationId xmlns:p14="http://schemas.microsoft.com/office/powerpoint/2010/main" val="1024086991"/>
+      </p:ext>
+    </p:extLst>
+  </p:cSld>
+  <p:clrMapOvr>
+    <a:masterClrMapping/>
+  </p:clrMapOvr>
+</p:notes>
+</file>
+
+<file path=ppt/notesSlides/notesSlide13.xml><?xml version="1.0" encoding="utf-8"?>
+<p:notes xmlns:a="http://schemas.openxmlformats.org/drawingml/2006/main" xmlns:r="http://schemas.openxmlformats.org/officeDocument/2006/relationships" xmlns:p="http://schemas.openxmlformats.org/presentationml/2006/main">
+  <p:cSld>
+    <p:spTree>
+      <p:nvGrpSpPr>
+        <p:cNvPr id="1" name=""/>
+        <p:cNvGrpSpPr/>
+        <p:nvPr/>
+      </p:nvGrpSpPr>
+      <p:grpSpPr>
+        <a:xfrm>
+          <a:off x="0" y="0"/>
+          <a:ext cx="0" cy="0"/>
+          <a:chOff x="0" y="0"/>
+          <a:chExt cx="0" cy="0"/>
+        </a:xfrm>
+      </p:grpSpPr>
+      <p:sp>
+        <p:nvSpPr>
+          <p:cNvPr id="2" name="Slide Image Placeholder 1"/>
+          <p:cNvSpPr>
+            <a:spLocks noGrp="1" noRot="1" noChangeAspect="1"/>
+          </p:cNvSpPr>
+          <p:nvPr>
+            <p:ph type="sldImg"/>
+          </p:nvPr>
+        </p:nvSpPr>
+        <p:spPr/>
+      </p:sp>
+      <p:sp>
+        <p:nvSpPr>
+          <p:cNvPr id="3" name="Notes Placeholder 2"/>
+          <p:cNvSpPr>
+            <a:spLocks noGrp="1"/>
+          </p:cNvSpPr>
+          <p:nvPr>
+            <p:ph type="body" idx="1"/>
+          </p:nvPr>
+        </p:nvSpPr>
+        <p:spPr/>
+        <p:txBody>
+          <a:bodyPr/>
+          <a:lstStyle/>
+          <a:p>
+            <a:r>
+              <a:rPr lang="en-US" dirty="0"/>
+              <a:t/>
+            </a:r>
+            <a:endParaRPr lang="en-US" dirty="0"/>
+          </a:p>
+        </p:txBody>
+      </p:sp>
+      <p:sp>
+        <p:nvSpPr>
+          <p:cNvPr id="4" name="Slide Number Placeholder 3"/>
+          <p:cNvSpPr>
+            <a:spLocks noGrp="1"/>
+          </p:cNvSpPr>
+          <p:nvPr>
+            <p:ph type="sldNum" sz="quarter" idx="10"/>
+          </p:nvPr>
+        </p:nvSpPr>
+        <p:spPr/>
+        <p:txBody>
+          <a:bodyPr/>
+          <a:lstStyle/>
+          <a:p>
+            <a:fld id="{F7021451-1387-4CA6-816F-3879F97B5CBC}" type="slidenum">
+              <a:rPr lang="en-US"/>
+              <a:t>13</a:t>
             </a:fld>
             <a:endParaRPr lang="en-US"/>
           </a:p>
@@ -2068,7 +2246,7 @@
         <p:spPr>
           <a:xfrm>
             <a:off x="502920" y="411480"/>
-            <a:ext cx="11155680" cy="640080"/>
+            <a:ext cx="10972800" cy="640080"/>
           </a:xfrm>
           <a:prstGeom prst="rect">
             <a:avLst/>
@@ -2092,7 +2270,7 @@
                 <a:ea typeface="Bookman Old Style" pitchFamily="34" charset="-122"/>
                 <a:cs typeface="Bookman Old Style" pitchFamily="34" charset="-120"/>
               </a:rPr>
-              <a:t>The demo run sheet — prompt shapes that work</a:t>
+              <a:t>Gotchas that cost us a day</a:t>
             </a:r>
             <a:endParaRPr lang="en-US" sz="3000" dirty="0"/>
           </a:p>
@@ -2100,57 +2278,18 @@
       </p:sp>
       <p:sp>
         <p:nvSpPr>
-          <p:cNvPr id="3" name="Text 1"/>
-          <p:cNvSpPr/>
-          <p:nvPr/>
-        </p:nvSpPr>
-        <p:spPr>
-          <a:xfrm>
-            <a:off x="502920" y="1078992"/>
-            <a:ext cx="10972800" cy="457200"/>
-          </a:xfrm>
-          <a:prstGeom prst="rect">
-            <a:avLst/>
-          </a:prstGeom>
-          <a:noFill/>
-          <a:ln/>
-        </p:spPr>
-        <p:txBody>
-          <a:bodyPr wrap="square" lIns="0" tIns="0" rIns="0" bIns="0" rtlCol="0" anchor="ctr"/>
-          <a:lstStyle/>
-          <a:p>
-            <a:pPr indent="0" marL="0">
-              <a:buNone/>
-            </a:pPr>
-            <a:r>
-              <a:rPr lang="en-US" sz="1400" dirty="0">
-                <a:solidFill>
-                  <a:srgbClr val="5B6B7F"/>
-                </a:solidFill>
-                <a:latin typeface="Calibri" pitchFamily="34" charset="0"/>
-                <a:ea typeface="Calibri" pitchFamily="34" charset="-122"/>
-                <a:cs typeface="Calibri" pitchFamily="34" charset="-120"/>
-              </a:rPr>
-              <a:t>Fill these with prompts you've verified against your data. Build from simple to the strongest hook.</a:t>
-            </a:r>
-            <a:endParaRPr lang="en-US" sz="1400" dirty="0"/>
-          </a:p>
-        </p:txBody>
-      </p:sp>
-      <p:sp>
-        <p:nvSpPr>
-          <p:cNvPr id="4" name="Shape 2"/>
-          <p:cNvSpPr/>
-          <p:nvPr/>
-        </p:nvSpPr>
-        <p:spPr>
-          <a:xfrm>
-            <a:off x="502920" y="1783080"/>
-            <a:ext cx="11201400" cy="932688"/>
+          <p:cNvPr id="3" name="Shape 1"/>
+          <p:cNvSpPr/>
+          <p:nvPr/>
+        </p:nvSpPr>
+        <p:spPr>
+          <a:xfrm>
+            <a:off x="502920" y="1325880"/>
+            <a:ext cx="3657600" cy="2148840"/>
           </a:xfrm>
           <a:prstGeom prst="roundRect">
             <a:avLst>
-              <a:gd name="adj" fmla="val 7843"/>
+              <a:gd name="adj" fmla="val 3404"/>
             </a:avLst>
           </a:prstGeom>
           <a:solidFill>
@@ -2168,73 +2307,58 @@
       </p:sp>
       <p:sp>
         <p:nvSpPr>
-          <p:cNvPr id="5" name="Shape 3"/>
-          <p:cNvSpPr/>
-          <p:nvPr/>
-        </p:nvSpPr>
-        <p:spPr>
-          <a:xfrm>
-            <a:off x="731520" y="1984248"/>
-            <a:ext cx="566928" cy="566928"/>
+          <p:cNvPr id="4" name="Shape 2"/>
+          <p:cNvSpPr/>
+          <p:nvPr/>
+        </p:nvSpPr>
+        <p:spPr>
+          <a:xfrm>
+            <a:off x="758952" y="1581912"/>
+            <a:ext cx="713232" cy="713232"/>
           </a:xfrm>
           <a:prstGeom prst="ellipse">
             <a:avLst/>
           </a:prstGeom>
           <a:solidFill>
-            <a:srgbClr val="1C7293"/>
+            <a:srgbClr val="E8A33D"/>
           </a:solidFill>
           <a:ln/>
         </p:spPr>
       </p:sp>
-      <p:sp>
-        <p:nvSpPr>
-          <p:cNvPr id="6" name="Text 4"/>
-          <p:cNvSpPr/>
-          <p:nvPr/>
-        </p:nvSpPr>
-        <p:spPr>
-          <a:xfrm>
-            <a:off x="731520" y="1984248"/>
-            <a:ext cx="566928" cy="566928"/>
-          </a:xfrm>
-          <a:prstGeom prst="rect">
-            <a:avLst/>
-          </a:prstGeom>
-          <a:noFill/>
-          <a:ln/>
-        </p:spPr>
-        <p:txBody>
-          <a:bodyPr wrap="square" lIns="0" tIns="0" rIns="0" bIns="0" rtlCol="0" anchor="ctr"/>
-          <a:lstStyle/>
-          <a:p>
-            <a:pPr algn="ctr" indent="0" marL="0">
-              <a:buNone/>
-            </a:pPr>
-            <a:r>
-              <a:rPr lang="en-US" sz="1800" b="1" dirty="0">
-                <a:solidFill>
-                  <a:srgbClr val="FFFFFF"/>
-                </a:solidFill>
-                <a:latin typeface="Calibri" pitchFamily="34" charset="0"/>
-                <a:ea typeface="Calibri" pitchFamily="34" charset="-122"/>
-                <a:cs typeface="Calibri" pitchFamily="34" charset="-120"/>
-              </a:rPr>
-              <a:t>1</a:t>
-            </a:r>
-            <a:endParaRPr lang="en-US" sz="1800" dirty="0"/>
-          </a:p>
-        </p:txBody>
-      </p:sp>
-      <p:sp>
-        <p:nvSpPr>
-          <p:cNvPr id="7" name="Text 5"/>
-          <p:cNvSpPr/>
-          <p:nvPr/>
-        </p:nvSpPr>
-        <p:spPr>
-          <a:xfrm>
-            <a:off x="1508760" y="1892808"/>
-            <a:ext cx="10058400" cy="438912"/>
+      <p:pic>
+        <p:nvPicPr>
+          <p:cNvPr id="5" name="Image 0" descr="preencoded.png">    </p:cNvPr>
+          <p:cNvPicPr>
+            <a:picLocks noChangeAspect="1"/>
+          </p:cNvPicPr>
+          <p:nvPr/>
+        </p:nvPicPr>
+        <p:blipFill>
+          <a:blip r:embed="rId1"/>
+          <a:stretch>
+            <a:fillRect/>
+          </a:stretch>
+        </p:blipFill>
+        <p:spPr>
+          <a:xfrm>
+            <a:off x="944392" y="1767352"/>
+            <a:ext cx="342351" cy="342351"/>
+          </a:xfrm>
+          <a:prstGeom prst="rect">
+            <a:avLst/>
+          </a:prstGeom>
+        </p:spPr>
+      </p:pic>
+      <p:sp>
+        <p:nvSpPr>
+          <p:cNvPr id="6" name="Text 3"/>
+          <p:cNvSpPr/>
+          <p:nvPr/>
+        </p:nvSpPr>
+        <p:spPr>
+          <a:xfrm>
+            <a:off x="1600200" y="1600200"/>
+            <a:ext cx="2377440" cy="685800"/>
           </a:xfrm>
           <a:prstGeom prst="rect">
             <a:avLst/>
@@ -2247,10 +2371,13 @@
           <a:lstStyle/>
           <a:p>
             <a:pPr indent="0" marL="0">
-              <a:buNone/>
-            </a:pPr>
-            <a:r>
-              <a:rPr lang="en-US" sz="1550" b="1" dirty="0">
+              <a:lnSpc>
+                <a:spcPts val="1600"/>
+              </a:lnSpc>
+              <a:buNone/>
+            </a:pPr>
+            <a:r>
+              <a:rPr lang="en-US" sz="1450" b="1" dirty="0">
                 <a:solidFill>
                   <a:srgbClr val="0B2545"/>
                 </a:solidFill>
@@ -2258,22 +2385,22 @@
                 <a:ea typeface="Calibri" pitchFamily="34" charset="-122"/>
                 <a:cs typeface="Calibri" pitchFamily="34" charset="-120"/>
               </a:rPr>
-              <a:t>"Show me the &lt;high-priority&gt; &lt;records&gt;."</a:t>
-            </a:r>
-            <a:endParaRPr lang="en-US" sz="1550" dirty="0"/>
-          </a:p>
-        </p:txBody>
-      </p:sp>
-      <p:sp>
-        <p:nvSpPr>
-          <p:cNvPr id="8" name="Text 6"/>
-          <p:cNvSpPr/>
-          <p:nvPr/>
-        </p:nvSpPr>
-        <p:spPr>
-          <a:xfrm>
-            <a:off x="1508760" y="2286000"/>
-            <a:ext cx="10058400" cy="384048"/>
+              <a:t>Elements don't auto-register</a:t>
+            </a:r>
+            <a:endParaRPr lang="en-US" sz="1450" dirty="0"/>
+          </a:p>
+        </p:txBody>
+      </p:sp>
+      <p:sp>
+        <p:nvSpPr>
+          <p:cNvPr id="7" name="Text 4"/>
+          <p:cNvSpPr/>
+          <p:nvPr/>
+        </p:nvSpPr>
+        <p:spPr>
+          <a:xfrm>
+            <a:off x="758952" y="2350008"/>
+            <a:ext cx="3145536" cy="1005840"/>
           </a:xfrm>
           <a:prstGeom prst="rect">
             <a:avLst/>
@@ -2286,10 +2413,13 @@
           <a:lstStyle/>
           <a:p>
             <a:pPr indent="0" marL="0">
-              <a:buNone/>
-            </a:pPr>
-            <a:r>
-              <a:rPr lang="en-US" sz="1250" dirty="0">
+              <a:lnSpc>
+                <a:spcPts val="1450"/>
+              </a:lnSpc>
+              <a:buNone/>
+            </a:pPr>
+            <a:r>
+              <a:rPr lang="en-US" sz="1150" dirty="0">
                 <a:solidFill>
                   <a:srgbClr val="5B6B7F"/>
                 </a:solidFill>
@@ -2297,26 +2427,26 @@
                 <a:ea typeface="Calibri" pitchFamily="34" charset="-122"/>
                 <a:cs typeface="Calibri" pitchFamily="34" charset="-120"/>
               </a:rPr>
-              <a:t>Opener — single-attribute filter. Verify the count is stable.</a:t>
-            </a:r>
-            <a:endParaRPr lang="en-US" sz="1250" dirty="0"/>
-          </a:p>
-        </p:txBody>
-      </p:sp>
-      <p:sp>
-        <p:nvSpPr>
-          <p:cNvPr id="9" name="Shape 7"/>
-          <p:cNvSpPr/>
-          <p:nvPr/>
-        </p:nvSpPr>
-        <p:spPr>
-          <a:xfrm>
-            <a:off x="502920" y="2862072"/>
-            <a:ext cx="11201400" cy="932688"/>
+              <a:t>SDK 5.x is Lumina-based. Bare imports do nothing — call defineCustomElements() or you get "Custom element not found."</a:t>
+            </a:r>
+            <a:endParaRPr lang="en-US" sz="1150" dirty="0"/>
+          </a:p>
+        </p:txBody>
+      </p:sp>
+      <p:sp>
+        <p:nvSpPr>
+          <p:cNvPr id="8" name="Shape 5"/>
+          <p:cNvSpPr/>
+          <p:nvPr/>
+        </p:nvSpPr>
+        <p:spPr>
+          <a:xfrm>
+            <a:off x="4398264" y="1325880"/>
+            <a:ext cx="3657600" cy="2148840"/>
           </a:xfrm>
           <a:prstGeom prst="roundRect">
             <a:avLst>
-              <a:gd name="adj" fmla="val 7843"/>
+              <a:gd name="adj" fmla="val 3404"/>
             </a:avLst>
           </a:prstGeom>
           <a:solidFill>
@@ -2334,73 +2464,58 @@
       </p:sp>
       <p:sp>
         <p:nvSpPr>
-          <p:cNvPr id="10" name="Shape 8"/>
-          <p:cNvSpPr/>
-          <p:nvPr/>
-        </p:nvSpPr>
-        <p:spPr>
-          <a:xfrm>
-            <a:off x="731520" y="3063240"/>
-            <a:ext cx="566928" cy="566928"/>
+          <p:cNvPr id="9" name="Shape 6"/>
+          <p:cNvSpPr/>
+          <p:nvPr/>
+        </p:nvSpPr>
+        <p:spPr>
+          <a:xfrm>
+            <a:off x="4654296" y="1581912"/>
+            <a:ext cx="713232" cy="713232"/>
           </a:xfrm>
           <a:prstGeom prst="ellipse">
             <a:avLst/>
           </a:prstGeom>
           <a:solidFill>
-            <a:srgbClr val="1C7293"/>
+            <a:srgbClr val="E8A33D"/>
           </a:solidFill>
           <a:ln/>
         </p:spPr>
       </p:sp>
-      <p:sp>
-        <p:nvSpPr>
-          <p:cNvPr id="11" name="Text 9"/>
-          <p:cNvSpPr/>
-          <p:nvPr/>
-        </p:nvSpPr>
-        <p:spPr>
-          <a:xfrm>
-            <a:off x="731520" y="3063240"/>
-            <a:ext cx="566928" cy="566928"/>
-          </a:xfrm>
-          <a:prstGeom prst="rect">
-            <a:avLst/>
-          </a:prstGeom>
-          <a:noFill/>
-          <a:ln/>
-        </p:spPr>
-        <p:txBody>
-          <a:bodyPr wrap="square" lIns="0" tIns="0" rIns="0" bIns="0" rtlCol="0" anchor="ctr"/>
-          <a:lstStyle/>
-          <a:p>
-            <a:pPr algn="ctr" indent="0" marL="0">
-              <a:buNone/>
-            </a:pPr>
-            <a:r>
-              <a:rPr lang="en-US" sz="1800" b="1" dirty="0">
-                <a:solidFill>
-                  <a:srgbClr val="FFFFFF"/>
-                </a:solidFill>
-                <a:latin typeface="Calibri" pitchFamily="34" charset="0"/>
-                <a:ea typeface="Calibri" pitchFamily="34" charset="-122"/>
-                <a:cs typeface="Calibri" pitchFamily="34" charset="-120"/>
-              </a:rPr>
-              <a:t>2</a:t>
-            </a:r>
-            <a:endParaRPr lang="en-US" sz="1800" dirty="0"/>
-          </a:p>
-        </p:txBody>
-      </p:sp>
-      <p:sp>
-        <p:nvSpPr>
-          <p:cNvPr id="12" name="Text 10"/>
-          <p:cNvSpPr/>
-          <p:nvPr/>
-        </p:nvSpPr>
-        <p:spPr>
-          <a:xfrm>
-            <a:off x="1508760" y="2971800"/>
-            <a:ext cx="10058400" cy="438912"/>
+      <p:pic>
+        <p:nvPicPr>
+          <p:cNvPr id="10" name="Image 1" descr="preencoded.png">    </p:cNvPr>
+          <p:cNvPicPr>
+            <a:picLocks noChangeAspect="1"/>
+          </p:cNvPicPr>
+          <p:nvPr/>
+        </p:nvPicPr>
+        <p:blipFill>
+          <a:blip r:embed="rId2"/>
+          <a:stretch>
+            <a:fillRect/>
+          </a:stretch>
+        </p:blipFill>
+        <p:spPr>
+          <a:xfrm>
+            <a:off x="4839736" y="1767352"/>
+            <a:ext cx="342351" cy="342351"/>
+          </a:xfrm>
+          <a:prstGeom prst="rect">
+            <a:avLst/>
+          </a:prstGeom>
+        </p:spPr>
+      </p:pic>
+      <p:sp>
+        <p:nvSpPr>
+          <p:cNvPr id="11" name="Text 7"/>
+          <p:cNvSpPr/>
+          <p:nvPr/>
+        </p:nvSpPr>
+        <p:spPr>
+          <a:xfrm>
+            <a:off x="5495544" y="1600200"/>
+            <a:ext cx="2377440" cy="685800"/>
           </a:xfrm>
           <a:prstGeom prst="rect">
             <a:avLst/>
@@ -2413,10 +2528,13 @@
           <a:lstStyle/>
           <a:p>
             <a:pPr indent="0" marL="0">
-              <a:buNone/>
-            </a:pPr>
-            <a:r>
-              <a:rPr lang="en-US" sz="1550" b="1" dirty="0">
+              <a:lnSpc>
+                <a:spcPts val="1600"/>
+              </a:lnSpc>
+              <a:buNone/>
+            </a:pPr>
+            <a:r>
+              <a:rPr lang="en-US" sz="1450" b="1" dirty="0">
                 <a:solidFill>
                   <a:srgbClr val="0B2545"/>
                 </a:solidFill>
@@ -2424,22 +2542,22 @@
                 <a:ea typeface="Calibri" pitchFamily="34" charset="-122"/>
                 <a:cs typeface="Calibri" pitchFamily="34" charset="-120"/>
               </a:rPr>
-              <a:t>"Average &lt;metric&gt; for &lt;one category&gt;?"</a:t>
-            </a:r>
-            <a:endParaRPr lang="en-US" sz="1550" dirty="0"/>
-          </a:p>
-        </p:txBody>
-      </p:sp>
-      <p:sp>
-        <p:nvSpPr>
-          <p:cNvPr id="13" name="Text 11"/>
-          <p:cNvSpPr/>
-          <p:nvPr/>
-        </p:nvSpPr>
-        <p:spPr>
-          <a:xfrm>
-            <a:off x="1508760" y="3364992"/>
-            <a:ext cx="10058400" cy="384048"/>
+              <a:t>No ai-components-react</a:t>
+            </a:r>
+            <a:endParaRPr lang="en-US" sz="1450" dirty="0"/>
+          </a:p>
+        </p:txBody>
+      </p:sp>
+      <p:sp>
+        <p:nvSpPr>
+          <p:cNvPr id="12" name="Text 8"/>
+          <p:cNvSpPr/>
+          <p:nvPr/>
+        </p:nvSpPr>
+        <p:spPr>
+          <a:xfrm>
+            <a:off x="4654296" y="2350008"/>
+            <a:ext cx="3145536" cy="1005840"/>
           </a:xfrm>
           <a:prstGeom prst="rect">
             <a:avLst/>
@@ -2452,10 +2570,13 @@
           <a:lstStyle/>
           <a:p>
             <a:pPr indent="0" marL="0">
-              <a:buNone/>
-            </a:pPr>
-            <a:r>
-              <a:rPr lang="en-US" sz="1250" dirty="0">
+              <a:lnSpc>
+                <a:spcPts val="1450"/>
+              </a:lnSpc>
+              <a:buNone/>
+            </a:pPr>
+            <a:r>
+              <a:rPr lang="en-US" sz="1150" dirty="0">
                 <a:solidFill>
                   <a:srgbClr val="5B6B7F"/>
                 </a:solidFill>
@@ -2463,26 +2584,26 @@
                 <a:ea typeface="Calibri" pitchFamily="34" charset="-122"/>
                 <a:cs typeface="Calibri" pitchFamily="34" charset="-120"/>
               </a:rPr>
-              <a:t>Single-group stat. (Don't ask it to COMPARE two categories live.)</a:t>
-            </a:r>
-            <a:endParaRPr lang="en-US" sz="1250" dirty="0"/>
-          </a:p>
-        </p:txBody>
-      </p:sp>
-      <p:sp>
-        <p:nvSpPr>
-          <p:cNvPr id="14" name="Shape 12"/>
-          <p:cNvSpPr/>
-          <p:nvPr/>
-        </p:nvSpPr>
-        <p:spPr>
-          <a:xfrm>
-            <a:off x="502920" y="3941064"/>
-            <a:ext cx="11201400" cy="932688"/>
+              <a:t>AI components ship as raw web components only. Declare the tags in vite-env.d.ts; set props imperatively via refs.</a:t>
+            </a:r>
+            <a:endParaRPr lang="en-US" sz="1150" dirty="0"/>
+          </a:p>
+        </p:txBody>
+      </p:sp>
+      <p:sp>
+        <p:nvSpPr>
+          <p:cNvPr id="13" name="Shape 9"/>
+          <p:cNvSpPr/>
+          <p:nvPr/>
+        </p:nvSpPr>
+        <p:spPr>
+          <a:xfrm>
+            <a:off x="8293608" y="1325880"/>
+            <a:ext cx="3657600" cy="2148840"/>
           </a:xfrm>
           <a:prstGeom prst="roundRect">
             <a:avLst>
-              <a:gd name="adj" fmla="val 7843"/>
+              <a:gd name="adj" fmla="val 3404"/>
             </a:avLst>
           </a:prstGeom>
           <a:solidFill>
@@ -2500,14 +2621,14 @@
       </p:sp>
       <p:sp>
         <p:nvSpPr>
-          <p:cNvPr id="15" name="Shape 13"/>
-          <p:cNvSpPr/>
-          <p:nvPr/>
-        </p:nvSpPr>
-        <p:spPr>
-          <a:xfrm>
-            <a:off x="731520" y="4142232"/>
-            <a:ext cx="566928" cy="566928"/>
+          <p:cNvPr id="14" name="Shape 10"/>
+          <p:cNvSpPr/>
+          <p:nvPr/>
+        </p:nvSpPr>
+        <p:spPr>
+          <a:xfrm>
+            <a:off x="8549640" y="1581912"/>
+            <a:ext cx="713232" cy="713232"/>
           </a:xfrm>
           <a:prstGeom prst="ellipse">
             <a:avLst/>
@@ -2518,55 +2639,40 @@
           <a:ln/>
         </p:spPr>
       </p:sp>
-      <p:sp>
-        <p:nvSpPr>
-          <p:cNvPr id="16" name="Text 14"/>
-          <p:cNvSpPr/>
-          <p:nvPr/>
-        </p:nvSpPr>
-        <p:spPr>
-          <a:xfrm>
-            <a:off x="731520" y="4142232"/>
-            <a:ext cx="566928" cy="566928"/>
-          </a:xfrm>
-          <a:prstGeom prst="rect">
-            <a:avLst/>
-          </a:prstGeom>
-          <a:noFill/>
-          <a:ln/>
-        </p:spPr>
-        <p:txBody>
-          <a:bodyPr wrap="square" lIns="0" tIns="0" rIns="0" bIns="0" rtlCol="0" anchor="ctr"/>
-          <a:lstStyle/>
-          <a:p>
-            <a:pPr algn="ctr" indent="0" marL="0">
-              <a:buNone/>
-            </a:pPr>
-            <a:r>
-              <a:rPr lang="en-US" sz="1800" b="1" dirty="0">
-                <a:solidFill>
-                  <a:srgbClr val="FFFFFF"/>
-                </a:solidFill>
-                <a:latin typeface="Calibri" pitchFamily="34" charset="0"/>
-                <a:ea typeface="Calibri" pitchFamily="34" charset="-122"/>
-                <a:cs typeface="Calibri" pitchFamily="34" charset="-120"/>
-              </a:rPr>
-              <a:t>3</a:t>
-            </a:r>
-            <a:endParaRPr lang="en-US" sz="1800" dirty="0"/>
-          </a:p>
-        </p:txBody>
-      </p:sp>
-      <p:sp>
-        <p:nvSpPr>
-          <p:cNvPr id="17" name="Text 15"/>
-          <p:cNvSpPr/>
-          <p:nvPr/>
-        </p:nvSpPr>
-        <p:spPr>
-          <a:xfrm>
-            <a:off x="1508760" y="4050792"/>
-            <a:ext cx="10058400" cy="438912"/>
+      <p:pic>
+        <p:nvPicPr>
+          <p:cNvPr id="15" name="Image 2" descr="preencoded.png">    </p:cNvPr>
+          <p:cNvPicPr>
+            <a:picLocks noChangeAspect="1"/>
+          </p:cNvPicPr>
+          <p:nvPr/>
+        </p:nvPicPr>
+        <p:blipFill>
+          <a:blip r:embed="rId3"/>
+          <a:stretch>
+            <a:fillRect/>
+          </a:stretch>
+        </p:blipFill>
+        <p:spPr>
+          <a:xfrm>
+            <a:off x="8735080" y="1767352"/>
+            <a:ext cx="342351" cy="342351"/>
+          </a:xfrm>
+          <a:prstGeom prst="rect">
+            <a:avLst/>
+          </a:prstGeom>
+        </p:spPr>
+      </p:pic>
+      <p:sp>
+        <p:nvSpPr>
+          <p:cNvPr id="16" name="Text 11"/>
+          <p:cNvSpPr/>
+          <p:nvPr/>
+        </p:nvSpPr>
+        <p:spPr>
+          <a:xfrm>
+            <a:off x="9390888" y="1600200"/>
+            <a:ext cx="2377440" cy="685800"/>
           </a:xfrm>
           <a:prstGeom prst="rect">
             <a:avLst/>
@@ -2579,10 +2685,13 @@
           <a:lstStyle/>
           <a:p>
             <a:pPr indent="0" marL="0">
-              <a:buNone/>
-            </a:pPr>
-            <a:r>
-              <a:rPr lang="en-US" sz="1550" b="1" dirty="0">
+              <a:lnSpc>
+                <a:spcPts val="1600"/>
+              </a:lnSpc>
+              <a:buNone/>
+            </a:pPr>
+            <a:r>
+              <a:rPr lang="en-US" sz="1450" b="1" dirty="0">
                 <a:solidFill>
                   <a:srgbClr val="0B2545"/>
                 </a:solidFill>
@@ -2590,22 +2699,22 @@
                 <a:ea typeface="Calibri" pitchFamily="34" charset="-122"/>
                 <a:cs typeface="Calibri" pitchFamily="34" charset="-120"/>
               </a:rPr>
-              <a:t>"Which &lt;high-priority&gt; &lt;records&gt; also &lt;2nd condition&gt;?"</a:t>
-            </a:r>
-            <a:endParaRPr lang="en-US" sz="1550" dirty="0"/>
-          </a:p>
-        </p:txBody>
-      </p:sp>
-      <p:sp>
-        <p:nvSpPr>
-          <p:cNvPr id="18" name="Text 16"/>
-          <p:cNvSpPr/>
-          <p:nvPr/>
-        </p:nvSpPr>
-        <p:spPr>
-          <a:xfrm>
-            <a:off x="1508760" y="4443984"/>
-            <a:ext cx="10058400" cy="384048"/>
+              <a:t>Embeddings 504 ≠ CORS</a:t>
+            </a:r>
+            <a:endParaRPr lang="en-US" sz="1450" dirty="0"/>
+          </a:p>
+        </p:txBody>
+      </p:sp>
+      <p:sp>
+        <p:nvSpPr>
+          <p:cNvPr id="17" name="Text 12"/>
+          <p:cNvSpPr/>
+          <p:nvPr/>
+        </p:nvSpPr>
+        <p:spPr>
+          <a:xfrm>
+            <a:off x="8549640" y="2350008"/>
+            <a:ext cx="3145536" cy="1005840"/>
           </a:xfrm>
           <a:prstGeom prst="rect">
             <a:avLst/>
@@ -2618,10 +2727,13 @@
           <a:lstStyle/>
           <a:p>
             <a:pPr indent="0" marL="0">
-              <a:buNone/>
-            </a:pPr>
-            <a:r>
-              <a:rPr lang="en-US" sz="1250" dirty="0">
+              <a:lnSpc>
+                <a:spcPts val="1450"/>
+              </a:lnSpc>
+              <a:buNone/>
+            </a:pPr>
+            <a:r>
+              <a:rPr lang="en-US" sz="1150" dirty="0">
                 <a:solidFill>
                   <a:srgbClr val="5B6B7F"/>
                 </a:solidFill>
@@ -2629,26 +2741,26 @@
                 <a:ea typeface="Calibri" pitchFamily="34" charset="-122"/>
                 <a:cs typeface="Calibri" pitchFamily="34" charset="-120"/>
               </a:rPr>
-              <a:t>Centerpiece — a multi-attribute insight with a clear takeaway.</a:t>
-            </a:r>
-            <a:endParaRPr lang="en-US" sz="1250" dirty="0"/>
-          </a:p>
-        </p:txBody>
-      </p:sp>
-      <p:sp>
-        <p:nvSpPr>
-          <p:cNvPr id="19" name="Shape 17"/>
-          <p:cNvSpPr/>
-          <p:nvPr/>
-        </p:nvSpPr>
-        <p:spPr>
-          <a:xfrm>
-            <a:off x="502920" y="5020056"/>
-            <a:ext cx="11201400" cy="932688"/>
+              <a:t>Generic error looks like CORS but is a 504 timeout. Wide-schema reference layers trigger it; narrow ones succeed.</a:t>
+            </a:r>
+            <a:endParaRPr lang="en-US" sz="1150" dirty="0"/>
+          </a:p>
+        </p:txBody>
+      </p:sp>
+      <p:sp>
+        <p:nvSpPr>
+          <p:cNvPr id="18" name="Shape 13"/>
+          <p:cNvSpPr/>
+          <p:nvPr/>
+        </p:nvSpPr>
+        <p:spPr>
+          <a:xfrm>
+            <a:off x="502920" y="3749040"/>
+            <a:ext cx="3657600" cy="2148840"/>
           </a:xfrm>
           <a:prstGeom prst="roundRect">
             <a:avLst>
-              <a:gd name="adj" fmla="val 7843"/>
+              <a:gd name="adj" fmla="val 3404"/>
             </a:avLst>
           </a:prstGeom>
           <a:solidFill>
@@ -2666,73 +2778,58 @@
       </p:sp>
       <p:sp>
         <p:nvSpPr>
-          <p:cNvPr id="20" name="Shape 18"/>
-          <p:cNvSpPr/>
-          <p:nvPr/>
-        </p:nvSpPr>
-        <p:spPr>
-          <a:xfrm>
-            <a:off x="731520" y="5221224"/>
-            <a:ext cx="566928" cy="566928"/>
+          <p:cNvPr id="19" name="Shape 14"/>
+          <p:cNvSpPr/>
+          <p:nvPr/>
+        </p:nvSpPr>
+        <p:spPr>
+          <a:xfrm>
+            <a:off x="758952" y="4005072"/>
+            <a:ext cx="713232" cy="713232"/>
           </a:xfrm>
           <a:prstGeom prst="ellipse">
             <a:avLst/>
           </a:prstGeom>
           <a:solidFill>
-            <a:srgbClr val="0B2545"/>
+            <a:srgbClr val="E8A33D"/>
           </a:solidFill>
           <a:ln/>
         </p:spPr>
       </p:sp>
-      <p:sp>
-        <p:nvSpPr>
-          <p:cNvPr id="21" name="Text 19"/>
-          <p:cNvSpPr/>
-          <p:nvPr/>
-        </p:nvSpPr>
-        <p:spPr>
-          <a:xfrm>
-            <a:off x="731520" y="5221224"/>
-            <a:ext cx="566928" cy="566928"/>
-          </a:xfrm>
-          <a:prstGeom prst="rect">
-            <a:avLst/>
-          </a:prstGeom>
-          <a:noFill/>
-          <a:ln/>
-        </p:spPr>
-        <p:txBody>
-          <a:bodyPr wrap="square" lIns="0" tIns="0" rIns="0" bIns="0" rtlCol="0" anchor="ctr"/>
-          <a:lstStyle/>
-          <a:p>
-            <a:pPr algn="ctr" indent="0" marL="0">
-              <a:buNone/>
-            </a:pPr>
-            <a:r>
-              <a:rPr lang="en-US" sz="1800" b="1" dirty="0">
-                <a:solidFill>
-                  <a:srgbClr val="FFFFFF"/>
-                </a:solidFill>
-                <a:latin typeface="Calibri" pitchFamily="34" charset="0"/>
-                <a:ea typeface="Calibri" pitchFamily="34" charset="-122"/>
-                <a:cs typeface="Calibri" pitchFamily="34" charset="-120"/>
-              </a:rPr>
-              <a:t>4</a:t>
-            </a:r>
-            <a:endParaRPr lang="en-US" sz="1800" dirty="0"/>
-          </a:p>
-        </p:txBody>
-      </p:sp>
-      <p:sp>
-        <p:nvSpPr>
-          <p:cNvPr id="22" name="Text 20"/>
-          <p:cNvSpPr/>
-          <p:nvPr/>
-        </p:nvSpPr>
-        <p:spPr>
-          <a:xfrm>
-            <a:off x="1508760" y="5129784"/>
-            <a:ext cx="10058400" cy="438912"/>
+      <p:pic>
+        <p:nvPicPr>
+          <p:cNvPr id="20" name="Image 3" descr="preencoded.png">    </p:cNvPr>
+          <p:cNvPicPr>
+            <a:picLocks noChangeAspect="1"/>
+          </p:cNvPicPr>
+          <p:nvPr/>
+        </p:nvPicPr>
+        <p:blipFill>
+          <a:blip r:embed="rId4"/>
+          <a:stretch>
+            <a:fillRect/>
+          </a:stretch>
+        </p:blipFill>
+        <p:spPr>
+          <a:xfrm>
+            <a:off x="944392" y="4190512"/>
+            <a:ext cx="342351" cy="342351"/>
+          </a:xfrm>
+          <a:prstGeom prst="rect">
+            <a:avLst/>
+          </a:prstGeom>
+        </p:spPr>
+      </p:pic>
+      <p:sp>
+        <p:nvSpPr>
+          <p:cNvPr id="21" name="Text 15"/>
+          <p:cNvSpPr/>
+          <p:nvPr/>
+        </p:nvSpPr>
+        <p:spPr>
+          <a:xfrm>
+            <a:off x="1600200" y="4023360"/>
+            <a:ext cx="2377440" cy="685800"/>
           </a:xfrm>
           <a:prstGeom prst="rect">
             <a:avLst/>
@@ -2745,10 +2842,13 @@
           <a:lstStyle/>
           <a:p>
             <a:pPr indent="0" marL="0">
-              <a:buNone/>
-            </a:pPr>
-            <a:r>
-              <a:rPr lang="en-US" sz="1550" b="1" dirty="0">
+              <a:lnSpc>
+                <a:spcPts val="1600"/>
+              </a:lnSpc>
+              <a:buNone/>
+            </a:pPr>
+            <a:r>
+              <a:rPr lang="en-US" sz="1450" b="1" dirty="0">
                 <a:solidFill>
                   <a:srgbClr val="0B2545"/>
                 </a:solidFill>
@@ -2756,22 +2856,22 @@
                 <a:ea typeface="Calibri" pitchFamily="34" charset="-122"/>
                 <a:cs typeface="Calibri" pitchFamily="34" charset="-120"/>
               </a:rPr>
-              <a:t>"Which &lt;records&gt; in &lt;region&gt; intersect &lt;layer&gt;?"</a:t>
-            </a:r>
-            <a:endParaRPr lang="en-US" sz="1550" dirty="0"/>
-          </a:p>
-        </p:txBody>
-      </p:sp>
-      <p:sp>
-        <p:nvSpPr>
-          <p:cNvPr id="23" name="Text 21"/>
-          <p:cNvSpPr/>
-          <p:nvPr/>
-        </p:nvSpPr>
-        <p:spPr>
-          <a:xfrm>
-            <a:off x="1508760" y="5522976"/>
-            <a:ext cx="10058400" cy="384048"/>
+              <a:t>Cross-layer 413</a:t>
+            </a:r>
+            <a:endParaRPr lang="en-US" sz="1450" dirty="0"/>
+          </a:p>
+        </p:txBody>
+      </p:sp>
+      <p:sp>
+        <p:nvSpPr>
+          <p:cNvPr id="22" name="Text 16"/>
+          <p:cNvSpPr/>
+          <p:nvPr/>
+        </p:nvSpPr>
+        <p:spPr>
+          <a:xfrm>
+            <a:off x="758952" y="4773168"/>
+            <a:ext cx="3145536" cy="1005840"/>
           </a:xfrm>
           <a:prstGeom prst="rect">
             <a:avLst/>
@@ -2784,10 +2884,13 @@
           <a:lstStyle/>
           <a:p>
             <a:pPr indent="0" marL="0">
-              <a:buNone/>
-            </a:pPr>
-            <a:r>
-              <a:rPr lang="en-US" sz="1250" dirty="0">
+              <a:lnSpc>
+                <a:spcPts val="1450"/>
+              </a:lnSpc>
+              <a:buNone/>
+            </a:pPr>
+            <a:r>
+              <a:rPr lang="en-US" sz="1150" dirty="0">
                 <a:solidFill>
                   <a:srgbClr val="5B6B7F"/>
                 </a:solidFill>
@@ -2795,15 +2898,329 @@
                 <a:ea typeface="Calibri" pitchFamily="34" charset="-122"/>
                 <a:cs typeface="Calibri" pitchFamily="34" charset="-120"/>
               </a:rPr>
-              <a:t>Cross-layer reveal — must stay region-scoped (else 413).</a:t>
-            </a:r>
-            <a:endParaRPr lang="en-US" sz="1250" dirty="0"/>
-          </a:p>
-        </p:txBody>
-      </p:sp>
-      <p:sp>
-        <p:nvSpPr>
-          <p:cNvPr id="24" name="Text 22"/>
+              <a:t>OOB agent submits national polygons as a spatial filter → 413. Fix: state-scope the prompt or pre-compute the attribute.</a:t>
+            </a:r>
+            <a:endParaRPr lang="en-US" sz="1150" dirty="0"/>
+          </a:p>
+        </p:txBody>
+      </p:sp>
+      <p:sp>
+        <p:nvSpPr>
+          <p:cNvPr id="23" name="Shape 17"/>
+          <p:cNvSpPr/>
+          <p:nvPr/>
+        </p:nvSpPr>
+        <p:spPr>
+          <a:xfrm>
+            <a:off x="4398264" y="3749040"/>
+            <a:ext cx="3657600" cy="2148840"/>
+          </a:xfrm>
+          <a:prstGeom prst="roundRect">
+            <a:avLst>
+              <a:gd name="adj" fmla="val 3404"/>
+            </a:avLst>
+          </a:prstGeom>
+          <a:solidFill>
+            <a:srgbClr val="F4F7FA"/>
+          </a:solidFill>
+          <a:ln/>
+          <a:effectLst>
+            <a:outerShdw sx="100000" sy="100000" kx="0" ky="0" algn="bl" rotWithShape="0" blurRad="88900" dist="38100" dir="5400000">
+              <a:srgbClr val="000000">
+                <a:alpha val="12000"/>
+              </a:srgbClr>
+            </a:outerShdw>
+          </a:effectLst>
+        </p:spPr>
+      </p:sp>
+      <p:sp>
+        <p:nvSpPr>
+          <p:cNvPr id="24" name="Shape 18"/>
+          <p:cNvSpPr/>
+          <p:nvPr/>
+        </p:nvSpPr>
+        <p:spPr>
+          <a:xfrm>
+            <a:off x="4654296" y="4005072"/>
+            <a:ext cx="713232" cy="713232"/>
+          </a:xfrm>
+          <a:prstGeom prst="ellipse">
+            <a:avLst/>
+          </a:prstGeom>
+          <a:solidFill>
+            <a:srgbClr val="E8A33D"/>
+          </a:solidFill>
+          <a:ln/>
+        </p:spPr>
+      </p:sp>
+      <p:pic>
+        <p:nvPicPr>
+          <p:cNvPr id="25" name="Image 4" descr="preencoded.png">    </p:cNvPr>
+          <p:cNvPicPr>
+            <a:picLocks noChangeAspect="1"/>
+          </p:cNvPicPr>
+          <p:nvPr/>
+        </p:nvPicPr>
+        <p:blipFill>
+          <a:blip r:embed="rId5"/>
+          <a:stretch>
+            <a:fillRect/>
+          </a:stretch>
+        </p:blipFill>
+        <p:spPr>
+          <a:xfrm>
+            <a:off x="4839736" y="4190512"/>
+            <a:ext cx="342351" cy="342351"/>
+          </a:xfrm>
+          <a:prstGeom prst="rect">
+            <a:avLst/>
+          </a:prstGeom>
+        </p:spPr>
+      </p:pic>
+      <p:sp>
+        <p:nvSpPr>
+          <p:cNvPr id="26" name="Text 19"/>
+          <p:cNvSpPr/>
+          <p:nvPr/>
+        </p:nvSpPr>
+        <p:spPr>
+          <a:xfrm>
+            <a:off x="5495544" y="4023360"/>
+            <a:ext cx="2377440" cy="685800"/>
+          </a:xfrm>
+          <a:prstGeom prst="rect">
+            <a:avLst/>
+          </a:prstGeom>
+          <a:noFill/>
+          <a:ln/>
+        </p:spPr>
+        <p:txBody>
+          <a:bodyPr wrap="square" lIns="0" tIns="0" rIns="0" bIns="0" rtlCol="0" anchor="ctr"/>
+          <a:lstStyle/>
+          <a:p>
+            <a:pPr indent="0" marL="0">
+              <a:lnSpc>
+                <a:spcPts val="1600"/>
+              </a:lnSpc>
+              <a:buNone/>
+            </a:pPr>
+            <a:r>
+              <a:rPr lang="en-US" sz="1450" b="1" dirty="0">
+                <a:solidFill>
+                  <a:srgbClr val="0B2545"/>
+                </a:solidFill>
+                <a:latin typeface="Calibri" pitchFamily="34" charset="0"/>
+                <a:ea typeface="Calibri" pitchFamily="34" charset="-122"/>
+                <a:cs typeface="Calibri" pitchFamily="34" charset="-120"/>
+              </a:rPr>
+              <a:t>Schema introspection lies</a:t>
+            </a:r>
+            <a:endParaRPr lang="en-US" sz="1450" dirty="0"/>
+          </a:p>
+        </p:txBody>
+      </p:sp>
+      <p:sp>
+        <p:nvSpPr>
+          <p:cNvPr id="27" name="Text 20"/>
+          <p:cNvSpPr/>
+          <p:nvPr/>
+        </p:nvSpPr>
+        <p:spPr>
+          <a:xfrm>
+            <a:off x="4654296" y="4773168"/>
+            <a:ext cx="3145536" cy="1005840"/>
+          </a:xfrm>
+          <a:prstGeom prst="rect">
+            <a:avLst/>
+          </a:prstGeom>
+          <a:noFill/>
+          <a:ln/>
+        </p:spPr>
+        <p:txBody>
+          <a:bodyPr wrap="square" lIns="0" tIns="0" rIns="0" bIns="0" rtlCol="0" anchor="ctr"/>
+          <a:lstStyle/>
+          <a:p>
+            <a:pPr indent="0" marL="0">
+              <a:lnSpc>
+                <a:spcPts val="1450"/>
+              </a:lnSpc>
+              <a:buNone/>
+            </a:pPr>
+            <a:r>
+              <a:rPr lang="en-US" sz="1150" dirty="0">
+                <a:solidFill>
+                  <a:srgbClr val="5B6B7F"/>
+                </a:solidFill>
+                <a:latin typeface="Calibri" pitchFamily="34" charset="0"/>
+                <a:ea typeface="Calibri" pitchFamily="34" charset="-122"/>
+                <a:cs typeface="Calibri" pitchFamily="34" charset="-120"/>
+              </a:rPr>
+              <a:t>"List fields" returned two contradictory lists in one turn. Verify schema via AGO Data → Fields — never the assistant.</a:t>
+            </a:r>
+            <a:endParaRPr lang="en-US" sz="1150" dirty="0"/>
+          </a:p>
+        </p:txBody>
+      </p:sp>
+      <p:sp>
+        <p:nvSpPr>
+          <p:cNvPr id="28" name="Shape 21"/>
+          <p:cNvSpPr/>
+          <p:nvPr/>
+        </p:nvSpPr>
+        <p:spPr>
+          <a:xfrm>
+            <a:off x="8293608" y="3749040"/>
+            <a:ext cx="3657600" cy="2148840"/>
+          </a:xfrm>
+          <a:prstGeom prst="roundRect">
+            <a:avLst>
+              <a:gd name="adj" fmla="val 3404"/>
+            </a:avLst>
+          </a:prstGeom>
+          <a:solidFill>
+            <a:srgbClr val="F4F7FA"/>
+          </a:solidFill>
+          <a:ln/>
+          <a:effectLst>
+            <a:outerShdw sx="100000" sy="100000" kx="0" ky="0" algn="bl" rotWithShape="0" blurRad="88900" dist="38100" dir="5400000">
+              <a:srgbClr val="000000">
+                <a:alpha val="12000"/>
+              </a:srgbClr>
+            </a:outerShdw>
+          </a:effectLst>
+        </p:spPr>
+      </p:sp>
+      <p:sp>
+        <p:nvSpPr>
+          <p:cNvPr id="29" name="Shape 22"/>
+          <p:cNvSpPr/>
+          <p:nvPr/>
+        </p:nvSpPr>
+        <p:spPr>
+          <a:xfrm>
+            <a:off x="8549640" y="4005072"/>
+            <a:ext cx="713232" cy="713232"/>
+          </a:xfrm>
+          <a:prstGeom prst="ellipse">
+            <a:avLst/>
+          </a:prstGeom>
+          <a:solidFill>
+            <a:srgbClr val="E8A33D"/>
+          </a:solidFill>
+          <a:ln/>
+        </p:spPr>
+      </p:sp>
+      <p:pic>
+        <p:nvPicPr>
+          <p:cNvPr id="30" name="Image 5" descr="preencoded.png">    </p:cNvPr>
+          <p:cNvPicPr>
+            <a:picLocks noChangeAspect="1"/>
+          </p:cNvPicPr>
+          <p:nvPr/>
+        </p:nvPicPr>
+        <p:blipFill>
+          <a:blip r:embed="rId6"/>
+          <a:stretch>
+            <a:fillRect/>
+          </a:stretch>
+        </p:blipFill>
+        <p:spPr>
+          <a:xfrm>
+            <a:off x="8735080" y="4190512"/>
+            <a:ext cx="342351" cy="342351"/>
+          </a:xfrm>
+          <a:prstGeom prst="rect">
+            <a:avLst/>
+          </a:prstGeom>
+        </p:spPr>
+      </p:pic>
+      <p:sp>
+        <p:nvSpPr>
+          <p:cNvPr id="31" name="Text 23"/>
+          <p:cNvSpPr/>
+          <p:nvPr/>
+        </p:nvSpPr>
+        <p:spPr>
+          <a:xfrm>
+            <a:off x="9390888" y="4023360"/>
+            <a:ext cx="2377440" cy="685800"/>
+          </a:xfrm>
+          <a:prstGeom prst="rect">
+            <a:avLst/>
+          </a:prstGeom>
+          <a:noFill/>
+          <a:ln/>
+        </p:spPr>
+        <p:txBody>
+          <a:bodyPr wrap="square" lIns="0" tIns="0" rIns="0" bIns="0" rtlCol="0" anchor="ctr"/>
+          <a:lstStyle/>
+          <a:p>
+            <a:pPr indent="0" marL="0">
+              <a:lnSpc>
+                <a:spcPts val="1600"/>
+              </a:lnSpc>
+              <a:buNone/>
+            </a:pPr>
+            <a:r>
+              <a:rPr lang="en-US" sz="1450" b="1" dirty="0">
+                <a:solidFill>
+                  <a:srgbClr val="0B2545"/>
+                </a:solidFill>
+                <a:latin typeface="Calibri" pitchFamily="34" charset="0"/>
+                <a:ea typeface="Calibri" pitchFamily="34" charset="-122"/>
+                <a:cs typeface="Calibri" pitchFamily="34" charset="-120"/>
+              </a:rPr>
+              <a:t>Verify, don't infer</a:t>
+            </a:r>
+            <a:endParaRPr lang="en-US" sz="1450" dirty="0"/>
+          </a:p>
+        </p:txBody>
+      </p:sp>
+      <p:sp>
+        <p:nvSpPr>
+          <p:cNvPr id="32" name="Text 24"/>
+          <p:cNvSpPr/>
+          <p:nvPr/>
+        </p:nvSpPr>
+        <p:spPr>
+          <a:xfrm>
+            <a:off x="8549640" y="4773168"/>
+            <a:ext cx="3145536" cy="1005840"/>
+          </a:xfrm>
+          <a:prstGeom prst="rect">
+            <a:avLst/>
+          </a:prstGeom>
+          <a:noFill/>
+          <a:ln/>
+        </p:spPr>
+        <p:txBody>
+          <a:bodyPr wrap="square" lIns="0" tIns="0" rIns="0" bIns="0" rtlCol="0" anchor="ctr"/>
+          <a:lstStyle/>
+          <a:p>
+            <a:pPr indent="0" marL="0">
+              <a:lnSpc>
+                <a:spcPts val="1450"/>
+              </a:lnSpc>
+              <a:buNone/>
+            </a:pPr>
+            <a:r>
+              <a:rPr lang="en-US" sz="1150" dirty="0">
+                <a:solidFill>
+                  <a:srgbClr val="5B6B7F"/>
+                </a:solidFill>
+                <a:latin typeface="Calibri" pitchFamily="34" charset="0"/>
+                <a:ea typeface="Calibri" pitchFamily="34" charset="-122"/>
+                <a:cs typeface="Calibri" pitchFamily="34" charset="-120"/>
+              </a:rPr>
+              <a:t>Filenames in dist/ aren't docs. We mounted a non-existent agent on a guess. Confirm against developers.arcgis.com.</a:t>
+            </a:r>
+            <a:endParaRPr lang="en-US" sz="1150" dirty="0"/>
+          </a:p>
+        </p:txBody>
+      </p:sp>
+      <p:sp>
+        <p:nvSpPr>
+          <p:cNvPr id="33" name="Text 25"/>
           <p:cNvSpPr/>
           <p:nvPr/>
         </p:nvSpPr>
@@ -2842,7 +3259,7 @@
       </p:sp>
       <p:sp>
         <p:nvSpPr>
-          <p:cNvPr id="25" name="Text 23"/>
+          <p:cNvPr id="34" name="Text 26"/>
           <p:cNvSpPr/>
           <p:nvPr/>
         </p:nvSpPr>
@@ -2890,6 +3307,1515 @@
 <file path=ppt/slides/slide11.xml><?xml version="1.0" encoding="utf-8"?>
 <p:sld xmlns:a="http://schemas.openxmlformats.org/drawingml/2006/main" xmlns:r="http://schemas.openxmlformats.org/officeDocument/2006/relationships" xmlns:p="http://schemas.openxmlformats.org/presentationml/2006/main">
   <p:cSld name="Slide 11">
+    <p:bg>
+      <p:bgPr>
+        <a:solidFill>
+          <a:srgbClr val="FFFFFF"/>
+        </a:solidFill>
+      </p:bgPr>
+    </p:bg>
+    <p:spTree>
+      <p:nvGrpSpPr>
+        <p:cNvPr id="1" name=""/>
+        <p:cNvGrpSpPr/>
+        <p:nvPr/>
+      </p:nvGrpSpPr>
+      <p:grpSpPr>
+        <a:xfrm>
+          <a:off x="0" y="0"/>
+          <a:ext cx="0" cy="0"/>
+          <a:chOff x="0" y="0"/>
+          <a:chExt cx="0" cy="0"/>
+        </a:xfrm>
+      </p:grpSpPr>
+      <p:sp>
+        <p:nvSpPr>
+          <p:cNvPr id="2" name="Text 0"/>
+          <p:cNvSpPr/>
+          <p:nvPr/>
+        </p:nvSpPr>
+        <p:spPr>
+          <a:xfrm>
+            <a:off x="502920" y="411480"/>
+            <a:ext cx="11155680" cy="640080"/>
+          </a:xfrm>
+          <a:prstGeom prst="rect">
+            <a:avLst/>
+          </a:prstGeom>
+          <a:noFill/>
+          <a:ln/>
+        </p:spPr>
+        <p:txBody>
+          <a:bodyPr wrap="square" lIns="0" tIns="0" rIns="0" bIns="0" rtlCol="0" anchor="ctr"/>
+          <a:lstStyle/>
+          <a:p>
+            <a:pPr indent="0" marL="0">
+              <a:buNone/>
+            </a:pPr>
+            <a:r>
+              <a:rPr lang="en-US" sz="2800" b="1" dirty="0">
+                <a:solidFill>
+                  <a:srgbClr val="0B2545"/>
+                </a:solidFill>
+                <a:latin typeface="Bookman Old Style" pitchFamily="34" charset="0"/>
+                <a:ea typeface="Bookman Old Style" pitchFamily="34" charset="-122"/>
+                <a:cs typeface="Bookman Old Style" pitchFamily="34" charset="-120"/>
+              </a:rPr>
+              <a:t>Prompt engineering: what the OOB agent can do</a:t>
+            </a:r>
+            <a:endParaRPr lang="en-US" sz="2800" dirty="0"/>
+          </a:p>
+        </p:txBody>
+      </p:sp>
+      <p:sp>
+        <p:nvSpPr>
+          <p:cNvPr id="3" name="Shape 1"/>
+          <p:cNvSpPr/>
+          <p:nvPr/>
+        </p:nvSpPr>
+        <p:spPr>
+          <a:xfrm>
+            <a:off x="502920" y="1371600"/>
+            <a:ext cx="5486400" cy="4572000"/>
+          </a:xfrm>
+          <a:prstGeom prst="roundRect">
+            <a:avLst>
+              <a:gd name="adj" fmla="val 2000"/>
+            </a:avLst>
+          </a:prstGeom>
+          <a:solidFill>
+            <a:srgbClr val="EAF4EF"/>
+          </a:solidFill>
+          <a:ln/>
+          <a:effectLst>
+            <a:outerShdw sx="100000" sy="100000" kx="0" ky="0" algn="bl" rotWithShape="0" blurRad="88900" dist="38100" dir="5400000">
+              <a:srgbClr val="000000">
+                <a:alpha val="12000"/>
+              </a:srgbClr>
+            </a:outerShdw>
+          </a:effectLst>
+        </p:spPr>
+      </p:sp>
+      <p:sp>
+        <p:nvSpPr>
+          <p:cNvPr id="4" name="Shape 2"/>
+          <p:cNvSpPr/>
+          <p:nvPr/>
+        </p:nvSpPr>
+        <p:spPr>
+          <a:xfrm>
+            <a:off x="822960" y="1645920"/>
+            <a:ext cx="731520" cy="731520"/>
+          </a:xfrm>
+          <a:prstGeom prst="ellipse">
+            <a:avLst/>
+          </a:prstGeom>
+          <a:solidFill>
+            <a:srgbClr val="2A9D6F"/>
+          </a:solidFill>
+          <a:ln/>
+        </p:spPr>
+      </p:sp>
+      <p:pic>
+        <p:nvPicPr>
+          <p:cNvPr id="5" name="Image 0" descr="preencoded.png">    </p:cNvPr>
+          <p:cNvPicPr>
+            <a:picLocks noChangeAspect="1"/>
+          </p:cNvPicPr>
+          <p:nvPr/>
+        </p:nvPicPr>
+        <p:blipFill>
+          <a:blip r:embed="rId1"/>
+          <a:stretch>
+            <a:fillRect/>
+          </a:stretch>
+        </p:blipFill>
+        <p:spPr>
+          <a:xfrm>
+            <a:off x="1013155" y="1836115"/>
+            <a:ext cx="351130" cy="351130"/>
+          </a:xfrm>
+          <a:prstGeom prst="rect">
+            <a:avLst/>
+          </a:prstGeom>
+        </p:spPr>
+      </p:pic>
+      <p:sp>
+        <p:nvSpPr>
+          <p:cNvPr id="6" name="Text 3"/>
+          <p:cNvSpPr/>
+          <p:nvPr/>
+        </p:nvSpPr>
+        <p:spPr>
+          <a:xfrm>
+            <a:off x="1691640" y="1645920"/>
+            <a:ext cx="4114800" cy="731520"/>
+          </a:xfrm>
+          <a:prstGeom prst="rect">
+            <a:avLst/>
+          </a:prstGeom>
+          <a:noFill/>
+          <a:ln/>
+        </p:spPr>
+        <p:txBody>
+          <a:bodyPr wrap="square" lIns="0" tIns="0" rIns="0" bIns="0" rtlCol="0" anchor="ctr"/>
+          <a:lstStyle/>
+          <a:p>
+            <a:pPr indent="0" marL="0">
+              <a:buNone/>
+            </a:pPr>
+            <a:r>
+              <a:rPr lang="en-US" sz="1800" b="1" dirty="0">
+                <a:solidFill>
+                  <a:srgbClr val="2A9D6F"/>
+                </a:solidFill>
+                <a:latin typeface="Calibri" pitchFamily="34" charset="0"/>
+                <a:ea typeface="Calibri" pitchFamily="34" charset="-122"/>
+                <a:cs typeface="Calibri" pitchFamily="34" charset="-120"/>
+              </a:rPr>
+              <a:t>Reliable — demo these</a:t>
+            </a:r>
+            <a:endParaRPr lang="en-US" sz="1800" dirty="0"/>
+          </a:p>
+        </p:txBody>
+      </p:sp>
+      <p:sp>
+        <p:nvSpPr>
+          <p:cNvPr id="7" name="Text 4"/>
+          <p:cNvSpPr/>
+          <p:nvPr/>
+        </p:nvSpPr>
+        <p:spPr>
+          <a:xfrm>
+            <a:off x="868680" y="2651760"/>
+            <a:ext cx="4937760" cy="3108960"/>
+          </a:xfrm>
+          <a:prstGeom prst="rect">
+            <a:avLst/>
+          </a:prstGeom>
+          <a:noFill/>
+          <a:ln/>
+        </p:spPr>
+        <p:txBody>
+          <a:bodyPr wrap="square" lIns="0" tIns="0" rIns="0" bIns="0" rtlCol="0" anchor="ctr"/>
+          <a:lstStyle/>
+          <a:p>
+            <a:pPr marL="342900" indent="-342900">
+              <a:lnSpc>
+                <a:spcPts val="2200"/>
+              </a:lnSpc>
+              <a:spcAft>
+                <a:spcPts val="1200"/>
+              </a:spcAft>
+              <a:buSzPct val="100000"/>
+              <a:buChar char="•"/>
+            </a:pPr>
+            <a:r>
+              <a:rPr lang="en-US" sz="1350" dirty="0">
+                <a:solidFill>
+                  <a:srgbClr val="1E293B"/>
+                </a:solidFill>
+                <a:latin typeface="Calibri" pitchFamily="34" charset="0"/>
+                <a:ea typeface="Calibri" pitchFamily="34" charset="-122"/>
+                <a:cs typeface="Calibri" pitchFamily="34" charset="-120"/>
+              </a:rPr>
+              <a:t>Attribute filters  ("show the high-priority records")</a:t>
+            </a:r>
+            <a:endParaRPr lang="en-US" sz="1350" dirty="0"/>
+          </a:p>
+          <a:p>
+            <a:pPr marL="342900" indent="-342900">
+              <a:lnSpc>
+                <a:spcPts val="2200"/>
+              </a:lnSpc>
+              <a:spcAft>
+                <a:spcPts val="1200"/>
+              </a:spcAft>
+              <a:buSzPct val="100000"/>
+              <a:buChar char="•"/>
+            </a:pPr>
+            <a:r>
+              <a:rPr lang="en-US" sz="1350" dirty="0">
+                <a:solidFill>
+                  <a:srgbClr val="1E293B"/>
+                </a:solidFill>
+                <a:latin typeface="Calibri" pitchFamily="34" charset="0"/>
+                <a:ea typeface="Calibri" pitchFamily="34" charset="-122"/>
+                <a:cs typeface="Calibri" pitchFamily="34" charset="-120"/>
+              </a:rPr>
+              <a:t>Single-group stats  ("average metric for a group")</a:t>
+            </a:r>
+            <a:endParaRPr lang="en-US" sz="1350" dirty="0"/>
+          </a:p>
+          <a:p>
+            <a:pPr marL="342900" indent="-342900">
+              <a:lnSpc>
+                <a:spcPts val="2200"/>
+              </a:lnSpc>
+              <a:spcAft>
+                <a:spcPts val="1200"/>
+              </a:spcAft>
+              <a:buSzPct val="100000"/>
+              <a:buChar char="•"/>
+            </a:pPr>
+            <a:r>
+              <a:rPr lang="en-US" sz="1350" dirty="0">
+                <a:solidFill>
+                  <a:srgbClr val="1E293B"/>
+                </a:solidFill>
+                <a:latin typeface="Calibri" pitchFamily="34" charset="0"/>
+                <a:ea typeface="Calibri" pitchFamily="34" charset="-122"/>
+                <a:cs typeface="Calibri" pitchFamily="34" charset="-120"/>
+              </a:rPr>
+              <a:t>Multi-attribute combos  (filter on two fields)</a:t>
+            </a:r>
+            <a:endParaRPr lang="en-US" sz="1350" dirty="0"/>
+          </a:p>
+          <a:p>
+            <a:pPr marL="342900" indent="-342900">
+              <a:lnSpc>
+                <a:spcPts val="2200"/>
+              </a:lnSpc>
+              <a:spcAft>
+                <a:spcPts val="1200"/>
+              </a:spcAft>
+              <a:buSzPct val="100000"/>
+              <a:buChar char="•"/>
+            </a:pPr>
+            <a:r>
+              <a:rPr lang="en-US" sz="1350" dirty="0">
+                <a:solidFill>
+                  <a:srgbClr val="1E293B"/>
+                </a:solidFill>
+                <a:latin typeface="Calibri" pitchFamily="34" charset="0"/>
+                <a:ea typeface="Calibri" pitchFamily="34" charset="-122"/>
+                <a:cs typeface="Calibri" pitchFamily="34" charset="-120"/>
+              </a:rPr>
+              <a:t>State / region-scoped cross-layer intersects</a:t>
+            </a:r>
+            <a:endParaRPr lang="en-US" sz="1350" dirty="0"/>
+          </a:p>
+          <a:p>
+            <a:pPr marL="342900" indent="-342900">
+              <a:lnSpc>
+                <a:spcPts val="2200"/>
+              </a:lnSpc>
+              <a:spcAft>
+                <a:spcPts val="1200"/>
+              </a:spcAft>
+              <a:buSzPct val="100000"/>
+              <a:buChar char="•"/>
+            </a:pPr>
+            <a:r>
+              <a:rPr lang="en-US" sz="1350" dirty="0">
+                <a:solidFill>
+                  <a:srgbClr val="1E293B"/>
+                </a:solidFill>
+                <a:latin typeface="Calibri" pitchFamily="34" charset="0"/>
+                <a:ea typeface="Calibri" pitchFamily="34" charset="-122"/>
+                <a:cs typeface="Calibri" pitchFamily="34" charset="-120"/>
+              </a:rPr>
+              <a:t>Pointed, single-subject questions</a:t>
+            </a:r>
+            <a:endParaRPr lang="en-US" sz="1350" dirty="0"/>
+          </a:p>
+        </p:txBody>
+      </p:sp>
+      <p:sp>
+        <p:nvSpPr>
+          <p:cNvPr id="8" name="Shape 5"/>
+          <p:cNvSpPr/>
+          <p:nvPr/>
+        </p:nvSpPr>
+        <p:spPr>
+          <a:xfrm>
+            <a:off x="6217920" y="1371600"/>
+            <a:ext cx="5486400" cy="4572000"/>
+          </a:xfrm>
+          <a:prstGeom prst="roundRect">
+            <a:avLst>
+              <a:gd name="adj" fmla="val 2000"/>
+            </a:avLst>
+          </a:prstGeom>
+          <a:solidFill>
+            <a:srgbClr val="FBEDEC"/>
+          </a:solidFill>
+          <a:ln/>
+          <a:effectLst>
+            <a:outerShdw sx="100000" sy="100000" kx="0" ky="0" algn="bl" rotWithShape="0" blurRad="88900" dist="38100" dir="5400000">
+              <a:srgbClr val="000000">
+                <a:alpha val="12000"/>
+              </a:srgbClr>
+            </a:outerShdw>
+          </a:effectLst>
+        </p:spPr>
+      </p:sp>
+      <p:sp>
+        <p:nvSpPr>
+          <p:cNvPr id="9" name="Shape 6"/>
+          <p:cNvSpPr/>
+          <p:nvPr/>
+        </p:nvSpPr>
+        <p:spPr>
+          <a:xfrm>
+            <a:off x="6537960" y="1645920"/>
+            <a:ext cx="731520" cy="731520"/>
+          </a:xfrm>
+          <a:prstGeom prst="ellipse">
+            <a:avLst/>
+          </a:prstGeom>
+          <a:solidFill>
+            <a:srgbClr val="C24A45"/>
+          </a:solidFill>
+          <a:ln/>
+        </p:spPr>
+      </p:sp>
+      <p:pic>
+        <p:nvPicPr>
+          <p:cNvPr id="10" name="Image 1" descr="preencoded.png">    </p:cNvPr>
+          <p:cNvPicPr>
+            <a:picLocks noChangeAspect="1"/>
+          </p:cNvPicPr>
+          <p:nvPr/>
+        </p:nvPicPr>
+        <p:blipFill>
+          <a:blip r:embed="rId2"/>
+          <a:stretch>
+            <a:fillRect/>
+          </a:stretch>
+        </p:blipFill>
+        <p:spPr>
+          <a:xfrm>
+            <a:off x="6728155" y="1836115"/>
+            <a:ext cx="351130" cy="351130"/>
+          </a:xfrm>
+          <a:prstGeom prst="rect">
+            <a:avLst/>
+          </a:prstGeom>
+        </p:spPr>
+      </p:pic>
+      <p:sp>
+        <p:nvSpPr>
+          <p:cNvPr id="11" name="Text 7"/>
+          <p:cNvSpPr/>
+          <p:nvPr/>
+        </p:nvSpPr>
+        <p:spPr>
+          <a:xfrm>
+            <a:off x="7406640" y="1645920"/>
+            <a:ext cx="4114800" cy="731520"/>
+          </a:xfrm>
+          <a:prstGeom prst="rect">
+            <a:avLst/>
+          </a:prstGeom>
+          <a:noFill/>
+          <a:ln/>
+        </p:spPr>
+        <p:txBody>
+          <a:bodyPr wrap="square" lIns="0" tIns="0" rIns="0" bIns="0" rtlCol="0" anchor="ctr"/>
+          <a:lstStyle/>
+          <a:p>
+            <a:pPr indent="0" marL="0">
+              <a:buNone/>
+            </a:pPr>
+            <a:r>
+              <a:rPr lang="en-US" sz="1800" b="1" dirty="0">
+                <a:solidFill>
+                  <a:srgbClr val="C24A45"/>
+                </a:solidFill>
+                <a:latin typeface="Calibri" pitchFamily="34" charset="0"/>
+                <a:ea typeface="Calibri" pitchFamily="34" charset="-122"/>
+                <a:cs typeface="Calibri" pitchFamily="34" charset="-120"/>
+              </a:rPr>
+              <a:t>Fails / degrades — keep out</a:t>
+            </a:r>
+            <a:endParaRPr lang="en-US" sz="1800" dirty="0"/>
+          </a:p>
+        </p:txBody>
+      </p:sp>
+      <p:sp>
+        <p:nvSpPr>
+          <p:cNvPr id="12" name="Text 8"/>
+          <p:cNvSpPr/>
+          <p:nvPr/>
+        </p:nvSpPr>
+        <p:spPr>
+          <a:xfrm>
+            <a:off x="6583680" y="2651760"/>
+            <a:ext cx="4937760" cy="3108960"/>
+          </a:xfrm>
+          <a:prstGeom prst="rect">
+            <a:avLst/>
+          </a:prstGeom>
+          <a:noFill/>
+          <a:ln/>
+        </p:spPr>
+        <p:txBody>
+          <a:bodyPr wrap="square" lIns="0" tIns="0" rIns="0" bIns="0" rtlCol="0" anchor="ctr"/>
+          <a:lstStyle/>
+          <a:p>
+            <a:pPr marL="342900" indent="-342900">
+              <a:lnSpc>
+                <a:spcPts val="2200"/>
+              </a:lnSpc>
+              <a:spcAft>
+                <a:spcPts val="1200"/>
+              </a:spcAft>
+              <a:buSzPct val="100000"/>
+              <a:buChar char="•"/>
+            </a:pPr>
+            <a:r>
+              <a:rPr lang="en-US" sz="1350" dirty="0">
+                <a:solidFill>
+                  <a:srgbClr val="1E293B"/>
+                </a:solidFill>
+                <a:latin typeface="Calibri" pitchFamily="34" charset="0"/>
+                <a:ea typeface="Calibri" pitchFamily="34" charset="-122"/>
+                <a:cs typeface="Calibri" pitchFamily="34" charset="-120"/>
+              </a:rPr>
+              <a:t>Schema introspection  ("list fields") — hallucinates</a:t>
+            </a:r>
+            <a:endParaRPr lang="en-US" sz="1350" dirty="0"/>
+          </a:p>
+          <a:p>
+            <a:pPr marL="342900" indent="-342900">
+              <a:lnSpc>
+                <a:spcPts val="2200"/>
+              </a:lnSpc>
+              <a:spcAft>
+                <a:spcPts val="1200"/>
+              </a:spcAft>
+              <a:buSzPct val="100000"/>
+              <a:buChar char="•"/>
+            </a:pPr>
+            <a:r>
+              <a:rPr lang="en-US" sz="1350" dirty="0">
+                <a:solidFill>
+                  <a:srgbClr val="1E293B"/>
+                </a:solidFill>
+                <a:latin typeface="Calibri" pitchFamily="34" charset="0"/>
+                <a:ea typeface="Calibri" pitchFamily="34" charset="-122"/>
+                <a:cs typeface="Calibri" pitchFamily="34" charset="-120"/>
+              </a:rPr>
+              <a:t>Cross-category comparison — silently degrades</a:t>
+            </a:r>
+            <a:endParaRPr lang="en-US" sz="1350" dirty="0"/>
+          </a:p>
+          <a:p>
+            <a:pPr marL="342900" indent="-342900">
+              <a:lnSpc>
+                <a:spcPts val="2200"/>
+              </a:lnSpc>
+              <a:spcAft>
+                <a:spcPts val="1200"/>
+              </a:spcAft>
+              <a:buSzPct val="100000"/>
+              <a:buChar char="•"/>
+            </a:pPr>
+            <a:r>
+              <a:rPr lang="en-US" sz="1350" dirty="0">
+                <a:solidFill>
+                  <a:srgbClr val="1E293B"/>
+                </a:solidFill>
+                <a:latin typeface="Calibri" pitchFamily="34" charset="0"/>
+                <a:ea typeface="Calibri" pitchFamily="34" charset="-122"/>
+                <a:cs typeface="Calibri" pitchFamily="34" charset="-120"/>
+              </a:rPr>
+              <a:t>Unbounded cross-layer  — 413 error</a:t>
+            </a:r>
+            <a:endParaRPr lang="en-US" sz="1350" dirty="0"/>
+          </a:p>
+          <a:p>
+            <a:pPr marL="342900" indent="-342900">
+              <a:lnSpc>
+                <a:spcPts val="2200"/>
+              </a:lnSpc>
+              <a:spcAft>
+                <a:spcPts val="1200"/>
+              </a:spcAft>
+              <a:buSzPct val="100000"/>
+              <a:buChar char="•"/>
+            </a:pPr>
+            <a:r>
+              <a:rPr lang="en-US" sz="1350" dirty="0">
+                <a:solidFill>
+                  <a:srgbClr val="1E293B"/>
+                </a:solidFill>
+                <a:latin typeface="Calibri" pitchFamily="34" charset="0"/>
+                <a:ea typeface="Calibri" pitchFamily="34" charset="-122"/>
+                <a:cs typeface="Calibri" pitchFamily="34" charset="-120"/>
+              </a:rPr>
+              <a:t>Broad sweeps  (vague, unscoped questions)</a:t>
+            </a:r>
+            <a:endParaRPr lang="en-US" sz="1350" dirty="0"/>
+          </a:p>
+          <a:p>
+            <a:pPr marL="342900" indent="-342900">
+              <a:lnSpc>
+                <a:spcPts val="2200"/>
+              </a:lnSpc>
+              <a:spcAft>
+                <a:spcPts val="1200"/>
+              </a:spcAft>
+              <a:buSzPct val="100000"/>
+              <a:buChar char="•"/>
+            </a:pPr>
+            <a:r>
+              <a:rPr lang="en-US" sz="1350" dirty="0">
+                <a:solidFill>
+                  <a:srgbClr val="1E293B"/>
+                </a:solidFill>
+                <a:latin typeface="Calibri" pitchFamily="34" charset="0"/>
+                <a:ea typeface="Calibri" pitchFamily="34" charset="-122"/>
+                <a:cs typeface="Calibri" pitchFamily="34" charset="-120"/>
+              </a:rPr>
+              <a:t>Charts · forecasts · email · user location</a:t>
+            </a:r>
+            <a:endParaRPr lang="en-US" sz="1350" dirty="0"/>
+          </a:p>
+        </p:txBody>
+      </p:sp>
+      <p:sp>
+        <p:nvSpPr>
+          <p:cNvPr id="13" name="Text 9"/>
+          <p:cNvSpPr/>
+          <p:nvPr/>
+        </p:nvSpPr>
+        <p:spPr>
+          <a:xfrm>
+            <a:off x="502920" y="6473952"/>
+            <a:ext cx="7315200" cy="274320"/>
+          </a:xfrm>
+          <a:prstGeom prst="rect">
+            <a:avLst/>
+          </a:prstGeom>
+          <a:noFill/>
+          <a:ln/>
+        </p:spPr>
+        <p:txBody>
+          <a:bodyPr wrap="square" lIns="0" tIns="0" rIns="0" bIns="0" rtlCol="0" anchor="ctr"/>
+          <a:lstStyle/>
+          <a:p>
+            <a:pPr algn="l" indent="0" marL="0">
+              <a:buNone/>
+            </a:pPr>
+            <a:r>
+              <a:rPr lang="en-US" sz="900" dirty="0">
+                <a:solidFill>
+                  <a:srgbClr val="5B6B7F"/>
+                </a:solidFill>
+                <a:latin typeface="Calibri" pitchFamily="34" charset="0"/>
+                <a:ea typeface="Calibri" pitchFamily="34" charset="-122"/>
+                <a:cs typeface="Calibri" pitchFamily="34" charset="-120"/>
+              </a:rPr>
+              <a:t>ArcGIS Maps SDK 5.0 · AI Components Demo</a:t>
+            </a:r>
+            <a:endParaRPr lang="en-US" sz="900" dirty="0"/>
+          </a:p>
+        </p:txBody>
+      </p:sp>
+      <p:sp>
+        <p:nvSpPr>
+          <p:cNvPr id="14" name="Text 10"/>
+          <p:cNvSpPr/>
+          <p:nvPr/>
+        </p:nvSpPr>
+        <p:spPr>
+          <a:xfrm>
+            <a:off x="11277295" y="6473952"/>
+            <a:ext cx="457200" cy="274320"/>
+          </a:xfrm>
+          <a:prstGeom prst="rect">
+            <a:avLst/>
+          </a:prstGeom>
+          <a:noFill/>
+          <a:ln/>
+        </p:spPr>
+        <p:txBody>
+          <a:bodyPr wrap="square" lIns="0" tIns="0" rIns="0" bIns="0" rtlCol="0" anchor="ctr"/>
+          <a:lstStyle/>
+          <a:p>
+            <a:pPr algn="r" indent="0" marL="0">
+              <a:buNone/>
+            </a:pPr>
+            <a:r>
+              <a:rPr lang="en-US" sz="900" dirty="0">
+                <a:solidFill>
+                  <a:srgbClr val="5B6B7F"/>
+                </a:solidFill>
+                <a:latin typeface="Calibri" pitchFamily="34" charset="0"/>
+                <a:ea typeface="Calibri" pitchFamily="34" charset="-122"/>
+                <a:cs typeface="Calibri" pitchFamily="34" charset="-120"/>
+              </a:rPr>
+              <a:t>11</a:t>
+            </a:r>
+            <a:endParaRPr lang="en-US" sz="900" dirty="0"/>
+          </a:p>
+        </p:txBody>
+      </p:sp>
+    </p:spTree>
+  </p:cSld>
+  <p:clrMapOvr>
+    <a:masterClrMapping/>
+  </p:clrMapOvr>
+</p:sld>
+</file>
+
+<file path=ppt/slides/slide12.xml><?xml version="1.0" encoding="utf-8"?>
+<p:sld xmlns:a="http://schemas.openxmlformats.org/drawingml/2006/main" xmlns:r="http://schemas.openxmlformats.org/officeDocument/2006/relationships" xmlns:p="http://schemas.openxmlformats.org/presentationml/2006/main">
+  <p:cSld name="Slide 12">
+    <p:bg>
+      <p:bgPr>
+        <a:solidFill>
+          <a:srgbClr val="FFFFFF"/>
+        </a:solidFill>
+      </p:bgPr>
+    </p:bg>
+    <p:spTree>
+      <p:nvGrpSpPr>
+        <p:cNvPr id="1" name=""/>
+        <p:cNvGrpSpPr/>
+        <p:nvPr/>
+      </p:nvGrpSpPr>
+      <p:grpSpPr>
+        <a:xfrm>
+          <a:off x="0" y="0"/>
+          <a:ext cx="0" cy="0"/>
+          <a:chOff x="0" y="0"/>
+          <a:chExt cx="0" cy="0"/>
+        </a:xfrm>
+      </p:grpSpPr>
+      <p:sp>
+        <p:nvSpPr>
+          <p:cNvPr id="2" name="Text 0"/>
+          <p:cNvSpPr/>
+          <p:nvPr/>
+        </p:nvSpPr>
+        <p:spPr>
+          <a:xfrm>
+            <a:off x="502920" y="411480"/>
+            <a:ext cx="11155680" cy="640080"/>
+          </a:xfrm>
+          <a:prstGeom prst="rect">
+            <a:avLst/>
+          </a:prstGeom>
+          <a:noFill/>
+          <a:ln/>
+        </p:spPr>
+        <p:txBody>
+          <a:bodyPr wrap="square" lIns="0" tIns="0" rIns="0" bIns="0" rtlCol="0" anchor="ctr"/>
+          <a:lstStyle/>
+          <a:p>
+            <a:pPr indent="0" marL="0">
+              <a:buNone/>
+            </a:pPr>
+            <a:r>
+              <a:rPr lang="en-US" sz="3000" b="1" dirty="0">
+                <a:solidFill>
+                  <a:srgbClr val="0B2545"/>
+                </a:solidFill>
+                <a:latin typeface="Bookman Old Style" pitchFamily="34" charset="0"/>
+                <a:ea typeface="Bookman Old Style" pitchFamily="34" charset="-122"/>
+                <a:cs typeface="Bookman Old Style" pitchFamily="34" charset="-120"/>
+              </a:rPr>
+              <a:t>The demo run sheet — prompt shapes that work</a:t>
+            </a:r>
+            <a:endParaRPr lang="en-US" sz="3000" dirty="0"/>
+          </a:p>
+        </p:txBody>
+      </p:sp>
+      <p:sp>
+        <p:nvSpPr>
+          <p:cNvPr id="3" name="Text 1"/>
+          <p:cNvSpPr/>
+          <p:nvPr/>
+        </p:nvSpPr>
+        <p:spPr>
+          <a:xfrm>
+            <a:off x="502920" y="1078992"/>
+            <a:ext cx="10972800" cy="457200"/>
+          </a:xfrm>
+          <a:prstGeom prst="rect">
+            <a:avLst/>
+          </a:prstGeom>
+          <a:noFill/>
+          <a:ln/>
+        </p:spPr>
+        <p:txBody>
+          <a:bodyPr wrap="square" lIns="0" tIns="0" rIns="0" bIns="0" rtlCol="0" anchor="ctr"/>
+          <a:lstStyle/>
+          <a:p>
+            <a:pPr indent="0" marL="0">
+              <a:buNone/>
+            </a:pPr>
+            <a:r>
+              <a:rPr lang="en-US" sz="1400" dirty="0">
+                <a:solidFill>
+                  <a:srgbClr val="5B6B7F"/>
+                </a:solidFill>
+                <a:latin typeface="Calibri" pitchFamily="34" charset="0"/>
+                <a:ea typeface="Calibri" pitchFamily="34" charset="-122"/>
+                <a:cs typeface="Calibri" pitchFamily="34" charset="-120"/>
+              </a:rPr>
+              <a:t>Fill these with prompts you've verified against your data. Build from simple to the strongest hook.</a:t>
+            </a:r>
+            <a:endParaRPr lang="en-US" sz="1400" dirty="0"/>
+          </a:p>
+        </p:txBody>
+      </p:sp>
+      <p:sp>
+        <p:nvSpPr>
+          <p:cNvPr id="4" name="Shape 2"/>
+          <p:cNvSpPr/>
+          <p:nvPr/>
+        </p:nvSpPr>
+        <p:spPr>
+          <a:xfrm>
+            <a:off x="502920" y="1783080"/>
+            <a:ext cx="11201400" cy="932688"/>
+          </a:xfrm>
+          <a:prstGeom prst="roundRect">
+            <a:avLst>
+              <a:gd name="adj" fmla="val 7843"/>
+            </a:avLst>
+          </a:prstGeom>
+          <a:solidFill>
+            <a:srgbClr val="F4F7FA"/>
+          </a:solidFill>
+          <a:ln/>
+          <a:effectLst>
+            <a:outerShdw sx="100000" sy="100000" kx="0" ky="0" algn="bl" rotWithShape="0" blurRad="88900" dist="38100" dir="5400000">
+              <a:srgbClr val="000000">
+                <a:alpha val="12000"/>
+              </a:srgbClr>
+            </a:outerShdw>
+          </a:effectLst>
+        </p:spPr>
+      </p:sp>
+      <p:sp>
+        <p:nvSpPr>
+          <p:cNvPr id="5" name="Shape 3"/>
+          <p:cNvSpPr/>
+          <p:nvPr/>
+        </p:nvSpPr>
+        <p:spPr>
+          <a:xfrm>
+            <a:off x="731520" y="1984248"/>
+            <a:ext cx="566928" cy="566928"/>
+          </a:xfrm>
+          <a:prstGeom prst="ellipse">
+            <a:avLst/>
+          </a:prstGeom>
+          <a:solidFill>
+            <a:srgbClr val="1C7293"/>
+          </a:solidFill>
+          <a:ln/>
+        </p:spPr>
+      </p:sp>
+      <p:sp>
+        <p:nvSpPr>
+          <p:cNvPr id="6" name="Text 4"/>
+          <p:cNvSpPr/>
+          <p:nvPr/>
+        </p:nvSpPr>
+        <p:spPr>
+          <a:xfrm>
+            <a:off x="731520" y="1984248"/>
+            <a:ext cx="566928" cy="566928"/>
+          </a:xfrm>
+          <a:prstGeom prst="rect">
+            <a:avLst/>
+          </a:prstGeom>
+          <a:noFill/>
+          <a:ln/>
+        </p:spPr>
+        <p:txBody>
+          <a:bodyPr wrap="square" lIns="0" tIns="0" rIns="0" bIns="0" rtlCol="0" anchor="ctr"/>
+          <a:lstStyle/>
+          <a:p>
+            <a:pPr algn="ctr" indent="0" marL="0">
+              <a:buNone/>
+            </a:pPr>
+            <a:r>
+              <a:rPr lang="en-US" sz="1800" b="1" dirty="0">
+                <a:solidFill>
+                  <a:srgbClr val="FFFFFF"/>
+                </a:solidFill>
+                <a:latin typeface="Calibri" pitchFamily="34" charset="0"/>
+                <a:ea typeface="Calibri" pitchFamily="34" charset="-122"/>
+                <a:cs typeface="Calibri" pitchFamily="34" charset="-120"/>
+              </a:rPr>
+              <a:t>1</a:t>
+            </a:r>
+            <a:endParaRPr lang="en-US" sz="1800" dirty="0"/>
+          </a:p>
+        </p:txBody>
+      </p:sp>
+      <p:sp>
+        <p:nvSpPr>
+          <p:cNvPr id="7" name="Text 5"/>
+          <p:cNvSpPr/>
+          <p:nvPr/>
+        </p:nvSpPr>
+        <p:spPr>
+          <a:xfrm>
+            <a:off x="1508760" y="1892808"/>
+            <a:ext cx="10058400" cy="438912"/>
+          </a:xfrm>
+          <a:prstGeom prst="rect">
+            <a:avLst/>
+          </a:prstGeom>
+          <a:noFill/>
+          <a:ln/>
+        </p:spPr>
+        <p:txBody>
+          <a:bodyPr wrap="square" lIns="0" tIns="0" rIns="0" bIns="0" rtlCol="0" anchor="ctr"/>
+          <a:lstStyle/>
+          <a:p>
+            <a:pPr indent="0" marL="0">
+              <a:buNone/>
+            </a:pPr>
+            <a:r>
+              <a:rPr lang="en-US" sz="1550" b="1" dirty="0">
+                <a:solidFill>
+                  <a:srgbClr val="0B2545"/>
+                </a:solidFill>
+                <a:latin typeface="Calibri" pitchFamily="34" charset="0"/>
+                <a:ea typeface="Calibri" pitchFamily="34" charset="-122"/>
+                <a:cs typeface="Calibri" pitchFamily="34" charset="-120"/>
+              </a:rPr>
+              <a:t>"Show me the &lt;high-priority&gt; &lt;records&gt;."</a:t>
+            </a:r>
+            <a:endParaRPr lang="en-US" sz="1550" dirty="0"/>
+          </a:p>
+        </p:txBody>
+      </p:sp>
+      <p:sp>
+        <p:nvSpPr>
+          <p:cNvPr id="8" name="Text 6"/>
+          <p:cNvSpPr/>
+          <p:nvPr/>
+        </p:nvSpPr>
+        <p:spPr>
+          <a:xfrm>
+            <a:off x="1508760" y="2286000"/>
+            <a:ext cx="10058400" cy="384048"/>
+          </a:xfrm>
+          <a:prstGeom prst="rect">
+            <a:avLst/>
+          </a:prstGeom>
+          <a:noFill/>
+          <a:ln/>
+        </p:spPr>
+        <p:txBody>
+          <a:bodyPr wrap="square" lIns="0" tIns="0" rIns="0" bIns="0" rtlCol="0" anchor="ctr"/>
+          <a:lstStyle/>
+          <a:p>
+            <a:pPr indent="0" marL="0">
+              <a:buNone/>
+            </a:pPr>
+            <a:r>
+              <a:rPr lang="en-US" sz="1250" dirty="0">
+                <a:solidFill>
+                  <a:srgbClr val="5B6B7F"/>
+                </a:solidFill>
+                <a:latin typeface="Calibri" pitchFamily="34" charset="0"/>
+                <a:ea typeface="Calibri" pitchFamily="34" charset="-122"/>
+                <a:cs typeface="Calibri" pitchFamily="34" charset="-120"/>
+              </a:rPr>
+              <a:t>Opener — single-attribute filter. Verify the count is stable.</a:t>
+            </a:r>
+            <a:endParaRPr lang="en-US" sz="1250" dirty="0"/>
+          </a:p>
+        </p:txBody>
+      </p:sp>
+      <p:sp>
+        <p:nvSpPr>
+          <p:cNvPr id="9" name="Shape 7"/>
+          <p:cNvSpPr/>
+          <p:nvPr/>
+        </p:nvSpPr>
+        <p:spPr>
+          <a:xfrm>
+            <a:off x="502920" y="2862072"/>
+            <a:ext cx="11201400" cy="932688"/>
+          </a:xfrm>
+          <a:prstGeom prst="roundRect">
+            <a:avLst>
+              <a:gd name="adj" fmla="val 7843"/>
+            </a:avLst>
+          </a:prstGeom>
+          <a:solidFill>
+            <a:srgbClr val="F4F7FA"/>
+          </a:solidFill>
+          <a:ln/>
+          <a:effectLst>
+            <a:outerShdw sx="100000" sy="100000" kx="0" ky="0" algn="bl" rotWithShape="0" blurRad="88900" dist="38100" dir="5400000">
+              <a:srgbClr val="000000">
+                <a:alpha val="12000"/>
+              </a:srgbClr>
+            </a:outerShdw>
+          </a:effectLst>
+        </p:spPr>
+      </p:sp>
+      <p:sp>
+        <p:nvSpPr>
+          <p:cNvPr id="10" name="Shape 8"/>
+          <p:cNvSpPr/>
+          <p:nvPr/>
+        </p:nvSpPr>
+        <p:spPr>
+          <a:xfrm>
+            <a:off x="731520" y="3063240"/>
+            <a:ext cx="566928" cy="566928"/>
+          </a:xfrm>
+          <a:prstGeom prst="ellipse">
+            <a:avLst/>
+          </a:prstGeom>
+          <a:solidFill>
+            <a:srgbClr val="1C7293"/>
+          </a:solidFill>
+          <a:ln/>
+        </p:spPr>
+      </p:sp>
+      <p:sp>
+        <p:nvSpPr>
+          <p:cNvPr id="11" name="Text 9"/>
+          <p:cNvSpPr/>
+          <p:nvPr/>
+        </p:nvSpPr>
+        <p:spPr>
+          <a:xfrm>
+            <a:off x="731520" y="3063240"/>
+            <a:ext cx="566928" cy="566928"/>
+          </a:xfrm>
+          <a:prstGeom prst="rect">
+            <a:avLst/>
+          </a:prstGeom>
+          <a:noFill/>
+          <a:ln/>
+        </p:spPr>
+        <p:txBody>
+          <a:bodyPr wrap="square" lIns="0" tIns="0" rIns="0" bIns="0" rtlCol="0" anchor="ctr"/>
+          <a:lstStyle/>
+          <a:p>
+            <a:pPr algn="ctr" indent="0" marL="0">
+              <a:buNone/>
+            </a:pPr>
+            <a:r>
+              <a:rPr lang="en-US" sz="1800" b="1" dirty="0">
+                <a:solidFill>
+                  <a:srgbClr val="FFFFFF"/>
+                </a:solidFill>
+                <a:latin typeface="Calibri" pitchFamily="34" charset="0"/>
+                <a:ea typeface="Calibri" pitchFamily="34" charset="-122"/>
+                <a:cs typeface="Calibri" pitchFamily="34" charset="-120"/>
+              </a:rPr>
+              <a:t>2</a:t>
+            </a:r>
+            <a:endParaRPr lang="en-US" sz="1800" dirty="0"/>
+          </a:p>
+        </p:txBody>
+      </p:sp>
+      <p:sp>
+        <p:nvSpPr>
+          <p:cNvPr id="12" name="Text 10"/>
+          <p:cNvSpPr/>
+          <p:nvPr/>
+        </p:nvSpPr>
+        <p:spPr>
+          <a:xfrm>
+            <a:off x="1508760" y="2971800"/>
+            <a:ext cx="10058400" cy="438912"/>
+          </a:xfrm>
+          <a:prstGeom prst="rect">
+            <a:avLst/>
+          </a:prstGeom>
+          <a:noFill/>
+          <a:ln/>
+        </p:spPr>
+        <p:txBody>
+          <a:bodyPr wrap="square" lIns="0" tIns="0" rIns="0" bIns="0" rtlCol="0" anchor="ctr"/>
+          <a:lstStyle/>
+          <a:p>
+            <a:pPr indent="0" marL="0">
+              <a:buNone/>
+            </a:pPr>
+            <a:r>
+              <a:rPr lang="en-US" sz="1550" b="1" dirty="0">
+                <a:solidFill>
+                  <a:srgbClr val="0B2545"/>
+                </a:solidFill>
+                <a:latin typeface="Calibri" pitchFamily="34" charset="0"/>
+                <a:ea typeface="Calibri" pitchFamily="34" charset="-122"/>
+                <a:cs typeface="Calibri" pitchFamily="34" charset="-120"/>
+              </a:rPr>
+              <a:t>"Average &lt;metric&gt; for &lt;one category&gt;?"</a:t>
+            </a:r>
+            <a:endParaRPr lang="en-US" sz="1550" dirty="0"/>
+          </a:p>
+        </p:txBody>
+      </p:sp>
+      <p:sp>
+        <p:nvSpPr>
+          <p:cNvPr id="13" name="Text 11"/>
+          <p:cNvSpPr/>
+          <p:nvPr/>
+        </p:nvSpPr>
+        <p:spPr>
+          <a:xfrm>
+            <a:off x="1508760" y="3364992"/>
+            <a:ext cx="10058400" cy="384048"/>
+          </a:xfrm>
+          <a:prstGeom prst="rect">
+            <a:avLst/>
+          </a:prstGeom>
+          <a:noFill/>
+          <a:ln/>
+        </p:spPr>
+        <p:txBody>
+          <a:bodyPr wrap="square" lIns="0" tIns="0" rIns="0" bIns="0" rtlCol="0" anchor="ctr"/>
+          <a:lstStyle/>
+          <a:p>
+            <a:pPr indent="0" marL="0">
+              <a:buNone/>
+            </a:pPr>
+            <a:r>
+              <a:rPr lang="en-US" sz="1250" dirty="0">
+                <a:solidFill>
+                  <a:srgbClr val="5B6B7F"/>
+                </a:solidFill>
+                <a:latin typeface="Calibri" pitchFamily="34" charset="0"/>
+                <a:ea typeface="Calibri" pitchFamily="34" charset="-122"/>
+                <a:cs typeface="Calibri" pitchFamily="34" charset="-120"/>
+              </a:rPr>
+              <a:t>Single-group stat. (Don't ask it to COMPARE two categories live.)</a:t>
+            </a:r>
+            <a:endParaRPr lang="en-US" sz="1250" dirty="0"/>
+          </a:p>
+        </p:txBody>
+      </p:sp>
+      <p:sp>
+        <p:nvSpPr>
+          <p:cNvPr id="14" name="Shape 12"/>
+          <p:cNvSpPr/>
+          <p:nvPr/>
+        </p:nvSpPr>
+        <p:spPr>
+          <a:xfrm>
+            <a:off x="502920" y="3941064"/>
+            <a:ext cx="11201400" cy="932688"/>
+          </a:xfrm>
+          <a:prstGeom prst="roundRect">
+            <a:avLst>
+              <a:gd name="adj" fmla="val 7843"/>
+            </a:avLst>
+          </a:prstGeom>
+          <a:solidFill>
+            <a:srgbClr val="F4F7FA"/>
+          </a:solidFill>
+          <a:ln/>
+          <a:effectLst>
+            <a:outerShdw sx="100000" sy="100000" kx="0" ky="0" algn="bl" rotWithShape="0" blurRad="88900" dist="38100" dir="5400000">
+              <a:srgbClr val="000000">
+                <a:alpha val="12000"/>
+              </a:srgbClr>
+            </a:outerShdw>
+          </a:effectLst>
+        </p:spPr>
+      </p:sp>
+      <p:sp>
+        <p:nvSpPr>
+          <p:cNvPr id="15" name="Shape 13"/>
+          <p:cNvSpPr/>
+          <p:nvPr/>
+        </p:nvSpPr>
+        <p:spPr>
+          <a:xfrm>
+            <a:off x="731520" y="4142232"/>
+            <a:ext cx="566928" cy="566928"/>
+          </a:xfrm>
+          <a:prstGeom prst="ellipse">
+            <a:avLst/>
+          </a:prstGeom>
+          <a:solidFill>
+            <a:srgbClr val="E8A33D"/>
+          </a:solidFill>
+          <a:ln/>
+        </p:spPr>
+      </p:sp>
+      <p:sp>
+        <p:nvSpPr>
+          <p:cNvPr id="16" name="Text 14"/>
+          <p:cNvSpPr/>
+          <p:nvPr/>
+        </p:nvSpPr>
+        <p:spPr>
+          <a:xfrm>
+            <a:off x="731520" y="4142232"/>
+            <a:ext cx="566928" cy="566928"/>
+          </a:xfrm>
+          <a:prstGeom prst="rect">
+            <a:avLst/>
+          </a:prstGeom>
+          <a:noFill/>
+          <a:ln/>
+        </p:spPr>
+        <p:txBody>
+          <a:bodyPr wrap="square" lIns="0" tIns="0" rIns="0" bIns="0" rtlCol="0" anchor="ctr"/>
+          <a:lstStyle/>
+          <a:p>
+            <a:pPr algn="ctr" indent="0" marL="0">
+              <a:buNone/>
+            </a:pPr>
+            <a:r>
+              <a:rPr lang="en-US" sz="1800" b="1" dirty="0">
+                <a:solidFill>
+                  <a:srgbClr val="FFFFFF"/>
+                </a:solidFill>
+                <a:latin typeface="Calibri" pitchFamily="34" charset="0"/>
+                <a:ea typeface="Calibri" pitchFamily="34" charset="-122"/>
+                <a:cs typeface="Calibri" pitchFamily="34" charset="-120"/>
+              </a:rPr>
+              <a:t>3</a:t>
+            </a:r>
+            <a:endParaRPr lang="en-US" sz="1800" dirty="0"/>
+          </a:p>
+        </p:txBody>
+      </p:sp>
+      <p:sp>
+        <p:nvSpPr>
+          <p:cNvPr id="17" name="Text 15"/>
+          <p:cNvSpPr/>
+          <p:nvPr/>
+        </p:nvSpPr>
+        <p:spPr>
+          <a:xfrm>
+            <a:off x="1508760" y="4050792"/>
+            <a:ext cx="10058400" cy="438912"/>
+          </a:xfrm>
+          <a:prstGeom prst="rect">
+            <a:avLst/>
+          </a:prstGeom>
+          <a:noFill/>
+          <a:ln/>
+        </p:spPr>
+        <p:txBody>
+          <a:bodyPr wrap="square" lIns="0" tIns="0" rIns="0" bIns="0" rtlCol="0" anchor="ctr"/>
+          <a:lstStyle/>
+          <a:p>
+            <a:pPr indent="0" marL="0">
+              <a:buNone/>
+            </a:pPr>
+            <a:r>
+              <a:rPr lang="en-US" sz="1550" b="1" dirty="0">
+                <a:solidFill>
+                  <a:srgbClr val="0B2545"/>
+                </a:solidFill>
+                <a:latin typeface="Calibri" pitchFamily="34" charset="0"/>
+                <a:ea typeface="Calibri" pitchFamily="34" charset="-122"/>
+                <a:cs typeface="Calibri" pitchFamily="34" charset="-120"/>
+              </a:rPr>
+              <a:t>"Which &lt;high-priority&gt; &lt;records&gt; also &lt;2nd condition&gt;?"</a:t>
+            </a:r>
+            <a:endParaRPr lang="en-US" sz="1550" dirty="0"/>
+          </a:p>
+        </p:txBody>
+      </p:sp>
+      <p:sp>
+        <p:nvSpPr>
+          <p:cNvPr id="18" name="Text 16"/>
+          <p:cNvSpPr/>
+          <p:nvPr/>
+        </p:nvSpPr>
+        <p:spPr>
+          <a:xfrm>
+            <a:off x="1508760" y="4443984"/>
+            <a:ext cx="10058400" cy="384048"/>
+          </a:xfrm>
+          <a:prstGeom prst="rect">
+            <a:avLst/>
+          </a:prstGeom>
+          <a:noFill/>
+          <a:ln/>
+        </p:spPr>
+        <p:txBody>
+          <a:bodyPr wrap="square" lIns="0" tIns="0" rIns="0" bIns="0" rtlCol="0" anchor="ctr"/>
+          <a:lstStyle/>
+          <a:p>
+            <a:pPr indent="0" marL="0">
+              <a:buNone/>
+            </a:pPr>
+            <a:r>
+              <a:rPr lang="en-US" sz="1250" dirty="0">
+                <a:solidFill>
+                  <a:srgbClr val="5B6B7F"/>
+                </a:solidFill>
+                <a:latin typeface="Calibri" pitchFamily="34" charset="0"/>
+                <a:ea typeface="Calibri" pitchFamily="34" charset="-122"/>
+                <a:cs typeface="Calibri" pitchFamily="34" charset="-120"/>
+              </a:rPr>
+              <a:t>Centerpiece — a multi-attribute insight with a clear takeaway.</a:t>
+            </a:r>
+            <a:endParaRPr lang="en-US" sz="1250" dirty="0"/>
+          </a:p>
+        </p:txBody>
+      </p:sp>
+      <p:sp>
+        <p:nvSpPr>
+          <p:cNvPr id="19" name="Shape 17"/>
+          <p:cNvSpPr/>
+          <p:nvPr/>
+        </p:nvSpPr>
+        <p:spPr>
+          <a:xfrm>
+            <a:off x="502920" y="5020056"/>
+            <a:ext cx="11201400" cy="932688"/>
+          </a:xfrm>
+          <a:prstGeom prst="roundRect">
+            <a:avLst>
+              <a:gd name="adj" fmla="val 7843"/>
+            </a:avLst>
+          </a:prstGeom>
+          <a:solidFill>
+            <a:srgbClr val="F4F7FA"/>
+          </a:solidFill>
+          <a:ln/>
+          <a:effectLst>
+            <a:outerShdw sx="100000" sy="100000" kx="0" ky="0" algn="bl" rotWithShape="0" blurRad="88900" dist="38100" dir="5400000">
+              <a:srgbClr val="000000">
+                <a:alpha val="12000"/>
+              </a:srgbClr>
+            </a:outerShdw>
+          </a:effectLst>
+        </p:spPr>
+      </p:sp>
+      <p:sp>
+        <p:nvSpPr>
+          <p:cNvPr id="20" name="Shape 18"/>
+          <p:cNvSpPr/>
+          <p:nvPr/>
+        </p:nvSpPr>
+        <p:spPr>
+          <a:xfrm>
+            <a:off x="731520" y="5221224"/>
+            <a:ext cx="566928" cy="566928"/>
+          </a:xfrm>
+          <a:prstGeom prst="ellipse">
+            <a:avLst/>
+          </a:prstGeom>
+          <a:solidFill>
+            <a:srgbClr val="0B2545"/>
+          </a:solidFill>
+          <a:ln/>
+        </p:spPr>
+      </p:sp>
+      <p:sp>
+        <p:nvSpPr>
+          <p:cNvPr id="21" name="Text 19"/>
+          <p:cNvSpPr/>
+          <p:nvPr/>
+        </p:nvSpPr>
+        <p:spPr>
+          <a:xfrm>
+            <a:off x="731520" y="5221224"/>
+            <a:ext cx="566928" cy="566928"/>
+          </a:xfrm>
+          <a:prstGeom prst="rect">
+            <a:avLst/>
+          </a:prstGeom>
+          <a:noFill/>
+          <a:ln/>
+        </p:spPr>
+        <p:txBody>
+          <a:bodyPr wrap="square" lIns="0" tIns="0" rIns="0" bIns="0" rtlCol="0" anchor="ctr"/>
+          <a:lstStyle/>
+          <a:p>
+            <a:pPr algn="ctr" indent="0" marL="0">
+              <a:buNone/>
+            </a:pPr>
+            <a:r>
+              <a:rPr lang="en-US" sz="1800" b="1" dirty="0">
+                <a:solidFill>
+                  <a:srgbClr val="FFFFFF"/>
+                </a:solidFill>
+                <a:latin typeface="Calibri" pitchFamily="34" charset="0"/>
+                <a:ea typeface="Calibri" pitchFamily="34" charset="-122"/>
+                <a:cs typeface="Calibri" pitchFamily="34" charset="-120"/>
+              </a:rPr>
+              <a:t>4</a:t>
+            </a:r>
+            <a:endParaRPr lang="en-US" sz="1800" dirty="0"/>
+          </a:p>
+        </p:txBody>
+      </p:sp>
+      <p:sp>
+        <p:nvSpPr>
+          <p:cNvPr id="22" name="Text 20"/>
+          <p:cNvSpPr/>
+          <p:nvPr/>
+        </p:nvSpPr>
+        <p:spPr>
+          <a:xfrm>
+            <a:off x="1508760" y="5129784"/>
+            <a:ext cx="10058400" cy="438912"/>
+          </a:xfrm>
+          <a:prstGeom prst="rect">
+            <a:avLst/>
+          </a:prstGeom>
+          <a:noFill/>
+          <a:ln/>
+        </p:spPr>
+        <p:txBody>
+          <a:bodyPr wrap="square" lIns="0" tIns="0" rIns="0" bIns="0" rtlCol="0" anchor="ctr"/>
+          <a:lstStyle/>
+          <a:p>
+            <a:pPr indent="0" marL="0">
+              <a:buNone/>
+            </a:pPr>
+            <a:r>
+              <a:rPr lang="en-US" sz="1550" b="1" dirty="0">
+                <a:solidFill>
+                  <a:srgbClr val="0B2545"/>
+                </a:solidFill>
+                <a:latin typeface="Calibri" pitchFamily="34" charset="0"/>
+                <a:ea typeface="Calibri" pitchFamily="34" charset="-122"/>
+                <a:cs typeface="Calibri" pitchFamily="34" charset="-120"/>
+              </a:rPr>
+              <a:t>"Which &lt;records&gt; in &lt;region&gt; intersect &lt;layer&gt;?"</a:t>
+            </a:r>
+            <a:endParaRPr lang="en-US" sz="1550" dirty="0"/>
+          </a:p>
+        </p:txBody>
+      </p:sp>
+      <p:sp>
+        <p:nvSpPr>
+          <p:cNvPr id="23" name="Text 21"/>
+          <p:cNvSpPr/>
+          <p:nvPr/>
+        </p:nvSpPr>
+        <p:spPr>
+          <a:xfrm>
+            <a:off x="1508760" y="5522976"/>
+            <a:ext cx="10058400" cy="384048"/>
+          </a:xfrm>
+          <a:prstGeom prst="rect">
+            <a:avLst/>
+          </a:prstGeom>
+          <a:noFill/>
+          <a:ln/>
+        </p:spPr>
+        <p:txBody>
+          <a:bodyPr wrap="square" lIns="0" tIns="0" rIns="0" bIns="0" rtlCol="0" anchor="ctr"/>
+          <a:lstStyle/>
+          <a:p>
+            <a:pPr indent="0" marL="0">
+              <a:buNone/>
+            </a:pPr>
+            <a:r>
+              <a:rPr lang="en-US" sz="1250" dirty="0">
+                <a:solidFill>
+                  <a:srgbClr val="5B6B7F"/>
+                </a:solidFill>
+                <a:latin typeface="Calibri" pitchFamily="34" charset="0"/>
+                <a:ea typeface="Calibri" pitchFamily="34" charset="-122"/>
+                <a:cs typeface="Calibri" pitchFamily="34" charset="-120"/>
+              </a:rPr>
+              <a:t>Cross-layer reveal — must stay region-scoped (else 413).</a:t>
+            </a:r>
+            <a:endParaRPr lang="en-US" sz="1250" dirty="0"/>
+          </a:p>
+        </p:txBody>
+      </p:sp>
+      <p:sp>
+        <p:nvSpPr>
+          <p:cNvPr id="24" name="Text 22"/>
+          <p:cNvSpPr/>
+          <p:nvPr/>
+        </p:nvSpPr>
+        <p:spPr>
+          <a:xfrm>
+            <a:off x="502920" y="6473952"/>
+            <a:ext cx="7315200" cy="274320"/>
+          </a:xfrm>
+          <a:prstGeom prst="rect">
+            <a:avLst/>
+          </a:prstGeom>
+          <a:noFill/>
+          <a:ln/>
+        </p:spPr>
+        <p:txBody>
+          <a:bodyPr wrap="square" lIns="0" tIns="0" rIns="0" bIns="0" rtlCol="0" anchor="ctr"/>
+          <a:lstStyle/>
+          <a:p>
+            <a:pPr algn="l" indent="0" marL="0">
+              <a:buNone/>
+            </a:pPr>
+            <a:r>
+              <a:rPr lang="en-US" sz="900" dirty="0">
+                <a:solidFill>
+                  <a:srgbClr val="5B6B7F"/>
+                </a:solidFill>
+                <a:latin typeface="Calibri" pitchFamily="34" charset="0"/>
+                <a:ea typeface="Calibri" pitchFamily="34" charset="-122"/>
+                <a:cs typeface="Calibri" pitchFamily="34" charset="-120"/>
+              </a:rPr>
+              <a:t>ArcGIS Maps SDK 5.0 · AI Components Demo</a:t>
+            </a:r>
+            <a:endParaRPr lang="en-US" sz="900" dirty="0"/>
+          </a:p>
+        </p:txBody>
+      </p:sp>
+      <p:sp>
+        <p:nvSpPr>
+          <p:cNvPr id="25" name="Text 23"/>
+          <p:cNvSpPr/>
+          <p:nvPr/>
+        </p:nvSpPr>
+        <p:spPr>
+          <a:xfrm>
+            <a:off x="11277295" y="6473952"/>
+            <a:ext cx="457200" cy="274320"/>
+          </a:xfrm>
+          <a:prstGeom prst="rect">
+            <a:avLst/>
+          </a:prstGeom>
+          <a:noFill/>
+          <a:ln/>
+        </p:spPr>
+        <p:txBody>
+          <a:bodyPr wrap="square" lIns="0" tIns="0" rIns="0" bIns="0" rtlCol="0" anchor="ctr"/>
+          <a:lstStyle/>
+          <a:p>
+            <a:pPr algn="r" indent="0" marL="0">
+              <a:buNone/>
+            </a:pPr>
+            <a:r>
+              <a:rPr lang="en-US" sz="900" dirty="0">
+                <a:solidFill>
+                  <a:srgbClr val="5B6B7F"/>
+                </a:solidFill>
+                <a:latin typeface="Calibri" pitchFamily="34" charset="0"/>
+                <a:ea typeface="Calibri" pitchFamily="34" charset="-122"/>
+                <a:cs typeface="Calibri" pitchFamily="34" charset="-120"/>
+              </a:rPr>
+              <a:t>12</a:t>
+            </a:r>
+            <a:endParaRPr lang="en-US" sz="900" dirty="0"/>
+          </a:p>
+        </p:txBody>
+      </p:sp>
+    </p:spTree>
+  </p:cSld>
+  <p:clrMapOvr>
+    <a:masterClrMapping/>
+  </p:clrMapOvr>
+</p:sld>
+</file>
+
+<file path=ppt/slides/slide13.xml><?xml version="1.0" encoding="utf-8"?>
+<p:sld xmlns:a="http://schemas.openxmlformats.org/drawingml/2006/main" xmlns:r="http://schemas.openxmlformats.org/officeDocument/2006/relationships" xmlns:p="http://schemas.openxmlformats.org/presentationml/2006/main">
+  <p:cSld name="Slide 13">
     <p:bg>
       <p:bgPr>
         <a:solidFill>
@@ -8720,7 +10646,7 @@
         <p:spPr>
           <a:xfrm>
             <a:off x="502920" y="411480"/>
-            <a:ext cx="10972800" cy="640080"/>
+            <a:ext cx="11155680" cy="640080"/>
           </a:xfrm>
           <a:prstGeom prst="rect">
             <a:avLst/>
@@ -8744,7 +10670,7 @@
                 <a:ea typeface="Bookman Old Style" pitchFamily="34" charset="-122"/>
                 <a:cs typeface="Bookman Old Style" pitchFamily="34" charset="-120"/>
               </a:rPr>
-              <a:t>Gotchas that cost us a day</a:t>
+              <a:t>Two ways to ship it: code vs no-code</a:t>
             </a:r>
             <a:endParaRPr lang="en-US" sz="3000" dirty="0"/>
           </a:p>
@@ -8752,22 +10678,61 @@
       </p:sp>
       <p:sp>
         <p:nvSpPr>
-          <p:cNvPr id="3" name="Shape 1"/>
-          <p:cNvSpPr/>
-          <p:nvPr/>
-        </p:nvSpPr>
-        <p:spPr>
-          <a:xfrm>
-            <a:off x="502920" y="1325880"/>
-            <a:ext cx="3657600" cy="2148840"/>
+          <p:cNvPr id="3" name="Text 1"/>
+          <p:cNvSpPr/>
+          <p:nvPr/>
+        </p:nvSpPr>
+        <p:spPr>
+          <a:xfrm>
+            <a:off x="502920" y="1078992"/>
+            <a:ext cx="10972800" cy="548640"/>
+          </a:xfrm>
+          <a:prstGeom prst="rect">
+            <a:avLst/>
+          </a:prstGeom>
+          <a:noFill/>
+          <a:ln/>
+        </p:spPr>
+        <p:txBody>
+          <a:bodyPr wrap="square" lIns="0" tIns="0" rIns="0" bIns="0" rtlCol="0" anchor="ctr"/>
+          <a:lstStyle/>
+          <a:p>
+            <a:pPr indent="0" marL="0">
+              <a:buNone/>
+            </a:pPr>
+            <a:r>
+              <a:rPr lang="en-US" sz="1400" dirty="0">
+                <a:solidFill>
+                  <a:srgbClr val="5B6B7F"/>
+                </a:solidFill>
+                <a:latin typeface="Calibri" pitchFamily="34" charset="0"/>
+                <a:ea typeface="Calibri" pitchFamily="34" charset="-122"/>
+                <a:cs typeface="Calibri" pitchFamily="34" charset="-120"/>
+              </a:rPr>
+              <a:t>Same prepared web map, two front ends — the no-code path is for GIS users without developer skills.</a:t>
+            </a:r>
+            <a:endParaRPr lang="en-US" sz="1400" dirty="0"/>
+          </a:p>
+        </p:txBody>
+      </p:sp>
+      <p:sp>
+        <p:nvSpPr>
+          <p:cNvPr id="4" name="Shape 2"/>
+          <p:cNvSpPr/>
+          <p:nvPr/>
+        </p:nvSpPr>
+        <p:spPr>
+          <a:xfrm>
+            <a:off x="502920" y="1783080"/>
+            <a:ext cx="5486400" cy="2926080"/>
           </a:xfrm>
           <a:prstGeom prst="roundRect">
             <a:avLst>
-              <a:gd name="adj" fmla="val 3404"/>
+              <a:gd name="adj" fmla="val 3125"/>
             </a:avLst>
           </a:prstGeom>
           <a:solidFill>
-            <a:srgbClr val="F4F7FA"/>
+            <a:srgbClr val="0B2545"/>
           </a:solidFill>
           <a:ln/>
           <a:effectLst>
@@ -8781,14 +10746,14 @@
       </p:sp>
       <p:sp>
         <p:nvSpPr>
-          <p:cNvPr id="4" name="Shape 2"/>
-          <p:cNvSpPr/>
-          <p:nvPr/>
-        </p:nvSpPr>
-        <p:spPr>
-          <a:xfrm>
-            <a:off x="758952" y="1581912"/>
-            <a:ext cx="713232" cy="713232"/>
+          <p:cNvPr id="5" name="Shape 3"/>
+          <p:cNvSpPr/>
+          <p:nvPr/>
+        </p:nvSpPr>
+        <p:spPr>
+          <a:xfrm>
+            <a:off x="868680" y="2057400"/>
+            <a:ext cx="822960" cy="822960"/>
           </a:xfrm>
           <a:prstGeom prst="ellipse">
             <a:avLst/>
@@ -8801,7 +10766,7 @@
       </p:sp>
       <p:pic>
         <p:nvPicPr>
-          <p:cNvPr id="5" name="Image 0" descr="preencoded.png">    </p:cNvPr>
+          <p:cNvPr id="6" name="Image 0" descr="preencoded.png">    </p:cNvPr>
           <p:cNvPicPr>
             <a:picLocks noChangeAspect="1"/>
           </p:cNvPicPr>
@@ -8815,8 +10780,8 @@
         </p:blipFill>
         <p:spPr>
           <a:xfrm>
-            <a:off x="944392" y="1767352"/>
-            <a:ext cx="342351" cy="342351"/>
+            <a:off x="1082650" y="2271370"/>
+            <a:ext cx="395021" cy="395021"/>
           </a:xfrm>
           <a:prstGeom prst="rect">
             <a:avLst/>
@@ -8825,14 +10790,14 @@
       </p:pic>
       <p:sp>
         <p:nvSpPr>
-          <p:cNvPr id="6" name="Text 3"/>
-          <p:cNvSpPr/>
-          <p:nvPr/>
-        </p:nvSpPr>
-        <p:spPr>
-          <a:xfrm>
-            <a:off x="1600200" y="1600200"/>
-            <a:ext cx="2377440" cy="685800"/>
+          <p:cNvPr id="7" name="Text 4"/>
+          <p:cNvSpPr/>
+          <p:nvPr/>
+        </p:nvSpPr>
+        <p:spPr>
+          <a:xfrm>
+            <a:off x="1783080" y="2103120"/>
+            <a:ext cx="4023360" cy="731520"/>
           </a:xfrm>
           <a:prstGeom prst="rect">
             <a:avLst/>
@@ -8845,88 +10810,142 @@
           <a:lstStyle/>
           <a:p>
             <a:pPr indent="0" marL="0">
+              <a:buNone/>
+            </a:pPr>
+            <a:r>
+              <a:rPr lang="en-US" sz="1500" b="1" dirty="0">
+                <a:solidFill>
+                  <a:srgbClr val="FFFFFF"/>
+                </a:solidFill>
+                <a:latin typeface="Calibri" pitchFamily="34" charset="0"/>
+                <a:ea typeface="Calibri" pitchFamily="34" charset="-122"/>
+                <a:cs typeface="Calibri" pitchFamily="34" charset="-120"/>
+              </a:rPr>
+              <a:t>Code — JavaScript SDK</a:t>
+            </a:r>
+            <a:endParaRPr lang="en-US" sz="1500" dirty="0"/>
+          </a:p>
+        </p:txBody>
+      </p:sp>
+      <p:sp>
+        <p:nvSpPr>
+          <p:cNvPr id="8" name="Text 5"/>
+          <p:cNvSpPr/>
+          <p:nvPr/>
+        </p:nvSpPr>
+        <p:spPr>
+          <a:xfrm>
+            <a:off x="868680" y="3017520"/>
+            <a:ext cx="4754880" cy="1554480"/>
+          </a:xfrm>
+          <a:prstGeom prst="rect">
+            <a:avLst/>
+          </a:prstGeom>
+          <a:noFill/>
+          <a:ln/>
+        </p:spPr>
+        <p:txBody>
+          <a:bodyPr wrap="square" lIns="0" tIns="0" rIns="0" bIns="0" rtlCol="0" anchor="ctr"/>
+          <a:lstStyle/>
+          <a:p>
+            <a:pPr marL="342900" indent="-342900">
               <a:lnSpc>
-                <a:spcPts val="1600"/>
+                <a:spcPts val="2000"/>
               </a:lnSpc>
-              <a:buNone/>
-            </a:pPr>
-            <a:r>
-              <a:rPr lang="en-US" sz="1450" b="1" dirty="0">
-                <a:solidFill>
-                  <a:srgbClr val="0B2545"/>
-                </a:solidFill>
-                <a:latin typeface="Calibri" pitchFamily="34" charset="0"/>
-                <a:ea typeface="Calibri" pitchFamily="34" charset="-122"/>
-                <a:cs typeface="Calibri" pitchFamily="34" charset="-120"/>
-              </a:rPr>
-              <a:t>Elements don't auto-register</a:t>
-            </a:r>
-            <a:endParaRPr lang="en-US" sz="1450" dirty="0"/>
-          </a:p>
-        </p:txBody>
-      </p:sp>
-      <p:sp>
-        <p:nvSpPr>
-          <p:cNvPr id="7" name="Text 4"/>
-          <p:cNvSpPr/>
-          <p:nvPr/>
-        </p:nvSpPr>
-        <p:spPr>
-          <a:xfrm>
-            <a:off x="758952" y="2350008"/>
-            <a:ext cx="3145536" cy="1005840"/>
-          </a:xfrm>
-          <a:prstGeom prst="rect">
-            <a:avLst/>
-          </a:prstGeom>
-          <a:noFill/>
-          <a:ln/>
-        </p:spPr>
-        <p:txBody>
-          <a:bodyPr wrap="square" lIns="0" tIns="0" rIns="0" bIns="0" rtlCol="0" anchor="ctr"/>
-          <a:lstStyle/>
-          <a:p>
-            <a:pPr indent="0" marL="0">
+              <a:spcAft>
+                <a:spcPts val="800"/>
+              </a:spcAft>
+              <a:buSzPct val="100000"/>
+              <a:buChar char="•"/>
+            </a:pPr>
+            <a:r>
+              <a:rPr lang="en-US" sz="1300" dirty="0">
+                <a:solidFill>
+                  <a:srgbClr val="C9D6E5"/>
+                </a:solidFill>
+                <a:latin typeface="Calibri" pitchFamily="34" charset="0"/>
+                <a:ea typeface="Calibri" pitchFamily="34" charset="-122"/>
+                <a:cs typeface="Calibri" pitchFamily="34" charset="-120"/>
+              </a:rPr>
+              <a:t>This repo: Vite + React + TypeScript</a:t>
+            </a:r>
+            <a:endParaRPr lang="en-US" sz="1300" dirty="0"/>
+          </a:p>
+          <a:p>
+            <a:pPr marL="342900" indent="-342900">
               <a:lnSpc>
-                <a:spcPts val="1450"/>
+                <a:spcPts val="2000"/>
               </a:lnSpc>
-              <a:buNone/>
-            </a:pPr>
-            <a:r>
-              <a:rPr lang="en-US" sz="1150" dirty="0">
-                <a:solidFill>
-                  <a:srgbClr val="5B6B7F"/>
-                </a:solidFill>
-                <a:latin typeface="Calibri" pitchFamily="34" charset="0"/>
-                <a:ea typeface="Calibri" pitchFamily="34" charset="-122"/>
-                <a:cs typeface="Calibri" pitchFamily="34" charset="-120"/>
-              </a:rPr>
-              <a:t>SDK 5.x is Lumina-based. Bare imports do nothing — call defineCustomElements() or you get "Custom element not found."</a:t>
-            </a:r>
-            <a:endParaRPr lang="en-US" sz="1150" dirty="0"/>
-          </a:p>
-        </p:txBody>
-      </p:sp>
-      <p:sp>
-        <p:nvSpPr>
-          <p:cNvPr id="8" name="Shape 5"/>
-          <p:cNvSpPr/>
-          <p:nvPr/>
-        </p:nvSpPr>
-        <p:spPr>
-          <a:xfrm>
-            <a:off x="4398264" y="1325880"/>
-            <a:ext cx="3657600" cy="2148840"/>
+              <a:spcAft>
+                <a:spcPts val="800"/>
+              </a:spcAft>
+              <a:buSzPct val="100000"/>
+              <a:buChar char="•"/>
+            </a:pPr>
+            <a:r>
+              <a:rPr lang="en-US" sz="1300" dirty="0">
+                <a:solidFill>
+                  <a:srgbClr val="C9D6E5"/>
+                </a:solidFill>
+                <a:latin typeface="Calibri" pitchFamily="34" charset="0"/>
+                <a:ea typeface="Calibri" pitchFamily="34" charset="-122"/>
+                <a:cs typeface="Calibri" pitchFamily="34" charset="-120"/>
+              </a:rPr>
+              <a:t>Custom UI, OAuth, your branding</a:t>
+            </a:r>
+            <a:endParaRPr lang="en-US" sz="1300" dirty="0"/>
+          </a:p>
+          <a:p>
+            <a:pPr marL="342900" indent="-342900">
+              <a:lnSpc>
+                <a:spcPts val="2000"/>
+              </a:lnSpc>
+              <a:spcAft>
+                <a:spcPts val="800"/>
+              </a:spcAft>
+              <a:buSzPct val="100000"/>
+              <a:buChar char="•"/>
+            </a:pPr>
+            <a:r>
+              <a:rPr lang="en-US" sz="1300" dirty="0">
+                <a:solidFill>
+                  <a:srgbClr val="C9D6E5"/>
+                </a:solidFill>
+                <a:latin typeface="Calibri" pitchFamily="34" charset="0"/>
+                <a:ea typeface="Calibri" pitchFamily="34" charset="-122"/>
+                <a:cs typeface="Calibri" pitchFamily="34" charset="-120"/>
+              </a:rPr>
+              <a:t>Optional Phase 2 custom agent</a:t>
+            </a:r>
+            <a:endParaRPr lang="en-US" sz="1300" dirty="0"/>
+          </a:p>
+        </p:txBody>
+      </p:sp>
+      <p:sp>
+        <p:nvSpPr>
+          <p:cNvPr id="9" name="Shape 6"/>
+          <p:cNvSpPr/>
+          <p:nvPr/>
+        </p:nvSpPr>
+        <p:spPr>
+          <a:xfrm>
+            <a:off x="6217920" y="1783080"/>
+            <a:ext cx="5486400" cy="2926080"/>
           </a:xfrm>
           <a:prstGeom prst="roundRect">
             <a:avLst>
-              <a:gd name="adj" fmla="val 3404"/>
+              <a:gd name="adj" fmla="val 3125"/>
             </a:avLst>
           </a:prstGeom>
           <a:solidFill>
             <a:srgbClr val="F4F7FA"/>
           </a:solidFill>
-          <a:ln/>
+          <a:ln w="12700">
+            <a:solidFill>
+              <a:srgbClr val="1C7293"/>
+            </a:solidFill>
+            <a:prstDash val="solid"/>
+          </a:ln>
           <a:effectLst>
             <a:outerShdw sx="100000" sy="100000" kx="0" ky="0" algn="bl" rotWithShape="0" blurRad="88900" dist="38100" dir="5400000">
               <a:srgbClr val="000000">
@@ -8938,27 +10957,27 @@
       </p:sp>
       <p:sp>
         <p:nvSpPr>
-          <p:cNvPr id="9" name="Shape 6"/>
-          <p:cNvSpPr/>
-          <p:nvPr/>
-        </p:nvSpPr>
-        <p:spPr>
-          <a:xfrm>
-            <a:off x="4654296" y="1581912"/>
-            <a:ext cx="713232" cy="713232"/>
+          <p:cNvPr id="10" name="Shape 7"/>
+          <p:cNvSpPr/>
+          <p:nvPr/>
+        </p:nvSpPr>
+        <p:spPr>
+          <a:xfrm>
+            <a:off x="6583680" y="2057400"/>
+            <a:ext cx="822960" cy="822960"/>
           </a:xfrm>
           <a:prstGeom prst="ellipse">
             <a:avLst/>
           </a:prstGeom>
           <a:solidFill>
-            <a:srgbClr val="E8A33D"/>
+            <a:srgbClr val="1C7293"/>
           </a:solidFill>
           <a:ln/>
         </p:spPr>
       </p:sp>
       <p:pic>
         <p:nvPicPr>
-          <p:cNvPr id="10" name="Image 1" descr="preencoded.png">    </p:cNvPr>
+          <p:cNvPr id="11" name="Image 1" descr="preencoded.png">    </p:cNvPr>
           <p:cNvPicPr>
             <a:picLocks noChangeAspect="1"/>
           </p:cNvPicPr>
@@ -8972,8 +10991,8 @@
         </p:blipFill>
         <p:spPr>
           <a:xfrm>
-            <a:off x="4839736" y="1767352"/>
-            <a:ext cx="342351" cy="342351"/>
+            <a:off x="6797650" y="2271370"/>
+            <a:ext cx="395021" cy="395021"/>
           </a:xfrm>
           <a:prstGeom prst="rect">
             <a:avLst/>
@@ -8982,14 +11001,169 @@
       </p:pic>
       <p:sp>
         <p:nvSpPr>
-          <p:cNvPr id="11" name="Text 7"/>
-          <p:cNvSpPr/>
-          <p:nvPr/>
-        </p:nvSpPr>
-        <p:spPr>
-          <a:xfrm>
-            <a:off x="5495544" y="1600200"/>
-            <a:ext cx="2377440" cy="685800"/>
+          <p:cNvPr id="12" name="Text 8"/>
+          <p:cNvSpPr/>
+          <p:nvPr/>
+        </p:nvSpPr>
+        <p:spPr>
+          <a:xfrm>
+            <a:off x="7498080" y="2057400"/>
+            <a:ext cx="4069080" cy="822960"/>
+          </a:xfrm>
+          <a:prstGeom prst="rect">
+            <a:avLst/>
+          </a:prstGeom>
+          <a:noFill/>
+          <a:ln/>
+        </p:spPr>
+        <p:txBody>
+          <a:bodyPr wrap="square" lIns="0" tIns="0" rIns="0" bIns="0" rtlCol="0" anchor="ctr"/>
+          <a:lstStyle/>
+          <a:p>
+            <a:pPr indent="0" marL="0">
+              <a:buNone/>
+            </a:pPr>
+            <a:r>
+              <a:rPr lang="en-US" sz="1500" b="1" dirty="0">
+                <a:solidFill>
+                  <a:srgbClr val="0B2545"/>
+                </a:solidFill>
+                <a:latin typeface="Calibri" pitchFamily="34" charset="0"/>
+                <a:ea typeface="Calibri" pitchFamily="34" charset="-122"/>
+                <a:cs typeface="Calibri" pitchFamily="34" charset="-120"/>
+              </a:rPr>
+              <a:t>No-code — Instant Apps Data Explorer</a:t>
+            </a:r>
+            <a:endParaRPr lang="en-US" sz="1500" dirty="0"/>
+          </a:p>
+        </p:txBody>
+      </p:sp>
+      <p:sp>
+        <p:nvSpPr>
+          <p:cNvPr id="13" name="Text 9"/>
+          <p:cNvSpPr/>
+          <p:nvPr/>
+        </p:nvSpPr>
+        <p:spPr>
+          <a:xfrm>
+            <a:off x="6583680" y="3017520"/>
+            <a:ext cx="4754880" cy="1554480"/>
+          </a:xfrm>
+          <a:prstGeom prst="rect">
+            <a:avLst/>
+          </a:prstGeom>
+          <a:noFill/>
+          <a:ln/>
+        </p:spPr>
+        <p:txBody>
+          <a:bodyPr wrap="square" lIns="0" tIns="0" rIns="0" bIns="0" rtlCol="0" anchor="ctr"/>
+          <a:lstStyle/>
+          <a:p>
+            <a:pPr marL="342900" indent="-342900">
+              <a:lnSpc>
+                <a:spcPts val="2000"/>
+              </a:lnSpc>
+              <a:spcAft>
+                <a:spcPts val="800"/>
+              </a:spcAft>
+              <a:buSzPct val="100000"/>
+              <a:buChar char="•"/>
+            </a:pPr>
+            <a:r>
+              <a:rPr lang="en-US" sz="1300" dirty="0">
+                <a:solidFill>
+                  <a:srgbClr val="1E293B"/>
+                </a:solidFill>
+                <a:latin typeface="Calibri" pitchFamily="34" charset="0"/>
+                <a:ea typeface="Calibri" pitchFamily="34" charset="-122"/>
+                <a:cs typeface="Calibri" pitchFamily="34" charset="-120"/>
+              </a:rPr>
+              <a:t>Preset template, assistant wired in</a:t>
+            </a:r>
+            <a:endParaRPr lang="en-US" sz="1300" dirty="0"/>
+          </a:p>
+          <a:p>
+            <a:pPr marL="342900" indent="-342900">
+              <a:lnSpc>
+                <a:spcPts val="2000"/>
+              </a:lnSpc>
+              <a:spcAft>
+                <a:spcPts val="800"/>
+              </a:spcAft>
+              <a:buSzPct val="100000"/>
+              <a:buChar char="•"/>
+            </a:pPr>
+            <a:r>
+              <a:rPr lang="en-US" sz="1300" dirty="0">
+                <a:solidFill>
+                  <a:srgbClr val="1E293B"/>
+                </a:solidFill>
+                <a:latin typeface="Calibri" pitchFamily="34" charset="0"/>
+                <a:ea typeface="Calibri" pitchFamily="34" charset="-122"/>
+                <a:cs typeface="Calibri" pitchFamily="34" charset="-120"/>
+              </a:rPr>
+              <a:t>Configure welcome message + sample questions</a:t>
+            </a:r>
+            <a:endParaRPr lang="en-US" sz="1300" dirty="0"/>
+          </a:p>
+          <a:p>
+            <a:pPr marL="342900" indent="-342900">
+              <a:lnSpc>
+                <a:spcPts val="2000"/>
+              </a:lnSpc>
+              <a:spcAft>
+                <a:spcPts val="800"/>
+              </a:spcAft>
+              <a:buSzPct val="100000"/>
+              <a:buChar char="•"/>
+            </a:pPr>
+            <a:r>
+              <a:rPr lang="en-US" sz="1300" dirty="0">
+                <a:solidFill>
+                  <a:srgbClr val="1E293B"/>
+                </a:solidFill>
+                <a:latin typeface="Calibri" pitchFamily="34" charset="0"/>
+                <a:ea typeface="Calibri" pitchFamily="34" charset="-122"/>
+                <a:cs typeface="Calibri" pitchFamily="34" charset="-120"/>
+              </a:rPr>
+              <a:t>Publish &amp; share from ArcGIS Online</a:t>
+            </a:r>
+            <a:endParaRPr lang="en-US" sz="1300" dirty="0"/>
+          </a:p>
+        </p:txBody>
+      </p:sp>
+      <p:sp>
+        <p:nvSpPr>
+          <p:cNvPr id="14" name="Shape 10"/>
+          <p:cNvSpPr/>
+          <p:nvPr/>
+        </p:nvSpPr>
+        <p:spPr>
+          <a:xfrm>
+            <a:off x="502920" y="4937760"/>
+            <a:ext cx="11201400" cy="914400"/>
+          </a:xfrm>
+          <a:prstGeom prst="roundRect">
+            <a:avLst>
+              <a:gd name="adj" fmla="val 8000"/>
+            </a:avLst>
+          </a:prstGeom>
+          <a:solidFill>
+            <a:srgbClr val="0B2545"/>
+          </a:solidFill>
+          <a:ln/>
+        </p:spPr>
+      </p:sp>
+      <p:sp>
+        <p:nvSpPr>
+          <p:cNvPr id="15" name="Text 11"/>
+          <p:cNvSpPr/>
+          <p:nvPr/>
+        </p:nvSpPr>
+        <p:spPr>
+          <a:xfrm>
+            <a:off x="868680" y="4937760"/>
+            <a:ext cx="10515600" cy="914400"/>
           </a:xfrm>
           <a:prstGeom prst="rect">
             <a:avLst/>
@@ -9003,698 +11177,45 @@
           <a:p>
             <a:pPr indent="0" marL="0">
               <a:lnSpc>
-                <a:spcPts val="1600"/>
+                <a:spcPts val="1700"/>
               </a:lnSpc>
               <a:buNone/>
             </a:pPr>
             <a:r>
-              <a:rPr lang="en-US" sz="1450" b="1" dirty="0">
-                <a:solidFill>
-                  <a:srgbClr val="0B2545"/>
-                </a:solidFill>
-                <a:latin typeface="Calibri" pitchFamily="34" charset="0"/>
-                <a:ea typeface="Calibri" pitchFamily="34" charset="-122"/>
-                <a:cs typeface="Calibri" pitchFamily="34" charset="-120"/>
-              </a:rPr>
-              <a:t>No ai-components-react</a:t>
-            </a:r>
-            <a:endParaRPr lang="en-US" sz="1450" dirty="0"/>
-          </a:p>
-        </p:txBody>
-      </p:sp>
-      <p:sp>
-        <p:nvSpPr>
-          <p:cNvPr id="12" name="Text 8"/>
-          <p:cNvSpPr/>
-          <p:nvPr/>
-        </p:nvSpPr>
-        <p:spPr>
-          <a:xfrm>
-            <a:off x="4654296" y="2350008"/>
-            <a:ext cx="3145536" cy="1005840"/>
-          </a:xfrm>
-          <a:prstGeom prst="rect">
-            <a:avLst/>
-          </a:prstGeom>
-          <a:noFill/>
-          <a:ln/>
-        </p:spPr>
-        <p:txBody>
-          <a:bodyPr wrap="square" lIns="0" tIns="0" rIns="0" bIns="0" rtlCol="0" anchor="ctr"/>
-          <a:lstStyle/>
-          <a:p>
+              <a:rPr lang="en-US" sz="1350" b="1" dirty="0">
+                <a:solidFill>
+                  <a:srgbClr val="E8A33D"/>
+                </a:solidFill>
+                <a:latin typeface="Calibri" pitchFamily="34" charset="0"/>
+                <a:ea typeface="Calibri" pitchFamily="34" charset="-122"/>
+                <a:cs typeface="Calibri" pitchFamily="34" charset="-120"/>
+              </a:rPr>
+              <a:t>Both build on the same Activity #1 prep:  </a:t>
+            </a:r>
             <a:pPr indent="0" marL="0">
               <a:lnSpc>
-                <a:spcPts val="1450"/>
+                <a:spcPts val="1700"/>
               </a:lnSpc>
               <a:buNone/>
             </a:pPr>
             <a:r>
-              <a:rPr lang="en-US" sz="1150" dirty="0">
-                <a:solidFill>
-                  <a:srgbClr val="5B6B7F"/>
-                </a:solidFill>
-                <a:latin typeface="Calibri" pitchFamily="34" charset="0"/>
-                <a:ea typeface="Calibri" pitchFamily="34" charset="-122"/>
-                <a:cs typeface="Calibri" pitchFamily="34" charset="-120"/>
-              </a:rPr>
-              <a:t>AI components ship as raw web components only. Declare the tags in vite-env.d.ts; set props imperatively via refs.</a:t>
-            </a:r>
-            <a:endParaRPr lang="en-US" sz="1150" dirty="0"/>
-          </a:p>
-        </p:txBody>
-      </p:sp>
-      <p:sp>
-        <p:nvSpPr>
-          <p:cNvPr id="13" name="Shape 9"/>
-          <p:cNvSpPr/>
-          <p:nvPr/>
-        </p:nvSpPr>
-        <p:spPr>
-          <a:xfrm>
-            <a:off x="8293608" y="1325880"/>
-            <a:ext cx="3657600" cy="2148840"/>
-          </a:xfrm>
-          <a:prstGeom prst="roundRect">
-            <a:avLst>
-              <a:gd name="adj" fmla="val 3404"/>
-            </a:avLst>
-          </a:prstGeom>
-          <a:solidFill>
-            <a:srgbClr val="F4F7FA"/>
-          </a:solidFill>
-          <a:ln/>
-          <a:effectLst>
-            <a:outerShdw sx="100000" sy="100000" kx="0" ky="0" algn="bl" rotWithShape="0" blurRad="88900" dist="38100" dir="5400000">
-              <a:srgbClr val="000000">
-                <a:alpha val="12000"/>
-              </a:srgbClr>
-            </a:outerShdw>
-          </a:effectLst>
-        </p:spPr>
-      </p:sp>
-      <p:sp>
-        <p:nvSpPr>
-          <p:cNvPr id="14" name="Shape 10"/>
-          <p:cNvSpPr/>
-          <p:nvPr/>
-        </p:nvSpPr>
-        <p:spPr>
-          <a:xfrm>
-            <a:off x="8549640" y="1581912"/>
-            <a:ext cx="713232" cy="713232"/>
-          </a:xfrm>
-          <a:prstGeom prst="ellipse">
-            <a:avLst/>
-          </a:prstGeom>
-          <a:solidFill>
-            <a:srgbClr val="E8A33D"/>
-          </a:solidFill>
-          <a:ln/>
-        </p:spPr>
-      </p:sp>
-      <p:pic>
-        <p:nvPicPr>
-          <p:cNvPr id="15" name="Image 2" descr="preencoded.png">    </p:cNvPr>
-          <p:cNvPicPr>
-            <a:picLocks noChangeAspect="1"/>
-          </p:cNvPicPr>
-          <p:nvPr/>
-        </p:nvPicPr>
-        <p:blipFill>
-          <a:blip r:embed="rId3"/>
-          <a:stretch>
-            <a:fillRect/>
-          </a:stretch>
-        </p:blipFill>
-        <p:spPr>
-          <a:xfrm>
-            <a:off x="8735080" y="1767352"/>
-            <a:ext cx="342351" cy="342351"/>
-          </a:xfrm>
-          <a:prstGeom prst="rect">
-            <a:avLst/>
-          </a:prstGeom>
-        </p:spPr>
-      </p:pic>
-      <p:sp>
-        <p:nvSpPr>
-          <p:cNvPr id="16" name="Text 11"/>
-          <p:cNvSpPr/>
-          <p:nvPr/>
-        </p:nvSpPr>
-        <p:spPr>
-          <a:xfrm>
-            <a:off x="9390888" y="1600200"/>
-            <a:ext cx="2377440" cy="685800"/>
-          </a:xfrm>
-          <a:prstGeom prst="rect">
-            <a:avLst/>
-          </a:prstGeom>
-          <a:noFill/>
-          <a:ln/>
-        </p:spPr>
-        <p:txBody>
-          <a:bodyPr wrap="square" lIns="0" tIns="0" rIns="0" bIns="0" rtlCol="0" anchor="ctr"/>
-          <a:lstStyle/>
-          <a:p>
-            <a:pPr indent="0" marL="0">
-              <a:lnSpc>
-                <a:spcPts val="1600"/>
-              </a:lnSpc>
-              <a:buNone/>
-            </a:pPr>
-            <a:r>
-              <a:rPr lang="en-US" sz="1450" b="1" dirty="0">
-                <a:solidFill>
-                  <a:srgbClr val="0B2545"/>
-                </a:solidFill>
-                <a:latin typeface="Calibri" pitchFamily="34" charset="0"/>
-                <a:ea typeface="Calibri" pitchFamily="34" charset="-122"/>
-                <a:cs typeface="Calibri" pitchFamily="34" charset="-120"/>
-              </a:rPr>
-              <a:t>Embeddings 504 ≠ CORS</a:t>
-            </a:r>
-            <a:endParaRPr lang="en-US" sz="1450" dirty="0"/>
-          </a:p>
-        </p:txBody>
-      </p:sp>
-      <p:sp>
-        <p:nvSpPr>
-          <p:cNvPr id="17" name="Text 12"/>
-          <p:cNvSpPr/>
-          <p:nvPr/>
-        </p:nvSpPr>
-        <p:spPr>
-          <a:xfrm>
-            <a:off x="8549640" y="2350008"/>
-            <a:ext cx="3145536" cy="1005840"/>
-          </a:xfrm>
-          <a:prstGeom prst="rect">
-            <a:avLst/>
-          </a:prstGeom>
-          <a:noFill/>
-          <a:ln/>
-        </p:spPr>
-        <p:txBody>
-          <a:bodyPr wrap="square" lIns="0" tIns="0" rIns="0" bIns="0" rtlCol="0" anchor="ctr"/>
-          <a:lstStyle/>
-          <a:p>
-            <a:pPr indent="0" marL="0">
-              <a:lnSpc>
-                <a:spcPts val="1450"/>
-              </a:lnSpc>
-              <a:buNone/>
-            </a:pPr>
-            <a:r>
-              <a:rPr lang="en-US" sz="1150" dirty="0">
-                <a:solidFill>
-                  <a:srgbClr val="5B6B7F"/>
-                </a:solidFill>
-                <a:latin typeface="Calibri" pitchFamily="34" charset="0"/>
-                <a:ea typeface="Calibri" pitchFamily="34" charset="-122"/>
-                <a:cs typeface="Calibri" pitchFamily="34" charset="-120"/>
-              </a:rPr>
-              <a:t>Generic error looks like CORS but is a 504 timeout. Wide-schema reference layers trigger it; narrow ones succeed.</a:t>
-            </a:r>
-            <a:endParaRPr lang="en-US" sz="1150" dirty="0"/>
-          </a:p>
-        </p:txBody>
-      </p:sp>
-      <p:sp>
-        <p:nvSpPr>
-          <p:cNvPr id="18" name="Shape 13"/>
-          <p:cNvSpPr/>
-          <p:nvPr/>
-        </p:nvSpPr>
-        <p:spPr>
-          <a:xfrm>
-            <a:off x="502920" y="3749040"/>
-            <a:ext cx="3657600" cy="2148840"/>
-          </a:xfrm>
-          <a:prstGeom prst="roundRect">
-            <a:avLst>
-              <a:gd name="adj" fmla="val 3404"/>
-            </a:avLst>
-          </a:prstGeom>
-          <a:solidFill>
-            <a:srgbClr val="F4F7FA"/>
-          </a:solidFill>
-          <a:ln/>
-          <a:effectLst>
-            <a:outerShdw sx="100000" sy="100000" kx="0" ky="0" algn="bl" rotWithShape="0" blurRad="88900" dist="38100" dir="5400000">
-              <a:srgbClr val="000000">
-                <a:alpha val="12000"/>
-              </a:srgbClr>
-            </a:outerShdw>
-          </a:effectLst>
-        </p:spPr>
-      </p:sp>
-      <p:sp>
-        <p:nvSpPr>
-          <p:cNvPr id="19" name="Shape 14"/>
-          <p:cNvSpPr/>
-          <p:nvPr/>
-        </p:nvSpPr>
-        <p:spPr>
-          <a:xfrm>
-            <a:off x="758952" y="4005072"/>
-            <a:ext cx="713232" cy="713232"/>
-          </a:xfrm>
-          <a:prstGeom prst="ellipse">
-            <a:avLst/>
-          </a:prstGeom>
-          <a:solidFill>
-            <a:srgbClr val="E8A33D"/>
-          </a:solidFill>
-          <a:ln/>
-        </p:spPr>
-      </p:sp>
-      <p:pic>
-        <p:nvPicPr>
-          <p:cNvPr id="20" name="Image 3" descr="preencoded.png">    </p:cNvPr>
-          <p:cNvPicPr>
-            <a:picLocks noChangeAspect="1"/>
-          </p:cNvPicPr>
-          <p:nvPr/>
-        </p:nvPicPr>
-        <p:blipFill>
-          <a:blip r:embed="rId4"/>
-          <a:stretch>
-            <a:fillRect/>
-          </a:stretch>
-        </p:blipFill>
-        <p:spPr>
-          <a:xfrm>
-            <a:off x="944392" y="4190512"/>
-            <a:ext cx="342351" cy="342351"/>
-          </a:xfrm>
-          <a:prstGeom prst="rect">
-            <a:avLst/>
-          </a:prstGeom>
-        </p:spPr>
-      </p:pic>
-      <p:sp>
-        <p:nvSpPr>
-          <p:cNvPr id="21" name="Text 15"/>
-          <p:cNvSpPr/>
-          <p:nvPr/>
-        </p:nvSpPr>
-        <p:spPr>
-          <a:xfrm>
-            <a:off x="1600200" y="4023360"/>
-            <a:ext cx="2377440" cy="685800"/>
-          </a:xfrm>
-          <a:prstGeom prst="rect">
-            <a:avLst/>
-          </a:prstGeom>
-          <a:noFill/>
-          <a:ln/>
-        </p:spPr>
-        <p:txBody>
-          <a:bodyPr wrap="square" lIns="0" tIns="0" rIns="0" bIns="0" rtlCol="0" anchor="ctr"/>
-          <a:lstStyle/>
-          <a:p>
-            <a:pPr indent="0" marL="0">
-              <a:lnSpc>
-                <a:spcPts val="1600"/>
-              </a:lnSpc>
-              <a:buNone/>
-            </a:pPr>
-            <a:r>
-              <a:rPr lang="en-US" sz="1450" b="1" dirty="0">
-                <a:solidFill>
-                  <a:srgbClr val="0B2545"/>
-                </a:solidFill>
-                <a:latin typeface="Calibri" pitchFamily="34" charset="0"/>
-                <a:ea typeface="Calibri" pitchFamily="34" charset="-122"/>
-                <a:cs typeface="Calibri" pitchFamily="34" charset="-120"/>
-              </a:rPr>
-              <a:t>Cross-layer 413</a:t>
-            </a:r>
-            <a:endParaRPr lang="en-US" sz="1450" dirty="0"/>
-          </a:p>
-        </p:txBody>
-      </p:sp>
-      <p:sp>
-        <p:nvSpPr>
-          <p:cNvPr id="22" name="Text 16"/>
-          <p:cNvSpPr/>
-          <p:nvPr/>
-        </p:nvSpPr>
-        <p:spPr>
-          <a:xfrm>
-            <a:off x="758952" y="4773168"/>
-            <a:ext cx="3145536" cy="1005840"/>
-          </a:xfrm>
-          <a:prstGeom prst="rect">
-            <a:avLst/>
-          </a:prstGeom>
-          <a:noFill/>
-          <a:ln/>
-        </p:spPr>
-        <p:txBody>
-          <a:bodyPr wrap="square" lIns="0" tIns="0" rIns="0" bIns="0" rtlCol="0" anchor="ctr"/>
-          <a:lstStyle/>
-          <a:p>
-            <a:pPr indent="0" marL="0">
-              <a:lnSpc>
-                <a:spcPts val="1450"/>
-              </a:lnSpc>
-              <a:buNone/>
-            </a:pPr>
-            <a:r>
-              <a:rPr lang="en-US" sz="1150" dirty="0">
-                <a:solidFill>
-                  <a:srgbClr val="5B6B7F"/>
-                </a:solidFill>
-                <a:latin typeface="Calibri" pitchFamily="34" charset="0"/>
-                <a:ea typeface="Calibri" pitchFamily="34" charset="-122"/>
-                <a:cs typeface="Calibri" pitchFamily="34" charset="-120"/>
-              </a:rPr>
-              <a:t>OOB agent submits national polygons as a spatial filter → 413. Fix: state-scope the prompt or pre-compute the attribute.</a:t>
-            </a:r>
-            <a:endParaRPr lang="en-US" sz="1150" dirty="0"/>
-          </a:p>
-        </p:txBody>
-      </p:sp>
-      <p:sp>
-        <p:nvSpPr>
-          <p:cNvPr id="23" name="Shape 17"/>
-          <p:cNvSpPr/>
-          <p:nvPr/>
-        </p:nvSpPr>
-        <p:spPr>
-          <a:xfrm>
-            <a:off x="4398264" y="3749040"/>
-            <a:ext cx="3657600" cy="2148840"/>
-          </a:xfrm>
-          <a:prstGeom prst="roundRect">
-            <a:avLst>
-              <a:gd name="adj" fmla="val 3404"/>
-            </a:avLst>
-          </a:prstGeom>
-          <a:solidFill>
-            <a:srgbClr val="F4F7FA"/>
-          </a:solidFill>
-          <a:ln/>
-          <a:effectLst>
-            <a:outerShdw sx="100000" sy="100000" kx="0" ky="0" algn="bl" rotWithShape="0" blurRad="88900" dist="38100" dir="5400000">
-              <a:srgbClr val="000000">
-                <a:alpha val="12000"/>
-              </a:srgbClr>
-            </a:outerShdw>
-          </a:effectLst>
-        </p:spPr>
-      </p:sp>
-      <p:sp>
-        <p:nvSpPr>
-          <p:cNvPr id="24" name="Shape 18"/>
-          <p:cNvSpPr/>
-          <p:nvPr/>
-        </p:nvSpPr>
-        <p:spPr>
-          <a:xfrm>
-            <a:off x="4654296" y="4005072"/>
-            <a:ext cx="713232" cy="713232"/>
-          </a:xfrm>
-          <a:prstGeom prst="ellipse">
-            <a:avLst/>
-          </a:prstGeom>
-          <a:solidFill>
-            <a:srgbClr val="E8A33D"/>
-          </a:solidFill>
-          <a:ln/>
-        </p:spPr>
-      </p:sp>
-      <p:pic>
-        <p:nvPicPr>
-          <p:cNvPr id="25" name="Image 4" descr="preencoded.png">    </p:cNvPr>
-          <p:cNvPicPr>
-            <a:picLocks noChangeAspect="1"/>
-          </p:cNvPicPr>
-          <p:nvPr/>
-        </p:nvPicPr>
-        <p:blipFill>
-          <a:blip r:embed="rId5"/>
-          <a:stretch>
-            <a:fillRect/>
-          </a:stretch>
-        </p:blipFill>
-        <p:spPr>
-          <a:xfrm>
-            <a:off x="4839736" y="4190512"/>
-            <a:ext cx="342351" cy="342351"/>
-          </a:xfrm>
-          <a:prstGeom prst="rect">
-            <a:avLst/>
-          </a:prstGeom>
-        </p:spPr>
-      </p:pic>
-      <p:sp>
-        <p:nvSpPr>
-          <p:cNvPr id="26" name="Text 19"/>
-          <p:cNvSpPr/>
-          <p:nvPr/>
-        </p:nvSpPr>
-        <p:spPr>
-          <a:xfrm>
-            <a:off x="5495544" y="4023360"/>
-            <a:ext cx="2377440" cy="685800"/>
-          </a:xfrm>
-          <a:prstGeom prst="rect">
-            <a:avLst/>
-          </a:prstGeom>
-          <a:noFill/>
-          <a:ln/>
-        </p:spPr>
-        <p:txBody>
-          <a:bodyPr wrap="square" lIns="0" tIns="0" rIns="0" bIns="0" rtlCol="0" anchor="ctr"/>
-          <a:lstStyle/>
-          <a:p>
-            <a:pPr indent="0" marL="0">
-              <a:lnSpc>
-                <a:spcPts val="1600"/>
-              </a:lnSpc>
-              <a:buNone/>
-            </a:pPr>
-            <a:r>
-              <a:rPr lang="en-US" sz="1450" b="1" dirty="0">
-                <a:solidFill>
-                  <a:srgbClr val="0B2545"/>
-                </a:solidFill>
-                <a:latin typeface="Calibri" pitchFamily="34" charset="0"/>
-                <a:ea typeface="Calibri" pitchFamily="34" charset="-122"/>
-                <a:cs typeface="Calibri" pitchFamily="34" charset="-120"/>
-              </a:rPr>
-              <a:t>Schema introspection lies</a:t>
-            </a:r>
-            <a:endParaRPr lang="en-US" sz="1450" dirty="0"/>
-          </a:p>
-        </p:txBody>
-      </p:sp>
-      <p:sp>
-        <p:nvSpPr>
-          <p:cNvPr id="27" name="Text 20"/>
-          <p:cNvSpPr/>
-          <p:nvPr/>
-        </p:nvSpPr>
-        <p:spPr>
-          <a:xfrm>
-            <a:off x="4654296" y="4773168"/>
-            <a:ext cx="3145536" cy="1005840"/>
-          </a:xfrm>
-          <a:prstGeom prst="rect">
-            <a:avLst/>
-          </a:prstGeom>
-          <a:noFill/>
-          <a:ln/>
-        </p:spPr>
-        <p:txBody>
-          <a:bodyPr wrap="square" lIns="0" tIns="0" rIns="0" bIns="0" rtlCol="0" anchor="ctr"/>
-          <a:lstStyle/>
-          <a:p>
-            <a:pPr indent="0" marL="0">
-              <a:lnSpc>
-                <a:spcPts val="1450"/>
-              </a:lnSpc>
-              <a:buNone/>
-            </a:pPr>
-            <a:r>
-              <a:rPr lang="en-US" sz="1150" dirty="0">
-                <a:solidFill>
-                  <a:srgbClr val="5B6B7F"/>
-                </a:solidFill>
-                <a:latin typeface="Calibri" pitchFamily="34" charset="0"/>
-                <a:ea typeface="Calibri" pitchFamily="34" charset="-122"/>
-                <a:cs typeface="Calibri" pitchFamily="34" charset="-120"/>
-              </a:rPr>
-              <a:t>"List fields" returned two contradictory lists in one turn. Verify schema via AGO Data → Fields — never the assistant.</a:t>
-            </a:r>
-            <a:endParaRPr lang="en-US" sz="1150" dirty="0"/>
-          </a:p>
-        </p:txBody>
-      </p:sp>
-      <p:sp>
-        <p:nvSpPr>
-          <p:cNvPr id="28" name="Shape 21"/>
-          <p:cNvSpPr/>
-          <p:nvPr/>
-        </p:nvSpPr>
-        <p:spPr>
-          <a:xfrm>
-            <a:off x="8293608" y="3749040"/>
-            <a:ext cx="3657600" cy="2148840"/>
-          </a:xfrm>
-          <a:prstGeom prst="roundRect">
-            <a:avLst>
-              <a:gd name="adj" fmla="val 3404"/>
-            </a:avLst>
-          </a:prstGeom>
-          <a:solidFill>
-            <a:srgbClr val="F4F7FA"/>
-          </a:solidFill>
-          <a:ln/>
-          <a:effectLst>
-            <a:outerShdw sx="100000" sy="100000" kx="0" ky="0" algn="bl" rotWithShape="0" blurRad="88900" dist="38100" dir="5400000">
-              <a:srgbClr val="000000">
-                <a:alpha val="12000"/>
-              </a:srgbClr>
-            </a:outerShdw>
-          </a:effectLst>
-        </p:spPr>
-      </p:sp>
-      <p:sp>
-        <p:nvSpPr>
-          <p:cNvPr id="29" name="Shape 22"/>
-          <p:cNvSpPr/>
-          <p:nvPr/>
-        </p:nvSpPr>
-        <p:spPr>
-          <a:xfrm>
-            <a:off x="8549640" y="4005072"/>
-            <a:ext cx="713232" cy="713232"/>
-          </a:xfrm>
-          <a:prstGeom prst="ellipse">
-            <a:avLst/>
-          </a:prstGeom>
-          <a:solidFill>
-            <a:srgbClr val="E8A33D"/>
-          </a:solidFill>
-          <a:ln/>
-        </p:spPr>
-      </p:sp>
-      <p:pic>
-        <p:nvPicPr>
-          <p:cNvPr id="30" name="Image 5" descr="preencoded.png">    </p:cNvPr>
-          <p:cNvPicPr>
-            <a:picLocks noChangeAspect="1"/>
-          </p:cNvPicPr>
-          <p:nvPr/>
-        </p:nvPicPr>
-        <p:blipFill>
-          <a:blip r:embed="rId6"/>
-          <a:stretch>
-            <a:fillRect/>
-          </a:stretch>
-        </p:blipFill>
-        <p:spPr>
-          <a:xfrm>
-            <a:off x="8735080" y="4190512"/>
-            <a:ext cx="342351" cy="342351"/>
-          </a:xfrm>
-          <a:prstGeom prst="rect">
-            <a:avLst/>
-          </a:prstGeom>
-        </p:spPr>
-      </p:pic>
-      <p:sp>
-        <p:nvSpPr>
-          <p:cNvPr id="31" name="Text 23"/>
-          <p:cNvSpPr/>
-          <p:nvPr/>
-        </p:nvSpPr>
-        <p:spPr>
-          <a:xfrm>
-            <a:off x="9390888" y="4023360"/>
-            <a:ext cx="2377440" cy="685800"/>
-          </a:xfrm>
-          <a:prstGeom prst="rect">
-            <a:avLst/>
-          </a:prstGeom>
-          <a:noFill/>
-          <a:ln/>
-        </p:spPr>
-        <p:txBody>
-          <a:bodyPr wrap="square" lIns="0" tIns="0" rIns="0" bIns="0" rtlCol="0" anchor="ctr"/>
-          <a:lstStyle/>
-          <a:p>
-            <a:pPr indent="0" marL="0">
-              <a:lnSpc>
-                <a:spcPts val="1600"/>
-              </a:lnSpc>
-              <a:buNone/>
-            </a:pPr>
-            <a:r>
-              <a:rPr lang="en-US" sz="1450" b="1" dirty="0">
-                <a:solidFill>
-                  <a:srgbClr val="0B2545"/>
-                </a:solidFill>
-                <a:latin typeface="Calibri" pitchFamily="34" charset="0"/>
-                <a:ea typeface="Calibri" pitchFamily="34" charset="-122"/>
-                <a:cs typeface="Calibri" pitchFamily="34" charset="-120"/>
-              </a:rPr>
-              <a:t>Verify, don't infer</a:t>
-            </a:r>
-            <a:endParaRPr lang="en-US" sz="1450" dirty="0"/>
-          </a:p>
-        </p:txBody>
-      </p:sp>
-      <p:sp>
-        <p:nvSpPr>
-          <p:cNvPr id="32" name="Text 24"/>
-          <p:cNvSpPr/>
-          <p:nvPr/>
-        </p:nvSpPr>
-        <p:spPr>
-          <a:xfrm>
-            <a:off x="8549640" y="4773168"/>
-            <a:ext cx="3145536" cy="1005840"/>
-          </a:xfrm>
-          <a:prstGeom prst="rect">
-            <a:avLst/>
-          </a:prstGeom>
-          <a:noFill/>
-          <a:ln/>
-        </p:spPr>
-        <p:txBody>
-          <a:bodyPr wrap="square" lIns="0" tIns="0" rIns="0" bIns="0" rtlCol="0" anchor="ctr"/>
-          <a:lstStyle/>
-          <a:p>
-            <a:pPr indent="0" marL="0">
-              <a:lnSpc>
-                <a:spcPts val="1450"/>
-              </a:lnSpc>
-              <a:buNone/>
-            </a:pPr>
-            <a:r>
-              <a:rPr lang="en-US" sz="1150" dirty="0">
-                <a:solidFill>
-                  <a:srgbClr val="5B6B7F"/>
-                </a:solidFill>
-                <a:latin typeface="Calibri" pitchFamily="34" charset="0"/>
-                <a:ea typeface="Calibri" pitchFamily="34" charset="-122"/>
-                <a:cs typeface="Calibri" pitchFamily="34" charset="-120"/>
-              </a:rPr>
-              <a:t>Filenames in dist/ aren't docs. We mounted a non-existent agent on a guess. Confirm against developers.arcgis.com.</a:t>
-            </a:r>
-            <a:endParaRPr lang="en-US" sz="1150" dirty="0"/>
-          </a:p>
-        </p:txBody>
-      </p:sp>
-      <p:sp>
-        <p:nvSpPr>
-          <p:cNvPr id="33" name="Text 25"/>
+              <a:rPr lang="en-US" sz="1350" dirty="0">
+                <a:solidFill>
+                  <a:srgbClr val="C9D6E5"/>
+                </a:solidFill>
+                <a:latin typeface="Calibri" pitchFamily="34" charset="0"/>
+                <a:ea typeface="Calibri" pitchFamily="34" charset="-122"/>
+                <a:cs typeface="Calibri" pitchFamily="34" charset="-120"/>
+              </a:rPr>
+              <a:t>field metadata → vector embeddings. Going no-code does not skip the GIS work.</a:t>
+            </a:r>
+            <a:endParaRPr lang="en-US" sz="1350" dirty="0"/>
+          </a:p>
+        </p:txBody>
+      </p:sp>
+      <p:sp>
+        <p:nvSpPr>
+          <p:cNvPr id="16" name="Text 12"/>
           <p:cNvSpPr/>
           <p:nvPr/>
         </p:nvSpPr>
@@ -9733,7 +11254,7 @@
       </p:sp>
       <p:sp>
         <p:nvSpPr>
-          <p:cNvPr id="34" name="Text 26"/>
+          <p:cNvPr id="17" name="Text 13"/>
           <p:cNvSpPr/>
           <p:nvPr/>
         </p:nvSpPr>
@@ -9811,7 +11332,7 @@
         <p:spPr>
           <a:xfrm>
             <a:off x="502920" y="411480"/>
-            <a:ext cx="11155680" cy="640080"/>
+            <a:ext cx="8686800" cy="640080"/>
           </a:xfrm>
           <a:prstGeom prst="rect">
             <a:avLst/>
@@ -9827,7 +11348,7 @@
               <a:buNone/>
             </a:pPr>
             <a:r>
-              <a:rPr lang="en-US" sz="2800" b="1" dirty="0">
+              <a:rPr lang="en-US" sz="3000" b="1" dirty="0">
                 <a:solidFill>
                   <a:srgbClr val="0B2545"/>
                 </a:solidFill>
@@ -9835,95 +11356,260 @@
                 <a:ea typeface="Bookman Old Style" pitchFamily="34" charset="-122"/>
                 <a:cs typeface="Bookman Old Style" pitchFamily="34" charset="-120"/>
               </a:rPr>
-              <a:t>Prompt engineering: what the OOB agent can do</a:t>
-            </a:r>
-            <a:endParaRPr lang="en-US" sz="2800" dirty="0"/>
-          </a:p>
-        </p:txBody>
-      </p:sp>
-      <p:sp>
-        <p:nvSpPr>
-          <p:cNvPr id="3" name="Shape 1"/>
-          <p:cNvSpPr/>
-          <p:nvPr/>
-        </p:nvSpPr>
-        <p:spPr>
-          <a:xfrm>
-            <a:off x="502920" y="1371600"/>
-            <a:ext cx="5486400" cy="4572000"/>
-          </a:xfrm>
-          <a:prstGeom prst="roundRect">
-            <a:avLst>
-              <a:gd name="adj" fmla="val 2000"/>
-            </a:avLst>
+              <a:t>Set up Data Explorer (no code)</a:t>
+            </a:r>
+            <a:endParaRPr lang="en-US" sz="3000" dirty="0"/>
+          </a:p>
+        </p:txBody>
+      </p:sp>
+      <p:sp>
+        <p:nvSpPr>
+          <p:cNvPr id="3" name="Text 1"/>
+          <p:cNvSpPr/>
+          <p:nvPr/>
+        </p:nvSpPr>
+        <p:spPr>
+          <a:xfrm>
+            <a:off x="8686800" y="566928"/>
+            <a:ext cx="3017520" cy="365760"/>
+          </a:xfrm>
+          <a:prstGeom prst="rect">
+            <a:avLst/>
+          </a:prstGeom>
+          <a:noFill/>
+          <a:ln/>
+        </p:spPr>
+        <p:txBody>
+          <a:bodyPr wrap="square" lIns="0" tIns="0" rIns="0" bIns="0" rtlCol="0" anchor="ctr"/>
+          <a:lstStyle/>
+          <a:p>
+            <a:pPr algn="r" indent="0" marL="0">
+              <a:buNone/>
+            </a:pPr>
+            <a:r>
+              <a:rPr lang="en-US" sz="1200" i="1" dirty="0">
+                <a:solidFill>
+                  <a:srgbClr val="1C7293"/>
+                </a:solidFill>
+                <a:latin typeface="Calibri" pitchFamily="34" charset="0"/>
+                <a:ea typeface="Calibri" pitchFamily="34" charset="-122"/>
+                <a:cs typeface="Calibri" pitchFamily="34" charset="-120"/>
+              </a:rPr>
+              <a:t>doc.arcgis.com → Instant Apps</a:t>
+            </a:r>
+            <a:endParaRPr lang="en-US" sz="1200" dirty="0"/>
+          </a:p>
+        </p:txBody>
+      </p:sp>
+      <p:sp>
+        <p:nvSpPr>
+          <p:cNvPr id="4" name="Text 2"/>
+          <p:cNvSpPr/>
+          <p:nvPr/>
+        </p:nvSpPr>
+        <p:spPr>
+          <a:xfrm>
+            <a:off x="502920" y="1078992"/>
+            <a:ext cx="10972800" cy="457200"/>
+          </a:xfrm>
+          <a:prstGeom prst="rect">
+            <a:avLst/>
+          </a:prstGeom>
+          <a:noFill/>
+          <a:ln/>
+        </p:spPr>
+        <p:txBody>
+          <a:bodyPr wrap="square" lIns="0" tIns="0" rIns="0" bIns="0" rtlCol="0" anchor="ctr"/>
+          <a:lstStyle/>
+          <a:p>
+            <a:pPr indent="0" marL="0">
+              <a:buNone/>
+            </a:pPr>
+            <a:r>
+              <a:rPr lang="en-US" sz="1400" dirty="0">
+                <a:solidFill>
+                  <a:srgbClr val="5B6B7F"/>
+                </a:solidFill>
+                <a:latin typeface="Calibri" pitchFamily="34" charset="0"/>
+                <a:ea typeface="Calibri" pitchFamily="34" charset="-122"/>
+                <a:cs typeface="Calibri" pitchFamily="34" charset="-120"/>
+              </a:rPr>
+              <a:t>From a prepared web map to a shared app — no developer tools.</a:t>
+            </a:r>
+            <a:endParaRPr lang="en-US" sz="1400" dirty="0"/>
+          </a:p>
+        </p:txBody>
+      </p:sp>
+      <p:sp>
+        <p:nvSpPr>
+          <p:cNvPr id="5" name="Shape 3"/>
+          <p:cNvSpPr/>
+          <p:nvPr/>
+        </p:nvSpPr>
+        <p:spPr>
+          <a:xfrm>
+            <a:off x="548640" y="1618488"/>
+            <a:ext cx="530352" cy="530352"/>
+          </a:xfrm>
+          <a:prstGeom prst="ellipse">
+            <a:avLst/>
           </a:prstGeom>
           <a:solidFill>
-            <a:srgbClr val="EAF4EF"/>
+            <a:srgbClr val="0B2545"/>
           </a:solidFill>
           <a:ln/>
-          <a:effectLst>
-            <a:outerShdw sx="100000" sy="100000" kx="0" ky="0" algn="bl" rotWithShape="0" blurRad="88900" dist="38100" dir="5400000">
-              <a:srgbClr val="000000">
-                <a:alpha val="12000"/>
-              </a:srgbClr>
-            </a:outerShdw>
-          </a:effectLst>
-        </p:spPr>
-      </p:sp>
-      <p:sp>
-        <p:nvSpPr>
-          <p:cNvPr id="4" name="Shape 2"/>
-          <p:cNvSpPr/>
-          <p:nvPr/>
-        </p:nvSpPr>
-        <p:spPr>
-          <a:xfrm>
-            <a:off x="822960" y="1645920"/>
-            <a:ext cx="731520" cy="731520"/>
+        </p:spPr>
+      </p:sp>
+      <p:sp>
+        <p:nvSpPr>
+          <p:cNvPr id="6" name="Text 4"/>
+          <p:cNvSpPr/>
+          <p:nvPr/>
+        </p:nvSpPr>
+        <p:spPr>
+          <a:xfrm>
+            <a:off x="548640" y="1618488"/>
+            <a:ext cx="530352" cy="530352"/>
+          </a:xfrm>
+          <a:prstGeom prst="rect">
+            <a:avLst/>
+          </a:prstGeom>
+          <a:noFill/>
+          <a:ln/>
+        </p:spPr>
+        <p:txBody>
+          <a:bodyPr wrap="square" lIns="0" tIns="0" rIns="0" bIns="0" rtlCol="0" anchor="ctr"/>
+          <a:lstStyle/>
+          <a:p>
+            <a:pPr algn="ctr" indent="0" marL="0">
+              <a:buNone/>
+            </a:pPr>
+            <a:r>
+              <a:rPr lang="en-US" sz="1700" b="1" dirty="0">
+                <a:solidFill>
+                  <a:srgbClr val="FFFFFF"/>
+                </a:solidFill>
+                <a:latin typeface="Calibri" pitchFamily="34" charset="0"/>
+                <a:ea typeface="Calibri" pitchFamily="34" charset="-122"/>
+                <a:cs typeface="Calibri" pitchFamily="34" charset="-120"/>
+              </a:rPr>
+              <a:t>1</a:t>
+            </a:r>
+            <a:endParaRPr lang="en-US" sz="1700" dirty="0"/>
+          </a:p>
+        </p:txBody>
+      </p:sp>
+      <p:sp>
+        <p:nvSpPr>
+          <p:cNvPr id="7" name="Text 5"/>
+          <p:cNvSpPr/>
+          <p:nvPr/>
+        </p:nvSpPr>
+        <p:spPr>
+          <a:xfrm>
+            <a:off x="1280160" y="1600200"/>
+            <a:ext cx="10332720" cy="603504"/>
+          </a:xfrm>
+          <a:prstGeom prst="rect">
+            <a:avLst/>
+          </a:prstGeom>
+          <a:noFill/>
+          <a:ln/>
+        </p:spPr>
+        <p:txBody>
+          <a:bodyPr wrap="square" lIns="0" tIns="0" rIns="0" bIns="0" rtlCol="0" anchor="ctr"/>
+          <a:lstStyle/>
+          <a:p>
+            <a:pPr indent="0" marL="0">
+              <a:lnSpc>
+                <a:spcPts val="1600"/>
+              </a:lnSpc>
+              <a:buNone/>
+            </a:pPr>
+            <a:r>
+              <a:rPr lang="en-US" sz="1400" dirty="0">
+                <a:solidFill>
+                  <a:srgbClr val="1E293B"/>
+                </a:solidFill>
+                <a:latin typeface="Calibri" pitchFamily="34" charset="0"/>
+                <a:ea typeface="Calibri" pitchFamily="34" charset="-122"/>
+                <a:cs typeface="Calibri" pitchFamily="34" charset="-120"/>
+              </a:rPr>
+              <a:t>Prep the web map: field metadata → generate embeddings (item Settings, or in the app config)</a:t>
+            </a:r>
+            <a:endParaRPr lang="en-US" sz="1400" dirty="0"/>
+          </a:p>
+        </p:txBody>
+      </p:sp>
+      <p:sp>
+        <p:nvSpPr>
+          <p:cNvPr id="8" name="Shape 6"/>
+          <p:cNvSpPr/>
+          <p:nvPr/>
+        </p:nvSpPr>
+        <p:spPr>
+          <a:xfrm>
+            <a:off x="548640" y="2368296"/>
+            <a:ext cx="530352" cy="530352"/>
           </a:xfrm>
           <a:prstGeom prst="ellipse">
             <a:avLst/>
           </a:prstGeom>
           <a:solidFill>
-            <a:srgbClr val="2A9D6F"/>
+            <a:srgbClr val="1C7293"/>
           </a:solidFill>
           <a:ln/>
         </p:spPr>
       </p:sp>
-      <p:pic>
-        <p:nvPicPr>
-          <p:cNvPr id="5" name="Image 0" descr="preencoded.png">    </p:cNvPr>
-          <p:cNvPicPr>
-            <a:picLocks noChangeAspect="1"/>
-          </p:cNvPicPr>
-          <p:nvPr/>
-        </p:nvPicPr>
-        <p:blipFill>
-          <a:blip r:embed="rId1"/>
-          <a:stretch>
-            <a:fillRect/>
-          </a:stretch>
-        </p:blipFill>
-        <p:spPr>
-          <a:xfrm>
-            <a:off x="1013155" y="1836115"/>
-            <a:ext cx="351130" cy="351130"/>
-          </a:xfrm>
-          <a:prstGeom prst="rect">
-            <a:avLst/>
-          </a:prstGeom>
-        </p:spPr>
-      </p:pic>
-      <p:sp>
-        <p:nvSpPr>
-          <p:cNvPr id="6" name="Text 3"/>
-          <p:cNvSpPr/>
-          <p:nvPr/>
-        </p:nvSpPr>
-        <p:spPr>
-          <a:xfrm>
-            <a:off x="1691640" y="1645920"/>
-            <a:ext cx="4114800" cy="731520"/>
+      <p:sp>
+        <p:nvSpPr>
+          <p:cNvPr id="9" name="Text 7"/>
+          <p:cNvSpPr/>
+          <p:nvPr/>
+        </p:nvSpPr>
+        <p:spPr>
+          <a:xfrm>
+            <a:off x="548640" y="2368296"/>
+            <a:ext cx="530352" cy="530352"/>
+          </a:xfrm>
+          <a:prstGeom prst="rect">
+            <a:avLst/>
+          </a:prstGeom>
+          <a:noFill/>
+          <a:ln/>
+        </p:spPr>
+        <p:txBody>
+          <a:bodyPr wrap="square" lIns="0" tIns="0" rIns="0" bIns="0" rtlCol="0" anchor="ctr"/>
+          <a:lstStyle/>
+          <a:p>
+            <a:pPr algn="ctr" indent="0" marL="0">
+              <a:buNone/>
+            </a:pPr>
+            <a:r>
+              <a:rPr lang="en-US" sz="1700" b="1" dirty="0">
+                <a:solidFill>
+                  <a:srgbClr val="FFFFFF"/>
+                </a:solidFill>
+                <a:latin typeface="Calibri" pitchFamily="34" charset="0"/>
+                <a:ea typeface="Calibri" pitchFamily="34" charset="-122"/>
+                <a:cs typeface="Calibri" pitchFamily="34" charset="-120"/>
+              </a:rPr>
+              <a:t>2</a:t>
+            </a:r>
+            <a:endParaRPr lang="en-US" sz="1700" dirty="0"/>
+          </a:p>
+        </p:txBody>
+      </p:sp>
+      <p:sp>
+        <p:nvSpPr>
+          <p:cNvPr id="10" name="Text 8"/>
+          <p:cNvSpPr/>
+          <p:nvPr/>
+        </p:nvSpPr>
+        <p:spPr>
+          <a:xfrm>
+            <a:off x="1280160" y="2350008"/>
+            <a:ext cx="10332720" cy="603504"/>
           </a:xfrm>
           <a:prstGeom prst="rect">
             <a:avLst/>
@@ -9936,56 +11622,13 @@
           <a:lstStyle/>
           <a:p>
             <a:pPr indent="0" marL="0">
-              <a:buNone/>
-            </a:pPr>
-            <a:r>
-              <a:rPr lang="en-US" sz="1800" b="1" dirty="0">
-                <a:solidFill>
-                  <a:srgbClr val="2A9D6F"/>
-                </a:solidFill>
-                <a:latin typeface="Calibri" pitchFamily="34" charset="0"/>
-                <a:ea typeface="Calibri" pitchFamily="34" charset="-122"/>
-                <a:cs typeface="Calibri" pitchFamily="34" charset="-120"/>
-              </a:rPr>
-              <a:t>Reliable — demo these</a:t>
-            </a:r>
-            <a:endParaRPr lang="en-US" sz="1800" dirty="0"/>
-          </a:p>
-        </p:txBody>
-      </p:sp>
-      <p:sp>
-        <p:nvSpPr>
-          <p:cNvPr id="7" name="Text 4"/>
-          <p:cNvSpPr/>
-          <p:nvPr/>
-        </p:nvSpPr>
-        <p:spPr>
-          <a:xfrm>
-            <a:off x="868680" y="2651760"/>
-            <a:ext cx="4937760" cy="3108960"/>
-          </a:xfrm>
-          <a:prstGeom prst="rect">
-            <a:avLst/>
-          </a:prstGeom>
-          <a:noFill/>
-          <a:ln/>
-        </p:spPr>
-        <p:txBody>
-          <a:bodyPr wrap="square" lIns="0" tIns="0" rIns="0" bIns="0" rtlCol="0" anchor="ctr"/>
-          <a:lstStyle/>
-          <a:p>
-            <a:pPr marL="342900" indent="-342900">
               <a:lnSpc>
-                <a:spcPts val="2200"/>
+                <a:spcPts val="1600"/>
               </a:lnSpc>
-              <a:spcAft>
-                <a:spcPts val="1200"/>
-              </a:spcAft>
-              <a:buSzPct val="100000"/>
-              <a:buChar char="•"/>
-            </a:pPr>
-            <a:r>
-              <a:rPr lang="en-US" sz="1350" dirty="0">
+              <a:buNone/>
+            </a:pPr>
+            <a:r>
+              <a:rPr lang="en-US" sz="1400" dirty="0">
                 <a:solidFill>
                   <a:srgbClr val="1E293B"/>
                 </a:solidFill>
@@ -9993,23 +11636,100 @@
                 <a:ea typeface="Calibri" pitchFamily="34" charset="-122"/>
                 <a:cs typeface="Calibri" pitchFamily="34" charset="-120"/>
               </a:rPr>
-              <a:t>Attribute filters  ("show the high-priority records")</a:t>
-            </a:r>
-            <a:endParaRPr lang="en-US" sz="1350" dirty="0"/>
-          </a:p>
-          <a:p>
-            <a:pPr marL="342900" indent="-342900">
+              <a:t>Open ArcGIS Instant Apps from your web map</a:t>
+            </a:r>
+            <a:endParaRPr lang="en-US" sz="1400" dirty="0"/>
+          </a:p>
+        </p:txBody>
+      </p:sp>
+      <p:sp>
+        <p:nvSpPr>
+          <p:cNvPr id="11" name="Shape 9"/>
+          <p:cNvSpPr/>
+          <p:nvPr/>
+        </p:nvSpPr>
+        <p:spPr>
+          <a:xfrm>
+            <a:off x="548640" y="3118104"/>
+            <a:ext cx="530352" cy="530352"/>
+          </a:xfrm>
+          <a:prstGeom prst="ellipse">
+            <a:avLst/>
+          </a:prstGeom>
+          <a:solidFill>
+            <a:srgbClr val="0B2545"/>
+          </a:solidFill>
+          <a:ln/>
+        </p:spPr>
+      </p:sp>
+      <p:sp>
+        <p:nvSpPr>
+          <p:cNvPr id="12" name="Text 10"/>
+          <p:cNvSpPr/>
+          <p:nvPr/>
+        </p:nvSpPr>
+        <p:spPr>
+          <a:xfrm>
+            <a:off x="548640" y="3118104"/>
+            <a:ext cx="530352" cy="530352"/>
+          </a:xfrm>
+          <a:prstGeom prst="rect">
+            <a:avLst/>
+          </a:prstGeom>
+          <a:noFill/>
+          <a:ln/>
+        </p:spPr>
+        <p:txBody>
+          <a:bodyPr wrap="square" lIns="0" tIns="0" rIns="0" bIns="0" rtlCol="0" anchor="ctr"/>
+          <a:lstStyle/>
+          <a:p>
+            <a:pPr algn="ctr" indent="0" marL="0">
+              <a:buNone/>
+            </a:pPr>
+            <a:r>
+              <a:rPr lang="en-US" sz="1700" b="1" dirty="0">
+                <a:solidFill>
+                  <a:srgbClr val="FFFFFF"/>
+                </a:solidFill>
+                <a:latin typeface="Calibri" pitchFamily="34" charset="0"/>
+                <a:ea typeface="Calibri" pitchFamily="34" charset="-122"/>
+                <a:cs typeface="Calibri" pitchFamily="34" charset="-120"/>
+              </a:rPr>
+              <a:t>3</a:t>
+            </a:r>
+            <a:endParaRPr lang="en-US" sz="1700" dirty="0"/>
+          </a:p>
+        </p:txBody>
+      </p:sp>
+      <p:sp>
+        <p:nvSpPr>
+          <p:cNvPr id="13" name="Text 11"/>
+          <p:cNvSpPr/>
+          <p:nvPr/>
+        </p:nvSpPr>
+        <p:spPr>
+          <a:xfrm>
+            <a:off x="1280160" y="3099816"/>
+            <a:ext cx="10332720" cy="603504"/>
+          </a:xfrm>
+          <a:prstGeom prst="rect">
+            <a:avLst/>
+          </a:prstGeom>
+          <a:noFill/>
+          <a:ln/>
+        </p:spPr>
+        <p:txBody>
+          <a:bodyPr wrap="square" lIns="0" tIns="0" rIns="0" bIns="0" rtlCol="0" anchor="ctr"/>
+          <a:lstStyle/>
+          <a:p>
+            <a:pPr indent="0" marL="0">
               <a:lnSpc>
-                <a:spcPts val="2200"/>
+                <a:spcPts val="1600"/>
               </a:lnSpc>
-              <a:spcAft>
-                <a:spcPts val="1200"/>
-              </a:spcAft>
-              <a:buSzPct val="100000"/>
-              <a:buChar char="•"/>
-            </a:pPr>
-            <a:r>
-              <a:rPr lang="en-US" sz="1350" dirty="0">
+              <a:buNone/>
+            </a:pPr>
+            <a:r>
+              <a:rPr lang="en-US" sz="1400" dirty="0">
                 <a:solidFill>
                   <a:srgbClr val="1E293B"/>
                 </a:solidFill>
@@ -10017,23 +11737,100 @@
                 <a:ea typeface="Calibri" pitchFamily="34" charset="-122"/>
                 <a:cs typeface="Calibri" pitchFamily="34" charset="-120"/>
               </a:rPr>
-              <a:t>Single-group stats  ("average metric for a group")</a:t>
-            </a:r>
-            <a:endParaRPr lang="en-US" sz="1350" dirty="0"/>
-          </a:p>
-          <a:p>
-            <a:pPr marL="342900" indent="-342900">
+              <a:t>Choose the Data Explorer (beta) template</a:t>
+            </a:r>
+            <a:endParaRPr lang="en-US" sz="1400" dirty="0"/>
+          </a:p>
+        </p:txBody>
+      </p:sp>
+      <p:sp>
+        <p:nvSpPr>
+          <p:cNvPr id="14" name="Shape 12"/>
+          <p:cNvSpPr/>
+          <p:nvPr/>
+        </p:nvSpPr>
+        <p:spPr>
+          <a:xfrm>
+            <a:off x="548640" y="3867912"/>
+            <a:ext cx="530352" cy="530352"/>
+          </a:xfrm>
+          <a:prstGeom prst="ellipse">
+            <a:avLst/>
+          </a:prstGeom>
+          <a:solidFill>
+            <a:srgbClr val="1C7293"/>
+          </a:solidFill>
+          <a:ln/>
+        </p:spPr>
+      </p:sp>
+      <p:sp>
+        <p:nvSpPr>
+          <p:cNvPr id="15" name="Text 13"/>
+          <p:cNvSpPr/>
+          <p:nvPr/>
+        </p:nvSpPr>
+        <p:spPr>
+          <a:xfrm>
+            <a:off x="548640" y="3867912"/>
+            <a:ext cx="530352" cy="530352"/>
+          </a:xfrm>
+          <a:prstGeom prst="rect">
+            <a:avLst/>
+          </a:prstGeom>
+          <a:noFill/>
+          <a:ln/>
+        </p:spPr>
+        <p:txBody>
+          <a:bodyPr wrap="square" lIns="0" tIns="0" rIns="0" bIns="0" rtlCol="0" anchor="ctr"/>
+          <a:lstStyle/>
+          <a:p>
+            <a:pPr algn="ctr" indent="0" marL="0">
+              <a:buNone/>
+            </a:pPr>
+            <a:r>
+              <a:rPr lang="en-US" sz="1700" b="1" dirty="0">
+                <a:solidFill>
+                  <a:srgbClr val="FFFFFF"/>
+                </a:solidFill>
+                <a:latin typeface="Calibri" pitchFamily="34" charset="0"/>
+                <a:ea typeface="Calibri" pitchFamily="34" charset="-122"/>
+                <a:cs typeface="Calibri" pitchFamily="34" charset="-120"/>
+              </a:rPr>
+              <a:t>4</a:t>
+            </a:r>
+            <a:endParaRPr lang="en-US" sz="1700" dirty="0"/>
+          </a:p>
+        </p:txBody>
+      </p:sp>
+      <p:sp>
+        <p:nvSpPr>
+          <p:cNvPr id="16" name="Text 14"/>
+          <p:cNvSpPr/>
+          <p:nvPr/>
+        </p:nvSpPr>
+        <p:spPr>
+          <a:xfrm>
+            <a:off x="1280160" y="3849624"/>
+            <a:ext cx="10332720" cy="603504"/>
+          </a:xfrm>
+          <a:prstGeom prst="rect">
+            <a:avLst/>
+          </a:prstGeom>
+          <a:noFill/>
+          <a:ln/>
+        </p:spPr>
+        <p:txBody>
+          <a:bodyPr wrap="square" lIns="0" tIns="0" rIns="0" bIns="0" rtlCol="0" anchor="ctr"/>
+          <a:lstStyle/>
+          <a:p>
+            <a:pPr indent="0" marL="0">
               <a:lnSpc>
-                <a:spcPts val="2200"/>
+                <a:spcPts val="1600"/>
               </a:lnSpc>
-              <a:spcAft>
-                <a:spcPts val="1200"/>
-              </a:spcAft>
-              <a:buSzPct val="100000"/>
-              <a:buChar char="•"/>
-            </a:pPr>
-            <a:r>
-              <a:rPr lang="en-US" sz="1350" dirty="0">
+              <a:buNone/>
+            </a:pPr>
+            <a:r>
+              <a:rPr lang="en-US" sz="1400" dirty="0">
                 <a:solidFill>
                   <a:srgbClr val="1E293B"/>
                 </a:solidFill>
@@ -10041,23 +11838,100 @@
                 <a:ea typeface="Calibri" pitchFamily="34" charset="-122"/>
                 <a:cs typeface="Calibri" pitchFamily="34" charset="-120"/>
               </a:rPr>
-              <a:t>Multi-attribute combos  (filter on two fields)</a:t>
-            </a:r>
-            <a:endParaRPr lang="en-US" sz="1350" dirty="0"/>
-          </a:p>
-          <a:p>
-            <a:pPr marL="342900" indent="-342900">
+              <a:t>Configure: welcome message, up to 5 sample questions, a help panel</a:t>
+            </a:r>
+            <a:endParaRPr lang="en-US" sz="1400" dirty="0"/>
+          </a:p>
+        </p:txBody>
+      </p:sp>
+      <p:sp>
+        <p:nvSpPr>
+          <p:cNvPr id="17" name="Shape 15"/>
+          <p:cNvSpPr/>
+          <p:nvPr/>
+        </p:nvSpPr>
+        <p:spPr>
+          <a:xfrm>
+            <a:off x="548640" y="4617720"/>
+            <a:ext cx="530352" cy="530352"/>
+          </a:xfrm>
+          <a:prstGeom prst="ellipse">
+            <a:avLst/>
+          </a:prstGeom>
+          <a:solidFill>
+            <a:srgbClr val="0B2545"/>
+          </a:solidFill>
+          <a:ln/>
+        </p:spPr>
+      </p:sp>
+      <p:sp>
+        <p:nvSpPr>
+          <p:cNvPr id="18" name="Text 16"/>
+          <p:cNvSpPr/>
+          <p:nvPr/>
+        </p:nvSpPr>
+        <p:spPr>
+          <a:xfrm>
+            <a:off x="548640" y="4617720"/>
+            <a:ext cx="530352" cy="530352"/>
+          </a:xfrm>
+          <a:prstGeom prst="rect">
+            <a:avLst/>
+          </a:prstGeom>
+          <a:noFill/>
+          <a:ln/>
+        </p:spPr>
+        <p:txBody>
+          <a:bodyPr wrap="square" lIns="0" tIns="0" rIns="0" bIns="0" rtlCol="0" anchor="ctr"/>
+          <a:lstStyle/>
+          <a:p>
+            <a:pPr algn="ctr" indent="0" marL="0">
+              <a:buNone/>
+            </a:pPr>
+            <a:r>
+              <a:rPr lang="en-US" sz="1700" b="1" dirty="0">
+                <a:solidFill>
+                  <a:srgbClr val="FFFFFF"/>
+                </a:solidFill>
+                <a:latin typeface="Calibri" pitchFamily="34" charset="0"/>
+                <a:ea typeface="Calibri" pitchFamily="34" charset="-122"/>
+                <a:cs typeface="Calibri" pitchFamily="34" charset="-120"/>
+              </a:rPr>
+              <a:t>5</a:t>
+            </a:r>
+            <a:endParaRPr lang="en-US" sz="1700" dirty="0"/>
+          </a:p>
+        </p:txBody>
+      </p:sp>
+      <p:sp>
+        <p:nvSpPr>
+          <p:cNvPr id="19" name="Text 17"/>
+          <p:cNvSpPr/>
+          <p:nvPr/>
+        </p:nvSpPr>
+        <p:spPr>
+          <a:xfrm>
+            <a:off x="1280160" y="4599432"/>
+            <a:ext cx="10332720" cy="603504"/>
+          </a:xfrm>
+          <a:prstGeom prst="rect">
+            <a:avLst/>
+          </a:prstGeom>
+          <a:noFill/>
+          <a:ln/>
+        </p:spPr>
+        <p:txBody>
+          <a:bodyPr wrap="square" lIns="0" tIns="0" rIns="0" bIns="0" rtlCol="0" anchor="ctr"/>
+          <a:lstStyle/>
+          <a:p>
+            <a:pPr indent="0" marL="0">
               <a:lnSpc>
-                <a:spcPts val="2200"/>
+                <a:spcPts val="1600"/>
               </a:lnSpc>
-              <a:spcAft>
-                <a:spcPts val="1200"/>
-              </a:spcAft>
-              <a:buSzPct val="100000"/>
-              <a:buChar char="•"/>
-            </a:pPr>
-            <a:r>
-              <a:rPr lang="en-US" sz="1350" dirty="0">
+              <a:buNone/>
+            </a:pPr>
+            <a:r>
+              <a:rPr lang="en-US" sz="1400" dirty="0">
                 <a:solidFill>
                   <a:srgbClr val="1E293B"/>
                 </a:solidFill>
@@ -10065,23 +11939,100 @@
                 <a:ea typeface="Calibri" pitchFamily="34" charset="-122"/>
                 <a:cs typeface="Calibri" pitchFamily="34" charset="-120"/>
               </a:rPr>
-              <a:t>State / region-scoped cross-layer intersects</a:t>
-            </a:r>
-            <a:endParaRPr lang="en-US" sz="1350" dirty="0"/>
-          </a:p>
-          <a:p>
-            <a:pPr marL="342900" indent="-342900">
+              <a:t>Preview (auto-saves); check tablet &amp; mobile via the Views menu</a:t>
+            </a:r>
+            <a:endParaRPr lang="en-US" sz="1400" dirty="0"/>
+          </a:p>
+        </p:txBody>
+      </p:sp>
+      <p:sp>
+        <p:nvSpPr>
+          <p:cNvPr id="20" name="Shape 18"/>
+          <p:cNvSpPr/>
+          <p:nvPr/>
+        </p:nvSpPr>
+        <p:spPr>
+          <a:xfrm>
+            <a:off x="548640" y="5367528"/>
+            <a:ext cx="530352" cy="530352"/>
+          </a:xfrm>
+          <a:prstGeom prst="ellipse">
+            <a:avLst/>
+          </a:prstGeom>
+          <a:solidFill>
+            <a:srgbClr val="1C7293"/>
+          </a:solidFill>
+          <a:ln/>
+        </p:spPr>
+      </p:sp>
+      <p:sp>
+        <p:nvSpPr>
+          <p:cNvPr id="21" name="Text 19"/>
+          <p:cNvSpPr/>
+          <p:nvPr/>
+        </p:nvSpPr>
+        <p:spPr>
+          <a:xfrm>
+            <a:off x="548640" y="5367528"/>
+            <a:ext cx="530352" cy="530352"/>
+          </a:xfrm>
+          <a:prstGeom prst="rect">
+            <a:avLst/>
+          </a:prstGeom>
+          <a:noFill/>
+          <a:ln/>
+        </p:spPr>
+        <p:txBody>
+          <a:bodyPr wrap="square" lIns="0" tIns="0" rIns="0" bIns="0" rtlCol="0" anchor="ctr"/>
+          <a:lstStyle/>
+          <a:p>
+            <a:pPr algn="ctr" indent="0" marL="0">
+              <a:buNone/>
+            </a:pPr>
+            <a:r>
+              <a:rPr lang="en-US" sz="1700" b="1" dirty="0">
+                <a:solidFill>
+                  <a:srgbClr val="FFFFFF"/>
+                </a:solidFill>
+                <a:latin typeface="Calibri" pitchFamily="34" charset="0"/>
+                <a:ea typeface="Calibri" pitchFamily="34" charset="-122"/>
+                <a:cs typeface="Calibri" pitchFamily="34" charset="-120"/>
+              </a:rPr>
+              <a:t>6</a:t>
+            </a:r>
+            <a:endParaRPr lang="en-US" sz="1700" dirty="0"/>
+          </a:p>
+        </p:txBody>
+      </p:sp>
+      <p:sp>
+        <p:nvSpPr>
+          <p:cNvPr id="22" name="Text 20"/>
+          <p:cNvSpPr/>
+          <p:nvPr/>
+        </p:nvSpPr>
+        <p:spPr>
+          <a:xfrm>
+            <a:off x="1280160" y="5349240"/>
+            <a:ext cx="10332720" cy="603504"/>
+          </a:xfrm>
+          <a:prstGeom prst="rect">
+            <a:avLst/>
+          </a:prstGeom>
+          <a:noFill/>
+          <a:ln/>
+        </p:spPr>
+        <p:txBody>
+          <a:bodyPr wrap="square" lIns="0" tIns="0" rIns="0" bIns="0" rtlCol="0" anchor="ctr"/>
+          <a:lstStyle/>
+          <a:p>
+            <a:pPr indent="0" marL="0">
               <a:lnSpc>
-                <a:spcPts val="2200"/>
+                <a:spcPts val="1600"/>
               </a:lnSpc>
-              <a:spcAft>
-                <a:spcPts val="1200"/>
-              </a:spcAft>
-              <a:buSzPct val="100000"/>
-              <a:buChar char="•"/>
-            </a:pPr>
-            <a:r>
-              <a:rPr lang="en-US" sz="1350" dirty="0">
+              <a:buNone/>
+            </a:pPr>
+            <a:r>
+              <a:rPr lang="en-US" sz="1400" dirty="0">
                 <a:solidFill>
                   <a:srgbClr val="1E293B"/>
                 </a:solidFill>
@@ -10089,269 +12040,15 @@
                 <a:ea typeface="Calibri" pitchFamily="34" charset="-122"/>
                 <a:cs typeface="Calibri" pitchFamily="34" charset="-120"/>
               </a:rPr>
-              <a:t>Pointed, single-subject questions</a:t>
-            </a:r>
-            <a:endParaRPr lang="en-US" sz="1350" dirty="0"/>
-          </a:p>
-        </p:txBody>
-      </p:sp>
-      <p:sp>
-        <p:nvSpPr>
-          <p:cNvPr id="8" name="Shape 5"/>
-          <p:cNvSpPr/>
-          <p:nvPr/>
-        </p:nvSpPr>
-        <p:spPr>
-          <a:xfrm>
-            <a:off x="6217920" y="1371600"/>
-            <a:ext cx="5486400" cy="4572000"/>
-          </a:xfrm>
-          <a:prstGeom prst="roundRect">
-            <a:avLst>
-              <a:gd name="adj" fmla="val 2000"/>
-            </a:avLst>
-          </a:prstGeom>
-          <a:solidFill>
-            <a:srgbClr val="FBEDEC"/>
-          </a:solidFill>
-          <a:ln/>
-          <a:effectLst>
-            <a:outerShdw sx="100000" sy="100000" kx="0" ky="0" algn="bl" rotWithShape="0" blurRad="88900" dist="38100" dir="5400000">
-              <a:srgbClr val="000000">
-                <a:alpha val="12000"/>
-              </a:srgbClr>
-            </a:outerShdw>
-          </a:effectLst>
-        </p:spPr>
-      </p:sp>
-      <p:sp>
-        <p:nvSpPr>
-          <p:cNvPr id="9" name="Shape 6"/>
-          <p:cNvSpPr/>
-          <p:nvPr/>
-        </p:nvSpPr>
-        <p:spPr>
-          <a:xfrm>
-            <a:off x="6537960" y="1645920"/>
-            <a:ext cx="731520" cy="731520"/>
-          </a:xfrm>
-          <a:prstGeom prst="ellipse">
-            <a:avLst/>
-          </a:prstGeom>
-          <a:solidFill>
-            <a:srgbClr val="C24A45"/>
-          </a:solidFill>
-          <a:ln/>
-        </p:spPr>
-      </p:sp>
-      <p:pic>
-        <p:nvPicPr>
-          <p:cNvPr id="10" name="Image 1" descr="preencoded.png">    </p:cNvPr>
-          <p:cNvPicPr>
-            <a:picLocks noChangeAspect="1"/>
-          </p:cNvPicPr>
-          <p:nvPr/>
-        </p:nvPicPr>
-        <p:blipFill>
-          <a:blip r:embed="rId2"/>
-          <a:stretch>
-            <a:fillRect/>
-          </a:stretch>
-        </p:blipFill>
-        <p:spPr>
-          <a:xfrm>
-            <a:off x="6728155" y="1836115"/>
-            <a:ext cx="351130" cy="351130"/>
-          </a:xfrm>
-          <a:prstGeom prst="rect">
-            <a:avLst/>
-          </a:prstGeom>
-        </p:spPr>
-      </p:pic>
-      <p:sp>
-        <p:nvSpPr>
-          <p:cNvPr id="11" name="Text 7"/>
-          <p:cNvSpPr/>
-          <p:nvPr/>
-        </p:nvSpPr>
-        <p:spPr>
-          <a:xfrm>
-            <a:off x="7406640" y="1645920"/>
-            <a:ext cx="4114800" cy="731520"/>
-          </a:xfrm>
-          <a:prstGeom prst="rect">
-            <a:avLst/>
-          </a:prstGeom>
-          <a:noFill/>
-          <a:ln/>
-        </p:spPr>
-        <p:txBody>
-          <a:bodyPr wrap="square" lIns="0" tIns="0" rIns="0" bIns="0" rtlCol="0" anchor="ctr"/>
-          <a:lstStyle/>
-          <a:p>
-            <a:pPr indent="0" marL="0">
-              <a:buNone/>
-            </a:pPr>
-            <a:r>
-              <a:rPr lang="en-US" sz="1800" b="1" dirty="0">
-                <a:solidFill>
-                  <a:srgbClr val="C24A45"/>
-                </a:solidFill>
-                <a:latin typeface="Calibri" pitchFamily="34" charset="0"/>
-                <a:ea typeface="Calibri" pitchFamily="34" charset="-122"/>
-                <a:cs typeface="Calibri" pitchFamily="34" charset="-120"/>
-              </a:rPr>
-              <a:t>Fails / degrades — keep out</a:t>
-            </a:r>
-            <a:endParaRPr lang="en-US" sz="1800" dirty="0"/>
-          </a:p>
-        </p:txBody>
-      </p:sp>
-      <p:sp>
-        <p:nvSpPr>
-          <p:cNvPr id="12" name="Text 8"/>
-          <p:cNvSpPr/>
-          <p:nvPr/>
-        </p:nvSpPr>
-        <p:spPr>
-          <a:xfrm>
-            <a:off x="6583680" y="2651760"/>
-            <a:ext cx="4937760" cy="3108960"/>
-          </a:xfrm>
-          <a:prstGeom prst="rect">
-            <a:avLst/>
-          </a:prstGeom>
-          <a:noFill/>
-          <a:ln/>
-        </p:spPr>
-        <p:txBody>
-          <a:bodyPr wrap="square" lIns="0" tIns="0" rIns="0" bIns="0" rtlCol="0" anchor="ctr"/>
-          <a:lstStyle/>
-          <a:p>
-            <a:pPr marL="342900" indent="-342900">
-              <a:lnSpc>
-                <a:spcPts val="2200"/>
-              </a:lnSpc>
-              <a:spcAft>
-                <a:spcPts val="1200"/>
-              </a:spcAft>
-              <a:buSzPct val="100000"/>
-              <a:buChar char="•"/>
-            </a:pPr>
-            <a:r>
-              <a:rPr lang="en-US" sz="1350" dirty="0">
-                <a:solidFill>
-                  <a:srgbClr val="1E293B"/>
-                </a:solidFill>
-                <a:latin typeface="Calibri" pitchFamily="34" charset="0"/>
-                <a:ea typeface="Calibri" pitchFamily="34" charset="-122"/>
-                <a:cs typeface="Calibri" pitchFamily="34" charset="-120"/>
-              </a:rPr>
-              <a:t>Schema introspection  ("list fields") — hallucinates</a:t>
-            </a:r>
-            <a:endParaRPr lang="en-US" sz="1350" dirty="0"/>
-          </a:p>
-          <a:p>
-            <a:pPr marL="342900" indent="-342900">
-              <a:lnSpc>
-                <a:spcPts val="2200"/>
-              </a:lnSpc>
-              <a:spcAft>
-                <a:spcPts val="1200"/>
-              </a:spcAft>
-              <a:buSzPct val="100000"/>
-              <a:buChar char="•"/>
-            </a:pPr>
-            <a:r>
-              <a:rPr lang="en-US" sz="1350" dirty="0">
-                <a:solidFill>
-                  <a:srgbClr val="1E293B"/>
-                </a:solidFill>
-                <a:latin typeface="Calibri" pitchFamily="34" charset="0"/>
-                <a:ea typeface="Calibri" pitchFamily="34" charset="-122"/>
-                <a:cs typeface="Calibri" pitchFamily="34" charset="-120"/>
-              </a:rPr>
-              <a:t>Cross-category comparison — silently degrades</a:t>
-            </a:r>
-            <a:endParaRPr lang="en-US" sz="1350" dirty="0"/>
-          </a:p>
-          <a:p>
-            <a:pPr marL="342900" indent="-342900">
-              <a:lnSpc>
-                <a:spcPts val="2200"/>
-              </a:lnSpc>
-              <a:spcAft>
-                <a:spcPts val="1200"/>
-              </a:spcAft>
-              <a:buSzPct val="100000"/>
-              <a:buChar char="•"/>
-            </a:pPr>
-            <a:r>
-              <a:rPr lang="en-US" sz="1350" dirty="0">
-                <a:solidFill>
-                  <a:srgbClr val="1E293B"/>
-                </a:solidFill>
-                <a:latin typeface="Calibri" pitchFamily="34" charset="0"/>
-                <a:ea typeface="Calibri" pitchFamily="34" charset="-122"/>
-                <a:cs typeface="Calibri" pitchFamily="34" charset="-120"/>
-              </a:rPr>
-              <a:t>Unbounded cross-layer  — 413 error</a:t>
-            </a:r>
-            <a:endParaRPr lang="en-US" sz="1350" dirty="0"/>
-          </a:p>
-          <a:p>
-            <a:pPr marL="342900" indent="-342900">
-              <a:lnSpc>
-                <a:spcPts val="2200"/>
-              </a:lnSpc>
-              <a:spcAft>
-                <a:spcPts val="1200"/>
-              </a:spcAft>
-              <a:buSzPct val="100000"/>
-              <a:buChar char="•"/>
-            </a:pPr>
-            <a:r>
-              <a:rPr lang="en-US" sz="1350" dirty="0">
-                <a:solidFill>
-                  <a:srgbClr val="1E293B"/>
-                </a:solidFill>
-                <a:latin typeface="Calibri" pitchFamily="34" charset="0"/>
-                <a:ea typeface="Calibri" pitchFamily="34" charset="-122"/>
-                <a:cs typeface="Calibri" pitchFamily="34" charset="-120"/>
-              </a:rPr>
-              <a:t>Broad sweeps  (vague, unscoped questions)</a:t>
-            </a:r>
-            <a:endParaRPr lang="en-US" sz="1350" dirty="0"/>
-          </a:p>
-          <a:p>
-            <a:pPr marL="342900" indent="-342900">
-              <a:lnSpc>
-                <a:spcPts val="2200"/>
-              </a:lnSpc>
-              <a:spcAft>
-                <a:spcPts val="1200"/>
-              </a:spcAft>
-              <a:buSzPct val="100000"/>
-              <a:buChar char="•"/>
-            </a:pPr>
-            <a:r>
-              <a:rPr lang="en-US" sz="1350" dirty="0">
-                <a:solidFill>
-                  <a:srgbClr val="1E293B"/>
-                </a:solidFill>
-                <a:latin typeface="Calibri" pitchFamily="34" charset="0"/>
-                <a:ea typeface="Calibri" pitchFamily="34" charset="-122"/>
-                <a:cs typeface="Calibri" pitchFamily="34" charset="-120"/>
-              </a:rPr>
-              <a:t>Charts · forecasts · email · user location</a:t>
-            </a:r>
-            <a:endParaRPr lang="en-US" sz="1350" dirty="0"/>
-          </a:p>
-        </p:txBody>
-      </p:sp>
-      <p:sp>
-        <p:nvSpPr>
-          <p:cNvPr id="13" name="Text 9"/>
+              <a:t>Publish, then share (owner / organization / everyone) → Launch</a:t>
+            </a:r>
+            <a:endParaRPr lang="en-US" sz="1400" dirty="0"/>
+          </a:p>
+        </p:txBody>
+      </p:sp>
+      <p:sp>
+        <p:nvSpPr>
+          <p:cNvPr id="23" name="Text 21"/>
           <p:cNvSpPr/>
           <p:nvPr/>
         </p:nvSpPr>
@@ -10390,7 +12087,7 @@
       </p:sp>
       <p:sp>
         <p:nvSpPr>
-          <p:cNvPr id="14" name="Text 10"/>
+          <p:cNvPr id="24" name="Text 22"/>
           <p:cNvSpPr/>
           <p:nvPr/>
         </p:nvSpPr>

--- a/docs/slides/ArcGIS-AI-Components-Walkthrough.pptx
+++ b/docs/slides/ArcGIS-AI-Components-Walkthrough.pptx
@@ -18,9 +18,10 @@
     <p:sldId id="266" r:id="rId12"/>
     <p:sldId id="267" r:id="rId13"/>
     <p:sldId id="268" r:id="rId14"/>
+    <p:sldId id="269" r:id="rId15"/>
   </p:sldIdLst>
   <p:notesMasterIdLst>
-    <p:notesMasterId r:id="rId15"/>
+    <p:notesMasterId r:id="rId16"/>
   </p:notesMasterIdLst>
   <p:sldSz cx="12191695" cy="6858000"/>
   <p:notesSz cx="6858000" cy="12191695"/>
@@ -890,6 +891,94 @@
             <a:fld id="{F7021451-1387-4CA6-816F-3879F97B5CBC}" type="slidenum">
               <a:rPr lang="en-US"/>
               <a:t>13</a:t>
+            </a:fld>
+            <a:endParaRPr lang="en-US"/>
+          </a:p>
+        </p:txBody>
+      </p:sp>
+    </p:spTree>
+    <p:extLst>
+      <p:ext uri="{BB962C8B-B14F-4D97-AF65-F5344CB8AC3E}">
+        <p14:creationId xmlns:p14="http://schemas.microsoft.com/office/powerpoint/2010/main" val="1024086991"/>
+      </p:ext>
+    </p:extLst>
+  </p:cSld>
+  <p:clrMapOvr>
+    <a:masterClrMapping/>
+  </p:clrMapOvr>
+</p:notes>
+</file>
+
+<file path=ppt/notesSlides/notesSlide14.xml><?xml version="1.0" encoding="utf-8"?>
+<p:notes xmlns:a="http://schemas.openxmlformats.org/drawingml/2006/main" xmlns:r="http://schemas.openxmlformats.org/officeDocument/2006/relationships" xmlns:p="http://schemas.openxmlformats.org/presentationml/2006/main">
+  <p:cSld>
+    <p:spTree>
+      <p:nvGrpSpPr>
+        <p:cNvPr id="1" name=""/>
+        <p:cNvGrpSpPr/>
+        <p:nvPr/>
+      </p:nvGrpSpPr>
+      <p:grpSpPr>
+        <a:xfrm>
+          <a:off x="0" y="0"/>
+          <a:ext cx="0" cy="0"/>
+          <a:chOff x="0" y="0"/>
+          <a:chExt cx="0" cy="0"/>
+        </a:xfrm>
+      </p:grpSpPr>
+      <p:sp>
+        <p:nvSpPr>
+          <p:cNvPr id="2" name="Slide Image Placeholder 1"/>
+          <p:cNvSpPr>
+            <a:spLocks noGrp="1" noRot="1" noChangeAspect="1"/>
+          </p:cNvSpPr>
+          <p:nvPr>
+            <p:ph type="sldImg"/>
+          </p:nvPr>
+        </p:nvSpPr>
+        <p:spPr/>
+      </p:sp>
+      <p:sp>
+        <p:nvSpPr>
+          <p:cNvPr id="3" name="Notes Placeholder 2"/>
+          <p:cNvSpPr>
+            <a:spLocks noGrp="1"/>
+          </p:cNvSpPr>
+          <p:nvPr>
+            <p:ph type="body" idx="1"/>
+          </p:nvPr>
+        </p:nvSpPr>
+        <p:spPr/>
+        <p:txBody>
+          <a:bodyPr/>
+          <a:lstStyle/>
+          <a:p>
+            <a:r>
+              <a:rPr lang="en-US" dirty="0"/>
+              <a:t/>
+            </a:r>
+            <a:endParaRPr lang="en-US" dirty="0"/>
+          </a:p>
+        </p:txBody>
+      </p:sp>
+      <p:sp>
+        <p:nvSpPr>
+          <p:cNvPr id="4" name="Slide Number Placeholder 3"/>
+          <p:cNvSpPr>
+            <a:spLocks noGrp="1"/>
+          </p:cNvSpPr>
+          <p:nvPr>
+            <p:ph type="sldNum" sz="quarter" idx="10"/>
+          </p:nvPr>
+        </p:nvSpPr>
+        <p:spPr/>
+        <p:txBody>
+          <a:bodyPr/>
+          <a:lstStyle/>
+          <a:p>
+            <a:fld id="{F7021451-1387-4CA6-816F-3879F97B5CBC}" type="slidenum">
+              <a:rPr lang="en-US"/>
+              <a:t>14</a:t>
             </a:fld>
             <a:endParaRPr lang="en-US"/>
           </a:p>
@@ -2246,7 +2335,7 @@
         <p:spPr>
           <a:xfrm>
             <a:off x="502920" y="411480"/>
-            <a:ext cx="10972800" cy="640080"/>
+            <a:ext cx="8686800" cy="640080"/>
           </a:xfrm>
           <a:prstGeom prst="rect">
             <a:avLst/>
@@ -2270,7 +2359,7 @@
                 <a:ea typeface="Bookman Old Style" pitchFamily="34" charset="-122"/>
                 <a:cs typeface="Bookman Old Style" pitchFamily="34" charset="-120"/>
               </a:rPr>
-              <a:t>Gotchas that cost us a day</a:t>
+              <a:t>Set up Data Explorer (no code)</a:t>
             </a:r>
             <a:endParaRPr lang="en-US" sz="3000" dirty="0"/>
           </a:p>
@@ -2278,87 +2367,151 @@
       </p:sp>
       <p:sp>
         <p:nvSpPr>
-          <p:cNvPr id="3" name="Shape 1"/>
-          <p:cNvSpPr/>
-          <p:nvPr/>
-        </p:nvSpPr>
-        <p:spPr>
-          <a:xfrm>
-            <a:off x="502920" y="1325880"/>
-            <a:ext cx="3657600" cy="2148840"/>
-          </a:xfrm>
-          <a:prstGeom prst="roundRect">
-            <a:avLst>
-              <a:gd name="adj" fmla="val 3404"/>
-            </a:avLst>
+          <p:cNvPr id="3" name="Text 1"/>
+          <p:cNvSpPr/>
+          <p:nvPr/>
+        </p:nvSpPr>
+        <p:spPr>
+          <a:xfrm>
+            <a:off x="8686800" y="566928"/>
+            <a:ext cx="3017520" cy="365760"/>
+          </a:xfrm>
+          <a:prstGeom prst="rect">
+            <a:avLst/>
+          </a:prstGeom>
+          <a:noFill/>
+          <a:ln/>
+        </p:spPr>
+        <p:txBody>
+          <a:bodyPr wrap="square" lIns="0" tIns="0" rIns="0" bIns="0" rtlCol="0" anchor="ctr"/>
+          <a:lstStyle/>
+          <a:p>
+            <a:pPr algn="r" indent="0" marL="0">
+              <a:buNone/>
+            </a:pPr>
+            <a:r>
+              <a:rPr lang="en-US" sz="1200" i="1" dirty="0">
+                <a:solidFill>
+                  <a:srgbClr val="1C7293"/>
+                </a:solidFill>
+                <a:latin typeface="Calibri" pitchFamily="34" charset="0"/>
+                <a:ea typeface="Calibri" pitchFamily="34" charset="-122"/>
+                <a:cs typeface="Calibri" pitchFamily="34" charset="-120"/>
+              </a:rPr>
+              <a:t>doc.arcgis.com → Instant Apps</a:t>
+            </a:r>
+            <a:endParaRPr lang="en-US" sz="1200" dirty="0"/>
+          </a:p>
+        </p:txBody>
+      </p:sp>
+      <p:sp>
+        <p:nvSpPr>
+          <p:cNvPr id="4" name="Text 2"/>
+          <p:cNvSpPr/>
+          <p:nvPr/>
+        </p:nvSpPr>
+        <p:spPr>
+          <a:xfrm>
+            <a:off x="502920" y="1078992"/>
+            <a:ext cx="10972800" cy="457200"/>
+          </a:xfrm>
+          <a:prstGeom prst="rect">
+            <a:avLst/>
+          </a:prstGeom>
+          <a:noFill/>
+          <a:ln/>
+        </p:spPr>
+        <p:txBody>
+          <a:bodyPr wrap="square" lIns="0" tIns="0" rIns="0" bIns="0" rtlCol="0" anchor="ctr"/>
+          <a:lstStyle/>
+          <a:p>
+            <a:pPr indent="0" marL="0">
+              <a:buNone/>
+            </a:pPr>
+            <a:r>
+              <a:rPr lang="en-US" sz="1400" dirty="0">
+                <a:solidFill>
+                  <a:srgbClr val="5B6B7F"/>
+                </a:solidFill>
+                <a:latin typeface="Calibri" pitchFamily="34" charset="0"/>
+                <a:ea typeface="Calibri" pitchFamily="34" charset="-122"/>
+                <a:cs typeface="Calibri" pitchFamily="34" charset="-120"/>
+              </a:rPr>
+              <a:t>From a prepared web map to a shared app — no developer tools.</a:t>
+            </a:r>
+            <a:endParaRPr lang="en-US" sz="1400" dirty="0"/>
+          </a:p>
+        </p:txBody>
+      </p:sp>
+      <p:sp>
+        <p:nvSpPr>
+          <p:cNvPr id="5" name="Shape 3"/>
+          <p:cNvSpPr/>
+          <p:nvPr/>
+        </p:nvSpPr>
+        <p:spPr>
+          <a:xfrm>
+            <a:off x="548640" y="1618488"/>
+            <a:ext cx="530352" cy="530352"/>
+          </a:xfrm>
+          <a:prstGeom prst="ellipse">
+            <a:avLst/>
           </a:prstGeom>
           <a:solidFill>
-            <a:srgbClr val="F4F7FA"/>
+            <a:srgbClr val="0B2545"/>
           </a:solidFill>
           <a:ln/>
-          <a:effectLst>
-            <a:outerShdw sx="100000" sy="100000" kx="0" ky="0" algn="bl" rotWithShape="0" blurRad="88900" dist="38100" dir="5400000">
-              <a:srgbClr val="000000">
-                <a:alpha val="12000"/>
-              </a:srgbClr>
-            </a:outerShdw>
-          </a:effectLst>
-        </p:spPr>
-      </p:sp>
-      <p:sp>
-        <p:nvSpPr>
-          <p:cNvPr id="4" name="Shape 2"/>
-          <p:cNvSpPr/>
-          <p:nvPr/>
-        </p:nvSpPr>
-        <p:spPr>
-          <a:xfrm>
-            <a:off x="758952" y="1581912"/>
-            <a:ext cx="713232" cy="713232"/>
-          </a:xfrm>
-          <a:prstGeom prst="ellipse">
-            <a:avLst/>
-          </a:prstGeom>
-          <a:solidFill>
-            <a:srgbClr val="E8A33D"/>
-          </a:solidFill>
-          <a:ln/>
-        </p:spPr>
-      </p:sp>
-      <p:pic>
-        <p:nvPicPr>
-          <p:cNvPr id="5" name="Image 0" descr="preencoded.png">    </p:cNvPr>
-          <p:cNvPicPr>
-            <a:picLocks noChangeAspect="1"/>
-          </p:cNvPicPr>
-          <p:nvPr/>
-        </p:nvPicPr>
-        <p:blipFill>
-          <a:blip r:embed="rId1"/>
-          <a:stretch>
-            <a:fillRect/>
-          </a:stretch>
-        </p:blipFill>
-        <p:spPr>
-          <a:xfrm>
-            <a:off x="944392" y="1767352"/>
-            <a:ext cx="342351" cy="342351"/>
-          </a:xfrm>
-          <a:prstGeom prst="rect">
-            <a:avLst/>
-          </a:prstGeom>
-        </p:spPr>
-      </p:pic>
-      <p:sp>
-        <p:nvSpPr>
-          <p:cNvPr id="6" name="Text 3"/>
-          <p:cNvSpPr/>
-          <p:nvPr/>
-        </p:nvSpPr>
-        <p:spPr>
-          <a:xfrm>
-            <a:off x="1600200" y="1600200"/>
-            <a:ext cx="2377440" cy="685800"/>
+        </p:spPr>
+      </p:sp>
+      <p:sp>
+        <p:nvSpPr>
+          <p:cNvPr id="6" name="Text 4"/>
+          <p:cNvSpPr/>
+          <p:nvPr/>
+        </p:nvSpPr>
+        <p:spPr>
+          <a:xfrm>
+            <a:off x="548640" y="1618488"/>
+            <a:ext cx="530352" cy="530352"/>
+          </a:xfrm>
+          <a:prstGeom prst="rect">
+            <a:avLst/>
+          </a:prstGeom>
+          <a:noFill/>
+          <a:ln/>
+        </p:spPr>
+        <p:txBody>
+          <a:bodyPr wrap="square" lIns="0" tIns="0" rIns="0" bIns="0" rtlCol="0" anchor="ctr"/>
+          <a:lstStyle/>
+          <a:p>
+            <a:pPr algn="ctr" indent="0" marL="0">
+              <a:buNone/>
+            </a:pPr>
+            <a:r>
+              <a:rPr lang="en-US" sz="1700" b="1" dirty="0">
+                <a:solidFill>
+                  <a:srgbClr val="FFFFFF"/>
+                </a:solidFill>
+                <a:latin typeface="Calibri" pitchFamily="34" charset="0"/>
+                <a:ea typeface="Calibri" pitchFamily="34" charset="-122"/>
+                <a:cs typeface="Calibri" pitchFamily="34" charset="-120"/>
+              </a:rPr>
+              <a:t>1</a:t>
+            </a:r>
+            <a:endParaRPr lang="en-US" sz="1700" dirty="0"/>
+          </a:p>
+        </p:txBody>
+      </p:sp>
+      <p:sp>
+        <p:nvSpPr>
+          <p:cNvPr id="7" name="Text 5"/>
+          <p:cNvSpPr/>
+          <p:nvPr/>
+        </p:nvSpPr>
+        <p:spPr>
+          <a:xfrm>
+            <a:off x="1280160" y="1600200"/>
+            <a:ext cx="10332720" cy="603504"/>
           </a:xfrm>
           <a:prstGeom prst="rect">
             <a:avLst/>
@@ -2377,145 +2530,89 @@
               <a:buNone/>
             </a:pPr>
             <a:r>
-              <a:rPr lang="en-US" sz="1450" b="1" dirty="0">
-                <a:solidFill>
-                  <a:srgbClr val="0B2545"/>
-                </a:solidFill>
-                <a:latin typeface="Calibri" pitchFamily="34" charset="0"/>
-                <a:ea typeface="Calibri" pitchFamily="34" charset="-122"/>
-                <a:cs typeface="Calibri" pitchFamily="34" charset="-120"/>
-              </a:rPr>
-              <a:t>Elements don't auto-register</a:t>
-            </a:r>
-            <a:endParaRPr lang="en-US" sz="1450" dirty="0"/>
-          </a:p>
-        </p:txBody>
-      </p:sp>
-      <p:sp>
-        <p:nvSpPr>
-          <p:cNvPr id="7" name="Text 4"/>
-          <p:cNvSpPr/>
-          <p:nvPr/>
-        </p:nvSpPr>
-        <p:spPr>
-          <a:xfrm>
-            <a:off x="758952" y="2350008"/>
-            <a:ext cx="3145536" cy="1005840"/>
-          </a:xfrm>
-          <a:prstGeom prst="rect">
-            <a:avLst/>
-          </a:prstGeom>
-          <a:noFill/>
-          <a:ln/>
-        </p:spPr>
-        <p:txBody>
-          <a:bodyPr wrap="square" lIns="0" tIns="0" rIns="0" bIns="0" rtlCol="0" anchor="ctr"/>
-          <a:lstStyle/>
-          <a:p>
-            <a:pPr indent="0" marL="0">
-              <a:lnSpc>
-                <a:spcPts val="1450"/>
-              </a:lnSpc>
-              <a:buNone/>
-            </a:pPr>
-            <a:r>
-              <a:rPr lang="en-US" sz="1150" dirty="0">
-                <a:solidFill>
-                  <a:srgbClr val="5B6B7F"/>
-                </a:solidFill>
-                <a:latin typeface="Calibri" pitchFamily="34" charset="0"/>
-                <a:ea typeface="Calibri" pitchFamily="34" charset="-122"/>
-                <a:cs typeface="Calibri" pitchFamily="34" charset="-120"/>
-              </a:rPr>
-              <a:t>SDK 5.x is Lumina-based. Bare imports do nothing — call defineCustomElements() or you get "Custom element not found."</a:t>
-            </a:r>
-            <a:endParaRPr lang="en-US" sz="1150" dirty="0"/>
-          </a:p>
-        </p:txBody>
-      </p:sp>
-      <p:sp>
-        <p:nvSpPr>
-          <p:cNvPr id="8" name="Shape 5"/>
-          <p:cNvSpPr/>
-          <p:nvPr/>
-        </p:nvSpPr>
-        <p:spPr>
-          <a:xfrm>
-            <a:off x="4398264" y="1325880"/>
-            <a:ext cx="3657600" cy="2148840"/>
-          </a:xfrm>
-          <a:prstGeom prst="roundRect">
-            <a:avLst>
-              <a:gd name="adj" fmla="val 3404"/>
-            </a:avLst>
+              <a:rPr lang="en-US" sz="1400" dirty="0">
+                <a:solidFill>
+                  <a:srgbClr val="1E293B"/>
+                </a:solidFill>
+                <a:latin typeface="Calibri" pitchFamily="34" charset="0"/>
+                <a:ea typeface="Calibri" pitchFamily="34" charset="-122"/>
+                <a:cs typeface="Calibri" pitchFamily="34" charset="-120"/>
+              </a:rPr>
+              <a:t>Prep the web map: field metadata → generate embeddings (item Settings, or in the app config)</a:t>
+            </a:r>
+            <a:endParaRPr lang="en-US" sz="1400" dirty="0"/>
+          </a:p>
+        </p:txBody>
+      </p:sp>
+      <p:sp>
+        <p:nvSpPr>
+          <p:cNvPr id="8" name="Shape 6"/>
+          <p:cNvSpPr/>
+          <p:nvPr/>
+        </p:nvSpPr>
+        <p:spPr>
+          <a:xfrm>
+            <a:off x="548640" y="2368296"/>
+            <a:ext cx="530352" cy="530352"/>
+          </a:xfrm>
+          <a:prstGeom prst="ellipse">
+            <a:avLst/>
           </a:prstGeom>
           <a:solidFill>
-            <a:srgbClr val="F4F7FA"/>
+            <a:srgbClr val="1C7293"/>
           </a:solidFill>
           <a:ln/>
-          <a:effectLst>
-            <a:outerShdw sx="100000" sy="100000" kx="0" ky="0" algn="bl" rotWithShape="0" blurRad="88900" dist="38100" dir="5400000">
-              <a:srgbClr val="000000">
-                <a:alpha val="12000"/>
-              </a:srgbClr>
-            </a:outerShdw>
-          </a:effectLst>
-        </p:spPr>
-      </p:sp>
-      <p:sp>
-        <p:nvSpPr>
-          <p:cNvPr id="9" name="Shape 6"/>
-          <p:cNvSpPr/>
-          <p:nvPr/>
-        </p:nvSpPr>
-        <p:spPr>
-          <a:xfrm>
-            <a:off x="4654296" y="1581912"/>
-            <a:ext cx="713232" cy="713232"/>
-          </a:xfrm>
-          <a:prstGeom prst="ellipse">
-            <a:avLst/>
-          </a:prstGeom>
-          <a:solidFill>
-            <a:srgbClr val="E8A33D"/>
-          </a:solidFill>
-          <a:ln/>
-        </p:spPr>
-      </p:sp>
-      <p:pic>
-        <p:nvPicPr>
-          <p:cNvPr id="10" name="Image 1" descr="preencoded.png">    </p:cNvPr>
-          <p:cNvPicPr>
-            <a:picLocks noChangeAspect="1"/>
-          </p:cNvPicPr>
-          <p:nvPr/>
-        </p:nvPicPr>
-        <p:blipFill>
-          <a:blip r:embed="rId2"/>
-          <a:stretch>
-            <a:fillRect/>
-          </a:stretch>
-        </p:blipFill>
-        <p:spPr>
-          <a:xfrm>
-            <a:off x="4839736" y="1767352"/>
-            <a:ext cx="342351" cy="342351"/>
-          </a:xfrm>
-          <a:prstGeom prst="rect">
-            <a:avLst/>
-          </a:prstGeom>
-        </p:spPr>
-      </p:pic>
-      <p:sp>
-        <p:nvSpPr>
-          <p:cNvPr id="11" name="Text 7"/>
-          <p:cNvSpPr/>
-          <p:nvPr/>
-        </p:nvSpPr>
-        <p:spPr>
-          <a:xfrm>
-            <a:off x="5495544" y="1600200"/>
-            <a:ext cx="2377440" cy="685800"/>
+        </p:spPr>
+      </p:sp>
+      <p:sp>
+        <p:nvSpPr>
+          <p:cNvPr id="9" name="Text 7"/>
+          <p:cNvSpPr/>
+          <p:nvPr/>
+        </p:nvSpPr>
+        <p:spPr>
+          <a:xfrm>
+            <a:off x="548640" y="2368296"/>
+            <a:ext cx="530352" cy="530352"/>
+          </a:xfrm>
+          <a:prstGeom prst="rect">
+            <a:avLst/>
+          </a:prstGeom>
+          <a:noFill/>
+          <a:ln/>
+        </p:spPr>
+        <p:txBody>
+          <a:bodyPr wrap="square" lIns="0" tIns="0" rIns="0" bIns="0" rtlCol="0" anchor="ctr"/>
+          <a:lstStyle/>
+          <a:p>
+            <a:pPr algn="ctr" indent="0" marL="0">
+              <a:buNone/>
+            </a:pPr>
+            <a:r>
+              <a:rPr lang="en-US" sz="1700" b="1" dirty="0">
+                <a:solidFill>
+                  <a:srgbClr val="FFFFFF"/>
+                </a:solidFill>
+                <a:latin typeface="Calibri" pitchFamily="34" charset="0"/>
+                <a:ea typeface="Calibri" pitchFamily="34" charset="-122"/>
+                <a:cs typeface="Calibri" pitchFamily="34" charset="-120"/>
+              </a:rPr>
+              <a:t>2</a:t>
+            </a:r>
+            <a:endParaRPr lang="en-US" sz="1700" dirty="0"/>
+          </a:p>
+        </p:txBody>
+      </p:sp>
+      <p:sp>
+        <p:nvSpPr>
+          <p:cNvPr id="10" name="Text 8"/>
+          <p:cNvSpPr/>
+          <p:nvPr/>
+        </p:nvSpPr>
+        <p:spPr>
+          <a:xfrm>
+            <a:off x="1280160" y="2350008"/>
+            <a:ext cx="10332720" cy="603504"/>
           </a:xfrm>
           <a:prstGeom prst="rect">
             <a:avLst/>
@@ -2534,145 +2631,89 @@
               <a:buNone/>
             </a:pPr>
             <a:r>
-              <a:rPr lang="en-US" sz="1450" b="1" dirty="0">
-                <a:solidFill>
-                  <a:srgbClr val="0B2545"/>
-                </a:solidFill>
-                <a:latin typeface="Calibri" pitchFamily="34" charset="0"/>
-                <a:ea typeface="Calibri" pitchFamily="34" charset="-122"/>
-                <a:cs typeface="Calibri" pitchFamily="34" charset="-120"/>
-              </a:rPr>
-              <a:t>No ai-components-react</a:t>
-            </a:r>
-            <a:endParaRPr lang="en-US" sz="1450" dirty="0"/>
-          </a:p>
-        </p:txBody>
-      </p:sp>
-      <p:sp>
-        <p:nvSpPr>
-          <p:cNvPr id="12" name="Text 8"/>
-          <p:cNvSpPr/>
-          <p:nvPr/>
-        </p:nvSpPr>
-        <p:spPr>
-          <a:xfrm>
-            <a:off x="4654296" y="2350008"/>
-            <a:ext cx="3145536" cy="1005840"/>
-          </a:xfrm>
-          <a:prstGeom prst="rect">
-            <a:avLst/>
-          </a:prstGeom>
-          <a:noFill/>
-          <a:ln/>
-        </p:spPr>
-        <p:txBody>
-          <a:bodyPr wrap="square" lIns="0" tIns="0" rIns="0" bIns="0" rtlCol="0" anchor="ctr"/>
-          <a:lstStyle/>
-          <a:p>
-            <a:pPr indent="0" marL="0">
-              <a:lnSpc>
-                <a:spcPts val="1450"/>
-              </a:lnSpc>
-              <a:buNone/>
-            </a:pPr>
-            <a:r>
-              <a:rPr lang="en-US" sz="1150" dirty="0">
-                <a:solidFill>
-                  <a:srgbClr val="5B6B7F"/>
-                </a:solidFill>
-                <a:latin typeface="Calibri" pitchFamily="34" charset="0"/>
-                <a:ea typeface="Calibri" pitchFamily="34" charset="-122"/>
-                <a:cs typeface="Calibri" pitchFamily="34" charset="-120"/>
-              </a:rPr>
-              <a:t>AI components ship as raw web components only. Declare the tags in vite-env.d.ts; set props imperatively via refs.</a:t>
-            </a:r>
-            <a:endParaRPr lang="en-US" sz="1150" dirty="0"/>
-          </a:p>
-        </p:txBody>
-      </p:sp>
-      <p:sp>
-        <p:nvSpPr>
-          <p:cNvPr id="13" name="Shape 9"/>
-          <p:cNvSpPr/>
-          <p:nvPr/>
-        </p:nvSpPr>
-        <p:spPr>
-          <a:xfrm>
-            <a:off x="8293608" y="1325880"/>
-            <a:ext cx="3657600" cy="2148840"/>
-          </a:xfrm>
-          <a:prstGeom prst="roundRect">
-            <a:avLst>
-              <a:gd name="adj" fmla="val 3404"/>
-            </a:avLst>
+              <a:rPr lang="en-US" sz="1400" dirty="0">
+                <a:solidFill>
+                  <a:srgbClr val="1E293B"/>
+                </a:solidFill>
+                <a:latin typeface="Calibri" pitchFamily="34" charset="0"/>
+                <a:ea typeface="Calibri" pitchFamily="34" charset="-122"/>
+                <a:cs typeface="Calibri" pitchFamily="34" charset="-120"/>
+              </a:rPr>
+              <a:t>Open ArcGIS Instant Apps from your web map</a:t>
+            </a:r>
+            <a:endParaRPr lang="en-US" sz="1400" dirty="0"/>
+          </a:p>
+        </p:txBody>
+      </p:sp>
+      <p:sp>
+        <p:nvSpPr>
+          <p:cNvPr id="11" name="Shape 9"/>
+          <p:cNvSpPr/>
+          <p:nvPr/>
+        </p:nvSpPr>
+        <p:spPr>
+          <a:xfrm>
+            <a:off x="548640" y="3118104"/>
+            <a:ext cx="530352" cy="530352"/>
+          </a:xfrm>
+          <a:prstGeom prst="ellipse">
+            <a:avLst/>
           </a:prstGeom>
           <a:solidFill>
-            <a:srgbClr val="F4F7FA"/>
+            <a:srgbClr val="0B2545"/>
           </a:solidFill>
           <a:ln/>
-          <a:effectLst>
-            <a:outerShdw sx="100000" sy="100000" kx="0" ky="0" algn="bl" rotWithShape="0" blurRad="88900" dist="38100" dir="5400000">
-              <a:srgbClr val="000000">
-                <a:alpha val="12000"/>
-              </a:srgbClr>
-            </a:outerShdw>
-          </a:effectLst>
-        </p:spPr>
-      </p:sp>
-      <p:sp>
-        <p:nvSpPr>
-          <p:cNvPr id="14" name="Shape 10"/>
-          <p:cNvSpPr/>
-          <p:nvPr/>
-        </p:nvSpPr>
-        <p:spPr>
-          <a:xfrm>
-            <a:off x="8549640" y="1581912"/>
-            <a:ext cx="713232" cy="713232"/>
-          </a:xfrm>
-          <a:prstGeom prst="ellipse">
-            <a:avLst/>
-          </a:prstGeom>
-          <a:solidFill>
-            <a:srgbClr val="E8A33D"/>
-          </a:solidFill>
-          <a:ln/>
-        </p:spPr>
-      </p:sp>
-      <p:pic>
-        <p:nvPicPr>
-          <p:cNvPr id="15" name="Image 2" descr="preencoded.png">    </p:cNvPr>
-          <p:cNvPicPr>
-            <a:picLocks noChangeAspect="1"/>
-          </p:cNvPicPr>
-          <p:nvPr/>
-        </p:nvPicPr>
-        <p:blipFill>
-          <a:blip r:embed="rId3"/>
-          <a:stretch>
-            <a:fillRect/>
-          </a:stretch>
-        </p:blipFill>
-        <p:spPr>
-          <a:xfrm>
-            <a:off x="8735080" y="1767352"/>
-            <a:ext cx="342351" cy="342351"/>
-          </a:xfrm>
-          <a:prstGeom prst="rect">
-            <a:avLst/>
-          </a:prstGeom>
-        </p:spPr>
-      </p:pic>
-      <p:sp>
-        <p:nvSpPr>
-          <p:cNvPr id="16" name="Text 11"/>
-          <p:cNvSpPr/>
-          <p:nvPr/>
-        </p:nvSpPr>
-        <p:spPr>
-          <a:xfrm>
-            <a:off x="9390888" y="1600200"/>
-            <a:ext cx="2377440" cy="685800"/>
+        </p:spPr>
+      </p:sp>
+      <p:sp>
+        <p:nvSpPr>
+          <p:cNvPr id="12" name="Text 10"/>
+          <p:cNvSpPr/>
+          <p:nvPr/>
+        </p:nvSpPr>
+        <p:spPr>
+          <a:xfrm>
+            <a:off x="548640" y="3118104"/>
+            <a:ext cx="530352" cy="530352"/>
+          </a:xfrm>
+          <a:prstGeom prst="rect">
+            <a:avLst/>
+          </a:prstGeom>
+          <a:noFill/>
+          <a:ln/>
+        </p:spPr>
+        <p:txBody>
+          <a:bodyPr wrap="square" lIns="0" tIns="0" rIns="0" bIns="0" rtlCol="0" anchor="ctr"/>
+          <a:lstStyle/>
+          <a:p>
+            <a:pPr algn="ctr" indent="0" marL="0">
+              <a:buNone/>
+            </a:pPr>
+            <a:r>
+              <a:rPr lang="en-US" sz="1700" b="1" dirty="0">
+                <a:solidFill>
+                  <a:srgbClr val="FFFFFF"/>
+                </a:solidFill>
+                <a:latin typeface="Calibri" pitchFamily="34" charset="0"/>
+                <a:ea typeface="Calibri" pitchFamily="34" charset="-122"/>
+                <a:cs typeface="Calibri" pitchFamily="34" charset="-120"/>
+              </a:rPr>
+              <a:t>3</a:t>
+            </a:r>
+            <a:endParaRPr lang="en-US" sz="1700" dirty="0"/>
+          </a:p>
+        </p:txBody>
+      </p:sp>
+      <p:sp>
+        <p:nvSpPr>
+          <p:cNvPr id="13" name="Text 11"/>
+          <p:cNvSpPr/>
+          <p:nvPr/>
+        </p:nvSpPr>
+        <p:spPr>
+          <a:xfrm>
+            <a:off x="1280160" y="3099816"/>
+            <a:ext cx="10332720" cy="603504"/>
           </a:xfrm>
           <a:prstGeom prst="rect">
             <a:avLst/>
@@ -2691,145 +2732,89 @@
               <a:buNone/>
             </a:pPr>
             <a:r>
-              <a:rPr lang="en-US" sz="1450" b="1" dirty="0">
-                <a:solidFill>
-                  <a:srgbClr val="0B2545"/>
-                </a:solidFill>
-                <a:latin typeface="Calibri" pitchFamily="34" charset="0"/>
-                <a:ea typeface="Calibri" pitchFamily="34" charset="-122"/>
-                <a:cs typeface="Calibri" pitchFamily="34" charset="-120"/>
-              </a:rPr>
-              <a:t>Embeddings 504 ≠ CORS</a:t>
-            </a:r>
-            <a:endParaRPr lang="en-US" sz="1450" dirty="0"/>
-          </a:p>
-        </p:txBody>
-      </p:sp>
-      <p:sp>
-        <p:nvSpPr>
-          <p:cNvPr id="17" name="Text 12"/>
-          <p:cNvSpPr/>
-          <p:nvPr/>
-        </p:nvSpPr>
-        <p:spPr>
-          <a:xfrm>
-            <a:off x="8549640" y="2350008"/>
-            <a:ext cx="3145536" cy="1005840"/>
-          </a:xfrm>
-          <a:prstGeom prst="rect">
-            <a:avLst/>
-          </a:prstGeom>
-          <a:noFill/>
-          <a:ln/>
-        </p:spPr>
-        <p:txBody>
-          <a:bodyPr wrap="square" lIns="0" tIns="0" rIns="0" bIns="0" rtlCol="0" anchor="ctr"/>
-          <a:lstStyle/>
-          <a:p>
-            <a:pPr indent="0" marL="0">
-              <a:lnSpc>
-                <a:spcPts val="1450"/>
-              </a:lnSpc>
-              <a:buNone/>
-            </a:pPr>
-            <a:r>
-              <a:rPr lang="en-US" sz="1150" dirty="0">
-                <a:solidFill>
-                  <a:srgbClr val="5B6B7F"/>
-                </a:solidFill>
-                <a:latin typeface="Calibri" pitchFamily="34" charset="0"/>
-                <a:ea typeface="Calibri" pitchFamily="34" charset="-122"/>
-                <a:cs typeface="Calibri" pitchFamily="34" charset="-120"/>
-              </a:rPr>
-              <a:t>Generic error looks like CORS but is a 504 timeout. Wide-schema reference layers trigger it; narrow ones succeed.</a:t>
-            </a:r>
-            <a:endParaRPr lang="en-US" sz="1150" dirty="0"/>
-          </a:p>
-        </p:txBody>
-      </p:sp>
-      <p:sp>
-        <p:nvSpPr>
-          <p:cNvPr id="18" name="Shape 13"/>
-          <p:cNvSpPr/>
-          <p:nvPr/>
-        </p:nvSpPr>
-        <p:spPr>
-          <a:xfrm>
-            <a:off x="502920" y="3749040"/>
-            <a:ext cx="3657600" cy="2148840"/>
-          </a:xfrm>
-          <a:prstGeom prst="roundRect">
-            <a:avLst>
-              <a:gd name="adj" fmla="val 3404"/>
-            </a:avLst>
+              <a:rPr lang="en-US" sz="1400" dirty="0">
+                <a:solidFill>
+                  <a:srgbClr val="1E293B"/>
+                </a:solidFill>
+                <a:latin typeface="Calibri" pitchFamily="34" charset="0"/>
+                <a:ea typeface="Calibri" pitchFamily="34" charset="-122"/>
+                <a:cs typeface="Calibri" pitchFamily="34" charset="-120"/>
+              </a:rPr>
+              <a:t>Choose the Data Explorer (beta) template</a:t>
+            </a:r>
+            <a:endParaRPr lang="en-US" sz="1400" dirty="0"/>
+          </a:p>
+        </p:txBody>
+      </p:sp>
+      <p:sp>
+        <p:nvSpPr>
+          <p:cNvPr id="14" name="Shape 12"/>
+          <p:cNvSpPr/>
+          <p:nvPr/>
+        </p:nvSpPr>
+        <p:spPr>
+          <a:xfrm>
+            <a:off x="548640" y="3867912"/>
+            <a:ext cx="530352" cy="530352"/>
+          </a:xfrm>
+          <a:prstGeom prst="ellipse">
+            <a:avLst/>
           </a:prstGeom>
           <a:solidFill>
-            <a:srgbClr val="F4F7FA"/>
+            <a:srgbClr val="1C7293"/>
           </a:solidFill>
           <a:ln/>
-          <a:effectLst>
-            <a:outerShdw sx="100000" sy="100000" kx="0" ky="0" algn="bl" rotWithShape="0" blurRad="88900" dist="38100" dir="5400000">
-              <a:srgbClr val="000000">
-                <a:alpha val="12000"/>
-              </a:srgbClr>
-            </a:outerShdw>
-          </a:effectLst>
-        </p:spPr>
-      </p:sp>
-      <p:sp>
-        <p:nvSpPr>
-          <p:cNvPr id="19" name="Shape 14"/>
-          <p:cNvSpPr/>
-          <p:nvPr/>
-        </p:nvSpPr>
-        <p:spPr>
-          <a:xfrm>
-            <a:off x="758952" y="4005072"/>
-            <a:ext cx="713232" cy="713232"/>
-          </a:xfrm>
-          <a:prstGeom prst="ellipse">
-            <a:avLst/>
-          </a:prstGeom>
-          <a:solidFill>
-            <a:srgbClr val="E8A33D"/>
-          </a:solidFill>
-          <a:ln/>
-        </p:spPr>
-      </p:sp>
-      <p:pic>
-        <p:nvPicPr>
-          <p:cNvPr id="20" name="Image 3" descr="preencoded.png">    </p:cNvPr>
-          <p:cNvPicPr>
-            <a:picLocks noChangeAspect="1"/>
-          </p:cNvPicPr>
-          <p:nvPr/>
-        </p:nvPicPr>
-        <p:blipFill>
-          <a:blip r:embed="rId4"/>
-          <a:stretch>
-            <a:fillRect/>
-          </a:stretch>
-        </p:blipFill>
-        <p:spPr>
-          <a:xfrm>
-            <a:off x="944392" y="4190512"/>
-            <a:ext cx="342351" cy="342351"/>
-          </a:xfrm>
-          <a:prstGeom prst="rect">
-            <a:avLst/>
-          </a:prstGeom>
-        </p:spPr>
-      </p:pic>
-      <p:sp>
-        <p:nvSpPr>
-          <p:cNvPr id="21" name="Text 15"/>
-          <p:cNvSpPr/>
-          <p:nvPr/>
-        </p:nvSpPr>
-        <p:spPr>
-          <a:xfrm>
-            <a:off x="1600200" y="4023360"/>
-            <a:ext cx="2377440" cy="685800"/>
+        </p:spPr>
+      </p:sp>
+      <p:sp>
+        <p:nvSpPr>
+          <p:cNvPr id="15" name="Text 13"/>
+          <p:cNvSpPr/>
+          <p:nvPr/>
+        </p:nvSpPr>
+        <p:spPr>
+          <a:xfrm>
+            <a:off x="548640" y="3867912"/>
+            <a:ext cx="530352" cy="530352"/>
+          </a:xfrm>
+          <a:prstGeom prst="rect">
+            <a:avLst/>
+          </a:prstGeom>
+          <a:noFill/>
+          <a:ln/>
+        </p:spPr>
+        <p:txBody>
+          <a:bodyPr wrap="square" lIns="0" tIns="0" rIns="0" bIns="0" rtlCol="0" anchor="ctr"/>
+          <a:lstStyle/>
+          <a:p>
+            <a:pPr algn="ctr" indent="0" marL="0">
+              <a:buNone/>
+            </a:pPr>
+            <a:r>
+              <a:rPr lang="en-US" sz="1700" b="1" dirty="0">
+                <a:solidFill>
+                  <a:srgbClr val="FFFFFF"/>
+                </a:solidFill>
+                <a:latin typeface="Calibri" pitchFamily="34" charset="0"/>
+                <a:ea typeface="Calibri" pitchFamily="34" charset="-122"/>
+                <a:cs typeface="Calibri" pitchFamily="34" charset="-120"/>
+              </a:rPr>
+              <a:t>4</a:t>
+            </a:r>
+            <a:endParaRPr lang="en-US" sz="1700" dirty="0"/>
+          </a:p>
+        </p:txBody>
+      </p:sp>
+      <p:sp>
+        <p:nvSpPr>
+          <p:cNvPr id="16" name="Text 14"/>
+          <p:cNvSpPr/>
+          <p:nvPr/>
+        </p:nvSpPr>
+        <p:spPr>
+          <a:xfrm>
+            <a:off x="1280160" y="3849624"/>
+            <a:ext cx="10332720" cy="603504"/>
           </a:xfrm>
           <a:prstGeom prst="rect">
             <a:avLst/>
@@ -2848,145 +2833,89 @@
               <a:buNone/>
             </a:pPr>
             <a:r>
-              <a:rPr lang="en-US" sz="1450" b="1" dirty="0">
-                <a:solidFill>
-                  <a:srgbClr val="0B2545"/>
-                </a:solidFill>
-                <a:latin typeface="Calibri" pitchFamily="34" charset="0"/>
-                <a:ea typeface="Calibri" pitchFamily="34" charset="-122"/>
-                <a:cs typeface="Calibri" pitchFamily="34" charset="-120"/>
-              </a:rPr>
-              <a:t>Cross-layer 413</a:t>
-            </a:r>
-            <a:endParaRPr lang="en-US" sz="1450" dirty="0"/>
-          </a:p>
-        </p:txBody>
-      </p:sp>
-      <p:sp>
-        <p:nvSpPr>
-          <p:cNvPr id="22" name="Text 16"/>
-          <p:cNvSpPr/>
-          <p:nvPr/>
-        </p:nvSpPr>
-        <p:spPr>
-          <a:xfrm>
-            <a:off x="758952" y="4773168"/>
-            <a:ext cx="3145536" cy="1005840"/>
-          </a:xfrm>
-          <a:prstGeom prst="rect">
-            <a:avLst/>
-          </a:prstGeom>
-          <a:noFill/>
-          <a:ln/>
-        </p:spPr>
-        <p:txBody>
-          <a:bodyPr wrap="square" lIns="0" tIns="0" rIns="0" bIns="0" rtlCol="0" anchor="ctr"/>
-          <a:lstStyle/>
-          <a:p>
-            <a:pPr indent="0" marL="0">
-              <a:lnSpc>
-                <a:spcPts val="1450"/>
-              </a:lnSpc>
-              <a:buNone/>
-            </a:pPr>
-            <a:r>
-              <a:rPr lang="en-US" sz="1150" dirty="0">
-                <a:solidFill>
-                  <a:srgbClr val="5B6B7F"/>
-                </a:solidFill>
-                <a:latin typeface="Calibri" pitchFamily="34" charset="0"/>
-                <a:ea typeface="Calibri" pitchFamily="34" charset="-122"/>
-                <a:cs typeface="Calibri" pitchFamily="34" charset="-120"/>
-              </a:rPr>
-              <a:t>OOB agent submits national polygons as a spatial filter → 413. Fix: state-scope the prompt or pre-compute the attribute.</a:t>
-            </a:r>
-            <a:endParaRPr lang="en-US" sz="1150" dirty="0"/>
-          </a:p>
-        </p:txBody>
-      </p:sp>
-      <p:sp>
-        <p:nvSpPr>
-          <p:cNvPr id="23" name="Shape 17"/>
-          <p:cNvSpPr/>
-          <p:nvPr/>
-        </p:nvSpPr>
-        <p:spPr>
-          <a:xfrm>
-            <a:off x="4398264" y="3749040"/>
-            <a:ext cx="3657600" cy="2148840"/>
-          </a:xfrm>
-          <a:prstGeom prst="roundRect">
-            <a:avLst>
-              <a:gd name="adj" fmla="val 3404"/>
-            </a:avLst>
+              <a:rPr lang="en-US" sz="1400" dirty="0">
+                <a:solidFill>
+                  <a:srgbClr val="1E293B"/>
+                </a:solidFill>
+                <a:latin typeface="Calibri" pitchFamily="34" charset="0"/>
+                <a:ea typeface="Calibri" pitchFamily="34" charset="-122"/>
+                <a:cs typeface="Calibri" pitchFamily="34" charset="-120"/>
+              </a:rPr>
+              <a:t>Configure: welcome message, up to 5 sample questions, a help panel</a:t>
+            </a:r>
+            <a:endParaRPr lang="en-US" sz="1400" dirty="0"/>
+          </a:p>
+        </p:txBody>
+      </p:sp>
+      <p:sp>
+        <p:nvSpPr>
+          <p:cNvPr id="17" name="Shape 15"/>
+          <p:cNvSpPr/>
+          <p:nvPr/>
+        </p:nvSpPr>
+        <p:spPr>
+          <a:xfrm>
+            <a:off x="548640" y="4617720"/>
+            <a:ext cx="530352" cy="530352"/>
+          </a:xfrm>
+          <a:prstGeom prst="ellipse">
+            <a:avLst/>
           </a:prstGeom>
           <a:solidFill>
-            <a:srgbClr val="F4F7FA"/>
+            <a:srgbClr val="0B2545"/>
           </a:solidFill>
           <a:ln/>
-          <a:effectLst>
-            <a:outerShdw sx="100000" sy="100000" kx="0" ky="0" algn="bl" rotWithShape="0" blurRad="88900" dist="38100" dir="5400000">
-              <a:srgbClr val="000000">
-                <a:alpha val="12000"/>
-              </a:srgbClr>
-            </a:outerShdw>
-          </a:effectLst>
-        </p:spPr>
-      </p:sp>
-      <p:sp>
-        <p:nvSpPr>
-          <p:cNvPr id="24" name="Shape 18"/>
-          <p:cNvSpPr/>
-          <p:nvPr/>
-        </p:nvSpPr>
-        <p:spPr>
-          <a:xfrm>
-            <a:off x="4654296" y="4005072"/>
-            <a:ext cx="713232" cy="713232"/>
-          </a:xfrm>
-          <a:prstGeom prst="ellipse">
-            <a:avLst/>
-          </a:prstGeom>
-          <a:solidFill>
-            <a:srgbClr val="E8A33D"/>
-          </a:solidFill>
-          <a:ln/>
-        </p:spPr>
-      </p:sp>
-      <p:pic>
-        <p:nvPicPr>
-          <p:cNvPr id="25" name="Image 4" descr="preencoded.png">    </p:cNvPr>
-          <p:cNvPicPr>
-            <a:picLocks noChangeAspect="1"/>
-          </p:cNvPicPr>
-          <p:nvPr/>
-        </p:nvPicPr>
-        <p:blipFill>
-          <a:blip r:embed="rId5"/>
-          <a:stretch>
-            <a:fillRect/>
-          </a:stretch>
-        </p:blipFill>
-        <p:spPr>
-          <a:xfrm>
-            <a:off x="4839736" y="4190512"/>
-            <a:ext cx="342351" cy="342351"/>
-          </a:xfrm>
-          <a:prstGeom prst="rect">
-            <a:avLst/>
-          </a:prstGeom>
-        </p:spPr>
-      </p:pic>
-      <p:sp>
-        <p:nvSpPr>
-          <p:cNvPr id="26" name="Text 19"/>
-          <p:cNvSpPr/>
-          <p:nvPr/>
-        </p:nvSpPr>
-        <p:spPr>
-          <a:xfrm>
-            <a:off x="5495544" y="4023360"/>
-            <a:ext cx="2377440" cy="685800"/>
+        </p:spPr>
+      </p:sp>
+      <p:sp>
+        <p:nvSpPr>
+          <p:cNvPr id="18" name="Text 16"/>
+          <p:cNvSpPr/>
+          <p:nvPr/>
+        </p:nvSpPr>
+        <p:spPr>
+          <a:xfrm>
+            <a:off x="548640" y="4617720"/>
+            <a:ext cx="530352" cy="530352"/>
+          </a:xfrm>
+          <a:prstGeom prst="rect">
+            <a:avLst/>
+          </a:prstGeom>
+          <a:noFill/>
+          <a:ln/>
+        </p:spPr>
+        <p:txBody>
+          <a:bodyPr wrap="square" lIns="0" tIns="0" rIns="0" bIns="0" rtlCol="0" anchor="ctr"/>
+          <a:lstStyle/>
+          <a:p>
+            <a:pPr algn="ctr" indent="0" marL="0">
+              <a:buNone/>
+            </a:pPr>
+            <a:r>
+              <a:rPr lang="en-US" sz="1700" b="1" dirty="0">
+                <a:solidFill>
+                  <a:srgbClr val="FFFFFF"/>
+                </a:solidFill>
+                <a:latin typeface="Calibri" pitchFamily="34" charset="0"/>
+                <a:ea typeface="Calibri" pitchFamily="34" charset="-122"/>
+                <a:cs typeface="Calibri" pitchFamily="34" charset="-120"/>
+              </a:rPr>
+              <a:t>5</a:t>
+            </a:r>
+            <a:endParaRPr lang="en-US" sz="1700" dirty="0"/>
+          </a:p>
+        </p:txBody>
+      </p:sp>
+      <p:sp>
+        <p:nvSpPr>
+          <p:cNvPr id="19" name="Text 17"/>
+          <p:cNvSpPr/>
+          <p:nvPr/>
+        </p:nvSpPr>
+        <p:spPr>
+          <a:xfrm>
+            <a:off x="1280160" y="4599432"/>
+            <a:ext cx="10332720" cy="603504"/>
           </a:xfrm>
           <a:prstGeom prst="rect">
             <a:avLst/>
@@ -3005,145 +2934,89 @@
               <a:buNone/>
             </a:pPr>
             <a:r>
-              <a:rPr lang="en-US" sz="1450" b="1" dirty="0">
-                <a:solidFill>
-                  <a:srgbClr val="0B2545"/>
-                </a:solidFill>
-                <a:latin typeface="Calibri" pitchFamily="34" charset="0"/>
-                <a:ea typeface="Calibri" pitchFamily="34" charset="-122"/>
-                <a:cs typeface="Calibri" pitchFamily="34" charset="-120"/>
-              </a:rPr>
-              <a:t>Schema introspection lies</a:t>
-            </a:r>
-            <a:endParaRPr lang="en-US" sz="1450" dirty="0"/>
-          </a:p>
-        </p:txBody>
-      </p:sp>
-      <p:sp>
-        <p:nvSpPr>
-          <p:cNvPr id="27" name="Text 20"/>
-          <p:cNvSpPr/>
-          <p:nvPr/>
-        </p:nvSpPr>
-        <p:spPr>
-          <a:xfrm>
-            <a:off x="4654296" y="4773168"/>
-            <a:ext cx="3145536" cy="1005840"/>
-          </a:xfrm>
-          <a:prstGeom prst="rect">
-            <a:avLst/>
-          </a:prstGeom>
-          <a:noFill/>
-          <a:ln/>
-        </p:spPr>
-        <p:txBody>
-          <a:bodyPr wrap="square" lIns="0" tIns="0" rIns="0" bIns="0" rtlCol="0" anchor="ctr"/>
-          <a:lstStyle/>
-          <a:p>
-            <a:pPr indent="0" marL="0">
-              <a:lnSpc>
-                <a:spcPts val="1450"/>
-              </a:lnSpc>
-              <a:buNone/>
-            </a:pPr>
-            <a:r>
-              <a:rPr lang="en-US" sz="1150" dirty="0">
-                <a:solidFill>
-                  <a:srgbClr val="5B6B7F"/>
-                </a:solidFill>
-                <a:latin typeface="Calibri" pitchFamily="34" charset="0"/>
-                <a:ea typeface="Calibri" pitchFamily="34" charset="-122"/>
-                <a:cs typeface="Calibri" pitchFamily="34" charset="-120"/>
-              </a:rPr>
-              <a:t>"List fields" returned two contradictory lists in one turn. Verify schema via AGO Data → Fields — never the assistant.</a:t>
-            </a:r>
-            <a:endParaRPr lang="en-US" sz="1150" dirty="0"/>
-          </a:p>
-        </p:txBody>
-      </p:sp>
-      <p:sp>
-        <p:nvSpPr>
-          <p:cNvPr id="28" name="Shape 21"/>
-          <p:cNvSpPr/>
-          <p:nvPr/>
-        </p:nvSpPr>
-        <p:spPr>
-          <a:xfrm>
-            <a:off x="8293608" y="3749040"/>
-            <a:ext cx="3657600" cy="2148840"/>
-          </a:xfrm>
-          <a:prstGeom prst="roundRect">
-            <a:avLst>
-              <a:gd name="adj" fmla="val 3404"/>
-            </a:avLst>
+              <a:rPr lang="en-US" sz="1400" dirty="0">
+                <a:solidFill>
+                  <a:srgbClr val="1E293B"/>
+                </a:solidFill>
+                <a:latin typeface="Calibri" pitchFamily="34" charset="0"/>
+                <a:ea typeface="Calibri" pitchFamily="34" charset="-122"/>
+                <a:cs typeface="Calibri" pitchFamily="34" charset="-120"/>
+              </a:rPr>
+              <a:t>Preview (auto-saves); check tablet &amp; mobile via the Views menu</a:t>
+            </a:r>
+            <a:endParaRPr lang="en-US" sz="1400" dirty="0"/>
+          </a:p>
+        </p:txBody>
+      </p:sp>
+      <p:sp>
+        <p:nvSpPr>
+          <p:cNvPr id="20" name="Shape 18"/>
+          <p:cNvSpPr/>
+          <p:nvPr/>
+        </p:nvSpPr>
+        <p:spPr>
+          <a:xfrm>
+            <a:off x="548640" y="5367528"/>
+            <a:ext cx="530352" cy="530352"/>
+          </a:xfrm>
+          <a:prstGeom prst="ellipse">
+            <a:avLst/>
           </a:prstGeom>
           <a:solidFill>
-            <a:srgbClr val="F4F7FA"/>
+            <a:srgbClr val="1C7293"/>
           </a:solidFill>
           <a:ln/>
-          <a:effectLst>
-            <a:outerShdw sx="100000" sy="100000" kx="0" ky="0" algn="bl" rotWithShape="0" blurRad="88900" dist="38100" dir="5400000">
-              <a:srgbClr val="000000">
-                <a:alpha val="12000"/>
-              </a:srgbClr>
-            </a:outerShdw>
-          </a:effectLst>
-        </p:spPr>
-      </p:sp>
-      <p:sp>
-        <p:nvSpPr>
-          <p:cNvPr id="29" name="Shape 22"/>
-          <p:cNvSpPr/>
-          <p:nvPr/>
-        </p:nvSpPr>
-        <p:spPr>
-          <a:xfrm>
-            <a:off x="8549640" y="4005072"/>
-            <a:ext cx="713232" cy="713232"/>
-          </a:xfrm>
-          <a:prstGeom prst="ellipse">
-            <a:avLst/>
-          </a:prstGeom>
-          <a:solidFill>
-            <a:srgbClr val="E8A33D"/>
-          </a:solidFill>
-          <a:ln/>
-        </p:spPr>
-      </p:sp>
-      <p:pic>
-        <p:nvPicPr>
-          <p:cNvPr id="30" name="Image 5" descr="preencoded.png">    </p:cNvPr>
-          <p:cNvPicPr>
-            <a:picLocks noChangeAspect="1"/>
-          </p:cNvPicPr>
-          <p:nvPr/>
-        </p:nvPicPr>
-        <p:blipFill>
-          <a:blip r:embed="rId6"/>
-          <a:stretch>
-            <a:fillRect/>
-          </a:stretch>
-        </p:blipFill>
-        <p:spPr>
-          <a:xfrm>
-            <a:off x="8735080" y="4190512"/>
-            <a:ext cx="342351" cy="342351"/>
-          </a:xfrm>
-          <a:prstGeom prst="rect">
-            <a:avLst/>
-          </a:prstGeom>
-        </p:spPr>
-      </p:pic>
-      <p:sp>
-        <p:nvSpPr>
-          <p:cNvPr id="31" name="Text 23"/>
-          <p:cNvSpPr/>
-          <p:nvPr/>
-        </p:nvSpPr>
-        <p:spPr>
-          <a:xfrm>
-            <a:off x="9390888" y="4023360"/>
-            <a:ext cx="2377440" cy="685800"/>
+        </p:spPr>
+      </p:sp>
+      <p:sp>
+        <p:nvSpPr>
+          <p:cNvPr id="21" name="Text 19"/>
+          <p:cNvSpPr/>
+          <p:nvPr/>
+        </p:nvSpPr>
+        <p:spPr>
+          <a:xfrm>
+            <a:off x="548640" y="5367528"/>
+            <a:ext cx="530352" cy="530352"/>
+          </a:xfrm>
+          <a:prstGeom prst="rect">
+            <a:avLst/>
+          </a:prstGeom>
+          <a:noFill/>
+          <a:ln/>
+        </p:spPr>
+        <p:txBody>
+          <a:bodyPr wrap="square" lIns="0" tIns="0" rIns="0" bIns="0" rtlCol="0" anchor="ctr"/>
+          <a:lstStyle/>
+          <a:p>
+            <a:pPr algn="ctr" indent="0" marL="0">
+              <a:buNone/>
+            </a:pPr>
+            <a:r>
+              <a:rPr lang="en-US" sz="1700" b="1" dirty="0">
+                <a:solidFill>
+                  <a:srgbClr val="FFFFFF"/>
+                </a:solidFill>
+                <a:latin typeface="Calibri" pitchFamily="34" charset="0"/>
+                <a:ea typeface="Calibri" pitchFamily="34" charset="-122"/>
+                <a:cs typeface="Calibri" pitchFamily="34" charset="-120"/>
+              </a:rPr>
+              <a:t>6</a:t>
+            </a:r>
+            <a:endParaRPr lang="en-US" sz="1700" dirty="0"/>
+          </a:p>
+        </p:txBody>
+      </p:sp>
+      <p:sp>
+        <p:nvSpPr>
+          <p:cNvPr id="22" name="Text 20"/>
+          <p:cNvSpPr/>
+          <p:nvPr/>
+        </p:nvSpPr>
+        <p:spPr>
+          <a:xfrm>
+            <a:off x="1280160" y="5349240"/>
+            <a:ext cx="10332720" cy="603504"/>
           </a:xfrm>
           <a:prstGeom prst="rect">
             <a:avLst/>
@@ -3162,65 +3035,23 @@
               <a:buNone/>
             </a:pPr>
             <a:r>
-              <a:rPr lang="en-US" sz="1450" b="1" dirty="0">
-                <a:solidFill>
-                  <a:srgbClr val="0B2545"/>
-                </a:solidFill>
-                <a:latin typeface="Calibri" pitchFamily="34" charset="0"/>
-                <a:ea typeface="Calibri" pitchFamily="34" charset="-122"/>
-                <a:cs typeface="Calibri" pitchFamily="34" charset="-120"/>
-              </a:rPr>
-              <a:t>Verify, don't infer</a:t>
-            </a:r>
-            <a:endParaRPr lang="en-US" sz="1450" dirty="0"/>
-          </a:p>
-        </p:txBody>
-      </p:sp>
-      <p:sp>
-        <p:nvSpPr>
-          <p:cNvPr id="32" name="Text 24"/>
-          <p:cNvSpPr/>
-          <p:nvPr/>
-        </p:nvSpPr>
-        <p:spPr>
-          <a:xfrm>
-            <a:off x="8549640" y="4773168"/>
-            <a:ext cx="3145536" cy="1005840"/>
-          </a:xfrm>
-          <a:prstGeom prst="rect">
-            <a:avLst/>
-          </a:prstGeom>
-          <a:noFill/>
-          <a:ln/>
-        </p:spPr>
-        <p:txBody>
-          <a:bodyPr wrap="square" lIns="0" tIns="0" rIns="0" bIns="0" rtlCol="0" anchor="ctr"/>
-          <a:lstStyle/>
-          <a:p>
-            <a:pPr indent="0" marL="0">
-              <a:lnSpc>
-                <a:spcPts val="1450"/>
-              </a:lnSpc>
-              <a:buNone/>
-            </a:pPr>
-            <a:r>
-              <a:rPr lang="en-US" sz="1150" dirty="0">
-                <a:solidFill>
-                  <a:srgbClr val="5B6B7F"/>
-                </a:solidFill>
-                <a:latin typeface="Calibri" pitchFamily="34" charset="0"/>
-                <a:ea typeface="Calibri" pitchFamily="34" charset="-122"/>
-                <a:cs typeface="Calibri" pitchFamily="34" charset="-120"/>
-              </a:rPr>
-              <a:t>Filenames in dist/ aren't docs. We mounted a non-existent agent on a guess. Confirm against developers.arcgis.com.</a:t>
-            </a:r>
-            <a:endParaRPr lang="en-US" sz="1150" dirty="0"/>
-          </a:p>
-        </p:txBody>
-      </p:sp>
-      <p:sp>
-        <p:nvSpPr>
-          <p:cNvPr id="33" name="Text 25"/>
+              <a:rPr lang="en-US" sz="1400" dirty="0">
+                <a:solidFill>
+                  <a:srgbClr val="1E293B"/>
+                </a:solidFill>
+                <a:latin typeface="Calibri" pitchFamily="34" charset="0"/>
+                <a:ea typeface="Calibri" pitchFamily="34" charset="-122"/>
+                <a:cs typeface="Calibri" pitchFamily="34" charset="-120"/>
+              </a:rPr>
+              <a:t>Publish, then share (owner / organization / everyone) → Launch</a:t>
+            </a:r>
+            <a:endParaRPr lang="en-US" sz="1400" dirty="0"/>
+          </a:p>
+        </p:txBody>
+      </p:sp>
+      <p:sp>
+        <p:nvSpPr>
+          <p:cNvPr id="23" name="Text 21"/>
           <p:cNvSpPr/>
           <p:nvPr/>
         </p:nvSpPr>
@@ -3259,7 +3090,7 @@
       </p:sp>
       <p:sp>
         <p:nvSpPr>
-          <p:cNvPr id="34" name="Text 26"/>
+          <p:cNvPr id="24" name="Text 22"/>
           <p:cNvSpPr/>
           <p:nvPr/>
         </p:nvSpPr>
@@ -3337,7 +3168,7 @@
         <p:spPr>
           <a:xfrm>
             <a:off x="502920" y="411480"/>
-            <a:ext cx="11155680" cy="640080"/>
+            <a:ext cx="10972800" cy="640080"/>
           </a:xfrm>
           <a:prstGeom prst="rect">
             <a:avLst/>
@@ -3353,7 +3184,7 @@
               <a:buNone/>
             </a:pPr>
             <a:r>
-              <a:rPr lang="en-US" sz="2800" b="1" dirty="0">
+              <a:rPr lang="en-US" sz="3000" b="1" dirty="0">
                 <a:solidFill>
                   <a:srgbClr val="0B2545"/>
                 </a:solidFill>
@@ -3361,9 +3192,9 @@
                 <a:ea typeface="Bookman Old Style" pitchFamily="34" charset="-122"/>
                 <a:cs typeface="Bookman Old Style" pitchFamily="34" charset="-120"/>
               </a:rPr>
-              <a:t>Prompt engineering: what the OOB agent can do</a:t>
-            </a:r>
-            <a:endParaRPr lang="en-US" sz="2800" dirty="0"/>
+              <a:t>Gotchas that cost us a day</a:t>
+            </a:r>
+            <a:endParaRPr lang="en-US" sz="3000" dirty="0"/>
           </a:p>
         </p:txBody>
       </p:sp>
@@ -3375,16 +3206,16 @@
         </p:nvSpPr>
         <p:spPr>
           <a:xfrm>
-            <a:off x="502920" y="1371600"/>
-            <a:ext cx="5486400" cy="4572000"/>
+            <a:off x="502920" y="1325880"/>
+            <a:ext cx="3657600" cy="2148840"/>
           </a:xfrm>
           <a:prstGeom prst="roundRect">
             <a:avLst>
-              <a:gd name="adj" fmla="val 2000"/>
+              <a:gd name="adj" fmla="val 3404"/>
             </a:avLst>
           </a:prstGeom>
           <a:solidFill>
-            <a:srgbClr val="EAF4EF"/>
+            <a:srgbClr val="F4F7FA"/>
           </a:solidFill>
           <a:ln/>
           <a:effectLst>
@@ -3404,14 +3235,14 @@
         </p:nvSpPr>
         <p:spPr>
           <a:xfrm>
-            <a:off x="822960" y="1645920"/>
-            <a:ext cx="731520" cy="731520"/>
+            <a:off x="758952" y="1581912"/>
+            <a:ext cx="713232" cy="713232"/>
           </a:xfrm>
           <a:prstGeom prst="ellipse">
             <a:avLst/>
           </a:prstGeom>
           <a:solidFill>
-            <a:srgbClr val="2A9D6F"/>
+            <a:srgbClr val="E8A33D"/>
           </a:solidFill>
           <a:ln/>
         </p:spPr>
@@ -3432,8 +3263,8 @@
         </p:blipFill>
         <p:spPr>
           <a:xfrm>
-            <a:off x="1013155" y="1836115"/>
-            <a:ext cx="351130" cy="351130"/>
+            <a:off x="944392" y="1767352"/>
+            <a:ext cx="342351" cy="342351"/>
           </a:xfrm>
           <a:prstGeom prst="rect">
             <a:avLst/>
@@ -3448,8 +3279,8 @@
         </p:nvSpPr>
         <p:spPr>
           <a:xfrm>
-            <a:off x="1691640" y="1645920"/>
-            <a:ext cx="4114800" cy="731520"/>
+            <a:off x="1600200" y="1600200"/>
+            <a:ext cx="2377440" cy="685800"/>
           </a:xfrm>
           <a:prstGeom prst="rect">
             <a:avLst/>
@@ -3462,20 +3293,23 @@
           <a:lstStyle/>
           <a:p>
             <a:pPr indent="0" marL="0">
-              <a:buNone/>
-            </a:pPr>
-            <a:r>
-              <a:rPr lang="en-US" sz="1800" b="1" dirty="0">
-                <a:solidFill>
-                  <a:srgbClr val="2A9D6F"/>
-                </a:solidFill>
-                <a:latin typeface="Calibri" pitchFamily="34" charset="0"/>
-                <a:ea typeface="Calibri" pitchFamily="34" charset="-122"/>
-                <a:cs typeface="Calibri" pitchFamily="34" charset="-120"/>
-              </a:rPr>
-              <a:t>Reliable — demo these</a:t>
-            </a:r>
-            <a:endParaRPr lang="en-US" sz="1800" dirty="0"/>
+              <a:lnSpc>
+                <a:spcPts val="1600"/>
+              </a:lnSpc>
+              <a:buNone/>
+            </a:pPr>
+            <a:r>
+              <a:rPr lang="en-US" sz="1450" b="1" dirty="0">
+                <a:solidFill>
+                  <a:srgbClr val="0B2545"/>
+                </a:solidFill>
+                <a:latin typeface="Calibri" pitchFamily="34" charset="0"/>
+                <a:ea typeface="Calibri" pitchFamily="34" charset="-122"/>
+                <a:cs typeface="Calibri" pitchFamily="34" charset="-120"/>
+              </a:rPr>
+              <a:t>Elements don't auto-register</a:t>
+            </a:r>
+            <a:endParaRPr lang="en-US" sz="1450" dirty="0"/>
           </a:p>
         </p:txBody>
       </p:sp>
@@ -3487,137 +3321,37 @@
         </p:nvSpPr>
         <p:spPr>
           <a:xfrm>
-            <a:off x="868680" y="2651760"/>
-            <a:ext cx="4937760" cy="3108960"/>
-          </a:xfrm>
-          <a:prstGeom prst="rect">
-            <a:avLst/>
-          </a:prstGeom>
-          <a:noFill/>
-          <a:ln/>
-        </p:spPr>
-        <p:txBody>
-          <a:bodyPr wrap="square" lIns="0" tIns="0" rIns="0" bIns="0" rtlCol="0" anchor="ctr"/>
-          <a:lstStyle/>
-          <a:p>
-            <a:pPr marL="342900" indent="-342900">
+            <a:off x="758952" y="2350008"/>
+            <a:ext cx="3145536" cy="1005840"/>
+          </a:xfrm>
+          <a:prstGeom prst="rect">
+            <a:avLst/>
+          </a:prstGeom>
+          <a:noFill/>
+          <a:ln/>
+        </p:spPr>
+        <p:txBody>
+          <a:bodyPr wrap="square" lIns="0" tIns="0" rIns="0" bIns="0" rtlCol="0" anchor="ctr"/>
+          <a:lstStyle/>
+          <a:p>
+            <a:pPr indent="0" marL="0">
               <a:lnSpc>
-                <a:spcPts val="2200"/>
+                <a:spcPts val="1450"/>
               </a:lnSpc>
-              <a:spcAft>
-                <a:spcPts val="1200"/>
-              </a:spcAft>
-              <a:buSzPct val="100000"/>
-              <a:buChar char="•"/>
-            </a:pPr>
-            <a:r>
-              <a:rPr lang="en-US" sz="1350" dirty="0">
-                <a:solidFill>
-                  <a:srgbClr val="1E293B"/>
-                </a:solidFill>
-                <a:latin typeface="Calibri" pitchFamily="34" charset="0"/>
-                <a:ea typeface="Calibri" pitchFamily="34" charset="-122"/>
-                <a:cs typeface="Calibri" pitchFamily="34" charset="-120"/>
-              </a:rPr>
-              <a:t>Attribute filters  ("show the high-priority records")</a:t>
-            </a:r>
-            <a:endParaRPr lang="en-US" sz="1350" dirty="0"/>
-          </a:p>
-          <a:p>
-            <a:pPr marL="342900" indent="-342900">
-              <a:lnSpc>
-                <a:spcPts val="2200"/>
-              </a:lnSpc>
-              <a:spcAft>
-                <a:spcPts val="1200"/>
-              </a:spcAft>
-              <a:buSzPct val="100000"/>
-              <a:buChar char="•"/>
-            </a:pPr>
-            <a:r>
-              <a:rPr lang="en-US" sz="1350" dirty="0">
-                <a:solidFill>
-                  <a:srgbClr val="1E293B"/>
-                </a:solidFill>
-                <a:latin typeface="Calibri" pitchFamily="34" charset="0"/>
-                <a:ea typeface="Calibri" pitchFamily="34" charset="-122"/>
-                <a:cs typeface="Calibri" pitchFamily="34" charset="-120"/>
-              </a:rPr>
-              <a:t>Single-group stats  ("average metric for a group")</a:t>
-            </a:r>
-            <a:endParaRPr lang="en-US" sz="1350" dirty="0"/>
-          </a:p>
-          <a:p>
-            <a:pPr marL="342900" indent="-342900">
-              <a:lnSpc>
-                <a:spcPts val="2200"/>
-              </a:lnSpc>
-              <a:spcAft>
-                <a:spcPts val="1200"/>
-              </a:spcAft>
-              <a:buSzPct val="100000"/>
-              <a:buChar char="•"/>
-            </a:pPr>
-            <a:r>
-              <a:rPr lang="en-US" sz="1350" dirty="0">
-                <a:solidFill>
-                  <a:srgbClr val="1E293B"/>
-                </a:solidFill>
-                <a:latin typeface="Calibri" pitchFamily="34" charset="0"/>
-                <a:ea typeface="Calibri" pitchFamily="34" charset="-122"/>
-                <a:cs typeface="Calibri" pitchFamily="34" charset="-120"/>
-              </a:rPr>
-              <a:t>Multi-attribute combos  (filter on two fields)</a:t>
-            </a:r>
-            <a:endParaRPr lang="en-US" sz="1350" dirty="0"/>
-          </a:p>
-          <a:p>
-            <a:pPr marL="342900" indent="-342900">
-              <a:lnSpc>
-                <a:spcPts val="2200"/>
-              </a:lnSpc>
-              <a:spcAft>
-                <a:spcPts val="1200"/>
-              </a:spcAft>
-              <a:buSzPct val="100000"/>
-              <a:buChar char="•"/>
-            </a:pPr>
-            <a:r>
-              <a:rPr lang="en-US" sz="1350" dirty="0">
-                <a:solidFill>
-                  <a:srgbClr val="1E293B"/>
-                </a:solidFill>
-                <a:latin typeface="Calibri" pitchFamily="34" charset="0"/>
-                <a:ea typeface="Calibri" pitchFamily="34" charset="-122"/>
-                <a:cs typeface="Calibri" pitchFamily="34" charset="-120"/>
-              </a:rPr>
-              <a:t>State / region-scoped cross-layer intersects</a:t>
-            </a:r>
-            <a:endParaRPr lang="en-US" sz="1350" dirty="0"/>
-          </a:p>
-          <a:p>
-            <a:pPr marL="342900" indent="-342900">
-              <a:lnSpc>
-                <a:spcPts val="2200"/>
-              </a:lnSpc>
-              <a:spcAft>
-                <a:spcPts val="1200"/>
-              </a:spcAft>
-              <a:buSzPct val="100000"/>
-              <a:buChar char="•"/>
-            </a:pPr>
-            <a:r>
-              <a:rPr lang="en-US" sz="1350" dirty="0">
-                <a:solidFill>
-                  <a:srgbClr val="1E293B"/>
-                </a:solidFill>
-                <a:latin typeface="Calibri" pitchFamily="34" charset="0"/>
-                <a:ea typeface="Calibri" pitchFamily="34" charset="-122"/>
-                <a:cs typeface="Calibri" pitchFamily="34" charset="-120"/>
-              </a:rPr>
-              <a:t>Pointed, single-subject questions</a:t>
-            </a:r>
-            <a:endParaRPr lang="en-US" sz="1350" dirty="0"/>
+              <a:buNone/>
+            </a:pPr>
+            <a:r>
+              <a:rPr lang="en-US" sz="1150" dirty="0">
+                <a:solidFill>
+                  <a:srgbClr val="5B6B7F"/>
+                </a:solidFill>
+                <a:latin typeface="Calibri" pitchFamily="34" charset="0"/>
+                <a:ea typeface="Calibri" pitchFamily="34" charset="-122"/>
+                <a:cs typeface="Calibri" pitchFamily="34" charset="-120"/>
+              </a:rPr>
+              <a:t>SDK 5.x is Lumina-based. Bare imports do nothing — call defineCustomElements() or you get "Custom element not found."</a:t>
+            </a:r>
+            <a:endParaRPr lang="en-US" sz="1150" dirty="0"/>
           </a:p>
         </p:txBody>
       </p:sp>
@@ -3629,16 +3363,16 @@
         </p:nvSpPr>
         <p:spPr>
           <a:xfrm>
-            <a:off x="6217920" y="1371600"/>
-            <a:ext cx="5486400" cy="4572000"/>
+            <a:off x="4398264" y="1325880"/>
+            <a:ext cx="3657600" cy="2148840"/>
           </a:xfrm>
           <a:prstGeom prst="roundRect">
             <a:avLst>
-              <a:gd name="adj" fmla="val 2000"/>
+              <a:gd name="adj" fmla="val 3404"/>
             </a:avLst>
           </a:prstGeom>
           <a:solidFill>
-            <a:srgbClr val="FBEDEC"/>
+            <a:srgbClr val="F4F7FA"/>
           </a:solidFill>
           <a:ln/>
           <a:effectLst>
@@ -3658,14 +3392,14 @@
         </p:nvSpPr>
         <p:spPr>
           <a:xfrm>
-            <a:off x="6537960" y="1645920"/>
-            <a:ext cx="731520" cy="731520"/>
+            <a:off x="4654296" y="1581912"/>
+            <a:ext cx="713232" cy="713232"/>
           </a:xfrm>
           <a:prstGeom prst="ellipse">
             <a:avLst/>
           </a:prstGeom>
           <a:solidFill>
-            <a:srgbClr val="C24A45"/>
+            <a:srgbClr val="E8A33D"/>
           </a:solidFill>
           <a:ln/>
         </p:spPr>
@@ -3686,8 +3420,8 @@
         </p:blipFill>
         <p:spPr>
           <a:xfrm>
-            <a:off x="6728155" y="1836115"/>
-            <a:ext cx="351130" cy="351130"/>
+            <a:off x="4839736" y="1767352"/>
+            <a:ext cx="342351" cy="342351"/>
           </a:xfrm>
           <a:prstGeom prst="rect">
             <a:avLst/>
@@ -3702,8 +3436,8 @@
         </p:nvSpPr>
         <p:spPr>
           <a:xfrm>
-            <a:off x="7406640" y="1645920"/>
-            <a:ext cx="4114800" cy="731520"/>
+            <a:off x="5495544" y="1600200"/>
+            <a:ext cx="2377440" cy="685800"/>
           </a:xfrm>
           <a:prstGeom prst="rect">
             <a:avLst/>
@@ -3716,20 +3450,23 @@
           <a:lstStyle/>
           <a:p>
             <a:pPr indent="0" marL="0">
-              <a:buNone/>
-            </a:pPr>
-            <a:r>
-              <a:rPr lang="en-US" sz="1800" b="1" dirty="0">
-                <a:solidFill>
-                  <a:srgbClr val="C24A45"/>
-                </a:solidFill>
-                <a:latin typeface="Calibri" pitchFamily="34" charset="0"/>
-                <a:ea typeface="Calibri" pitchFamily="34" charset="-122"/>
-                <a:cs typeface="Calibri" pitchFamily="34" charset="-120"/>
-              </a:rPr>
-              <a:t>Fails / degrades — keep out</a:t>
-            </a:r>
-            <a:endParaRPr lang="en-US" sz="1800" dirty="0"/>
+              <a:lnSpc>
+                <a:spcPts val="1600"/>
+              </a:lnSpc>
+              <a:buNone/>
+            </a:pPr>
+            <a:r>
+              <a:rPr lang="en-US" sz="1450" b="1" dirty="0">
+                <a:solidFill>
+                  <a:srgbClr val="0B2545"/>
+                </a:solidFill>
+                <a:latin typeface="Calibri" pitchFamily="34" charset="0"/>
+                <a:ea typeface="Calibri" pitchFamily="34" charset="-122"/>
+                <a:cs typeface="Calibri" pitchFamily="34" charset="-120"/>
+              </a:rPr>
+              <a:t>No ai-components-react</a:t>
+            </a:r>
+            <a:endParaRPr lang="en-US" sz="1450" dirty="0"/>
           </a:p>
         </p:txBody>
       </p:sp>
@@ -3741,143 +3478,671 @@
         </p:nvSpPr>
         <p:spPr>
           <a:xfrm>
-            <a:off x="6583680" y="2651760"/>
-            <a:ext cx="4937760" cy="3108960"/>
-          </a:xfrm>
-          <a:prstGeom prst="rect">
-            <a:avLst/>
-          </a:prstGeom>
-          <a:noFill/>
-          <a:ln/>
-        </p:spPr>
-        <p:txBody>
-          <a:bodyPr wrap="square" lIns="0" tIns="0" rIns="0" bIns="0" rtlCol="0" anchor="ctr"/>
-          <a:lstStyle/>
-          <a:p>
-            <a:pPr marL="342900" indent="-342900">
+            <a:off x="4654296" y="2350008"/>
+            <a:ext cx="3145536" cy="1005840"/>
+          </a:xfrm>
+          <a:prstGeom prst="rect">
+            <a:avLst/>
+          </a:prstGeom>
+          <a:noFill/>
+          <a:ln/>
+        </p:spPr>
+        <p:txBody>
+          <a:bodyPr wrap="square" lIns="0" tIns="0" rIns="0" bIns="0" rtlCol="0" anchor="ctr"/>
+          <a:lstStyle/>
+          <a:p>
+            <a:pPr indent="0" marL="0">
               <a:lnSpc>
-                <a:spcPts val="2200"/>
+                <a:spcPts val="1450"/>
               </a:lnSpc>
-              <a:spcAft>
-                <a:spcPts val="1200"/>
-              </a:spcAft>
-              <a:buSzPct val="100000"/>
-              <a:buChar char="•"/>
-            </a:pPr>
-            <a:r>
-              <a:rPr lang="en-US" sz="1350" dirty="0">
-                <a:solidFill>
-                  <a:srgbClr val="1E293B"/>
-                </a:solidFill>
-                <a:latin typeface="Calibri" pitchFamily="34" charset="0"/>
-                <a:ea typeface="Calibri" pitchFamily="34" charset="-122"/>
-                <a:cs typeface="Calibri" pitchFamily="34" charset="-120"/>
-              </a:rPr>
-              <a:t>Schema introspection  ("list fields") — hallucinates</a:t>
-            </a:r>
-            <a:endParaRPr lang="en-US" sz="1350" dirty="0"/>
-          </a:p>
-          <a:p>
-            <a:pPr marL="342900" indent="-342900">
+              <a:buNone/>
+            </a:pPr>
+            <a:r>
+              <a:rPr lang="en-US" sz="1150" dirty="0">
+                <a:solidFill>
+                  <a:srgbClr val="5B6B7F"/>
+                </a:solidFill>
+                <a:latin typeface="Calibri" pitchFamily="34" charset="0"/>
+                <a:ea typeface="Calibri" pitchFamily="34" charset="-122"/>
+                <a:cs typeface="Calibri" pitchFamily="34" charset="-120"/>
+              </a:rPr>
+              <a:t>AI components ship as raw web components only. Declare the tags in vite-env.d.ts; set props imperatively via refs.</a:t>
+            </a:r>
+            <a:endParaRPr lang="en-US" sz="1150" dirty="0"/>
+          </a:p>
+        </p:txBody>
+      </p:sp>
+      <p:sp>
+        <p:nvSpPr>
+          <p:cNvPr id="13" name="Shape 9"/>
+          <p:cNvSpPr/>
+          <p:nvPr/>
+        </p:nvSpPr>
+        <p:spPr>
+          <a:xfrm>
+            <a:off x="8293608" y="1325880"/>
+            <a:ext cx="3657600" cy="2148840"/>
+          </a:xfrm>
+          <a:prstGeom prst="roundRect">
+            <a:avLst>
+              <a:gd name="adj" fmla="val 3404"/>
+            </a:avLst>
+          </a:prstGeom>
+          <a:solidFill>
+            <a:srgbClr val="F4F7FA"/>
+          </a:solidFill>
+          <a:ln/>
+          <a:effectLst>
+            <a:outerShdw sx="100000" sy="100000" kx="0" ky="0" algn="bl" rotWithShape="0" blurRad="88900" dist="38100" dir="5400000">
+              <a:srgbClr val="000000">
+                <a:alpha val="12000"/>
+              </a:srgbClr>
+            </a:outerShdw>
+          </a:effectLst>
+        </p:spPr>
+      </p:sp>
+      <p:sp>
+        <p:nvSpPr>
+          <p:cNvPr id="14" name="Shape 10"/>
+          <p:cNvSpPr/>
+          <p:nvPr/>
+        </p:nvSpPr>
+        <p:spPr>
+          <a:xfrm>
+            <a:off x="8549640" y="1581912"/>
+            <a:ext cx="713232" cy="713232"/>
+          </a:xfrm>
+          <a:prstGeom prst="ellipse">
+            <a:avLst/>
+          </a:prstGeom>
+          <a:solidFill>
+            <a:srgbClr val="E8A33D"/>
+          </a:solidFill>
+          <a:ln/>
+        </p:spPr>
+      </p:sp>
+      <p:pic>
+        <p:nvPicPr>
+          <p:cNvPr id="15" name="Image 2" descr="preencoded.png">    </p:cNvPr>
+          <p:cNvPicPr>
+            <a:picLocks noChangeAspect="1"/>
+          </p:cNvPicPr>
+          <p:nvPr/>
+        </p:nvPicPr>
+        <p:blipFill>
+          <a:blip r:embed="rId3"/>
+          <a:stretch>
+            <a:fillRect/>
+          </a:stretch>
+        </p:blipFill>
+        <p:spPr>
+          <a:xfrm>
+            <a:off x="8735080" y="1767352"/>
+            <a:ext cx="342351" cy="342351"/>
+          </a:xfrm>
+          <a:prstGeom prst="rect">
+            <a:avLst/>
+          </a:prstGeom>
+        </p:spPr>
+      </p:pic>
+      <p:sp>
+        <p:nvSpPr>
+          <p:cNvPr id="16" name="Text 11"/>
+          <p:cNvSpPr/>
+          <p:nvPr/>
+        </p:nvSpPr>
+        <p:spPr>
+          <a:xfrm>
+            <a:off x="9390888" y="1600200"/>
+            <a:ext cx="2377440" cy="685800"/>
+          </a:xfrm>
+          <a:prstGeom prst="rect">
+            <a:avLst/>
+          </a:prstGeom>
+          <a:noFill/>
+          <a:ln/>
+        </p:spPr>
+        <p:txBody>
+          <a:bodyPr wrap="square" lIns="0" tIns="0" rIns="0" bIns="0" rtlCol="0" anchor="ctr"/>
+          <a:lstStyle/>
+          <a:p>
+            <a:pPr indent="0" marL="0">
               <a:lnSpc>
-                <a:spcPts val="2200"/>
+                <a:spcPts val="1600"/>
               </a:lnSpc>
-              <a:spcAft>
-                <a:spcPts val="1200"/>
-              </a:spcAft>
-              <a:buSzPct val="100000"/>
-              <a:buChar char="•"/>
-            </a:pPr>
-            <a:r>
-              <a:rPr lang="en-US" sz="1350" dirty="0">
-                <a:solidFill>
-                  <a:srgbClr val="1E293B"/>
-                </a:solidFill>
-                <a:latin typeface="Calibri" pitchFamily="34" charset="0"/>
-                <a:ea typeface="Calibri" pitchFamily="34" charset="-122"/>
-                <a:cs typeface="Calibri" pitchFamily="34" charset="-120"/>
-              </a:rPr>
-              <a:t>Cross-category comparison — silently degrades</a:t>
-            </a:r>
-            <a:endParaRPr lang="en-US" sz="1350" dirty="0"/>
-          </a:p>
-          <a:p>
-            <a:pPr marL="342900" indent="-342900">
+              <a:buNone/>
+            </a:pPr>
+            <a:r>
+              <a:rPr lang="en-US" sz="1450" b="1" dirty="0">
+                <a:solidFill>
+                  <a:srgbClr val="0B2545"/>
+                </a:solidFill>
+                <a:latin typeface="Calibri" pitchFamily="34" charset="0"/>
+                <a:ea typeface="Calibri" pitchFamily="34" charset="-122"/>
+                <a:cs typeface="Calibri" pitchFamily="34" charset="-120"/>
+              </a:rPr>
+              <a:t>Embeddings 504 ≠ CORS</a:t>
+            </a:r>
+            <a:endParaRPr lang="en-US" sz="1450" dirty="0"/>
+          </a:p>
+        </p:txBody>
+      </p:sp>
+      <p:sp>
+        <p:nvSpPr>
+          <p:cNvPr id="17" name="Text 12"/>
+          <p:cNvSpPr/>
+          <p:nvPr/>
+        </p:nvSpPr>
+        <p:spPr>
+          <a:xfrm>
+            <a:off x="8549640" y="2350008"/>
+            <a:ext cx="3145536" cy="1005840"/>
+          </a:xfrm>
+          <a:prstGeom prst="rect">
+            <a:avLst/>
+          </a:prstGeom>
+          <a:noFill/>
+          <a:ln/>
+        </p:spPr>
+        <p:txBody>
+          <a:bodyPr wrap="square" lIns="0" tIns="0" rIns="0" bIns="0" rtlCol="0" anchor="ctr"/>
+          <a:lstStyle/>
+          <a:p>
+            <a:pPr indent="0" marL="0">
               <a:lnSpc>
-                <a:spcPts val="2200"/>
+                <a:spcPts val="1450"/>
               </a:lnSpc>
-              <a:spcAft>
-                <a:spcPts val="1200"/>
-              </a:spcAft>
-              <a:buSzPct val="100000"/>
-              <a:buChar char="•"/>
-            </a:pPr>
-            <a:r>
-              <a:rPr lang="en-US" sz="1350" dirty="0">
-                <a:solidFill>
-                  <a:srgbClr val="1E293B"/>
-                </a:solidFill>
-                <a:latin typeface="Calibri" pitchFamily="34" charset="0"/>
-                <a:ea typeface="Calibri" pitchFamily="34" charset="-122"/>
-                <a:cs typeface="Calibri" pitchFamily="34" charset="-120"/>
-              </a:rPr>
-              <a:t>Unbounded cross-layer  — 413 error</a:t>
-            </a:r>
-            <a:endParaRPr lang="en-US" sz="1350" dirty="0"/>
-          </a:p>
-          <a:p>
-            <a:pPr marL="342900" indent="-342900">
+              <a:buNone/>
+            </a:pPr>
+            <a:r>
+              <a:rPr lang="en-US" sz="1150" dirty="0">
+                <a:solidFill>
+                  <a:srgbClr val="5B6B7F"/>
+                </a:solidFill>
+                <a:latin typeface="Calibri" pitchFamily="34" charset="0"/>
+                <a:ea typeface="Calibri" pitchFamily="34" charset="-122"/>
+                <a:cs typeface="Calibri" pitchFamily="34" charset="-120"/>
+              </a:rPr>
+              <a:t>Generic error looks like CORS but is a 504 timeout. Wide-schema reference layers trigger it; narrow ones succeed.</a:t>
+            </a:r>
+            <a:endParaRPr lang="en-US" sz="1150" dirty="0"/>
+          </a:p>
+        </p:txBody>
+      </p:sp>
+      <p:sp>
+        <p:nvSpPr>
+          <p:cNvPr id="18" name="Shape 13"/>
+          <p:cNvSpPr/>
+          <p:nvPr/>
+        </p:nvSpPr>
+        <p:spPr>
+          <a:xfrm>
+            <a:off x="502920" y="3749040"/>
+            <a:ext cx="3657600" cy="2148840"/>
+          </a:xfrm>
+          <a:prstGeom prst="roundRect">
+            <a:avLst>
+              <a:gd name="adj" fmla="val 3404"/>
+            </a:avLst>
+          </a:prstGeom>
+          <a:solidFill>
+            <a:srgbClr val="F4F7FA"/>
+          </a:solidFill>
+          <a:ln/>
+          <a:effectLst>
+            <a:outerShdw sx="100000" sy="100000" kx="0" ky="0" algn="bl" rotWithShape="0" blurRad="88900" dist="38100" dir="5400000">
+              <a:srgbClr val="000000">
+                <a:alpha val="12000"/>
+              </a:srgbClr>
+            </a:outerShdw>
+          </a:effectLst>
+        </p:spPr>
+      </p:sp>
+      <p:sp>
+        <p:nvSpPr>
+          <p:cNvPr id="19" name="Shape 14"/>
+          <p:cNvSpPr/>
+          <p:nvPr/>
+        </p:nvSpPr>
+        <p:spPr>
+          <a:xfrm>
+            <a:off x="758952" y="4005072"/>
+            <a:ext cx="713232" cy="713232"/>
+          </a:xfrm>
+          <a:prstGeom prst="ellipse">
+            <a:avLst/>
+          </a:prstGeom>
+          <a:solidFill>
+            <a:srgbClr val="E8A33D"/>
+          </a:solidFill>
+          <a:ln/>
+        </p:spPr>
+      </p:sp>
+      <p:pic>
+        <p:nvPicPr>
+          <p:cNvPr id="20" name="Image 3" descr="preencoded.png">    </p:cNvPr>
+          <p:cNvPicPr>
+            <a:picLocks noChangeAspect="1"/>
+          </p:cNvPicPr>
+          <p:nvPr/>
+        </p:nvPicPr>
+        <p:blipFill>
+          <a:blip r:embed="rId4"/>
+          <a:stretch>
+            <a:fillRect/>
+          </a:stretch>
+        </p:blipFill>
+        <p:spPr>
+          <a:xfrm>
+            <a:off x="944392" y="4190512"/>
+            <a:ext cx="342351" cy="342351"/>
+          </a:xfrm>
+          <a:prstGeom prst="rect">
+            <a:avLst/>
+          </a:prstGeom>
+        </p:spPr>
+      </p:pic>
+      <p:sp>
+        <p:nvSpPr>
+          <p:cNvPr id="21" name="Text 15"/>
+          <p:cNvSpPr/>
+          <p:nvPr/>
+        </p:nvSpPr>
+        <p:spPr>
+          <a:xfrm>
+            <a:off x="1600200" y="4023360"/>
+            <a:ext cx="2377440" cy="685800"/>
+          </a:xfrm>
+          <a:prstGeom prst="rect">
+            <a:avLst/>
+          </a:prstGeom>
+          <a:noFill/>
+          <a:ln/>
+        </p:spPr>
+        <p:txBody>
+          <a:bodyPr wrap="square" lIns="0" tIns="0" rIns="0" bIns="0" rtlCol="0" anchor="ctr"/>
+          <a:lstStyle/>
+          <a:p>
+            <a:pPr indent="0" marL="0">
               <a:lnSpc>
-                <a:spcPts val="2200"/>
+                <a:spcPts val="1600"/>
               </a:lnSpc>
-              <a:spcAft>
-                <a:spcPts val="1200"/>
-              </a:spcAft>
-              <a:buSzPct val="100000"/>
-              <a:buChar char="•"/>
-            </a:pPr>
-            <a:r>
-              <a:rPr lang="en-US" sz="1350" dirty="0">
-                <a:solidFill>
-                  <a:srgbClr val="1E293B"/>
-                </a:solidFill>
-                <a:latin typeface="Calibri" pitchFamily="34" charset="0"/>
-                <a:ea typeface="Calibri" pitchFamily="34" charset="-122"/>
-                <a:cs typeface="Calibri" pitchFamily="34" charset="-120"/>
-              </a:rPr>
-              <a:t>Broad sweeps  (vague, unscoped questions)</a:t>
-            </a:r>
-            <a:endParaRPr lang="en-US" sz="1350" dirty="0"/>
-          </a:p>
-          <a:p>
-            <a:pPr marL="342900" indent="-342900">
+              <a:buNone/>
+            </a:pPr>
+            <a:r>
+              <a:rPr lang="en-US" sz="1450" b="1" dirty="0">
+                <a:solidFill>
+                  <a:srgbClr val="0B2545"/>
+                </a:solidFill>
+                <a:latin typeface="Calibri" pitchFamily="34" charset="0"/>
+                <a:ea typeface="Calibri" pitchFamily="34" charset="-122"/>
+                <a:cs typeface="Calibri" pitchFamily="34" charset="-120"/>
+              </a:rPr>
+              <a:t>Cross-layer 413</a:t>
+            </a:r>
+            <a:endParaRPr lang="en-US" sz="1450" dirty="0"/>
+          </a:p>
+        </p:txBody>
+      </p:sp>
+      <p:sp>
+        <p:nvSpPr>
+          <p:cNvPr id="22" name="Text 16"/>
+          <p:cNvSpPr/>
+          <p:nvPr/>
+        </p:nvSpPr>
+        <p:spPr>
+          <a:xfrm>
+            <a:off x="758952" y="4773168"/>
+            <a:ext cx="3145536" cy="1005840"/>
+          </a:xfrm>
+          <a:prstGeom prst="rect">
+            <a:avLst/>
+          </a:prstGeom>
+          <a:noFill/>
+          <a:ln/>
+        </p:spPr>
+        <p:txBody>
+          <a:bodyPr wrap="square" lIns="0" tIns="0" rIns="0" bIns="0" rtlCol="0" anchor="ctr"/>
+          <a:lstStyle/>
+          <a:p>
+            <a:pPr indent="0" marL="0">
               <a:lnSpc>
-                <a:spcPts val="2200"/>
+                <a:spcPts val="1450"/>
               </a:lnSpc>
-              <a:spcAft>
-                <a:spcPts val="1200"/>
-              </a:spcAft>
-              <a:buSzPct val="100000"/>
-              <a:buChar char="•"/>
-            </a:pPr>
-            <a:r>
-              <a:rPr lang="en-US" sz="1350" dirty="0">
-                <a:solidFill>
-                  <a:srgbClr val="1E293B"/>
-                </a:solidFill>
-                <a:latin typeface="Calibri" pitchFamily="34" charset="0"/>
-                <a:ea typeface="Calibri" pitchFamily="34" charset="-122"/>
-                <a:cs typeface="Calibri" pitchFamily="34" charset="-120"/>
-              </a:rPr>
-              <a:t>Charts · forecasts · email · user location</a:t>
-            </a:r>
-            <a:endParaRPr lang="en-US" sz="1350" dirty="0"/>
-          </a:p>
-        </p:txBody>
-      </p:sp>
-      <p:sp>
-        <p:nvSpPr>
-          <p:cNvPr id="13" name="Text 9"/>
+              <a:buNone/>
+            </a:pPr>
+            <a:r>
+              <a:rPr lang="en-US" sz="1150" dirty="0">
+                <a:solidFill>
+                  <a:srgbClr val="5B6B7F"/>
+                </a:solidFill>
+                <a:latin typeface="Calibri" pitchFamily="34" charset="0"/>
+                <a:ea typeface="Calibri" pitchFamily="34" charset="-122"/>
+                <a:cs typeface="Calibri" pitchFamily="34" charset="-120"/>
+              </a:rPr>
+              <a:t>OOB agent submits national polygons as a spatial filter → 413. Fix: state-scope the prompt or pre-compute the attribute.</a:t>
+            </a:r>
+            <a:endParaRPr lang="en-US" sz="1150" dirty="0"/>
+          </a:p>
+        </p:txBody>
+      </p:sp>
+      <p:sp>
+        <p:nvSpPr>
+          <p:cNvPr id="23" name="Shape 17"/>
+          <p:cNvSpPr/>
+          <p:nvPr/>
+        </p:nvSpPr>
+        <p:spPr>
+          <a:xfrm>
+            <a:off x="4398264" y="3749040"/>
+            <a:ext cx="3657600" cy="2148840"/>
+          </a:xfrm>
+          <a:prstGeom prst="roundRect">
+            <a:avLst>
+              <a:gd name="adj" fmla="val 3404"/>
+            </a:avLst>
+          </a:prstGeom>
+          <a:solidFill>
+            <a:srgbClr val="F4F7FA"/>
+          </a:solidFill>
+          <a:ln/>
+          <a:effectLst>
+            <a:outerShdw sx="100000" sy="100000" kx="0" ky="0" algn="bl" rotWithShape="0" blurRad="88900" dist="38100" dir="5400000">
+              <a:srgbClr val="000000">
+                <a:alpha val="12000"/>
+              </a:srgbClr>
+            </a:outerShdw>
+          </a:effectLst>
+        </p:spPr>
+      </p:sp>
+      <p:sp>
+        <p:nvSpPr>
+          <p:cNvPr id="24" name="Shape 18"/>
+          <p:cNvSpPr/>
+          <p:nvPr/>
+        </p:nvSpPr>
+        <p:spPr>
+          <a:xfrm>
+            <a:off x="4654296" y="4005072"/>
+            <a:ext cx="713232" cy="713232"/>
+          </a:xfrm>
+          <a:prstGeom prst="ellipse">
+            <a:avLst/>
+          </a:prstGeom>
+          <a:solidFill>
+            <a:srgbClr val="E8A33D"/>
+          </a:solidFill>
+          <a:ln/>
+        </p:spPr>
+      </p:sp>
+      <p:pic>
+        <p:nvPicPr>
+          <p:cNvPr id="25" name="Image 4" descr="preencoded.png">    </p:cNvPr>
+          <p:cNvPicPr>
+            <a:picLocks noChangeAspect="1"/>
+          </p:cNvPicPr>
+          <p:nvPr/>
+        </p:nvPicPr>
+        <p:blipFill>
+          <a:blip r:embed="rId5"/>
+          <a:stretch>
+            <a:fillRect/>
+          </a:stretch>
+        </p:blipFill>
+        <p:spPr>
+          <a:xfrm>
+            <a:off x="4839736" y="4190512"/>
+            <a:ext cx="342351" cy="342351"/>
+          </a:xfrm>
+          <a:prstGeom prst="rect">
+            <a:avLst/>
+          </a:prstGeom>
+        </p:spPr>
+      </p:pic>
+      <p:sp>
+        <p:nvSpPr>
+          <p:cNvPr id="26" name="Text 19"/>
+          <p:cNvSpPr/>
+          <p:nvPr/>
+        </p:nvSpPr>
+        <p:spPr>
+          <a:xfrm>
+            <a:off x="5495544" y="4023360"/>
+            <a:ext cx="2377440" cy="685800"/>
+          </a:xfrm>
+          <a:prstGeom prst="rect">
+            <a:avLst/>
+          </a:prstGeom>
+          <a:noFill/>
+          <a:ln/>
+        </p:spPr>
+        <p:txBody>
+          <a:bodyPr wrap="square" lIns="0" tIns="0" rIns="0" bIns="0" rtlCol="0" anchor="ctr"/>
+          <a:lstStyle/>
+          <a:p>
+            <a:pPr indent="0" marL="0">
+              <a:lnSpc>
+                <a:spcPts val="1600"/>
+              </a:lnSpc>
+              <a:buNone/>
+            </a:pPr>
+            <a:r>
+              <a:rPr lang="en-US" sz="1450" b="1" dirty="0">
+                <a:solidFill>
+                  <a:srgbClr val="0B2545"/>
+                </a:solidFill>
+                <a:latin typeface="Calibri" pitchFamily="34" charset="0"/>
+                <a:ea typeface="Calibri" pitchFamily="34" charset="-122"/>
+                <a:cs typeface="Calibri" pitchFamily="34" charset="-120"/>
+              </a:rPr>
+              <a:t>Schema introspection lies</a:t>
+            </a:r>
+            <a:endParaRPr lang="en-US" sz="1450" dirty="0"/>
+          </a:p>
+        </p:txBody>
+      </p:sp>
+      <p:sp>
+        <p:nvSpPr>
+          <p:cNvPr id="27" name="Text 20"/>
+          <p:cNvSpPr/>
+          <p:nvPr/>
+        </p:nvSpPr>
+        <p:spPr>
+          <a:xfrm>
+            <a:off x="4654296" y="4773168"/>
+            <a:ext cx="3145536" cy="1005840"/>
+          </a:xfrm>
+          <a:prstGeom prst="rect">
+            <a:avLst/>
+          </a:prstGeom>
+          <a:noFill/>
+          <a:ln/>
+        </p:spPr>
+        <p:txBody>
+          <a:bodyPr wrap="square" lIns="0" tIns="0" rIns="0" bIns="0" rtlCol="0" anchor="ctr"/>
+          <a:lstStyle/>
+          <a:p>
+            <a:pPr indent="0" marL="0">
+              <a:lnSpc>
+                <a:spcPts val="1450"/>
+              </a:lnSpc>
+              <a:buNone/>
+            </a:pPr>
+            <a:r>
+              <a:rPr lang="en-US" sz="1150" dirty="0">
+                <a:solidFill>
+                  <a:srgbClr val="5B6B7F"/>
+                </a:solidFill>
+                <a:latin typeface="Calibri" pitchFamily="34" charset="0"/>
+                <a:ea typeface="Calibri" pitchFamily="34" charset="-122"/>
+                <a:cs typeface="Calibri" pitchFamily="34" charset="-120"/>
+              </a:rPr>
+              <a:t>"List fields" returned two contradictory lists in one turn. Verify schema via AGO Data → Fields — never the assistant.</a:t>
+            </a:r>
+            <a:endParaRPr lang="en-US" sz="1150" dirty="0"/>
+          </a:p>
+        </p:txBody>
+      </p:sp>
+      <p:sp>
+        <p:nvSpPr>
+          <p:cNvPr id="28" name="Shape 21"/>
+          <p:cNvSpPr/>
+          <p:nvPr/>
+        </p:nvSpPr>
+        <p:spPr>
+          <a:xfrm>
+            <a:off x="8293608" y="3749040"/>
+            <a:ext cx="3657600" cy="2148840"/>
+          </a:xfrm>
+          <a:prstGeom prst="roundRect">
+            <a:avLst>
+              <a:gd name="adj" fmla="val 3404"/>
+            </a:avLst>
+          </a:prstGeom>
+          <a:solidFill>
+            <a:srgbClr val="F4F7FA"/>
+          </a:solidFill>
+          <a:ln/>
+          <a:effectLst>
+            <a:outerShdw sx="100000" sy="100000" kx="0" ky="0" algn="bl" rotWithShape="0" blurRad="88900" dist="38100" dir="5400000">
+              <a:srgbClr val="000000">
+                <a:alpha val="12000"/>
+              </a:srgbClr>
+            </a:outerShdw>
+          </a:effectLst>
+        </p:spPr>
+      </p:sp>
+      <p:sp>
+        <p:nvSpPr>
+          <p:cNvPr id="29" name="Shape 22"/>
+          <p:cNvSpPr/>
+          <p:nvPr/>
+        </p:nvSpPr>
+        <p:spPr>
+          <a:xfrm>
+            <a:off x="8549640" y="4005072"/>
+            <a:ext cx="713232" cy="713232"/>
+          </a:xfrm>
+          <a:prstGeom prst="ellipse">
+            <a:avLst/>
+          </a:prstGeom>
+          <a:solidFill>
+            <a:srgbClr val="E8A33D"/>
+          </a:solidFill>
+          <a:ln/>
+        </p:spPr>
+      </p:sp>
+      <p:pic>
+        <p:nvPicPr>
+          <p:cNvPr id="30" name="Image 5" descr="preencoded.png">    </p:cNvPr>
+          <p:cNvPicPr>
+            <a:picLocks noChangeAspect="1"/>
+          </p:cNvPicPr>
+          <p:nvPr/>
+        </p:nvPicPr>
+        <p:blipFill>
+          <a:blip r:embed="rId6"/>
+          <a:stretch>
+            <a:fillRect/>
+          </a:stretch>
+        </p:blipFill>
+        <p:spPr>
+          <a:xfrm>
+            <a:off x="8735080" y="4190512"/>
+            <a:ext cx="342351" cy="342351"/>
+          </a:xfrm>
+          <a:prstGeom prst="rect">
+            <a:avLst/>
+          </a:prstGeom>
+        </p:spPr>
+      </p:pic>
+      <p:sp>
+        <p:nvSpPr>
+          <p:cNvPr id="31" name="Text 23"/>
+          <p:cNvSpPr/>
+          <p:nvPr/>
+        </p:nvSpPr>
+        <p:spPr>
+          <a:xfrm>
+            <a:off x="9390888" y="4023360"/>
+            <a:ext cx="2377440" cy="685800"/>
+          </a:xfrm>
+          <a:prstGeom prst="rect">
+            <a:avLst/>
+          </a:prstGeom>
+          <a:noFill/>
+          <a:ln/>
+        </p:spPr>
+        <p:txBody>
+          <a:bodyPr wrap="square" lIns="0" tIns="0" rIns="0" bIns="0" rtlCol="0" anchor="ctr"/>
+          <a:lstStyle/>
+          <a:p>
+            <a:pPr indent="0" marL="0">
+              <a:lnSpc>
+                <a:spcPts val="1600"/>
+              </a:lnSpc>
+              <a:buNone/>
+            </a:pPr>
+            <a:r>
+              <a:rPr lang="en-US" sz="1450" b="1" dirty="0">
+                <a:solidFill>
+                  <a:srgbClr val="0B2545"/>
+                </a:solidFill>
+                <a:latin typeface="Calibri" pitchFamily="34" charset="0"/>
+                <a:ea typeface="Calibri" pitchFamily="34" charset="-122"/>
+                <a:cs typeface="Calibri" pitchFamily="34" charset="-120"/>
+              </a:rPr>
+              <a:t>Verify, don't infer</a:t>
+            </a:r>
+            <a:endParaRPr lang="en-US" sz="1450" dirty="0"/>
+          </a:p>
+        </p:txBody>
+      </p:sp>
+      <p:sp>
+        <p:nvSpPr>
+          <p:cNvPr id="32" name="Text 24"/>
+          <p:cNvSpPr/>
+          <p:nvPr/>
+        </p:nvSpPr>
+        <p:spPr>
+          <a:xfrm>
+            <a:off x="8549640" y="4773168"/>
+            <a:ext cx="3145536" cy="1005840"/>
+          </a:xfrm>
+          <a:prstGeom prst="rect">
+            <a:avLst/>
+          </a:prstGeom>
+          <a:noFill/>
+          <a:ln/>
+        </p:spPr>
+        <p:txBody>
+          <a:bodyPr wrap="square" lIns="0" tIns="0" rIns="0" bIns="0" rtlCol="0" anchor="ctr"/>
+          <a:lstStyle/>
+          <a:p>
+            <a:pPr indent="0" marL="0">
+              <a:lnSpc>
+                <a:spcPts val="1450"/>
+              </a:lnSpc>
+              <a:buNone/>
+            </a:pPr>
+            <a:r>
+              <a:rPr lang="en-US" sz="1150" dirty="0">
+                <a:solidFill>
+                  <a:srgbClr val="5B6B7F"/>
+                </a:solidFill>
+                <a:latin typeface="Calibri" pitchFamily="34" charset="0"/>
+                <a:ea typeface="Calibri" pitchFamily="34" charset="-122"/>
+                <a:cs typeface="Calibri" pitchFamily="34" charset="-120"/>
+              </a:rPr>
+              <a:t>Filenames in dist/ aren't docs. We mounted a non-existent agent on a guess. Confirm against developers.arcgis.com.</a:t>
+            </a:r>
+            <a:endParaRPr lang="en-US" sz="1150" dirty="0"/>
+          </a:p>
+        </p:txBody>
+      </p:sp>
+      <p:sp>
+        <p:nvSpPr>
+          <p:cNvPr id="33" name="Text 25"/>
           <p:cNvSpPr/>
           <p:nvPr/>
         </p:nvSpPr>
@@ -3916,7 +4181,7 @@
       </p:sp>
       <p:sp>
         <p:nvSpPr>
-          <p:cNvPr id="14" name="Text 10"/>
+          <p:cNvPr id="34" name="Text 26"/>
           <p:cNvSpPr/>
           <p:nvPr/>
         </p:nvSpPr>
@@ -4010,7 +4275,7 @@
               <a:buNone/>
             </a:pPr>
             <a:r>
-              <a:rPr lang="en-US" sz="3000" b="1" dirty="0">
+              <a:rPr lang="en-US" sz="2800" b="1" dirty="0">
                 <a:solidFill>
                   <a:srgbClr val="0B2545"/>
                 </a:solidFill>
@@ -4018,69 +4283,30 @@
                 <a:ea typeface="Bookman Old Style" pitchFamily="34" charset="-122"/>
                 <a:cs typeface="Bookman Old Style" pitchFamily="34" charset="-120"/>
               </a:rPr>
-              <a:t>The demo run sheet — prompt shapes that work</a:t>
-            </a:r>
-            <a:endParaRPr lang="en-US" sz="3000" dirty="0"/>
-          </a:p>
-        </p:txBody>
-      </p:sp>
-      <p:sp>
-        <p:nvSpPr>
-          <p:cNvPr id="3" name="Text 1"/>
-          <p:cNvSpPr/>
-          <p:nvPr/>
-        </p:nvSpPr>
-        <p:spPr>
-          <a:xfrm>
-            <a:off x="502920" y="1078992"/>
-            <a:ext cx="10972800" cy="457200"/>
-          </a:xfrm>
-          <a:prstGeom prst="rect">
-            <a:avLst/>
-          </a:prstGeom>
-          <a:noFill/>
-          <a:ln/>
-        </p:spPr>
-        <p:txBody>
-          <a:bodyPr wrap="square" lIns="0" tIns="0" rIns="0" bIns="0" rtlCol="0" anchor="ctr"/>
-          <a:lstStyle/>
-          <a:p>
-            <a:pPr indent="0" marL="0">
-              <a:buNone/>
-            </a:pPr>
-            <a:r>
-              <a:rPr lang="en-US" sz="1400" dirty="0">
-                <a:solidFill>
-                  <a:srgbClr val="5B6B7F"/>
-                </a:solidFill>
-                <a:latin typeface="Calibri" pitchFamily="34" charset="0"/>
-                <a:ea typeface="Calibri" pitchFamily="34" charset="-122"/>
-                <a:cs typeface="Calibri" pitchFamily="34" charset="-120"/>
-              </a:rPr>
-              <a:t>Fill these with prompts you've verified against your data. Build from simple to the strongest hook.</a:t>
-            </a:r>
-            <a:endParaRPr lang="en-US" sz="1400" dirty="0"/>
-          </a:p>
-        </p:txBody>
-      </p:sp>
-      <p:sp>
-        <p:nvSpPr>
-          <p:cNvPr id="4" name="Shape 2"/>
-          <p:cNvSpPr/>
-          <p:nvPr/>
-        </p:nvSpPr>
-        <p:spPr>
-          <a:xfrm>
-            <a:off x="502920" y="1783080"/>
-            <a:ext cx="11201400" cy="932688"/>
+              <a:t>Prompt engineering: what the OOB agent can do</a:t>
+            </a:r>
+            <a:endParaRPr lang="en-US" sz="2800" dirty="0"/>
+          </a:p>
+        </p:txBody>
+      </p:sp>
+      <p:sp>
+        <p:nvSpPr>
+          <p:cNvPr id="3" name="Shape 1"/>
+          <p:cNvSpPr/>
+          <p:nvPr/>
+        </p:nvSpPr>
+        <p:spPr>
+          <a:xfrm>
+            <a:off x="502920" y="1371600"/>
+            <a:ext cx="5486400" cy="4572000"/>
           </a:xfrm>
           <a:prstGeom prst="roundRect">
             <a:avLst>
-              <a:gd name="adj" fmla="val 7843"/>
+              <a:gd name="adj" fmla="val 2000"/>
             </a:avLst>
           </a:prstGeom>
           <a:solidFill>
-            <a:srgbClr val="F4F7FA"/>
+            <a:srgbClr val="EAF4EF"/>
           </a:solidFill>
           <a:ln/>
           <a:effectLst>
@@ -4094,58 +4320,82 @@
       </p:sp>
       <p:sp>
         <p:nvSpPr>
-          <p:cNvPr id="5" name="Shape 3"/>
-          <p:cNvSpPr/>
-          <p:nvPr/>
-        </p:nvSpPr>
-        <p:spPr>
-          <a:xfrm>
-            <a:off x="731520" y="1984248"/>
-            <a:ext cx="566928" cy="566928"/>
+          <p:cNvPr id="4" name="Shape 2"/>
+          <p:cNvSpPr/>
+          <p:nvPr/>
+        </p:nvSpPr>
+        <p:spPr>
+          <a:xfrm>
+            <a:off x="822960" y="1645920"/>
+            <a:ext cx="731520" cy="731520"/>
           </a:xfrm>
           <a:prstGeom prst="ellipse">
             <a:avLst/>
           </a:prstGeom>
           <a:solidFill>
-            <a:srgbClr val="1C7293"/>
+            <a:srgbClr val="2A9D6F"/>
           </a:solidFill>
           <a:ln/>
         </p:spPr>
       </p:sp>
-      <p:sp>
-        <p:nvSpPr>
-          <p:cNvPr id="6" name="Text 4"/>
-          <p:cNvSpPr/>
-          <p:nvPr/>
-        </p:nvSpPr>
-        <p:spPr>
-          <a:xfrm>
-            <a:off x="731520" y="1984248"/>
-            <a:ext cx="566928" cy="566928"/>
-          </a:xfrm>
-          <a:prstGeom prst="rect">
-            <a:avLst/>
-          </a:prstGeom>
-          <a:noFill/>
-          <a:ln/>
-        </p:spPr>
-        <p:txBody>
-          <a:bodyPr wrap="square" lIns="0" tIns="0" rIns="0" bIns="0" rtlCol="0" anchor="ctr"/>
-          <a:lstStyle/>
-          <a:p>
-            <a:pPr algn="ctr" indent="0" marL="0">
+      <p:pic>
+        <p:nvPicPr>
+          <p:cNvPr id="5" name="Image 0" descr="preencoded.png">    </p:cNvPr>
+          <p:cNvPicPr>
+            <a:picLocks noChangeAspect="1"/>
+          </p:cNvPicPr>
+          <p:nvPr/>
+        </p:nvPicPr>
+        <p:blipFill>
+          <a:blip r:embed="rId1"/>
+          <a:stretch>
+            <a:fillRect/>
+          </a:stretch>
+        </p:blipFill>
+        <p:spPr>
+          <a:xfrm>
+            <a:off x="1013155" y="1836115"/>
+            <a:ext cx="351130" cy="351130"/>
+          </a:xfrm>
+          <a:prstGeom prst="rect">
+            <a:avLst/>
+          </a:prstGeom>
+        </p:spPr>
+      </p:pic>
+      <p:sp>
+        <p:nvSpPr>
+          <p:cNvPr id="6" name="Text 3"/>
+          <p:cNvSpPr/>
+          <p:nvPr/>
+        </p:nvSpPr>
+        <p:spPr>
+          <a:xfrm>
+            <a:off x="1691640" y="1645920"/>
+            <a:ext cx="4114800" cy="731520"/>
+          </a:xfrm>
+          <a:prstGeom prst="rect">
+            <a:avLst/>
+          </a:prstGeom>
+          <a:noFill/>
+          <a:ln/>
+        </p:spPr>
+        <p:txBody>
+          <a:bodyPr wrap="square" lIns="0" tIns="0" rIns="0" bIns="0" rtlCol="0" anchor="ctr"/>
+          <a:lstStyle/>
+          <a:p>
+            <a:pPr indent="0" marL="0">
               <a:buNone/>
             </a:pPr>
             <a:r>
               <a:rPr lang="en-US" sz="1800" b="1" dirty="0">
                 <a:solidFill>
-                  <a:srgbClr val="FFFFFF"/>
-                </a:solidFill>
-                <a:latin typeface="Calibri" pitchFamily="34" charset="0"/>
-                <a:ea typeface="Calibri" pitchFamily="34" charset="-122"/>
-                <a:cs typeface="Calibri" pitchFamily="34" charset="-120"/>
-              </a:rPr>
-              <a:t>1</a:t>
+                  <a:srgbClr val="2A9D6F"/>
+                </a:solidFill>
+                <a:latin typeface="Calibri" pitchFamily="34" charset="0"/>
+                <a:ea typeface="Calibri" pitchFamily="34" charset="-122"/>
+                <a:cs typeface="Calibri" pitchFamily="34" charset="-120"/>
+              </a:rPr>
+              <a:t>Reliable — demo these</a:t>
             </a:r>
             <a:endParaRPr lang="en-US" sz="1800" dirty="0"/>
           </a:p>
@@ -4153,100 +4403,164 @@
       </p:sp>
       <p:sp>
         <p:nvSpPr>
-          <p:cNvPr id="7" name="Text 5"/>
-          <p:cNvSpPr/>
-          <p:nvPr/>
-        </p:nvSpPr>
-        <p:spPr>
-          <a:xfrm>
-            <a:off x="1508760" y="1892808"/>
-            <a:ext cx="10058400" cy="438912"/>
-          </a:xfrm>
-          <a:prstGeom prst="rect">
-            <a:avLst/>
-          </a:prstGeom>
-          <a:noFill/>
-          <a:ln/>
-        </p:spPr>
-        <p:txBody>
-          <a:bodyPr wrap="square" lIns="0" tIns="0" rIns="0" bIns="0" rtlCol="0" anchor="ctr"/>
-          <a:lstStyle/>
-          <a:p>
-            <a:pPr indent="0" marL="0">
-              <a:buNone/>
-            </a:pPr>
-            <a:r>
-              <a:rPr lang="en-US" sz="1550" b="1" dirty="0">
-                <a:solidFill>
-                  <a:srgbClr val="0B2545"/>
-                </a:solidFill>
-                <a:latin typeface="Calibri" pitchFamily="34" charset="0"/>
-                <a:ea typeface="Calibri" pitchFamily="34" charset="-122"/>
-                <a:cs typeface="Calibri" pitchFamily="34" charset="-120"/>
-              </a:rPr>
-              <a:t>"Show me the &lt;high-priority&gt; &lt;records&gt;."</a:t>
-            </a:r>
-            <a:endParaRPr lang="en-US" sz="1550" dirty="0"/>
-          </a:p>
-        </p:txBody>
-      </p:sp>
-      <p:sp>
-        <p:nvSpPr>
-          <p:cNvPr id="8" name="Text 6"/>
-          <p:cNvSpPr/>
-          <p:nvPr/>
-        </p:nvSpPr>
-        <p:spPr>
-          <a:xfrm>
-            <a:off x="1508760" y="2286000"/>
-            <a:ext cx="10058400" cy="384048"/>
-          </a:xfrm>
-          <a:prstGeom prst="rect">
-            <a:avLst/>
-          </a:prstGeom>
-          <a:noFill/>
-          <a:ln/>
-        </p:spPr>
-        <p:txBody>
-          <a:bodyPr wrap="square" lIns="0" tIns="0" rIns="0" bIns="0" rtlCol="0" anchor="ctr"/>
-          <a:lstStyle/>
-          <a:p>
-            <a:pPr indent="0" marL="0">
-              <a:buNone/>
-            </a:pPr>
-            <a:r>
-              <a:rPr lang="en-US" sz="1250" dirty="0">
-                <a:solidFill>
-                  <a:srgbClr val="5B6B7F"/>
-                </a:solidFill>
-                <a:latin typeface="Calibri" pitchFamily="34" charset="0"/>
-                <a:ea typeface="Calibri" pitchFamily="34" charset="-122"/>
-                <a:cs typeface="Calibri" pitchFamily="34" charset="-120"/>
-              </a:rPr>
-              <a:t>Opener — single-attribute filter. Verify the count is stable.</a:t>
-            </a:r>
-            <a:endParaRPr lang="en-US" sz="1250" dirty="0"/>
-          </a:p>
-        </p:txBody>
-      </p:sp>
-      <p:sp>
-        <p:nvSpPr>
-          <p:cNvPr id="9" name="Shape 7"/>
-          <p:cNvSpPr/>
-          <p:nvPr/>
-        </p:nvSpPr>
-        <p:spPr>
-          <a:xfrm>
-            <a:off x="502920" y="2862072"/>
-            <a:ext cx="11201400" cy="932688"/>
+          <p:cNvPr id="7" name="Text 4"/>
+          <p:cNvSpPr/>
+          <p:nvPr/>
+        </p:nvSpPr>
+        <p:spPr>
+          <a:xfrm>
+            <a:off x="868680" y="2651760"/>
+            <a:ext cx="4937760" cy="3108960"/>
+          </a:xfrm>
+          <a:prstGeom prst="rect">
+            <a:avLst/>
+          </a:prstGeom>
+          <a:noFill/>
+          <a:ln/>
+        </p:spPr>
+        <p:txBody>
+          <a:bodyPr wrap="square" lIns="0" tIns="0" rIns="0" bIns="0" rtlCol="0" anchor="ctr"/>
+          <a:lstStyle/>
+          <a:p>
+            <a:pPr marL="342900" indent="-342900">
+              <a:lnSpc>
+                <a:spcPts val="2200"/>
+              </a:lnSpc>
+              <a:spcAft>
+                <a:spcPts val="1200"/>
+              </a:spcAft>
+              <a:buSzPct val="100000"/>
+              <a:buChar char="•"/>
+            </a:pPr>
+            <a:r>
+              <a:rPr lang="en-US" sz="1350" dirty="0">
+                <a:solidFill>
+                  <a:srgbClr val="1E293B"/>
+                </a:solidFill>
+                <a:latin typeface="Calibri" pitchFamily="34" charset="0"/>
+                <a:ea typeface="Calibri" pitchFamily="34" charset="-122"/>
+                <a:cs typeface="Calibri" pitchFamily="34" charset="-120"/>
+              </a:rPr>
+              <a:t>Attribute filters  ("show the high-priority records")</a:t>
+            </a:r>
+            <a:endParaRPr lang="en-US" sz="1350" dirty="0"/>
+          </a:p>
+          <a:p>
+            <a:pPr marL="342900" indent="-342900">
+              <a:lnSpc>
+                <a:spcPts val="2200"/>
+              </a:lnSpc>
+              <a:spcAft>
+                <a:spcPts val="1200"/>
+              </a:spcAft>
+              <a:buSzPct val="100000"/>
+              <a:buChar char="•"/>
+            </a:pPr>
+            <a:r>
+              <a:rPr lang="en-US" sz="1350" dirty="0">
+                <a:solidFill>
+                  <a:srgbClr val="1E293B"/>
+                </a:solidFill>
+                <a:latin typeface="Calibri" pitchFamily="34" charset="0"/>
+                <a:ea typeface="Calibri" pitchFamily="34" charset="-122"/>
+                <a:cs typeface="Calibri" pitchFamily="34" charset="-120"/>
+              </a:rPr>
+              <a:t>Single-group stats  ("average metric for a group")</a:t>
+            </a:r>
+            <a:endParaRPr lang="en-US" sz="1350" dirty="0"/>
+          </a:p>
+          <a:p>
+            <a:pPr marL="342900" indent="-342900">
+              <a:lnSpc>
+                <a:spcPts val="2200"/>
+              </a:lnSpc>
+              <a:spcAft>
+                <a:spcPts val="1200"/>
+              </a:spcAft>
+              <a:buSzPct val="100000"/>
+              <a:buChar char="•"/>
+            </a:pPr>
+            <a:r>
+              <a:rPr lang="en-US" sz="1350" dirty="0">
+                <a:solidFill>
+                  <a:srgbClr val="1E293B"/>
+                </a:solidFill>
+                <a:latin typeface="Calibri" pitchFamily="34" charset="0"/>
+                <a:ea typeface="Calibri" pitchFamily="34" charset="-122"/>
+                <a:cs typeface="Calibri" pitchFamily="34" charset="-120"/>
+              </a:rPr>
+              <a:t>Multi-attribute combos  (filter on two fields)</a:t>
+            </a:r>
+            <a:endParaRPr lang="en-US" sz="1350" dirty="0"/>
+          </a:p>
+          <a:p>
+            <a:pPr marL="342900" indent="-342900">
+              <a:lnSpc>
+                <a:spcPts val="2200"/>
+              </a:lnSpc>
+              <a:spcAft>
+                <a:spcPts val="1200"/>
+              </a:spcAft>
+              <a:buSzPct val="100000"/>
+              <a:buChar char="•"/>
+            </a:pPr>
+            <a:r>
+              <a:rPr lang="en-US" sz="1350" dirty="0">
+                <a:solidFill>
+                  <a:srgbClr val="1E293B"/>
+                </a:solidFill>
+                <a:latin typeface="Calibri" pitchFamily="34" charset="0"/>
+                <a:ea typeface="Calibri" pitchFamily="34" charset="-122"/>
+                <a:cs typeface="Calibri" pitchFamily="34" charset="-120"/>
+              </a:rPr>
+              <a:t>State / region-scoped cross-layer intersects</a:t>
+            </a:r>
+            <a:endParaRPr lang="en-US" sz="1350" dirty="0"/>
+          </a:p>
+          <a:p>
+            <a:pPr marL="342900" indent="-342900">
+              <a:lnSpc>
+                <a:spcPts val="2200"/>
+              </a:lnSpc>
+              <a:spcAft>
+                <a:spcPts val="1200"/>
+              </a:spcAft>
+              <a:buSzPct val="100000"/>
+              <a:buChar char="•"/>
+            </a:pPr>
+            <a:r>
+              <a:rPr lang="en-US" sz="1350" dirty="0">
+                <a:solidFill>
+                  <a:srgbClr val="1E293B"/>
+                </a:solidFill>
+                <a:latin typeface="Calibri" pitchFamily="34" charset="0"/>
+                <a:ea typeface="Calibri" pitchFamily="34" charset="-122"/>
+                <a:cs typeface="Calibri" pitchFamily="34" charset="-120"/>
+              </a:rPr>
+              <a:t>Pointed, single-subject questions</a:t>
+            </a:r>
+            <a:endParaRPr lang="en-US" sz="1350" dirty="0"/>
+          </a:p>
+        </p:txBody>
+      </p:sp>
+      <p:sp>
+        <p:nvSpPr>
+          <p:cNvPr id="8" name="Shape 5"/>
+          <p:cNvSpPr/>
+          <p:nvPr/>
+        </p:nvSpPr>
+        <p:spPr>
+          <a:xfrm>
+            <a:off x="6217920" y="1371600"/>
+            <a:ext cx="5486400" cy="4572000"/>
           </a:xfrm>
           <a:prstGeom prst="roundRect">
             <a:avLst>
-              <a:gd name="adj" fmla="val 7843"/>
+              <a:gd name="adj" fmla="val 2000"/>
             </a:avLst>
           </a:prstGeom>
           <a:solidFill>
-            <a:srgbClr val="F4F7FA"/>
+            <a:srgbClr val="FBEDEC"/>
           </a:solidFill>
           <a:ln/>
           <a:effectLst>
@@ -4260,58 +4574,82 @@
       </p:sp>
       <p:sp>
         <p:nvSpPr>
-          <p:cNvPr id="10" name="Shape 8"/>
-          <p:cNvSpPr/>
-          <p:nvPr/>
-        </p:nvSpPr>
-        <p:spPr>
-          <a:xfrm>
-            <a:off x="731520" y="3063240"/>
-            <a:ext cx="566928" cy="566928"/>
+          <p:cNvPr id="9" name="Shape 6"/>
+          <p:cNvSpPr/>
+          <p:nvPr/>
+        </p:nvSpPr>
+        <p:spPr>
+          <a:xfrm>
+            <a:off x="6537960" y="1645920"/>
+            <a:ext cx="731520" cy="731520"/>
           </a:xfrm>
           <a:prstGeom prst="ellipse">
             <a:avLst/>
           </a:prstGeom>
           <a:solidFill>
-            <a:srgbClr val="1C7293"/>
+            <a:srgbClr val="C24A45"/>
           </a:solidFill>
           <a:ln/>
         </p:spPr>
       </p:sp>
-      <p:sp>
-        <p:nvSpPr>
-          <p:cNvPr id="11" name="Text 9"/>
-          <p:cNvSpPr/>
-          <p:nvPr/>
-        </p:nvSpPr>
-        <p:spPr>
-          <a:xfrm>
-            <a:off x="731520" y="3063240"/>
-            <a:ext cx="566928" cy="566928"/>
-          </a:xfrm>
-          <a:prstGeom prst="rect">
-            <a:avLst/>
-          </a:prstGeom>
-          <a:noFill/>
-          <a:ln/>
-        </p:spPr>
-        <p:txBody>
-          <a:bodyPr wrap="square" lIns="0" tIns="0" rIns="0" bIns="0" rtlCol="0" anchor="ctr"/>
-          <a:lstStyle/>
-          <a:p>
-            <a:pPr algn="ctr" indent="0" marL="0">
+      <p:pic>
+        <p:nvPicPr>
+          <p:cNvPr id="10" name="Image 1" descr="preencoded.png">    </p:cNvPr>
+          <p:cNvPicPr>
+            <a:picLocks noChangeAspect="1"/>
+          </p:cNvPicPr>
+          <p:nvPr/>
+        </p:nvPicPr>
+        <p:blipFill>
+          <a:blip r:embed="rId2"/>
+          <a:stretch>
+            <a:fillRect/>
+          </a:stretch>
+        </p:blipFill>
+        <p:spPr>
+          <a:xfrm>
+            <a:off x="6728155" y="1836115"/>
+            <a:ext cx="351130" cy="351130"/>
+          </a:xfrm>
+          <a:prstGeom prst="rect">
+            <a:avLst/>
+          </a:prstGeom>
+        </p:spPr>
+      </p:pic>
+      <p:sp>
+        <p:nvSpPr>
+          <p:cNvPr id="11" name="Text 7"/>
+          <p:cNvSpPr/>
+          <p:nvPr/>
+        </p:nvSpPr>
+        <p:spPr>
+          <a:xfrm>
+            <a:off x="7406640" y="1645920"/>
+            <a:ext cx="4114800" cy="731520"/>
+          </a:xfrm>
+          <a:prstGeom prst="rect">
+            <a:avLst/>
+          </a:prstGeom>
+          <a:noFill/>
+          <a:ln/>
+        </p:spPr>
+        <p:txBody>
+          <a:bodyPr wrap="square" lIns="0" tIns="0" rIns="0" bIns="0" rtlCol="0" anchor="ctr"/>
+          <a:lstStyle/>
+          <a:p>
+            <a:pPr indent="0" marL="0">
               <a:buNone/>
             </a:pPr>
             <a:r>
               <a:rPr lang="en-US" sz="1800" b="1" dirty="0">
                 <a:solidFill>
-                  <a:srgbClr val="FFFFFF"/>
-                </a:solidFill>
-                <a:latin typeface="Calibri" pitchFamily="34" charset="0"/>
-                <a:ea typeface="Calibri" pitchFamily="34" charset="-122"/>
-                <a:cs typeface="Calibri" pitchFamily="34" charset="-120"/>
-              </a:rPr>
-              <a:t>2</a:t>
+                  <a:srgbClr val="C24A45"/>
+                </a:solidFill>
+                <a:latin typeface="Calibri" pitchFamily="34" charset="0"/>
+                <a:ea typeface="Calibri" pitchFamily="34" charset="-122"/>
+                <a:cs typeface="Calibri" pitchFamily="34" charset="-120"/>
+              </a:rPr>
+              <a:t>Fails / degrades — keep out</a:t>
             </a:r>
             <a:endParaRPr lang="en-US" sz="1800" dirty="0"/>
           </a:p>
@@ -4319,417 +4657,149 @@
       </p:sp>
       <p:sp>
         <p:nvSpPr>
-          <p:cNvPr id="12" name="Text 10"/>
-          <p:cNvSpPr/>
-          <p:nvPr/>
-        </p:nvSpPr>
-        <p:spPr>
-          <a:xfrm>
-            <a:off x="1508760" y="2971800"/>
-            <a:ext cx="10058400" cy="438912"/>
-          </a:xfrm>
-          <a:prstGeom prst="rect">
-            <a:avLst/>
-          </a:prstGeom>
-          <a:noFill/>
-          <a:ln/>
-        </p:spPr>
-        <p:txBody>
-          <a:bodyPr wrap="square" lIns="0" tIns="0" rIns="0" bIns="0" rtlCol="0" anchor="ctr"/>
-          <a:lstStyle/>
-          <a:p>
-            <a:pPr indent="0" marL="0">
-              <a:buNone/>
-            </a:pPr>
-            <a:r>
-              <a:rPr lang="en-US" sz="1550" b="1" dirty="0">
-                <a:solidFill>
-                  <a:srgbClr val="0B2545"/>
-                </a:solidFill>
-                <a:latin typeface="Calibri" pitchFamily="34" charset="0"/>
-                <a:ea typeface="Calibri" pitchFamily="34" charset="-122"/>
-                <a:cs typeface="Calibri" pitchFamily="34" charset="-120"/>
-              </a:rPr>
-              <a:t>"Average &lt;metric&gt; for &lt;one category&gt;?"</a:t>
-            </a:r>
-            <a:endParaRPr lang="en-US" sz="1550" dirty="0"/>
-          </a:p>
-        </p:txBody>
-      </p:sp>
-      <p:sp>
-        <p:nvSpPr>
-          <p:cNvPr id="13" name="Text 11"/>
-          <p:cNvSpPr/>
-          <p:nvPr/>
-        </p:nvSpPr>
-        <p:spPr>
-          <a:xfrm>
-            <a:off x="1508760" y="3364992"/>
-            <a:ext cx="10058400" cy="384048"/>
-          </a:xfrm>
-          <a:prstGeom prst="rect">
-            <a:avLst/>
-          </a:prstGeom>
-          <a:noFill/>
-          <a:ln/>
-        </p:spPr>
-        <p:txBody>
-          <a:bodyPr wrap="square" lIns="0" tIns="0" rIns="0" bIns="0" rtlCol="0" anchor="ctr"/>
-          <a:lstStyle/>
-          <a:p>
-            <a:pPr indent="0" marL="0">
-              <a:buNone/>
-            </a:pPr>
-            <a:r>
-              <a:rPr lang="en-US" sz="1250" dirty="0">
-                <a:solidFill>
-                  <a:srgbClr val="5B6B7F"/>
-                </a:solidFill>
-                <a:latin typeface="Calibri" pitchFamily="34" charset="0"/>
-                <a:ea typeface="Calibri" pitchFamily="34" charset="-122"/>
-                <a:cs typeface="Calibri" pitchFamily="34" charset="-120"/>
-              </a:rPr>
-              <a:t>Single-group stat. (Don't ask it to COMPARE two categories live.)</a:t>
-            </a:r>
-            <a:endParaRPr lang="en-US" sz="1250" dirty="0"/>
-          </a:p>
-        </p:txBody>
-      </p:sp>
-      <p:sp>
-        <p:nvSpPr>
-          <p:cNvPr id="14" name="Shape 12"/>
-          <p:cNvSpPr/>
-          <p:nvPr/>
-        </p:nvSpPr>
-        <p:spPr>
-          <a:xfrm>
-            <a:off x="502920" y="3941064"/>
-            <a:ext cx="11201400" cy="932688"/>
-          </a:xfrm>
-          <a:prstGeom prst="roundRect">
-            <a:avLst>
-              <a:gd name="adj" fmla="val 7843"/>
-            </a:avLst>
-          </a:prstGeom>
-          <a:solidFill>
-            <a:srgbClr val="F4F7FA"/>
-          </a:solidFill>
-          <a:ln/>
-          <a:effectLst>
-            <a:outerShdw sx="100000" sy="100000" kx="0" ky="0" algn="bl" rotWithShape="0" blurRad="88900" dist="38100" dir="5400000">
-              <a:srgbClr val="000000">
-                <a:alpha val="12000"/>
-              </a:srgbClr>
-            </a:outerShdw>
-          </a:effectLst>
-        </p:spPr>
-      </p:sp>
-      <p:sp>
-        <p:nvSpPr>
-          <p:cNvPr id="15" name="Shape 13"/>
-          <p:cNvSpPr/>
-          <p:nvPr/>
-        </p:nvSpPr>
-        <p:spPr>
-          <a:xfrm>
-            <a:off x="731520" y="4142232"/>
-            <a:ext cx="566928" cy="566928"/>
-          </a:xfrm>
-          <a:prstGeom prst="ellipse">
-            <a:avLst/>
-          </a:prstGeom>
-          <a:solidFill>
-            <a:srgbClr val="E8A33D"/>
-          </a:solidFill>
-          <a:ln/>
-        </p:spPr>
-      </p:sp>
-      <p:sp>
-        <p:nvSpPr>
-          <p:cNvPr id="16" name="Text 14"/>
-          <p:cNvSpPr/>
-          <p:nvPr/>
-        </p:nvSpPr>
-        <p:spPr>
-          <a:xfrm>
-            <a:off x="731520" y="4142232"/>
-            <a:ext cx="566928" cy="566928"/>
-          </a:xfrm>
-          <a:prstGeom prst="rect">
-            <a:avLst/>
-          </a:prstGeom>
-          <a:noFill/>
-          <a:ln/>
-        </p:spPr>
-        <p:txBody>
-          <a:bodyPr wrap="square" lIns="0" tIns="0" rIns="0" bIns="0" rtlCol="0" anchor="ctr"/>
-          <a:lstStyle/>
-          <a:p>
-            <a:pPr algn="ctr" indent="0" marL="0">
-              <a:buNone/>
-            </a:pPr>
-            <a:r>
-              <a:rPr lang="en-US" sz="1800" b="1" dirty="0">
-                <a:solidFill>
-                  <a:srgbClr val="FFFFFF"/>
-                </a:solidFill>
-                <a:latin typeface="Calibri" pitchFamily="34" charset="0"/>
-                <a:ea typeface="Calibri" pitchFamily="34" charset="-122"/>
-                <a:cs typeface="Calibri" pitchFamily="34" charset="-120"/>
-              </a:rPr>
-              <a:t>3</a:t>
-            </a:r>
-            <a:endParaRPr lang="en-US" sz="1800" dirty="0"/>
-          </a:p>
-        </p:txBody>
-      </p:sp>
-      <p:sp>
-        <p:nvSpPr>
-          <p:cNvPr id="17" name="Text 15"/>
-          <p:cNvSpPr/>
-          <p:nvPr/>
-        </p:nvSpPr>
-        <p:spPr>
-          <a:xfrm>
-            <a:off x="1508760" y="4050792"/>
-            <a:ext cx="10058400" cy="438912"/>
-          </a:xfrm>
-          <a:prstGeom prst="rect">
-            <a:avLst/>
-          </a:prstGeom>
-          <a:noFill/>
-          <a:ln/>
-        </p:spPr>
-        <p:txBody>
-          <a:bodyPr wrap="square" lIns="0" tIns="0" rIns="0" bIns="0" rtlCol="0" anchor="ctr"/>
-          <a:lstStyle/>
-          <a:p>
-            <a:pPr indent="0" marL="0">
-              <a:buNone/>
-            </a:pPr>
-            <a:r>
-              <a:rPr lang="en-US" sz="1550" b="1" dirty="0">
-                <a:solidFill>
-                  <a:srgbClr val="0B2545"/>
-                </a:solidFill>
-                <a:latin typeface="Calibri" pitchFamily="34" charset="0"/>
-                <a:ea typeface="Calibri" pitchFamily="34" charset="-122"/>
-                <a:cs typeface="Calibri" pitchFamily="34" charset="-120"/>
-              </a:rPr>
-              <a:t>"Which &lt;high-priority&gt; &lt;records&gt; also &lt;2nd condition&gt;?"</a:t>
-            </a:r>
-            <a:endParaRPr lang="en-US" sz="1550" dirty="0"/>
-          </a:p>
-        </p:txBody>
-      </p:sp>
-      <p:sp>
-        <p:nvSpPr>
-          <p:cNvPr id="18" name="Text 16"/>
-          <p:cNvSpPr/>
-          <p:nvPr/>
-        </p:nvSpPr>
-        <p:spPr>
-          <a:xfrm>
-            <a:off x="1508760" y="4443984"/>
-            <a:ext cx="10058400" cy="384048"/>
-          </a:xfrm>
-          <a:prstGeom prst="rect">
-            <a:avLst/>
-          </a:prstGeom>
-          <a:noFill/>
-          <a:ln/>
-        </p:spPr>
-        <p:txBody>
-          <a:bodyPr wrap="square" lIns="0" tIns="0" rIns="0" bIns="0" rtlCol="0" anchor="ctr"/>
-          <a:lstStyle/>
-          <a:p>
-            <a:pPr indent="0" marL="0">
-              <a:buNone/>
-            </a:pPr>
-            <a:r>
-              <a:rPr lang="en-US" sz="1250" dirty="0">
-                <a:solidFill>
-                  <a:srgbClr val="5B6B7F"/>
-                </a:solidFill>
-                <a:latin typeface="Calibri" pitchFamily="34" charset="0"/>
-                <a:ea typeface="Calibri" pitchFamily="34" charset="-122"/>
-                <a:cs typeface="Calibri" pitchFamily="34" charset="-120"/>
-              </a:rPr>
-              <a:t>Centerpiece — a multi-attribute insight with a clear takeaway.</a:t>
-            </a:r>
-            <a:endParaRPr lang="en-US" sz="1250" dirty="0"/>
-          </a:p>
-        </p:txBody>
-      </p:sp>
-      <p:sp>
-        <p:nvSpPr>
-          <p:cNvPr id="19" name="Shape 17"/>
-          <p:cNvSpPr/>
-          <p:nvPr/>
-        </p:nvSpPr>
-        <p:spPr>
-          <a:xfrm>
-            <a:off x="502920" y="5020056"/>
-            <a:ext cx="11201400" cy="932688"/>
-          </a:xfrm>
-          <a:prstGeom prst="roundRect">
-            <a:avLst>
-              <a:gd name="adj" fmla="val 7843"/>
-            </a:avLst>
-          </a:prstGeom>
-          <a:solidFill>
-            <a:srgbClr val="F4F7FA"/>
-          </a:solidFill>
-          <a:ln/>
-          <a:effectLst>
-            <a:outerShdw sx="100000" sy="100000" kx="0" ky="0" algn="bl" rotWithShape="0" blurRad="88900" dist="38100" dir="5400000">
-              <a:srgbClr val="000000">
-                <a:alpha val="12000"/>
-              </a:srgbClr>
-            </a:outerShdw>
-          </a:effectLst>
-        </p:spPr>
-      </p:sp>
-      <p:sp>
-        <p:nvSpPr>
-          <p:cNvPr id="20" name="Shape 18"/>
-          <p:cNvSpPr/>
-          <p:nvPr/>
-        </p:nvSpPr>
-        <p:spPr>
-          <a:xfrm>
-            <a:off x="731520" y="5221224"/>
-            <a:ext cx="566928" cy="566928"/>
-          </a:xfrm>
-          <a:prstGeom prst="ellipse">
-            <a:avLst/>
-          </a:prstGeom>
-          <a:solidFill>
-            <a:srgbClr val="0B2545"/>
-          </a:solidFill>
-          <a:ln/>
-        </p:spPr>
-      </p:sp>
-      <p:sp>
-        <p:nvSpPr>
-          <p:cNvPr id="21" name="Text 19"/>
-          <p:cNvSpPr/>
-          <p:nvPr/>
-        </p:nvSpPr>
-        <p:spPr>
-          <a:xfrm>
-            <a:off x="731520" y="5221224"/>
-            <a:ext cx="566928" cy="566928"/>
-          </a:xfrm>
-          <a:prstGeom prst="rect">
-            <a:avLst/>
-          </a:prstGeom>
-          <a:noFill/>
-          <a:ln/>
-        </p:spPr>
-        <p:txBody>
-          <a:bodyPr wrap="square" lIns="0" tIns="0" rIns="0" bIns="0" rtlCol="0" anchor="ctr"/>
-          <a:lstStyle/>
-          <a:p>
-            <a:pPr algn="ctr" indent="0" marL="0">
-              <a:buNone/>
-            </a:pPr>
-            <a:r>
-              <a:rPr lang="en-US" sz="1800" b="1" dirty="0">
-                <a:solidFill>
-                  <a:srgbClr val="FFFFFF"/>
-                </a:solidFill>
-                <a:latin typeface="Calibri" pitchFamily="34" charset="0"/>
-                <a:ea typeface="Calibri" pitchFamily="34" charset="-122"/>
-                <a:cs typeface="Calibri" pitchFamily="34" charset="-120"/>
-              </a:rPr>
-              <a:t>4</a:t>
-            </a:r>
-            <a:endParaRPr lang="en-US" sz="1800" dirty="0"/>
-          </a:p>
-        </p:txBody>
-      </p:sp>
-      <p:sp>
-        <p:nvSpPr>
-          <p:cNvPr id="22" name="Text 20"/>
-          <p:cNvSpPr/>
-          <p:nvPr/>
-        </p:nvSpPr>
-        <p:spPr>
-          <a:xfrm>
-            <a:off x="1508760" y="5129784"/>
-            <a:ext cx="10058400" cy="438912"/>
-          </a:xfrm>
-          <a:prstGeom prst="rect">
-            <a:avLst/>
-          </a:prstGeom>
-          <a:noFill/>
-          <a:ln/>
-        </p:spPr>
-        <p:txBody>
-          <a:bodyPr wrap="square" lIns="0" tIns="0" rIns="0" bIns="0" rtlCol="0" anchor="ctr"/>
-          <a:lstStyle/>
-          <a:p>
-            <a:pPr indent="0" marL="0">
-              <a:buNone/>
-            </a:pPr>
-            <a:r>
-              <a:rPr lang="en-US" sz="1550" b="1" dirty="0">
-                <a:solidFill>
-                  <a:srgbClr val="0B2545"/>
-                </a:solidFill>
-                <a:latin typeface="Calibri" pitchFamily="34" charset="0"/>
-                <a:ea typeface="Calibri" pitchFamily="34" charset="-122"/>
-                <a:cs typeface="Calibri" pitchFamily="34" charset="-120"/>
-              </a:rPr>
-              <a:t>"Which &lt;records&gt; in &lt;region&gt; intersect &lt;layer&gt;?"</a:t>
-            </a:r>
-            <a:endParaRPr lang="en-US" sz="1550" dirty="0"/>
-          </a:p>
-        </p:txBody>
-      </p:sp>
-      <p:sp>
-        <p:nvSpPr>
-          <p:cNvPr id="23" name="Text 21"/>
-          <p:cNvSpPr/>
-          <p:nvPr/>
-        </p:nvSpPr>
-        <p:spPr>
-          <a:xfrm>
-            <a:off x="1508760" y="5522976"/>
-            <a:ext cx="10058400" cy="384048"/>
-          </a:xfrm>
-          <a:prstGeom prst="rect">
-            <a:avLst/>
-          </a:prstGeom>
-          <a:noFill/>
-          <a:ln/>
-        </p:spPr>
-        <p:txBody>
-          <a:bodyPr wrap="square" lIns="0" tIns="0" rIns="0" bIns="0" rtlCol="0" anchor="ctr"/>
-          <a:lstStyle/>
-          <a:p>
-            <a:pPr indent="0" marL="0">
-              <a:buNone/>
-            </a:pPr>
-            <a:r>
-              <a:rPr lang="en-US" sz="1250" dirty="0">
-                <a:solidFill>
-                  <a:srgbClr val="5B6B7F"/>
-                </a:solidFill>
-                <a:latin typeface="Calibri" pitchFamily="34" charset="0"/>
-                <a:ea typeface="Calibri" pitchFamily="34" charset="-122"/>
-                <a:cs typeface="Calibri" pitchFamily="34" charset="-120"/>
-              </a:rPr>
-              <a:t>Cross-layer reveal — must stay region-scoped (else 413).</a:t>
-            </a:r>
-            <a:endParaRPr lang="en-US" sz="1250" dirty="0"/>
-          </a:p>
-        </p:txBody>
-      </p:sp>
-      <p:sp>
-        <p:nvSpPr>
-          <p:cNvPr id="24" name="Text 22"/>
+          <p:cNvPr id="12" name="Text 8"/>
+          <p:cNvSpPr/>
+          <p:nvPr/>
+        </p:nvSpPr>
+        <p:spPr>
+          <a:xfrm>
+            <a:off x="6583680" y="2651760"/>
+            <a:ext cx="4937760" cy="3108960"/>
+          </a:xfrm>
+          <a:prstGeom prst="rect">
+            <a:avLst/>
+          </a:prstGeom>
+          <a:noFill/>
+          <a:ln/>
+        </p:spPr>
+        <p:txBody>
+          <a:bodyPr wrap="square" lIns="0" tIns="0" rIns="0" bIns="0" rtlCol="0" anchor="ctr"/>
+          <a:lstStyle/>
+          <a:p>
+            <a:pPr marL="342900" indent="-342900">
+              <a:lnSpc>
+                <a:spcPts val="2200"/>
+              </a:lnSpc>
+              <a:spcAft>
+                <a:spcPts val="1200"/>
+              </a:spcAft>
+              <a:buSzPct val="100000"/>
+              <a:buChar char="•"/>
+            </a:pPr>
+            <a:r>
+              <a:rPr lang="en-US" sz="1350" dirty="0">
+                <a:solidFill>
+                  <a:srgbClr val="1E293B"/>
+                </a:solidFill>
+                <a:latin typeface="Calibri" pitchFamily="34" charset="0"/>
+                <a:ea typeface="Calibri" pitchFamily="34" charset="-122"/>
+                <a:cs typeface="Calibri" pitchFamily="34" charset="-120"/>
+              </a:rPr>
+              <a:t>Schema introspection  ("list fields") — hallucinates</a:t>
+            </a:r>
+            <a:endParaRPr lang="en-US" sz="1350" dirty="0"/>
+          </a:p>
+          <a:p>
+            <a:pPr marL="342900" indent="-342900">
+              <a:lnSpc>
+                <a:spcPts val="2200"/>
+              </a:lnSpc>
+              <a:spcAft>
+                <a:spcPts val="1200"/>
+              </a:spcAft>
+              <a:buSzPct val="100000"/>
+              <a:buChar char="•"/>
+            </a:pPr>
+            <a:r>
+              <a:rPr lang="en-US" sz="1350" dirty="0">
+                <a:solidFill>
+                  <a:srgbClr val="1E293B"/>
+                </a:solidFill>
+                <a:latin typeface="Calibri" pitchFamily="34" charset="0"/>
+                <a:ea typeface="Calibri" pitchFamily="34" charset="-122"/>
+                <a:cs typeface="Calibri" pitchFamily="34" charset="-120"/>
+              </a:rPr>
+              <a:t>Cross-category comparison — silently degrades</a:t>
+            </a:r>
+            <a:endParaRPr lang="en-US" sz="1350" dirty="0"/>
+          </a:p>
+          <a:p>
+            <a:pPr marL="342900" indent="-342900">
+              <a:lnSpc>
+                <a:spcPts val="2200"/>
+              </a:lnSpc>
+              <a:spcAft>
+                <a:spcPts val="1200"/>
+              </a:spcAft>
+              <a:buSzPct val="100000"/>
+              <a:buChar char="•"/>
+            </a:pPr>
+            <a:r>
+              <a:rPr lang="en-US" sz="1350" dirty="0">
+                <a:solidFill>
+                  <a:srgbClr val="1E293B"/>
+                </a:solidFill>
+                <a:latin typeface="Calibri" pitchFamily="34" charset="0"/>
+                <a:ea typeface="Calibri" pitchFamily="34" charset="-122"/>
+                <a:cs typeface="Calibri" pitchFamily="34" charset="-120"/>
+              </a:rPr>
+              <a:t>Unbounded cross-layer  — 413 error</a:t>
+            </a:r>
+            <a:endParaRPr lang="en-US" sz="1350" dirty="0"/>
+          </a:p>
+          <a:p>
+            <a:pPr marL="342900" indent="-342900">
+              <a:lnSpc>
+                <a:spcPts val="2200"/>
+              </a:lnSpc>
+              <a:spcAft>
+                <a:spcPts val="1200"/>
+              </a:spcAft>
+              <a:buSzPct val="100000"/>
+              <a:buChar char="•"/>
+            </a:pPr>
+            <a:r>
+              <a:rPr lang="en-US" sz="1350" dirty="0">
+                <a:solidFill>
+                  <a:srgbClr val="1E293B"/>
+                </a:solidFill>
+                <a:latin typeface="Calibri" pitchFamily="34" charset="0"/>
+                <a:ea typeface="Calibri" pitchFamily="34" charset="-122"/>
+                <a:cs typeface="Calibri" pitchFamily="34" charset="-120"/>
+              </a:rPr>
+              <a:t>Broad sweeps  (vague, unscoped questions)</a:t>
+            </a:r>
+            <a:endParaRPr lang="en-US" sz="1350" dirty="0"/>
+          </a:p>
+          <a:p>
+            <a:pPr marL="342900" indent="-342900">
+              <a:lnSpc>
+                <a:spcPts val="2200"/>
+              </a:lnSpc>
+              <a:spcAft>
+                <a:spcPts val="1200"/>
+              </a:spcAft>
+              <a:buSzPct val="100000"/>
+              <a:buChar char="•"/>
+            </a:pPr>
+            <a:r>
+              <a:rPr lang="en-US" sz="1350" dirty="0">
+                <a:solidFill>
+                  <a:srgbClr val="1E293B"/>
+                </a:solidFill>
+                <a:latin typeface="Calibri" pitchFamily="34" charset="0"/>
+                <a:ea typeface="Calibri" pitchFamily="34" charset="-122"/>
+                <a:cs typeface="Calibri" pitchFamily="34" charset="-120"/>
+              </a:rPr>
+              <a:t>Charts · forecasts · email · user location</a:t>
+            </a:r>
+            <a:endParaRPr lang="en-US" sz="1350" dirty="0"/>
+          </a:p>
+        </p:txBody>
+      </p:sp>
+      <p:sp>
+        <p:nvSpPr>
+          <p:cNvPr id="13" name="Text 9"/>
           <p:cNvSpPr/>
           <p:nvPr/>
         </p:nvSpPr>
@@ -4768,7 +4838,7 @@
       </p:sp>
       <p:sp>
         <p:nvSpPr>
-          <p:cNvPr id="25" name="Text 23"/>
+          <p:cNvPr id="14" name="Text 10"/>
           <p:cNvSpPr/>
           <p:nvPr/>
         </p:nvSpPr>
@@ -4816,6 +4886,858 @@
 <file path=ppt/slides/slide13.xml><?xml version="1.0" encoding="utf-8"?>
 <p:sld xmlns:a="http://schemas.openxmlformats.org/drawingml/2006/main" xmlns:r="http://schemas.openxmlformats.org/officeDocument/2006/relationships" xmlns:p="http://schemas.openxmlformats.org/presentationml/2006/main">
   <p:cSld name="Slide 13">
+    <p:bg>
+      <p:bgPr>
+        <a:solidFill>
+          <a:srgbClr val="FFFFFF"/>
+        </a:solidFill>
+      </p:bgPr>
+    </p:bg>
+    <p:spTree>
+      <p:nvGrpSpPr>
+        <p:cNvPr id="1" name=""/>
+        <p:cNvGrpSpPr/>
+        <p:nvPr/>
+      </p:nvGrpSpPr>
+      <p:grpSpPr>
+        <a:xfrm>
+          <a:off x="0" y="0"/>
+          <a:ext cx="0" cy="0"/>
+          <a:chOff x="0" y="0"/>
+          <a:chExt cx="0" cy="0"/>
+        </a:xfrm>
+      </p:grpSpPr>
+      <p:sp>
+        <p:nvSpPr>
+          <p:cNvPr id="2" name="Text 0"/>
+          <p:cNvSpPr/>
+          <p:nvPr/>
+        </p:nvSpPr>
+        <p:spPr>
+          <a:xfrm>
+            <a:off x="502920" y="411480"/>
+            <a:ext cx="11155680" cy="640080"/>
+          </a:xfrm>
+          <a:prstGeom prst="rect">
+            <a:avLst/>
+          </a:prstGeom>
+          <a:noFill/>
+          <a:ln/>
+        </p:spPr>
+        <p:txBody>
+          <a:bodyPr wrap="square" lIns="0" tIns="0" rIns="0" bIns="0" rtlCol="0" anchor="ctr"/>
+          <a:lstStyle/>
+          <a:p>
+            <a:pPr indent="0" marL="0">
+              <a:buNone/>
+            </a:pPr>
+            <a:r>
+              <a:rPr lang="en-US" sz="3000" b="1" dirty="0">
+                <a:solidFill>
+                  <a:srgbClr val="0B2545"/>
+                </a:solidFill>
+                <a:latin typeface="Bookman Old Style" pitchFamily="34" charset="0"/>
+                <a:ea typeface="Bookman Old Style" pitchFamily="34" charset="-122"/>
+                <a:cs typeface="Bookman Old Style" pitchFamily="34" charset="-120"/>
+              </a:rPr>
+              <a:t>The demo run sheet — prompt shapes that work</a:t>
+            </a:r>
+            <a:endParaRPr lang="en-US" sz="3000" dirty="0"/>
+          </a:p>
+        </p:txBody>
+      </p:sp>
+      <p:sp>
+        <p:nvSpPr>
+          <p:cNvPr id="3" name="Text 1"/>
+          <p:cNvSpPr/>
+          <p:nvPr/>
+        </p:nvSpPr>
+        <p:spPr>
+          <a:xfrm>
+            <a:off x="502920" y="1078992"/>
+            <a:ext cx="10972800" cy="457200"/>
+          </a:xfrm>
+          <a:prstGeom prst="rect">
+            <a:avLst/>
+          </a:prstGeom>
+          <a:noFill/>
+          <a:ln/>
+        </p:spPr>
+        <p:txBody>
+          <a:bodyPr wrap="square" lIns="0" tIns="0" rIns="0" bIns="0" rtlCol="0" anchor="ctr"/>
+          <a:lstStyle/>
+          <a:p>
+            <a:pPr indent="0" marL="0">
+              <a:buNone/>
+            </a:pPr>
+            <a:r>
+              <a:rPr lang="en-US" sz="1400" dirty="0">
+                <a:solidFill>
+                  <a:srgbClr val="5B6B7F"/>
+                </a:solidFill>
+                <a:latin typeface="Calibri" pitchFamily="34" charset="0"/>
+                <a:ea typeface="Calibri" pitchFamily="34" charset="-122"/>
+                <a:cs typeface="Calibri" pitchFamily="34" charset="-120"/>
+              </a:rPr>
+              <a:t>Fill these with prompts you've verified against your data. Build from simple to the strongest hook.</a:t>
+            </a:r>
+            <a:endParaRPr lang="en-US" sz="1400" dirty="0"/>
+          </a:p>
+        </p:txBody>
+      </p:sp>
+      <p:sp>
+        <p:nvSpPr>
+          <p:cNvPr id="4" name="Shape 2"/>
+          <p:cNvSpPr/>
+          <p:nvPr/>
+        </p:nvSpPr>
+        <p:spPr>
+          <a:xfrm>
+            <a:off x="502920" y="1783080"/>
+            <a:ext cx="11201400" cy="932688"/>
+          </a:xfrm>
+          <a:prstGeom prst="roundRect">
+            <a:avLst>
+              <a:gd name="adj" fmla="val 7843"/>
+            </a:avLst>
+          </a:prstGeom>
+          <a:solidFill>
+            <a:srgbClr val="F4F7FA"/>
+          </a:solidFill>
+          <a:ln/>
+          <a:effectLst>
+            <a:outerShdw sx="100000" sy="100000" kx="0" ky="0" algn="bl" rotWithShape="0" blurRad="88900" dist="38100" dir="5400000">
+              <a:srgbClr val="000000">
+                <a:alpha val="12000"/>
+              </a:srgbClr>
+            </a:outerShdw>
+          </a:effectLst>
+        </p:spPr>
+      </p:sp>
+      <p:sp>
+        <p:nvSpPr>
+          <p:cNvPr id="5" name="Shape 3"/>
+          <p:cNvSpPr/>
+          <p:nvPr/>
+        </p:nvSpPr>
+        <p:spPr>
+          <a:xfrm>
+            <a:off x="731520" y="1984248"/>
+            <a:ext cx="566928" cy="566928"/>
+          </a:xfrm>
+          <a:prstGeom prst="ellipse">
+            <a:avLst/>
+          </a:prstGeom>
+          <a:solidFill>
+            <a:srgbClr val="1C7293"/>
+          </a:solidFill>
+          <a:ln/>
+        </p:spPr>
+      </p:sp>
+      <p:sp>
+        <p:nvSpPr>
+          <p:cNvPr id="6" name="Text 4"/>
+          <p:cNvSpPr/>
+          <p:nvPr/>
+        </p:nvSpPr>
+        <p:spPr>
+          <a:xfrm>
+            <a:off x="731520" y="1984248"/>
+            <a:ext cx="566928" cy="566928"/>
+          </a:xfrm>
+          <a:prstGeom prst="rect">
+            <a:avLst/>
+          </a:prstGeom>
+          <a:noFill/>
+          <a:ln/>
+        </p:spPr>
+        <p:txBody>
+          <a:bodyPr wrap="square" lIns="0" tIns="0" rIns="0" bIns="0" rtlCol="0" anchor="ctr"/>
+          <a:lstStyle/>
+          <a:p>
+            <a:pPr algn="ctr" indent="0" marL="0">
+              <a:buNone/>
+            </a:pPr>
+            <a:r>
+              <a:rPr lang="en-US" sz="1800" b="1" dirty="0">
+                <a:solidFill>
+                  <a:srgbClr val="FFFFFF"/>
+                </a:solidFill>
+                <a:latin typeface="Calibri" pitchFamily="34" charset="0"/>
+                <a:ea typeface="Calibri" pitchFamily="34" charset="-122"/>
+                <a:cs typeface="Calibri" pitchFamily="34" charset="-120"/>
+              </a:rPr>
+              <a:t>1</a:t>
+            </a:r>
+            <a:endParaRPr lang="en-US" sz="1800" dirty="0"/>
+          </a:p>
+        </p:txBody>
+      </p:sp>
+      <p:sp>
+        <p:nvSpPr>
+          <p:cNvPr id="7" name="Text 5"/>
+          <p:cNvSpPr/>
+          <p:nvPr/>
+        </p:nvSpPr>
+        <p:spPr>
+          <a:xfrm>
+            <a:off x="1508760" y="1892808"/>
+            <a:ext cx="10058400" cy="438912"/>
+          </a:xfrm>
+          <a:prstGeom prst="rect">
+            <a:avLst/>
+          </a:prstGeom>
+          <a:noFill/>
+          <a:ln/>
+        </p:spPr>
+        <p:txBody>
+          <a:bodyPr wrap="square" lIns="0" tIns="0" rIns="0" bIns="0" rtlCol="0" anchor="ctr"/>
+          <a:lstStyle/>
+          <a:p>
+            <a:pPr indent="0" marL="0">
+              <a:buNone/>
+            </a:pPr>
+            <a:r>
+              <a:rPr lang="en-US" sz="1550" b="1" dirty="0">
+                <a:solidFill>
+                  <a:srgbClr val="0B2545"/>
+                </a:solidFill>
+                <a:latin typeface="Calibri" pitchFamily="34" charset="0"/>
+                <a:ea typeface="Calibri" pitchFamily="34" charset="-122"/>
+                <a:cs typeface="Calibri" pitchFamily="34" charset="-120"/>
+              </a:rPr>
+              <a:t>"Show me the &lt;high-priority&gt; &lt;records&gt;."</a:t>
+            </a:r>
+            <a:endParaRPr lang="en-US" sz="1550" dirty="0"/>
+          </a:p>
+        </p:txBody>
+      </p:sp>
+      <p:sp>
+        <p:nvSpPr>
+          <p:cNvPr id="8" name="Text 6"/>
+          <p:cNvSpPr/>
+          <p:nvPr/>
+        </p:nvSpPr>
+        <p:spPr>
+          <a:xfrm>
+            <a:off x="1508760" y="2286000"/>
+            <a:ext cx="10058400" cy="384048"/>
+          </a:xfrm>
+          <a:prstGeom prst="rect">
+            <a:avLst/>
+          </a:prstGeom>
+          <a:noFill/>
+          <a:ln/>
+        </p:spPr>
+        <p:txBody>
+          <a:bodyPr wrap="square" lIns="0" tIns="0" rIns="0" bIns="0" rtlCol="0" anchor="ctr"/>
+          <a:lstStyle/>
+          <a:p>
+            <a:pPr indent="0" marL="0">
+              <a:buNone/>
+            </a:pPr>
+            <a:r>
+              <a:rPr lang="en-US" sz="1250" dirty="0">
+                <a:solidFill>
+                  <a:srgbClr val="5B6B7F"/>
+                </a:solidFill>
+                <a:latin typeface="Calibri" pitchFamily="34" charset="0"/>
+                <a:ea typeface="Calibri" pitchFamily="34" charset="-122"/>
+                <a:cs typeface="Calibri" pitchFamily="34" charset="-120"/>
+              </a:rPr>
+              <a:t>Opener — single-attribute filter. Verify the count is stable.</a:t>
+            </a:r>
+            <a:endParaRPr lang="en-US" sz="1250" dirty="0"/>
+          </a:p>
+        </p:txBody>
+      </p:sp>
+      <p:sp>
+        <p:nvSpPr>
+          <p:cNvPr id="9" name="Shape 7"/>
+          <p:cNvSpPr/>
+          <p:nvPr/>
+        </p:nvSpPr>
+        <p:spPr>
+          <a:xfrm>
+            <a:off x="502920" y="2862072"/>
+            <a:ext cx="11201400" cy="932688"/>
+          </a:xfrm>
+          <a:prstGeom prst="roundRect">
+            <a:avLst>
+              <a:gd name="adj" fmla="val 7843"/>
+            </a:avLst>
+          </a:prstGeom>
+          <a:solidFill>
+            <a:srgbClr val="F4F7FA"/>
+          </a:solidFill>
+          <a:ln/>
+          <a:effectLst>
+            <a:outerShdw sx="100000" sy="100000" kx="0" ky="0" algn="bl" rotWithShape="0" blurRad="88900" dist="38100" dir="5400000">
+              <a:srgbClr val="000000">
+                <a:alpha val="12000"/>
+              </a:srgbClr>
+            </a:outerShdw>
+          </a:effectLst>
+        </p:spPr>
+      </p:sp>
+      <p:sp>
+        <p:nvSpPr>
+          <p:cNvPr id="10" name="Shape 8"/>
+          <p:cNvSpPr/>
+          <p:nvPr/>
+        </p:nvSpPr>
+        <p:spPr>
+          <a:xfrm>
+            <a:off x="731520" y="3063240"/>
+            <a:ext cx="566928" cy="566928"/>
+          </a:xfrm>
+          <a:prstGeom prst="ellipse">
+            <a:avLst/>
+          </a:prstGeom>
+          <a:solidFill>
+            <a:srgbClr val="1C7293"/>
+          </a:solidFill>
+          <a:ln/>
+        </p:spPr>
+      </p:sp>
+      <p:sp>
+        <p:nvSpPr>
+          <p:cNvPr id="11" name="Text 9"/>
+          <p:cNvSpPr/>
+          <p:nvPr/>
+        </p:nvSpPr>
+        <p:spPr>
+          <a:xfrm>
+            <a:off x="731520" y="3063240"/>
+            <a:ext cx="566928" cy="566928"/>
+          </a:xfrm>
+          <a:prstGeom prst="rect">
+            <a:avLst/>
+          </a:prstGeom>
+          <a:noFill/>
+          <a:ln/>
+        </p:spPr>
+        <p:txBody>
+          <a:bodyPr wrap="square" lIns="0" tIns="0" rIns="0" bIns="0" rtlCol="0" anchor="ctr"/>
+          <a:lstStyle/>
+          <a:p>
+            <a:pPr algn="ctr" indent="0" marL="0">
+              <a:buNone/>
+            </a:pPr>
+            <a:r>
+              <a:rPr lang="en-US" sz="1800" b="1" dirty="0">
+                <a:solidFill>
+                  <a:srgbClr val="FFFFFF"/>
+                </a:solidFill>
+                <a:latin typeface="Calibri" pitchFamily="34" charset="0"/>
+                <a:ea typeface="Calibri" pitchFamily="34" charset="-122"/>
+                <a:cs typeface="Calibri" pitchFamily="34" charset="-120"/>
+              </a:rPr>
+              <a:t>2</a:t>
+            </a:r>
+            <a:endParaRPr lang="en-US" sz="1800" dirty="0"/>
+          </a:p>
+        </p:txBody>
+      </p:sp>
+      <p:sp>
+        <p:nvSpPr>
+          <p:cNvPr id="12" name="Text 10"/>
+          <p:cNvSpPr/>
+          <p:nvPr/>
+        </p:nvSpPr>
+        <p:spPr>
+          <a:xfrm>
+            <a:off x="1508760" y="2971800"/>
+            <a:ext cx="10058400" cy="438912"/>
+          </a:xfrm>
+          <a:prstGeom prst="rect">
+            <a:avLst/>
+          </a:prstGeom>
+          <a:noFill/>
+          <a:ln/>
+        </p:spPr>
+        <p:txBody>
+          <a:bodyPr wrap="square" lIns="0" tIns="0" rIns="0" bIns="0" rtlCol="0" anchor="ctr"/>
+          <a:lstStyle/>
+          <a:p>
+            <a:pPr indent="0" marL="0">
+              <a:buNone/>
+            </a:pPr>
+            <a:r>
+              <a:rPr lang="en-US" sz="1550" b="1" dirty="0">
+                <a:solidFill>
+                  <a:srgbClr val="0B2545"/>
+                </a:solidFill>
+                <a:latin typeface="Calibri" pitchFamily="34" charset="0"/>
+                <a:ea typeface="Calibri" pitchFamily="34" charset="-122"/>
+                <a:cs typeface="Calibri" pitchFamily="34" charset="-120"/>
+              </a:rPr>
+              <a:t>"Average &lt;metric&gt; for &lt;one category&gt;?"</a:t>
+            </a:r>
+            <a:endParaRPr lang="en-US" sz="1550" dirty="0"/>
+          </a:p>
+        </p:txBody>
+      </p:sp>
+      <p:sp>
+        <p:nvSpPr>
+          <p:cNvPr id="13" name="Text 11"/>
+          <p:cNvSpPr/>
+          <p:nvPr/>
+        </p:nvSpPr>
+        <p:spPr>
+          <a:xfrm>
+            <a:off x="1508760" y="3364992"/>
+            <a:ext cx="10058400" cy="384048"/>
+          </a:xfrm>
+          <a:prstGeom prst="rect">
+            <a:avLst/>
+          </a:prstGeom>
+          <a:noFill/>
+          <a:ln/>
+        </p:spPr>
+        <p:txBody>
+          <a:bodyPr wrap="square" lIns="0" tIns="0" rIns="0" bIns="0" rtlCol="0" anchor="ctr"/>
+          <a:lstStyle/>
+          <a:p>
+            <a:pPr indent="0" marL="0">
+              <a:buNone/>
+            </a:pPr>
+            <a:r>
+              <a:rPr lang="en-US" sz="1250" dirty="0">
+                <a:solidFill>
+                  <a:srgbClr val="5B6B7F"/>
+                </a:solidFill>
+                <a:latin typeface="Calibri" pitchFamily="34" charset="0"/>
+                <a:ea typeface="Calibri" pitchFamily="34" charset="-122"/>
+                <a:cs typeface="Calibri" pitchFamily="34" charset="-120"/>
+              </a:rPr>
+              <a:t>Single-group stat. (Don't ask it to COMPARE two categories live.)</a:t>
+            </a:r>
+            <a:endParaRPr lang="en-US" sz="1250" dirty="0"/>
+          </a:p>
+        </p:txBody>
+      </p:sp>
+      <p:sp>
+        <p:nvSpPr>
+          <p:cNvPr id="14" name="Shape 12"/>
+          <p:cNvSpPr/>
+          <p:nvPr/>
+        </p:nvSpPr>
+        <p:spPr>
+          <a:xfrm>
+            <a:off x="502920" y="3941064"/>
+            <a:ext cx="11201400" cy="932688"/>
+          </a:xfrm>
+          <a:prstGeom prst="roundRect">
+            <a:avLst>
+              <a:gd name="adj" fmla="val 7843"/>
+            </a:avLst>
+          </a:prstGeom>
+          <a:solidFill>
+            <a:srgbClr val="F4F7FA"/>
+          </a:solidFill>
+          <a:ln/>
+          <a:effectLst>
+            <a:outerShdw sx="100000" sy="100000" kx="0" ky="0" algn="bl" rotWithShape="0" blurRad="88900" dist="38100" dir="5400000">
+              <a:srgbClr val="000000">
+                <a:alpha val="12000"/>
+              </a:srgbClr>
+            </a:outerShdw>
+          </a:effectLst>
+        </p:spPr>
+      </p:sp>
+      <p:sp>
+        <p:nvSpPr>
+          <p:cNvPr id="15" name="Shape 13"/>
+          <p:cNvSpPr/>
+          <p:nvPr/>
+        </p:nvSpPr>
+        <p:spPr>
+          <a:xfrm>
+            <a:off x="731520" y="4142232"/>
+            <a:ext cx="566928" cy="566928"/>
+          </a:xfrm>
+          <a:prstGeom prst="ellipse">
+            <a:avLst/>
+          </a:prstGeom>
+          <a:solidFill>
+            <a:srgbClr val="E8A33D"/>
+          </a:solidFill>
+          <a:ln/>
+        </p:spPr>
+      </p:sp>
+      <p:sp>
+        <p:nvSpPr>
+          <p:cNvPr id="16" name="Text 14"/>
+          <p:cNvSpPr/>
+          <p:nvPr/>
+        </p:nvSpPr>
+        <p:spPr>
+          <a:xfrm>
+            <a:off x="731520" y="4142232"/>
+            <a:ext cx="566928" cy="566928"/>
+          </a:xfrm>
+          <a:prstGeom prst="rect">
+            <a:avLst/>
+          </a:prstGeom>
+          <a:noFill/>
+          <a:ln/>
+        </p:spPr>
+        <p:txBody>
+          <a:bodyPr wrap="square" lIns="0" tIns="0" rIns="0" bIns="0" rtlCol="0" anchor="ctr"/>
+          <a:lstStyle/>
+          <a:p>
+            <a:pPr algn="ctr" indent="0" marL="0">
+              <a:buNone/>
+            </a:pPr>
+            <a:r>
+              <a:rPr lang="en-US" sz="1800" b="1" dirty="0">
+                <a:solidFill>
+                  <a:srgbClr val="FFFFFF"/>
+                </a:solidFill>
+                <a:latin typeface="Calibri" pitchFamily="34" charset="0"/>
+                <a:ea typeface="Calibri" pitchFamily="34" charset="-122"/>
+                <a:cs typeface="Calibri" pitchFamily="34" charset="-120"/>
+              </a:rPr>
+              <a:t>3</a:t>
+            </a:r>
+            <a:endParaRPr lang="en-US" sz="1800" dirty="0"/>
+          </a:p>
+        </p:txBody>
+      </p:sp>
+      <p:sp>
+        <p:nvSpPr>
+          <p:cNvPr id="17" name="Text 15"/>
+          <p:cNvSpPr/>
+          <p:nvPr/>
+        </p:nvSpPr>
+        <p:spPr>
+          <a:xfrm>
+            <a:off x="1508760" y="4050792"/>
+            <a:ext cx="10058400" cy="438912"/>
+          </a:xfrm>
+          <a:prstGeom prst="rect">
+            <a:avLst/>
+          </a:prstGeom>
+          <a:noFill/>
+          <a:ln/>
+        </p:spPr>
+        <p:txBody>
+          <a:bodyPr wrap="square" lIns="0" tIns="0" rIns="0" bIns="0" rtlCol="0" anchor="ctr"/>
+          <a:lstStyle/>
+          <a:p>
+            <a:pPr indent="0" marL="0">
+              <a:buNone/>
+            </a:pPr>
+            <a:r>
+              <a:rPr lang="en-US" sz="1550" b="1" dirty="0">
+                <a:solidFill>
+                  <a:srgbClr val="0B2545"/>
+                </a:solidFill>
+                <a:latin typeface="Calibri" pitchFamily="34" charset="0"/>
+                <a:ea typeface="Calibri" pitchFamily="34" charset="-122"/>
+                <a:cs typeface="Calibri" pitchFamily="34" charset="-120"/>
+              </a:rPr>
+              <a:t>"Which &lt;high-priority&gt; &lt;records&gt; also &lt;2nd condition&gt;?"</a:t>
+            </a:r>
+            <a:endParaRPr lang="en-US" sz="1550" dirty="0"/>
+          </a:p>
+        </p:txBody>
+      </p:sp>
+      <p:sp>
+        <p:nvSpPr>
+          <p:cNvPr id="18" name="Text 16"/>
+          <p:cNvSpPr/>
+          <p:nvPr/>
+        </p:nvSpPr>
+        <p:spPr>
+          <a:xfrm>
+            <a:off x="1508760" y="4443984"/>
+            <a:ext cx="10058400" cy="384048"/>
+          </a:xfrm>
+          <a:prstGeom prst="rect">
+            <a:avLst/>
+          </a:prstGeom>
+          <a:noFill/>
+          <a:ln/>
+        </p:spPr>
+        <p:txBody>
+          <a:bodyPr wrap="square" lIns="0" tIns="0" rIns="0" bIns="0" rtlCol="0" anchor="ctr"/>
+          <a:lstStyle/>
+          <a:p>
+            <a:pPr indent="0" marL="0">
+              <a:buNone/>
+            </a:pPr>
+            <a:r>
+              <a:rPr lang="en-US" sz="1250" dirty="0">
+                <a:solidFill>
+                  <a:srgbClr val="5B6B7F"/>
+                </a:solidFill>
+                <a:latin typeface="Calibri" pitchFamily="34" charset="0"/>
+                <a:ea typeface="Calibri" pitchFamily="34" charset="-122"/>
+                <a:cs typeface="Calibri" pitchFamily="34" charset="-120"/>
+              </a:rPr>
+              <a:t>Centerpiece — a multi-attribute insight with a clear takeaway.</a:t>
+            </a:r>
+            <a:endParaRPr lang="en-US" sz="1250" dirty="0"/>
+          </a:p>
+        </p:txBody>
+      </p:sp>
+      <p:sp>
+        <p:nvSpPr>
+          <p:cNvPr id="19" name="Shape 17"/>
+          <p:cNvSpPr/>
+          <p:nvPr/>
+        </p:nvSpPr>
+        <p:spPr>
+          <a:xfrm>
+            <a:off x="502920" y="5020056"/>
+            <a:ext cx="11201400" cy="932688"/>
+          </a:xfrm>
+          <a:prstGeom prst="roundRect">
+            <a:avLst>
+              <a:gd name="adj" fmla="val 7843"/>
+            </a:avLst>
+          </a:prstGeom>
+          <a:solidFill>
+            <a:srgbClr val="F4F7FA"/>
+          </a:solidFill>
+          <a:ln/>
+          <a:effectLst>
+            <a:outerShdw sx="100000" sy="100000" kx="0" ky="0" algn="bl" rotWithShape="0" blurRad="88900" dist="38100" dir="5400000">
+              <a:srgbClr val="000000">
+                <a:alpha val="12000"/>
+              </a:srgbClr>
+            </a:outerShdw>
+          </a:effectLst>
+        </p:spPr>
+      </p:sp>
+      <p:sp>
+        <p:nvSpPr>
+          <p:cNvPr id="20" name="Shape 18"/>
+          <p:cNvSpPr/>
+          <p:nvPr/>
+        </p:nvSpPr>
+        <p:spPr>
+          <a:xfrm>
+            <a:off x="731520" y="5221224"/>
+            <a:ext cx="566928" cy="566928"/>
+          </a:xfrm>
+          <a:prstGeom prst="ellipse">
+            <a:avLst/>
+          </a:prstGeom>
+          <a:solidFill>
+            <a:srgbClr val="0B2545"/>
+          </a:solidFill>
+          <a:ln/>
+        </p:spPr>
+      </p:sp>
+      <p:sp>
+        <p:nvSpPr>
+          <p:cNvPr id="21" name="Text 19"/>
+          <p:cNvSpPr/>
+          <p:nvPr/>
+        </p:nvSpPr>
+        <p:spPr>
+          <a:xfrm>
+            <a:off x="731520" y="5221224"/>
+            <a:ext cx="566928" cy="566928"/>
+          </a:xfrm>
+          <a:prstGeom prst="rect">
+            <a:avLst/>
+          </a:prstGeom>
+          <a:noFill/>
+          <a:ln/>
+        </p:spPr>
+        <p:txBody>
+          <a:bodyPr wrap="square" lIns="0" tIns="0" rIns="0" bIns="0" rtlCol="0" anchor="ctr"/>
+          <a:lstStyle/>
+          <a:p>
+            <a:pPr algn="ctr" indent="0" marL="0">
+              <a:buNone/>
+            </a:pPr>
+            <a:r>
+              <a:rPr lang="en-US" sz="1800" b="1" dirty="0">
+                <a:solidFill>
+                  <a:srgbClr val="FFFFFF"/>
+                </a:solidFill>
+                <a:latin typeface="Calibri" pitchFamily="34" charset="0"/>
+                <a:ea typeface="Calibri" pitchFamily="34" charset="-122"/>
+                <a:cs typeface="Calibri" pitchFamily="34" charset="-120"/>
+              </a:rPr>
+              <a:t>4</a:t>
+            </a:r>
+            <a:endParaRPr lang="en-US" sz="1800" dirty="0"/>
+          </a:p>
+        </p:txBody>
+      </p:sp>
+      <p:sp>
+        <p:nvSpPr>
+          <p:cNvPr id="22" name="Text 20"/>
+          <p:cNvSpPr/>
+          <p:nvPr/>
+        </p:nvSpPr>
+        <p:spPr>
+          <a:xfrm>
+            <a:off x="1508760" y="5129784"/>
+            <a:ext cx="10058400" cy="438912"/>
+          </a:xfrm>
+          <a:prstGeom prst="rect">
+            <a:avLst/>
+          </a:prstGeom>
+          <a:noFill/>
+          <a:ln/>
+        </p:spPr>
+        <p:txBody>
+          <a:bodyPr wrap="square" lIns="0" tIns="0" rIns="0" bIns="0" rtlCol="0" anchor="ctr"/>
+          <a:lstStyle/>
+          <a:p>
+            <a:pPr indent="0" marL="0">
+              <a:buNone/>
+            </a:pPr>
+            <a:r>
+              <a:rPr lang="en-US" sz="1550" b="1" dirty="0">
+                <a:solidFill>
+                  <a:srgbClr val="0B2545"/>
+                </a:solidFill>
+                <a:latin typeface="Calibri" pitchFamily="34" charset="0"/>
+                <a:ea typeface="Calibri" pitchFamily="34" charset="-122"/>
+                <a:cs typeface="Calibri" pitchFamily="34" charset="-120"/>
+              </a:rPr>
+              <a:t>"Which &lt;records&gt; in &lt;region&gt; intersect &lt;layer&gt;?"</a:t>
+            </a:r>
+            <a:endParaRPr lang="en-US" sz="1550" dirty="0"/>
+          </a:p>
+        </p:txBody>
+      </p:sp>
+      <p:sp>
+        <p:nvSpPr>
+          <p:cNvPr id="23" name="Text 21"/>
+          <p:cNvSpPr/>
+          <p:nvPr/>
+        </p:nvSpPr>
+        <p:spPr>
+          <a:xfrm>
+            <a:off x="1508760" y="5522976"/>
+            <a:ext cx="10058400" cy="384048"/>
+          </a:xfrm>
+          <a:prstGeom prst="rect">
+            <a:avLst/>
+          </a:prstGeom>
+          <a:noFill/>
+          <a:ln/>
+        </p:spPr>
+        <p:txBody>
+          <a:bodyPr wrap="square" lIns="0" tIns="0" rIns="0" bIns="0" rtlCol="0" anchor="ctr"/>
+          <a:lstStyle/>
+          <a:p>
+            <a:pPr indent="0" marL="0">
+              <a:buNone/>
+            </a:pPr>
+            <a:r>
+              <a:rPr lang="en-US" sz="1250" dirty="0">
+                <a:solidFill>
+                  <a:srgbClr val="5B6B7F"/>
+                </a:solidFill>
+                <a:latin typeface="Calibri" pitchFamily="34" charset="0"/>
+                <a:ea typeface="Calibri" pitchFamily="34" charset="-122"/>
+                <a:cs typeface="Calibri" pitchFamily="34" charset="-120"/>
+              </a:rPr>
+              <a:t>Cross-layer reveal — must stay region-scoped (else 413).</a:t>
+            </a:r>
+            <a:endParaRPr lang="en-US" sz="1250" dirty="0"/>
+          </a:p>
+        </p:txBody>
+      </p:sp>
+      <p:sp>
+        <p:nvSpPr>
+          <p:cNvPr id="24" name="Text 22"/>
+          <p:cNvSpPr/>
+          <p:nvPr/>
+        </p:nvSpPr>
+        <p:spPr>
+          <a:xfrm>
+            <a:off x="502920" y="6473952"/>
+            <a:ext cx="7315200" cy="274320"/>
+          </a:xfrm>
+          <a:prstGeom prst="rect">
+            <a:avLst/>
+          </a:prstGeom>
+          <a:noFill/>
+          <a:ln/>
+        </p:spPr>
+        <p:txBody>
+          <a:bodyPr wrap="square" lIns="0" tIns="0" rIns="0" bIns="0" rtlCol="0" anchor="ctr"/>
+          <a:lstStyle/>
+          <a:p>
+            <a:pPr algn="l" indent="0" marL="0">
+              <a:buNone/>
+            </a:pPr>
+            <a:r>
+              <a:rPr lang="en-US" sz="900" dirty="0">
+                <a:solidFill>
+                  <a:srgbClr val="5B6B7F"/>
+                </a:solidFill>
+                <a:latin typeface="Calibri" pitchFamily="34" charset="0"/>
+                <a:ea typeface="Calibri" pitchFamily="34" charset="-122"/>
+                <a:cs typeface="Calibri" pitchFamily="34" charset="-120"/>
+              </a:rPr>
+              <a:t>ArcGIS Maps SDK 5.0 · AI Components Demo</a:t>
+            </a:r>
+            <a:endParaRPr lang="en-US" sz="900" dirty="0"/>
+          </a:p>
+        </p:txBody>
+      </p:sp>
+      <p:sp>
+        <p:nvSpPr>
+          <p:cNvPr id="25" name="Text 23"/>
+          <p:cNvSpPr/>
+          <p:nvPr/>
+        </p:nvSpPr>
+        <p:spPr>
+          <a:xfrm>
+            <a:off x="11277295" y="6473952"/>
+            <a:ext cx="457200" cy="274320"/>
+          </a:xfrm>
+          <a:prstGeom prst="rect">
+            <a:avLst/>
+          </a:prstGeom>
+          <a:noFill/>
+          <a:ln/>
+        </p:spPr>
+        <p:txBody>
+          <a:bodyPr wrap="square" lIns="0" tIns="0" rIns="0" bIns="0" rtlCol="0" anchor="ctr"/>
+          <a:lstStyle/>
+          <a:p>
+            <a:pPr algn="r" indent="0" marL="0">
+              <a:buNone/>
+            </a:pPr>
+            <a:r>
+              <a:rPr lang="en-US" sz="900" dirty="0">
+                <a:solidFill>
+                  <a:srgbClr val="5B6B7F"/>
+                </a:solidFill>
+                <a:latin typeface="Calibri" pitchFamily="34" charset="0"/>
+                <a:ea typeface="Calibri" pitchFamily="34" charset="-122"/>
+                <a:cs typeface="Calibri" pitchFamily="34" charset="-120"/>
+              </a:rPr>
+              <a:t>13</a:t>
+            </a:r>
+            <a:endParaRPr lang="en-US" sz="900" dirty="0"/>
+          </a:p>
+        </p:txBody>
+      </p:sp>
+    </p:spTree>
+  </p:cSld>
+  <p:clrMapOvr>
+    <a:masterClrMapping/>
+  </p:clrMapOvr>
+</p:sld>
+</file>
+
+<file path=ppt/slides/slide14.xml><?xml version="1.0" encoding="utf-8"?>
+<p:sld xmlns:a="http://schemas.openxmlformats.org/drawingml/2006/main" xmlns:r="http://schemas.openxmlformats.org/officeDocument/2006/relationships" xmlns:p="http://schemas.openxmlformats.org/presentationml/2006/main">
+  <p:cSld name="Slide 14">
     <p:bg>
       <p:bgPr>
         <a:solidFill>
@@ -9912,7 +10834,7 @@
         <p:spPr>
           <a:xfrm>
             <a:off x="502920" y="411480"/>
-            <a:ext cx="11155680" cy="640080"/>
+            <a:ext cx="8046720" cy="640080"/>
           </a:xfrm>
           <a:prstGeom prst="rect">
             <a:avLst/>
@@ -9936,7 +10858,7 @@
                 <a:ea typeface="Bookman Old Style" pitchFamily="34" charset="-122"/>
                 <a:cs typeface="Bookman Old Style" pitchFamily="34" charset="-120"/>
               </a:rPr>
-              <a:t>Connecting users: SAML vs built-in</a:t>
+              <a:t>Register the app: OAuth credentials</a:t>
             </a:r>
             <a:endParaRPr lang="en-US" sz="3000" dirty="0"/>
           </a:p>
@@ -9950,8 +10872,47 @@
         </p:nvSpPr>
         <p:spPr>
           <a:xfrm>
+            <a:off x="8595360" y="566928"/>
+            <a:ext cx="3108960" cy="365760"/>
+          </a:xfrm>
+          <a:prstGeom prst="rect">
+            <a:avLst/>
+          </a:prstGeom>
+          <a:noFill/>
+          <a:ln/>
+        </p:spPr>
+        <p:txBody>
+          <a:bodyPr wrap="square" lIns="0" tIns="0" rIns="0" bIns="0" rtlCol="0" anchor="ctr"/>
+          <a:lstStyle/>
+          <a:p>
+            <a:pPr algn="r" indent="0" marL="0">
+              <a:buNone/>
+            </a:pPr>
+            <a:r>
+              <a:rPr lang="en-US" sz="1200" i="1" dirty="0">
+                <a:solidFill>
+                  <a:srgbClr val="1C7293"/>
+                </a:solidFill>
+                <a:latin typeface="Calibri" pitchFamily="34" charset="0"/>
+                <a:ea typeface="Calibri" pitchFamily="34" charset="-122"/>
+                <a:cs typeface="Calibri" pitchFamily="34" charset="-120"/>
+              </a:rPr>
+              <a:t>see DEV-OAUTH-CREDENTIALS.md</a:t>
+            </a:r>
+            <a:endParaRPr lang="en-US" sz="1200" dirty="0"/>
+          </a:p>
+        </p:txBody>
+      </p:sp>
+      <p:sp>
+        <p:nvSpPr>
+          <p:cNvPr id="4" name="Text 2"/>
+          <p:cNvSpPr/>
+          <p:nvPr/>
+        </p:nvSpPr>
+        <p:spPr>
+          <a:xfrm>
             <a:off x="502920" y="1078992"/>
-            <a:ext cx="10972800" cy="548640"/>
+            <a:ext cx="11155680" cy="457200"/>
           </a:xfrm>
           <a:prstGeom prst="rect">
             <a:avLst/>
@@ -9975,7 +10936,7 @@
                 <a:ea typeface="Calibri" pitchFamily="34" charset="-122"/>
                 <a:cs typeface="Calibri" pitchFamily="34" charset="-120"/>
               </a:rPr>
-              <a:t>Both use the same OAuth 2.0 user-auth flow and the same app code — the only lever is the portal URL.</a:t>
+              <a:t>The SDK app signs users in with a Client ID from ArcGIS Online — one-time, no code. (The no-code Data Explorer path skips this.)</a:t>
             </a:r>
             <a:endParaRPr lang="en-US" sz="1400" dirty="0"/>
           </a:p>
@@ -9983,43 +10944,115 @@
       </p:sp>
       <p:sp>
         <p:nvSpPr>
-          <p:cNvPr id="4" name="Shape 2"/>
-          <p:cNvSpPr/>
-          <p:nvPr/>
-        </p:nvSpPr>
-        <p:spPr>
-          <a:xfrm>
-            <a:off x="502920" y="1783080"/>
-            <a:ext cx="5486400" cy="3108960"/>
-          </a:xfrm>
-          <a:prstGeom prst="roundRect">
-            <a:avLst>
-              <a:gd name="adj" fmla="val 2941"/>
-            </a:avLst>
+          <p:cNvPr id="5" name="Shape 3"/>
+          <p:cNvSpPr/>
+          <p:nvPr/>
+        </p:nvSpPr>
+        <p:spPr>
+          <a:xfrm>
+            <a:off x="548640" y="1755648"/>
+            <a:ext cx="530352" cy="530352"/>
+          </a:xfrm>
+          <a:prstGeom prst="ellipse">
+            <a:avLst/>
           </a:prstGeom>
           <a:solidFill>
-            <a:srgbClr val="F4F7FA"/>
+            <a:srgbClr val="0B2545"/>
           </a:solidFill>
           <a:ln/>
-          <a:effectLst>
-            <a:outerShdw sx="100000" sy="100000" kx="0" ky="0" algn="bl" rotWithShape="0" blurRad="88900" dist="38100" dir="5400000">
-              <a:srgbClr val="000000">
-                <a:alpha val="12000"/>
-              </a:srgbClr>
-            </a:outerShdw>
-          </a:effectLst>
-        </p:spPr>
-      </p:sp>
-      <p:sp>
-        <p:nvSpPr>
-          <p:cNvPr id="5" name="Shape 3"/>
-          <p:cNvSpPr/>
-          <p:nvPr/>
-        </p:nvSpPr>
-        <p:spPr>
-          <a:xfrm>
-            <a:off x="868680" y="2057400"/>
-            <a:ext cx="822960" cy="822960"/>
+        </p:spPr>
+      </p:sp>
+      <p:sp>
+        <p:nvSpPr>
+          <p:cNvPr id="6" name="Text 4"/>
+          <p:cNvSpPr/>
+          <p:nvPr/>
+        </p:nvSpPr>
+        <p:spPr>
+          <a:xfrm>
+            <a:off x="548640" y="1755648"/>
+            <a:ext cx="530352" cy="530352"/>
+          </a:xfrm>
+          <a:prstGeom prst="rect">
+            <a:avLst/>
+          </a:prstGeom>
+          <a:noFill/>
+          <a:ln/>
+        </p:spPr>
+        <p:txBody>
+          <a:bodyPr wrap="square" lIns="0" tIns="0" rIns="0" bIns="0" rtlCol="0" anchor="ctr"/>
+          <a:lstStyle/>
+          <a:p>
+            <a:pPr algn="ctr" indent="0" marL="0">
+              <a:buNone/>
+            </a:pPr>
+            <a:r>
+              <a:rPr lang="en-US" sz="1700" b="1" dirty="0">
+                <a:solidFill>
+                  <a:srgbClr val="FFFFFF"/>
+                </a:solidFill>
+                <a:latin typeface="Calibri" pitchFamily="34" charset="0"/>
+                <a:ea typeface="Calibri" pitchFamily="34" charset="-122"/>
+                <a:cs typeface="Calibri" pitchFamily="34" charset="-120"/>
+              </a:rPr>
+              <a:t>1</a:t>
+            </a:r>
+            <a:endParaRPr lang="en-US" sz="1700" dirty="0"/>
+          </a:p>
+        </p:txBody>
+      </p:sp>
+      <p:sp>
+        <p:nvSpPr>
+          <p:cNvPr id="7" name="Text 5"/>
+          <p:cNvSpPr/>
+          <p:nvPr/>
+        </p:nvSpPr>
+        <p:spPr>
+          <a:xfrm>
+            <a:off x="1280160" y="1737360"/>
+            <a:ext cx="10332720" cy="566928"/>
+          </a:xfrm>
+          <a:prstGeom prst="rect">
+            <a:avLst/>
+          </a:prstGeom>
+          <a:noFill/>
+          <a:ln/>
+        </p:spPr>
+        <p:txBody>
+          <a:bodyPr wrap="square" lIns="0" tIns="0" rIns="0" bIns="0" rtlCol="0" anchor="ctr"/>
+          <a:lstStyle/>
+          <a:p>
+            <a:pPr indent="0" marL="0">
+              <a:lnSpc>
+                <a:spcPts val="1600"/>
+              </a:lnSpc>
+              <a:buNone/>
+            </a:pPr>
+            <a:r>
+              <a:rPr lang="en-US" sz="1350" dirty="0">
+                <a:solidFill>
+                  <a:srgbClr val="1E293B"/>
+                </a:solidFill>
+                <a:latin typeface="Calibri" pitchFamily="34" charset="0"/>
+                <a:ea typeface="Calibri" pitchFamily="34" charset="-122"/>
+                <a:cs typeface="Calibri" pitchFamily="34" charset="-120"/>
+              </a:rPr>
+              <a:t>ArcGIS Online → Content → New item → Developer credentials → OAuth credentials (user auth)</a:t>
+            </a:r>
+            <a:endParaRPr lang="en-US" sz="1350" dirty="0"/>
+          </a:p>
+        </p:txBody>
+      </p:sp>
+      <p:sp>
+        <p:nvSpPr>
+          <p:cNvPr id="8" name="Shape 6"/>
+          <p:cNvSpPr/>
+          <p:nvPr/>
+        </p:nvSpPr>
+        <p:spPr>
+          <a:xfrm>
+            <a:off x="548640" y="2468880"/>
+            <a:ext cx="530352" cy="530352"/>
           </a:xfrm>
           <a:prstGeom prst="ellipse">
             <a:avLst/>
@@ -10030,40 +11063,55 @@
           <a:ln/>
         </p:spPr>
       </p:sp>
-      <p:pic>
-        <p:nvPicPr>
-          <p:cNvPr id="6" name="Image 0" descr="preencoded.png">    </p:cNvPr>
-          <p:cNvPicPr>
-            <a:picLocks noChangeAspect="1"/>
-          </p:cNvPicPr>
-          <p:nvPr/>
-        </p:nvPicPr>
-        <p:blipFill>
-          <a:blip r:embed="rId1"/>
-          <a:stretch>
-            <a:fillRect/>
-          </a:stretch>
-        </p:blipFill>
-        <p:spPr>
-          <a:xfrm>
-            <a:off x="1082650" y="2271370"/>
-            <a:ext cx="395021" cy="395021"/>
-          </a:xfrm>
-          <a:prstGeom prst="rect">
-            <a:avLst/>
-          </a:prstGeom>
-        </p:spPr>
-      </p:pic>
-      <p:sp>
-        <p:nvSpPr>
-          <p:cNvPr id="7" name="Text 4"/>
-          <p:cNvSpPr/>
-          <p:nvPr/>
-        </p:nvSpPr>
-        <p:spPr>
-          <a:xfrm>
-            <a:off x="1783080" y="2103120"/>
-            <a:ext cx="4023360" cy="731520"/>
+      <p:sp>
+        <p:nvSpPr>
+          <p:cNvPr id="9" name="Text 7"/>
+          <p:cNvSpPr/>
+          <p:nvPr/>
+        </p:nvSpPr>
+        <p:spPr>
+          <a:xfrm>
+            <a:off x="548640" y="2468880"/>
+            <a:ext cx="530352" cy="530352"/>
+          </a:xfrm>
+          <a:prstGeom prst="rect">
+            <a:avLst/>
+          </a:prstGeom>
+          <a:noFill/>
+          <a:ln/>
+        </p:spPr>
+        <p:txBody>
+          <a:bodyPr wrap="square" lIns="0" tIns="0" rIns="0" bIns="0" rtlCol="0" anchor="ctr"/>
+          <a:lstStyle/>
+          <a:p>
+            <a:pPr algn="ctr" indent="0" marL="0">
+              <a:buNone/>
+            </a:pPr>
+            <a:r>
+              <a:rPr lang="en-US" sz="1700" b="1" dirty="0">
+                <a:solidFill>
+                  <a:srgbClr val="FFFFFF"/>
+                </a:solidFill>
+                <a:latin typeface="Calibri" pitchFamily="34" charset="0"/>
+                <a:ea typeface="Calibri" pitchFamily="34" charset="-122"/>
+                <a:cs typeface="Calibri" pitchFamily="34" charset="-120"/>
+              </a:rPr>
+              <a:t>2</a:t>
+            </a:r>
+            <a:endParaRPr lang="en-US" sz="1700" dirty="0"/>
+          </a:p>
+        </p:txBody>
+      </p:sp>
+      <p:sp>
+        <p:nvSpPr>
+          <p:cNvPr id="10" name="Text 8"/>
+          <p:cNvSpPr/>
+          <p:nvPr/>
+        </p:nvSpPr>
+        <p:spPr>
+          <a:xfrm>
+            <a:off x="1280160" y="2450592"/>
+            <a:ext cx="10332720" cy="566928"/>
           </a:xfrm>
           <a:prstGeom prst="rect">
             <a:avLst/>
@@ -10076,56 +11124,13 @@
           <a:lstStyle/>
           <a:p>
             <a:pPr indent="0" marL="0">
-              <a:buNone/>
-            </a:pPr>
-            <a:r>
-              <a:rPr lang="en-US" sz="1600" b="1" dirty="0">
-                <a:solidFill>
-                  <a:srgbClr val="0B2545"/>
-                </a:solidFill>
-                <a:latin typeface="Calibri" pitchFamily="34" charset="0"/>
-                <a:ea typeface="Calibri" pitchFamily="34" charset="-122"/>
-                <a:cs typeface="Calibri" pitchFamily="34" charset="-120"/>
-              </a:rPr>
-              <a:t>Built-in account</a:t>
-            </a:r>
-            <a:endParaRPr lang="en-US" sz="1600" dirty="0"/>
-          </a:p>
-        </p:txBody>
-      </p:sp>
-      <p:sp>
-        <p:nvSpPr>
-          <p:cNvPr id="8" name="Text 5"/>
-          <p:cNvSpPr/>
-          <p:nvPr/>
-        </p:nvSpPr>
-        <p:spPr>
-          <a:xfrm>
-            <a:off x="868680" y="2971800"/>
-            <a:ext cx="4800600" cy="1828800"/>
-          </a:xfrm>
-          <a:prstGeom prst="rect">
-            <a:avLst/>
-          </a:prstGeom>
-          <a:noFill/>
-          <a:ln/>
-        </p:spPr>
-        <p:txBody>
-          <a:bodyPr wrap="square" lIns="0" tIns="0" rIns="0" bIns="0" rtlCol="0" anchor="ctr"/>
-          <a:lstStyle/>
-          <a:p>
-            <a:pPr marL="342900" indent="-342900">
               <a:lnSpc>
-                <a:spcPts val="1800"/>
+                <a:spcPts val="1600"/>
               </a:lnSpc>
-              <a:spcAft>
-                <a:spcPts val="800"/>
-              </a:spcAft>
-              <a:buSzPct val="100000"/>
-              <a:buChar char="•"/>
-            </a:pPr>
-            <a:r>
-              <a:rPr lang="en-US" sz="1250" dirty="0">
+              <a:buNone/>
+            </a:pPr>
+            <a:r>
+              <a:rPr lang="en-US" sz="1350" dirty="0">
                 <a:solidFill>
                   <a:srgbClr val="1E293B"/>
                 </a:solidFill>
@@ -10133,334 +11138,25 @@
                 <a:ea typeface="Calibri" pitchFamily="34" charset="-122"/>
                 <a:cs typeface="Calibri" pitchFamily="34" charset="-120"/>
               </a:rPr>
-              <a:t>Credentials live in ArcGIS Online</a:t>
-            </a:r>
-            <a:endParaRPr lang="en-US" sz="1250" dirty="0"/>
-          </a:p>
-          <a:p>
-            <a:pPr marL="342900" indent="-342900">
-              <a:lnSpc>
-                <a:spcPts val="1800"/>
-              </a:lnSpc>
-              <a:spcAft>
-                <a:spcPts val="800"/>
-              </a:spcAft>
-              <a:buSzPct val="100000"/>
-              <a:buChar char="•"/>
-            </a:pPr>
-            <a:r>
-              <a:rPr lang="en-US" sz="1250" dirty="0">
-                <a:solidFill>
-                  <a:srgbClr val="1E293B"/>
-                </a:solidFill>
-                <a:latin typeface="Calibri" pitchFamily="34" charset="0"/>
-                <a:ea typeface="Calibri" pitchFamily="34" charset="-122"/>
-                <a:cs typeface="Calibri" pitchFamily="34" charset="-120"/>
-              </a:rPr>
-              <a:t>Signs in directly on the ArcGIS sign-in page</a:t>
-            </a:r>
-            <a:endParaRPr lang="en-US" sz="1250" dirty="0"/>
-          </a:p>
-          <a:p>
-            <a:pPr marL="342900" indent="-342900">
-              <a:lnSpc>
-                <a:spcPts val="1800"/>
-              </a:lnSpc>
-              <a:spcAft>
-                <a:spcPts val="800"/>
-              </a:spcAft>
-              <a:buSzPct val="100000"/>
-              <a:buChar char="•"/>
-            </a:pPr>
-            <a:r>
-              <a:rPr lang="en-US" sz="1250" dirty="0">
-                <a:solidFill>
-                  <a:srgbClr val="1E293B"/>
-                </a:solidFill>
-                <a:latin typeface="Calibri" pitchFamily="34" charset="0"/>
-                <a:ea typeface="Calibri" pitchFamily="34" charset="-122"/>
-                <a:cs typeface="Calibri" pitchFamily="34" charset="-120"/>
-              </a:rPr>
-              <a:t>Org password policy applies</a:t>
-            </a:r>
-            <a:endParaRPr lang="en-US" sz="1250" dirty="0"/>
-          </a:p>
-          <a:p>
-            <a:pPr marL="342900" indent="-342900">
-              <a:lnSpc>
-                <a:spcPts val="1800"/>
-              </a:lnSpc>
-              <a:spcAft>
-                <a:spcPts val="800"/>
-              </a:spcAft>
-              <a:buSzPct val="100000"/>
-              <a:buChar char="•"/>
-            </a:pPr>
-            <a:r>
-              <a:rPr lang="en-US" sz="1250" dirty="0">
-                <a:solidFill>
-                  <a:srgbClr val="1E293B"/>
-                </a:solidFill>
-                <a:latin typeface="Calibri" pitchFamily="34" charset="0"/>
-                <a:ea typeface="Calibri" pitchFamily="34" charset="-122"/>
-                <a:cs typeface="Calibri" pitchFamily="34" charset="-120"/>
-              </a:rPr>
-              <a:t>Username, e.g. jsmith</a:t>
-            </a:r>
-            <a:endParaRPr lang="en-US" sz="1250" dirty="0"/>
-          </a:p>
-        </p:txBody>
-      </p:sp>
-      <p:sp>
-        <p:nvSpPr>
-          <p:cNvPr id="9" name="Shape 6"/>
-          <p:cNvSpPr/>
-          <p:nvPr/>
-        </p:nvSpPr>
-        <p:spPr>
-          <a:xfrm>
-            <a:off x="6217920" y="1783080"/>
-            <a:ext cx="5486400" cy="3108960"/>
-          </a:xfrm>
-          <a:prstGeom prst="roundRect">
-            <a:avLst>
-              <a:gd name="adj" fmla="val 2941"/>
-            </a:avLst>
-          </a:prstGeom>
-          <a:solidFill>
-            <a:srgbClr val="F4F7FA"/>
-          </a:solidFill>
-          <a:ln w="12700">
-            <a:solidFill>
-              <a:srgbClr val="1C7293"/>
-            </a:solidFill>
-            <a:prstDash val="solid"/>
-          </a:ln>
-          <a:effectLst>
-            <a:outerShdw sx="100000" sy="100000" kx="0" ky="0" algn="bl" rotWithShape="0" blurRad="88900" dist="38100" dir="5400000">
-              <a:srgbClr val="000000">
-                <a:alpha val="12000"/>
-              </a:srgbClr>
-            </a:outerShdw>
-          </a:effectLst>
-        </p:spPr>
-      </p:sp>
-      <p:sp>
-        <p:nvSpPr>
-          <p:cNvPr id="10" name="Shape 7"/>
-          <p:cNvSpPr/>
-          <p:nvPr/>
-        </p:nvSpPr>
-        <p:spPr>
-          <a:xfrm>
-            <a:off x="6583680" y="2057400"/>
-            <a:ext cx="822960" cy="822960"/>
+              <a:t>Add a redirect URL: http://localhost:5173  (add your deployed origin later)</a:t>
+            </a:r>
+            <a:endParaRPr lang="en-US" sz="1350" dirty="0"/>
+          </a:p>
+        </p:txBody>
+      </p:sp>
+      <p:sp>
+        <p:nvSpPr>
+          <p:cNvPr id="11" name="Shape 9"/>
+          <p:cNvSpPr/>
+          <p:nvPr/>
+        </p:nvSpPr>
+        <p:spPr>
+          <a:xfrm>
+            <a:off x="548640" y="3182112"/>
+            <a:ext cx="530352" cy="530352"/>
           </a:xfrm>
           <a:prstGeom prst="ellipse">
             <a:avLst/>
-          </a:prstGeom>
-          <a:solidFill>
-            <a:srgbClr val="E8A33D"/>
-          </a:solidFill>
-          <a:ln/>
-        </p:spPr>
-      </p:sp>
-      <p:pic>
-        <p:nvPicPr>
-          <p:cNvPr id="11" name="Image 1" descr="preencoded.png">    </p:cNvPr>
-          <p:cNvPicPr>
-            <a:picLocks noChangeAspect="1"/>
-          </p:cNvPicPr>
-          <p:nvPr/>
-        </p:nvPicPr>
-        <p:blipFill>
-          <a:blip r:embed="rId2"/>
-          <a:stretch>
-            <a:fillRect/>
-          </a:stretch>
-        </p:blipFill>
-        <p:spPr>
-          <a:xfrm>
-            <a:off x="6797650" y="2271370"/>
-            <a:ext cx="395021" cy="395021"/>
-          </a:xfrm>
-          <a:prstGeom prst="rect">
-            <a:avLst/>
-          </a:prstGeom>
-        </p:spPr>
-      </p:pic>
-      <p:sp>
-        <p:nvSpPr>
-          <p:cNvPr id="12" name="Text 8"/>
-          <p:cNvSpPr/>
-          <p:nvPr/>
-        </p:nvSpPr>
-        <p:spPr>
-          <a:xfrm>
-            <a:off x="7498080" y="2103120"/>
-            <a:ext cx="4069080" cy="731520"/>
-          </a:xfrm>
-          <a:prstGeom prst="rect">
-            <a:avLst/>
-          </a:prstGeom>
-          <a:noFill/>
-          <a:ln/>
-        </p:spPr>
-        <p:txBody>
-          <a:bodyPr wrap="square" lIns="0" tIns="0" rIns="0" bIns="0" rtlCol="0" anchor="ctr"/>
-          <a:lstStyle/>
-          <a:p>
-            <a:pPr indent="0" marL="0">
-              <a:buNone/>
-            </a:pPr>
-            <a:r>
-              <a:rPr lang="en-US" sz="1600" b="1" dirty="0">
-                <a:solidFill>
-                  <a:srgbClr val="0B2545"/>
-                </a:solidFill>
-                <a:latin typeface="Calibri" pitchFamily="34" charset="0"/>
-                <a:ea typeface="Calibri" pitchFamily="34" charset="-122"/>
-                <a:cs typeface="Calibri" pitchFamily="34" charset="-120"/>
-              </a:rPr>
-              <a:t>SAML / org-specific login</a:t>
-            </a:r>
-            <a:endParaRPr lang="en-US" sz="1600" dirty="0"/>
-          </a:p>
-        </p:txBody>
-      </p:sp>
-      <p:sp>
-        <p:nvSpPr>
-          <p:cNvPr id="13" name="Text 9"/>
-          <p:cNvSpPr/>
-          <p:nvPr/>
-        </p:nvSpPr>
-        <p:spPr>
-          <a:xfrm>
-            <a:off x="6583680" y="2971800"/>
-            <a:ext cx="4800600" cy="1828800"/>
-          </a:xfrm>
-          <a:prstGeom prst="rect">
-            <a:avLst/>
-          </a:prstGeom>
-          <a:noFill/>
-          <a:ln/>
-        </p:spPr>
-        <p:txBody>
-          <a:bodyPr wrap="square" lIns="0" tIns="0" rIns="0" bIns="0" rtlCol="0" anchor="ctr"/>
-          <a:lstStyle/>
-          <a:p>
-            <a:pPr marL="342900" indent="-342900">
-              <a:lnSpc>
-                <a:spcPts val="1800"/>
-              </a:lnSpc>
-              <a:spcAft>
-                <a:spcPts val="800"/>
-              </a:spcAft>
-              <a:buSzPct val="100000"/>
-              <a:buChar char="•"/>
-            </a:pPr>
-            <a:r>
-              <a:rPr lang="en-US" sz="1250" dirty="0">
-                <a:solidFill>
-                  <a:srgbClr val="1E293B"/>
-                </a:solidFill>
-                <a:latin typeface="Calibri" pitchFamily="34" charset="0"/>
-                <a:ea typeface="Calibri" pitchFamily="34" charset="-122"/>
-                <a:cs typeface="Calibri" pitchFamily="34" charset="-120"/>
-              </a:rPr>
-              <a:t>Credentials live in your identity provider (IdP)</a:t>
-            </a:r>
-            <a:endParaRPr lang="en-US" sz="1250" dirty="0"/>
-          </a:p>
-          <a:p>
-            <a:pPr marL="342900" indent="-342900">
-              <a:lnSpc>
-                <a:spcPts val="1800"/>
-              </a:lnSpc>
-              <a:spcAft>
-                <a:spcPts val="800"/>
-              </a:spcAft>
-              <a:buSzPct val="100000"/>
-              <a:buChar char="•"/>
-            </a:pPr>
-            <a:r>
-              <a:rPr lang="en-US" sz="1250" dirty="0">
-                <a:solidFill>
-                  <a:srgbClr val="1E293B"/>
-                </a:solidFill>
-                <a:latin typeface="Calibri" pitchFamily="34" charset="0"/>
-                <a:ea typeface="Calibri" pitchFamily="34" charset="-122"/>
-                <a:cs typeface="Calibri" pitchFamily="34" charset="-120"/>
-              </a:rPr>
-              <a:t>Redirected to your IdP to sign in</a:t>
-            </a:r>
-            <a:endParaRPr lang="en-US" sz="1250" dirty="0"/>
-          </a:p>
-          <a:p>
-            <a:pPr marL="342900" indent="-342900">
-              <a:lnSpc>
-                <a:spcPts val="1800"/>
-              </a:lnSpc>
-              <a:spcAft>
-                <a:spcPts val="800"/>
-              </a:spcAft>
-              <a:buSzPct val="100000"/>
-              <a:buChar char="•"/>
-            </a:pPr>
-            <a:r>
-              <a:rPr lang="en-US" sz="1250" dirty="0">
-                <a:solidFill>
-                  <a:srgbClr val="1E293B"/>
-                </a:solidFill>
-                <a:latin typeface="Calibri" pitchFamily="34" charset="0"/>
-                <a:ea typeface="Calibri" pitchFamily="34" charset="-122"/>
-                <a:cs typeface="Calibri" pitchFamily="34" charset="-120"/>
-              </a:rPr>
-              <a:t>Formerly called "enterprise logins"</a:t>
-            </a:r>
-            <a:endParaRPr lang="en-US" sz="1250" dirty="0"/>
-          </a:p>
-          <a:p>
-            <a:pPr marL="342900" indent="-342900">
-              <a:lnSpc>
-                <a:spcPts val="1800"/>
-              </a:lnSpc>
-              <a:spcAft>
-                <a:spcPts val="800"/>
-              </a:spcAft>
-              <a:buSzPct val="100000"/>
-              <a:buChar char="•"/>
-            </a:pPr>
-            <a:r>
-              <a:rPr lang="en-US" sz="1250" dirty="0">
-                <a:solidFill>
-                  <a:srgbClr val="1E293B"/>
-                </a:solidFill>
-                <a:latin typeface="Calibri" pitchFamily="34" charset="0"/>
-                <a:ea typeface="Calibri" pitchFamily="34" charset="-122"/>
-                <a:cs typeface="Calibri" pitchFamily="34" charset="-120"/>
-              </a:rPr>
-              <a:t>Username carries the org-key suffix: jsmith@ORG</a:t>
-            </a:r>
-            <a:endParaRPr lang="en-US" sz="1250" dirty="0"/>
-          </a:p>
-        </p:txBody>
-      </p:sp>
-      <p:sp>
-        <p:nvSpPr>
-          <p:cNvPr id="14" name="Shape 10"/>
-          <p:cNvSpPr/>
-          <p:nvPr/>
-        </p:nvSpPr>
-        <p:spPr>
-          <a:xfrm>
-            <a:off x="502920" y="5120640"/>
-            <a:ext cx="11201400" cy="960120"/>
-          </a:xfrm>
-          <a:prstGeom prst="roundRect">
-            <a:avLst>
-              <a:gd name="adj" fmla="val 7619"/>
-            </a:avLst>
           </a:prstGeom>
           <a:solidFill>
             <a:srgbClr val="0B2545"/>
@@ -10470,14 +11166,218 @@
       </p:sp>
       <p:sp>
         <p:nvSpPr>
-          <p:cNvPr id="15" name="Text 11"/>
-          <p:cNvSpPr/>
-          <p:nvPr/>
-        </p:nvSpPr>
-        <p:spPr>
-          <a:xfrm>
-            <a:off x="868680" y="5120640"/>
-            <a:ext cx="10515600" cy="960120"/>
+          <p:cNvPr id="12" name="Text 10"/>
+          <p:cNvSpPr/>
+          <p:nvPr/>
+        </p:nvSpPr>
+        <p:spPr>
+          <a:xfrm>
+            <a:off x="548640" y="3182112"/>
+            <a:ext cx="530352" cy="530352"/>
+          </a:xfrm>
+          <a:prstGeom prst="rect">
+            <a:avLst/>
+          </a:prstGeom>
+          <a:noFill/>
+          <a:ln/>
+        </p:spPr>
+        <p:txBody>
+          <a:bodyPr wrap="square" lIns="0" tIns="0" rIns="0" bIns="0" rtlCol="0" anchor="ctr"/>
+          <a:lstStyle/>
+          <a:p>
+            <a:pPr algn="ctr" indent="0" marL="0">
+              <a:buNone/>
+            </a:pPr>
+            <a:r>
+              <a:rPr lang="en-US" sz="1700" b="1" dirty="0">
+                <a:solidFill>
+                  <a:srgbClr val="FFFFFF"/>
+                </a:solidFill>
+                <a:latin typeface="Calibri" pitchFamily="34" charset="0"/>
+                <a:ea typeface="Calibri" pitchFamily="34" charset="-122"/>
+                <a:cs typeface="Calibri" pitchFamily="34" charset="-120"/>
+              </a:rPr>
+              <a:t>3</a:t>
+            </a:r>
+            <a:endParaRPr lang="en-US" sz="1700" dirty="0"/>
+          </a:p>
+        </p:txBody>
+      </p:sp>
+      <p:sp>
+        <p:nvSpPr>
+          <p:cNvPr id="13" name="Text 11"/>
+          <p:cNvSpPr/>
+          <p:nvPr/>
+        </p:nvSpPr>
+        <p:spPr>
+          <a:xfrm>
+            <a:off x="1280160" y="3163824"/>
+            <a:ext cx="10332720" cy="566928"/>
+          </a:xfrm>
+          <a:prstGeom prst="rect">
+            <a:avLst/>
+          </a:prstGeom>
+          <a:noFill/>
+          <a:ln/>
+        </p:spPr>
+        <p:txBody>
+          <a:bodyPr wrap="square" lIns="0" tIns="0" rIns="0" bIns="0" rtlCol="0" anchor="ctr"/>
+          <a:lstStyle/>
+          <a:p>
+            <a:pPr indent="0" marL="0">
+              <a:lnSpc>
+                <a:spcPts val="1600"/>
+              </a:lnSpc>
+              <a:buNone/>
+            </a:pPr>
+            <a:r>
+              <a:rPr lang="en-US" sz="1350" dirty="0">
+                <a:solidFill>
+                  <a:srgbClr val="1E293B"/>
+                </a:solidFill>
+                <a:latin typeface="Calibri" pitchFamily="34" charset="0"/>
+                <a:ea typeface="Calibri" pitchFamily="34" charset="-122"/>
+                <a:cs typeface="Calibri" pitchFamily="34" charset="-120"/>
+              </a:rPr>
+              <a:t>Copy the Client ID — no client secret needed (PKCE for single-page apps)</a:t>
+            </a:r>
+            <a:endParaRPr lang="en-US" sz="1350" dirty="0"/>
+          </a:p>
+        </p:txBody>
+      </p:sp>
+      <p:sp>
+        <p:nvSpPr>
+          <p:cNvPr id="14" name="Shape 12"/>
+          <p:cNvSpPr/>
+          <p:nvPr/>
+        </p:nvSpPr>
+        <p:spPr>
+          <a:xfrm>
+            <a:off x="548640" y="3895344"/>
+            <a:ext cx="530352" cy="530352"/>
+          </a:xfrm>
+          <a:prstGeom prst="ellipse">
+            <a:avLst/>
+          </a:prstGeom>
+          <a:solidFill>
+            <a:srgbClr val="1C7293"/>
+          </a:solidFill>
+          <a:ln/>
+        </p:spPr>
+      </p:sp>
+      <p:sp>
+        <p:nvSpPr>
+          <p:cNvPr id="15" name="Text 13"/>
+          <p:cNvSpPr/>
+          <p:nvPr/>
+        </p:nvSpPr>
+        <p:spPr>
+          <a:xfrm>
+            <a:off x="548640" y="3895344"/>
+            <a:ext cx="530352" cy="530352"/>
+          </a:xfrm>
+          <a:prstGeom prst="rect">
+            <a:avLst/>
+          </a:prstGeom>
+          <a:noFill/>
+          <a:ln/>
+        </p:spPr>
+        <p:txBody>
+          <a:bodyPr wrap="square" lIns="0" tIns="0" rIns="0" bIns="0" rtlCol="0" anchor="ctr"/>
+          <a:lstStyle/>
+          <a:p>
+            <a:pPr algn="ctr" indent="0" marL="0">
+              <a:buNone/>
+            </a:pPr>
+            <a:r>
+              <a:rPr lang="en-US" sz="1700" b="1" dirty="0">
+                <a:solidFill>
+                  <a:srgbClr val="FFFFFF"/>
+                </a:solidFill>
+                <a:latin typeface="Calibri" pitchFamily="34" charset="0"/>
+                <a:ea typeface="Calibri" pitchFamily="34" charset="-122"/>
+                <a:cs typeface="Calibri" pitchFamily="34" charset="-120"/>
+              </a:rPr>
+              <a:t>4</a:t>
+            </a:r>
+            <a:endParaRPr lang="en-US" sz="1700" dirty="0"/>
+          </a:p>
+        </p:txBody>
+      </p:sp>
+      <p:sp>
+        <p:nvSpPr>
+          <p:cNvPr id="16" name="Text 14"/>
+          <p:cNvSpPr/>
+          <p:nvPr/>
+        </p:nvSpPr>
+        <p:spPr>
+          <a:xfrm>
+            <a:off x="1280160" y="3877056"/>
+            <a:ext cx="10332720" cy="566928"/>
+          </a:xfrm>
+          <a:prstGeom prst="rect">
+            <a:avLst/>
+          </a:prstGeom>
+          <a:noFill/>
+          <a:ln/>
+        </p:spPr>
+        <p:txBody>
+          <a:bodyPr wrap="square" lIns="0" tIns="0" rIns="0" bIns="0" rtlCol="0" anchor="ctr"/>
+          <a:lstStyle/>
+          <a:p>
+            <a:pPr indent="0" marL="0">
+              <a:lnSpc>
+                <a:spcPts val="1600"/>
+              </a:lnSpc>
+              <a:buNone/>
+            </a:pPr>
+            <a:r>
+              <a:rPr lang="en-US" sz="1350" dirty="0">
+                <a:solidFill>
+                  <a:srgbClr val="1E293B"/>
+                </a:solidFill>
+                <a:latin typeface="Calibri" pitchFamily="34" charset="0"/>
+                <a:ea typeface="Calibri" pitchFamily="34" charset="-122"/>
+                <a:cs typeface="Calibri" pitchFamily="34" charset="-120"/>
+              </a:rPr>
+              <a:t>Set it in .env.local → VITE_ARCGIS_OAUTH_APP_ID</a:t>
+            </a:r>
+            <a:endParaRPr lang="en-US" sz="1350" dirty="0"/>
+          </a:p>
+        </p:txBody>
+      </p:sp>
+      <p:sp>
+        <p:nvSpPr>
+          <p:cNvPr id="17" name="Shape 15"/>
+          <p:cNvSpPr/>
+          <p:nvPr/>
+        </p:nvSpPr>
+        <p:spPr>
+          <a:xfrm>
+            <a:off x="502920" y="4800600"/>
+            <a:ext cx="11201400" cy="914400"/>
+          </a:xfrm>
+          <a:prstGeom prst="roundRect">
+            <a:avLst>
+              <a:gd name="adj" fmla="val 8000"/>
+            </a:avLst>
+          </a:prstGeom>
+          <a:solidFill>
+            <a:srgbClr val="0B2545"/>
+          </a:solidFill>
+          <a:ln/>
+        </p:spPr>
+      </p:sp>
+      <p:sp>
+        <p:nvSpPr>
+          <p:cNvPr id="18" name="Text 16"/>
+          <p:cNvSpPr/>
+          <p:nvPr/>
+        </p:nvSpPr>
+        <p:spPr>
+          <a:xfrm>
+            <a:off x="868680" y="4800600"/>
+            <a:ext cx="10515600" cy="914400"/>
           </a:xfrm>
           <a:prstGeom prst="rect">
             <a:avLst/>
@@ -10496,7 +11396,7 @@
               <a:buNone/>
             </a:pPr>
             <a:r>
-              <a:rPr lang="en-US" sz="1300" b="1" dirty="0">
+              <a:rPr lang="en-US" sz="1350" b="1" dirty="0">
                 <a:solidFill>
                   <a:srgbClr val="E8A33D"/>
                 </a:solidFill>
@@ -10504,7 +11404,7 @@
                 <a:ea typeface="Calibri" pitchFamily="34" charset="-122"/>
                 <a:cs typeface="Calibri" pitchFamily="34" charset="-120"/>
               </a:rPr>
-              <a:t>The only lever is VITE_PORTAL_URL:  </a:t>
+              <a:t>Requires a Creator user type or higher.  </a:t>
             </a:r>
             <a:pPr indent="0" marL="0">
               <a:lnSpc>
@@ -10513,7 +11413,7 @@
               <a:buNone/>
             </a:pPr>
             <a:r>
-              <a:rPr lang="en-US" sz="1300" dirty="0">
+              <a:rPr lang="en-US" sz="1350" dirty="0">
                 <a:solidFill>
                   <a:srgbClr val="C9D6E5"/>
                 </a:solidFill>
@@ -10521,15 +11421,15 @@
                 <a:ea typeface="Calibri" pitchFamily="34" charset="-122"/>
                 <a:cs typeface="Calibri" pitchFamily="34" charset="-120"/>
               </a:rPr>
-              <a:t>www.arcgis.com (generic sign-in)  vs  https://&lt;org-key&gt;.maps.arcgis.com (targets your org → routes SAML members to your IdP).</a:t>
-            </a:r>
-            <a:endParaRPr lang="en-US" sz="1300" dirty="0"/>
-          </a:p>
-        </p:txBody>
-      </p:sp>
-      <p:sp>
-        <p:nvSpPr>
-          <p:cNvPr id="16" name="Text 12"/>
+              <a:t>Use USER authentication, not app auth — the assistant's AI calls are gated on the signed-in user.</a:t>
+            </a:r>
+            <a:endParaRPr lang="en-US" sz="1350" dirty="0"/>
+          </a:p>
+        </p:txBody>
+      </p:sp>
+      <p:sp>
+        <p:nvSpPr>
+          <p:cNvPr id="19" name="Text 17"/>
           <p:cNvSpPr/>
           <p:nvPr/>
         </p:nvSpPr>
@@ -10568,7 +11468,7 @@
       </p:sp>
       <p:sp>
         <p:nvSpPr>
-          <p:cNvPr id="17" name="Text 13"/>
+          <p:cNvPr id="20" name="Text 18"/>
           <p:cNvSpPr/>
           <p:nvPr/>
         </p:nvSpPr>
@@ -10670,7 +11570,7 @@
                 <a:ea typeface="Bookman Old Style" pitchFamily="34" charset="-122"/>
                 <a:cs typeface="Bookman Old Style" pitchFamily="34" charset="-120"/>
               </a:rPr>
-              <a:t>Two ways to ship it: code vs no-code</a:t>
+              <a:t>Connecting users: SAML vs built-in</a:t>
             </a:r>
             <a:endParaRPr lang="en-US" sz="3000" dirty="0"/>
           </a:p>
@@ -10709,7 +11609,7 @@
                 <a:ea typeface="Calibri" pitchFamily="34" charset="-122"/>
                 <a:cs typeface="Calibri" pitchFamily="34" charset="-120"/>
               </a:rPr>
-              <a:t>Same prepared web map, two front ends — the no-code path is for GIS users without developer skills.</a:t>
+              <a:t>Both use the same OAuth 2.0 user-auth flow and the same app code — the only lever is the portal URL.</a:t>
             </a:r>
             <a:endParaRPr lang="en-US" sz="1400" dirty="0"/>
           </a:p>
@@ -10724,15 +11624,15 @@
         <p:spPr>
           <a:xfrm>
             <a:off x="502920" y="1783080"/>
-            <a:ext cx="5486400" cy="2926080"/>
+            <a:ext cx="5486400" cy="3108960"/>
           </a:xfrm>
           <a:prstGeom prst="roundRect">
             <a:avLst>
-              <a:gd name="adj" fmla="val 3125"/>
+              <a:gd name="adj" fmla="val 2941"/>
             </a:avLst>
           </a:prstGeom>
           <a:solidFill>
-            <a:srgbClr val="0B2545"/>
+            <a:srgbClr val="F4F7FA"/>
           </a:solidFill>
           <a:ln/>
           <a:effectLst>
@@ -10759,7 +11659,7 @@
             <a:avLst/>
           </a:prstGeom>
           <a:solidFill>
-            <a:srgbClr val="E8A33D"/>
+            <a:srgbClr val="1C7293"/>
           </a:solidFill>
           <a:ln/>
         </p:spPr>
@@ -10813,17 +11713,17 @@
               <a:buNone/>
             </a:pPr>
             <a:r>
-              <a:rPr lang="en-US" sz="1500" b="1" dirty="0">
-                <a:solidFill>
-                  <a:srgbClr val="FFFFFF"/>
-                </a:solidFill>
-                <a:latin typeface="Calibri" pitchFamily="34" charset="0"/>
-                <a:ea typeface="Calibri" pitchFamily="34" charset="-122"/>
-                <a:cs typeface="Calibri" pitchFamily="34" charset="-120"/>
-              </a:rPr>
-              <a:t>Code — JavaScript SDK</a:t>
-            </a:r>
-            <a:endParaRPr lang="en-US" sz="1500" dirty="0"/>
+              <a:rPr lang="en-US" sz="1600" b="1" dirty="0">
+                <a:solidFill>
+                  <a:srgbClr val="0B2545"/>
+                </a:solidFill>
+                <a:latin typeface="Calibri" pitchFamily="34" charset="0"/>
+                <a:ea typeface="Calibri" pitchFamily="34" charset="-122"/>
+                <a:cs typeface="Calibri" pitchFamily="34" charset="-120"/>
+              </a:rPr>
+              <a:t>Built-in account</a:t>
+            </a:r>
+            <a:endParaRPr lang="en-US" sz="1600" dirty="0"/>
           </a:p>
         </p:txBody>
       </p:sp>
@@ -10835,8 +11735,8 @@
         </p:nvSpPr>
         <p:spPr>
           <a:xfrm>
-            <a:off x="868680" y="3017520"/>
-            <a:ext cx="4754880" cy="1554480"/>
+            <a:off x="868680" y="2971800"/>
+            <a:ext cx="4800600" cy="1828800"/>
           </a:xfrm>
           <a:prstGeom prst="rect">
             <a:avLst/>
@@ -10850,7 +11750,7 @@
           <a:p>
             <a:pPr marL="342900" indent="-342900">
               <a:lnSpc>
-                <a:spcPts val="2000"/>
+                <a:spcPts val="1800"/>
               </a:lnSpc>
               <a:spcAft>
                 <a:spcPts val="800"/>
@@ -10859,22 +11759,22 @@
               <a:buChar char="•"/>
             </a:pPr>
             <a:r>
-              <a:rPr lang="en-US" sz="1300" dirty="0">
-                <a:solidFill>
-                  <a:srgbClr val="C9D6E5"/>
-                </a:solidFill>
-                <a:latin typeface="Calibri" pitchFamily="34" charset="0"/>
-                <a:ea typeface="Calibri" pitchFamily="34" charset="-122"/>
-                <a:cs typeface="Calibri" pitchFamily="34" charset="-120"/>
-              </a:rPr>
-              <a:t>This repo: Vite + React + TypeScript</a:t>
-            </a:r>
-            <a:endParaRPr lang="en-US" sz="1300" dirty="0"/>
+              <a:rPr lang="en-US" sz="1250" dirty="0">
+                <a:solidFill>
+                  <a:srgbClr val="1E293B"/>
+                </a:solidFill>
+                <a:latin typeface="Calibri" pitchFamily="34" charset="0"/>
+                <a:ea typeface="Calibri" pitchFamily="34" charset="-122"/>
+                <a:cs typeface="Calibri" pitchFamily="34" charset="-120"/>
+              </a:rPr>
+              <a:t>Credentials live in ArcGIS Online</a:t>
+            </a:r>
+            <a:endParaRPr lang="en-US" sz="1250" dirty="0"/>
           </a:p>
           <a:p>
             <a:pPr marL="342900" indent="-342900">
               <a:lnSpc>
-                <a:spcPts val="2000"/>
+                <a:spcPts val="1800"/>
               </a:lnSpc>
               <a:spcAft>
                 <a:spcPts val="800"/>
@@ -10883,22 +11783,22 @@
               <a:buChar char="•"/>
             </a:pPr>
             <a:r>
-              <a:rPr lang="en-US" sz="1300" dirty="0">
-                <a:solidFill>
-                  <a:srgbClr val="C9D6E5"/>
-                </a:solidFill>
-                <a:latin typeface="Calibri" pitchFamily="34" charset="0"/>
-                <a:ea typeface="Calibri" pitchFamily="34" charset="-122"/>
-                <a:cs typeface="Calibri" pitchFamily="34" charset="-120"/>
-              </a:rPr>
-              <a:t>Custom UI, OAuth, your branding</a:t>
-            </a:r>
-            <a:endParaRPr lang="en-US" sz="1300" dirty="0"/>
+              <a:rPr lang="en-US" sz="1250" dirty="0">
+                <a:solidFill>
+                  <a:srgbClr val="1E293B"/>
+                </a:solidFill>
+                <a:latin typeface="Calibri" pitchFamily="34" charset="0"/>
+                <a:ea typeface="Calibri" pitchFamily="34" charset="-122"/>
+                <a:cs typeface="Calibri" pitchFamily="34" charset="-120"/>
+              </a:rPr>
+              <a:t>Signs in directly on the ArcGIS sign-in page</a:t>
+            </a:r>
+            <a:endParaRPr lang="en-US" sz="1250" dirty="0"/>
           </a:p>
           <a:p>
             <a:pPr marL="342900" indent="-342900">
               <a:lnSpc>
-                <a:spcPts val="2000"/>
+                <a:spcPts val="1800"/>
               </a:lnSpc>
               <a:spcAft>
                 <a:spcPts val="800"/>
@@ -10907,17 +11807,41 @@
               <a:buChar char="•"/>
             </a:pPr>
             <a:r>
-              <a:rPr lang="en-US" sz="1300" dirty="0">
-                <a:solidFill>
-                  <a:srgbClr val="C9D6E5"/>
-                </a:solidFill>
-                <a:latin typeface="Calibri" pitchFamily="34" charset="0"/>
-                <a:ea typeface="Calibri" pitchFamily="34" charset="-122"/>
-                <a:cs typeface="Calibri" pitchFamily="34" charset="-120"/>
-              </a:rPr>
-              <a:t>Optional Phase 2 custom agent</a:t>
-            </a:r>
-            <a:endParaRPr lang="en-US" sz="1300" dirty="0"/>
+              <a:rPr lang="en-US" sz="1250" dirty="0">
+                <a:solidFill>
+                  <a:srgbClr val="1E293B"/>
+                </a:solidFill>
+                <a:latin typeface="Calibri" pitchFamily="34" charset="0"/>
+                <a:ea typeface="Calibri" pitchFamily="34" charset="-122"/>
+                <a:cs typeface="Calibri" pitchFamily="34" charset="-120"/>
+              </a:rPr>
+              <a:t>Org password policy applies</a:t>
+            </a:r>
+            <a:endParaRPr lang="en-US" sz="1250" dirty="0"/>
+          </a:p>
+          <a:p>
+            <a:pPr marL="342900" indent="-342900">
+              <a:lnSpc>
+                <a:spcPts val="1800"/>
+              </a:lnSpc>
+              <a:spcAft>
+                <a:spcPts val="800"/>
+              </a:spcAft>
+              <a:buSzPct val="100000"/>
+              <a:buChar char="•"/>
+            </a:pPr>
+            <a:r>
+              <a:rPr lang="en-US" sz="1250" dirty="0">
+                <a:solidFill>
+                  <a:srgbClr val="1E293B"/>
+                </a:solidFill>
+                <a:latin typeface="Calibri" pitchFamily="34" charset="0"/>
+                <a:ea typeface="Calibri" pitchFamily="34" charset="-122"/>
+                <a:cs typeface="Calibri" pitchFamily="34" charset="-120"/>
+              </a:rPr>
+              <a:t>Username, e.g. jsmith</a:t>
+            </a:r>
+            <a:endParaRPr lang="en-US" sz="1250" dirty="0"/>
           </a:p>
         </p:txBody>
       </p:sp>
@@ -10930,11 +11854,11 @@
         <p:spPr>
           <a:xfrm>
             <a:off x="6217920" y="1783080"/>
-            <a:ext cx="5486400" cy="2926080"/>
+            <a:ext cx="5486400" cy="3108960"/>
           </a:xfrm>
           <a:prstGeom prst="roundRect">
             <a:avLst>
-              <a:gd name="adj" fmla="val 3125"/>
+              <a:gd name="adj" fmla="val 2941"/>
             </a:avLst>
           </a:prstGeom>
           <a:solidFill>
@@ -10970,7 +11894,7 @@
             <a:avLst/>
           </a:prstGeom>
           <a:solidFill>
-            <a:srgbClr val="1C7293"/>
+            <a:srgbClr val="E8A33D"/>
           </a:solidFill>
           <a:ln/>
         </p:spPr>
@@ -11007,8 +11931,8 @@
         </p:nvSpPr>
         <p:spPr>
           <a:xfrm>
-            <a:off x="7498080" y="2057400"/>
-            <a:ext cx="4069080" cy="822960"/>
+            <a:off x="7498080" y="2103120"/>
+            <a:ext cx="4069080" cy="731520"/>
           </a:xfrm>
           <a:prstGeom prst="rect">
             <a:avLst/>
@@ -11024,7 +11948,7 @@
               <a:buNone/>
             </a:pPr>
             <a:r>
-              <a:rPr lang="en-US" sz="1500" b="1" dirty="0">
+              <a:rPr lang="en-US" sz="1600" b="1" dirty="0">
                 <a:solidFill>
                   <a:srgbClr val="0B2545"/>
                 </a:solidFill>
@@ -11032,9 +11956,9 @@
                 <a:ea typeface="Calibri" pitchFamily="34" charset="-122"/>
                 <a:cs typeface="Calibri" pitchFamily="34" charset="-120"/>
               </a:rPr>
-              <a:t>No-code — Instant Apps Data Explorer</a:t>
-            </a:r>
-            <a:endParaRPr lang="en-US" sz="1500" dirty="0"/>
+              <a:t>SAML / org-specific login</a:t>
+            </a:r>
+            <a:endParaRPr lang="en-US" sz="1600" dirty="0"/>
           </a:p>
         </p:txBody>
       </p:sp>
@@ -11046,8 +11970,8 @@
         </p:nvSpPr>
         <p:spPr>
           <a:xfrm>
-            <a:off x="6583680" y="3017520"/>
-            <a:ext cx="4754880" cy="1554480"/>
+            <a:off x="6583680" y="2971800"/>
+            <a:ext cx="4800600" cy="1828800"/>
           </a:xfrm>
           <a:prstGeom prst="rect">
             <a:avLst/>
@@ -11061,7 +11985,7 @@
           <a:p>
             <a:pPr marL="342900" indent="-342900">
               <a:lnSpc>
-                <a:spcPts val="2000"/>
+                <a:spcPts val="1800"/>
               </a:lnSpc>
               <a:spcAft>
                 <a:spcPts val="800"/>
@@ -11070,7 +11994,7 @@
               <a:buChar char="•"/>
             </a:pPr>
             <a:r>
-              <a:rPr lang="en-US" sz="1300" dirty="0">
+              <a:rPr lang="en-US" sz="1250" dirty="0">
                 <a:solidFill>
                   <a:srgbClr val="1E293B"/>
                 </a:solidFill>
@@ -11078,14 +12002,14 @@
                 <a:ea typeface="Calibri" pitchFamily="34" charset="-122"/>
                 <a:cs typeface="Calibri" pitchFamily="34" charset="-120"/>
               </a:rPr>
-              <a:t>Preset template, assistant wired in</a:t>
-            </a:r>
-            <a:endParaRPr lang="en-US" sz="1300" dirty="0"/>
+              <a:t>Credentials live in your identity provider (IdP)</a:t>
+            </a:r>
+            <a:endParaRPr lang="en-US" sz="1250" dirty="0"/>
           </a:p>
           <a:p>
             <a:pPr marL="342900" indent="-342900">
               <a:lnSpc>
-                <a:spcPts val="2000"/>
+                <a:spcPts val="1800"/>
               </a:lnSpc>
               <a:spcAft>
                 <a:spcPts val="800"/>
@@ -11094,7 +12018,7 @@
               <a:buChar char="•"/>
             </a:pPr>
             <a:r>
-              <a:rPr lang="en-US" sz="1300" dirty="0">
+              <a:rPr lang="en-US" sz="1250" dirty="0">
                 <a:solidFill>
                   <a:srgbClr val="1E293B"/>
                 </a:solidFill>
@@ -11102,14 +12026,14 @@
                 <a:ea typeface="Calibri" pitchFamily="34" charset="-122"/>
                 <a:cs typeface="Calibri" pitchFamily="34" charset="-120"/>
               </a:rPr>
-              <a:t>Configure welcome message + sample questions</a:t>
-            </a:r>
-            <a:endParaRPr lang="en-US" sz="1300" dirty="0"/>
+              <a:t>Redirected to your IdP to sign in</a:t>
+            </a:r>
+            <a:endParaRPr lang="en-US" sz="1250" dirty="0"/>
           </a:p>
           <a:p>
             <a:pPr marL="342900" indent="-342900">
               <a:lnSpc>
-                <a:spcPts val="2000"/>
+                <a:spcPts val="1800"/>
               </a:lnSpc>
               <a:spcAft>
                 <a:spcPts val="800"/>
@@ -11118,7 +12042,7 @@
               <a:buChar char="•"/>
             </a:pPr>
             <a:r>
-              <a:rPr lang="en-US" sz="1300" dirty="0">
+              <a:rPr lang="en-US" sz="1250" dirty="0">
                 <a:solidFill>
                   <a:srgbClr val="1E293B"/>
                 </a:solidFill>
@@ -11126,9 +12050,33 @@
                 <a:ea typeface="Calibri" pitchFamily="34" charset="-122"/>
                 <a:cs typeface="Calibri" pitchFamily="34" charset="-120"/>
               </a:rPr>
-              <a:t>Publish &amp; share from ArcGIS Online</a:t>
-            </a:r>
-            <a:endParaRPr lang="en-US" sz="1300" dirty="0"/>
+              <a:t>Formerly called "enterprise logins"</a:t>
+            </a:r>
+            <a:endParaRPr lang="en-US" sz="1250" dirty="0"/>
+          </a:p>
+          <a:p>
+            <a:pPr marL="342900" indent="-342900">
+              <a:lnSpc>
+                <a:spcPts val="1800"/>
+              </a:lnSpc>
+              <a:spcAft>
+                <a:spcPts val="800"/>
+              </a:spcAft>
+              <a:buSzPct val="100000"/>
+              <a:buChar char="•"/>
+            </a:pPr>
+            <a:r>
+              <a:rPr lang="en-US" sz="1250" dirty="0">
+                <a:solidFill>
+                  <a:srgbClr val="1E293B"/>
+                </a:solidFill>
+                <a:latin typeface="Calibri" pitchFamily="34" charset="0"/>
+                <a:ea typeface="Calibri" pitchFamily="34" charset="-122"/>
+                <a:cs typeface="Calibri" pitchFamily="34" charset="-120"/>
+              </a:rPr>
+              <a:t>Username carries the org-key suffix: jsmith@ORG</a:t>
+            </a:r>
+            <a:endParaRPr lang="en-US" sz="1250" dirty="0"/>
           </a:p>
         </p:txBody>
       </p:sp>
@@ -11140,12 +12088,12 @@
         </p:nvSpPr>
         <p:spPr>
           <a:xfrm>
-            <a:off x="502920" y="4937760"/>
-            <a:ext cx="11201400" cy="914400"/>
+            <a:off x="502920" y="5120640"/>
+            <a:ext cx="11201400" cy="960120"/>
           </a:xfrm>
           <a:prstGeom prst="roundRect">
             <a:avLst>
-              <a:gd name="adj" fmla="val 8000"/>
+              <a:gd name="adj" fmla="val 7619"/>
             </a:avLst>
           </a:prstGeom>
           <a:solidFill>
@@ -11162,8 +12110,8 @@
         </p:nvSpPr>
         <p:spPr>
           <a:xfrm>
-            <a:off x="868680" y="4937760"/>
-            <a:ext cx="10515600" cy="914400"/>
+            <a:off x="868680" y="5120640"/>
+            <a:ext cx="10515600" cy="960120"/>
           </a:xfrm>
           <a:prstGeom prst="rect">
             <a:avLst/>
@@ -11182,7 +12130,7 @@
               <a:buNone/>
             </a:pPr>
             <a:r>
-              <a:rPr lang="en-US" sz="1350" b="1" dirty="0">
+              <a:rPr lang="en-US" sz="1300" b="1" dirty="0">
                 <a:solidFill>
                   <a:srgbClr val="E8A33D"/>
                 </a:solidFill>
@@ -11190,7 +12138,7 @@
                 <a:ea typeface="Calibri" pitchFamily="34" charset="-122"/>
                 <a:cs typeface="Calibri" pitchFamily="34" charset="-120"/>
               </a:rPr>
-              <a:t>Both build on the same Activity #1 prep:  </a:t>
+              <a:t>The only lever is VITE_PORTAL_URL:  </a:t>
             </a:r>
             <a:pPr indent="0" marL="0">
               <a:lnSpc>
@@ -11199,7 +12147,7 @@
               <a:buNone/>
             </a:pPr>
             <a:r>
-              <a:rPr lang="en-US" sz="1350" dirty="0">
+              <a:rPr lang="en-US" sz="1300" dirty="0">
                 <a:solidFill>
                   <a:srgbClr val="C9D6E5"/>
                 </a:solidFill>
@@ -11207,9 +12155,9 @@
                 <a:ea typeface="Calibri" pitchFamily="34" charset="-122"/>
                 <a:cs typeface="Calibri" pitchFamily="34" charset="-120"/>
               </a:rPr>
-              <a:t>field metadata → vector embeddings. Going no-code does not skip the GIS work.</a:t>
-            </a:r>
-            <a:endParaRPr lang="en-US" sz="1350" dirty="0"/>
+              <a:t>www.arcgis.com (generic sign-in)  vs  https://&lt;org-key&gt;.maps.arcgis.com (targets your org → routes SAML members to your IdP).</a:t>
+            </a:r>
+            <a:endParaRPr lang="en-US" sz="1300" dirty="0"/>
           </a:p>
         </p:txBody>
       </p:sp>
@@ -11332,7 +12280,7 @@
         <p:spPr>
           <a:xfrm>
             <a:off x="502920" y="411480"/>
-            <a:ext cx="8686800" cy="640080"/>
+            <a:ext cx="11155680" cy="640080"/>
           </a:xfrm>
           <a:prstGeom prst="rect">
             <a:avLst/>
@@ -11356,7 +12304,7 @@
                 <a:ea typeface="Bookman Old Style" pitchFamily="34" charset="-122"/>
                 <a:cs typeface="Bookman Old Style" pitchFamily="34" charset="-120"/>
               </a:rPr>
-              <a:t>Set up Data Explorer (no code)</a:t>
+              <a:t>Two ways to ship it: code vs no-code</a:t>
             </a:r>
             <a:endParaRPr lang="en-US" sz="3000" dirty="0"/>
           </a:p>
@@ -11370,47 +12318,8 @@
         </p:nvSpPr>
         <p:spPr>
           <a:xfrm>
-            <a:off x="8686800" y="566928"/>
-            <a:ext cx="3017520" cy="365760"/>
-          </a:xfrm>
-          <a:prstGeom prst="rect">
-            <a:avLst/>
-          </a:prstGeom>
-          <a:noFill/>
-          <a:ln/>
-        </p:spPr>
-        <p:txBody>
-          <a:bodyPr wrap="square" lIns="0" tIns="0" rIns="0" bIns="0" rtlCol="0" anchor="ctr"/>
-          <a:lstStyle/>
-          <a:p>
-            <a:pPr algn="r" indent="0" marL="0">
-              <a:buNone/>
-            </a:pPr>
-            <a:r>
-              <a:rPr lang="en-US" sz="1200" i="1" dirty="0">
-                <a:solidFill>
-                  <a:srgbClr val="1C7293"/>
-                </a:solidFill>
-                <a:latin typeface="Calibri" pitchFamily="34" charset="0"/>
-                <a:ea typeface="Calibri" pitchFamily="34" charset="-122"/>
-                <a:cs typeface="Calibri" pitchFamily="34" charset="-120"/>
-              </a:rPr>
-              <a:t>doc.arcgis.com → Instant Apps</a:t>
-            </a:r>
-            <a:endParaRPr lang="en-US" sz="1200" dirty="0"/>
-          </a:p>
-        </p:txBody>
-      </p:sp>
-      <p:sp>
-        <p:nvSpPr>
-          <p:cNvPr id="4" name="Text 2"/>
-          <p:cNvSpPr/>
-          <p:nvPr/>
-        </p:nvSpPr>
-        <p:spPr>
-          <a:xfrm>
             <a:off x="502920" y="1078992"/>
-            <a:ext cx="10972800" cy="457200"/>
+            <a:ext cx="10972800" cy="548640"/>
           </a:xfrm>
           <a:prstGeom prst="rect">
             <a:avLst/>
@@ -11434,7 +12343,7 @@
                 <a:ea typeface="Calibri" pitchFamily="34" charset="-122"/>
                 <a:cs typeface="Calibri" pitchFamily="34" charset="-120"/>
               </a:rPr>
-              <a:t>From a prepared web map to a shared app — no developer tools.</a:t>
+              <a:t>Same prepared web map, two front ends — the no-code path is for GIS users without developer skills.</a:t>
             </a:r>
             <a:endParaRPr lang="en-US" sz="1400" dirty="0"/>
           </a:p>
@@ -11442,50 +12351,103 @@
       </p:sp>
       <p:sp>
         <p:nvSpPr>
-          <p:cNvPr id="5" name="Shape 3"/>
-          <p:cNvSpPr/>
-          <p:nvPr/>
-        </p:nvSpPr>
-        <p:spPr>
-          <a:xfrm>
-            <a:off x="548640" y="1618488"/>
-            <a:ext cx="530352" cy="530352"/>
-          </a:xfrm>
-          <a:prstGeom prst="ellipse">
-            <a:avLst/>
+          <p:cNvPr id="4" name="Shape 2"/>
+          <p:cNvSpPr/>
+          <p:nvPr/>
+        </p:nvSpPr>
+        <p:spPr>
+          <a:xfrm>
+            <a:off x="502920" y="1783080"/>
+            <a:ext cx="5486400" cy="2926080"/>
+          </a:xfrm>
+          <a:prstGeom prst="roundRect">
+            <a:avLst>
+              <a:gd name="adj" fmla="val 3125"/>
+            </a:avLst>
           </a:prstGeom>
           <a:solidFill>
             <a:srgbClr val="0B2545"/>
           </a:solidFill>
           <a:ln/>
-        </p:spPr>
-      </p:sp>
-      <p:sp>
-        <p:nvSpPr>
-          <p:cNvPr id="6" name="Text 4"/>
-          <p:cNvSpPr/>
-          <p:nvPr/>
-        </p:nvSpPr>
-        <p:spPr>
-          <a:xfrm>
-            <a:off x="548640" y="1618488"/>
-            <a:ext cx="530352" cy="530352"/>
-          </a:xfrm>
-          <a:prstGeom prst="rect">
-            <a:avLst/>
-          </a:prstGeom>
-          <a:noFill/>
-          <a:ln/>
-        </p:spPr>
-        <p:txBody>
-          <a:bodyPr wrap="square" lIns="0" tIns="0" rIns="0" bIns="0" rtlCol="0" anchor="ctr"/>
-          <a:lstStyle/>
-          <a:p>
-            <a:pPr algn="ctr" indent="0" marL="0">
-              <a:buNone/>
-            </a:pPr>
-            <a:r>
-              <a:rPr lang="en-US" sz="1700" b="1" dirty="0">
+          <a:effectLst>
+            <a:outerShdw sx="100000" sy="100000" kx="0" ky="0" algn="bl" rotWithShape="0" blurRad="88900" dist="38100" dir="5400000">
+              <a:srgbClr val="000000">
+                <a:alpha val="12000"/>
+              </a:srgbClr>
+            </a:outerShdw>
+          </a:effectLst>
+        </p:spPr>
+      </p:sp>
+      <p:sp>
+        <p:nvSpPr>
+          <p:cNvPr id="5" name="Shape 3"/>
+          <p:cNvSpPr/>
+          <p:nvPr/>
+        </p:nvSpPr>
+        <p:spPr>
+          <a:xfrm>
+            <a:off x="868680" y="2057400"/>
+            <a:ext cx="822960" cy="822960"/>
+          </a:xfrm>
+          <a:prstGeom prst="ellipse">
+            <a:avLst/>
+          </a:prstGeom>
+          <a:solidFill>
+            <a:srgbClr val="E8A33D"/>
+          </a:solidFill>
+          <a:ln/>
+        </p:spPr>
+      </p:sp>
+      <p:pic>
+        <p:nvPicPr>
+          <p:cNvPr id="6" name="Image 0" descr="preencoded.png">    </p:cNvPr>
+          <p:cNvPicPr>
+            <a:picLocks noChangeAspect="1"/>
+          </p:cNvPicPr>
+          <p:nvPr/>
+        </p:nvPicPr>
+        <p:blipFill>
+          <a:blip r:embed="rId1"/>
+          <a:stretch>
+            <a:fillRect/>
+          </a:stretch>
+        </p:blipFill>
+        <p:spPr>
+          <a:xfrm>
+            <a:off x="1082650" y="2271370"/>
+            <a:ext cx="395021" cy="395021"/>
+          </a:xfrm>
+          <a:prstGeom prst="rect">
+            <a:avLst/>
+          </a:prstGeom>
+        </p:spPr>
+      </p:pic>
+      <p:sp>
+        <p:nvSpPr>
+          <p:cNvPr id="7" name="Text 4"/>
+          <p:cNvSpPr/>
+          <p:nvPr/>
+        </p:nvSpPr>
+        <p:spPr>
+          <a:xfrm>
+            <a:off x="1783080" y="2103120"/>
+            <a:ext cx="4023360" cy="731520"/>
+          </a:xfrm>
+          <a:prstGeom prst="rect">
+            <a:avLst/>
+          </a:prstGeom>
+          <a:noFill/>
+          <a:ln/>
+        </p:spPr>
+        <p:txBody>
+          <a:bodyPr wrap="square" lIns="0" tIns="0" rIns="0" bIns="0" rtlCol="0" anchor="ctr"/>
+          <a:lstStyle/>
+          <a:p>
+            <a:pPr indent="0" marL="0">
+              <a:buNone/>
+            </a:pPr>
+            <a:r>
+              <a:rPr lang="en-US" sz="1500" b="1" dirty="0">
                 <a:solidFill>
                   <a:srgbClr val="FFFFFF"/>
                 </a:solidFill>
@@ -11493,64 +12455,150 @@
                 <a:ea typeface="Calibri" pitchFamily="34" charset="-122"/>
                 <a:cs typeface="Calibri" pitchFamily="34" charset="-120"/>
               </a:rPr>
-              <a:t>1</a:t>
-            </a:r>
-            <a:endParaRPr lang="en-US" sz="1700" dirty="0"/>
-          </a:p>
-        </p:txBody>
-      </p:sp>
-      <p:sp>
-        <p:nvSpPr>
-          <p:cNvPr id="7" name="Text 5"/>
-          <p:cNvSpPr/>
-          <p:nvPr/>
-        </p:nvSpPr>
-        <p:spPr>
-          <a:xfrm>
-            <a:off x="1280160" y="1600200"/>
-            <a:ext cx="10332720" cy="603504"/>
-          </a:xfrm>
-          <a:prstGeom prst="rect">
-            <a:avLst/>
-          </a:prstGeom>
-          <a:noFill/>
-          <a:ln/>
-        </p:spPr>
-        <p:txBody>
-          <a:bodyPr wrap="square" lIns="0" tIns="0" rIns="0" bIns="0" rtlCol="0" anchor="ctr"/>
-          <a:lstStyle/>
-          <a:p>
-            <a:pPr indent="0" marL="0">
+              <a:t>Code — JavaScript SDK</a:t>
+            </a:r>
+            <a:endParaRPr lang="en-US" sz="1500" dirty="0"/>
+          </a:p>
+        </p:txBody>
+      </p:sp>
+      <p:sp>
+        <p:nvSpPr>
+          <p:cNvPr id="8" name="Text 5"/>
+          <p:cNvSpPr/>
+          <p:nvPr/>
+        </p:nvSpPr>
+        <p:spPr>
+          <a:xfrm>
+            <a:off x="868680" y="3017520"/>
+            <a:ext cx="4754880" cy="1554480"/>
+          </a:xfrm>
+          <a:prstGeom prst="rect">
+            <a:avLst/>
+          </a:prstGeom>
+          <a:noFill/>
+          <a:ln/>
+        </p:spPr>
+        <p:txBody>
+          <a:bodyPr wrap="square" lIns="0" tIns="0" rIns="0" bIns="0" rtlCol="0" anchor="ctr"/>
+          <a:lstStyle/>
+          <a:p>
+            <a:pPr marL="342900" indent="-342900">
               <a:lnSpc>
-                <a:spcPts val="1600"/>
+                <a:spcPts val="2000"/>
               </a:lnSpc>
-              <a:buNone/>
-            </a:pPr>
-            <a:r>
-              <a:rPr lang="en-US" sz="1400" dirty="0">
-                <a:solidFill>
-                  <a:srgbClr val="1E293B"/>
-                </a:solidFill>
-                <a:latin typeface="Calibri" pitchFamily="34" charset="0"/>
-                <a:ea typeface="Calibri" pitchFamily="34" charset="-122"/>
-                <a:cs typeface="Calibri" pitchFamily="34" charset="-120"/>
-              </a:rPr>
-              <a:t>Prep the web map: field metadata → generate embeddings (item Settings, or in the app config)</a:t>
-            </a:r>
-            <a:endParaRPr lang="en-US" sz="1400" dirty="0"/>
-          </a:p>
-        </p:txBody>
-      </p:sp>
-      <p:sp>
-        <p:nvSpPr>
-          <p:cNvPr id="8" name="Shape 6"/>
-          <p:cNvSpPr/>
-          <p:nvPr/>
-        </p:nvSpPr>
-        <p:spPr>
-          <a:xfrm>
-            <a:off x="548640" y="2368296"/>
-            <a:ext cx="530352" cy="530352"/>
+              <a:spcAft>
+                <a:spcPts val="800"/>
+              </a:spcAft>
+              <a:buSzPct val="100000"/>
+              <a:buChar char="•"/>
+            </a:pPr>
+            <a:r>
+              <a:rPr lang="en-US" sz="1300" dirty="0">
+                <a:solidFill>
+                  <a:srgbClr val="C9D6E5"/>
+                </a:solidFill>
+                <a:latin typeface="Calibri" pitchFamily="34" charset="0"/>
+                <a:ea typeface="Calibri" pitchFamily="34" charset="-122"/>
+                <a:cs typeface="Calibri" pitchFamily="34" charset="-120"/>
+              </a:rPr>
+              <a:t>This repo: Vite + React + TypeScript</a:t>
+            </a:r>
+            <a:endParaRPr lang="en-US" sz="1300" dirty="0"/>
+          </a:p>
+          <a:p>
+            <a:pPr marL="342900" indent="-342900">
+              <a:lnSpc>
+                <a:spcPts val="2000"/>
+              </a:lnSpc>
+              <a:spcAft>
+                <a:spcPts val="800"/>
+              </a:spcAft>
+              <a:buSzPct val="100000"/>
+              <a:buChar char="•"/>
+            </a:pPr>
+            <a:r>
+              <a:rPr lang="en-US" sz="1300" dirty="0">
+                <a:solidFill>
+                  <a:srgbClr val="C9D6E5"/>
+                </a:solidFill>
+                <a:latin typeface="Calibri" pitchFamily="34" charset="0"/>
+                <a:ea typeface="Calibri" pitchFamily="34" charset="-122"/>
+                <a:cs typeface="Calibri" pitchFamily="34" charset="-120"/>
+              </a:rPr>
+              <a:t>Custom UI, OAuth, your branding</a:t>
+            </a:r>
+            <a:endParaRPr lang="en-US" sz="1300" dirty="0"/>
+          </a:p>
+          <a:p>
+            <a:pPr marL="342900" indent="-342900">
+              <a:lnSpc>
+                <a:spcPts val="2000"/>
+              </a:lnSpc>
+              <a:spcAft>
+                <a:spcPts val="800"/>
+              </a:spcAft>
+              <a:buSzPct val="100000"/>
+              <a:buChar char="•"/>
+            </a:pPr>
+            <a:r>
+              <a:rPr lang="en-US" sz="1300" dirty="0">
+                <a:solidFill>
+                  <a:srgbClr val="C9D6E5"/>
+                </a:solidFill>
+                <a:latin typeface="Calibri" pitchFamily="34" charset="0"/>
+                <a:ea typeface="Calibri" pitchFamily="34" charset="-122"/>
+                <a:cs typeface="Calibri" pitchFamily="34" charset="-120"/>
+              </a:rPr>
+              <a:t>Optional Phase 2 custom agent</a:t>
+            </a:r>
+            <a:endParaRPr lang="en-US" sz="1300" dirty="0"/>
+          </a:p>
+        </p:txBody>
+      </p:sp>
+      <p:sp>
+        <p:nvSpPr>
+          <p:cNvPr id="9" name="Shape 6"/>
+          <p:cNvSpPr/>
+          <p:nvPr/>
+        </p:nvSpPr>
+        <p:spPr>
+          <a:xfrm>
+            <a:off x="6217920" y="1783080"/>
+            <a:ext cx="5486400" cy="2926080"/>
+          </a:xfrm>
+          <a:prstGeom prst="roundRect">
+            <a:avLst>
+              <a:gd name="adj" fmla="val 3125"/>
+            </a:avLst>
+          </a:prstGeom>
+          <a:solidFill>
+            <a:srgbClr val="F4F7FA"/>
+          </a:solidFill>
+          <a:ln w="12700">
+            <a:solidFill>
+              <a:srgbClr val="1C7293"/>
+            </a:solidFill>
+            <a:prstDash val="solid"/>
+          </a:ln>
+          <a:effectLst>
+            <a:outerShdw sx="100000" sy="100000" kx="0" ky="0" algn="bl" rotWithShape="0" blurRad="88900" dist="38100" dir="5400000">
+              <a:srgbClr val="000000">
+                <a:alpha val="12000"/>
+              </a:srgbClr>
+            </a:outerShdw>
+          </a:effectLst>
+        </p:spPr>
+      </p:sp>
+      <p:sp>
+        <p:nvSpPr>
+          <p:cNvPr id="10" name="Shape 7"/>
+          <p:cNvSpPr/>
+          <p:nvPr/>
+        </p:nvSpPr>
+        <p:spPr>
+          <a:xfrm>
+            <a:off x="6583680" y="2057400"/>
+            <a:ext cx="822960" cy="822960"/>
           </a:xfrm>
           <a:prstGeom prst="ellipse">
             <a:avLst/>
@@ -11561,55 +12609,40 @@
           <a:ln/>
         </p:spPr>
       </p:sp>
-      <p:sp>
-        <p:nvSpPr>
-          <p:cNvPr id="9" name="Text 7"/>
-          <p:cNvSpPr/>
-          <p:nvPr/>
-        </p:nvSpPr>
-        <p:spPr>
-          <a:xfrm>
-            <a:off x="548640" y="2368296"/>
-            <a:ext cx="530352" cy="530352"/>
-          </a:xfrm>
-          <a:prstGeom prst="rect">
-            <a:avLst/>
-          </a:prstGeom>
-          <a:noFill/>
-          <a:ln/>
-        </p:spPr>
-        <p:txBody>
-          <a:bodyPr wrap="square" lIns="0" tIns="0" rIns="0" bIns="0" rtlCol="0" anchor="ctr"/>
-          <a:lstStyle/>
-          <a:p>
-            <a:pPr algn="ctr" indent="0" marL="0">
-              <a:buNone/>
-            </a:pPr>
-            <a:r>
-              <a:rPr lang="en-US" sz="1700" b="1" dirty="0">
-                <a:solidFill>
-                  <a:srgbClr val="FFFFFF"/>
-                </a:solidFill>
-                <a:latin typeface="Calibri" pitchFamily="34" charset="0"/>
-                <a:ea typeface="Calibri" pitchFamily="34" charset="-122"/>
-                <a:cs typeface="Calibri" pitchFamily="34" charset="-120"/>
-              </a:rPr>
-              <a:t>2</a:t>
-            </a:r>
-            <a:endParaRPr lang="en-US" sz="1700" dirty="0"/>
-          </a:p>
-        </p:txBody>
-      </p:sp>
-      <p:sp>
-        <p:nvSpPr>
-          <p:cNvPr id="10" name="Text 8"/>
-          <p:cNvSpPr/>
-          <p:nvPr/>
-        </p:nvSpPr>
-        <p:spPr>
-          <a:xfrm>
-            <a:off x="1280160" y="2350008"/>
-            <a:ext cx="10332720" cy="603504"/>
+      <p:pic>
+        <p:nvPicPr>
+          <p:cNvPr id="11" name="Image 1" descr="preencoded.png">    </p:cNvPr>
+          <p:cNvPicPr>
+            <a:picLocks noChangeAspect="1"/>
+          </p:cNvPicPr>
+          <p:nvPr/>
+        </p:nvPicPr>
+        <p:blipFill>
+          <a:blip r:embed="rId2"/>
+          <a:stretch>
+            <a:fillRect/>
+          </a:stretch>
+        </p:blipFill>
+        <p:spPr>
+          <a:xfrm>
+            <a:off x="6797650" y="2271370"/>
+            <a:ext cx="395021" cy="395021"/>
+          </a:xfrm>
+          <a:prstGeom prst="rect">
+            <a:avLst/>
+          </a:prstGeom>
+        </p:spPr>
+      </p:pic>
+      <p:sp>
+        <p:nvSpPr>
+          <p:cNvPr id="12" name="Text 8"/>
+          <p:cNvSpPr/>
+          <p:nvPr/>
+        </p:nvSpPr>
+        <p:spPr>
+          <a:xfrm>
+            <a:off x="7498080" y="2057400"/>
+            <a:ext cx="4069080" cy="822960"/>
           </a:xfrm>
           <a:prstGeom prst="rect">
             <a:avLst/>
@@ -11622,13 +12655,56 @@
           <a:lstStyle/>
           <a:p>
             <a:pPr indent="0" marL="0">
+              <a:buNone/>
+            </a:pPr>
+            <a:r>
+              <a:rPr lang="en-US" sz="1500" b="1" dirty="0">
+                <a:solidFill>
+                  <a:srgbClr val="0B2545"/>
+                </a:solidFill>
+                <a:latin typeface="Calibri" pitchFamily="34" charset="0"/>
+                <a:ea typeface="Calibri" pitchFamily="34" charset="-122"/>
+                <a:cs typeface="Calibri" pitchFamily="34" charset="-120"/>
+              </a:rPr>
+              <a:t>No-code — Instant Apps Data Explorer</a:t>
+            </a:r>
+            <a:endParaRPr lang="en-US" sz="1500" dirty="0"/>
+          </a:p>
+        </p:txBody>
+      </p:sp>
+      <p:sp>
+        <p:nvSpPr>
+          <p:cNvPr id="13" name="Text 9"/>
+          <p:cNvSpPr/>
+          <p:nvPr/>
+        </p:nvSpPr>
+        <p:spPr>
+          <a:xfrm>
+            <a:off x="6583680" y="3017520"/>
+            <a:ext cx="4754880" cy="1554480"/>
+          </a:xfrm>
+          <a:prstGeom prst="rect">
+            <a:avLst/>
+          </a:prstGeom>
+          <a:noFill/>
+          <a:ln/>
+        </p:spPr>
+        <p:txBody>
+          <a:bodyPr wrap="square" lIns="0" tIns="0" rIns="0" bIns="0" rtlCol="0" anchor="ctr"/>
+          <a:lstStyle/>
+          <a:p>
+            <a:pPr marL="342900" indent="-342900">
               <a:lnSpc>
-                <a:spcPts val="1600"/>
+                <a:spcPts val="2000"/>
               </a:lnSpc>
-              <a:buNone/>
-            </a:pPr>
-            <a:r>
-              <a:rPr lang="en-US" sz="1400" dirty="0">
+              <a:spcAft>
+                <a:spcPts val="800"/>
+              </a:spcAft>
+              <a:buSzPct val="100000"/>
+              <a:buChar char="•"/>
+            </a:pPr>
+            <a:r>
+              <a:rPr lang="en-US" sz="1300" dirty="0">
                 <a:solidFill>
                   <a:srgbClr val="1E293B"/>
                 </a:solidFill>
@@ -11636,25 +12712,75 @@
                 <a:ea typeface="Calibri" pitchFamily="34" charset="-122"/>
                 <a:cs typeface="Calibri" pitchFamily="34" charset="-120"/>
               </a:rPr>
-              <a:t>Open ArcGIS Instant Apps from your web map</a:t>
-            </a:r>
-            <a:endParaRPr lang="en-US" sz="1400" dirty="0"/>
-          </a:p>
-        </p:txBody>
-      </p:sp>
-      <p:sp>
-        <p:nvSpPr>
-          <p:cNvPr id="11" name="Shape 9"/>
-          <p:cNvSpPr/>
-          <p:nvPr/>
-        </p:nvSpPr>
-        <p:spPr>
-          <a:xfrm>
-            <a:off x="548640" y="3118104"/>
-            <a:ext cx="530352" cy="530352"/>
-          </a:xfrm>
-          <a:prstGeom prst="ellipse">
-            <a:avLst/>
+              <a:t>Preset template, assistant wired in</a:t>
+            </a:r>
+            <a:endParaRPr lang="en-US" sz="1300" dirty="0"/>
+          </a:p>
+          <a:p>
+            <a:pPr marL="342900" indent="-342900">
+              <a:lnSpc>
+                <a:spcPts val="2000"/>
+              </a:lnSpc>
+              <a:spcAft>
+                <a:spcPts val="800"/>
+              </a:spcAft>
+              <a:buSzPct val="100000"/>
+              <a:buChar char="•"/>
+            </a:pPr>
+            <a:r>
+              <a:rPr lang="en-US" sz="1300" dirty="0">
+                <a:solidFill>
+                  <a:srgbClr val="1E293B"/>
+                </a:solidFill>
+                <a:latin typeface="Calibri" pitchFamily="34" charset="0"/>
+                <a:ea typeface="Calibri" pitchFamily="34" charset="-122"/>
+                <a:cs typeface="Calibri" pitchFamily="34" charset="-120"/>
+              </a:rPr>
+              <a:t>Configure welcome message + sample questions</a:t>
+            </a:r>
+            <a:endParaRPr lang="en-US" sz="1300" dirty="0"/>
+          </a:p>
+          <a:p>
+            <a:pPr marL="342900" indent="-342900">
+              <a:lnSpc>
+                <a:spcPts val="2000"/>
+              </a:lnSpc>
+              <a:spcAft>
+                <a:spcPts val="800"/>
+              </a:spcAft>
+              <a:buSzPct val="100000"/>
+              <a:buChar char="•"/>
+            </a:pPr>
+            <a:r>
+              <a:rPr lang="en-US" sz="1300" dirty="0">
+                <a:solidFill>
+                  <a:srgbClr val="1E293B"/>
+                </a:solidFill>
+                <a:latin typeface="Calibri" pitchFamily="34" charset="0"/>
+                <a:ea typeface="Calibri" pitchFamily="34" charset="-122"/>
+                <a:cs typeface="Calibri" pitchFamily="34" charset="-120"/>
+              </a:rPr>
+              <a:t>Publish &amp; share from ArcGIS Online</a:t>
+            </a:r>
+            <a:endParaRPr lang="en-US" sz="1300" dirty="0"/>
+          </a:p>
+        </p:txBody>
+      </p:sp>
+      <p:sp>
+        <p:nvSpPr>
+          <p:cNvPr id="14" name="Shape 10"/>
+          <p:cNvSpPr/>
+          <p:nvPr/>
+        </p:nvSpPr>
+        <p:spPr>
+          <a:xfrm>
+            <a:off x="502920" y="4937760"/>
+            <a:ext cx="11201400" cy="914400"/>
+          </a:xfrm>
+          <a:prstGeom prst="roundRect">
+            <a:avLst>
+              <a:gd name="adj" fmla="val 8000"/>
+            </a:avLst>
           </a:prstGeom>
           <a:solidFill>
             <a:srgbClr val="0B2545"/>
@@ -11664,53 +12790,14 @@
       </p:sp>
       <p:sp>
         <p:nvSpPr>
-          <p:cNvPr id="12" name="Text 10"/>
-          <p:cNvSpPr/>
-          <p:nvPr/>
-        </p:nvSpPr>
-        <p:spPr>
-          <a:xfrm>
-            <a:off x="548640" y="3118104"/>
-            <a:ext cx="530352" cy="530352"/>
-          </a:xfrm>
-          <a:prstGeom prst="rect">
-            <a:avLst/>
-          </a:prstGeom>
-          <a:noFill/>
-          <a:ln/>
-        </p:spPr>
-        <p:txBody>
-          <a:bodyPr wrap="square" lIns="0" tIns="0" rIns="0" bIns="0" rtlCol="0" anchor="ctr"/>
-          <a:lstStyle/>
-          <a:p>
-            <a:pPr algn="ctr" indent="0" marL="0">
-              <a:buNone/>
-            </a:pPr>
-            <a:r>
-              <a:rPr lang="en-US" sz="1700" b="1" dirty="0">
-                <a:solidFill>
-                  <a:srgbClr val="FFFFFF"/>
-                </a:solidFill>
-                <a:latin typeface="Calibri" pitchFamily="34" charset="0"/>
-                <a:ea typeface="Calibri" pitchFamily="34" charset="-122"/>
-                <a:cs typeface="Calibri" pitchFamily="34" charset="-120"/>
-              </a:rPr>
-              <a:t>3</a:t>
-            </a:r>
-            <a:endParaRPr lang="en-US" sz="1700" dirty="0"/>
-          </a:p>
-        </p:txBody>
-      </p:sp>
-      <p:sp>
-        <p:nvSpPr>
-          <p:cNvPr id="13" name="Text 11"/>
-          <p:cNvSpPr/>
-          <p:nvPr/>
-        </p:nvSpPr>
-        <p:spPr>
-          <a:xfrm>
-            <a:off x="1280160" y="3099816"/>
-            <a:ext cx="10332720" cy="603504"/>
+          <p:cNvPr id="15" name="Text 11"/>
+          <p:cNvSpPr/>
+          <p:nvPr/>
+        </p:nvSpPr>
+        <p:spPr>
+          <a:xfrm>
+            <a:off x="868680" y="4937760"/>
+            <a:ext cx="10515600" cy="914400"/>
           </a:xfrm>
           <a:prstGeom prst="rect">
             <a:avLst/>
@@ -11724,331 +12811,45 @@
           <a:p>
             <a:pPr indent="0" marL="0">
               <a:lnSpc>
-                <a:spcPts val="1600"/>
+                <a:spcPts val="1700"/>
               </a:lnSpc>
               <a:buNone/>
             </a:pPr>
             <a:r>
-              <a:rPr lang="en-US" sz="1400" dirty="0">
-                <a:solidFill>
-                  <a:srgbClr val="1E293B"/>
-                </a:solidFill>
-                <a:latin typeface="Calibri" pitchFamily="34" charset="0"/>
-                <a:ea typeface="Calibri" pitchFamily="34" charset="-122"/>
-                <a:cs typeface="Calibri" pitchFamily="34" charset="-120"/>
-              </a:rPr>
-              <a:t>Choose the Data Explorer (beta) template</a:t>
-            </a:r>
-            <a:endParaRPr lang="en-US" sz="1400" dirty="0"/>
-          </a:p>
-        </p:txBody>
-      </p:sp>
-      <p:sp>
-        <p:nvSpPr>
-          <p:cNvPr id="14" name="Shape 12"/>
-          <p:cNvSpPr/>
-          <p:nvPr/>
-        </p:nvSpPr>
-        <p:spPr>
-          <a:xfrm>
-            <a:off x="548640" y="3867912"/>
-            <a:ext cx="530352" cy="530352"/>
-          </a:xfrm>
-          <a:prstGeom prst="ellipse">
-            <a:avLst/>
-          </a:prstGeom>
-          <a:solidFill>
-            <a:srgbClr val="1C7293"/>
-          </a:solidFill>
-          <a:ln/>
-        </p:spPr>
-      </p:sp>
-      <p:sp>
-        <p:nvSpPr>
-          <p:cNvPr id="15" name="Text 13"/>
-          <p:cNvSpPr/>
-          <p:nvPr/>
-        </p:nvSpPr>
-        <p:spPr>
-          <a:xfrm>
-            <a:off x="548640" y="3867912"/>
-            <a:ext cx="530352" cy="530352"/>
-          </a:xfrm>
-          <a:prstGeom prst="rect">
-            <a:avLst/>
-          </a:prstGeom>
-          <a:noFill/>
-          <a:ln/>
-        </p:spPr>
-        <p:txBody>
-          <a:bodyPr wrap="square" lIns="0" tIns="0" rIns="0" bIns="0" rtlCol="0" anchor="ctr"/>
-          <a:lstStyle/>
-          <a:p>
-            <a:pPr algn="ctr" indent="0" marL="0">
-              <a:buNone/>
-            </a:pPr>
-            <a:r>
-              <a:rPr lang="en-US" sz="1700" b="1" dirty="0">
-                <a:solidFill>
-                  <a:srgbClr val="FFFFFF"/>
-                </a:solidFill>
-                <a:latin typeface="Calibri" pitchFamily="34" charset="0"/>
-                <a:ea typeface="Calibri" pitchFamily="34" charset="-122"/>
-                <a:cs typeface="Calibri" pitchFamily="34" charset="-120"/>
-              </a:rPr>
-              <a:t>4</a:t>
-            </a:r>
-            <a:endParaRPr lang="en-US" sz="1700" dirty="0"/>
-          </a:p>
-        </p:txBody>
-      </p:sp>
-      <p:sp>
-        <p:nvSpPr>
-          <p:cNvPr id="16" name="Text 14"/>
-          <p:cNvSpPr/>
-          <p:nvPr/>
-        </p:nvSpPr>
-        <p:spPr>
-          <a:xfrm>
-            <a:off x="1280160" y="3849624"/>
-            <a:ext cx="10332720" cy="603504"/>
-          </a:xfrm>
-          <a:prstGeom prst="rect">
-            <a:avLst/>
-          </a:prstGeom>
-          <a:noFill/>
-          <a:ln/>
-        </p:spPr>
-        <p:txBody>
-          <a:bodyPr wrap="square" lIns="0" tIns="0" rIns="0" bIns="0" rtlCol="0" anchor="ctr"/>
-          <a:lstStyle/>
-          <a:p>
+              <a:rPr lang="en-US" sz="1350" b="1" dirty="0">
+                <a:solidFill>
+                  <a:srgbClr val="E8A33D"/>
+                </a:solidFill>
+                <a:latin typeface="Calibri" pitchFamily="34" charset="0"/>
+                <a:ea typeface="Calibri" pitchFamily="34" charset="-122"/>
+                <a:cs typeface="Calibri" pitchFamily="34" charset="-120"/>
+              </a:rPr>
+              <a:t>Both build on the same Activity #1 prep:  </a:t>
+            </a:r>
             <a:pPr indent="0" marL="0">
               <a:lnSpc>
-                <a:spcPts val="1600"/>
+                <a:spcPts val="1700"/>
               </a:lnSpc>
               <a:buNone/>
             </a:pPr>
             <a:r>
-              <a:rPr lang="en-US" sz="1400" dirty="0">
-                <a:solidFill>
-                  <a:srgbClr val="1E293B"/>
-                </a:solidFill>
-                <a:latin typeface="Calibri" pitchFamily="34" charset="0"/>
-                <a:ea typeface="Calibri" pitchFamily="34" charset="-122"/>
-                <a:cs typeface="Calibri" pitchFamily="34" charset="-120"/>
-              </a:rPr>
-              <a:t>Configure: welcome message, up to 5 sample questions, a help panel</a:t>
-            </a:r>
-            <a:endParaRPr lang="en-US" sz="1400" dirty="0"/>
-          </a:p>
-        </p:txBody>
-      </p:sp>
-      <p:sp>
-        <p:nvSpPr>
-          <p:cNvPr id="17" name="Shape 15"/>
-          <p:cNvSpPr/>
-          <p:nvPr/>
-        </p:nvSpPr>
-        <p:spPr>
-          <a:xfrm>
-            <a:off x="548640" y="4617720"/>
-            <a:ext cx="530352" cy="530352"/>
-          </a:xfrm>
-          <a:prstGeom prst="ellipse">
-            <a:avLst/>
-          </a:prstGeom>
-          <a:solidFill>
-            <a:srgbClr val="0B2545"/>
-          </a:solidFill>
-          <a:ln/>
-        </p:spPr>
-      </p:sp>
-      <p:sp>
-        <p:nvSpPr>
-          <p:cNvPr id="18" name="Text 16"/>
-          <p:cNvSpPr/>
-          <p:nvPr/>
-        </p:nvSpPr>
-        <p:spPr>
-          <a:xfrm>
-            <a:off x="548640" y="4617720"/>
-            <a:ext cx="530352" cy="530352"/>
-          </a:xfrm>
-          <a:prstGeom prst="rect">
-            <a:avLst/>
-          </a:prstGeom>
-          <a:noFill/>
-          <a:ln/>
-        </p:spPr>
-        <p:txBody>
-          <a:bodyPr wrap="square" lIns="0" tIns="0" rIns="0" bIns="0" rtlCol="0" anchor="ctr"/>
-          <a:lstStyle/>
-          <a:p>
-            <a:pPr algn="ctr" indent="0" marL="0">
-              <a:buNone/>
-            </a:pPr>
-            <a:r>
-              <a:rPr lang="en-US" sz="1700" b="1" dirty="0">
-                <a:solidFill>
-                  <a:srgbClr val="FFFFFF"/>
-                </a:solidFill>
-                <a:latin typeface="Calibri" pitchFamily="34" charset="0"/>
-                <a:ea typeface="Calibri" pitchFamily="34" charset="-122"/>
-                <a:cs typeface="Calibri" pitchFamily="34" charset="-120"/>
-              </a:rPr>
-              <a:t>5</a:t>
-            </a:r>
-            <a:endParaRPr lang="en-US" sz="1700" dirty="0"/>
-          </a:p>
-        </p:txBody>
-      </p:sp>
-      <p:sp>
-        <p:nvSpPr>
-          <p:cNvPr id="19" name="Text 17"/>
-          <p:cNvSpPr/>
-          <p:nvPr/>
-        </p:nvSpPr>
-        <p:spPr>
-          <a:xfrm>
-            <a:off x="1280160" y="4599432"/>
-            <a:ext cx="10332720" cy="603504"/>
-          </a:xfrm>
-          <a:prstGeom prst="rect">
-            <a:avLst/>
-          </a:prstGeom>
-          <a:noFill/>
-          <a:ln/>
-        </p:spPr>
-        <p:txBody>
-          <a:bodyPr wrap="square" lIns="0" tIns="0" rIns="0" bIns="0" rtlCol="0" anchor="ctr"/>
-          <a:lstStyle/>
-          <a:p>
-            <a:pPr indent="0" marL="0">
-              <a:lnSpc>
-                <a:spcPts val="1600"/>
-              </a:lnSpc>
-              <a:buNone/>
-            </a:pPr>
-            <a:r>
-              <a:rPr lang="en-US" sz="1400" dirty="0">
-                <a:solidFill>
-                  <a:srgbClr val="1E293B"/>
-                </a:solidFill>
-                <a:latin typeface="Calibri" pitchFamily="34" charset="0"/>
-                <a:ea typeface="Calibri" pitchFamily="34" charset="-122"/>
-                <a:cs typeface="Calibri" pitchFamily="34" charset="-120"/>
-              </a:rPr>
-              <a:t>Preview (auto-saves); check tablet &amp; mobile via the Views menu</a:t>
-            </a:r>
-            <a:endParaRPr lang="en-US" sz="1400" dirty="0"/>
-          </a:p>
-        </p:txBody>
-      </p:sp>
-      <p:sp>
-        <p:nvSpPr>
-          <p:cNvPr id="20" name="Shape 18"/>
-          <p:cNvSpPr/>
-          <p:nvPr/>
-        </p:nvSpPr>
-        <p:spPr>
-          <a:xfrm>
-            <a:off x="548640" y="5367528"/>
-            <a:ext cx="530352" cy="530352"/>
-          </a:xfrm>
-          <a:prstGeom prst="ellipse">
-            <a:avLst/>
-          </a:prstGeom>
-          <a:solidFill>
-            <a:srgbClr val="1C7293"/>
-          </a:solidFill>
-          <a:ln/>
-        </p:spPr>
-      </p:sp>
-      <p:sp>
-        <p:nvSpPr>
-          <p:cNvPr id="21" name="Text 19"/>
-          <p:cNvSpPr/>
-          <p:nvPr/>
-        </p:nvSpPr>
-        <p:spPr>
-          <a:xfrm>
-            <a:off x="548640" y="5367528"/>
-            <a:ext cx="530352" cy="530352"/>
-          </a:xfrm>
-          <a:prstGeom prst="rect">
-            <a:avLst/>
-          </a:prstGeom>
-          <a:noFill/>
-          <a:ln/>
-        </p:spPr>
-        <p:txBody>
-          <a:bodyPr wrap="square" lIns="0" tIns="0" rIns="0" bIns="0" rtlCol="0" anchor="ctr"/>
-          <a:lstStyle/>
-          <a:p>
-            <a:pPr algn="ctr" indent="0" marL="0">
-              <a:buNone/>
-            </a:pPr>
-            <a:r>
-              <a:rPr lang="en-US" sz="1700" b="1" dirty="0">
-                <a:solidFill>
-                  <a:srgbClr val="FFFFFF"/>
-                </a:solidFill>
-                <a:latin typeface="Calibri" pitchFamily="34" charset="0"/>
-                <a:ea typeface="Calibri" pitchFamily="34" charset="-122"/>
-                <a:cs typeface="Calibri" pitchFamily="34" charset="-120"/>
-              </a:rPr>
-              <a:t>6</a:t>
-            </a:r>
-            <a:endParaRPr lang="en-US" sz="1700" dirty="0"/>
-          </a:p>
-        </p:txBody>
-      </p:sp>
-      <p:sp>
-        <p:nvSpPr>
-          <p:cNvPr id="22" name="Text 20"/>
-          <p:cNvSpPr/>
-          <p:nvPr/>
-        </p:nvSpPr>
-        <p:spPr>
-          <a:xfrm>
-            <a:off x="1280160" y="5349240"/>
-            <a:ext cx="10332720" cy="603504"/>
-          </a:xfrm>
-          <a:prstGeom prst="rect">
-            <a:avLst/>
-          </a:prstGeom>
-          <a:noFill/>
-          <a:ln/>
-        </p:spPr>
-        <p:txBody>
-          <a:bodyPr wrap="square" lIns="0" tIns="0" rIns="0" bIns="0" rtlCol="0" anchor="ctr"/>
-          <a:lstStyle/>
-          <a:p>
-            <a:pPr indent="0" marL="0">
-              <a:lnSpc>
-                <a:spcPts val="1600"/>
-              </a:lnSpc>
-              <a:buNone/>
-            </a:pPr>
-            <a:r>
-              <a:rPr lang="en-US" sz="1400" dirty="0">
-                <a:solidFill>
-                  <a:srgbClr val="1E293B"/>
-                </a:solidFill>
-                <a:latin typeface="Calibri" pitchFamily="34" charset="0"/>
-                <a:ea typeface="Calibri" pitchFamily="34" charset="-122"/>
-                <a:cs typeface="Calibri" pitchFamily="34" charset="-120"/>
-              </a:rPr>
-              <a:t>Publish, then share (owner / organization / everyone) → Launch</a:t>
-            </a:r>
-            <a:endParaRPr lang="en-US" sz="1400" dirty="0"/>
-          </a:p>
-        </p:txBody>
-      </p:sp>
-      <p:sp>
-        <p:nvSpPr>
-          <p:cNvPr id="23" name="Text 21"/>
+              <a:rPr lang="en-US" sz="1350" dirty="0">
+                <a:solidFill>
+                  <a:srgbClr val="C9D6E5"/>
+                </a:solidFill>
+                <a:latin typeface="Calibri" pitchFamily="34" charset="0"/>
+                <a:ea typeface="Calibri" pitchFamily="34" charset="-122"/>
+                <a:cs typeface="Calibri" pitchFamily="34" charset="-120"/>
+              </a:rPr>
+              <a:t>field metadata → vector embeddings. Going no-code does not skip the GIS work.</a:t>
+            </a:r>
+            <a:endParaRPr lang="en-US" sz="1350" dirty="0"/>
+          </a:p>
+        </p:txBody>
+      </p:sp>
+      <p:sp>
+        <p:nvSpPr>
+          <p:cNvPr id="16" name="Text 12"/>
           <p:cNvSpPr/>
           <p:nvPr/>
         </p:nvSpPr>
@@ -12087,7 +12888,7 @@
       </p:sp>
       <p:sp>
         <p:nvSpPr>
-          <p:cNvPr id="24" name="Text 22"/>
+          <p:cNvPr id="17" name="Text 13"/>
           <p:cNvSpPr/>
           <p:nvPr/>
         </p:nvSpPr>
